--- a/Présentation-ASI.pptx
+++ b/Présentation-ASI.pptx
@@ -5,41 +5,44 @@
     <p:sldMasterId id="2147483666" r:id="rId4"/>
   </p:sldMasterIdLst>
   <p:notesMasterIdLst>
-    <p:notesMasterId r:id="rId26"/>
+    <p:notesMasterId r:id="rId27"/>
   </p:notesMasterIdLst>
   <p:handoutMasterIdLst>
-    <p:handoutMasterId r:id="rId27"/>
+    <p:handoutMasterId r:id="rId28"/>
   </p:handoutMasterIdLst>
   <p:sldIdLst>
     <p:sldId id="256" r:id="rId5"/>
-    <p:sldId id="277" r:id="rId6"/>
-    <p:sldId id="261" r:id="rId7"/>
+    <p:sldId id="295" r:id="rId6"/>
+    <p:sldId id="277" r:id="rId7"/>
     <p:sldId id="262" r:id="rId8"/>
     <p:sldId id="289" r:id="rId9"/>
     <p:sldId id="264" r:id="rId10"/>
-    <p:sldId id="258" r:id="rId11"/>
-    <p:sldId id="278" r:id="rId12"/>
-    <p:sldId id="266" r:id="rId13"/>
-    <p:sldId id="292" r:id="rId14"/>
-    <p:sldId id="268" r:id="rId15"/>
-    <p:sldId id="280" r:id="rId16"/>
-    <p:sldId id="270" r:id="rId17"/>
-    <p:sldId id="293" r:id="rId18"/>
-    <p:sldId id="294" r:id="rId19"/>
-    <p:sldId id="260" r:id="rId20"/>
-    <p:sldId id="282" r:id="rId21"/>
-    <p:sldId id="283" r:id="rId22"/>
-    <p:sldId id="290" r:id="rId23"/>
-    <p:sldId id="275" r:id="rId24"/>
-    <p:sldId id="276" r:id="rId25"/>
+    <p:sldId id="261" r:id="rId11"/>
+    <p:sldId id="258" r:id="rId12"/>
+    <p:sldId id="278" r:id="rId13"/>
+    <p:sldId id="266" r:id="rId14"/>
+    <p:sldId id="292" r:id="rId15"/>
+    <p:sldId id="268" r:id="rId16"/>
+    <p:sldId id="280" r:id="rId17"/>
+    <p:sldId id="270" r:id="rId18"/>
+    <p:sldId id="293" r:id="rId19"/>
+    <p:sldId id="294" r:id="rId20"/>
+    <p:sldId id="260" r:id="rId21"/>
+    <p:sldId id="282" r:id="rId22"/>
+    <p:sldId id="283" r:id="rId23"/>
+    <p:sldId id="290" r:id="rId24"/>
+    <p:sldId id="275" r:id="rId25"/>
+    <p:sldId id="276" r:id="rId26"/>
   </p:sldIdLst>
   <p:sldSz cx="12192000" cy="6858000"/>
   <p:notesSz cx="6858000" cy="9144000"/>
   <p:embeddedFontLst>
     <p:embeddedFont>
       <p:font typeface="Tenorite" panose="00000500000000000000" pitchFamily="2" charset="0"/>
-      <p:regular r:id="rId28"/>
-      <p:bold r:id="rId29"/>
+      <p:regular r:id="rId29"/>
+      <p:bold r:id="rId30"/>
+      <p:italic r:id="rId31"/>
+      <p:boldItalic r:id="rId32"/>
     </p:embeddedFont>
   </p:embeddedFontLst>
   <p:defaultTextStyle>
@@ -182,7 +185,7 @@
 <file path=ppt/charts/chart1.xml><?xml version="1.0" encoding="utf-8"?>
 <c:chartSpace xmlns:c="http://schemas.openxmlformats.org/drawingml/2006/chart" xmlns:a="http://schemas.openxmlformats.org/drawingml/2006/main" xmlns:r="http://schemas.openxmlformats.org/officeDocument/2006/relationships" xmlns:c16r2="http://schemas.microsoft.com/office/drawing/2015/06/chart">
   <c:date1904 val="0"/>
-  <c:lang val="en-US"/>
+  <c:lang val="fr-FR"/>
   <c:roundedCorners val="0"/>
   <mc:AlternateContent xmlns:mc="http://schemas.openxmlformats.org/markup-compatibility/2006">
     <mc:Choice xmlns:c14="http://schemas.microsoft.com/office/drawing/2007/8/2/chart" Requires="c14">
@@ -439,7 +442,7 @@
 <file path=ppt/charts/chart2.xml><?xml version="1.0" encoding="utf-8"?>
 <c:chartSpace xmlns:c="http://schemas.openxmlformats.org/drawingml/2006/chart" xmlns:a="http://schemas.openxmlformats.org/drawingml/2006/main" xmlns:r="http://schemas.openxmlformats.org/officeDocument/2006/relationships" xmlns:c16r2="http://schemas.microsoft.com/office/drawing/2015/06/chart">
   <c:date1904 val="0"/>
-  <c:lang val="en-US"/>
+  <c:lang val="fr-FR"/>
   <c:roundedCorners val="0"/>
   <mc:AlternateContent xmlns:mc="http://schemas.openxmlformats.org/markup-compatibility/2006">
     <mc:Choice xmlns:c14="http://schemas.microsoft.com/office/drawing/2007/8/2/chart" Requires="c14">
@@ -652,7 +655,7 @@
 <file path=ppt/charts/chart3.xml><?xml version="1.0" encoding="utf-8"?>
 <c:chartSpace xmlns:c="http://schemas.openxmlformats.org/drawingml/2006/chart" xmlns:a="http://schemas.openxmlformats.org/drawingml/2006/main" xmlns:r="http://schemas.openxmlformats.org/officeDocument/2006/relationships" xmlns:c16r2="http://schemas.microsoft.com/office/drawing/2015/06/chart">
   <c:date1904 val="0"/>
-  <c:lang val="en-US"/>
+  <c:lang val="fr-FR"/>
   <c:roundedCorners val="0"/>
   <mc:AlternateContent xmlns:mc="http://schemas.openxmlformats.org/markup-compatibility/2006">
     <mc:Choice xmlns:c14="http://schemas.microsoft.com/office/drawing/2007/8/2/chart" Requires="c14">
@@ -870,7 +873,7 @@
 <file path=ppt/charts/chart4.xml><?xml version="1.0" encoding="utf-8"?>
 <c:chartSpace xmlns:c="http://schemas.openxmlformats.org/drawingml/2006/chart" xmlns:a="http://schemas.openxmlformats.org/drawingml/2006/main" xmlns:r="http://schemas.openxmlformats.org/officeDocument/2006/relationships" xmlns:c16r2="http://schemas.microsoft.com/office/drawing/2015/06/chart">
   <c:date1904 val="0"/>
-  <c:lang val="en-US"/>
+  <c:lang val="fr-FR"/>
   <c:roundedCorners val="0"/>
   <mc:AlternateContent xmlns:mc="http://schemas.openxmlformats.org/markup-compatibility/2006">
     <mc:Choice xmlns:c14="http://schemas.microsoft.com/office/drawing/2007/8/2/chart" Requires="c14">
@@ -1083,7 +1086,7 @@
 <file path=ppt/charts/chart5.xml><?xml version="1.0" encoding="utf-8"?>
 <c:chartSpace xmlns:c="http://schemas.openxmlformats.org/drawingml/2006/chart" xmlns:a="http://schemas.openxmlformats.org/drawingml/2006/main" xmlns:r="http://schemas.openxmlformats.org/officeDocument/2006/relationships" xmlns:c16r2="http://schemas.microsoft.com/office/drawing/2015/06/chart">
   <c:date1904 val="0"/>
-  <c:lang val="en-US"/>
+  <c:lang val="fr-FR"/>
   <c:roundedCorners val="0"/>
   <mc:AlternateContent xmlns:mc="http://schemas.openxmlformats.org/markup-compatibility/2006">
     <mc:Choice xmlns:c14="http://schemas.microsoft.com/office/drawing/2007/8/2/chart" Requires="c14">
@@ -1930,7 +1933,7 @@
           <a:p>
             <a:fld id="{F352A77B-D33C-49B3-A83C-450AA2ED72B3}" type="datetimeFigureOut">
               <a:rPr lang="en-US" smtClean="0"/>
-              <a:t>5/17/2026</a:t>
+              <a:t>5/18/2026</a:t>
             </a:fld>
             <a:endParaRPr lang="en-US" dirty="0"/>
           </a:p>
@@ -2008,7 +2011,7 @@
           <a:p>
             <a:fld id="{4BF9A36D-7FAC-478F-9944-F324014F6FD1}" type="slidenum">
               <a:rPr lang="en-US" smtClean="0"/>
-              <a:t>‹#›</a:t>
+              <a:t>‹N°›</a:t>
             </a:fld>
             <a:endParaRPr lang="en-US" dirty="0"/>
           </a:p>
@@ -2107,7 +2110,7 @@
           <a:p>
             <a:fld id="{E38D8F9A-F5CB-4EF8-A859-ED5E107B9763}" type="datetimeFigureOut">
               <a:rPr lang="en-US" smtClean="0"/>
-              <a:t>5/17/2026</a:t>
+              <a:t>5/18/2026</a:t>
             </a:fld>
             <a:endParaRPr lang="en-US" dirty="0"/>
           </a:p>
@@ -2265,7 +2268,7 @@
           <a:p>
             <a:fld id="{D4B9A9E5-4F7F-4A7D-9DE1-899232329269}" type="slidenum">
               <a:rPr lang="en-US" smtClean="0"/>
-              <a:t>‹#›</a:t>
+              <a:t>‹N°›</a:t>
             </a:fld>
             <a:endParaRPr lang="en-US" dirty="0"/>
           </a:p>
@@ -3686,7 +3689,7 @@
           <a:p>
             <a:fld id="{B5CEABB6-07DC-46E8-9B57-56EC44A396E5}" type="slidenum">
               <a:rPr lang="en-US" smtClean="0"/>
-              <a:t>‹#›</a:t>
+              <a:t>‹N°›</a:t>
             </a:fld>
             <a:endParaRPr lang="en-US" dirty="0"/>
           </a:p>
@@ -4315,7 +4318,7 @@
           <a:p>
             <a:fld id="{B5CEABB6-07DC-46E8-9B57-56EC44A396E5}" type="slidenum">
               <a:rPr lang="en-US" smtClean="0"/>
-              <a:t>‹#›</a:t>
+              <a:t>‹N°›</a:t>
             </a:fld>
             <a:endParaRPr lang="en-US" dirty="0"/>
           </a:p>
@@ -5188,7 +5191,7 @@
           <a:p>
             <a:fld id="{B5CEABB6-07DC-46E8-9B57-56EC44A396E5}" type="slidenum">
               <a:rPr lang="en-US" smtClean="0"/>
-              <a:t>‹#›</a:t>
+              <a:t>‹N°›</a:t>
             </a:fld>
             <a:endParaRPr lang="en-US" dirty="0"/>
           </a:p>
@@ -5769,7 +5772,7 @@
           <a:p>
             <a:fld id="{B5CEABB6-07DC-46E8-9B57-56EC44A396E5}" type="slidenum">
               <a:rPr lang="en-US" smtClean="0"/>
-              <a:t>‹#›</a:t>
+              <a:t>‹N°›</a:t>
             </a:fld>
             <a:endParaRPr lang="en-US" dirty="0"/>
           </a:p>
@@ -6214,7 +6217,7 @@
           <a:p>
             <a:fld id="{B5CEABB6-07DC-46E8-9B57-56EC44A396E5}" type="slidenum">
               <a:rPr lang="en-US" smtClean="0"/>
-              <a:t>‹#›</a:t>
+              <a:t>‹N°›</a:t>
             </a:fld>
             <a:endParaRPr lang="en-US" dirty="0"/>
           </a:p>
@@ -7763,7 +7766,7 @@
           <a:p>
             <a:fld id="{B5CEABB6-07DC-46E8-9B57-56EC44A396E5}" type="slidenum">
               <a:rPr lang="en-US" noProof="0" smtClean="0"/>
-              <a:t>‹#›</a:t>
+              <a:t>‹N°›</a:t>
             </a:fld>
             <a:endParaRPr lang="en-US" noProof="0" dirty="0"/>
           </a:p>
@@ -8029,7 +8032,7 @@
           <a:p>
             <a:fld id="{B5CEABB6-07DC-46E8-9B57-56EC44A396E5}" type="slidenum">
               <a:rPr lang="en-US" smtClean="0"/>
-              <a:t>‹#›</a:t>
+              <a:t>‹N°›</a:t>
             </a:fld>
             <a:endParaRPr lang="en-US" dirty="0"/>
           </a:p>
@@ -9165,7 +9168,7 @@
           <a:p>
             <a:fld id="{B5CEABB6-07DC-46E8-9B57-56EC44A396E5}" type="slidenum">
               <a:rPr lang="en-US" smtClean="0"/>
-              <a:t>‹#›</a:t>
+              <a:t>‹N°›</a:t>
             </a:fld>
             <a:endParaRPr lang="en-US" dirty="0"/>
           </a:p>
@@ -11250,7 +11253,7 @@
           <a:p>
             <a:fld id="{B5CEABB6-07DC-46E8-9B57-56EC44A396E5}" type="slidenum">
               <a:rPr lang="en-US" smtClean="0"/>
-              <a:t>‹#›</a:t>
+              <a:t>‹N°›</a:t>
             </a:fld>
             <a:endParaRPr lang="en-US" dirty="0"/>
           </a:p>
@@ -12825,7 +12828,7 @@
           <a:p>
             <a:fld id="{B5CEABB6-07DC-46E8-9B57-56EC44A396E5}" type="slidenum">
               <a:rPr lang="en-US" smtClean="0"/>
-              <a:t>‹#›</a:t>
+              <a:t>‹N°›</a:t>
             </a:fld>
             <a:endParaRPr lang="en-US" dirty="0"/>
           </a:p>
@@ -13206,7 +13209,7 @@
           <a:p>
             <a:fld id="{B5CEABB6-07DC-46E8-9B57-56EC44A396E5}" type="slidenum">
               <a:rPr lang="en-US" smtClean="0"/>
-              <a:t>‹#›</a:t>
+              <a:t>‹N°›</a:t>
             </a:fld>
             <a:endParaRPr lang="en-US" dirty="0"/>
           </a:p>
@@ -13618,7 +13621,7 @@
           <a:p>
             <a:fld id="{B5CEABB6-07DC-46E8-9B57-56EC44A396E5}" type="slidenum">
               <a:rPr lang="en-US" smtClean="0"/>
-              <a:t>‹#›</a:t>
+              <a:t>‹N°›</a:t>
             </a:fld>
             <a:endParaRPr lang="en-US" dirty="0"/>
           </a:p>
@@ -13943,7 +13946,7 @@
           <a:p>
             <a:fld id="{B5CEABB6-07DC-46E8-9B57-56EC44A396E5}" type="slidenum">
               <a:rPr lang="en-US" smtClean="0"/>
-              <a:t>‹#›</a:t>
+              <a:t>‹N°›</a:t>
             </a:fld>
             <a:endParaRPr lang="en-US" dirty="0"/>
           </a:p>
@@ -14804,7 +14807,7 @@
           <a:p>
             <a:fld id="{B5CEABB6-07DC-46E8-9B57-56EC44A396E5}" type="slidenum">
               <a:rPr lang="en-US" smtClean="0"/>
-              <a:t>‹#›</a:t>
+              <a:t>‹N°›</a:t>
             </a:fld>
             <a:endParaRPr lang="en-US" dirty="0"/>
           </a:p>
@@ -15415,7 +15418,7 @@
           <a:p>
             <a:fld id="{B5CEABB6-07DC-46E8-9B57-56EC44A396E5}" type="slidenum">
               <a:rPr lang="en-US" smtClean="0"/>
-              <a:t>‹#›</a:t>
+              <a:t>‹N°›</a:t>
             </a:fld>
             <a:endParaRPr lang="en-US" dirty="0"/>
           </a:p>
@@ -16187,7 +16190,7 @@
             <a:fld id="{B5CEABB6-07DC-46E8-9B57-56EC44A396E5}" type="slidenum">
               <a:rPr lang="en-US" smtClean="0"/>
               <a:pPr/>
-              <a:t>‹#›</a:t>
+              <a:t>‹N°›</a:t>
             </a:fld>
             <a:endParaRPr lang="en-US" dirty="0"/>
           </a:p>
@@ -16641,7 +16644,7 @@
           <a:p>
             <a:fld id="{B5CEABB6-07DC-46E8-9B57-56EC44A396E5}" type="slidenum">
               <a:rPr lang="en-US" smtClean="0"/>
-              <a:t>‹#›</a:t>
+              <a:t>‹N°›</a:t>
             </a:fld>
             <a:endParaRPr lang="en-US" dirty="0"/>
           </a:p>
@@ -17341,7 +17344,7 @@
             <a:fld id="{B5CEABB6-07DC-46E8-9B57-56EC44A396E5}" type="slidenum">
               <a:rPr lang="en-US" smtClean="0"/>
               <a:pPr/>
-              <a:t>‹#›</a:t>
+              <a:t>‹N°›</a:t>
             </a:fld>
             <a:endParaRPr lang="en-US" dirty="0"/>
           </a:p>
@@ -18185,7 +18188,7 @@
           <a:p>
             <a:fld id="{B5CEABB6-07DC-46E8-9B57-56EC44A396E5}" type="slidenum">
               <a:rPr lang="en-US" smtClean="0"/>
-              <a:t>‹#›</a:t>
+              <a:t>‹N°›</a:t>
             </a:fld>
             <a:endParaRPr lang="en-US" dirty="0"/>
           </a:p>
@@ -18562,7 +18565,7 @@
             <a:fld id="{B5CEABB6-07DC-46E8-9B57-56EC44A396E5}" type="slidenum">
               <a:rPr lang="en-US" smtClean="0"/>
               <a:pPr/>
-              <a:t>‹#›</a:t>
+              <a:t>‹N°›</a:t>
             </a:fld>
             <a:endParaRPr lang="en-US" dirty="0"/>
           </a:p>
@@ -18934,16 +18937,45 @@
             <p:ph type="title"/>
           </p:nvPr>
         </p:nvSpPr>
-        <p:spPr/>
+        <p:spPr>
+          <a:xfrm>
+            <a:off x="507577" y="1950243"/>
+            <a:ext cx="10515600" cy="1325563"/>
+          </a:xfrm>
+        </p:spPr>
         <p:txBody>
           <a:bodyPr/>
           <a:lstStyle/>
           <a:p>
-            <a:r>
-              <a:rPr lang="fr-FR" b="1" dirty="0"/>
-              <a:t>FACULTÉ DES SCIENCES ET DES TECHNOLOGIES (FST)</a:t>
-            </a:r>
-            <a:endParaRPr lang="en-US" b="1" dirty="0"/>
+            <a:pPr algn="ctr"/>
+            <a:r>
+              <a:rPr lang="fr-FR" b="1" dirty="0">
+                <a:solidFill>
+                  <a:srgbClr val="0070C0"/>
+                </a:solidFill>
+              </a:rPr>
+              <a:t>FACULTÉ DES SCIENCES ET DES TECHNOLOGIES </a:t>
+            </a:r>
+            <a:br>
+              <a:rPr lang="fr-FR" b="1" dirty="0">
+                <a:solidFill>
+                  <a:srgbClr val="0070C0"/>
+                </a:solidFill>
+              </a:rPr>
+            </a:br>
+            <a:r>
+              <a:rPr lang="fr-FR" b="1" dirty="0">
+                <a:solidFill>
+                  <a:srgbClr val="0070C0"/>
+                </a:solidFill>
+              </a:rPr>
+              <a:t>(FST)</a:t>
+            </a:r>
+            <a:endParaRPr lang="en-US" b="1" dirty="0">
+              <a:solidFill>
+                <a:srgbClr val="0070C0"/>
+              </a:solidFill>
+            </a:endParaRPr>
           </a:p>
         </p:txBody>
       </p:sp>
@@ -18965,21 +18997,21 @@
         </p:nvSpPr>
         <p:spPr>
           <a:xfrm>
-            <a:off x="5289755" y="2454966"/>
-            <a:ext cx="6312310" cy="1967947"/>
+            <a:off x="4495110" y="3974602"/>
+            <a:ext cx="6312310" cy="999162"/>
           </a:xfrm>
         </p:spPr>
         <p:txBody>
           <a:bodyPr>
-            <a:normAutofit/>
+            <a:normAutofit fontScale="47500" lnSpcReduction="20000"/>
           </a:bodyPr>
           <a:lstStyle/>
           <a:p>
-            <a:pPr marL="0" indent="0">
+            <a:pPr marL="0" indent="0" algn="ctr">
               <a:buNone/>
             </a:pPr>
             <a:r>
-              <a:rPr lang="fr-FR" b="1" dirty="0">
+              <a:rPr lang="fr-FR" sz="5800" b="1" dirty="0">
                 <a:solidFill>
                   <a:schemeClr val="tx1"/>
                 </a:solidFill>
@@ -18987,21 +19019,21 @@
               <a:t>Durcissement d’un serveur </a:t>
             </a:r>
             <a:r>
-              <a:rPr lang="fr-FR" b="1" dirty="0" err="1">
+              <a:rPr lang="fr-FR" sz="5800" b="1" dirty="0" err="1">
                 <a:solidFill>
                   <a:schemeClr val="tx1"/>
                 </a:solidFill>
               </a:rPr>
-              <a:t>openssh</a:t>
-            </a:r>
-            <a:endParaRPr lang="en-US" b="1" dirty="0">
+              <a:t>openSSH</a:t>
+            </a:r>
+            <a:endParaRPr lang="en-US" sz="5800" b="1" dirty="0">
               <a:solidFill>
                 <a:schemeClr val="tx1"/>
               </a:solidFill>
             </a:endParaRPr>
           </a:p>
           <a:p>
-            <a:pPr marL="0" indent="0">
+            <a:pPr marL="0" indent="0" algn="ctr">
               <a:buNone/>
             </a:pPr>
             <a:r>
@@ -19033,7 +19065,7 @@
         </p:nvSpPr>
         <p:spPr>
           <a:xfrm>
-            <a:off x="838200" y="2244868"/>
+            <a:off x="951216" y="3275806"/>
             <a:ext cx="3147332" cy="306388"/>
           </a:xfrm>
         </p:spPr>
@@ -19078,8 +19110,8 @@
         </p:nvSpPr>
         <p:spPr>
           <a:xfrm>
-            <a:off x="838201" y="2732520"/>
-            <a:ext cx="2907890" cy="3095625"/>
+            <a:off x="1070937" y="3611240"/>
+            <a:ext cx="2907890" cy="1284676"/>
           </a:xfrm>
         </p:spPr>
         <p:txBody>
@@ -19161,7 +19193,7 @@
         </p:nvSpPr>
         <p:spPr>
           <a:xfrm>
-            <a:off x="9320981" y="4827639"/>
+            <a:off x="9156594" y="5700943"/>
             <a:ext cx="2359742" cy="747251"/>
           </a:xfrm>
         </p:spPr>
@@ -19179,10 +19211,10 @@
       </p:sp>
       <p:pic>
         <p:nvPicPr>
-          <p:cNvPr id="17" name="Picture 16">
-            <a:extLst>
-              <a:ext uri="{FF2B5EF4-FFF2-40B4-BE49-F238E27FC236}">
-                <a16:creationId xmlns:a16="http://schemas.microsoft.com/office/drawing/2014/main" id="{1DD961CA-C80C-2A7D-B8BE-728615AF0743}"/>
+          <p:cNvPr id="5" name="Image 4">
+            <a:extLst>
+              <a:ext uri="{FF2B5EF4-FFF2-40B4-BE49-F238E27FC236}">
+                <a16:creationId xmlns:a16="http://schemas.microsoft.com/office/drawing/2014/main" id="{E8FBC112-7DAC-751D-344A-F46E7626BB02}"/>
               </a:ext>
             </a:extLst>
           </p:cNvPr>
@@ -19199,14 +19231,502 @@
         </p:blipFill>
         <p:spPr>
           <a:xfrm>
-            <a:off x="10028908" y="5496223"/>
-            <a:ext cx="1868129" cy="747251"/>
+            <a:off x="3154166" y="75001"/>
+            <a:ext cx="5775200" cy="2041084"/>
           </a:xfrm>
           <a:prstGeom prst="rect">
             <a:avLst/>
           </a:prstGeom>
         </p:spPr>
       </p:pic>
+      <p:cxnSp>
+        <p:nvCxnSpPr>
+          <p:cNvPr id="7" name="Connecteur droit 6">
+            <a:extLst>
+              <a:ext uri="{FF2B5EF4-FFF2-40B4-BE49-F238E27FC236}">
+                <a16:creationId xmlns:a16="http://schemas.microsoft.com/office/drawing/2014/main" id="{6D456DAD-11A0-498C-1E50-56F7C6C86B9B}"/>
+              </a:ext>
+            </a:extLst>
+          </p:cNvPr>
+          <p:cNvCxnSpPr>
+            <a:cxnSpLocks/>
+          </p:cNvCxnSpPr>
+          <p:nvPr/>
+        </p:nvCxnSpPr>
+        <p:spPr>
+          <a:xfrm>
+            <a:off x="4098548" y="3429000"/>
+            <a:ext cx="0" cy="2458286"/>
+          </a:xfrm>
+          <a:prstGeom prst="line">
+            <a:avLst/>
+          </a:prstGeom>
+          <a:ln w="38100">
+            <a:solidFill>
+              <a:srgbClr val="FF0000"/>
+            </a:solidFill>
+          </a:ln>
+        </p:spPr>
+        <p:style>
+          <a:lnRef idx="1">
+            <a:schemeClr val="accent1"/>
+          </a:lnRef>
+          <a:fillRef idx="0">
+            <a:schemeClr val="accent1"/>
+          </a:fillRef>
+          <a:effectRef idx="0">
+            <a:schemeClr val="accent1"/>
+          </a:effectRef>
+          <a:fontRef idx="minor">
+            <a:schemeClr val="tx1"/>
+          </a:fontRef>
+        </p:style>
+      </p:cxnSp>
+      <p:sp>
+        <p:nvSpPr>
+          <p:cNvPr id="9" name="Text Placeholder 12">
+            <a:extLst>
+              <a:ext uri="{FF2B5EF4-FFF2-40B4-BE49-F238E27FC236}">
+                <a16:creationId xmlns:a16="http://schemas.microsoft.com/office/drawing/2014/main" id="{B7C647CF-A0CF-5713-63E0-CC0FAACE2904}"/>
+              </a:ext>
+            </a:extLst>
+          </p:cNvPr>
+          <p:cNvSpPr txBox="1">
+            <a:spLocks/>
+          </p:cNvSpPr>
+          <p:nvPr/>
+        </p:nvSpPr>
+        <p:spPr>
+          <a:xfrm>
+            <a:off x="951216" y="4973764"/>
+            <a:ext cx="3147332" cy="306388"/>
+          </a:xfrm>
+          <a:prstGeom prst="rect">
+            <a:avLst/>
+          </a:prstGeom>
+        </p:spPr>
+        <p:txBody>
+          <a:bodyPr vert="horz" lIns="91440" tIns="45720" rIns="91440" bIns="45720" rtlCol="0">
+            <a:noAutofit/>
+          </a:bodyPr>
+          <a:lstStyle>
+            <a:lvl1pPr marL="0" indent="0" algn="l" defTabSz="914400" rtl="0" eaLnBrk="1" latinLnBrk="0" hangingPunct="1">
+              <a:lnSpc>
+                <a:spcPct val="90000"/>
+              </a:lnSpc>
+              <a:spcBef>
+                <a:spcPts val="1000"/>
+              </a:spcBef>
+              <a:buFont typeface="Arial" panose="020B0604020202020204" pitchFamily="34" charset="0"/>
+              <a:buNone/>
+              <a:defRPr sz="1400" kern="1200" cap="all" spc="150" baseline="0">
+                <a:solidFill>
+                  <a:schemeClr val="tx1">
+                    <a:lumMod val="75000"/>
+                    <a:lumOff val="25000"/>
+                  </a:schemeClr>
+                </a:solidFill>
+                <a:latin typeface="+mj-lt"/>
+                <a:ea typeface="+mn-ea"/>
+                <a:cs typeface="+mn-cs"/>
+              </a:defRPr>
+            </a:lvl1pPr>
+            <a:lvl2pPr marL="457200" indent="0" algn="l" defTabSz="914400" rtl="0" eaLnBrk="1" latinLnBrk="0" hangingPunct="1">
+              <a:lnSpc>
+                <a:spcPct val="90000"/>
+              </a:lnSpc>
+              <a:spcBef>
+                <a:spcPts val="500"/>
+              </a:spcBef>
+              <a:buFont typeface="Arial" panose="020B0604020202020204" pitchFamily="34" charset="0"/>
+              <a:buNone/>
+              <a:defRPr sz="1400" kern="1200">
+                <a:solidFill>
+                  <a:schemeClr val="tx1">
+                    <a:lumMod val="75000"/>
+                    <a:lumOff val="25000"/>
+                  </a:schemeClr>
+                </a:solidFill>
+                <a:latin typeface="+mn-lt"/>
+                <a:ea typeface="+mn-ea"/>
+                <a:cs typeface="+mn-cs"/>
+              </a:defRPr>
+            </a:lvl2pPr>
+            <a:lvl3pPr marL="914400" indent="0" algn="l" defTabSz="914400" rtl="0" eaLnBrk="1" latinLnBrk="0" hangingPunct="1">
+              <a:lnSpc>
+                <a:spcPct val="90000"/>
+              </a:lnSpc>
+              <a:spcBef>
+                <a:spcPts val="500"/>
+              </a:spcBef>
+              <a:buFont typeface="Arial" panose="020B0604020202020204" pitchFamily="34" charset="0"/>
+              <a:buNone/>
+              <a:defRPr sz="1200" kern="1200">
+                <a:solidFill>
+                  <a:schemeClr val="tx1">
+                    <a:lumMod val="75000"/>
+                    <a:lumOff val="25000"/>
+                  </a:schemeClr>
+                </a:solidFill>
+                <a:latin typeface="+mn-lt"/>
+                <a:ea typeface="+mn-ea"/>
+                <a:cs typeface="+mn-cs"/>
+              </a:defRPr>
+            </a:lvl3pPr>
+            <a:lvl4pPr marL="1371600" indent="0" algn="l" defTabSz="914400" rtl="0" eaLnBrk="1" latinLnBrk="0" hangingPunct="1">
+              <a:lnSpc>
+                <a:spcPct val="90000"/>
+              </a:lnSpc>
+              <a:spcBef>
+                <a:spcPts val="500"/>
+              </a:spcBef>
+              <a:buFont typeface="Arial" panose="020B0604020202020204" pitchFamily="34" charset="0"/>
+              <a:buNone/>
+              <a:defRPr sz="1100" kern="1200">
+                <a:solidFill>
+                  <a:schemeClr val="tx1">
+                    <a:lumMod val="75000"/>
+                    <a:lumOff val="25000"/>
+                  </a:schemeClr>
+                </a:solidFill>
+                <a:latin typeface="+mn-lt"/>
+                <a:ea typeface="+mn-ea"/>
+                <a:cs typeface="+mn-cs"/>
+              </a:defRPr>
+            </a:lvl4pPr>
+            <a:lvl5pPr marL="1828800" indent="0" algn="l" defTabSz="914400" rtl="0" eaLnBrk="1" latinLnBrk="0" hangingPunct="1">
+              <a:lnSpc>
+                <a:spcPct val="90000"/>
+              </a:lnSpc>
+              <a:spcBef>
+                <a:spcPts val="500"/>
+              </a:spcBef>
+              <a:buFont typeface="Arial" panose="020B0604020202020204" pitchFamily="34" charset="0"/>
+              <a:buNone/>
+              <a:defRPr sz="1100" kern="1200">
+                <a:solidFill>
+                  <a:schemeClr val="tx1">
+                    <a:lumMod val="75000"/>
+                    <a:lumOff val="25000"/>
+                  </a:schemeClr>
+                </a:solidFill>
+                <a:latin typeface="+mn-lt"/>
+                <a:ea typeface="+mn-ea"/>
+                <a:cs typeface="+mn-cs"/>
+              </a:defRPr>
+            </a:lvl5pPr>
+            <a:lvl6pPr marL="2514600" indent="-228600" algn="l" defTabSz="914400" rtl="0" eaLnBrk="1" latinLnBrk="0" hangingPunct="1">
+              <a:lnSpc>
+                <a:spcPct val="90000"/>
+              </a:lnSpc>
+              <a:spcBef>
+                <a:spcPts val="500"/>
+              </a:spcBef>
+              <a:buFont typeface="Arial" panose="020B0604020202020204" pitchFamily="34" charset="0"/>
+              <a:buChar char="•"/>
+              <a:defRPr sz="1800" kern="1200">
+                <a:solidFill>
+                  <a:schemeClr val="tx1"/>
+                </a:solidFill>
+                <a:latin typeface="+mn-lt"/>
+                <a:ea typeface="+mn-ea"/>
+                <a:cs typeface="+mn-cs"/>
+              </a:defRPr>
+            </a:lvl6pPr>
+            <a:lvl7pPr marL="2971800" indent="-228600" algn="l" defTabSz="914400" rtl="0" eaLnBrk="1" latinLnBrk="0" hangingPunct="1">
+              <a:lnSpc>
+                <a:spcPct val="90000"/>
+              </a:lnSpc>
+              <a:spcBef>
+                <a:spcPts val="500"/>
+              </a:spcBef>
+              <a:buFont typeface="Arial" panose="020B0604020202020204" pitchFamily="34" charset="0"/>
+              <a:buChar char="•"/>
+              <a:defRPr sz="1800" kern="1200">
+                <a:solidFill>
+                  <a:schemeClr val="tx1"/>
+                </a:solidFill>
+                <a:latin typeface="+mn-lt"/>
+                <a:ea typeface="+mn-ea"/>
+                <a:cs typeface="+mn-cs"/>
+              </a:defRPr>
+            </a:lvl7pPr>
+            <a:lvl8pPr marL="3429000" indent="-228600" algn="l" defTabSz="914400" rtl="0" eaLnBrk="1" latinLnBrk="0" hangingPunct="1">
+              <a:lnSpc>
+                <a:spcPct val="90000"/>
+              </a:lnSpc>
+              <a:spcBef>
+                <a:spcPts val="500"/>
+              </a:spcBef>
+              <a:buFont typeface="Arial" panose="020B0604020202020204" pitchFamily="34" charset="0"/>
+              <a:buChar char="•"/>
+              <a:defRPr sz="1800" kern="1200">
+                <a:solidFill>
+                  <a:schemeClr val="tx1"/>
+                </a:solidFill>
+                <a:latin typeface="+mn-lt"/>
+                <a:ea typeface="+mn-ea"/>
+                <a:cs typeface="+mn-cs"/>
+              </a:defRPr>
+            </a:lvl8pPr>
+            <a:lvl9pPr marL="3886200" indent="-228600" algn="l" defTabSz="914400" rtl="0" eaLnBrk="1" latinLnBrk="0" hangingPunct="1">
+              <a:lnSpc>
+                <a:spcPct val="90000"/>
+              </a:lnSpc>
+              <a:spcBef>
+                <a:spcPts val="500"/>
+              </a:spcBef>
+              <a:buFont typeface="Arial" panose="020B0604020202020204" pitchFamily="34" charset="0"/>
+              <a:buChar char="•"/>
+              <a:defRPr sz="1800" kern="1200">
+                <a:solidFill>
+                  <a:schemeClr val="tx1"/>
+                </a:solidFill>
+                <a:latin typeface="+mn-lt"/>
+                <a:ea typeface="+mn-ea"/>
+                <a:cs typeface="+mn-cs"/>
+              </a:defRPr>
+            </a:lvl9pPr>
+          </a:lstStyle>
+          <a:p>
+            <a:r>
+              <a:rPr lang="en-US" sz="1600" b="1" dirty="0">
+                <a:solidFill>
+                  <a:schemeClr val="tx1"/>
+                </a:solidFill>
+                <a:latin typeface="+mn-lt"/>
+              </a:rPr>
+              <a:t>Sous la direction de :</a:t>
+            </a:r>
+          </a:p>
+        </p:txBody>
+      </p:sp>
+      <p:sp>
+        <p:nvSpPr>
+          <p:cNvPr id="10" name="Subtitle 2">
+            <a:extLst>
+              <a:ext uri="{FF2B5EF4-FFF2-40B4-BE49-F238E27FC236}">
+                <a16:creationId xmlns:a16="http://schemas.microsoft.com/office/drawing/2014/main" id="{A595B5F1-12A0-E028-0C7D-C4D5D738FE1E}"/>
+              </a:ext>
+            </a:extLst>
+          </p:cNvPr>
+          <p:cNvSpPr txBox="1">
+            <a:spLocks/>
+          </p:cNvSpPr>
+          <p:nvPr/>
+        </p:nvSpPr>
+        <p:spPr>
+          <a:xfrm>
+            <a:off x="1070937" y="5280152"/>
+            <a:ext cx="2907890" cy="306388"/>
+          </a:xfrm>
+          <a:prstGeom prst="rect">
+            <a:avLst/>
+          </a:prstGeom>
+        </p:spPr>
+        <p:txBody>
+          <a:bodyPr vert="horz" lIns="91440" tIns="45720" rIns="91440" bIns="45720" rtlCol="0">
+            <a:normAutofit fontScale="92500" lnSpcReduction="10000"/>
+          </a:bodyPr>
+          <a:lstStyle>
+            <a:lvl1pPr marL="0" indent="0" algn="l" defTabSz="914400" rtl="0" eaLnBrk="1" latinLnBrk="0" hangingPunct="1">
+              <a:lnSpc>
+                <a:spcPct val="90000"/>
+              </a:lnSpc>
+              <a:spcBef>
+                <a:spcPts val="1000"/>
+              </a:spcBef>
+              <a:buFont typeface="Arial" panose="020B0604020202020204" pitchFamily="34" charset="0"/>
+              <a:buNone/>
+              <a:defRPr sz="1200" kern="1200">
+                <a:solidFill>
+                  <a:schemeClr val="tx1">
+                    <a:lumMod val="65000"/>
+                    <a:lumOff val="35000"/>
+                  </a:schemeClr>
+                </a:solidFill>
+                <a:latin typeface="+mn-lt"/>
+                <a:ea typeface="+mn-ea"/>
+                <a:cs typeface="+mn-cs"/>
+              </a:defRPr>
+            </a:lvl1pPr>
+            <a:lvl2pPr marL="457200" indent="0" algn="l" defTabSz="914400" rtl="0" eaLnBrk="1" latinLnBrk="0" hangingPunct="1">
+              <a:lnSpc>
+                <a:spcPct val="90000"/>
+              </a:lnSpc>
+              <a:spcBef>
+                <a:spcPts val="500"/>
+              </a:spcBef>
+              <a:buFont typeface="Arial" panose="020B0604020202020204" pitchFamily="34" charset="0"/>
+              <a:buNone/>
+              <a:defRPr sz="1100" kern="1200">
+                <a:solidFill>
+                  <a:schemeClr val="tx1">
+                    <a:lumMod val="65000"/>
+                    <a:lumOff val="35000"/>
+                  </a:schemeClr>
+                </a:solidFill>
+                <a:latin typeface="+mn-lt"/>
+                <a:ea typeface="+mn-ea"/>
+                <a:cs typeface="+mn-cs"/>
+              </a:defRPr>
+            </a:lvl2pPr>
+            <a:lvl3pPr marL="914400" indent="0" algn="l" defTabSz="914400" rtl="0" eaLnBrk="1" latinLnBrk="0" hangingPunct="1">
+              <a:lnSpc>
+                <a:spcPct val="90000"/>
+              </a:lnSpc>
+              <a:spcBef>
+                <a:spcPts val="500"/>
+              </a:spcBef>
+              <a:buFont typeface="Arial" panose="020B0604020202020204" pitchFamily="34" charset="0"/>
+              <a:buNone/>
+              <a:defRPr sz="1050" kern="1200">
+                <a:solidFill>
+                  <a:schemeClr val="tx1">
+                    <a:lumMod val="65000"/>
+                    <a:lumOff val="35000"/>
+                  </a:schemeClr>
+                </a:solidFill>
+                <a:latin typeface="+mn-lt"/>
+                <a:ea typeface="+mn-ea"/>
+                <a:cs typeface="+mn-cs"/>
+              </a:defRPr>
+            </a:lvl3pPr>
+            <a:lvl4pPr marL="1371600" indent="0" algn="l" defTabSz="914400" rtl="0" eaLnBrk="1" latinLnBrk="0" hangingPunct="1">
+              <a:lnSpc>
+                <a:spcPct val="90000"/>
+              </a:lnSpc>
+              <a:spcBef>
+                <a:spcPts val="500"/>
+              </a:spcBef>
+              <a:buFont typeface="Arial" panose="020B0604020202020204" pitchFamily="34" charset="0"/>
+              <a:buNone/>
+              <a:defRPr sz="1000" kern="1200">
+                <a:solidFill>
+                  <a:schemeClr val="tx1">
+                    <a:lumMod val="65000"/>
+                    <a:lumOff val="35000"/>
+                  </a:schemeClr>
+                </a:solidFill>
+                <a:latin typeface="+mn-lt"/>
+                <a:ea typeface="+mn-ea"/>
+                <a:cs typeface="+mn-cs"/>
+              </a:defRPr>
+            </a:lvl4pPr>
+            <a:lvl5pPr marL="1828800" indent="0" algn="l" defTabSz="914400" rtl="0" eaLnBrk="1" latinLnBrk="0" hangingPunct="1">
+              <a:lnSpc>
+                <a:spcPct val="90000"/>
+              </a:lnSpc>
+              <a:spcBef>
+                <a:spcPts val="500"/>
+              </a:spcBef>
+              <a:buFont typeface="Arial" panose="020B0604020202020204" pitchFamily="34" charset="0"/>
+              <a:buNone/>
+              <a:defRPr sz="1000" kern="1200">
+                <a:solidFill>
+                  <a:schemeClr val="tx1">
+                    <a:lumMod val="65000"/>
+                    <a:lumOff val="35000"/>
+                  </a:schemeClr>
+                </a:solidFill>
+                <a:latin typeface="+mn-lt"/>
+                <a:ea typeface="+mn-ea"/>
+                <a:cs typeface="+mn-cs"/>
+              </a:defRPr>
+            </a:lvl5pPr>
+            <a:lvl6pPr marL="2514600" indent="-228600" algn="l" defTabSz="914400" rtl="0" eaLnBrk="1" latinLnBrk="0" hangingPunct="1">
+              <a:lnSpc>
+                <a:spcPct val="90000"/>
+              </a:lnSpc>
+              <a:spcBef>
+                <a:spcPts val="500"/>
+              </a:spcBef>
+              <a:buFont typeface="Arial" panose="020B0604020202020204" pitchFamily="34" charset="0"/>
+              <a:buChar char="•"/>
+              <a:defRPr sz="1800" kern="1200">
+                <a:solidFill>
+                  <a:schemeClr val="tx1"/>
+                </a:solidFill>
+                <a:latin typeface="+mn-lt"/>
+                <a:ea typeface="+mn-ea"/>
+                <a:cs typeface="+mn-cs"/>
+              </a:defRPr>
+            </a:lvl6pPr>
+            <a:lvl7pPr marL="2971800" indent="-228600" algn="l" defTabSz="914400" rtl="0" eaLnBrk="1" latinLnBrk="0" hangingPunct="1">
+              <a:lnSpc>
+                <a:spcPct val="90000"/>
+              </a:lnSpc>
+              <a:spcBef>
+                <a:spcPts val="500"/>
+              </a:spcBef>
+              <a:buFont typeface="Arial" panose="020B0604020202020204" pitchFamily="34" charset="0"/>
+              <a:buChar char="•"/>
+              <a:defRPr sz="1800" kern="1200">
+                <a:solidFill>
+                  <a:schemeClr val="tx1"/>
+                </a:solidFill>
+                <a:latin typeface="+mn-lt"/>
+                <a:ea typeface="+mn-ea"/>
+                <a:cs typeface="+mn-cs"/>
+              </a:defRPr>
+            </a:lvl7pPr>
+            <a:lvl8pPr marL="3429000" indent="-228600" algn="l" defTabSz="914400" rtl="0" eaLnBrk="1" latinLnBrk="0" hangingPunct="1">
+              <a:lnSpc>
+                <a:spcPct val="90000"/>
+              </a:lnSpc>
+              <a:spcBef>
+                <a:spcPts val="500"/>
+              </a:spcBef>
+              <a:buFont typeface="Arial" panose="020B0604020202020204" pitchFamily="34" charset="0"/>
+              <a:buChar char="•"/>
+              <a:defRPr sz="1800" kern="1200">
+                <a:solidFill>
+                  <a:schemeClr val="tx1"/>
+                </a:solidFill>
+                <a:latin typeface="+mn-lt"/>
+                <a:ea typeface="+mn-ea"/>
+                <a:cs typeface="+mn-cs"/>
+              </a:defRPr>
+            </a:lvl8pPr>
+            <a:lvl9pPr marL="3886200" indent="-228600" algn="l" defTabSz="914400" rtl="0" eaLnBrk="1" latinLnBrk="0" hangingPunct="1">
+              <a:lnSpc>
+                <a:spcPct val="90000"/>
+              </a:lnSpc>
+              <a:spcBef>
+                <a:spcPts val="500"/>
+              </a:spcBef>
+              <a:buFont typeface="Arial" panose="020B0604020202020204" pitchFamily="34" charset="0"/>
+              <a:buChar char="•"/>
+              <a:defRPr sz="1800" kern="1200">
+                <a:solidFill>
+                  <a:schemeClr val="tx1"/>
+                </a:solidFill>
+                <a:latin typeface="+mn-lt"/>
+                <a:ea typeface="+mn-ea"/>
+                <a:cs typeface="+mn-cs"/>
+              </a:defRPr>
+            </a:lvl9pPr>
+          </a:lstStyle>
+          <a:p>
+            <a:r>
+              <a:rPr lang="en-US" sz="1800" dirty="0" err="1">
+                <a:solidFill>
+                  <a:schemeClr val="tx1"/>
+                </a:solidFill>
+              </a:rPr>
+              <a:t>M.Ismael</a:t>
+            </a:r>
+            <a:r>
+              <a:rPr lang="en-US" sz="1800" dirty="0">
+                <a:solidFill>
+                  <a:schemeClr val="tx1"/>
+                </a:solidFill>
+              </a:rPr>
+              <a:t> SAINT-Amour</a:t>
+            </a:r>
+          </a:p>
+        </p:txBody>
+      </p:sp>
     </p:spTree>
     <p:extLst>
       <p:ext uri="{BB962C8B-B14F-4D97-AF65-F5344CB8AC3E}">
@@ -19242,7 +19762,7 @@
           <p:cNvPr id="2" name="Title 1">
             <a:extLst>
               <a:ext uri="{FF2B5EF4-FFF2-40B4-BE49-F238E27FC236}">
-                <a16:creationId xmlns:a16="http://schemas.microsoft.com/office/drawing/2014/main" id="{5864BC4F-3D59-464A-857E-6F155B368ED7}"/>
+                <a16:creationId xmlns:a16="http://schemas.microsoft.com/office/drawing/2014/main" id="{5CE54ABB-4929-4810-950B-2DAEA0A5BAB4}"/>
               </a:ext>
             </a:extLst>
           </p:cNvPr>
@@ -19265,17 +19785,17 @@
           <a:p>
             <a:r>
               <a:rPr lang="en-US" dirty="0"/>
-              <a:t>Market comparison</a:t>
-            </a:r>
-          </a:p>
-        </p:txBody>
-      </p:sp>
-      <p:sp>
-        <p:nvSpPr>
-          <p:cNvPr id="9" name="Text Placeholder 8">
-            <a:extLst>
-              <a:ext uri="{FF2B5EF4-FFF2-40B4-BE49-F238E27FC236}">
-                <a16:creationId xmlns:a16="http://schemas.microsoft.com/office/drawing/2014/main" id="{8C1455DF-5CEC-44A2-A92D-8E901D15B7CC}"/>
+              <a:t>MARKET OVERVIEW</a:t>
+            </a:r>
+          </a:p>
+        </p:txBody>
+      </p:sp>
+      <p:sp>
+        <p:nvSpPr>
+          <p:cNvPr id="4" name="Text Placeholder 3">
+            <a:extLst>
+              <a:ext uri="{FF2B5EF4-FFF2-40B4-BE49-F238E27FC236}">
+                <a16:creationId xmlns:a16="http://schemas.microsoft.com/office/drawing/2014/main" id="{A112B089-A8F9-45B1-BE6E-EAC10163F082}"/>
               </a:ext>
             </a:extLst>
           </p:cNvPr>
@@ -19288,8 +19808,8 @@
         </p:nvSpPr>
         <p:spPr>
           <a:xfrm>
-            <a:off x="2063855" y="3064615"/>
-            <a:ext cx="1240971" cy="823912"/>
+            <a:off x="1243104" y="2776936"/>
+            <a:ext cx="2882475" cy="823912"/>
           </a:xfrm>
         </p:spPr>
         <p:txBody>
@@ -19298,31 +19818,82 @@
           <a:p>
             <a:r>
               <a:rPr lang="en-US" dirty="0"/>
-              <a:t>$3B</a:t>
-            </a:r>
-          </a:p>
-        </p:txBody>
-      </p:sp>
-      <p:sp>
-        <p:nvSpPr>
-          <p:cNvPr id="10" name="Text Placeholder 9">
-            <a:extLst>
-              <a:ext uri="{FF2B5EF4-FFF2-40B4-BE49-F238E27FC236}">
-                <a16:creationId xmlns:a16="http://schemas.microsoft.com/office/drawing/2014/main" id="{7C7E7B18-D05F-4C44-8718-8C671160FC98}"/>
-              </a:ext>
-            </a:extLst>
-          </p:cNvPr>
-          <p:cNvSpPr>
-            <a:spLocks noGrp="1"/>
-          </p:cNvSpPr>
-          <p:nvPr>
-            <p:ph type="body" idx="15"/>
-          </p:nvPr>
-        </p:nvSpPr>
-        <p:spPr>
-          <a:xfrm>
-            <a:off x="5475514" y="3064615"/>
-            <a:ext cx="1240971" cy="823912"/>
+              <a:t>$3 Billion</a:t>
+            </a:r>
+          </a:p>
+        </p:txBody>
+      </p:sp>
+      <p:sp>
+        <p:nvSpPr>
+          <p:cNvPr id="7" name="Content Placeholder 6">
+            <a:extLst>
+              <a:ext uri="{FF2B5EF4-FFF2-40B4-BE49-F238E27FC236}">
+                <a16:creationId xmlns:a16="http://schemas.microsoft.com/office/drawing/2014/main" id="{6B35F89A-6CDF-41F7-BD87-18B45BD7330B}"/>
+              </a:ext>
+            </a:extLst>
+          </p:cNvPr>
+          <p:cNvSpPr>
+            <a:spLocks noGrp="1"/>
+          </p:cNvSpPr>
+          <p:nvPr>
+            <p:ph sz="half" idx="2"/>
+          </p:nvPr>
+        </p:nvSpPr>
+        <p:spPr>
+          <a:xfrm>
+            <a:off x="1243104" y="3834606"/>
+            <a:ext cx="2882475" cy="1997867"/>
+          </a:xfrm>
+        </p:spPr>
+        <p:txBody>
+          <a:bodyPr vert="horz" lIns="91440" tIns="45720" rIns="91440" bIns="45720" rtlCol="0" anchor="t">
+            <a:normAutofit/>
+          </a:bodyPr>
+          <a:lstStyle/>
+          <a:p>
+            <a:r>
+              <a:rPr lang="en-US" noProof="1"/>
+              <a:t>Freedom to invent</a:t>
+            </a:r>
+            <a:endParaRPr lang="en-US" dirty="0"/>
+          </a:p>
+          <a:p>
+            <a:r>
+              <a:rPr lang="en-US" noProof="1"/>
+              <a:t>Selectively inclusive market</a:t>
+            </a:r>
+          </a:p>
+          <a:p>
+            <a:r>
+              <a:rPr lang="en-US" noProof="1"/>
+              <a:t>Serviceable available market</a:t>
+            </a:r>
+          </a:p>
+          <a:p>
+            <a:endParaRPr lang="en-US" noProof="1"/>
+          </a:p>
+        </p:txBody>
+      </p:sp>
+      <p:sp>
+        <p:nvSpPr>
+          <p:cNvPr id="6" name="Text Placeholder 5">
+            <a:extLst>
+              <a:ext uri="{FF2B5EF4-FFF2-40B4-BE49-F238E27FC236}">
+                <a16:creationId xmlns:a16="http://schemas.microsoft.com/office/drawing/2014/main" id="{0FE22F9B-4BF8-41DC-8F1C-836B546E59AD}"/>
+              </a:ext>
+            </a:extLst>
+          </p:cNvPr>
+          <p:cNvSpPr>
+            <a:spLocks noGrp="1"/>
+          </p:cNvSpPr>
+          <p:nvPr>
+            <p:ph type="body" sz="quarter" idx="3"/>
+          </p:nvPr>
+        </p:nvSpPr>
+        <p:spPr>
+          <a:xfrm>
+            <a:off x="4647665" y="2776936"/>
+            <a:ext cx="2896671" cy="823912"/>
           </a:xfrm>
         </p:spPr>
         <p:txBody>
@@ -19331,31 +19902,31 @@
           <a:p>
             <a:r>
               <a:rPr lang="en-US" dirty="0"/>
-              <a:t>$2B</a:t>
-            </a:r>
-          </a:p>
-        </p:txBody>
-      </p:sp>
-      <p:sp>
-        <p:nvSpPr>
-          <p:cNvPr id="11" name="Text Placeholder 10">
-            <a:extLst>
-              <a:ext uri="{FF2B5EF4-FFF2-40B4-BE49-F238E27FC236}">
-                <a16:creationId xmlns:a16="http://schemas.microsoft.com/office/drawing/2014/main" id="{C4EAD5C6-02F0-4D27-8D85-1BD5EA833D6F}"/>
-              </a:ext>
-            </a:extLst>
-          </p:cNvPr>
-          <p:cNvSpPr>
-            <a:spLocks noGrp="1"/>
-          </p:cNvSpPr>
-          <p:nvPr>
-            <p:ph type="body" idx="16"/>
-          </p:nvPr>
-        </p:nvSpPr>
-        <p:spPr>
-          <a:xfrm>
-            <a:off x="8887174" y="3064615"/>
-            <a:ext cx="1240971" cy="823912"/>
+              <a:t>$1 Billion</a:t>
+            </a:r>
+          </a:p>
+        </p:txBody>
+      </p:sp>
+      <p:sp>
+        <p:nvSpPr>
+          <p:cNvPr id="3" name="Text Placeholder 2">
+            <a:extLst>
+              <a:ext uri="{FF2B5EF4-FFF2-40B4-BE49-F238E27FC236}">
+                <a16:creationId xmlns:a16="http://schemas.microsoft.com/office/drawing/2014/main" id="{D5E1C399-8F48-44F5-9461-3C89866D4CE1}"/>
+              </a:ext>
+            </a:extLst>
+          </p:cNvPr>
+          <p:cNvSpPr>
+            <a:spLocks noGrp="1"/>
+          </p:cNvSpPr>
+          <p:nvPr>
+            <p:ph sz="quarter" idx="4"/>
+          </p:nvPr>
+        </p:nvSpPr>
+        <p:spPr>
+          <a:xfrm>
+            <a:off x="4647665" y="3834606"/>
+            <a:ext cx="2896671" cy="1997867"/>
           </a:xfrm>
         </p:spPr>
         <p:txBody>
@@ -19364,31 +19935,78 @@
           <a:p>
             <a:r>
               <a:rPr lang="en-US" dirty="0"/>
-              <a:t>$1B</a:t>
-            </a:r>
-          </a:p>
-        </p:txBody>
-      </p:sp>
-      <p:sp>
-        <p:nvSpPr>
-          <p:cNvPr id="19" name="Content Placeholder 18">
-            <a:extLst>
-              <a:ext uri="{FF2B5EF4-FFF2-40B4-BE49-F238E27FC236}">
-                <a16:creationId xmlns:a16="http://schemas.microsoft.com/office/drawing/2014/main" id="{791D6145-F7F7-43DE-A16B-BF4F9607D4E8}"/>
-              </a:ext>
-            </a:extLst>
-          </p:cNvPr>
-          <p:cNvSpPr>
-            <a:spLocks noGrp="1"/>
-          </p:cNvSpPr>
-          <p:nvPr>
-            <p:ph sz="half" idx="2"/>
-          </p:nvPr>
-        </p:nvSpPr>
-        <p:spPr>
-          <a:xfrm>
-            <a:off x="1129698" y="4824188"/>
-            <a:ext cx="3124093" cy="462927"/>
+              <a:t>Opportunity to build</a:t>
+            </a:r>
+          </a:p>
+          <a:p>
+            <a:r>
+              <a:rPr lang="en-US" dirty="0"/>
+              <a:t>Fully inclusive market</a:t>
+            </a:r>
+          </a:p>
+          <a:p>
+            <a:r>
+              <a:rPr lang="en-US" dirty="0"/>
+              <a:t>Total addressable market</a:t>
+            </a:r>
+          </a:p>
+        </p:txBody>
+      </p:sp>
+      <p:sp>
+        <p:nvSpPr>
+          <p:cNvPr id="5" name="Content Placeholder 4">
+            <a:extLst>
+              <a:ext uri="{FF2B5EF4-FFF2-40B4-BE49-F238E27FC236}">
+                <a16:creationId xmlns:a16="http://schemas.microsoft.com/office/drawing/2014/main" id="{CF515C5D-2CDB-4E66-B2B8-1451BC44247F}"/>
+              </a:ext>
+            </a:extLst>
+          </p:cNvPr>
+          <p:cNvSpPr>
+            <a:spLocks noGrp="1"/>
+          </p:cNvSpPr>
+          <p:nvPr>
+            <p:ph type="body" idx="13"/>
+          </p:nvPr>
+        </p:nvSpPr>
+        <p:spPr>
+          <a:xfrm>
+            <a:off x="8066421" y="2776936"/>
+            <a:ext cx="2882475" cy="823912"/>
+          </a:xfrm>
+        </p:spPr>
+        <p:txBody>
+          <a:bodyPr vert="horz" lIns="91440" tIns="45720" rIns="91440" bIns="45720" rtlCol="0" anchor="b">
+            <a:normAutofit/>
+          </a:bodyPr>
+          <a:lstStyle/>
+          <a:p>
+            <a:r>
+              <a:rPr lang="en-US" dirty="0"/>
+              <a:t>$2 Billion</a:t>
+            </a:r>
+          </a:p>
+        </p:txBody>
+      </p:sp>
+      <p:sp>
+        <p:nvSpPr>
+          <p:cNvPr id="8" name="Text Placeholder 7">
+            <a:extLst>
+              <a:ext uri="{FF2B5EF4-FFF2-40B4-BE49-F238E27FC236}">
+                <a16:creationId xmlns:a16="http://schemas.microsoft.com/office/drawing/2014/main" id="{E92B9716-8D44-4864-8986-720957B34362}"/>
+              </a:ext>
+            </a:extLst>
+          </p:cNvPr>
+          <p:cNvSpPr>
+            <a:spLocks noGrp="1"/>
+          </p:cNvSpPr>
+          <p:nvPr>
+            <p:ph sz="half" idx="14"/>
+          </p:nvPr>
+        </p:nvSpPr>
+        <p:spPr>
+          <a:xfrm>
+            <a:off x="8066421" y="3834606"/>
+            <a:ext cx="2882475" cy="1997867"/>
           </a:xfrm>
         </p:spPr>
         <p:txBody>
@@ -19396,32 +20014,48 @@
           <a:lstStyle/>
           <a:p>
             <a:r>
-              <a:rPr lang="en-US" dirty="0"/>
-              <a:t>Opportunity to build</a:t>
-            </a:r>
-          </a:p>
-        </p:txBody>
-      </p:sp>
-      <p:sp>
-        <p:nvSpPr>
-          <p:cNvPr id="20" name="Content Placeholder 19">
-            <a:extLst>
-              <a:ext uri="{FF2B5EF4-FFF2-40B4-BE49-F238E27FC236}">
-                <a16:creationId xmlns:a16="http://schemas.microsoft.com/office/drawing/2014/main" id="{BC46925A-8382-42EB-891C-DBB4EAAA33F8}"/>
-              </a:ext>
-            </a:extLst>
-          </p:cNvPr>
-          <p:cNvSpPr>
-            <a:spLocks noGrp="1"/>
-          </p:cNvSpPr>
-          <p:nvPr>
-            <p:ph sz="quarter" idx="4"/>
-          </p:nvPr>
-        </p:nvSpPr>
-        <p:spPr>
-          <a:xfrm>
-            <a:off x="4526261" y="4824188"/>
-            <a:ext cx="3139479" cy="462927"/>
+              <a:rPr lang="en-US" noProof="1"/>
+              <a:t>Few competitors</a:t>
+            </a:r>
+          </a:p>
+          <a:p>
+            <a:r>
+              <a:rPr lang="en-US" noProof="1"/>
+              <a:t>Specifically targeted market</a:t>
+            </a:r>
+          </a:p>
+          <a:p>
+            <a:r>
+              <a:rPr lang="en-US" noProof="1"/>
+              <a:t>Serviceable obtainable market</a:t>
+            </a:r>
+            <a:endParaRPr lang="en-US" dirty="0"/>
+          </a:p>
+          <a:p>
+            <a:endParaRPr lang="en-US" dirty="0"/>
+          </a:p>
+        </p:txBody>
+      </p:sp>
+      <p:sp>
+        <p:nvSpPr>
+          <p:cNvPr id="9" name="Date Placeholder 8">
+            <a:extLst>
+              <a:ext uri="{FF2B5EF4-FFF2-40B4-BE49-F238E27FC236}">
+                <a16:creationId xmlns:a16="http://schemas.microsoft.com/office/drawing/2014/main" id="{7B78F7A0-88C5-4940-B21C-099F472F39F9}"/>
+              </a:ext>
+            </a:extLst>
+          </p:cNvPr>
+          <p:cNvSpPr>
+            <a:spLocks noGrp="1"/>
+          </p:cNvSpPr>
+          <p:nvPr>
+            <p:ph type="dt" sz="half" idx="10"/>
+          </p:nvPr>
+        </p:nvSpPr>
+        <p:spPr>
+          <a:xfrm>
+            <a:off x="838200" y="6356350"/>
+            <a:ext cx="2743200" cy="365125"/>
           </a:xfrm>
         </p:spPr>
         <p:txBody>
@@ -19430,31 +20064,31 @@
           <a:p>
             <a:r>
               <a:rPr lang="en-US" dirty="0"/>
-              <a:t>Freedom to invent</a:t>
-            </a:r>
-          </a:p>
-        </p:txBody>
-      </p:sp>
-      <p:sp>
-        <p:nvSpPr>
-          <p:cNvPr id="21" name="Content Placeholder 20">
-            <a:extLst>
-              <a:ext uri="{FF2B5EF4-FFF2-40B4-BE49-F238E27FC236}">
-                <a16:creationId xmlns:a16="http://schemas.microsoft.com/office/drawing/2014/main" id="{318AFADE-B54F-4988-8000-B9336A395336}"/>
-              </a:ext>
-            </a:extLst>
-          </p:cNvPr>
-          <p:cNvSpPr>
-            <a:spLocks noGrp="1"/>
-          </p:cNvSpPr>
-          <p:nvPr>
-            <p:ph sz="half" idx="14"/>
-          </p:nvPr>
-        </p:nvSpPr>
-        <p:spPr>
-          <a:xfrm>
-            <a:off x="7938210" y="4824188"/>
-            <a:ext cx="3124093" cy="462927"/>
+              <a:t>20XX</a:t>
+            </a:r>
+          </a:p>
+        </p:txBody>
+      </p:sp>
+      <p:sp>
+        <p:nvSpPr>
+          <p:cNvPr id="10" name="Footer Placeholder 9">
+            <a:extLst>
+              <a:ext uri="{FF2B5EF4-FFF2-40B4-BE49-F238E27FC236}">
+                <a16:creationId xmlns:a16="http://schemas.microsoft.com/office/drawing/2014/main" id="{D2186069-FC8E-433D-9BB4-942220CE8CFB}"/>
+              </a:ext>
+            </a:extLst>
+          </p:cNvPr>
+          <p:cNvSpPr>
+            <a:spLocks noGrp="1"/>
+          </p:cNvSpPr>
+          <p:nvPr>
+            <p:ph type="ftr" sz="quarter" idx="11"/>
+          </p:nvPr>
+        </p:nvSpPr>
+        <p:spPr>
+          <a:xfrm>
+            <a:off x="4038600" y="6356350"/>
+            <a:ext cx="4114800" cy="365125"/>
           </a:xfrm>
         </p:spPr>
         <p:txBody>
@@ -19463,171 +20097,6 @@
           <a:p>
             <a:r>
               <a:rPr lang="en-US" dirty="0"/>
-              <a:t>Few competitors</a:t>
-            </a:r>
-          </a:p>
-        </p:txBody>
-      </p:sp>
-      <p:sp>
-        <p:nvSpPr>
-          <p:cNvPr id="22" name="Content Placeholder 21">
-            <a:extLst>
-              <a:ext uri="{FF2B5EF4-FFF2-40B4-BE49-F238E27FC236}">
-                <a16:creationId xmlns:a16="http://schemas.microsoft.com/office/drawing/2014/main" id="{F296843C-0ED0-4314-A6F0-DD60C828DDFB}"/>
-              </a:ext>
-            </a:extLst>
-          </p:cNvPr>
-          <p:cNvSpPr>
-            <a:spLocks noGrp="1"/>
-          </p:cNvSpPr>
-          <p:nvPr>
-            <p:ph sz="half" idx="17"/>
-          </p:nvPr>
-        </p:nvSpPr>
-        <p:spPr>
-          <a:xfrm>
-            <a:off x="1129698" y="5280763"/>
-            <a:ext cx="3124093" cy="462927"/>
-          </a:xfrm>
-        </p:spPr>
-        <p:txBody>
-          <a:bodyPr/>
-          <a:lstStyle/>
-          <a:p>
-            <a:r>
-              <a:rPr lang="en-US" dirty="0"/>
-              <a:t>Addressable market</a:t>
-            </a:r>
-          </a:p>
-        </p:txBody>
-      </p:sp>
-      <p:sp>
-        <p:nvSpPr>
-          <p:cNvPr id="23" name="Content Placeholder 22">
-            <a:extLst>
-              <a:ext uri="{FF2B5EF4-FFF2-40B4-BE49-F238E27FC236}">
-                <a16:creationId xmlns:a16="http://schemas.microsoft.com/office/drawing/2014/main" id="{649BF20C-562E-400E-BEA6-1D5F81F2FE44}"/>
-              </a:ext>
-            </a:extLst>
-          </p:cNvPr>
-          <p:cNvSpPr>
-            <a:spLocks noGrp="1"/>
-          </p:cNvSpPr>
-          <p:nvPr>
-            <p:ph sz="quarter" idx="18"/>
-          </p:nvPr>
-        </p:nvSpPr>
-        <p:spPr>
-          <a:xfrm>
-            <a:off x="4526261" y="5280763"/>
-            <a:ext cx="3139479" cy="462927"/>
-          </a:xfrm>
-        </p:spPr>
-        <p:txBody>
-          <a:bodyPr/>
-          <a:lstStyle/>
-          <a:p>
-            <a:r>
-              <a:rPr lang="en-US" dirty="0"/>
-              <a:t>Serviceable market</a:t>
-            </a:r>
-          </a:p>
-        </p:txBody>
-      </p:sp>
-      <p:sp>
-        <p:nvSpPr>
-          <p:cNvPr id="24" name="Content Placeholder 23">
-            <a:extLst>
-              <a:ext uri="{FF2B5EF4-FFF2-40B4-BE49-F238E27FC236}">
-                <a16:creationId xmlns:a16="http://schemas.microsoft.com/office/drawing/2014/main" id="{5AA25980-D334-4FC0-9091-936E53B8D321}"/>
-              </a:ext>
-            </a:extLst>
-          </p:cNvPr>
-          <p:cNvSpPr>
-            <a:spLocks noGrp="1"/>
-          </p:cNvSpPr>
-          <p:nvPr>
-            <p:ph sz="half" idx="19"/>
-          </p:nvPr>
-        </p:nvSpPr>
-        <p:spPr>
-          <a:xfrm>
-            <a:off x="7938210" y="5280763"/>
-            <a:ext cx="3124093" cy="462927"/>
-          </a:xfrm>
-        </p:spPr>
-        <p:txBody>
-          <a:bodyPr/>
-          <a:lstStyle/>
-          <a:p>
-            <a:r>
-              <a:rPr lang="en-US" dirty="0"/>
-              <a:t>Obtainable market</a:t>
-            </a:r>
-          </a:p>
-        </p:txBody>
-      </p:sp>
-      <p:sp>
-        <p:nvSpPr>
-          <p:cNvPr id="5" name="Date Placeholder 4">
-            <a:extLst>
-              <a:ext uri="{FF2B5EF4-FFF2-40B4-BE49-F238E27FC236}">
-                <a16:creationId xmlns:a16="http://schemas.microsoft.com/office/drawing/2014/main" id="{79C22D8C-87A6-47AD-8D29-FBBA539EDBE2}"/>
-              </a:ext>
-            </a:extLst>
-          </p:cNvPr>
-          <p:cNvSpPr>
-            <a:spLocks noGrp="1"/>
-          </p:cNvSpPr>
-          <p:nvPr>
-            <p:ph type="dt" sz="half" idx="10"/>
-          </p:nvPr>
-        </p:nvSpPr>
-        <p:spPr>
-          <a:xfrm>
-            <a:off x="838200" y="6356350"/>
-            <a:ext cx="2743200" cy="365125"/>
-          </a:xfrm>
-        </p:spPr>
-        <p:txBody>
-          <a:bodyPr/>
-          <a:lstStyle/>
-          <a:p>
-            <a:r>
-              <a:rPr lang="en-US" dirty="0"/>
-              <a:t>20XX</a:t>
-            </a:r>
-          </a:p>
-        </p:txBody>
-      </p:sp>
-      <p:sp>
-        <p:nvSpPr>
-          <p:cNvPr id="6" name="Footer Placeholder 5">
-            <a:extLst>
-              <a:ext uri="{FF2B5EF4-FFF2-40B4-BE49-F238E27FC236}">
-                <a16:creationId xmlns:a16="http://schemas.microsoft.com/office/drawing/2014/main" id="{4D346909-C2E0-4F1D-90FC-F5E1D8DFB515}"/>
-              </a:ext>
-            </a:extLst>
-          </p:cNvPr>
-          <p:cNvSpPr>
-            <a:spLocks noGrp="1"/>
-          </p:cNvSpPr>
-          <p:nvPr>
-            <p:ph type="ftr" sz="quarter" idx="11"/>
-          </p:nvPr>
-        </p:nvSpPr>
-        <p:spPr>
-          <a:xfrm>
-            <a:off x="4038600" y="6356350"/>
-            <a:ext cx="4114800" cy="365125"/>
-          </a:xfrm>
-        </p:spPr>
-        <p:txBody>
-          <a:bodyPr/>
-          <a:lstStyle/>
-          <a:p>
-            <a:r>
-              <a:rPr lang="en-US" dirty="0"/>
               <a:t>Pitch Deck</a:t>
             </a:r>
           </a:p>
@@ -19635,10 +20104,10 @@
       </p:sp>
       <p:sp>
         <p:nvSpPr>
-          <p:cNvPr id="7" name="Slide Number Placeholder 6">
-            <a:extLst>
-              <a:ext uri="{FF2B5EF4-FFF2-40B4-BE49-F238E27FC236}">
-                <a16:creationId xmlns:a16="http://schemas.microsoft.com/office/drawing/2014/main" id="{EBC02F21-4E3C-469E-B11C-9214231082D3}"/>
+          <p:cNvPr id="11" name="Slide Number Placeholder 10">
+            <a:extLst>
+              <a:ext uri="{FF2B5EF4-FFF2-40B4-BE49-F238E27FC236}">
+                <a16:creationId xmlns:a16="http://schemas.microsoft.com/office/drawing/2014/main" id="{BAD5B6F4-0A90-447A-A1AE-D75C934B6B29}"/>
               </a:ext>
             </a:extLst>
           </p:cNvPr>
@@ -19671,7 +20140,7 @@
     </p:spTree>
     <p:extLst>
       <p:ext uri="{BB962C8B-B14F-4D97-AF65-F5344CB8AC3E}">
-        <p14:creationId xmlns:p14="http://schemas.microsoft.com/office/powerpoint/2010/main" val="404854312"/>
+        <p14:creationId xmlns:p14="http://schemas.microsoft.com/office/powerpoint/2010/main" val="2121178069"/>
       </p:ext>
     </p:extLst>
   </p:cSld>
@@ -19700,10 +20169,10 @@
       </p:grpSpPr>
       <p:sp>
         <p:nvSpPr>
-          <p:cNvPr id="4" name="Title 3">
-            <a:extLst>
-              <a:ext uri="{FF2B5EF4-FFF2-40B4-BE49-F238E27FC236}">
-                <a16:creationId xmlns:a16="http://schemas.microsoft.com/office/drawing/2014/main" id="{FAD2AE59-5630-4D5C-83A9-4CDEF4D7DCFB}"/>
+          <p:cNvPr id="2" name="Title 1">
+            <a:extLst>
+              <a:ext uri="{FF2B5EF4-FFF2-40B4-BE49-F238E27FC236}">
+                <a16:creationId xmlns:a16="http://schemas.microsoft.com/office/drawing/2014/main" id="{5864BC4F-3D59-464A-857E-6F155B368ED7}"/>
               </a:ext>
             </a:extLst>
           </p:cNvPr>
@@ -19716,7 +20185,7 @@
         </p:nvSpPr>
         <p:spPr>
           <a:xfrm>
-            <a:off x="2933700" y="892177"/>
+            <a:off x="1885156" y="892177"/>
             <a:ext cx="8421688" cy="1325563"/>
           </a:xfrm>
         </p:spPr>
@@ -19726,17 +20195,17 @@
           <a:p>
             <a:r>
               <a:rPr lang="en-US" dirty="0"/>
-              <a:t>OUR COMPETITION</a:t>
-            </a:r>
-          </a:p>
-        </p:txBody>
-      </p:sp>
-      <p:sp>
-        <p:nvSpPr>
-          <p:cNvPr id="5" name="Text Placeholder 4">
-            <a:extLst>
-              <a:ext uri="{FF2B5EF4-FFF2-40B4-BE49-F238E27FC236}">
-                <a16:creationId xmlns:a16="http://schemas.microsoft.com/office/drawing/2014/main" id="{F8657664-A458-4DDD-ACC2-1D87FCD6FCA9}"/>
+              <a:t>Market comparison</a:t>
+            </a:r>
+          </a:p>
+        </p:txBody>
+      </p:sp>
+      <p:sp>
+        <p:nvSpPr>
+          <p:cNvPr id="9" name="Text Placeholder 8">
+            <a:extLst>
+              <a:ext uri="{FF2B5EF4-FFF2-40B4-BE49-F238E27FC236}">
+                <a16:creationId xmlns:a16="http://schemas.microsoft.com/office/drawing/2014/main" id="{8C1455DF-5CEC-44A2-A92D-8E901D15B7CC}"/>
               </a:ext>
             </a:extLst>
           </p:cNvPr>
@@ -19749,8 +20218,8 @@
         </p:nvSpPr>
         <p:spPr>
           <a:xfrm>
-            <a:off x="2933700" y="2776936"/>
-            <a:ext cx="3924300" cy="823912"/>
+            <a:off x="2063855" y="3064615"/>
+            <a:ext cx="1240971" cy="823912"/>
           </a:xfrm>
         </p:spPr>
         <p:txBody>
@@ -19759,78 +20228,31 @@
           <a:p>
             <a:r>
               <a:rPr lang="en-US" dirty="0"/>
-              <a:t>CONTOSO</a:t>
-            </a:r>
-          </a:p>
-        </p:txBody>
-      </p:sp>
-      <p:sp>
-        <p:nvSpPr>
-          <p:cNvPr id="6" name="Content Placeholder 5">
-            <a:extLst>
-              <a:ext uri="{FF2B5EF4-FFF2-40B4-BE49-F238E27FC236}">
-                <a16:creationId xmlns:a16="http://schemas.microsoft.com/office/drawing/2014/main" id="{5A6B31B0-7B84-475D-961F-09C0191F91A2}"/>
-              </a:ext>
-            </a:extLst>
-          </p:cNvPr>
-          <p:cNvSpPr>
-            <a:spLocks noGrp="1"/>
-          </p:cNvSpPr>
-          <p:nvPr>
-            <p:ph sz="half" idx="2"/>
-          </p:nvPr>
-        </p:nvSpPr>
-        <p:spPr>
-          <a:xfrm>
-            <a:off x="2933700" y="3834606"/>
-            <a:ext cx="3924300" cy="1997867"/>
-          </a:xfrm>
-        </p:spPr>
-        <p:txBody>
-          <a:bodyPr vert="horz" lIns="91440" tIns="45720" rIns="91440" bIns="45720" rtlCol="0" anchor="t">
-            <a:normAutofit/>
-          </a:bodyPr>
-          <a:lstStyle/>
-          <a:p>
-            <a:r>
-              <a:rPr lang="en-US" noProof="1"/>
-              <a:t>Our product is priced below that of other companies on the market</a:t>
-            </a:r>
-          </a:p>
-          <a:p>
-            <a:r>
-              <a:rPr lang="en-US" noProof="1"/>
-              <a:t>Design is simple and easy to use, compared to the complex designs of the competitors</a:t>
-            </a:r>
-          </a:p>
-          <a:p>
-            <a:r>
-              <a:rPr lang="en-US" noProof="1"/>
-              <a:t>Affordability is the main draw for our consumers to our product</a:t>
-            </a:r>
-          </a:p>
-        </p:txBody>
-      </p:sp>
-      <p:sp>
-        <p:nvSpPr>
-          <p:cNvPr id="7" name="Text Placeholder 6">
-            <a:extLst>
-              <a:ext uri="{FF2B5EF4-FFF2-40B4-BE49-F238E27FC236}">
-                <a16:creationId xmlns:a16="http://schemas.microsoft.com/office/drawing/2014/main" id="{578017FE-712E-4E95-B483-B700F1AA4B2A}"/>
-              </a:ext>
-            </a:extLst>
-          </p:cNvPr>
-          <p:cNvSpPr>
-            <a:spLocks noGrp="1"/>
-          </p:cNvSpPr>
-          <p:nvPr>
-            <p:ph type="body" sz="quarter" idx="3"/>
-          </p:nvPr>
-        </p:nvSpPr>
-        <p:spPr>
-          <a:xfrm>
-            <a:off x="7410173" y="2776936"/>
-            <a:ext cx="3943627" cy="823912"/>
+              <a:t>$3B</a:t>
+            </a:r>
+          </a:p>
+        </p:txBody>
+      </p:sp>
+      <p:sp>
+        <p:nvSpPr>
+          <p:cNvPr id="10" name="Text Placeholder 9">
+            <a:extLst>
+              <a:ext uri="{FF2B5EF4-FFF2-40B4-BE49-F238E27FC236}">
+                <a16:creationId xmlns:a16="http://schemas.microsoft.com/office/drawing/2014/main" id="{7C7E7B18-D05F-4C44-8718-8C671160FC98}"/>
+              </a:ext>
+            </a:extLst>
+          </p:cNvPr>
+          <p:cNvSpPr>
+            <a:spLocks noGrp="1"/>
+          </p:cNvSpPr>
+          <p:nvPr>
+            <p:ph type="body" idx="15"/>
+          </p:nvPr>
+        </p:nvSpPr>
+        <p:spPr>
+          <a:xfrm>
+            <a:off x="5475514" y="3064615"/>
+            <a:ext cx="1240971" cy="823912"/>
           </a:xfrm>
         </p:spPr>
         <p:txBody>
@@ -19839,31 +20261,31 @@
           <a:p>
             <a:r>
               <a:rPr lang="en-US" dirty="0"/>
-              <a:t>COMPETITORS</a:t>
-            </a:r>
-          </a:p>
-        </p:txBody>
-      </p:sp>
-      <p:sp>
-        <p:nvSpPr>
-          <p:cNvPr id="11" name="Content Placeholder 10">
-            <a:extLst>
-              <a:ext uri="{FF2B5EF4-FFF2-40B4-BE49-F238E27FC236}">
-                <a16:creationId xmlns:a16="http://schemas.microsoft.com/office/drawing/2014/main" id="{D0E0ACA0-9139-4C37-920D-BF3C1FF461C1}"/>
-              </a:ext>
-            </a:extLst>
-          </p:cNvPr>
-          <p:cNvSpPr>
-            <a:spLocks noGrp="1"/>
-          </p:cNvSpPr>
-          <p:nvPr>
-            <p:ph sz="quarter" idx="4"/>
-          </p:nvPr>
-        </p:nvSpPr>
-        <p:spPr>
-          <a:xfrm>
-            <a:off x="7410173" y="3834606"/>
-            <a:ext cx="3943627" cy="1997867"/>
+              <a:t>$2B</a:t>
+            </a:r>
+          </a:p>
+        </p:txBody>
+      </p:sp>
+      <p:sp>
+        <p:nvSpPr>
+          <p:cNvPr id="11" name="Text Placeholder 10">
+            <a:extLst>
+              <a:ext uri="{FF2B5EF4-FFF2-40B4-BE49-F238E27FC236}">
+                <a16:creationId xmlns:a16="http://schemas.microsoft.com/office/drawing/2014/main" id="{C4EAD5C6-02F0-4D27-8D85-1BD5EA833D6F}"/>
+              </a:ext>
+            </a:extLst>
+          </p:cNvPr>
+          <p:cNvSpPr>
+            <a:spLocks noGrp="1"/>
+          </p:cNvSpPr>
+          <p:nvPr>
+            <p:ph type="body" idx="16"/>
+          </p:nvPr>
+        </p:nvSpPr>
+        <p:spPr>
+          <a:xfrm>
+            <a:off x="8887174" y="3064615"/>
+            <a:ext cx="1240971" cy="823912"/>
           </a:xfrm>
         </p:spPr>
         <p:txBody>
@@ -19871,51 +20293,216 @@
           <a:lstStyle/>
           <a:p>
             <a:r>
-              <a:rPr lang="en-US" noProof="1"/>
-              <a:t>Company A</a:t>
-            </a:r>
-            <a:br>
-              <a:rPr lang="en-US" noProof="1"/>
-            </a:br>
-            <a:r>
-              <a:rPr lang="en-US" noProof="1"/>
-              <a:t>Product is more expensive</a:t>
-            </a:r>
-          </a:p>
-          <a:p>
-            <a:r>
-              <a:rPr lang="en-US" noProof="1"/>
-              <a:t>Companies B &amp; C </a:t>
-            </a:r>
-            <a:br>
-              <a:rPr lang="en-US" noProof="1"/>
-            </a:br>
-            <a:r>
-              <a:rPr lang="en-US" noProof="1"/>
-              <a:t>Product is expensive and inconvenient to use</a:t>
-            </a:r>
-          </a:p>
-          <a:p>
-            <a:r>
-              <a:rPr lang="en-US" noProof="1"/>
-              <a:t>Companies D &amp; E</a:t>
-            </a:r>
-            <a:br>
-              <a:rPr lang="en-US" noProof="1"/>
-            </a:br>
-            <a:r>
-              <a:rPr lang="en-US" noProof="1"/>
-              <a:t>Product is affordable, but inconvenient to use</a:t>
-            </a:r>
-          </a:p>
-        </p:txBody>
-      </p:sp>
-      <p:sp>
-        <p:nvSpPr>
-          <p:cNvPr id="12" name="Date Placeholder 11">
-            <a:extLst>
-              <a:ext uri="{FF2B5EF4-FFF2-40B4-BE49-F238E27FC236}">
-                <a16:creationId xmlns:a16="http://schemas.microsoft.com/office/drawing/2014/main" id="{5909F2DC-F097-42AB-88E7-0CA09BD5E2C2}"/>
+              <a:rPr lang="en-US" dirty="0"/>
+              <a:t>$1B</a:t>
+            </a:r>
+          </a:p>
+        </p:txBody>
+      </p:sp>
+      <p:sp>
+        <p:nvSpPr>
+          <p:cNvPr id="19" name="Content Placeholder 18">
+            <a:extLst>
+              <a:ext uri="{FF2B5EF4-FFF2-40B4-BE49-F238E27FC236}">
+                <a16:creationId xmlns:a16="http://schemas.microsoft.com/office/drawing/2014/main" id="{791D6145-F7F7-43DE-A16B-BF4F9607D4E8}"/>
+              </a:ext>
+            </a:extLst>
+          </p:cNvPr>
+          <p:cNvSpPr>
+            <a:spLocks noGrp="1"/>
+          </p:cNvSpPr>
+          <p:nvPr>
+            <p:ph sz="half" idx="2"/>
+          </p:nvPr>
+        </p:nvSpPr>
+        <p:spPr>
+          <a:xfrm>
+            <a:off x="1129698" y="4824188"/>
+            <a:ext cx="3124093" cy="462927"/>
+          </a:xfrm>
+        </p:spPr>
+        <p:txBody>
+          <a:bodyPr/>
+          <a:lstStyle/>
+          <a:p>
+            <a:r>
+              <a:rPr lang="en-US" dirty="0"/>
+              <a:t>Opportunity to build</a:t>
+            </a:r>
+          </a:p>
+        </p:txBody>
+      </p:sp>
+      <p:sp>
+        <p:nvSpPr>
+          <p:cNvPr id="20" name="Content Placeholder 19">
+            <a:extLst>
+              <a:ext uri="{FF2B5EF4-FFF2-40B4-BE49-F238E27FC236}">
+                <a16:creationId xmlns:a16="http://schemas.microsoft.com/office/drawing/2014/main" id="{BC46925A-8382-42EB-891C-DBB4EAAA33F8}"/>
+              </a:ext>
+            </a:extLst>
+          </p:cNvPr>
+          <p:cNvSpPr>
+            <a:spLocks noGrp="1"/>
+          </p:cNvSpPr>
+          <p:nvPr>
+            <p:ph sz="quarter" idx="4"/>
+          </p:nvPr>
+        </p:nvSpPr>
+        <p:spPr>
+          <a:xfrm>
+            <a:off x="4526261" y="4824188"/>
+            <a:ext cx="3139479" cy="462927"/>
+          </a:xfrm>
+        </p:spPr>
+        <p:txBody>
+          <a:bodyPr/>
+          <a:lstStyle/>
+          <a:p>
+            <a:r>
+              <a:rPr lang="en-US" dirty="0"/>
+              <a:t>Freedom to invent</a:t>
+            </a:r>
+          </a:p>
+        </p:txBody>
+      </p:sp>
+      <p:sp>
+        <p:nvSpPr>
+          <p:cNvPr id="21" name="Content Placeholder 20">
+            <a:extLst>
+              <a:ext uri="{FF2B5EF4-FFF2-40B4-BE49-F238E27FC236}">
+                <a16:creationId xmlns:a16="http://schemas.microsoft.com/office/drawing/2014/main" id="{318AFADE-B54F-4988-8000-B9336A395336}"/>
+              </a:ext>
+            </a:extLst>
+          </p:cNvPr>
+          <p:cNvSpPr>
+            <a:spLocks noGrp="1"/>
+          </p:cNvSpPr>
+          <p:nvPr>
+            <p:ph sz="half" idx="14"/>
+          </p:nvPr>
+        </p:nvSpPr>
+        <p:spPr>
+          <a:xfrm>
+            <a:off x="7938210" y="4824188"/>
+            <a:ext cx="3124093" cy="462927"/>
+          </a:xfrm>
+        </p:spPr>
+        <p:txBody>
+          <a:bodyPr/>
+          <a:lstStyle/>
+          <a:p>
+            <a:r>
+              <a:rPr lang="en-US" dirty="0"/>
+              <a:t>Few competitors</a:t>
+            </a:r>
+          </a:p>
+        </p:txBody>
+      </p:sp>
+      <p:sp>
+        <p:nvSpPr>
+          <p:cNvPr id="22" name="Content Placeholder 21">
+            <a:extLst>
+              <a:ext uri="{FF2B5EF4-FFF2-40B4-BE49-F238E27FC236}">
+                <a16:creationId xmlns:a16="http://schemas.microsoft.com/office/drawing/2014/main" id="{F296843C-0ED0-4314-A6F0-DD60C828DDFB}"/>
+              </a:ext>
+            </a:extLst>
+          </p:cNvPr>
+          <p:cNvSpPr>
+            <a:spLocks noGrp="1"/>
+          </p:cNvSpPr>
+          <p:nvPr>
+            <p:ph sz="half" idx="17"/>
+          </p:nvPr>
+        </p:nvSpPr>
+        <p:spPr>
+          <a:xfrm>
+            <a:off x="1129698" y="5280763"/>
+            <a:ext cx="3124093" cy="462927"/>
+          </a:xfrm>
+        </p:spPr>
+        <p:txBody>
+          <a:bodyPr/>
+          <a:lstStyle/>
+          <a:p>
+            <a:r>
+              <a:rPr lang="en-US" dirty="0"/>
+              <a:t>Addressable market</a:t>
+            </a:r>
+          </a:p>
+        </p:txBody>
+      </p:sp>
+      <p:sp>
+        <p:nvSpPr>
+          <p:cNvPr id="23" name="Content Placeholder 22">
+            <a:extLst>
+              <a:ext uri="{FF2B5EF4-FFF2-40B4-BE49-F238E27FC236}">
+                <a16:creationId xmlns:a16="http://schemas.microsoft.com/office/drawing/2014/main" id="{649BF20C-562E-400E-BEA6-1D5F81F2FE44}"/>
+              </a:ext>
+            </a:extLst>
+          </p:cNvPr>
+          <p:cNvSpPr>
+            <a:spLocks noGrp="1"/>
+          </p:cNvSpPr>
+          <p:nvPr>
+            <p:ph sz="quarter" idx="18"/>
+          </p:nvPr>
+        </p:nvSpPr>
+        <p:spPr>
+          <a:xfrm>
+            <a:off x="4526261" y="5280763"/>
+            <a:ext cx="3139479" cy="462927"/>
+          </a:xfrm>
+        </p:spPr>
+        <p:txBody>
+          <a:bodyPr/>
+          <a:lstStyle/>
+          <a:p>
+            <a:r>
+              <a:rPr lang="en-US" dirty="0"/>
+              <a:t>Serviceable market</a:t>
+            </a:r>
+          </a:p>
+        </p:txBody>
+      </p:sp>
+      <p:sp>
+        <p:nvSpPr>
+          <p:cNvPr id="24" name="Content Placeholder 23">
+            <a:extLst>
+              <a:ext uri="{FF2B5EF4-FFF2-40B4-BE49-F238E27FC236}">
+                <a16:creationId xmlns:a16="http://schemas.microsoft.com/office/drawing/2014/main" id="{5AA25980-D334-4FC0-9091-936E53B8D321}"/>
+              </a:ext>
+            </a:extLst>
+          </p:cNvPr>
+          <p:cNvSpPr>
+            <a:spLocks noGrp="1"/>
+          </p:cNvSpPr>
+          <p:nvPr>
+            <p:ph sz="half" idx="19"/>
+          </p:nvPr>
+        </p:nvSpPr>
+        <p:spPr>
+          <a:xfrm>
+            <a:off x="7938210" y="5280763"/>
+            <a:ext cx="3124093" cy="462927"/>
+          </a:xfrm>
+        </p:spPr>
+        <p:txBody>
+          <a:bodyPr/>
+          <a:lstStyle/>
+          <a:p>
+            <a:r>
+              <a:rPr lang="en-US" dirty="0"/>
+              <a:t>Obtainable market</a:t>
+            </a:r>
+          </a:p>
+        </p:txBody>
+      </p:sp>
+      <p:sp>
+        <p:nvSpPr>
+          <p:cNvPr id="5" name="Date Placeholder 4">
+            <a:extLst>
+              <a:ext uri="{FF2B5EF4-FFF2-40B4-BE49-F238E27FC236}">
+                <a16:creationId xmlns:a16="http://schemas.microsoft.com/office/drawing/2014/main" id="{79C22D8C-87A6-47AD-8D29-FBBA539EDBE2}"/>
               </a:ext>
             </a:extLst>
           </p:cNvPr>
@@ -19945,10 +20532,10 @@
       </p:sp>
       <p:sp>
         <p:nvSpPr>
-          <p:cNvPr id="13" name="Footer Placeholder 12">
-            <a:extLst>
-              <a:ext uri="{FF2B5EF4-FFF2-40B4-BE49-F238E27FC236}">
-                <a16:creationId xmlns:a16="http://schemas.microsoft.com/office/drawing/2014/main" id="{F4A37AA9-0BEE-42AC-8CC0-AE5B8663553A}"/>
+          <p:cNvPr id="6" name="Footer Placeholder 5">
+            <a:extLst>
+              <a:ext uri="{FF2B5EF4-FFF2-40B4-BE49-F238E27FC236}">
+                <a16:creationId xmlns:a16="http://schemas.microsoft.com/office/drawing/2014/main" id="{4D346909-C2E0-4F1D-90FC-F5E1D8DFB515}"/>
               </a:ext>
             </a:extLst>
           </p:cNvPr>
@@ -19978,10 +20565,10 @@
       </p:sp>
       <p:sp>
         <p:nvSpPr>
-          <p:cNvPr id="14" name="Slide Number Placeholder 13">
-            <a:extLst>
-              <a:ext uri="{FF2B5EF4-FFF2-40B4-BE49-F238E27FC236}">
-                <a16:creationId xmlns:a16="http://schemas.microsoft.com/office/drawing/2014/main" id="{42152A75-1CD2-44EC-9374-C83D4604A5DD}"/>
+          <p:cNvPr id="7" name="Slide Number Placeholder 6">
+            <a:extLst>
+              <a:ext uri="{FF2B5EF4-FFF2-40B4-BE49-F238E27FC236}">
+                <a16:creationId xmlns:a16="http://schemas.microsoft.com/office/drawing/2014/main" id="{EBC02F21-4E3C-469E-B11C-9214231082D3}"/>
               </a:ext>
             </a:extLst>
           </p:cNvPr>
@@ -20014,7 +20601,7 @@
     </p:spTree>
     <p:extLst>
       <p:ext uri="{BB962C8B-B14F-4D97-AF65-F5344CB8AC3E}">
-        <p14:creationId xmlns:p14="http://schemas.microsoft.com/office/powerpoint/2010/main" val="4151694508"/>
+        <p14:creationId xmlns:p14="http://schemas.microsoft.com/office/powerpoint/2010/main" val="404854312"/>
       </p:ext>
     </p:extLst>
   </p:cSld>
@@ -20043,6 +20630,349 @@
       </p:grpSpPr>
       <p:sp>
         <p:nvSpPr>
+          <p:cNvPr id="4" name="Title 3">
+            <a:extLst>
+              <a:ext uri="{FF2B5EF4-FFF2-40B4-BE49-F238E27FC236}">
+                <a16:creationId xmlns:a16="http://schemas.microsoft.com/office/drawing/2014/main" id="{FAD2AE59-5630-4D5C-83A9-4CDEF4D7DCFB}"/>
+              </a:ext>
+            </a:extLst>
+          </p:cNvPr>
+          <p:cNvSpPr>
+            <a:spLocks noGrp="1"/>
+          </p:cNvSpPr>
+          <p:nvPr>
+            <p:ph type="title"/>
+          </p:nvPr>
+        </p:nvSpPr>
+        <p:spPr>
+          <a:xfrm>
+            <a:off x="2933700" y="892177"/>
+            <a:ext cx="8421688" cy="1325563"/>
+          </a:xfrm>
+        </p:spPr>
+        <p:txBody>
+          <a:bodyPr/>
+          <a:lstStyle/>
+          <a:p>
+            <a:r>
+              <a:rPr lang="en-US" dirty="0"/>
+              <a:t>OUR COMPETITION</a:t>
+            </a:r>
+          </a:p>
+        </p:txBody>
+      </p:sp>
+      <p:sp>
+        <p:nvSpPr>
+          <p:cNvPr id="5" name="Text Placeholder 4">
+            <a:extLst>
+              <a:ext uri="{FF2B5EF4-FFF2-40B4-BE49-F238E27FC236}">
+                <a16:creationId xmlns:a16="http://schemas.microsoft.com/office/drawing/2014/main" id="{F8657664-A458-4DDD-ACC2-1D87FCD6FCA9}"/>
+              </a:ext>
+            </a:extLst>
+          </p:cNvPr>
+          <p:cNvSpPr>
+            <a:spLocks noGrp="1"/>
+          </p:cNvSpPr>
+          <p:nvPr>
+            <p:ph type="body" idx="1"/>
+          </p:nvPr>
+        </p:nvSpPr>
+        <p:spPr>
+          <a:xfrm>
+            <a:off x="2933700" y="2776936"/>
+            <a:ext cx="3924300" cy="823912"/>
+          </a:xfrm>
+        </p:spPr>
+        <p:txBody>
+          <a:bodyPr/>
+          <a:lstStyle/>
+          <a:p>
+            <a:r>
+              <a:rPr lang="en-US" dirty="0"/>
+              <a:t>CONTOSO</a:t>
+            </a:r>
+          </a:p>
+        </p:txBody>
+      </p:sp>
+      <p:sp>
+        <p:nvSpPr>
+          <p:cNvPr id="6" name="Content Placeholder 5">
+            <a:extLst>
+              <a:ext uri="{FF2B5EF4-FFF2-40B4-BE49-F238E27FC236}">
+                <a16:creationId xmlns:a16="http://schemas.microsoft.com/office/drawing/2014/main" id="{5A6B31B0-7B84-475D-961F-09C0191F91A2}"/>
+              </a:ext>
+            </a:extLst>
+          </p:cNvPr>
+          <p:cNvSpPr>
+            <a:spLocks noGrp="1"/>
+          </p:cNvSpPr>
+          <p:nvPr>
+            <p:ph sz="half" idx="2"/>
+          </p:nvPr>
+        </p:nvSpPr>
+        <p:spPr>
+          <a:xfrm>
+            <a:off x="2933700" y="3834606"/>
+            <a:ext cx="3924300" cy="1997867"/>
+          </a:xfrm>
+        </p:spPr>
+        <p:txBody>
+          <a:bodyPr vert="horz" lIns="91440" tIns="45720" rIns="91440" bIns="45720" rtlCol="0" anchor="t">
+            <a:normAutofit/>
+          </a:bodyPr>
+          <a:lstStyle/>
+          <a:p>
+            <a:r>
+              <a:rPr lang="en-US" noProof="1"/>
+              <a:t>Our product is priced below that of other companies on the market</a:t>
+            </a:r>
+          </a:p>
+          <a:p>
+            <a:r>
+              <a:rPr lang="en-US" noProof="1"/>
+              <a:t>Design is simple and easy to use, compared to the complex designs of the competitors</a:t>
+            </a:r>
+          </a:p>
+          <a:p>
+            <a:r>
+              <a:rPr lang="en-US" noProof="1"/>
+              <a:t>Affordability is the main draw for our consumers to our product</a:t>
+            </a:r>
+          </a:p>
+        </p:txBody>
+      </p:sp>
+      <p:sp>
+        <p:nvSpPr>
+          <p:cNvPr id="7" name="Text Placeholder 6">
+            <a:extLst>
+              <a:ext uri="{FF2B5EF4-FFF2-40B4-BE49-F238E27FC236}">
+                <a16:creationId xmlns:a16="http://schemas.microsoft.com/office/drawing/2014/main" id="{578017FE-712E-4E95-B483-B700F1AA4B2A}"/>
+              </a:ext>
+            </a:extLst>
+          </p:cNvPr>
+          <p:cNvSpPr>
+            <a:spLocks noGrp="1"/>
+          </p:cNvSpPr>
+          <p:nvPr>
+            <p:ph type="body" sz="quarter" idx="3"/>
+          </p:nvPr>
+        </p:nvSpPr>
+        <p:spPr>
+          <a:xfrm>
+            <a:off x="7410173" y="2776936"/>
+            <a:ext cx="3943627" cy="823912"/>
+          </a:xfrm>
+        </p:spPr>
+        <p:txBody>
+          <a:bodyPr/>
+          <a:lstStyle/>
+          <a:p>
+            <a:r>
+              <a:rPr lang="en-US" dirty="0"/>
+              <a:t>COMPETITORS</a:t>
+            </a:r>
+          </a:p>
+        </p:txBody>
+      </p:sp>
+      <p:sp>
+        <p:nvSpPr>
+          <p:cNvPr id="11" name="Content Placeholder 10">
+            <a:extLst>
+              <a:ext uri="{FF2B5EF4-FFF2-40B4-BE49-F238E27FC236}">
+                <a16:creationId xmlns:a16="http://schemas.microsoft.com/office/drawing/2014/main" id="{D0E0ACA0-9139-4C37-920D-BF3C1FF461C1}"/>
+              </a:ext>
+            </a:extLst>
+          </p:cNvPr>
+          <p:cNvSpPr>
+            <a:spLocks noGrp="1"/>
+          </p:cNvSpPr>
+          <p:nvPr>
+            <p:ph sz="quarter" idx="4"/>
+          </p:nvPr>
+        </p:nvSpPr>
+        <p:spPr>
+          <a:xfrm>
+            <a:off x="7410173" y="3834606"/>
+            <a:ext cx="3943627" cy="1997867"/>
+          </a:xfrm>
+        </p:spPr>
+        <p:txBody>
+          <a:bodyPr/>
+          <a:lstStyle/>
+          <a:p>
+            <a:r>
+              <a:rPr lang="en-US" noProof="1"/>
+              <a:t>Company A</a:t>
+            </a:r>
+            <a:br>
+              <a:rPr lang="en-US" noProof="1"/>
+            </a:br>
+            <a:r>
+              <a:rPr lang="en-US" noProof="1"/>
+              <a:t>Product is more expensive</a:t>
+            </a:r>
+          </a:p>
+          <a:p>
+            <a:r>
+              <a:rPr lang="en-US" noProof="1"/>
+              <a:t>Companies B &amp; C </a:t>
+            </a:r>
+            <a:br>
+              <a:rPr lang="en-US" noProof="1"/>
+            </a:br>
+            <a:r>
+              <a:rPr lang="en-US" noProof="1"/>
+              <a:t>Product is expensive and inconvenient to use</a:t>
+            </a:r>
+          </a:p>
+          <a:p>
+            <a:r>
+              <a:rPr lang="en-US" noProof="1"/>
+              <a:t>Companies D &amp; E</a:t>
+            </a:r>
+            <a:br>
+              <a:rPr lang="en-US" noProof="1"/>
+            </a:br>
+            <a:r>
+              <a:rPr lang="en-US" noProof="1"/>
+              <a:t>Product is affordable, but inconvenient to use</a:t>
+            </a:r>
+          </a:p>
+        </p:txBody>
+      </p:sp>
+      <p:sp>
+        <p:nvSpPr>
+          <p:cNvPr id="12" name="Date Placeholder 11">
+            <a:extLst>
+              <a:ext uri="{FF2B5EF4-FFF2-40B4-BE49-F238E27FC236}">
+                <a16:creationId xmlns:a16="http://schemas.microsoft.com/office/drawing/2014/main" id="{5909F2DC-F097-42AB-88E7-0CA09BD5E2C2}"/>
+              </a:ext>
+            </a:extLst>
+          </p:cNvPr>
+          <p:cNvSpPr>
+            <a:spLocks noGrp="1"/>
+          </p:cNvSpPr>
+          <p:nvPr>
+            <p:ph type="dt" sz="half" idx="10"/>
+          </p:nvPr>
+        </p:nvSpPr>
+        <p:spPr>
+          <a:xfrm>
+            <a:off x="838200" y="6356350"/>
+            <a:ext cx="2743200" cy="365125"/>
+          </a:xfrm>
+        </p:spPr>
+        <p:txBody>
+          <a:bodyPr/>
+          <a:lstStyle/>
+          <a:p>
+            <a:r>
+              <a:rPr lang="en-US" dirty="0"/>
+              <a:t>20XX</a:t>
+            </a:r>
+          </a:p>
+        </p:txBody>
+      </p:sp>
+      <p:sp>
+        <p:nvSpPr>
+          <p:cNvPr id="13" name="Footer Placeholder 12">
+            <a:extLst>
+              <a:ext uri="{FF2B5EF4-FFF2-40B4-BE49-F238E27FC236}">
+                <a16:creationId xmlns:a16="http://schemas.microsoft.com/office/drawing/2014/main" id="{F4A37AA9-0BEE-42AC-8CC0-AE5B8663553A}"/>
+              </a:ext>
+            </a:extLst>
+          </p:cNvPr>
+          <p:cNvSpPr>
+            <a:spLocks noGrp="1"/>
+          </p:cNvSpPr>
+          <p:nvPr>
+            <p:ph type="ftr" sz="quarter" idx="11"/>
+          </p:nvPr>
+        </p:nvSpPr>
+        <p:spPr>
+          <a:xfrm>
+            <a:off x="4038600" y="6356350"/>
+            <a:ext cx="4114800" cy="365125"/>
+          </a:xfrm>
+        </p:spPr>
+        <p:txBody>
+          <a:bodyPr/>
+          <a:lstStyle/>
+          <a:p>
+            <a:r>
+              <a:rPr lang="en-US" dirty="0"/>
+              <a:t>Pitch Deck</a:t>
+            </a:r>
+          </a:p>
+        </p:txBody>
+      </p:sp>
+      <p:sp>
+        <p:nvSpPr>
+          <p:cNvPr id="14" name="Slide Number Placeholder 13">
+            <a:extLst>
+              <a:ext uri="{FF2B5EF4-FFF2-40B4-BE49-F238E27FC236}">
+                <a16:creationId xmlns:a16="http://schemas.microsoft.com/office/drawing/2014/main" id="{42152A75-1CD2-44EC-9374-C83D4604A5DD}"/>
+              </a:ext>
+            </a:extLst>
+          </p:cNvPr>
+          <p:cNvSpPr>
+            <a:spLocks noGrp="1"/>
+          </p:cNvSpPr>
+          <p:nvPr>
+            <p:ph type="sldNum" sz="quarter" idx="12"/>
+          </p:nvPr>
+        </p:nvSpPr>
+        <p:spPr>
+          <a:xfrm>
+            <a:off x="8610600" y="6356350"/>
+            <a:ext cx="2743200" cy="365125"/>
+          </a:xfrm>
+        </p:spPr>
+        <p:txBody>
+          <a:bodyPr/>
+          <a:lstStyle/>
+          <a:p>
+            <a:fld id="{B5CEABB6-07DC-46E8-9B57-56EC44A396E5}" type="slidenum">
+              <a:rPr lang="en-US" smtClean="0"/>
+              <a:pPr/>
+              <a:t>12</a:t>
+            </a:fld>
+            <a:endParaRPr lang="en-US" dirty="0"/>
+          </a:p>
+        </p:txBody>
+      </p:sp>
+    </p:spTree>
+    <p:extLst>
+      <p:ext uri="{BB962C8B-B14F-4D97-AF65-F5344CB8AC3E}">
+        <p14:creationId xmlns:p14="http://schemas.microsoft.com/office/powerpoint/2010/main" val="4151694508"/>
+      </p:ext>
+    </p:extLst>
+  </p:cSld>
+  <p:clrMapOvr>
+    <a:masterClrMapping/>
+  </p:clrMapOvr>
+</p:sld>
+</file>
+
+<file path=ppt/slides/slide13.xml><?xml version="1.0" encoding="utf-8"?>
+<p:sld xmlns:a="http://schemas.openxmlformats.org/drawingml/2006/main" xmlns:r="http://schemas.openxmlformats.org/officeDocument/2006/relationships" xmlns:p="http://schemas.openxmlformats.org/presentationml/2006/main">
+  <p:cSld>
+    <p:spTree>
+      <p:nvGrpSpPr>
+        <p:cNvPr id="1" name=""/>
+        <p:cNvGrpSpPr/>
+        <p:nvPr/>
+      </p:nvGrpSpPr>
+      <p:grpSpPr>
+        <a:xfrm>
+          <a:off x="0" y="0"/>
+          <a:ext cx="0" cy="0"/>
+          <a:chOff x="0" y="0"/>
+          <a:chExt cx="0" cy="0"/>
+        </a:xfrm>
+      </p:grpSpPr>
+      <p:sp>
+        <p:nvSpPr>
           <p:cNvPr id="2" name="Title 1">
             <a:extLst>
               <a:ext uri="{FF2B5EF4-FFF2-40B4-BE49-F238E27FC236}">
@@ -20507,7 +21437,7 @@
             <a:fld id="{19B51A1E-902D-48AF-9020-955120F399B6}" type="slidenum">
               <a:rPr lang="en-US" smtClean="0"/>
               <a:pPr/>
-              <a:t>12</a:t>
+              <a:t>13</a:t>
             </a:fld>
             <a:endParaRPr lang="en-US" dirty="0"/>
           </a:p>
@@ -21576,7 +22506,7 @@
 </p:sld>
 </file>
 
-<file path=ppt/slides/slide13.xml><?xml version="1.0" encoding="utf-8"?>
+<file path=ppt/slides/slide14.xml><?xml version="1.0" encoding="utf-8"?>
 <p:sld xmlns:a="http://schemas.openxmlformats.org/drawingml/2006/main" xmlns:r="http://schemas.openxmlformats.org/officeDocument/2006/relationships" xmlns:p="http://schemas.openxmlformats.org/presentationml/2006/main">
   <p:cSld>
     <p:spTree>
@@ -21932,7 +22862,7 @@
             <a:fld id="{B5CEABB6-07DC-46E8-9B57-56EC44A396E5}" type="slidenum">
               <a:rPr lang="en-US" smtClean="0"/>
               <a:pPr/>
-              <a:t>13</a:t>
+              <a:t>14</a:t>
             </a:fld>
             <a:endParaRPr lang="en-US" dirty="0"/>
           </a:p>
@@ -21951,7 +22881,7 @@
 </p:sld>
 </file>
 
-<file path=ppt/slides/slide14.xml><?xml version="1.0" encoding="utf-8"?>
+<file path=ppt/slides/slide15.xml><?xml version="1.0" encoding="utf-8"?>
 <p:sld xmlns:a="http://schemas.openxmlformats.org/drawingml/2006/main" xmlns:r="http://schemas.openxmlformats.org/officeDocument/2006/relationships" xmlns:p="http://schemas.openxmlformats.org/presentationml/2006/main">
   <p:cSld>
     <p:spTree>
@@ -24237,7 +25167,7 @@
             <a:fld id="{B5CEABB6-07DC-46E8-9B57-56EC44A396E5}" type="slidenum">
               <a:rPr lang="en-US" smtClean="0"/>
               <a:pPr/>
-              <a:t>14</a:t>
+              <a:t>15</a:t>
             </a:fld>
             <a:endParaRPr lang="en-US" dirty="0"/>
           </a:p>
@@ -24348,7 +25278,7 @@
 </p:sld>
 </file>
 
-<file path=ppt/slides/slide15.xml><?xml version="1.0" encoding="utf-8"?>
+<file path=ppt/slides/slide16.xml><?xml version="1.0" encoding="utf-8"?>
 <p:sld xmlns:a="http://schemas.openxmlformats.org/drawingml/2006/main" xmlns:r="http://schemas.openxmlformats.org/officeDocument/2006/relationships" xmlns:p="http://schemas.openxmlformats.org/presentationml/2006/main">
   <p:cSld>
     <p:spTree>
@@ -27293,7 +28223,7 @@
             <a:fld id="{19B51A1E-902D-48AF-9020-955120F399B6}" type="slidenum">
               <a:rPr lang="en-US" smtClean="0"/>
               <a:pPr/>
-              <a:t>15</a:t>
+              <a:t>16</a:t>
             </a:fld>
             <a:endParaRPr lang="en-US" dirty="0"/>
           </a:p>
@@ -27312,7 +28242,7 @@
 </p:sld>
 </file>
 
-<file path=ppt/slides/slide16.xml><?xml version="1.0" encoding="utf-8"?>
+<file path=ppt/slides/slide17.xml><?xml version="1.0" encoding="utf-8"?>
 <p:sld xmlns:a="http://schemas.openxmlformats.org/drawingml/2006/main" xmlns:r="http://schemas.openxmlformats.org/officeDocument/2006/relationships" xmlns:p="http://schemas.openxmlformats.org/presentationml/2006/main">
   <p:cSld>
     <p:spTree>
@@ -27459,7 +28389,7 @@
             <a:fld id="{B5CEABB6-07DC-46E8-9B57-56EC44A396E5}" type="slidenum">
               <a:rPr lang="en-US" smtClean="0"/>
               <a:pPr/>
-              <a:t>16</a:t>
+              <a:t>17</a:t>
             </a:fld>
             <a:endParaRPr lang="en-US" dirty="0"/>
           </a:p>
@@ -30684,576 +31614,6 @@
 </p:sld>
 </file>
 
-<file path=ppt/slides/slide17.xml><?xml version="1.0" encoding="utf-8"?>
-<p:sld xmlns:a="http://schemas.openxmlformats.org/drawingml/2006/main" xmlns:r="http://schemas.openxmlformats.org/officeDocument/2006/relationships" xmlns:p="http://schemas.openxmlformats.org/presentationml/2006/main">
-  <p:cSld>
-    <p:spTree>
-      <p:nvGrpSpPr>
-        <p:cNvPr id="1" name=""/>
-        <p:cNvGrpSpPr/>
-        <p:nvPr/>
-      </p:nvGrpSpPr>
-      <p:grpSpPr>
-        <a:xfrm>
-          <a:off x="0" y="0"/>
-          <a:ext cx="0" cy="0"/>
-          <a:chOff x="0" y="0"/>
-          <a:chExt cx="0" cy="0"/>
-        </a:xfrm>
-      </p:grpSpPr>
-      <p:sp>
-        <p:nvSpPr>
-          <p:cNvPr id="2" name="Title 1">
-            <a:extLst>
-              <a:ext uri="{FF2B5EF4-FFF2-40B4-BE49-F238E27FC236}">
-                <a16:creationId xmlns:a16="http://schemas.microsoft.com/office/drawing/2014/main" id="{27A6F7BB-30A8-4980-AD4A-2FB0B53FA6C9}"/>
-              </a:ext>
-            </a:extLst>
-          </p:cNvPr>
-          <p:cNvSpPr>
-            <a:spLocks noGrp="1"/>
-          </p:cNvSpPr>
-          <p:nvPr>
-            <p:ph type="title"/>
-          </p:nvPr>
-        </p:nvSpPr>
-        <p:spPr>
-          <a:xfrm>
-            <a:off x="1885156" y="892177"/>
-            <a:ext cx="8421688" cy="1325563"/>
-          </a:xfrm>
-        </p:spPr>
-        <p:txBody>
-          <a:bodyPr/>
-          <a:lstStyle/>
-          <a:p>
-            <a:r>
-              <a:rPr lang="en-US" dirty="0"/>
-              <a:t>MEET THE TEAM</a:t>
-            </a:r>
-          </a:p>
-        </p:txBody>
-      </p:sp>
-      <p:pic>
-        <p:nvPicPr>
-          <p:cNvPr id="26" name="Picture Placeholder 25" descr="Team member headshot">
-            <a:extLst>
-              <a:ext uri="{FF2B5EF4-FFF2-40B4-BE49-F238E27FC236}">
-                <a16:creationId xmlns:a16="http://schemas.microsoft.com/office/drawing/2014/main" id="{E287A61C-B7FB-4B69-97E7-7B7AFC8A5D33}"/>
-              </a:ext>
-            </a:extLst>
-          </p:cNvPr>
-          <p:cNvPicPr>
-            <a:picLocks noGrp="1" noChangeAspect="1"/>
-          </p:cNvPicPr>
-          <p:nvPr>
-            <p:ph type="pic" sz="quarter" idx="14"/>
-          </p:nvPr>
-        </p:nvPicPr>
-        <p:blipFill rotWithShape="1">
-          <a:blip r:embed="rId2">
-            <a:extLst>
-              <a:ext uri="{28A0092B-C50C-407E-A947-70E740481C1C}">
-                <a14:useLocalDpi xmlns:a14="http://schemas.microsoft.com/office/drawing/2010/main" val="0"/>
-              </a:ext>
-            </a:extLst>
-          </a:blip>
-          <a:srcRect/>
-          <a:stretch/>
-        </p:blipFill>
-        <p:spPr>
-          <a:xfrm>
-            <a:off x="1487181" y="2886074"/>
-            <a:ext cx="1845511" cy="1845511"/>
-          </a:xfrm>
-        </p:spPr>
-      </p:pic>
-      <p:pic>
-        <p:nvPicPr>
-          <p:cNvPr id="47" name="Picture Placeholder 46" descr="Team member headshot">
-            <a:extLst>
-              <a:ext uri="{FF2B5EF4-FFF2-40B4-BE49-F238E27FC236}">
-                <a16:creationId xmlns:a16="http://schemas.microsoft.com/office/drawing/2014/main" id="{8AF5260A-2860-4F88-BA4D-70530D3E14AA}"/>
-              </a:ext>
-            </a:extLst>
-          </p:cNvPr>
-          <p:cNvPicPr>
-            <a:picLocks noGrp="1" noChangeAspect="1"/>
-          </p:cNvPicPr>
-          <p:nvPr>
-            <p:ph type="pic" sz="quarter" idx="15"/>
-          </p:nvPr>
-        </p:nvPicPr>
-        <p:blipFill rotWithShape="1">
-          <a:blip r:embed="rId3">
-            <a:extLst>
-              <a:ext uri="{28A0092B-C50C-407E-A947-70E740481C1C}">
-                <a14:useLocalDpi xmlns:a14="http://schemas.microsoft.com/office/drawing/2010/main" val="0"/>
-              </a:ext>
-            </a:extLst>
-          </a:blip>
-          <a:srcRect/>
-          <a:stretch/>
-        </p:blipFill>
-        <p:spPr>
-          <a:xfrm>
-            <a:off x="3836914" y="2886074"/>
-            <a:ext cx="1845511" cy="1845511"/>
-          </a:xfrm>
-        </p:spPr>
-      </p:pic>
-      <p:pic>
-        <p:nvPicPr>
-          <p:cNvPr id="45" name="Picture Placeholder 44" descr="Team member headshot">
-            <a:extLst>
-              <a:ext uri="{FF2B5EF4-FFF2-40B4-BE49-F238E27FC236}">
-                <a16:creationId xmlns:a16="http://schemas.microsoft.com/office/drawing/2014/main" id="{4442FA67-BF04-4E45-BFD9-78BF43789E09}"/>
-              </a:ext>
-            </a:extLst>
-          </p:cNvPr>
-          <p:cNvPicPr>
-            <a:picLocks noGrp="1" noChangeAspect="1"/>
-          </p:cNvPicPr>
-          <p:nvPr>
-            <p:ph type="pic" sz="quarter" idx="16"/>
-          </p:nvPr>
-        </p:nvPicPr>
-        <p:blipFill rotWithShape="1">
-          <a:blip r:embed="rId4">
-            <a:extLst>
-              <a:ext uri="{28A0092B-C50C-407E-A947-70E740481C1C}">
-                <a14:useLocalDpi xmlns:a14="http://schemas.microsoft.com/office/drawing/2010/main" val="0"/>
-              </a:ext>
-            </a:extLst>
-          </a:blip>
-          <a:srcRect/>
-          <a:stretch/>
-        </p:blipFill>
-        <p:spPr>
-          <a:xfrm>
-            <a:off x="6327578" y="2886074"/>
-            <a:ext cx="1845511" cy="1845511"/>
-          </a:xfrm>
-        </p:spPr>
-      </p:pic>
-      <p:pic>
-        <p:nvPicPr>
-          <p:cNvPr id="43" name="Picture Placeholder 42" descr="Team member headshot">
-            <a:extLst>
-              <a:ext uri="{FF2B5EF4-FFF2-40B4-BE49-F238E27FC236}">
-                <a16:creationId xmlns:a16="http://schemas.microsoft.com/office/drawing/2014/main" id="{F328CD15-EA0E-49AD-A3C6-5798A372AA53}"/>
-              </a:ext>
-            </a:extLst>
-          </p:cNvPr>
-          <p:cNvPicPr>
-            <a:picLocks noGrp="1" noChangeAspect="1"/>
-          </p:cNvPicPr>
-          <p:nvPr>
-            <p:ph type="pic" sz="quarter" idx="17"/>
-          </p:nvPr>
-        </p:nvPicPr>
-        <p:blipFill rotWithShape="1">
-          <a:blip r:embed="rId5">
-            <a:extLst>
-              <a:ext uri="{28A0092B-C50C-407E-A947-70E740481C1C}">
-                <a14:useLocalDpi xmlns:a14="http://schemas.microsoft.com/office/drawing/2010/main" val="0"/>
-              </a:ext>
-            </a:extLst>
-          </a:blip>
-          <a:srcRect/>
-          <a:stretch/>
-        </p:blipFill>
-        <p:spPr>
-          <a:xfrm>
-            <a:off x="8747458" y="2886074"/>
-            <a:ext cx="1845511" cy="1845511"/>
-          </a:xfrm>
-        </p:spPr>
-      </p:pic>
-      <p:sp>
-        <p:nvSpPr>
-          <p:cNvPr id="24" name="Text Placeholder 23">
-            <a:extLst>
-              <a:ext uri="{FF2B5EF4-FFF2-40B4-BE49-F238E27FC236}">
-                <a16:creationId xmlns:a16="http://schemas.microsoft.com/office/drawing/2014/main" id="{7BAD1FFF-8B97-4CD1-85E7-B7738EAD28CD}"/>
-              </a:ext>
-            </a:extLst>
-          </p:cNvPr>
-          <p:cNvSpPr>
-            <a:spLocks noGrp="1"/>
-          </p:cNvSpPr>
-          <p:nvPr>
-            <p:ph type="body" idx="1"/>
-          </p:nvPr>
-        </p:nvSpPr>
-        <p:spPr>
-          <a:xfrm>
-            <a:off x="1343248" y="5084524"/>
-            <a:ext cx="2123743" cy="343061"/>
-          </a:xfrm>
-        </p:spPr>
-        <p:txBody>
-          <a:bodyPr/>
-          <a:lstStyle/>
-          <a:p>
-            <a:r>
-              <a:rPr lang="en-US" dirty="0"/>
-              <a:t>TAKUMA HAYASHI​</a:t>
-            </a:r>
-          </a:p>
-        </p:txBody>
-      </p:sp>
-      <p:sp>
-        <p:nvSpPr>
-          <p:cNvPr id="33" name="Text Placeholder 32">
-            <a:extLst>
-              <a:ext uri="{FF2B5EF4-FFF2-40B4-BE49-F238E27FC236}">
-                <a16:creationId xmlns:a16="http://schemas.microsoft.com/office/drawing/2014/main" id="{10C8C8C1-99D8-4034-A628-DECEB703BA1D}"/>
-              </a:ext>
-            </a:extLst>
-          </p:cNvPr>
-          <p:cNvSpPr>
-            <a:spLocks noGrp="1"/>
-          </p:cNvSpPr>
-          <p:nvPr>
-            <p:ph type="body" idx="18"/>
-          </p:nvPr>
-        </p:nvSpPr>
-        <p:spPr>
-          <a:xfrm>
-            <a:off x="3692980" y="5099206"/>
-            <a:ext cx="2135755" cy="343061"/>
-          </a:xfrm>
-        </p:spPr>
-        <p:txBody>
-          <a:bodyPr/>
-          <a:lstStyle/>
-          <a:p>
-            <a:r>
-              <a:rPr lang="en-US" dirty="0"/>
-              <a:t>MIRJAM NILSSON​</a:t>
-            </a:r>
-          </a:p>
-        </p:txBody>
-      </p:sp>
-      <p:sp>
-        <p:nvSpPr>
-          <p:cNvPr id="34" name="Text Placeholder 33">
-            <a:extLst>
-              <a:ext uri="{FF2B5EF4-FFF2-40B4-BE49-F238E27FC236}">
-                <a16:creationId xmlns:a16="http://schemas.microsoft.com/office/drawing/2014/main" id="{08CA58D6-00FD-4D81-A0F6-215C4D558912}"/>
-              </a:ext>
-            </a:extLst>
-          </p:cNvPr>
-          <p:cNvSpPr>
-            <a:spLocks noGrp="1"/>
-          </p:cNvSpPr>
-          <p:nvPr>
-            <p:ph type="body" idx="19"/>
-          </p:nvPr>
-        </p:nvSpPr>
-        <p:spPr>
-          <a:xfrm>
-            <a:off x="6183644" y="5099206"/>
-            <a:ext cx="2123743" cy="343061"/>
-          </a:xfrm>
-        </p:spPr>
-        <p:txBody>
-          <a:bodyPr/>
-          <a:lstStyle/>
-          <a:p>
-            <a:r>
-              <a:rPr lang="en-US" dirty="0"/>
-              <a:t>FLORA BERGGREN​</a:t>
-            </a:r>
-          </a:p>
-        </p:txBody>
-      </p:sp>
-      <p:sp>
-        <p:nvSpPr>
-          <p:cNvPr id="35" name="Text Placeholder 34">
-            <a:extLst>
-              <a:ext uri="{FF2B5EF4-FFF2-40B4-BE49-F238E27FC236}">
-                <a16:creationId xmlns:a16="http://schemas.microsoft.com/office/drawing/2014/main" id="{60D37431-6A3A-47F6-A367-B5ADCF66AE37}"/>
-              </a:ext>
-            </a:extLst>
-          </p:cNvPr>
-          <p:cNvSpPr>
-            <a:spLocks noGrp="1"/>
-          </p:cNvSpPr>
-          <p:nvPr>
-            <p:ph type="body" idx="20"/>
-          </p:nvPr>
-        </p:nvSpPr>
-        <p:spPr>
-          <a:xfrm>
-            <a:off x="8603525" y="5084524"/>
-            <a:ext cx="2123742" cy="343061"/>
-          </a:xfrm>
-        </p:spPr>
-        <p:txBody>
-          <a:bodyPr/>
-          <a:lstStyle/>
-          <a:p>
-            <a:r>
-              <a:rPr lang="en-US" dirty="0"/>
-              <a:t>RAJESH SANTOSHI​</a:t>
-            </a:r>
-          </a:p>
-        </p:txBody>
-      </p:sp>
-      <p:sp>
-        <p:nvSpPr>
-          <p:cNvPr id="36" name="Text Placeholder 35">
-            <a:extLst>
-              <a:ext uri="{FF2B5EF4-FFF2-40B4-BE49-F238E27FC236}">
-                <a16:creationId xmlns:a16="http://schemas.microsoft.com/office/drawing/2014/main" id="{B76FA389-A54D-4E4B-81DA-DBA175D78FEC}"/>
-              </a:ext>
-            </a:extLst>
-          </p:cNvPr>
-          <p:cNvSpPr>
-            <a:spLocks noGrp="1"/>
-          </p:cNvSpPr>
-          <p:nvPr>
-            <p:ph type="body" idx="21"/>
-          </p:nvPr>
-        </p:nvSpPr>
-        <p:spPr>
-          <a:xfrm>
-            <a:off x="1487181" y="5464114"/>
-            <a:ext cx="1845511" cy="343061"/>
-          </a:xfrm>
-        </p:spPr>
-        <p:txBody>
-          <a:bodyPr/>
-          <a:lstStyle/>
-          <a:p>
-            <a:r>
-              <a:rPr lang="en-US" dirty="0"/>
-              <a:t>President</a:t>
-            </a:r>
-          </a:p>
-        </p:txBody>
-      </p:sp>
-      <p:sp>
-        <p:nvSpPr>
-          <p:cNvPr id="37" name="Text Placeholder 36">
-            <a:extLst>
-              <a:ext uri="{FF2B5EF4-FFF2-40B4-BE49-F238E27FC236}">
-                <a16:creationId xmlns:a16="http://schemas.microsoft.com/office/drawing/2014/main" id="{65786675-BFC6-4743-BFD3-D64691F771D8}"/>
-              </a:ext>
-            </a:extLst>
-          </p:cNvPr>
-          <p:cNvSpPr>
-            <a:spLocks noGrp="1"/>
-          </p:cNvSpPr>
-          <p:nvPr>
-            <p:ph type="body" idx="22"/>
-          </p:nvPr>
-        </p:nvSpPr>
-        <p:spPr>
-          <a:xfrm>
-            <a:off x="3836913" y="5478796"/>
-            <a:ext cx="1855949" cy="343061"/>
-          </a:xfrm>
-        </p:spPr>
-        <p:txBody>
-          <a:bodyPr/>
-          <a:lstStyle/>
-          <a:p>
-            <a:r>
-              <a:rPr lang="en-US" dirty="0"/>
-              <a:t>Chief Executive Officer</a:t>
-            </a:r>
-          </a:p>
-        </p:txBody>
-      </p:sp>
-      <p:sp>
-        <p:nvSpPr>
-          <p:cNvPr id="38" name="Text Placeholder 37">
-            <a:extLst>
-              <a:ext uri="{FF2B5EF4-FFF2-40B4-BE49-F238E27FC236}">
-                <a16:creationId xmlns:a16="http://schemas.microsoft.com/office/drawing/2014/main" id="{97062F49-F468-4EA6-B6BF-94BFF89FDCB7}"/>
-              </a:ext>
-            </a:extLst>
-          </p:cNvPr>
-          <p:cNvSpPr>
-            <a:spLocks noGrp="1"/>
-          </p:cNvSpPr>
-          <p:nvPr>
-            <p:ph type="body" idx="23"/>
-          </p:nvPr>
-        </p:nvSpPr>
-        <p:spPr>
-          <a:xfrm>
-            <a:off x="6327577" y="5478796"/>
-            <a:ext cx="1845511" cy="343061"/>
-          </a:xfrm>
-        </p:spPr>
-        <p:txBody>
-          <a:bodyPr/>
-          <a:lstStyle/>
-          <a:p>
-            <a:r>
-              <a:rPr lang="en-US" dirty="0"/>
-              <a:t>Chief Operations Officer</a:t>
-            </a:r>
-          </a:p>
-          <a:p>
-            <a:endParaRPr lang="en-US" dirty="0"/>
-          </a:p>
-        </p:txBody>
-      </p:sp>
-      <p:sp>
-        <p:nvSpPr>
-          <p:cNvPr id="39" name="Text Placeholder 38">
-            <a:extLst>
-              <a:ext uri="{FF2B5EF4-FFF2-40B4-BE49-F238E27FC236}">
-                <a16:creationId xmlns:a16="http://schemas.microsoft.com/office/drawing/2014/main" id="{59D9F00A-8CF0-41E8-9BB6-3B8ECDA55D49}"/>
-              </a:ext>
-            </a:extLst>
-          </p:cNvPr>
-          <p:cNvSpPr>
-            <a:spLocks noGrp="1"/>
-          </p:cNvSpPr>
-          <p:nvPr>
-            <p:ph type="body" idx="24"/>
-          </p:nvPr>
-        </p:nvSpPr>
-        <p:spPr>
-          <a:xfrm>
-            <a:off x="8747458" y="5464114"/>
-            <a:ext cx="1845510" cy="343061"/>
-          </a:xfrm>
-        </p:spPr>
-        <p:txBody>
-          <a:bodyPr/>
-          <a:lstStyle/>
-          <a:p>
-            <a:r>
-              <a:rPr lang="en-US" dirty="0"/>
-              <a:t>VP Marketing</a:t>
-            </a:r>
-          </a:p>
-          <a:p>
-            <a:endParaRPr lang="en-US" dirty="0"/>
-          </a:p>
-        </p:txBody>
-      </p:sp>
-      <p:sp>
-        <p:nvSpPr>
-          <p:cNvPr id="3" name="Date Placeholder 2">
-            <a:extLst>
-              <a:ext uri="{FF2B5EF4-FFF2-40B4-BE49-F238E27FC236}">
-                <a16:creationId xmlns:a16="http://schemas.microsoft.com/office/drawing/2014/main" id="{02F9CC1F-102C-49CC-B646-8E6826368A81}"/>
-              </a:ext>
-            </a:extLst>
-          </p:cNvPr>
-          <p:cNvSpPr>
-            <a:spLocks noGrp="1"/>
-          </p:cNvSpPr>
-          <p:nvPr>
-            <p:ph type="dt" sz="half" idx="10"/>
-          </p:nvPr>
-        </p:nvSpPr>
-        <p:spPr>
-          <a:xfrm>
-            <a:off x="838200" y="6356350"/>
-            <a:ext cx="2743200" cy="365125"/>
-          </a:xfrm>
-        </p:spPr>
-        <p:txBody>
-          <a:bodyPr/>
-          <a:lstStyle/>
-          <a:p>
-            <a:r>
-              <a:rPr lang="en-US" dirty="0"/>
-              <a:t>20XX</a:t>
-            </a:r>
-          </a:p>
-        </p:txBody>
-      </p:sp>
-      <p:sp>
-        <p:nvSpPr>
-          <p:cNvPr id="4" name="Footer Placeholder 3">
-            <a:extLst>
-              <a:ext uri="{FF2B5EF4-FFF2-40B4-BE49-F238E27FC236}">
-                <a16:creationId xmlns:a16="http://schemas.microsoft.com/office/drawing/2014/main" id="{33808A03-6EC3-48BE-9D18-5A746D09243E}"/>
-              </a:ext>
-            </a:extLst>
-          </p:cNvPr>
-          <p:cNvSpPr>
-            <a:spLocks noGrp="1"/>
-          </p:cNvSpPr>
-          <p:nvPr>
-            <p:ph type="ftr" sz="quarter" idx="11"/>
-          </p:nvPr>
-        </p:nvSpPr>
-        <p:spPr>
-          <a:xfrm>
-            <a:off x="4038600" y="6356350"/>
-            <a:ext cx="4114800" cy="365125"/>
-          </a:xfrm>
-        </p:spPr>
-        <p:txBody>
-          <a:bodyPr/>
-          <a:lstStyle/>
-          <a:p>
-            <a:r>
-              <a:rPr lang="en-US" dirty="0"/>
-              <a:t>Pitch Deck</a:t>
-            </a:r>
-          </a:p>
-        </p:txBody>
-      </p:sp>
-      <p:sp>
-        <p:nvSpPr>
-          <p:cNvPr id="5" name="Slide Number Placeholder 4">
-            <a:extLst>
-              <a:ext uri="{FF2B5EF4-FFF2-40B4-BE49-F238E27FC236}">
-                <a16:creationId xmlns:a16="http://schemas.microsoft.com/office/drawing/2014/main" id="{46868410-BE8A-4C98-9C72-20D0A2A6A8B9}"/>
-              </a:ext>
-            </a:extLst>
-          </p:cNvPr>
-          <p:cNvSpPr>
-            <a:spLocks noGrp="1"/>
-          </p:cNvSpPr>
-          <p:nvPr>
-            <p:ph type="sldNum" sz="quarter" idx="12"/>
-          </p:nvPr>
-        </p:nvSpPr>
-        <p:spPr>
-          <a:xfrm>
-            <a:off x="8610600" y="6356350"/>
-            <a:ext cx="2743200" cy="365125"/>
-          </a:xfrm>
-        </p:spPr>
-        <p:txBody>
-          <a:bodyPr/>
-          <a:lstStyle/>
-          <a:p>
-            <a:fld id="{B5CEABB6-07DC-46E8-9B57-56EC44A396E5}" type="slidenum">
-              <a:rPr lang="en-US" smtClean="0"/>
-              <a:pPr/>
-              <a:t>17</a:t>
-            </a:fld>
-            <a:endParaRPr lang="en-US" dirty="0"/>
-          </a:p>
-        </p:txBody>
-      </p:sp>
-    </p:spTree>
-    <p:extLst>
-      <p:ext uri="{BB962C8B-B14F-4D97-AF65-F5344CB8AC3E}">
-        <p14:creationId xmlns:p14="http://schemas.microsoft.com/office/powerpoint/2010/main" val="3477453048"/>
-      </p:ext>
-    </p:extLst>
-  </p:cSld>
-  <p:clrMapOvr>
-    <a:masterClrMapping/>
-  </p:clrMapOvr>
-</p:sld>
-</file>
-
 <file path=ppt/slides/slide18.xml><?xml version="1.0" encoding="utf-8"?>
 <p:sld xmlns:a="http://schemas.openxmlformats.org/drawingml/2006/main" xmlns:r="http://schemas.openxmlformats.org/officeDocument/2006/relationships" xmlns:p="http://schemas.openxmlformats.org/presentationml/2006/main">
   <p:cSld>
@@ -31299,17 +31659,17 @@
           <a:p>
             <a:r>
               <a:rPr lang="en-US" dirty="0"/>
-              <a:t>MEET THE TEAM  </a:t>
+              <a:t>MEET THE TEAM</a:t>
             </a:r>
           </a:p>
         </p:txBody>
       </p:sp>
       <p:pic>
         <p:nvPicPr>
-          <p:cNvPr id="38" name="Picture Placeholder 37" descr="Team member headshot">
-            <a:extLst>
-              <a:ext uri="{FF2B5EF4-FFF2-40B4-BE49-F238E27FC236}">
-                <a16:creationId xmlns:a16="http://schemas.microsoft.com/office/drawing/2014/main" id="{6E64DC71-C9CE-47FF-A3B6-597A9B09EC98}"/>
+          <p:cNvPr id="26" name="Picture Placeholder 25" descr="Team member headshot">
+            <a:extLst>
+              <a:ext uri="{FF2B5EF4-FFF2-40B4-BE49-F238E27FC236}">
+                <a16:creationId xmlns:a16="http://schemas.microsoft.com/office/drawing/2014/main" id="{E287A61C-B7FB-4B69-97E7-7B7AFC8A5D33}"/>
               </a:ext>
             </a:extLst>
           </p:cNvPr>
@@ -31333,17 +31693,17 @@
         </p:blipFill>
         <p:spPr>
           <a:xfrm>
-            <a:off x="1877176" y="2428875"/>
-            <a:ext cx="1066800" cy="1066800"/>
+            <a:off x="1487181" y="2886074"/>
+            <a:ext cx="1845511" cy="1845511"/>
           </a:xfrm>
         </p:spPr>
       </p:pic>
       <p:pic>
         <p:nvPicPr>
-          <p:cNvPr id="42" name="Picture Placeholder 41" descr="Team member headshot">
-            <a:extLst>
-              <a:ext uri="{FF2B5EF4-FFF2-40B4-BE49-F238E27FC236}">
-                <a16:creationId xmlns:a16="http://schemas.microsoft.com/office/drawing/2014/main" id="{03BE9C30-CAE7-4AE5-8722-B20E200AC048}"/>
+          <p:cNvPr id="47" name="Picture Placeholder 46" descr="Team member headshot">
+            <a:extLst>
+              <a:ext uri="{FF2B5EF4-FFF2-40B4-BE49-F238E27FC236}">
+                <a16:creationId xmlns:a16="http://schemas.microsoft.com/office/drawing/2014/main" id="{8AF5260A-2860-4F88-BA4D-70530D3E14AA}"/>
               </a:ext>
             </a:extLst>
           </p:cNvPr>
@@ -31367,17 +31727,17 @@
         </p:blipFill>
         <p:spPr>
           <a:xfrm>
-            <a:off x="4226270" y="2428875"/>
-            <a:ext cx="1066800" cy="1066800"/>
+            <a:off x="3836914" y="2886074"/>
+            <a:ext cx="1845511" cy="1845511"/>
           </a:xfrm>
         </p:spPr>
       </p:pic>
       <p:pic>
         <p:nvPicPr>
-          <p:cNvPr id="46" name="Picture Placeholder 45" descr="Team member headshot">
-            <a:extLst>
-              <a:ext uri="{FF2B5EF4-FFF2-40B4-BE49-F238E27FC236}">
-                <a16:creationId xmlns:a16="http://schemas.microsoft.com/office/drawing/2014/main" id="{F8B9EE09-9F4E-47F5-82E5-A135C37A6E26}"/>
+          <p:cNvPr id="45" name="Picture Placeholder 44" descr="Team member headshot">
+            <a:extLst>
+              <a:ext uri="{FF2B5EF4-FFF2-40B4-BE49-F238E27FC236}">
+                <a16:creationId xmlns:a16="http://schemas.microsoft.com/office/drawing/2014/main" id="{4442FA67-BF04-4E45-BFD9-78BF43789E09}"/>
               </a:ext>
             </a:extLst>
           </p:cNvPr>
@@ -31401,17 +31761,17 @@
         </p:blipFill>
         <p:spPr>
           <a:xfrm>
-            <a:off x="6716934" y="2428875"/>
-            <a:ext cx="1066800" cy="1066800"/>
+            <a:off x="6327578" y="2886074"/>
+            <a:ext cx="1845511" cy="1845511"/>
           </a:xfrm>
         </p:spPr>
       </p:pic>
       <p:pic>
         <p:nvPicPr>
-          <p:cNvPr id="54" name="Picture Placeholder 53" descr="Team member headshot">
-            <a:extLst>
-              <a:ext uri="{FF2B5EF4-FFF2-40B4-BE49-F238E27FC236}">
-                <a16:creationId xmlns:a16="http://schemas.microsoft.com/office/drawing/2014/main" id="{B789A13E-52C8-4E94-89B2-D51A0739F00A}"/>
+          <p:cNvPr id="43" name="Picture Placeholder 42" descr="Team member headshot">
+            <a:extLst>
+              <a:ext uri="{FF2B5EF4-FFF2-40B4-BE49-F238E27FC236}">
+                <a16:creationId xmlns:a16="http://schemas.microsoft.com/office/drawing/2014/main" id="{F328CD15-EA0E-49AD-A3C6-5798A372AA53}"/>
               </a:ext>
             </a:extLst>
           </p:cNvPr>
@@ -31435,17 +31795,17 @@
         </p:blipFill>
         <p:spPr>
           <a:xfrm>
-            <a:off x="9136814" y="2428875"/>
-            <a:ext cx="1066800" cy="1066800"/>
+            <a:off x="8747458" y="2886074"/>
+            <a:ext cx="1845511" cy="1845511"/>
           </a:xfrm>
         </p:spPr>
       </p:pic>
       <p:sp>
         <p:nvSpPr>
-          <p:cNvPr id="36" name="Text Placeholder 35">
-            <a:extLst>
-              <a:ext uri="{FF2B5EF4-FFF2-40B4-BE49-F238E27FC236}">
-                <a16:creationId xmlns:a16="http://schemas.microsoft.com/office/drawing/2014/main" id="{23BA8AAF-B08B-441B-AAF3-590A568329BF}"/>
+          <p:cNvPr id="24" name="Text Placeholder 23">
+            <a:extLst>
+              <a:ext uri="{FF2B5EF4-FFF2-40B4-BE49-F238E27FC236}">
+                <a16:creationId xmlns:a16="http://schemas.microsoft.com/office/drawing/2014/main" id="{7BAD1FFF-8B97-4CD1-85E7-B7738EAD28CD}"/>
               </a:ext>
             </a:extLst>
           </p:cNvPr>
@@ -31458,8 +31818,8 @@
         </p:nvSpPr>
         <p:spPr>
           <a:xfrm>
-            <a:off x="1500168" y="3654378"/>
-            <a:ext cx="1828800" cy="343061"/>
+            <a:off x="1343248" y="5084524"/>
+            <a:ext cx="2123743" cy="343061"/>
           </a:xfrm>
         </p:spPr>
         <p:txBody>
@@ -31468,34 +31828,31 @@
           <a:p>
             <a:r>
               <a:rPr lang="en-US" dirty="0"/>
-              <a:t>TAKUMA HAYASHI</a:t>
-            </a:r>
-          </a:p>
-          <a:p>
-            <a:endParaRPr lang="en-US" dirty="0"/>
-          </a:p>
-        </p:txBody>
-      </p:sp>
-      <p:sp>
-        <p:nvSpPr>
-          <p:cNvPr id="52" name="Text Placeholder 51">
-            <a:extLst>
-              <a:ext uri="{FF2B5EF4-FFF2-40B4-BE49-F238E27FC236}">
-                <a16:creationId xmlns:a16="http://schemas.microsoft.com/office/drawing/2014/main" id="{E07741A2-243F-4086-945C-BCA1F24E6DB5}"/>
-              </a:ext>
-            </a:extLst>
-          </p:cNvPr>
-          <p:cNvSpPr>
-            <a:spLocks noGrp="1"/>
-          </p:cNvSpPr>
-          <p:nvPr>
-            <p:ph type="body" idx="21"/>
-          </p:nvPr>
-        </p:nvSpPr>
-        <p:spPr>
-          <a:xfrm>
-            <a:off x="1390120" y="3782039"/>
-            <a:ext cx="2057400" cy="343061"/>
+              <a:t>TAKUMA HAYASHI​</a:t>
+            </a:r>
+          </a:p>
+        </p:txBody>
+      </p:sp>
+      <p:sp>
+        <p:nvSpPr>
+          <p:cNvPr id="33" name="Text Placeholder 32">
+            <a:extLst>
+              <a:ext uri="{FF2B5EF4-FFF2-40B4-BE49-F238E27FC236}">
+                <a16:creationId xmlns:a16="http://schemas.microsoft.com/office/drawing/2014/main" id="{10C8C8C1-99D8-4034-A628-DECEB703BA1D}"/>
+              </a:ext>
+            </a:extLst>
+          </p:cNvPr>
+          <p:cNvSpPr>
+            <a:spLocks noGrp="1"/>
+          </p:cNvSpPr>
+          <p:nvPr>
+            <p:ph type="body" idx="18"/>
+          </p:nvPr>
+        </p:nvSpPr>
+        <p:spPr>
+          <a:xfrm>
+            <a:off x="3692980" y="5099206"/>
+            <a:ext cx="2135755" cy="343061"/>
           </a:xfrm>
         </p:spPr>
         <p:txBody>
@@ -31504,31 +31861,31 @@
           <a:p>
             <a:r>
               <a:rPr lang="en-US" dirty="0"/>
-              <a:t>President</a:t>
-            </a:r>
-          </a:p>
-        </p:txBody>
-      </p:sp>
-      <p:sp>
-        <p:nvSpPr>
-          <p:cNvPr id="49" name="Text Placeholder 48">
-            <a:extLst>
-              <a:ext uri="{FF2B5EF4-FFF2-40B4-BE49-F238E27FC236}">
-                <a16:creationId xmlns:a16="http://schemas.microsoft.com/office/drawing/2014/main" id="{27CB5CB7-B854-4F48-954C-5CF86CC9146D}"/>
-              </a:ext>
-            </a:extLst>
-          </p:cNvPr>
-          <p:cNvSpPr>
-            <a:spLocks noGrp="1"/>
-          </p:cNvSpPr>
-          <p:nvPr>
-            <p:ph type="body" idx="18"/>
-          </p:nvPr>
-        </p:nvSpPr>
-        <p:spPr>
-          <a:xfrm>
-            <a:off x="3849262" y="3669060"/>
-            <a:ext cx="1828800" cy="343061"/>
+              <a:t>MIRJAM NILSSON​</a:t>
+            </a:r>
+          </a:p>
+        </p:txBody>
+      </p:sp>
+      <p:sp>
+        <p:nvSpPr>
+          <p:cNvPr id="34" name="Text Placeholder 33">
+            <a:extLst>
+              <a:ext uri="{FF2B5EF4-FFF2-40B4-BE49-F238E27FC236}">
+                <a16:creationId xmlns:a16="http://schemas.microsoft.com/office/drawing/2014/main" id="{08CA58D6-00FD-4D81-A0F6-215C4D558912}"/>
+              </a:ext>
+            </a:extLst>
+          </p:cNvPr>
+          <p:cNvSpPr>
+            <a:spLocks noGrp="1"/>
+          </p:cNvSpPr>
+          <p:nvPr>
+            <p:ph type="body" idx="19"/>
+          </p:nvPr>
+        </p:nvSpPr>
+        <p:spPr>
+          <a:xfrm>
+            <a:off x="6183644" y="5099206"/>
+            <a:ext cx="2123743" cy="343061"/>
           </a:xfrm>
         </p:spPr>
         <p:txBody>
@@ -31537,31 +31894,31 @@
           <a:p>
             <a:r>
               <a:rPr lang="en-US" dirty="0"/>
-              <a:t>MIRJAM NILSSON​</a:t>
-            </a:r>
-          </a:p>
-        </p:txBody>
-      </p:sp>
-      <p:sp>
-        <p:nvSpPr>
-          <p:cNvPr id="61" name="Text Placeholder 60">
-            <a:extLst>
-              <a:ext uri="{FF2B5EF4-FFF2-40B4-BE49-F238E27FC236}">
-                <a16:creationId xmlns:a16="http://schemas.microsoft.com/office/drawing/2014/main" id="{F1C860E6-FF87-419F-8B26-B8EA4D5F3D3D}"/>
-              </a:ext>
-            </a:extLst>
-          </p:cNvPr>
-          <p:cNvSpPr>
-            <a:spLocks noGrp="1"/>
-          </p:cNvSpPr>
-          <p:nvPr>
-            <p:ph type="body" idx="22"/>
-          </p:nvPr>
-        </p:nvSpPr>
-        <p:spPr>
-          <a:xfrm>
-            <a:off x="3739214" y="3796721"/>
-            <a:ext cx="2057400" cy="343061"/>
+              <a:t>FLORA BERGGREN​</a:t>
+            </a:r>
+          </a:p>
+        </p:txBody>
+      </p:sp>
+      <p:sp>
+        <p:nvSpPr>
+          <p:cNvPr id="35" name="Text Placeholder 34">
+            <a:extLst>
+              <a:ext uri="{FF2B5EF4-FFF2-40B4-BE49-F238E27FC236}">
+                <a16:creationId xmlns:a16="http://schemas.microsoft.com/office/drawing/2014/main" id="{60D37431-6A3A-47F6-A367-B5ADCF66AE37}"/>
+              </a:ext>
+            </a:extLst>
+          </p:cNvPr>
+          <p:cNvSpPr>
+            <a:spLocks noGrp="1"/>
+          </p:cNvSpPr>
+          <p:nvPr>
+            <p:ph type="body" idx="20"/>
+          </p:nvPr>
+        </p:nvSpPr>
+        <p:spPr>
+          <a:xfrm>
+            <a:off x="8603525" y="5084524"/>
+            <a:ext cx="2123742" cy="343061"/>
           </a:xfrm>
         </p:spPr>
         <p:txBody>
@@ -31570,31 +31927,31 @@
           <a:p>
             <a:r>
               <a:rPr lang="en-US" dirty="0"/>
-              <a:t>Chief Executive Officer</a:t>
-            </a:r>
-          </a:p>
-        </p:txBody>
-      </p:sp>
-      <p:sp>
-        <p:nvSpPr>
-          <p:cNvPr id="50" name="Text Placeholder 49">
-            <a:extLst>
-              <a:ext uri="{FF2B5EF4-FFF2-40B4-BE49-F238E27FC236}">
-                <a16:creationId xmlns:a16="http://schemas.microsoft.com/office/drawing/2014/main" id="{540F887C-E8EB-4467-90FE-023D47FFB454}"/>
-              </a:ext>
-            </a:extLst>
-          </p:cNvPr>
-          <p:cNvSpPr>
-            <a:spLocks noGrp="1"/>
-          </p:cNvSpPr>
-          <p:nvPr>
-            <p:ph type="body" idx="19"/>
-          </p:nvPr>
-        </p:nvSpPr>
-        <p:spPr>
-          <a:xfrm>
-            <a:off x="6339926" y="3669060"/>
-            <a:ext cx="1828800" cy="343061"/>
+              <a:t>RAJESH SANTOSHI​</a:t>
+            </a:r>
+          </a:p>
+        </p:txBody>
+      </p:sp>
+      <p:sp>
+        <p:nvSpPr>
+          <p:cNvPr id="36" name="Text Placeholder 35">
+            <a:extLst>
+              <a:ext uri="{FF2B5EF4-FFF2-40B4-BE49-F238E27FC236}">
+                <a16:creationId xmlns:a16="http://schemas.microsoft.com/office/drawing/2014/main" id="{B76FA389-A54D-4E4B-81DA-DBA175D78FEC}"/>
+              </a:ext>
+            </a:extLst>
+          </p:cNvPr>
+          <p:cNvSpPr>
+            <a:spLocks noGrp="1"/>
+          </p:cNvSpPr>
+          <p:nvPr>
+            <p:ph type="body" idx="21"/>
+          </p:nvPr>
+        </p:nvSpPr>
+        <p:spPr>
+          <a:xfrm>
+            <a:off x="1487181" y="5464114"/>
+            <a:ext cx="1845511" cy="343061"/>
           </a:xfrm>
         </p:spPr>
         <p:txBody>
@@ -31603,34 +31960,31 @@
           <a:p>
             <a:r>
               <a:rPr lang="en-US" dirty="0"/>
-              <a:t>FLORA BERGGREN​</a:t>
-            </a:r>
-          </a:p>
-          <a:p>
-            <a:endParaRPr lang="en-US" dirty="0"/>
-          </a:p>
-        </p:txBody>
-      </p:sp>
-      <p:sp>
-        <p:nvSpPr>
-          <p:cNvPr id="62" name="Text Placeholder 61">
-            <a:extLst>
-              <a:ext uri="{FF2B5EF4-FFF2-40B4-BE49-F238E27FC236}">
-                <a16:creationId xmlns:a16="http://schemas.microsoft.com/office/drawing/2014/main" id="{F1AF6C54-9939-432B-BBC2-5E0C0F8B2D8C}"/>
-              </a:ext>
-            </a:extLst>
-          </p:cNvPr>
-          <p:cNvSpPr>
-            <a:spLocks noGrp="1"/>
-          </p:cNvSpPr>
-          <p:nvPr>
-            <p:ph type="body" idx="23"/>
-          </p:nvPr>
-        </p:nvSpPr>
-        <p:spPr>
-          <a:xfrm>
-            <a:off x="6217963" y="3796721"/>
-            <a:ext cx="2057400" cy="343061"/>
+              <a:t>President</a:t>
+            </a:r>
+          </a:p>
+        </p:txBody>
+      </p:sp>
+      <p:sp>
+        <p:nvSpPr>
+          <p:cNvPr id="37" name="Text Placeholder 36">
+            <a:extLst>
+              <a:ext uri="{FF2B5EF4-FFF2-40B4-BE49-F238E27FC236}">
+                <a16:creationId xmlns:a16="http://schemas.microsoft.com/office/drawing/2014/main" id="{65786675-BFC6-4743-BFD3-D64691F771D8}"/>
+              </a:ext>
+            </a:extLst>
+          </p:cNvPr>
+          <p:cNvSpPr>
+            <a:spLocks noGrp="1"/>
+          </p:cNvSpPr>
+          <p:nvPr>
+            <p:ph type="body" idx="22"/>
+          </p:nvPr>
+        </p:nvSpPr>
+        <p:spPr>
+          <a:xfrm>
+            <a:off x="3836913" y="5478796"/>
+            <a:ext cx="1855949" cy="343061"/>
           </a:xfrm>
         </p:spPr>
         <p:txBody>
@@ -31639,31 +31993,31 @@
           <a:p>
             <a:r>
               <a:rPr lang="en-US" dirty="0"/>
-              <a:t>Chief Operations Officer</a:t>
-            </a:r>
-          </a:p>
-        </p:txBody>
-      </p:sp>
-      <p:sp>
-        <p:nvSpPr>
-          <p:cNvPr id="51" name="Text Placeholder 50">
-            <a:extLst>
-              <a:ext uri="{FF2B5EF4-FFF2-40B4-BE49-F238E27FC236}">
-                <a16:creationId xmlns:a16="http://schemas.microsoft.com/office/drawing/2014/main" id="{C1C77C5B-2A5F-4999-A5BF-F60EA88DE493}"/>
-              </a:ext>
-            </a:extLst>
-          </p:cNvPr>
-          <p:cNvSpPr>
-            <a:spLocks noGrp="1"/>
-          </p:cNvSpPr>
-          <p:nvPr>
-            <p:ph type="body" idx="20"/>
-          </p:nvPr>
-        </p:nvSpPr>
-        <p:spPr>
-          <a:xfrm>
-            <a:off x="8759806" y="3654378"/>
-            <a:ext cx="1828800" cy="343061"/>
+              <a:t>Chief Executive Officer</a:t>
+            </a:r>
+          </a:p>
+        </p:txBody>
+      </p:sp>
+      <p:sp>
+        <p:nvSpPr>
+          <p:cNvPr id="38" name="Text Placeholder 37">
+            <a:extLst>
+              <a:ext uri="{FF2B5EF4-FFF2-40B4-BE49-F238E27FC236}">
+                <a16:creationId xmlns:a16="http://schemas.microsoft.com/office/drawing/2014/main" id="{97062F49-F468-4EA6-B6BF-94BFF89FDCB7}"/>
+              </a:ext>
+            </a:extLst>
+          </p:cNvPr>
+          <p:cNvSpPr>
+            <a:spLocks noGrp="1"/>
+          </p:cNvSpPr>
+          <p:nvPr>
+            <p:ph type="body" idx="23"/>
+          </p:nvPr>
+        </p:nvSpPr>
+        <p:spPr>
+          <a:xfrm>
+            <a:off x="6327577" y="5478796"/>
+            <a:ext cx="1845511" cy="343061"/>
           </a:xfrm>
         </p:spPr>
         <p:txBody>
@@ -31672,17 +32026,20 @@
           <a:p>
             <a:r>
               <a:rPr lang="en-US" dirty="0"/>
-              <a:t>RAJESH SANTOSHI</a:t>
-            </a:r>
-          </a:p>
-        </p:txBody>
-      </p:sp>
-      <p:sp>
-        <p:nvSpPr>
-          <p:cNvPr id="63" name="Text Placeholder 62">
-            <a:extLst>
-              <a:ext uri="{FF2B5EF4-FFF2-40B4-BE49-F238E27FC236}">
-                <a16:creationId xmlns:a16="http://schemas.microsoft.com/office/drawing/2014/main" id="{41797063-0A46-4FCE-86CB-FC66F997C5F4}"/>
+              <a:t>Chief Operations Officer</a:t>
+            </a:r>
+          </a:p>
+          <a:p>
+            <a:endParaRPr lang="en-US" dirty="0"/>
+          </a:p>
+        </p:txBody>
+      </p:sp>
+      <p:sp>
+        <p:nvSpPr>
+          <p:cNvPr id="39" name="Text Placeholder 38">
+            <a:extLst>
+              <a:ext uri="{FF2B5EF4-FFF2-40B4-BE49-F238E27FC236}">
+                <a16:creationId xmlns:a16="http://schemas.microsoft.com/office/drawing/2014/main" id="{59D9F00A-8CF0-41E8-9BB6-3B8ECDA55D49}"/>
               </a:ext>
             </a:extLst>
           </p:cNvPr>
@@ -31695,8 +32052,8 @@
         </p:nvSpPr>
         <p:spPr>
           <a:xfrm>
-            <a:off x="8634432" y="3782039"/>
-            <a:ext cx="2057400" cy="343061"/>
+            <a:off x="8747458" y="5464114"/>
+            <a:ext cx="1845510" cy="343061"/>
           </a:xfrm>
         </p:spPr>
         <p:txBody>
@@ -31708,164 +32065,31 @@
               <a:t>VP Marketing</a:t>
             </a:r>
           </a:p>
-        </p:txBody>
-      </p:sp>
-      <p:pic>
-        <p:nvPicPr>
-          <p:cNvPr id="58" name="Picture Placeholder 57" descr="Team member headshot">
-            <a:extLst>
-              <a:ext uri="{FF2B5EF4-FFF2-40B4-BE49-F238E27FC236}">
-                <a16:creationId xmlns:a16="http://schemas.microsoft.com/office/drawing/2014/main" id="{67F12A1B-1645-4C97-AE80-CC96C4998E2E}"/>
-              </a:ext>
-            </a:extLst>
-          </p:cNvPr>
-          <p:cNvPicPr>
-            <a:picLocks noGrp="1" noChangeAspect="1"/>
-          </p:cNvPicPr>
-          <p:nvPr>
-            <p:ph type="pic" sz="quarter" idx="26"/>
-          </p:nvPr>
-        </p:nvPicPr>
-        <p:blipFill rotWithShape="1">
-          <a:blip r:embed="rId6">
-            <a:extLst>
-              <a:ext uri="{28A0092B-C50C-407E-A947-70E740481C1C}">
-                <a14:useLocalDpi xmlns:a14="http://schemas.microsoft.com/office/drawing/2010/main" val="0"/>
-              </a:ext>
-            </a:extLst>
-          </a:blip>
-          <a:srcRect/>
-          <a:stretch/>
-        </p:blipFill>
-        <p:spPr>
-          <a:xfrm>
-            <a:off x="1877176" y="4287711"/>
-            <a:ext cx="1066800" cy="1066800"/>
-          </a:xfrm>
-        </p:spPr>
-      </p:pic>
-      <p:pic>
-        <p:nvPicPr>
-          <p:cNvPr id="66" name="Picture Placeholder 65" descr="Team member headshot">
-            <a:extLst>
-              <a:ext uri="{FF2B5EF4-FFF2-40B4-BE49-F238E27FC236}">
-                <a16:creationId xmlns:a16="http://schemas.microsoft.com/office/drawing/2014/main" id="{448282B4-E477-4ECE-BC09-7EA9451D9AEE}"/>
-              </a:ext>
-            </a:extLst>
-          </p:cNvPr>
-          <p:cNvPicPr>
-            <a:picLocks noGrp="1" noChangeAspect="1"/>
-          </p:cNvPicPr>
-          <p:nvPr>
-            <p:ph type="pic" sz="quarter" idx="27"/>
-          </p:nvPr>
-        </p:nvPicPr>
-        <p:blipFill rotWithShape="1">
-          <a:blip r:embed="rId7">
-            <a:extLst>
-              <a:ext uri="{28A0092B-C50C-407E-A947-70E740481C1C}">
-                <a14:useLocalDpi xmlns:a14="http://schemas.microsoft.com/office/drawing/2010/main" val="0"/>
-              </a:ext>
-            </a:extLst>
-          </a:blip>
-          <a:srcRect/>
-          <a:stretch/>
-        </p:blipFill>
-        <p:spPr>
-          <a:xfrm>
-            <a:off x="4226270" y="4287711"/>
-            <a:ext cx="1066800" cy="1066800"/>
-          </a:xfrm>
-        </p:spPr>
-      </p:pic>
-      <p:pic>
-        <p:nvPicPr>
-          <p:cNvPr id="78" name="Picture Placeholder 77" descr="Team member headshot">
-            <a:extLst>
-              <a:ext uri="{FF2B5EF4-FFF2-40B4-BE49-F238E27FC236}">
-                <a16:creationId xmlns:a16="http://schemas.microsoft.com/office/drawing/2014/main" id="{15824874-C00E-4835-97F0-43C416DDCACC}"/>
-              </a:ext>
-            </a:extLst>
-          </p:cNvPr>
-          <p:cNvPicPr>
-            <a:picLocks noGrp="1" noChangeAspect="1"/>
-          </p:cNvPicPr>
-          <p:nvPr>
-            <p:ph type="pic" sz="quarter" idx="28"/>
-          </p:nvPr>
-        </p:nvPicPr>
-        <p:blipFill rotWithShape="1">
-          <a:blip r:embed="rId8">
-            <a:extLst>
-              <a:ext uri="{28A0092B-C50C-407E-A947-70E740481C1C}">
-                <a14:useLocalDpi xmlns:a14="http://schemas.microsoft.com/office/drawing/2010/main" val="0"/>
-              </a:ext>
-            </a:extLst>
-          </a:blip>
-          <a:srcRect/>
-          <a:stretch/>
-        </p:blipFill>
-        <p:spPr>
-          <a:xfrm>
-            <a:off x="6716934" y="4287711"/>
-            <a:ext cx="1066800" cy="1066800"/>
-          </a:xfrm>
-        </p:spPr>
-      </p:pic>
-      <p:pic>
-        <p:nvPicPr>
-          <p:cNvPr id="83" name="Picture Placeholder 82" descr="Team member headshot">
-            <a:extLst>
-              <a:ext uri="{FF2B5EF4-FFF2-40B4-BE49-F238E27FC236}">
-                <a16:creationId xmlns:a16="http://schemas.microsoft.com/office/drawing/2014/main" id="{96405252-7726-442E-9D15-755840A5AF27}"/>
-              </a:ext>
-            </a:extLst>
-          </p:cNvPr>
-          <p:cNvPicPr>
-            <a:picLocks noGrp="1" noChangeAspect="1"/>
-          </p:cNvPicPr>
-          <p:nvPr>
-            <p:ph type="pic" sz="quarter" idx="29"/>
-          </p:nvPr>
-        </p:nvPicPr>
-        <p:blipFill rotWithShape="1">
-          <a:blip r:embed="rId9">
-            <a:extLst>
-              <a:ext uri="{28A0092B-C50C-407E-A947-70E740481C1C}">
-                <a14:useLocalDpi xmlns:a14="http://schemas.microsoft.com/office/drawing/2010/main" val="0"/>
-              </a:ext>
-            </a:extLst>
-          </a:blip>
-          <a:srcRect/>
-          <a:stretch/>
-        </p:blipFill>
-        <p:spPr>
-          <a:xfrm>
-            <a:off x="9136814" y="4287711"/>
-            <a:ext cx="1066800" cy="1066800"/>
-          </a:xfrm>
-        </p:spPr>
-      </p:pic>
-      <p:sp>
-        <p:nvSpPr>
-          <p:cNvPr id="64" name="Text Placeholder 63">
-            <a:extLst>
-              <a:ext uri="{FF2B5EF4-FFF2-40B4-BE49-F238E27FC236}">
-                <a16:creationId xmlns:a16="http://schemas.microsoft.com/office/drawing/2014/main" id="{3ECD1D6F-7DAE-4DCC-BBB4-CD519379CDF6}"/>
-              </a:ext>
-            </a:extLst>
-          </p:cNvPr>
-          <p:cNvSpPr>
-            <a:spLocks noGrp="1"/>
-          </p:cNvSpPr>
-          <p:nvPr>
-            <p:ph type="body" idx="25"/>
-          </p:nvPr>
-        </p:nvSpPr>
-        <p:spPr>
-          <a:xfrm>
-            <a:off x="1500168" y="5513214"/>
-            <a:ext cx="1828800" cy="343061"/>
+          <a:p>
+            <a:endParaRPr lang="en-US" dirty="0"/>
+          </a:p>
+        </p:txBody>
+      </p:sp>
+      <p:sp>
+        <p:nvSpPr>
+          <p:cNvPr id="3" name="Date Placeholder 2">
+            <a:extLst>
+              <a:ext uri="{FF2B5EF4-FFF2-40B4-BE49-F238E27FC236}">
+                <a16:creationId xmlns:a16="http://schemas.microsoft.com/office/drawing/2014/main" id="{02F9CC1F-102C-49CC-B646-8E6826368A81}"/>
+              </a:ext>
+            </a:extLst>
+          </p:cNvPr>
+          <p:cNvSpPr>
+            <a:spLocks noGrp="1"/>
+          </p:cNvSpPr>
+          <p:nvPr>
+            <p:ph type="dt" sz="half" idx="10"/>
+          </p:nvPr>
+        </p:nvSpPr>
+        <p:spPr>
+          <a:xfrm>
+            <a:off x="838200" y="6356350"/>
+            <a:ext cx="2743200" cy="365125"/>
           </a:xfrm>
         </p:spPr>
         <p:txBody>
@@ -31874,34 +32098,31 @@
           <a:p>
             <a:r>
               <a:rPr lang="en-US" dirty="0"/>
-              <a:t>GRAHAM BARNES</a:t>
-            </a:r>
-          </a:p>
-          <a:p>
-            <a:endParaRPr lang="en-US" dirty="0"/>
-          </a:p>
-        </p:txBody>
-      </p:sp>
-      <p:sp>
-        <p:nvSpPr>
-          <p:cNvPr id="72" name="Text Placeholder 71">
-            <a:extLst>
-              <a:ext uri="{FF2B5EF4-FFF2-40B4-BE49-F238E27FC236}">
-                <a16:creationId xmlns:a16="http://schemas.microsoft.com/office/drawing/2014/main" id="{0420E7B5-7D79-437C-BC6E-11C9C9C73D12}"/>
-              </a:ext>
-            </a:extLst>
-          </p:cNvPr>
-          <p:cNvSpPr>
-            <a:spLocks noGrp="1"/>
-          </p:cNvSpPr>
-          <p:nvPr>
-            <p:ph type="body" idx="33"/>
-          </p:nvPr>
-        </p:nvSpPr>
-        <p:spPr>
-          <a:xfrm>
-            <a:off x="1390120" y="5640875"/>
-            <a:ext cx="2057400" cy="343061"/>
+              <a:t>20XX</a:t>
+            </a:r>
+          </a:p>
+        </p:txBody>
+      </p:sp>
+      <p:sp>
+        <p:nvSpPr>
+          <p:cNvPr id="4" name="Footer Placeholder 3">
+            <a:extLst>
+              <a:ext uri="{FF2B5EF4-FFF2-40B4-BE49-F238E27FC236}">
+                <a16:creationId xmlns:a16="http://schemas.microsoft.com/office/drawing/2014/main" id="{33808A03-6EC3-48BE-9D18-5A746D09243E}"/>
+              </a:ext>
+            </a:extLst>
+          </p:cNvPr>
+          <p:cNvSpPr>
+            <a:spLocks noGrp="1"/>
+          </p:cNvSpPr>
+          <p:nvPr>
+            <p:ph type="ftr" sz="quarter" idx="11"/>
+          </p:nvPr>
+        </p:nvSpPr>
+        <p:spPr>
+          <a:xfrm>
+            <a:off x="4038600" y="6356350"/>
+            <a:ext cx="4114800" cy="365125"/>
           </a:xfrm>
         </p:spPr>
         <p:txBody>
@@ -31910,273 +32131,6 @@
           <a:p>
             <a:r>
               <a:rPr lang="en-US" dirty="0"/>
-              <a:t>VP Product</a:t>
-            </a:r>
-          </a:p>
-        </p:txBody>
-      </p:sp>
-      <p:sp>
-        <p:nvSpPr>
-          <p:cNvPr id="69" name="Text Placeholder 68">
-            <a:extLst>
-              <a:ext uri="{FF2B5EF4-FFF2-40B4-BE49-F238E27FC236}">
-                <a16:creationId xmlns:a16="http://schemas.microsoft.com/office/drawing/2014/main" id="{A5A9CD8D-31A9-4139-87B2-349EA8E14781}"/>
-              </a:ext>
-            </a:extLst>
-          </p:cNvPr>
-          <p:cNvSpPr>
-            <a:spLocks noGrp="1"/>
-          </p:cNvSpPr>
-          <p:nvPr>
-            <p:ph type="body" idx="30"/>
-          </p:nvPr>
-        </p:nvSpPr>
-        <p:spPr>
-          <a:xfrm>
-            <a:off x="3849262" y="5527896"/>
-            <a:ext cx="1828800" cy="343061"/>
-          </a:xfrm>
-        </p:spPr>
-        <p:txBody>
-          <a:bodyPr/>
-          <a:lstStyle/>
-          <a:p>
-            <a:r>
-              <a:rPr lang="en-US" dirty="0"/>
-              <a:t>ROWAN MURPHY</a:t>
-            </a:r>
-          </a:p>
-          <a:p>
-            <a:endParaRPr lang="en-US" dirty="0"/>
-          </a:p>
-        </p:txBody>
-      </p:sp>
-      <p:sp>
-        <p:nvSpPr>
-          <p:cNvPr id="73" name="Text Placeholder 72">
-            <a:extLst>
-              <a:ext uri="{FF2B5EF4-FFF2-40B4-BE49-F238E27FC236}">
-                <a16:creationId xmlns:a16="http://schemas.microsoft.com/office/drawing/2014/main" id="{E1FCDD58-01CD-47CF-AB15-A511E9D3612F}"/>
-              </a:ext>
-            </a:extLst>
-          </p:cNvPr>
-          <p:cNvSpPr>
-            <a:spLocks noGrp="1"/>
-          </p:cNvSpPr>
-          <p:nvPr>
-            <p:ph type="body" idx="34"/>
-          </p:nvPr>
-        </p:nvSpPr>
-        <p:spPr>
-          <a:xfrm>
-            <a:off x="3739214" y="5655557"/>
-            <a:ext cx="2057400" cy="343061"/>
-          </a:xfrm>
-        </p:spPr>
-        <p:txBody>
-          <a:bodyPr/>
-          <a:lstStyle/>
-          <a:p>
-            <a:r>
-              <a:rPr lang="en-US" dirty="0"/>
-              <a:t>SEO Strategist</a:t>
-            </a:r>
-          </a:p>
-        </p:txBody>
-      </p:sp>
-      <p:sp>
-        <p:nvSpPr>
-          <p:cNvPr id="70" name="Text Placeholder 69">
-            <a:extLst>
-              <a:ext uri="{FF2B5EF4-FFF2-40B4-BE49-F238E27FC236}">
-                <a16:creationId xmlns:a16="http://schemas.microsoft.com/office/drawing/2014/main" id="{58753412-8033-48AD-80DF-945C72BC7335}"/>
-              </a:ext>
-            </a:extLst>
-          </p:cNvPr>
-          <p:cNvSpPr>
-            <a:spLocks noGrp="1"/>
-          </p:cNvSpPr>
-          <p:nvPr>
-            <p:ph type="body" idx="31"/>
-          </p:nvPr>
-        </p:nvSpPr>
-        <p:spPr>
-          <a:xfrm>
-            <a:off x="6339926" y="5527896"/>
-            <a:ext cx="1828800" cy="343061"/>
-          </a:xfrm>
-        </p:spPr>
-        <p:txBody>
-          <a:bodyPr/>
-          <a:lstStyle/>
-          <a:p>
-            <a:r>
-              <a:rPr lang="en-US" dirty="0"/>
-              <a:t>ELIZABETH MOORE</a:t>
-            </a:r>
-          </a:p>
-        </p:txBody>
-      </p:sp>
-      <p:sp>
-        <p:nvSpPr>
-          <p:cNvPr id="74" name="Text Placeholder 73">
-            <a:extLst>
-              <a:ext uri="{FF2B5EF4-FFF2-40B4-BE49-F238E27FC236}">
-                <a16:creationId xmlns:a16="http://schemas.microsoft.com/office/drawing/2014/main" id="{2E2604A9-4BB8-4144-914B-DCF4F13DF3DB}"/>
-              </a:ext>
-            </a:extLst>
-          </p:cNvPr>
-          <p:cNvSpPr>
-            <a:spLocks noGrp="1"/>
-          </p:cNvSpPr>
-          <p:nvPr>
-            <p:ph type="body" idx="35"/>
-          </p:nvPr>
-        </p:nvSpPr>
-        <p:spPr>
-          <a:xfrm>
-            <a:off x="6229878" y="5655557"/>
-            <a:ext cx="2057400" cy="343061"/>
-          </a:xfrm>
-        </p:spPr>
-        <p:txBody>
-          <a:bodyPr/>
-          <a:lstStyle/>
-          <a:p>
-            <a:r>
-              <a:rPr lang="en-US" dirty="0"/>
-              <a:t>Product Designer</a:t>
-            </a:r>
-          </a:p>
-        </p:txBody>
-      </p:sp>
-      <p:sp>
-        <p:nvSpPr>
-          <p:cNvPr id="71" name="Text Placeholder 70">
-            <a:extLst>
-              <a:ext uri="{FF2B5EF4-FFF2-40B4-BE49-F238E27FC236}">
-                <a16:creationId xmlns:a16="http://schemas.microsoft.com/office/drawing/2014/main" id="{A45FE9A3-15E0-49FA-B6E5-DB16CD0C2C8F}"/>
-              </a:ext>
-            </a:extLst>
-          </p:cNvPr>
-          <p:cNvSpPr>
-            <a:spLocks noGrp="1"/>
-          </p:cNvSpPr>
-          <p:nvPr>
-            <p:ph type="body" idx="32"/>
-          </p:nvPr>
-        </p:nvSpPr>
-        <p:spPr>
-          <a:xfrm>
-            <a:off x="8759806" y="5513214"/>
-            <a:ext cx="1828800" cy="343061"/>
-          </a:xfrm>
-        </p:spPr>
-        <p:txBody>
-          <a:bodyPr/>
-          <a:lstStyle/>
-          <a:p>
-            <a:r>
-              <a:rPr lang="en-US" dirty="0"/>
-              <a:t>ROBIN KLINE</a:t>
-            </a:r>
-          </a:p>
-        </p:txBody>
-      </p:sp>
-      <p:sp>
-        <p:nvSpPr>
-          <p:cNvPr id="75" name="Text Placeholder 74">
-            <a:extLst>
-              <a:ext uri="{FF2B5EF4-FFF2-40B4-BE49-F238E27FC236}">
-                <a16:creationId xmlns:a16="http://schemas.microsoft.com/office/drawing/2014/main" id="{72076C4D-9688-4C1A-AB51-8F1051A803A9}"/>
-              </a:ext>
-            </a:extLst>
-          </p:cNvPr>
-          <p:cNvSpPr>
-            <a:spLocks noGrp="1"/>
-          </p:cNvSpPr>
-          <p:nvPr>
-            <p:ph type="body" idx="36"/>
-          </p:nvPr>
-        </p:nvSpPr>
-        <p:spPr>
-          <a:xfrm>
-            <a:off x="8634432" y="5640875"/>
-            <a:ext cx="2057400" cy="343061"/>
-          </a:xfrm>
-        </p:spPr>
-        <p:txBody>
-          <a:bodyPr/>
-          <a:lstStyle/>
-          <a:p>
-            <a:r>
-              <a:rPr lang="en-US" dirty="0"/>
-              <a:t>Content Developer</a:t>
-            </a:r>
-          </a:p>
-        </p:txBody>
-      </p:sp>
-      <p:sp>
-        <p:nvSpPr>
-          <p:cNvPr id="3" name="Date Placeholder 2">
-            <a:extLst>
-              <a:ext uri="{FF2B5EF4-FFF2-40B4-BE49-F238E27FC236}">
-                <a16:creationId xmlns:a16="http://schemas.microsoft.com/office/drawing/2014/main" id="{1833164A-09D8-4E05-899E-C830A562A446}"/>
-              </a:ext>
-            </a:extLst>
-          </p:cNvPr>
-          <p:cNvSpPr>
-            <a:spLocks noGrp="1"/>
-          </p:cNvSpPr>
-          <p:nvPr>
-            <p:ph type="dt" sz="half" idx="10"/>
-          </p:nvPr>
-        </p:nvSpPr>
-        <p:spPr>
-          <a:xfrm>
-            <a:off x="838200" y="6356350"/>
-            <a:ext cx="2743200" cy="365125"/>
-          </a:xfrm>
-        </p:spPr>
-        <p:txBody>
-          <a:bodyPr/>
-          <a:lstStyle/>
-          <a:p>
-            <a:r>
-              <a:rPr lang="en-US" dirty="0"/>
-              <a:t>20XX</a:t>
-            </a:r>
-          </a:p>
-        </p:txBody>
-      </p:sp>
-      <p:sp>
-        <p:nvSpPr>
-          <p:cNvPr id="4" name="Footer Placeholder 3">
-            <a:extLst>
-              <a:ext uri="{FF2B5EF4-FFF2-40B4-BE49-F238E27FC236}">
-                <a16:creationId xmlns:a16="http://schemas.microsoft.com/office/drawing/2014/main" id="{79EB4DEA-4DCD-421C-A905-7EFCAE898907}"/>
-              </a:ext>
-            </a:extLst>
-          </p:cNvPr>
-          <p:cNvSpPr>
-            <a:spLocks noGrp="1"/>
-          </p:cNvSpPr>
-          <p:nvPr>
-            <p:ph type="ftr" sz="quarter" idx="11"/>
-          </p:nvPr>
-        </p:nvSpPr>
-        <p:spPr>
-          <a:xfrm>
-            <a:off x="4038600" y="6356350"/>
-            <a:ext cx="4114800" cy="365125"/>
-          </a:xfrm>
-        </p:spPr>
-        <p:txBody>
-          <a:bodyPr/>
-          <a:lstStyle/>
-          <a:p>
-            <a:r>
-              <a:rPr lang="en-US" dirty="0"/>
               <a:t>Pitch Deck</a:t>
             </a:r>
           </a:p>
@@ -32187,7 +32141,7 @@
           <p:cNvPr id="5" name="Slide Number Placeholder 4">
             <a:extLst>
               <a:ext uri="{FF2B5EF4-FFF2-40B4-BE49-F238E27FC236}">
-                <a16:creationId xmlns:a16="http://schemas.microsoft.com/office/drawing/2014/main" id="{2E1923C7-5010-4C4F-A932-4BDA0B62A7C0}"/>
+                <a16:creationId xmlns:a16="http://schemas.microsoft.com/office/drawing/2014/main" id="{46868410-BE8A-4C98-9C72-20D0A2A6A8B9}"/>
               </a:ext>
             </a:extLst>
           </p:cNvPr>
@@ -32220,7 +32174,7 @@
     </p:spTree>
     <p:extLst>
       <p:ext uri="{BB962C8B-B14F-4D97-AF65-F5344CB8AC3E}">
-        <p14:creationId xmlns:p14="http://schemas.microsoft.com/office/powerpoint/2010/main" val="3396266754"/>
+        <p14:creationId xmlns:p14="http://schemas.microsoft.com/office/powerpoint/2010/main" val="3477453048"/>
       </p:ext>
     </p:extLst>
   </p:cSld>
@@ -32252,7 +32206,7 @@
           <p:cNvPr id="2" name="Title 1">
             <a:extLst>
               <a:ext uri="{FF2B5EF4-FFF2-40B4-BE49-F238E27FC236}">
-                <a16:creationId xmlns:a16="http://schemas.microsoft.com/office/drawing/2014/main" id="{9C1BF33B-5572-4A00-A55C-1E13A6B3A8F1}"/>
+                <a16:creationId xmlns:a16="http://schemas.microsoft.com/office/drawing/2014/main" id="{27A6F7BB-30A8-4980-AD4A-2FB0B53FA6C9}"/>
               </a:ext>
             </a:extLst>
           </p:cNvPr>
@@ -32275,48 +32229,153 @@
           <a:p>
             <a:r>
               <a:rPr lang="en-US" dirty="0"/>
-              <a:t>FUNDING</a:t>
-            </a:r>
-          </a:p>
-        </p:txBody>
-      </p:sp>
-      <p:graphicFrame>
-        <p:nvGraphicFramePr>
-          <p:cNvPr id="58" name="Content Placeholder 57" title="Funding Chart">
-            <a:extLst>
-              <a:ext uri="{FF2B5EF4-FFF2-40B4-BE49-F238E27FC236}">
-                <a16:creationId xmlns:a16="http://schemas.microsoft.com/office/drawing/2014/main" id="{0231F8BC-AEBA-4843-9F73-E06265724EAB}"/>
-              </a:ext>
-            </a:extLst>
-          </p:cNvPr>
-          <p:cNvGraphicFramePr>
-            <a:graphicFrameLocks noGrp="1"/>
-          </p:cNvGraphicFramePr>
-          <p:nvPr>
-            <p:ph sz="quarter" idx="21"/>
-            <p:extLst>
-              <p:ext uri="{D42A27DB-BD31-4B8C-83A1-F6EECF244321}">
-                <p14:modId xmlns:p14="http://schemas.microsoft.com/office/powerpoint/2010/main" val="3157508600"/>
-              </p:ext>
-            </p:extLst>
-          </p:nvPr>
-        </p:nvGraphicFramePr>
-        <p:xfrm>
-          <a:off x="1074738" y="2370138"/>
-          <a:ext cx="1857375" cy="1665287"/>
-        </p:xfrm>
-        <a:graphic>
-          <a:graphicData uri="http://schemas.openxmlformats.org/drawingml/2006/chart">
-            <c:chart xmlns:c="http://schemas.openxmlformats.org/drawingml/2006/chart" xmlns:r="http://schemas.openxmlformats.org/officeDocument/2006/relationships" r:id="rId2"/>
-          </a:graphicData>
-        </a:graphic>
-      </p:graphicFrame>
-      <p:sp>
-        <p:nvSpPr>
-          <p:cNvPr id="3" name="Text Placeholder 2">
-            <a:extLst>
-              <a:ext uri="{FF2B5EF4-FFF2-40B4-BE49-F238E27FC236}">
-                <a16:creationId xmlns:a16="http://schemas.microsoft.com/office/drawing/2014/main" id="{82A4739B-8DE9-4523-8034-4E83861CCF73}"/>
+              <a:t>MEET THE TEAM  </a:t>
+            </a:r>
+          </a:p>
+        </p:txBody>
+      </p:sp>
+      <p:pic>
+        <p:nvPicPr>
+          <p:cNvPr id="38" name="Picture Placeholder 37" descr="Team member headshot">
+            <a:extLst>
+              <a:ext uri="{FF2B5EF4-FFF2-40B4-BE49-F238E27FC236}">
+                <a16:creationId xmlns:a16="http://schemas.microsoft.com/office/drawing/2014/main" id="{6E64DC71-C9CE-47FF-A3B6-597A9B09EC98}"/>
+              </a:ext>
+            </a:extLst>
+          </p:cNvPr>
+          <p:cNvPicPr>
+            <a:picLocks noGrp="1" noChangeAspect="1"/>
+          </p:cNvPicPr>
+          <p:nvPr>
+            <p:ph type="pic" sz="quarter" idx="14"/>
+          </p:nvPr>
+        </p:nvPicPr>
+        <p:blipFill rotWithShape="1">
+          <a:blip r:embed="rId2">
+            <a:extLst>
+              <a:ext uri="{28A0092B-C50C-407E-A947-70E740481C1C}">
+                <a14:useLocalDpi xmlns:a14="http://schemas.microsoft.com/office/drawing/2010/main" val="0"/>
+              </a:ext>
+            </a:extLst>
+          </a:blip>
+          <a:srcRect/>
+          <a:stretch/>
+        </p:blipFill>
+        <p:spPr>
+          <a:xfrm>
+            <a:off x="1877176" y="2428875"/>
+            <a:ext cx="1066800" cy="1066800"/>
+          </a:xfrm>
+        </p:spPr>
+      </p:pic>
+      <p:pic>
+        <p:nvPicPr>
+          <p:cNvPr id="42" name="Picture Placeholder 41" descr="Team member headshot">
+            <a:extLst>
+              <a:ext uri="{FF2B5EF4-FFF2-40B4-BE49-F238E27FC236}">
+                <a16:creationId xmlns:a16="http://schemas.microsoft.com/office/drawing/2014/main" id="{03BE9C30-CAE7-4AE5-8722-B20E200AC048}"/>
+              </a:ext>
+            </a:extLst>
+          </p:cNvPr>
+          <p:cNvPicPr>
+            <a:picLocks noGrp="1" noChangeAspect="1"/>
+          </p:cNvPicPr>
+          <p:nvPr>
+            <p:ph type="pic" sz="quarter" idx="15"/>
+          </p:nvPr>
+        </p:nvPicPr>
+        <p:blipFill rotWithShape="1">
+          <a:blip r:embed="rId3">
+            <a:extLst>
+              <a:ext uri="{28A0092B-C50C-407E-A947-70E740481C1C}">
+                <a14:useLocalDpi xmlns:a14="http://schemas.microsoft.com/office/drawing/2010/main" val="0"/>
+              </a:ext>
+            </a:extLst>
+          </a:blip>
+          <a:srcRect/>
+          <a:stretch/>
+        </p:blipFill>
+        <p:spPr>
+          <a:xfrm>
+            <a:off x="4226270" y="2428875"/>
+            <a:ext cx="1066800" cy="1066800"/>
+          </a:xfrm>
+        </p:spPr>
+      </p:pic>
+      <p:pic>
+        <p:nvPicPr>
+          <p:cNvPr id="46" name="Picture Placeholder 45" descr="Team member headshot">
+            <a:extLst>
+              <a:ext uri="{FF2B5EF4-FFF2-40B4-BE49-F238E27FC236}">
+                <a16:creationId xmlns:a16="http://schemas.microsoft.com/office/drawing/2014/main" id="{F8B9EE09-9F4E-47F5-82E5-A135C37A6E26}"/>
+              </a:ext>
+            </a:extLst>
+          </p:cNvPr>
+          <p:cNvPicPr>
+            <a:picLocks noGrp="1" noChangeAspect="1"/>
+          </p:cNvPicPr>
+          <p:nvPr>
+            <p:ph type="pic" sz="quarter" idx="16"/>
+          </p:nvPr>
+        </p:nvPicPr>
+        <p:blipFill rotWithShape="1">
+          <a:blip r:embed="rId4">
+            <a:extLst>
+              <a:ext uri="{28A0092B-C50C-407E-A947-70E740481C1C}">
+                <a14:useLocalDpi xmlns:a14="http://schemas.microsoft.com/office/drawing/2010/main" val="0"/>
+              </a:ext>
+            </a:extLst>
+          </a:blip>
+          <a:srcRect/>
+          <a:stretch/>
+        </p:blipFill>
+        <p:spPr>
+          <a:xfrm>
+            <a:off x="6716934" y="2428875"/>
+            <a:ext cx="1066800" cy="1066800"/>
+          </a:xfrm>
+        </p:spPr>
+      </p:pic>
+      <p:pic>
+        <p:nvPicPr>
+          <p:cNvPr id="54" name="Picture Placeholder 53" descr="Team member headshot">
+            <a:extLst>
+              <a:ext uri="{FF2B5EF4-FFF2-40B4-BE49-F238E27FC236}">
+                <a16:creationId xmlns:a16="http://schemas.microsoft.com/office/drawing/2014/main" id="{B789A13E-52C8-4E94-89B2-D51A0739F00A}"/>
+              </a:ext>
+            </a:extLst>
+          </p:cNvPr>
+          <p:cNvPicPr>
+            <a:picLocks noGrp="1" noChangeAspect="1"/>
+          </p:cNvPicPr>
+          <p:nvPr>
+            <p:ph type="pic" sz="quarter" idx="17"/>
+          </p:nvPr>
+        </p:nvPicPr>
+        <p:blipFill rotWithShape="1">
+          <a:blip r:embed="rId5">
+            <a:extLst>
+              <a:ext uri="{28A0092B-C50C-407E-A947-70E740481C1C}">
+                <a14:useLocalDpi xmlns:a14="http://schemas.microsoft.com/office/drawing/2010/main" val="0"/>
+              </a:ext>
+            </a:extLst>
+          </a:blip>
+          <a:srcRect/>
+          <a:stretch/>
+        </p:blipFill>
+        <p:spPr>
+          <a:xfrm>
+            <a:off x="9136814" y="2428875"/>
+            <a:ext cx="1066800" cy="1066800"/>
+          </a:xfrm>
+        </p:spPr>
+      </p:pic>
+      <p:sp>
+        <p:nvSpPr>
+          <p:cNvPr id="36" name="Text Placeholder 35">
+            <a:extLst>
+              <a:ext uri="{FF2B5EF4-FFF2-40B4-BE49-F238E27FC236}">
+                <a16:creationId xmlns:a16="http://schemas.microsoft.com/office/drawing/2014/main" id="{23BA8AAF-B08B-441B-AAF3-590A568329BF}"/>
               </a:ext>
             </a:extLst>
           </p:cNvPr>
@@ -32329,8 +32388,8 @@
         </p:nvSpPr>
         <p:spPr>
           <a:xfrm>
-            <a:off x="838200" y="3788813"/>
-            <a:ext cx="2330726" cy="804859"/>
+            <a:off x="1500168" y="3654378"/>
+            <a:ext cx="1828800" cy="343061"/>
           </a:xfrm>
         </p:spPr>
         <p:txBody>
@@ -32339,31 +32398,34 @@
           <a:p>
             <a:r>
               <a:rPr lang="en-US" dirty="0"/>
-              <a:t>$14,000</a:t>
-            </a:r>
-          </a:p>
-        </p:txBody>
-      </p:sp>
-      <p:sp>
-        <p:nvSpPr>
-          <p:cNvPr id="14" name="Text Placeholder 13">
-            <a:extLst>
-              <a:ext uri="{FF2B5EF4-FFF2-40B4-BE49-F238E27FC236}">
-                <a16:creationId xmlns:a16="http://schemas.microsoft.com/office/drawing/2014/main" id="{C487CCC0-D329-4C1F-A1CD-04930A23C5C3}"/>
-              </a:ext>
-            </a:extLst>
-          </p:cNvPr>
-          <p:cNvSpPr>
-            <a:spLocks noGrp="1"/>
-          </p:cNvSpPr>
-          <p:nvPr>
-            <p:ph type="body" idx="17"/>
-          </p:nvPr>
-        </p:nvSpPr>
-        <p:spPr>
-          <a:xfrm>
-            <a:off x="838200" y="4464810"/>
-            <a:ext cx="2330726" cy="438505"/>
+              <a:t>TAKUMA HAYASHI</a:t>
+            </a:r>
+          </a:p>
+          <a:p>
+            <a:endParaRPr lang="en-US" dirty="0"/>
+          </a:p>
+        </p:txBody>
+      </p:sp>
+      <p:sp>
+        <p:nvSpPr>
+          <p:cNvPr id="52" name="Text Placeholder 51">
+            <a:extLst>
+              <a:ext uri="{FF2B5EF4-FFF2-40B4-BE49-F238E27FC236}">
+                <a16:creationId xmlns:a16="http://schemas.microsoft.com/office/drawing/2014/main" id="{E07741A2-243F-4086-945C-BCA1F24E6DB5}"/>
+              </a:ext>
+            </a:extLst>
+          </p:cNvPr>
+          <p:cNvSpPr>
+            <a:spLocks noGrp="1"/>
+          </p:cNvSpPr>
+          <p:nvPr>
+            <p:ph type="body" idx="21"/>
+          </p:nvPr>
+        </p:nvSpPr>
+        <p:spPr>
+          <a:xfrm>
+            <a:off x="1390120" y="3782039"/>
+            <a:ext cx="2057400" cy="343061"/>
           </a:xfrm>
         </p:spPr>
         <p:txBody>
@@ -32372,31 +32434,31 @@
           <a:p>
             <a:r>
               <a:rPr lang="en-US" dirty="0"/>
-              <a:t>ANGEL INVESTMENTS</a:t>
-            </a:r>
-          </a:p>
-        </p:txBody>
-      </p:sp>
-      <p:sp>
-        <p:nvSpPr>
-          <p:cNvPr id="4" name="Content Placeholder 3">
-            <a:extLst>
-              <a:ext uri="{FF2B5EF4-FFF2-40B4-BE49-F238E27FC236}">
-                <a16:creationId xmlns:a16="http://schemas.microsoft.com/office/drawing/2014/main" id="{21CF2BB3-1E12-4189-9F5F-EF136C62E39B}"/>
-              </a:ext>
-            </a:extLst>
-          </p:cNvPr>
-          <p:cNvSpPr>
-            <a:spLocks noGrp="1"/>
-          </p:cNvSpPr>
-          <p:nvPr>
-            <p:ph sz="half" idx="2"/>
-          </p:nvPr>
-        </p:nvSpPr>
-        <p:spPr>
-          <a:xfrm>
-            <a:off x="838200" y="5120722"/>
-            <a:ext cx="2330726" cy="853167"/>
+              <a:t>President</a:t>
+            </a:r>
+          </a:p>
+        </p:txBody>
+      </p:sp>
+      <p:sp>
+        <p:nvSpPr>
+          <p:cNvPr id="49" name="Text Placeholder 48">
+            <a:extLst>
+              <a:ext uri="{FF2B5EF4-FFF2-40B4-BE49-F238E27FC236}">
+                <a16:creationId xmlns:a16="http://schemas.microsoft.com/office/drawing/2014/main" id="{27CB5CB7-B854-4F48-954C-5CF86CC9146D}"/>
+              </a:ext>
+            </a:extLst>
+          </p:cNvPr>
+          <p:cNvSpPr>
+            <a:spLocks noGrp="1"/>
+          </p:cNvSpPr>
+          <p:nvPr>
+            <p:ph type="body" idx="18"/>
+          </p:nvPr>
+        </p:nvSpPr>
+        <p:spPr>
+          <a:xfrm>
+            <a:off x="3849262" y="3669060"/>
+            <a:ext cx="1828800" cy="343061"/>
           </a:xfrm>
         </p:spPr>
         <p:txBody>
@@ -32405,62 +32467,31 @@
           <a:p>
             <a:r>
               <a:rPr lang="en-US" dirty="0"/>
-              <a:t>Amount obtained through other investors</a:t>
-            </a:r>
-          </a:p>
-        </p:txBody>
-      </p:sp>
-      <p:graphicFrame>
-        <p:nvGraphicFramePr>
-          <p:cNvPr id="59" name="Content Placeholder 58" title="Funding Chart">
-            <a:extLst>
-              <a:ext uri="{FF2B5EF4-FFF2-40B4-BE49-F238E27FC236}">
-                <a16:creationId xmlns:a16="http://schemas.microsoft.com/office/drawing/2014/main" id="{AD7D64AB-F97A-41F1-B2E8-66B1E245043A}"/>
-              </a:ext>
-            </a:extLst>
-          </p:cNvPr>
-          <p:cNvGraphicFramePr>
-            <a:graphicFrameLocks noGrp="1"/>
-          </p:cNvGraphicFramePr>
-          <p:nvPr>
-            <p:ph sz="quarter" idx="22"/>
-            <p:extLst>
-              <p:ext uri="{D42A27DB-BD31-4B8C-83A1-F6EECF244321}">
-                <p14:modId xmlns:p14="http://schemas.microsoft.com/office/powerpoint/2010/main" val="3021991828"/>
-              </p:ext>
-            </p:extLst>
-          </p:nvPr>
-        </p:nvGraphicFramePr>
-        <p:xfrm>
-          <a:off x="3805238" y="2370138"/>
-          <a:ext cx="1857375" cy="1665287"/>
-        </p:xfrm>
-        <a:graphic>
-          <a:graphicData uri="http://schemas.openxmlformats.org/drawingml/2006/chart">
-            <c:chart xmlns:c="http://schemas.openxmlformats.org/drawingml/2006/chart" xmlns:r="http://schemas.openxmlformats.org/officeDocument/2006/relationships" r:id="rId3"/>
-          </a:graphicData>
-        </a:graphic>
-      </p:graphicFrame>
-      <p:sp>
-        <p:nvSpPr>
-          <p:cNvPr id="5" name="Text Placeholder 4">
-            <a:extLst>
-              <a:ext uri="{FF2B5EF4-FFF2-40B4-BE49-F238E27FC236}">
-                <a16:creationId xmlns:a16="http://schemas.microsoft.com/office/drawing/2014/main" id="{68145D0E-892D-492B-8AD6-551CF27DD5F7}"/>
-              </a:ext>
-            </a:extLst>
-          </p:cNvPr>
-          <p:cNvSpPr>
-            <a:spLocks noGrp="1"/>
-          </p:cNvSpPr>
-          <p:nvPr>
-            <p:ph type="body" sz="quarter" idx="3"/>
-          </p:nvPr>
-        </p:nvSpPr>
-        <p:spPr>
-          <a:xfrm>
-            <a:off x="3562665" y="3788813"/>
-            <a:ext cx="2342205" cy="804859"/>
+              <a:t>MIRJAM NILSSON​</a:t>
+            </a:r>
+          </a:p>
+        </p:txBody>
+      </p:sp>
+      <p:sp>
+        <p:nvSpPr>
+          <p:cNvPr id="61" name="Text Placeholder 60">
+            <a:extLst>
+              <a:ext uri="{FF2B5EF4-FFF2-40B4-BE49-F238E27FC236}">
+                <a16:creationId xmlns:a16="http://schemas.microsoft.com/office/drawing/2014/main" id="{F1C860E6-FF87-419F-8B26-B8EA4D5F3D3D}"/>
+              </a:ext>
+            </a:extLst>
+          </p:cNvPr>
+          <p:cNvSpPr>
+            <a:spLocks noGrp="1"/>
+          </p:cNvSpPr>
+          <p:nvPr>
+            <p:ph type="body" idx="22"/>
+          </p:nvPr>
+        </p:nvSpPr>
+        <p:spPr>
+          <a:xfrm>
+            <a:off x="3739214" y="3796721"/>
+            <a:ext cx="2057400" cy="343061"/>
           </a:xfrm>
         </p:spPr>
         <p:txBody>
@@ -32469,31 +32500,31 @@
           <a:p>
             <a:r>
               <a:rPr lang="en-US" dirty="0"/>
-              <a:t>$12,000</a:t>
-            </a:r>
-          </a:p>
-        </p:txBody>
-      </p:sp>
-      <p:sp>
-        <p:nvSpPr>
-          <p:cNvPr id="15" name="Text Placeholder 14">
-            <a:extLst>
-              <a:ext uri="{FF2B5EF4-FFF2-40B4-BE49-F238E27FC236}">
-                <a16:creationId xmlns:a16="http://schemas.microsoft.com/office/drawing/2014/main" id="{34E62770-EE0A-4D83-B50E-CD868056030E}"/>
-              </a:ext>
-            </a:extLst>
-          </p:cNvPr>
-          <p:cNvSpPr>
-            <a:spLocks noGrp="1"/>
-          </p:cNvSpPr>
-          <p:nvPr>
-            <p:ph type="body" sz="quarter" idx="18"/>
-          </p:nvPr>
-        </p:nvSpPr>
-        <p:spPr>
-          <a:xfrm>
-            <a:off x="3562665" y="4464810"/>
-            <a:ext cx="2342205" cy="438505"/>
+              <a:t>Chief Executive Officer</a:t>
+            </a:r>
+          </a:p>
+        </p:txBody>
+      </p:sp>
+      <p:sp>
+        <p:nvSpPr>
+          <p:cNvPr id="50" name="Text Placeholder 49">
+            <a:extLst>
+              <a:ext uri="{FF2B5EF4-FFF2-40B4-BE49-F238E27FC236}">
+                <a16:creationId xmlns:a16="http://schemas.microsoft.com/office/drawing/2014/main" id="{540F887C-E8EB-4467-90FE-023D47FFB454}"/>
+              </a:ext>
+            </a:extLst>
+          </p:cNvPr>
+          <p:cNvSpPr>
+            <a:spLocks noGrp="1"/>
+          </p:cNvSpPr>
+          <p:nvPr>
+            <p:ph type="body" idx="19"/>
+          </p:nvPr>
+        </p:nvSpPr>
+        <p:spPr>
+          <a:xfrm>
+            <a:off x="6339926" y="3669060"/>
+            <a:ext cx="1828800" cy="343061"/>
           </a:xfrm>
         </p:spPr>
         <p:txBody>
@@ -32502,31 +32533,34 @@
           <a:p>
             <a:r>
               <a:rPr lang="en-US" dirty="0"/>
-              <a:t>PROPERTY</a:t>
-            </a:r>
-          </a:p>
-        </p:txBody>
-      </p:sp>
-      <p:sp>
-        <p:nvSpPr>
-          <p:cNvPr id="6" name="Content Placeholder 5">
-            <a:extLst>
-              <a:ext uri="{FF2B5EF4-FFF2-40B4-BE49-F238E27FC236}">
-                <a16:creationId xmlns:a16="http://schemas.microsoft.com/office/drawing/2014/main" id="{3ED3951E-8DE6-4BA9-B9BA-CFCDF432226C}"/>
-              </a:ext>
-            </a:extLst>
-          </p:cNvPr>
-          <p:cNvSpPr>
-            <a:spLocks noGrp="1"/>
-          </p:cNvSpPr>
-          <p:nvPr>
-            <p:ph sz="quarter" idx="4"/>
-          </p:nvPr>
-        </p:nvSpPr>
-        <p:spPr>
-          <a:xfrm>
-            <a:off x="3562665" y="5120722"/>
-            <a:ext cx="2342205" cy="853167"/>
+              <a:t>FLORA BERGGREN​</a:t>
+            </a:r>
+          </a:p>
+          <a:p>
+            <a:endParaRPr lang="en-US" dirty="0"/>
+          </a:p>
+        </p:txBody>
+      </p:sp>
+      <p:sp>
+        <p:nvSpPr>
+          <p:cNvPr id="62" name="Text Placeholder 61">
+            <a:extLst>
+              <a:ext uri="{FF2B5EF4-FFF2-40B4-BE49-F238E27FC236}">
+                <a16:creationId xmlns:a16="http://schemas.microsoft.com/office/drawing/2014/main" id="{F1AF6C54-9939-432B-BBC2-5E0C0F8B2D8C}"/>
+              </a:ext>
+            </a:extLst>
+          </p:cNvPr>
+          <p:cNvSpPr>
+            <a:spLocks noGrp="1"/>
+          </p:cNvSpPr>
+          <p:nvPr>
+            <p:ph type="body" idx="23"/>
+          </p:nvPr>
+        </p:nvSpPr>
+        <p:spPr>
+          <a:xfrm>
+            <a:off x="6217963" y="3796721"/>
+            <a:ext cx="2057400" cy="343061"/>
           </a:xfrm>
         </p:spPr>
         <p:txBody>
@@ -32535,62 +32569,31 @@
           <a:p>
             <a:r>
               <a:rPr lang="en-US" dirty="0"/>
-              <a:t>Revenue obtained from property rentals</a:t>
-            </a:r>
-          </a:p>
-        </p:txBody>
-      </p:sp>
-      <p:graphicFrame>
-        <p:nvGraphicFramePr>
-          <p:cNvPr id="60" name="Content Placeholder 59" title="Funding Chart">
-            <a:extLst>
-              <a:ext uri="{FF2B5EF4-FFF2-40B4-BE49-F238E27FC236}">
-                <a16:creationId xmlns:a16="http://schemas.microsoft.com/office/drawing/2014/main" id="{81BCDC44-04F0-4390-B965-A86C88176708}"/>
-              </a:ext>
-            </a:extLst>
-          </p:cNvPr>
-          <p:cNvGraphicFramePr>
-            <a:graphicFrameLocks noGrp="1"/>
-          </p:cNvGraphicFramePr>
-          <p:nvPr>
-            <p:ph sz="quarter" idx="23"/>
-            <p:extLst>
-              <p:ext uri="{D42A27DB-BD31-4B8C-83A1-F6EECF244321}">
-                <p14:modId xmlns:p14="http://schemas.microsoft.com/office/powerpoint/2010/main" val="2350556506"/>
-              </p:ext>
-            </p:extLst>
-          </p:nvPr>
-        </p:nvGraphicFramePr>
-        <p:xfrm>
-          <a:off x="6529388" y="2370138"/>
-          <a:ext cx="1857375" cy="1665287"/>
-        </p:xfrm>
-        <a:graphic>
-          <a:graphicData uri="http://schemas.openxmlformats.org/drawingml/2006/chart">
-            <c:chart xmlns:c="http://schemas.openxmlformats.org/drawingml/2006/chart" xmlns:r="http://schemas.openxmlformats.org/officeDocument/2006/relationships" r:id="rId4"/>
-          </a:graphicData>
-        </a:graphic>
-      </p:graphicFrame>
-      <p:sp>
-        <p:nvSpPr>
-          <p:cNvPr id="10" name="Text Placeholder 9">
-            <a:extLst>
-              <a:ext uri="{FF2B5EF4-FFF2-40B4-BE49-F238E27FC236}">
-                <a16:creationId xmlns:a16="http://schemas.microsoft.com/office/drawing/2014/main" id="{C66E4F1A-AD73-4086-B578-235F0B9F1FC4}"/>
-              </a:ext>
-            </a:extLst>
-          </p:cNvPr>
-          <p:cNvSpPr>
-            <a:spLocks noGrp="1"/>
-          </p:cNvSpPr>
-          <p:nvPr>
-            <p:ph type="body" idx="13"/>
-          </p:nvPr>
-        </p:nvSpPr>
-        <p:spPr>
-          <a:xfrm>
-            <a:off x="6298609" y="3788813"/>
-            <a:ext cx="2330726" cy="804859"/>
+              <a:t>Chief Operations Officer</a:t>
+            </a:r>
+          </a:p>
+        </p:txBody>
+      </p:sp>
+      <p:sp>
+        <p:nvSpPr>
+          <p:cNvPr id="51" name="Text Placeholder 50">
+            <a:extLst>
+              <a:ext uri="{FF2B5EF4-FFF2-40B4-BE49-F238E27FC236}">
+                <a16:creationId xmlns:a16="http://schemas.microsoft.com/office/drawing/2014/main" id="{C1C77C5B-2A5F-4999-A5BF-F60EA88DE493}"/>
+              </a:ext>
+            </a:extLst>
+          </p:cNvPr>
+          <p:cNvSpPr>
+            <a:spLocks noGrp="1"/>
+          </p:cNvSpPr>
+          <p:nvPr>
+            <p:ph type="body" idx="20"/>
+          </p:nvPr>
+        </p:nvSpPr>
+        <p:spPr>
+          <a:xfrm>
+            <a:off x="8759806" y="3654378"/>
+            <a:ext cx="1828800" cy="343061"/>
           </a:xfrm>
         </p:spPr>
         <p:txBody>
@@ -32599,31 +32602,31 @@
           <a:p>
             <a:r>
               <a:rPr lang="en-US" dirty="0"/>
-              <a:t>$82,000</a:t>
-            </a:r>
-          </a:p>
-        </p:txBody>
-      </p:sp>
-      <p:sp>
-        <p:nvSpPr>
-          <p:cNvPr id="16" name="Text Placeholder 15">
-            <a:extLst>
-              <a:ext uri="{FF2B5EF4-FFF2-40B4-BE49-F238E27FC236}">
-                <a16:creationId xmlns:a16="http://schemas.microsoft.com/office/drawing/2014/main" id="{AAB421C5-B6AC-48B8-8AEB-AB16AAE5010E}"/>
-              </a:ext>
-            </a:extLst>
-          </p:cNvPr>
-          <p:cNvSpPr>
-            <a:spLocks noGrp="1"/>
-          </p:cNvSpPr>
-          <p:nvPr>
-            <p:ph type="body" idx="19"/>
-          </p:nvPr>
-        </p:nvSpPr>
-        <p:spPr>
-          <a:xfrm>
-            <a:off x="6298609" y="4464810"/>
-            <a:ext cx="2330726" cy="438505"/>
+              <a:t>RAJESH SANTOSHI</a:t>
+            </a:r>
+          </a:p>
+        </p:txBody>
+      </p:sp>
+      <p:sp>
+        <p:nvSpPr>
+          <p:cNvPr id="63" name="Text Placeholder 62">
+            <a:extLst>
+              <a:ext uri="{FF2B5EF4-FFF2-40B4-BE49-F238E27FC236}">
+                <a16:creationId xmlns:a16="http://schemas.microsoft.com/office/drawing/2014/main" id="{41797063-0A46-4FCE-86CB-FC66F997C5F4}"/>
+              </a:ext>
+            </a:extLst>
+          </p:cNvPr>
+          <p:cNvSpPr>
+            <a:spLocks noGrp="1"/>
+          </p:cNvSpPr>
+          <p:nvPr>
+            <p:ph type="body" idx="24"/>
+          </p:nvPr>
+        </p:nvSpPr>
+        <p:spPr>
+          <a:xfrm>
+            <a:off x="8634432" y="3782039"/>
+            <a:ext cx="2057400" cy="343061"/>
           </a:xfrm>
         </p:spPr>
         <p:txBody>
@@ -32632,31 +32635,167 @@
           <a:p>
             <a:r>
               <a:rPr lang="en-US" dirty="0"/>
-              <a:t>SHARES</a:t>
-            </a:r>
-          </a:p>
-        </p:txBody>
-      </p:sp>
-      <p:sp>
-        <p:nvSpPr>
-          <p:cNvPr id="11" name="Content Placeholder 10">
-            <a:extLst>
-              <a:ext uri="{FF2B5EF4-FFF2-40B4-BE49-F238E27FC236}">
-                <a16:creationId xmlns:a16="http://schemas.microsoft.com/office/drawing/2014/main" id="{345C82A0-3F56-47BD-9FB2-6B56DA715F93}"/>
-              </a:ext>
-            </a:extLst>
-          </p:cNvPr>
-          <p:cNvSpPr>
-            <a:spLocks noGrp="1"/>
-          </p:cNvSpPr>
-          <p:nvPr>
-            <p:ph sz="half" idx="14"/>
-          </p:nvPr>
-        </p:nvSpPr>
-        <p:spPr>
-          <a:xfrm>
-            <a:off x="6298609" y="5120722"/>
-            <a:ext cx="2330726" cy="853167"/>
+              <a:t>VP Marketing</a:t>
+            </a:r>
+          </a:p>
+        </p:txBody>
+      </p:sp>
+      <p:pic>
+        <p:nvPicPr>
+          <p:cNvPr id="58" name="Picture Placeholder 57" descr="Team member headshot">
+            <a:extLst>
+              <a:ext uri="{FF2B5EF4-FFF2-40B4-BE49-F238E27FC236}">
+                <a16:creationId xmlns:a16="http://schemas.microsoft.com/office/drawing/2014/main" id="{67F12A1B-1645-4C97-AE80-CC96C4998E2E}"/>
+              </a:ext>
+            </a:extLst>
+          </p:cNvPr>
+          <p:cNvPicPr>
+            <a:picLocks noGrp="1" noChangeAspect="1"/>
+          </p:cNvPicPr>
+          <p:nvPr>
+            <p:ph type="pic" sz="quarter" idx="26"/>
+          </p:nvPr>
+        </p:nvPicPr>
+        <p:blipFill rotWithShape="1">
+          <a:blip r:embed="rId6">
+            <a:extLst>
+              <a:ext uri="{28A0092B-C50C-407E-A947-70E740481C1C}">
+                <a14:useLocalDpi xmlns:a14="http://schemas.microsoft.com/office/drawing/2010/main" val="0"/>
+              </a:ext>
+            </a:extLst>
+          </a:blip>
+          <a:srcRect/>
+          <a:stretch/>
+        </p:blipFill>
+        <p:spPr>
+          <a:xfrm>
+            <a:off x="1877176" y="4287711"/>
+            <a:ext cx="1066800" cy="1066800"/>
+          </a:xfrm>
+        </p:spPr>
+      </p:pic>
+      <p:pic>
+        <p:nvPicPr>
+          <p:cNvPr id="66" name="Picture Placeholder 65" descr="Team member headshot">
+            <a:extLst>
+              <a:ext uri="{FF2B5EF4-FFF2-40B4-BE49-F238E27FC236}">
+                <a16:creationId xmlns:a16="http://schemas.microsoft.com/office/drawing/2014/main" id="{448282B4-E477-4ECE-BC09-7EA9451D9AEE}"/>
+              </a:ext>
+            </a:extLst>
+          </p:cNvPr>
+          <p:cNvPicPr>
+            <a:picLocks noGrp="1" noChangeAspect="1"/>
+          </p:cNvPicPr>
+          <p:nvPr>
+            <p:ph type="pic" sz="quarter" idx="27"/>
+          </p:nvPr>
+        </p:nvPicPr>
+        <p:blipFill rotWithShape="1">
+          <a:blip r:embed="rId7">
+            <a:extLst>
+              <a:ext uri="{28A0092B-C50C-407E-A947-70E740481C1C}">
+                <a14:useLocalDpi xmlns:a14="http://schemas.microsoft.com/office/drawing/2010/main" val="0"/>
+              </a:ext>
+            </a:extLst>
+          </a:blip>
+          <a:srcRect/>
+          <a:stretch/>
+        </p:blipFill>
+        <p:spPr>
+          <a:xfrm>
+            <a:off x="4226270" y="4287711"/>
+            <a:ext cx="1066800" cy="1066800"/>
+          </a:xfrm>
+        </p:spPr>
+      </p:pic>
+      <p:pic>
+        <p:nvPicPr>
+          <p:cNvPr id="78" name="Picture Placeholder 77" descr="Team member headshot">
+            <a:extLst>
+              <a:ext uri="{FF2B5EF4-FFF2-40B4-BE49-F238E27FC236}">
+                <a16:creationId xmlns:a16="http://schemas.microsoft.com/office/drawing/2014/main" id="{15824874-C00E-4835-97F0-43C416DDCACC}"/>
+              </a:ext>
+            </a:extLst>
+          </p:cNvPr>
+          <p:cNvPicPr>
+            <a:picLocks noGrp="1" noChangeAspect="1"/>
+          </p:cNvPicPr>
+          <p:nvPr>
+            <p:ph type="pic" sz="quarter" idx="28"/>
+          </p:nvPr>
+        </p:nvPicPr>
+        <p:blipFill rotWithShape="1">
+          <a:blip r:embed="rId8">
+            <a:extLst>
+              <a:ext uri="{28A0092B-C50C-407E-A947-70E740481C1C}">
+                <a14:useLocalDpi xmlns:a14="http://schemas.microsoft.com/office/drawing/2010/main" val="0"/>
+              </a:ext>
+            </a:extLst>
+          </a:blip>
+          <a:srcRect/>
+          <a:stretch/>
+        </p:blipFill>
+        <p:spPr>
+          <a:xfrm>
+            <a:off x="6716934" y="4287711"/>
+            <a:ext cx="1066800" cy="1066800"/>
+          </a:xfrm>
+        </p:spPr>
+      </p:pic>
+      <p:pic>
+        <p:nvPicPr>
+          <p:cNvPr id="83" name="Picture Placeholder 82" descr="Team member headshot">
+            <a:extLst>
+              <a:ext uri="{FF2B5EF4-FFF2-40B4-BE49-F238E27FC236}">
+                <a16:creationId xmlns:a16="http://schemas.microsoft.com/office/drawing/2014/main" id="{96405252-7726-442E-9D15-755840A5AF27}"/>
+              </a:ext>
+            </a:extLst>
+          </p:cNvPr>
+          <p:cNvPicPr>
+            <a:picLocks noGrp="1" noChangeAspect="1"/>
+          </p:cNvPicPr>
+          <p:nvPr>
+            <p:ph type="pic" sz="quarter" idx="29"/>
+          </p:nvPr>
+        </p:nvPicPr>
+        <p:blipFill rotWithShape="1">
+          <a:blip r:embed="rId9">
+            <a:extLst>
+              <a:ext uri="{28A0092B-C50C-407E-A947-70E740481C1C}">
+                <a14:useLocalDpi xmlns:a14="http://schemas.microsoft.com/office/drawing/2010/main" val="0"/>
+              </a:ext>
+            </a:extLst>
+          </a:blip>
+          <a:srcRect/>
+          <a:stretch/>
+        </p:blipFill>
+        <p:spPr>
+          <a:xfrm>
+            <a:off x="9136814" y="4287711"/>
+            <a:ext cx="1066800" cy="1066800"/>
+          </a:xfrm>
+        </p:spPr>
+      </p:pic>
+      <p:sp>
+        <p:nvSpPr>
+          <p:cNvPr id="64" name="Text Placeholder 63">
+            <a:extLst>
+              <a:ext uri="{FF2B5EF4-FFF2-40B4-BE49-F238E27FC236}">
+                <a16:creationId xmlns:a16="http://schemas.microsoft.com/office/drawing/2014/main" id="{3ECD1D6F-7DAE-4DCC-BBB4-CD519379CDF6}"/>
+              </a:ext>
+            </a:extLst>
+          </p:cNvPr>
+          <p:cNvSpPr>
+            <a:spLocks noGrp="1"/>
+          </p:cNvSpPr>
+          <p:nvPr>
+            <p:ph type="body" idx="25"/>
+          </p:nvPr>
+        </p:nvSpPr>
+        <p:spPr>
+          <a:xfrm>
+            <a:off x="1500168" y="5513214"/>
+            <a:ext cx="1828800" cy="343061"/>
           </a:xfrm>
         </p:spPr>
         <p:txBody>
@@ -32665,65 +32804,34 @@
           <a:p>
             <a:r>
               <a:rPr lang="en-US" dirty="0"/>
-              <a:t>Number of shares converted into USD</a:t>
-            </a:r>
-          </a:p>
-          <a:p>
-            <a:endParaRPr lang="en-US" noProof="1"/>
-          </a:p>
-        </p:txBody>
-      </p:sp>
-      <p:graphicFrame>
-        <p:nvGraphicFramePr>
-          <p:cNvPr id="61" name="Content Placeholder 60" title="Funding Chart">
-            <a:extLst>
-              <a:ext uri="{FF2B5EF4-FFF2-40B4-BE49-F238E27FC236}">
-                <a16:creationId xmlns:a16="http://schemas.microsoft.com/office/drawing/2014/main" id="{D78C801B-5A42-4B88-AF2C-A3C45CD69E2E}"/>
-              </a:ext>
-            </a:extLst>
-          </p:cNvPr>
-          <p:cNvGraphicFramePr>
-            <a:graphicFrameLocks noGrp="1"/>
-          </p:cNvGraphicFramePr>
-          <p:nvPr>
-            <p:ph sz="quarter" idx="24"/>
-            <p:extLst>
-              <p:ext uri="{D42A27DB-BD31-4B8C-83A1-F6EECF244321}">
-                <p14:modId xmlns:p14="http://schemas.microsoft.com/office/powerpoint/2010/main" val="2617539870"/>
-              </p:ext>
-            </p:extLst>
-          </p:nvPr>
-        </p:nvGraphicFramePr>
-        <p:xfrm>
-          <a:off x="9259888" y="2370138"/>
-          <a:ext cx="1857375" cy="1665287"/>
-        </p:xfrm>
-        <a:graphic>
-          <a:graphicData uri="http://schemas.openxmlformats.org/drawingml/2006/chart">
-            <c:chart xmlns:c="http://schemas.openxmlformats.org/drawingml/2006/chart" xmlns:r="http://schemas.openxmlformats.org/officeDocument/2006/relationships" r:id="rId5"/>
-          </a:graphicData>
-        </a:graphic>
-      </p:graphicFrame>
-      <p:sp>
-        <p:nvSpPr>
-          <p:cNvPr id="12" name="Text Placeholder 11">
-            <a:extLst>
-              <a:ext uri="{FF2B5EF4-FFF2-40B4-BE49-F238E27FC236}">
-                <a16:creationId xmlns:a16="http://schemas.microsoft.com/office/drawing/2014/main" id="{F70E657A-85D8-48A8-B017-274F0C32C5C9}"/>
-              </a:ext>
-            </a:extLst>
-          </p:cNvPr>
-          <p:cNvSpPr>
-            <a:spLocks noGrp="1"/>
-          </p:cNvSpPr>
-          <p:nvPr>
-            <p:ph type="body" idx="15"/>
-          </p:nvPr>
-        </p:nvSpPr>
-        <p:spPr>
-          <a:xfrm>
-            <a:off x="9023074" y="3788457"/>
-            <a:ext cx="2330726" cy="804859"/>
+              <a:t>GRAHAM BARNES</a:t>
+            </a:r>
+          </a:p>
+          <a:p>
+            <a:endParaRPr lang="en-US" dirty="0"/>
+          </a:p>
+        </p:txBody>
+      </p:sp>
+      <p:sp>
+        <p:nvSpPr>
+          <p:cNvPr id="72" name="Text Placeholder 71">
+            <a:extLst>
+              <a:ext uri="{FF2B5EF4-FFF2-40B4-BE49-F238E27FC236}">
+                <a16:creationId xmlns:a16="http://schemas.microsoft.com/office/drawing/2014/main" id="{0420E7B5-7D79-437C-BC6E-11C9C9C73D12}"/>
+              </a:ext>
+            </a:extLst>
+          </p:cNvPr>
+          <p:cNvSpPr>
+            <a:spLocks noGrp="1"/>
+          </p:cNvSpPr>
+          <p:nvPr>
+            <p:ph type="body" idx="33"/>
+          </p:nvPr>
+        </p:nvSpPr>
+        <p:spPr>
+          <a:xfrm>
+            <a:off x="1390120" y="5640875"/>
+            <a:ext cx="2057400" cy="343061"/>
           </a:xfrm>
         </p:spPr>
         <p:txBody>
@@ -32732,31 +32840,31 @@
           <a:p>
             <a:r>
               <a:rPr lang="en-US" dirty="0"/>
-              <a:t>$32,000</a:t>
-            </a:r>
-          </a:p>
-        </p:txBody>
-      </p:sp>
-      <p:sp>
-        <p:nvSpPr>
-          <p:cNvPr id="17" name="Text Placeholder 16">
-            <a:extLst>
-              <a:ext uri="{FF2B5EF4-FFF2-40B4-BE49-F238E27FC236}">
-                <a16:creationId xmlns:a16="http://schemas.microsoft.com/office/drawing/2014/main" id="{025753CB-8973-4FAE-BB5D-5CC96CE338D4}"/>
-              </a:ext>
-            </a:extLst>
-          </p:cNvPr>
-          <p:cNvSpPr>
-            <a:spLocks noGrp="1"/>
-          </p:cNvSpPr>
-          <p:nvPr>
-            <p:ph type="body" idx="20"/>
-          </p:nvPr>
-        </p:nvSpPr>
-        <p:spPr>
-          <a:xfrm>
-            <a:off x="9023074" y="4464454"/>
-            <a:ext cx="2330726" cy="438505"/>
+              <a:t>VP Product</a:t>
+            </a:r>
+          </a:p>
+        </p:txBody>
+      </p:sp>
+      <p:sp>
+        <p:nvSpPr>
+          <p:cNvPr id="69" name="Text Placeholder 68">
+            <a:extLst>
+              <a:ext uri="{FF2B5EF4-FFF2-40B4-BE49-F238E27FC236}">
+                <a16:creationId xmlns:a16="http://schemas.microsoft.com/office/drawing/2014/main" id="{A5A9CD8D-31A9-4139-87B2-349EA8E14781}"/>
+              </a:ext>
+            </a:extLst>
+          </p:cNvPr>
+          <p:cNvSpPr>
+            <a:spLocks noGrp="1"/>
+          </p:cNvSpPr>
+          <p:nvPr>
+            <p:ph type="body" idx="30"/>
+          </p:nvPr>
+        </p:nvSpPr>
+        <p:spPr>
+          <a:xfrm>
+            <a:off x="3849262" y="5527896"/>
+            <a:ext cx="1828800" cy="343061"/>
           </a:xfrm>
         </p:spPr>
         <p:txBody>
@@ -32765,31 +32873,34 @@
           <a:p>
             <a:r>
               <a:rPr lang="en-US" dirty="0"/>
-              <a:t>CASH</a:t>
-            </a:r>
-          </a:p>
-        </p:txBody>
-      </p:sp>
-      <p:sp>
-        <p:nvSpPr>
-          <p:cNvPr id="13" name="Content Placeholder 12">
-            <a:extLst>
-              <a:ext uri="{FF2B5EF4-FFF2-40B4-BE49-F238E27FC236}">
-                <a16:creationId xmlns:a16="http://schemas.microsoft.com/office/drawing/2014/main" id="{69F9DEC9-77BC-482D-ACFB-0F2B6DC65F9F}"/>
-              </a:ext>
-            </a:extLst>
-          </p:cNvPr>
-          <p:cNvSpPr>
-            <a:spLocks noGrp="1"/>
-          </p:cNvSpPr>
-          <p:nvPr>
-            <p:ph sz="half" idx="16"/>
-          </p:nvPr>
-        </p:nvSpPr>
-        <p:spPr>
-          <a:xfrm>
-            <a:off x="9023074" y="5120366"/>
-            <a:ext cx="2330726" cy="853167"/>
+              <a:t>ROWAN MURPHY</a:t>
+            </a:r>
+          </a:p>
+          <a:p>
+            <a:endParaRPr lang="en-US" dirty="0"/>
+          </a:p>
+        </p:txBody>
+      </p:sp>
+      <p:sp>
+        <p:nvSpPr>
+          <p:cNvPr id="73" name="Text Placeholder 72">
+            <a:extLst>
+              <a:ext uri="{FF2B5EF4-FFF2-40B4-BE49-F238E27FC236}">
+                <a16:creationId xmlns:a16="http://schemas.microsoft.com/office/drawing/2014/main" id="{E1FCDD58-01CD-47CF-AB15-A511E9D3612F}"/>
+              </a:ext>
+            </a:extLst>
+          </p:cNvPr>
+          <p:cNvSpPr>
+            <a:spLocks noGrp="1"/>
+          </p:cNvSpPr>
+          <p:nvPr>
+            <p:ph type="body" idx="34"/>
+          </p:nvPr>
+        </p:nvSpPr>
+        <p:spPr>
+          <a:xfrm>
+            <a:off x="3739214" y="5655557"/>
+            <a:ext cx="2057400" cy="343061"/>
           </a:xfrm>
         </p:spPr>
         <p:txBody>
@@ -32797,21 +32908,150 @@
           <a:lstStyle/>
           <a:p>
             <a:r>
-              <a:rPr lang="en-US" noProof="1"/>
-              <a:t>Liquid cash we have on hand</a:t>
-            </a:r>
-          </a:p>
-          <a:p>
-            <a:endParaRPr lang="en-US" dirty="0"/>
-          </a:p>
-        </p:txBody>
-      </p:sp>
-      <p:sp>
-        <p:nvSpPr>
-          <p:cNvPr id="7" name="Date Placeholder 6">
-            <a:extLst>
-              <a:ext uri="{FF2B5EF4-FFF2-40B4-BE49-F238E27FC236}">
-                <a16:creationId xmlns:a16="http://schemas.microsoft.com/office/drawing/2014/main" id="{A563C171-5812-4E79-804A-ED04E1BD313F}"/>
+              <a:rPr lang="en-US" dirty="0"/>
+              <a:t>SEO Strategist</a:t>
+            </a:r>
+          </a:p>
+        </p:txBody>
+      </p:sp>
+      <p:sp>
+        <p:nvSpPr>
+          <p:cNvPr id="70" name="Text Placeholder 69">
+            <a:extLst>
+              <a:ext uri="{FF2B5EF4-FFF2-40B4-BE49-F238E27FC236}">
+                <a16:creationId xmlns:a16="http://schemas.microsoft.com/office/drawing/2014/main" id="{58753412-8033-48AD-80DF-945C72BC7335}"/>
+              </a:ext>
+            </a:extLst>
+          </p:cNvPr>
+          <p:cNvSpPr>
+            <a:spLocks noGrp="1"/>
+          </p:cNvSpPr>
+          <p:nvPr>
+            <p:ph type="body" idx="31"/>
+          </p:nvPr>
+        </p:nvSpPr>
+        <p:spPr>
+          <a:xfrm>
+            <a:off x="6339926" y="5527896"/>
+            <a:ext cx="1828800" cy="343061"/>
+          </a:xfrm>
+        </p:spPr>
+        <p:txBody>
+          <a:bodyPr/>
+          <a:lstStyle/>
+          <a:p>
+            <a:r>
+              <a:rPr lang="en-US" dirty="0"/>
+              <a:t>ELIZABETH MOORE</a:t>
+            </a:r>
+          </a:p>
+        </p:txBody>
+      </p:sp>
+      <p:sp>
+        <p:nvSpPr>
+          <p:cNvPr id="74" name="Text Placeholder 73">
+            <a:extLst>
+              <a:ext uri="{FF2B5EF4-FFF2-40B4-BE49-F238E27FC236}">
+                <a16:creationId xmlns:a16="http://schemas.microsoft.com/office/drawing/2014/main" id="{2E2604A9-4BB8-4144-914B-DCF4F13DF3DB}"/>
+              </a:ext>
+            </a:extLst>
+          </p:cNvPr>
+          <p:cNvSpPr>
+            <a:spLocks noGrp="1"/>
+          </p:cNvSpPr>
+          <p:nvPr>
+            <p:ph type="body" idx="35"/>
+          </p:nvPr>
+        </p:nvSpPr>
+        <p:spPr>
+          <a:xfrm>
+            <a:off x="6229878" y="5655557"/>
+            <a:ext cx="2057400" cy="343061"/>
+          </a:xfrm>
+        </p:spPr>
+        <p:txBody>
+          <a:bodyPr/>
+          <a:lstStyle/>
+          <a:p>
+            <a:r>
+              <a:rPr lang="en-US" dirty="0"/>
+              <a:t>Product Designer</a:t>
+            </a:r>
+          </a:p>
+        </p:txBody>
+      </p:sp>
+      <p:sp>
+        <p:nvSpPr>
+          <p:cNvPr id="71" name="Text Placeholder 70">
+            <a:extLst>
+              <a:ext uri="{FF2B5EF4-FFF2-40B4-BE49-F238E27FC236}">
+                <a16:creationId xmlns:a16="http://schemas.microsoft.com/office/drawing/2014/main" id="{A45FE9A3-15E0-49FA-B6E5-DB16CD0C2C8F}"/>
+              </a:ext>
+            </a:extLst>
+          </p:cNvPr>
+          <p:cNvSpPr>
+            <a:spLocks noGrp="1"/>
+          </p:cNvSpPr>
+          <p:nvPr>
+            <p:ph type="body" idx="32"/>
+          </p:nvPr>
+        </p:nvSpPr>
+        <p:spPr>
+          <a:xfrm>
+            <a:off x="8759806" y="5513214"/>
+            <a:ext cx="1828800" cy="343061"/>
+          </a:xfrm>
+        </p:spPr>
+        <p:txBody>
+          <a:bodyPr/>
+          <a:lstStyle/>
+          <a:p>
+            <a:r>
+              <a:rPr lang="en-US" dirty="0"/>
+              <a:t>ROBIN KLINE</a:t>
+            </a:r>
+          </a:p>
+        </p:txBody>
+      </p:sp>
+      <p:sp>
+        <p:nvSpPr>
+          <p:cNvPr id="75" name="Text Placeholder 74">
+            <a:extLst>
+              <a:ext uri="{FF2B5EF4-FFF2-40B4-BE49-F238E27FC236}">
+                <a16:creationId xmlns:a16="http://schemas.microsoft.com/office/drawing/2014/main" id="{72076C4D-9688-4C1A-AB51-8F1051A803A9}"/>
+              </a:ext>
+            </a:extLst>
+          </p:cNvPr>
+          <p:cNvSpPr>
+            <a:spLocks noGrp="1"/>
+          </p:cNvSpPr>
+          <p:nvPr>
+            <p:ph type="body" idx="36"/>
+          </p:nvPr>
+        </p:nvSpPr>
+        <p:spPr>
+          <a:xfrm>
+            <a:off x="8634432" y="5640875"/>
+            <a:ext cx="2057400" cy="343061"/>
+          </a:xfrm>
+        </p:spPr>
+        <p:txBody>
+          <a:bodyPr/>
+          <a:lstStyle/>
+          <a:p>
+            <a:r>
+              <a:rPr lang="en-US" dirty="0"/>
+              <a:t>Content Developer</a:t>
+            </a:r>
+          </a:p>
+        </p:txBody>
+      </p:sp>
+      <p:sp>
+        <p:nvSpPr>
+          <p:cNvPr id="3" name="Date Placeholder 2">
+            <a:extLst>
+              <a:ext uri="{FF2B5EF4-FFF2-40B4-BE49-F238E27FC236}">
+                <a16:creationId xmlns:a16="http://schemas.microsoft.com/office/drawing/2014/main" id="{1833164A-09D8-4E05-899E-C830A562A446}"/>
               </a:ext>
             </a:extLst>
           </p:cNvPr>
@@ -32841,10 +33081,10 @@
       </p:sp>
       <p:sp>
         <p:nvSpPr>
-          <p:cNvPr id="8" name="Footer Placeholder 7">
-            <a:extLst>
-              <a:ext uri="{FF2B5EF4-FFF2-40B4-BE49-F238E27FC236}">
-                <a16:creationId xmlns:a16="http://schemas.microsoft.com/office/drawing/2014/main" id="{3AD8A4DC-ECAA-4D59-BE12-EBEDDE9E2A7D}"/>
+          <p:cNvPr id="4" name="Footer Placeholder 3">
+            <a:extLst>
+              <a:ext uri="{FF2B5EF4-FFF2-40B4-BE49-F238E27FC236}">
+                <a16:creationId xmlns:a16="http://schemas.microsoft.com/office/drawing/2014/main" id="{79EB4DEA-4DCD-421C-A905-7EFCAE898907}"/>
               </a:ext>
             </a:extLst>
           </p:cNvPr>
@@ -32874,10 +33114,10 @@
       </p:sp>
       <p:sp>
         <p:nvSpPr>
-          <p:cNvPr id="9" name="Slide Number Placeholder 8">
-            <a:extLst>
-              <a:ext uri="{FF2B5EF4-FFF2-40B4-BE49-F238E27FC236}">
-                <a16:creationId xmlns:a16="http://schemas.microsoft.com/office/drawing/2014/main" id="{9BFC0B64-8F13-426F-B6C5-9C9427ACAD7E}"/>
+          <p:cNvPr id="5" name="Slide Number Placeholder 4">
+            <a:extLst>
+              <a:ext uri="{FF2B5EF4-FFF2-40B4-BE49-F238E27FC236}">
+                <a16:creationId xmlns:a16="http://schemas.microsoft.com/office/drawing/2014/main" id="{2E1923C7-5010-4C4F-A932-4BDA0B62A7C0}"/>
               </a:ext>
             </a:extLst>
           </p:cNvPr>
@@ -32910,7 +33150,7 @@
     </p:spTree>
     <p:extLst>
       <p:ext uri="{BB962C8B-B14F-4D97-AF65-F5344CB8AC3E}">
-        <p14:creationId xmlns:p14="http://schemas.microsoft.com/office/powerpoint/2010/main" val="1177824853"/>
+        <p14:creationId xmlns:p14="http://schemas.microsoft.com/office/powerpoint/2010/main" val="3396266754"/>
       </p:ext>
     </p:extLst>
   </p:cSld>
@@ -32925,7 +33165,13 @@
   <p:cSld>
     <p:spTree>
       <p:nvGrpSpPr>
-        <p:cNvPr id="1" name=""/>
+        <p:cNvPr id="1" name="">
+          <a:extLst>
+            <a:ext uri="{FF2B5EF4-FFF2-40B4-BE49-F238E27FC236}">
+              <a16:creationId xmlns:a16="http://schemas.microsoft.com/office/drawing/2014/main" id="{29D6EE85-ADCB-97E1-3C6D-772EB5B4DE30}"/>
+            </a:ext>
+          </a:extLst>
+        </p:cNvPr>
         <p:cNvGrpSpPr/>
         <p:nvPr/>
       </p:nvGrpSpPr>
@@ -32939,183 +33185,65 @@
       </p:grpSpPr>
       <p:sp>
         <p:nvSpPr>
-          <p:cNvPr id="2" name="Title 1">
-            <a:extLst>
-              <a:ext uri="{FF2B5EF4-FFF2-40B4-BE49-F238E27FC236}">
-                <a16:creationId xmlns:a16="http://schemas.microsoft.com/office/drawing/2014/main" id="{6719F29B-F233-48AF-8261-F33A4E079E3E}"/>
-              </a:ext>
-              <a:ext uri="{C183D7F6-B498-43B3-948B-1728B52AA6E4}">
-                <adec:decorative xmlns:adec="http://schemas.microsoft.com/office/drawing/2017/decorative" val="0"/>
-              </a:ext>
-            </a:extLst>
-          </p:cNvPr>
-          <p:cNvSpPr>
-            <a:spLocks noGrp="1"/>
-          </p:cNvSpPr>
-          <p:nvPr>
-            <p:ph type="title"/>
-          </p:nvPr>
-        </p:nvSpPr>
-        <p:spPr>
-          <a:xfrm>
-            <a:off x="1333499" y="1020445"/>
-            <a:ext cx="3171825" cy="1325563"/>
-          </a:xfrm>
-        </p:spPr>
-        <p:txBody>
-          <a:bodyPr/>
-          <a:lstStyle/>
-          <a:p>
-            <a:r>
-              <a:rPr lang="en-US" dirty="0"/>
-              <a:t>introduction</a:t>
-            </a:r>
-          </a:p>
-        </p:txBody>
-      </p:sp>
-      <p:sp>
-        <p:nvSpPr>
-          <p:cNvPr id="3" name="Subtitle 2">
-            <a:extLst>
-              <a:ext uri="{FF2B5EF4-FFF2-40B4-BE49-F238E27FC236}">
-                <a16:creationId xmlns:a16="http://schemas.microsoft.com/office/drawing/2014/main" id="{35E3EA69-4E0E-41BD-8095-A124225A2647}"/>
-              </a:ext>
-              <a:ext uri="{C183D7F6-B498-43B3-948B-1728B52AA6E4}">
-                <adec:decorative xmlns:adec="http://schemas.microsoft.com/office/drawing/2017/decorative" val="0"/>
-              </a:ext>
-            </a:extLst>
-          </p:cNvPr>
-          <p:cNvSpPr>
-            <a:spLocks noGrp="1"/>
-          </p:cNvSpPr>
-          <p:nvPr>
-            <p:ph idx="1"/>
-          </p:nvPr>
-        </p:nvSpPr>
-        <p:spPr>
-          <a:xfrm>
-            <a:off x="1333499" y="2924175"/>
-            <a:ext cx="3171825" cy="2519363"/>
-          </a:xfrm>
-        </p:spPr>
-        <p:txBody>
-          <a:bodyPr>
-            <a:normAutofit/>
+          <p:cNvPr id="33" name="ZoneTexte 32">
+            <a:extLst>
+              <a:ext uri="{FF2B5EF4-FFF2-40B4-BE49-F238E27FC236}">
+                <a16:creationId xmlns:a16="http://schemas.microsoft.com/office/drawing/2014/main" id="{F57B91D7-ABE2-EBF2-7A3D-318436BED42F}"/>
+              </a:ext>
+            </a:extLst>
+          </p:cNvPr>
+          <p:cNvSpPr txBox="1"/>
+          <p:nvPr/>
+        </p:nvSpPr>
+        <p:spPr>
+          <a:xfrm>
+            <a:off x="1867328" y="411233"/>
+            <a:ext cx="3588250" cy="369332"/>
+          </a:xfrm>
+          <a:prstGeom prst="rect">
+            <a:avLst/>
+          </a:prstGeom>
+          <a:noFill/>
+        </p:spPr>
+        <p:txBody>
+          <a:bodyPr wrap="square">
+            <a:spAutoFit/>
           </a:bodyPr>
           <a:lstStyle/>
           <a:p>
-            <a:r>
-              <a:rPr lang="en-US" dirty="0"/>
-              <a:t>At Contoso, we empower organizations to foster collaborative thinking to further drive workplace innovation. By closing the loop and leveraging agile frameworks, we help business grow organically and foster a consumer-first mindset.</a:t>
-            </a:r>
-          </a:p>
-        </p:txBody>
-      </p:sp>
-      <p:sp>
-        <p:nvSpPr>
-          <p:cNvPr id="6" name="Date Placeholder 5">
-            <a:extLst>
-              <a:ext uri="{FF2B5EF4-FFF2-40B4-BE49-F238E27FC236}">
-                <a16:creationId xmlns:a16="http://schemas.microsoft.com/office/drawing/2014/main" id="{B69DF042-37C5-4E09-AA4C-AA66649C9533}"/>
-              </a:ext>
-            </a:extLst>
-          </p:cNvPr>
-          <p:cNvSpPr>
-            <a:spLocks noGrp="1"/>
-          </p:cNvSpPr>
-          <p:nvPr>
-            <p:ph type="dt" sz="half" idx="10"/>
-          </p:nvPr>
-        </p:nvSpPr>
-        <p:spPr>
-          <a:xfrm>
-            <a:off x="1333500" y="6356350"/>
-            <a:ext cx="985157" cy="365125"/>
-          </a:xfrm>
-        </p:spPr>
-        <p:txBody>
-          <a:bodyPr/>
-          <a:lstStyle/>
-          <a:p>
-            <a:r>
-              <a:rPr lang="en-US" dirty="0"/>
-              <a:t>20XX</a:t>
-            </a:r>
-          </a:p>
-        </p:txBody>
-      </p:sp>
-      <p:sp>
-        <p:nvSpPr>
-          <p:cNvPr id="5" name="Footer Placeholder 4">
-            <a:extLst>
-              <a:ext uri="{FF2B5EF4-FFF2-40B4-BE49-F238E27FC236}">
-                <a16:creationId xmlns:a16="http://schemas.microsoft.com/office/drawing/2014/main" id="{AF29EA23-F34E-486A-B8B2-0C3019266975}"/>
-              </a:ext>
-            </a:extLst>
-          </p:cNvPr>
-          <p:cNvSpPr>
-            <a:spLocks noGrp="1"/>
-          </p:cNvSpPr>
-          <p:nvPr>
-            <p:ph type="ftr" sz="quarter" idx="11"/>
-          </p:nvPr>
-        </p:nvSpPr>
-        <p:spPr>
-          <a:xfrm>
-            <a:off x="2669886" y="6356349"/>
-            <a:ext cx="2482842" cy="365125"/>
-          </a:xfrm>
-        </p:spPr>
-        <p:txBody>
-          <a:bodyPr/>
-          <a:lstStyle/>
-          <a:p>
-            <a:r>
-              <a:rPr lang="en-US" dirty="0"/>
-              <a:t>Pitch Deck</a:t>
-            </a:r>
-          </a:p>
-        </p:txBody>
-      </p:sp>
-      <p:sp>
-        <p:nvSpPr>
-          <p:cNvPr id="4" name="Slide Number Placeholder 3">
-            <a:extLst>
-              <a:ext uri="{FF2B5EF4-FFF2-40B4-BE49-F238E27FC236}">
-                <a16:creationId xmlns:a16="http://schemas.microsoft.com/office/drawing/2014/main" id="{328F602C-7F98-4C02-99D4-ED65E00D66A4}"/>
-              </a:ext>
-            </a:extLst>
-          </p:cNvPr>
-          <p:cNvSpPr>
-            <a:spLocks noGrp="1"/>
-          </p:cNvSpPr>
-          <p:nvPr>
-            <p:ph type="sldNum" sz="quarter" idx="12"/>
-          </p:nvPr>
-        </p:nvSpPr>
-        <p:spPr>
-          <a:xfrm>
-            <a:off x="5536305" y="6356350"/>
-            <a:ext cx="987552" cy="365125"/>
-          </a:xfrm>
-        </p:spPr>
-        <p:txBody>
-          <a:bodyPr/>
-          <a:lstStyle/>
-          <a:p>
-            <a:fld id="{19B51A1E-902D-48AF-9020-955120F399B6}" type="slidenum">
-              <a:rPr lang="en-US" smtClean="0"/>
-              <a:pPr/>
-              <a:t>2</a:t>
-            </a:fld>
-            <a:endParaRPr lang="en-US" dirty="0"/>
+            <a:pPr marL="0" marR="0">
+              <a:spcBef>
+                <a:spcPts val="1800"/>
+              </a:spcBef>
+              <a:spcAft>
+                <a:spcPts val="1000"/>
+              </a:spcAft>
+              <a:buNone/>
+            </a:pPr>
+            <a:r>
+              <a:rPr lang="fr-HT" sz="1800" b="1" kern="0" dirty="0">
+                <a:solidFill>
+                  <a:srgbClr val="1F3864"/>
+                </a:solidFill>
+                <a:effectLst/>
+                <a:latin typeface="Arial" panose="020B0604020202020204" pitchFamily="34" charset="0"/>
+              </a:rPr>
+              <a:t>LISTE DES ABRÉVIATIONS</a:t>
+            </a:r>
+            <a:endParaRPr lang="en-US" sz="1800" b="1" kern="0" dirty="0">
+              <a:solidFill>
+                <a:srgbClr val="1F3864"/>
+              </a:solidFill>
+              <a:effectLst/>
+              <a:latin typeface="Arial" panose="020B0604020202020204" pitchFamily="34" charset="0"/>
+            </a:endParaRPr>
           </a:p>
         </p:txBody>
       </p:sp>
     </p:spTree>
     <p:extLst>
       <p:ext uri="{BB962C8B-B14F-4D97-AF65-F5344CB8AC3E}">
-        <p14:creationId xmlns:p14="http://schemas.microsoft.com/office/powerpoint/2010/main" val="2243494996"/>
+        <p14:creationId xmlns:p14="http://schemas.microsoft.com/office/powerpoint/2010/main" val="1411565937"/>
       </p:ext>
     </p:extLst>
   </p:cSld>
@@ -33147,7 +33275,7 @@
           <p:cNvPr id="2" name="Title 1">
             <a:extLst>
               <a:ext uri="{FF2B5EF4-FFF2-40B4-BE49-F238E27FC236}">
-                <a16:creationId xmlns:a16="http://schemas.microsoft.com/office/drawing/2014/main" id="{38FFA191-5CCC-43CB-BD83-4F80ED362608}"/>
+                <a16:creationId xmlns:a16="http://schemas.microsoft.com/office/drawing/2014/main" id="{9C1BF33B-5572-4A00-A55C-1E13A6B3A8F1}"/>
               </a:ext>
             </a:extLst>
           </p:cNvPr>
@@ -33160,8 +33288,8 @@
         </p:nvSpPr>
         <p:spPr>
           <a:xfrm>
-            <a:off x="5476875" y="1671639"/>
-            <a:ext cx="5111750" cy="1204912"/>
+            <a:off x="1885156" y="892177"/>
+            <a:ext cx="8421688" cy="1325563"/>
           </a:xfrm>
         </p:spPr>
         <p:txBody>
@@ -33170,17 +33298,48 @@
           <a:p>
             <a:r>
               <a:rPr lang="en-US" dirty="0"/>
-              <a:t>SUMMARY</a:t>
-            </a:r>
-          </a:p>
-        </p:txBody>
-      </p:sp>
-      <p:sp>
-        <p:nvSpPr>
-          <p:cNvPr id="3" name="Content Placeholder 2">
-            <a:extLst>
-              <a:ext uri="{FF2B5EF4-FFF2-40B4-BE49-F238E27FC236}">
-                <a16:creationId xmlns:a16="http://schemas.microsoft.com/office/drawing/2014/main" id="{E14BBEAF-B516-45F4-9EF6-A9F65111580F}"/>
+              <a:t>FUNDING</a:t>
+            </a:r>
+          </a:p>
+        </p:txBody>
+      </p:sp>
+      <p:graphicFrame>
+        <p:nvGraphicFramePr>
+          <p:cNvPr id="58" name="Content Placeholder 57" title="Funding Chart">
+            <a:extLst>
+              <a:ext uri="{FF2B5EF4-FFF2-40B4-BE49-F238E27FC236}">
+                <a16:creationId xmlns:a16="http://schemas.microsoft.com/office/drawing/2014/main" id="{0231F8BC-AEBA-4843-9F73-E06265724EAB}"/>
+              </a:ext>
+            </a:extLst>
+          </p:cNvPr>
+          <p:cNvGraphicFramePr>
+            <a:graphicFrameLocks noGrp="1"/>
+          </p:cNvGraphicFramePr>
+          <p:nvPr>
+            <p:ph sz="quarter" idx="21"/>
+            <p:extLst>
+              <p:ext uri="{D42A27DB-BD31-4B8C-83A1-F6EECF244321}">
+                <p14:modId xmlns:p14="http://schemas.microsoft.com/office/powerpoint/2010/main" val="3157508600"/>
+              </p:ext>
+            </p:extLst>
+          </p:nvPr>
+        </p:nvGraphicFramePr>
+        <p:xfrm>
+          <a:off x="1074738" y="2370138"/>
+          <a:ext cx="1857375" cy="1665287"/>
+        </p:xfrm>
+        <a:graphic>
+          <a:graphicData uri="http://schemas.openxmlformats.org/drawingml/2006/chart">
+            <c:chart xmlns:c="http://schemas.openxmlformats.org/drawingml/2006/chart" xmlns:r="http://schemas.openxmlformats.org/officeDocument/2006/relationships" r:id="rId2"/>
+          </a:graphicData>
+        </a:graphic>
+      </p:graphicFrame>
+      <p:sp>
+        <p:nvSpPr>
+          <p:cNvPr id="3" name="Text Placeholder 2">
+            <a:extLst>
+              <a:ext uri="{FF2B5EF4-FFF2-40B4-BE49-F238E27FC236}">
+                <a16:creationId xmlns:a16="http://schemas.microsoft.com/office/drawing/2014/main" id="{82A4739B-8DE9-4523-8034-4E83861CCF73}"/>
               </a:ext>
             </a:extLst>
           </p:cNvPr>
@@ -33193,29 +33352,489 @@
         </p:nvSpPr>
         <p:spPr>
           <a:xfrm>
-            <a:off x="5476875" y="3682546"/>
-            <a:ext cx="5111750" cy="1525588"/>
-          </a:xfrm>
-        </p:spPr>
-        <p:txBody>
-          <a:bodyPr vert="horz" lIns="91440" tIns="45720" rIns="91440" bIns="45720" rtlCol="0" anchor="b">
-            <a:normAutofit/>
-          </a:bodyPr>
+            <a:off x="838200" y="3788813"/>
+            <a:ext cx="2330726" cy="804859"/>
+          </a:xfrm>
+        </p:spPr>
+        <p:txBody>
+          <a:bodyPr/>
           <a:lstStyle/>
           <a:p>
             <a:r>
               <a:rPr lang="en-US" dirty="0"/>
-              <a:t>At Contoso, we believe in giving 110%. By using our next-generation data architecture, we help organizations virtually manage agile workflows. We thrive because of our market knowledge and great team behind our product. As our CEO says, "Efficiencies will come from proactively transforming how we do business.”</a:t>
-            </a:r>
-          </a:p>
-        </p:txBody>
-      </p:sp>
-      <p:sp>
-        <p:nvSpPr>
-          <p:cNvPr id="4" name="Date Placeholder 3">
-            <a:extLst>
-              <a:ext uri="{FF2B5EF4-FFF2-40B4-BE49-F238E27FC236}">
-                <a16:creationId xmlns:a16="http://schemas.microsoft.com/office/drawing/2014/main" id="{13F8C8B5-F6EC-489B-BD0F-CD89A73CAB3A}"/>
+              <a:t>$14,000</a:t>
+            </a:r>
+          </a:p>
+        </p:txBody>
+      </p:sp>
+      <p:sp>
+        <p:nvSpPr>
+          <p:cNvPr id="14" name="Text Placeholder 13">
+            <a:extLst>
+              <a:ext uri="{FF2B5EF4-FFF2-40B4-BE49-F238E27FC236}">
+                <a16:creationId xmlns:a16="http://schemas.microsoft.com/office/drawing/2014/main" id="{C487CCC0-D329-4C1F-A1CD-04930A23C5C3}"/>
+              </a:ext>
+            </a:extLst>
+          </p:cNvPr>
+          <p:cNvSpPr>
+            <a:spLocks noGrp="1"/>
+          </p:cNvSpPr>
+          <p:nvPr>
+            <p:ph type="body" idx="17"/>
+          </p:nvPr>
+        </p:nvSpPr>
+        <p:spPr>
+          <a:xfrm>
+            <a:off x="838200" y="4464810"/>
+            <a:ext cx="2330726" cy="438505"/>
+          </a:xfrm>
+        </p:spPr>
+        <p:txBody>
+          <a:bodyPr/>
+          <a:lstStyle/>
+          <a:p>
+            <a:r>
+              <a:rPr lang="en-US" dirty="0"/>
+              <a:t>ANGEL INVESTMENTS</a:t>
+            </a:r>
+          </a:p>
+        </p:txBody>
+      </p:sp>
+      <p:sp>
+        <p:nvSpPr>
+          <p:cNvPr id="4" name="Content Placeholder 3">
+            <a:extLst>
+              <a:ext uri="{FF2B5EF4-FFF2-40B4-BE49-F238E27FC236}">
+                <a16:creationId xmlns:a16="http://schemas.microsoft.com/office/drawing/2014/main" id="{21CF2BB3-1E12-4189-9F5F-EF136C62E39B}"/>
+              </a:ext>
+            </a:extLst>
+          </p:cNvPr>
+          <p:cNvSpPr>
+            <a:spLocks noGrp="1"/>
+          </p:cNvSpPr>
+          <p:nvPr>
+            <p:ph sz="half" idx="2"/>
+          </p:nvPr>
+        </p:nvSpPr>
+        <p:spPr>
+          <a:xfrm>
+            <a:off x="838200" y="5120722"/>
+            <a:ext cx="2330726" cy="853167"/>
+          </a:xfrm>
+        </p:spPr>
+        <p:txBody>
+          <a:bodyPr/>
+          <a:lstStyle/>
+          <a:p>
+            <a:r>
+              <a:rPr lang="en-US" dirty="0"/>
+              <a:t>Amount obtained through other investors</a:t>
+            </a:r>
+          </a:p>
+        </p:txBody>
+      </p:sp>
+      <p:graphicFrame>
+        <p:nvGraphicFramePr>
+          <p:cNvPr id="59" name="Content Placeholder 58" title="Funding Chart">
+            <a:extLst>
+              <a:ext uri="{FF2B5EF4-FFF2-40B4-BE49-F238E27FC236}">
+                <a16:creationId xmlns:a16="http://schemas.microsoft.com/office/drawing/2014/main" id="{AD7D64AB-F97A-41F1-B2E8-66B1E245043A}"/>
+              </a:ext>
+            </a:extLst>
+          </p:cNvPr>
+          <p:cNvGraphicFramePr>
+            <a:graphicFrameLocks noGrp="1"/>
+          </p:cNvGraphicFramePr>
+          <p:nvPr>
+            <p:ph sz="quarter" idx="22"/>
+            <p:extLst>
+              <p:ext uri="{D42A27DB-BD31-4B8C-83A1-F6EECF244321}">
+                <p14:modId xmlns:p14="http://schemas.microsoft.com/office/powerpoint/2010/main" val="3021991828"/>
+              </p:ext>
+            </p:extLst>
+          </p:nvPr>
+        </p:nvGraphicFramePr>
+        <p:xfrm>
+          <a:off x="3805238" y="2370138"/>
+          <a:ext cx="1857375" cy="1665287"/>
+        </p:xfrm>
+        <a:graphic>
+          <a:graphicData uri="http://schemas.openxmlformats.org/drawingml/2006/chart">
+            <c:chart xmlns:c="http://schemas.openxmlformats.org/drawingml/2006/chart" xmlns:r="http://schemas.openxmlformats.org/officeDocument/2006/relationships" r:id="rId3"/>
+          </a:graphicData>
+        </a:graphic>
+      </p:graphicFrame>
+      <p:sp>
+        <p:nvSpPr>
+          <p:cNvPr id="5" name="Text Placeholder 4">
+            <a:extLst>
+              <a:ext uri="{FF2B5EF4-FFF2-40B4-BE49-F238E27FC236}">
+                <a16:creationId xmlns:a16="http://schemas.microsoft.com/office/drawing/2014/main" id="{68145D0E-892D-492B-8AD6-551CF27DD5F7}"/>
+              </a:ext>
+            </a:extLst>
+          </p:cNvPr>
+          <p:cNvSpPr>
+            <a:spLocks noGrp="1"/>
+          </p:cNvSpPr>
+          <p:nvPr>
+            <p:ph type="body" sz="quarter" idx="3"/>
+          </p:nvPr>
+        </p:nvSpPr>
+        <p:spPr>
+          <a:xfrm>
+            <a:off x="3562665" y="3788813"/>
+            <a:ext cx="2342205" cy="804859"/>
+          </a:xfrm>
+        </p:spPr>
+        <p:txBody>
+          <a:bodyPr/>
+          <a:lstStyle/>
+          <a:p>
+            <a:r>
+              <a:rPr lang="en-US" dirty="0"/>
+              <a:t>$12,000</a:t>
+            </a:r>
+          </a:p>
+        </p:txBody>
+      </p:sp>
+      <p:sp>
+        <p:nvSpPr>
+          <p:cNvPr id="15" name="Text Placeholder 14">
+            <a:extLst>
+              <a:ext uri="{FF2B5EF4-FFF2-40B4-BE49-F238E27FC236}">
+                <a16:creationId xmlns:a16="http://schemas.microsoft.com/office/drawing/2014/main" id="{34E62770-EE0A-4D83-B50E-CD868056030E}"/>
+              </a:ext>
+            </a:extLst>
+          </p:cNvPr>
+          <p:cNvSpPr>
+            <a:spLocks noGrp="1"/>
+          </p:cNvSpPr>
+          <p:nvPr>
+            <p:ph type="body" sz="quarter" idx="18"/>
+          </p:nvPr>
+        </p:nvSpPr>
+        <p:spPr>
+          <a:xfrm>
+            <a:off x="3562665" y="4464810"/>
+            <a:ext cx="2342205" cy="438505"/>
+          </a:xfrm>
+        </p:spPr>
+        <p:txBody>
+          <a:bodyPr/>
+          <a:lstStyle/>
+          <a:p>
+            <a:r>
+              <a:rPr lang="en-US" dirty="0"/>
+              <a:t>PROPERTY</a:t>
+            </a:r>
+          </a:p>
+        </p:txBody>
+      </p:sp>
+      <p:sp>
+        <p:nvSpPr>
+          <p:cNvPr id="6" name="Content Placeholder 5">
+            <a:extLst>
+              <a:ext uri="{FF2B5EF4-FFF2-40B4-BE49-F238E27FC236}">
+                <a16:creationId xmlns:a16="http://schemas.microsoft.com/office/drawing/2014/main" id="{3ED3951E-8DE6-4BA9-B9BA-CFCDF432226C}"/>
+              </a:ext>
+            </a:extLst>
+          </p:cNvPr>
+          <p:cNvSpPr>
+            <a:spLocks noGrp="1"/>
+          </p:cNvSpPr>
+          <p:nvPr>
+            <p:ph sz="quarter" idx="4"/>
+          </p:nvPr>
+        </p:nvSpPr>
+        <p:spPr>
+          <a:xfrm>
+            <a:off x="3562665" y="5120722"/>
+            <a:ext cx="2342205" cy="853167"/>
+          </a:xfrm>
+        </p:spPr>
+        <p:txBody>
+          <a:bodyPr/>
+          <a:lstStyle/>
+          <a:p>
+            <a:r>
+              <a:rPr lang="en-US" dirty="0"/>
+              <a:t>Revenue obtained from property rentals</a:t>
+            </a:r>
+          </a:p>
+        </p:txBody>
+      </p:sp>
+      <p:graphicFrame>
+        <p:nvGraphicFramePr>
+          <p:cNvPr id="60" name="Content Placeholder 59" title="Funding Chart">
+            <a:extLst>
+              <a:ext uri="{FF2B5EF4-FFF2-40B4-BE49-F238E27FC236}">
+                <a16:creationId xmlns:a16="http://schemas.microsoft.com/office/drawing/2014/main" id="{81BCDC44-04F0-4390-B965-A86C88176708}"/>
+              </a:ext>
+            </a:extLst>
+          </p:cNvPr>
+          <p:cNvGraphicFramePr>
+            <a:graphicFrameLocks noGrp="1"/>
+          </p:cNvGraphicFramePr>
+          <p:nvPr>
+            <p:ph sz="quarter" idx="23"/>
+            <p:extLst>
+              <p:ext uri="{D42A27DB-BD31-4B8C-83A1-F6EECF244321}">
+                <p14:modId xmlns:p14="http://schemas.microsoft.com/office/powerpoint/2010/main" val="2350556506"/>
+              </p:ext>
+            </p:extLst>
+          </p:nvPr>
+        </p:nvGraphicFramePr>
+        <p:xfrm>
+          <a:off x="6529388" y="2370138"/>
+          <a:ext cx="1857375" cy="1665287"/>
+        </p:xfrm>
+        <a:graphic>
+          <a:graphicData uri="http://schemas.openxmlformats.org/drawingml/2006/chart">
+            <c:chart xmlns:c="http://schemas.openxmlformats.org/drawingml/2006/chart" xmlns:r="http://schemas.openxmlformats.org/officeDocument/2006/relationships" r:id="rId4"/>
+          </a:graphicData>
+        </a:graphic>
+      </p:graphicFrame>
+      <p:sp>
+        <p:nvSpPr>
+          <p:cNvPr id="10" name="Text Placeholder 9">
+            <a:extLst>
+              <a:ext uri="{FF2B5EF4-FFF2-40B4-BE49-F238E27FC236}">
+                <a16:creationId xmlns:a16="http://schemas.microsoft.com/office/drawing/2014/main" id="{C66E4F1A-AD73-4086-B578-235F0B9F1FC4}"/>
+              </a:ext>
+            </a:extLst>
+          </p:cNvPr>
+          <p:cNvSpPr>
+            <a:spLocks noGrp="1"/>
+          </p:cNvSpPr>
+          <p:nvPr>
+            <p:ph type="body" idx="13"/>
+          </p:nvPr>
+        </p:nvSpPr>
+        <p:spPr>
+          <a:xfrm>
+            <a:off x="6298609" y="3788813"/>
+            <a:ext cx="2330726" cy="804859"/>
+          </a:xfrm>
+        </p:spPr>
+        <p:txBody>
+          <a:bodyPr/>
+          <a:lstStyle/>
+          <a:p>
+            <a:r>
+              <a:rPr lang="en-US" dirty="0"/>
+              <a:t>$82,000</a:t>
+            </a:r>
+          </a:p>
+        </p:txBody>
+      </p:sp>
+      <p:sp>
+        <p:nvSpPr>
+          <p:cNvPr id="16" name="Text Placeholder 15">
+            <a:extLst>
+              <a:ext uri="{FF2B5EF4-FFF2-40B4-BE49-F238E27FC236}">
+                <a16:creationId xmlns:a16="http://schemas.microsoft.com/office/drawing/2014/main" id="{AAB421C5-B6AC-48B8-8AEB-AB16AAE5010E}"/>
+              </a:ext>
+            </a:extLst>
+          </p:cNvPr>
+          <p:cNvSpPr>
+            <a:spLocks noGrp="1"/>
+          </p:cNvSpPr>
+          <p:nvPr>
+            <p:ph type="body" idx="19"/>
+          </p:nvPr>
+        </p:nvSpPr>
+        <p:spPr>
+          <a:xfrm>
+            <a:off x="6298609" y="4464810"/>
+            <a:ext cx="2330726" cy="438505"/>
+          </a:xfrm>
+        </p:spPr>
+        <p:txBody>
+          <a:bodyPr/>
+          <a:lstStyle/>
+          <a:p>
+            <a:r>
+              <a:rPr lang="en-US" dirty="0"/>
+              <a:t>SHARES</a:t>
+            </a:r>
+          </a:p>
+        </p:txBody>
+      </p:sp>
+      <p:sp>
+        <p:nvSpPr>
+          <p:cNvPr id="11" name="Content Placeholder 10">
+            <a:extLst>
+              <a:ext uri="{FF2B5EF4-FFF2-40B4-BE49-F238E27FC236}">
+                <a16:creationId xmlns:a16="http://schemas.microsoft.com/office/drawing/2014/main" id="{345C82A0-3F56-47BD-9FB2-6B56DA715F93}"/>
+              </a:ext>
+            </a:extLst>
+          </p:cNvPr>
+          <p:cNvSpPr>
+            <a:spLocks noGrp="1"/>
+          </p:cNvSpPr>
+          <p:nvPr>
+            <p:ph sz="half" idx="14"/>
+          </p:nvPr>
+        </p:nvSpPr>
+        <p:spPr>
+          <a:xfrm>
+            <a:off x="6298609" y="5120722"/>
+            <a:ext cx="2330726" cy="853167"/>
+          </a:xfrm>
+        </p:spPr>
+        <p:txBody>
+          <a:bodyPr/>
+          <a:lstStyle/>
+          <a:p>
+            <a:r>
+              <a:rPr lang="en-US" dirty="0"/>
+              <a:t>Number of shares converted into USD</a:t>
+            </a:r>
+          </a:p>
+          <a:p>
+            <a:endParaRPr lang="en-US" noProof="1"/>
+          </a:p>
+        </p:txBody>
+      </p:sp>
+      <p:graphicFrame>
+        <p:nvGraphicFramePr>
+          <p:cNvPr id="61" name="Content Placeholder 60" title="Funding Chart">
+            <a:extLst>
+              <a:ext uri="{FF2B5EF4-FFF2-40B4-BE49-F238E27FC236}">
+                <a16:creationId xmlns:a16="http://schemas.microsoft.com/office/drawing/2014/main" id="{D78C801B-5A42-4B88-AF2C-A3C45CD69E2E}"/>
+              </a:ext>
+            </a:extLst>
+          </p:cNvPr>
+          <p:cNvGraphicFramePr>
+            <a:graphicFrameLocks noGrp="1"/>
+          </p:cNvGraphicFramePr>
+          <p:nvPr>
+            <p:ph sz="quarter" idx="24"/>
+            <p:extLst>
+              <p:ext uri="{D42A27DB-BD31-4B8C-83A1-F6EECF244321}">
+                <p14:modId xmlns:p14="http://schemas.microsoft.com/office/powerpoint/2010/main" val="2617539870"/>
+              </p:ext>
+            </p:extLst>
+          </p:nvPr>
+        </p:nvGraphicFramePr>
+        <p:xfrm>
+          <a:off x="9259888" y="2370138"/>
+          <a:ext cx="1857375" cy="1665287"/>
+        </p:xfrm>
+        <a:graphic>
+          <a:graphicData uri="http://schemas.openxmlformats.org/drawingml/2006/chart">
+            <c:chart xmlns:c="http://schemas.openxmlformats.org/drawingml/2006/chart" xmlns:r="http://schemas.openxmlformats.org/officeDocument/2006/relationships" r:id="rId5"/>
+          </a:graphicData>
+        </a:graphic>
+      </p:graphicFrame>
+      <p:sp>
+        <p:nvSpPr>
+          <p:cNvPr id="12" name="Text Placeholder 11">
+            <a:extLst>
+              <a:ext uri="{FF2B5EF4-FFF2-40B4-BE49-F238E27FC236}">
+                <a16:creationId xmlns:a16="http://schemas.microsoft.com/office/drawing/2014/main" id="{F70E657A-85D8-48A8-B017-274F0C32C5C9}"/>
+              </a:ext>
+            </a:extLst>
+          </p:cNvPr>
+          <p:cNvSpPr>
+            <a:spLocks noGrp="1"/>
+          </p:cNvSpPr>
+          <p:nvPr>
+            <p:ph type="body" idx="15"/>
+          </p:nvPr>
+        </p:nvSpPr>
+        <p:spPr>
+          <a:xfrm>
+            <a:off x="9023074" y="3788457"/>
+            <a:ext cx="2330726" cy="804859"/>
+          </a:xfrm>
+        </p:spPr>
+        <p:txBody>
+          <a:bodyPr/>
+          <a:lstStyle/>
+          <a:p>
+            <a:r>
+              <a:rPr lang="en-US" dirty="0"/>
+              <a:t>$32,000</a:t>
+            </a:r>
+          </a:p>
+        </p:txBody>
+      </p:sp>
+      <p:sp>
+        <p:nvSpPr>
+          <p:cNvPr id="17" name="Text Placeholder 16">
+            <a:extLst>
+              <a:ext uri="{FF2B5EF4-FFF2-40B4-BE49-F238E27FC236}">
+                <a16:creationId xmlns:a16="http://schemas.microsoft.com/office/drawing/2014/main" id="{025753CB-8973-4FAE-BB5D-5CC96CE338D4}"/>
+              </a:ext>
+            </a:extLst>
+          </p:cNvPr>
+          <p:cNvSpPr>
+            <a:spLocks noGrp="1"/>
+          </p:cNvSpPr>
+          <p:nvPr>
+            <p:ph type="body" idx="20"/>
+          </p:nvPr>
+        </p:nvSpPr>
+        <p:spPr>
+          <a:xfrm>
+            <a:off x="9023074" y="4464454"/>
+            <a:ext cx="2330726" cy="438505"/>
+          </a:xfrm>
+        </p:spPr>
+        <p:txBody>
+          <a:bodyPr/>
+          <a:lstStyle/>
+          <a:p>
+            <a:r>
+              <a:rPr lang="en-US" dirty="0"/>
+              <a:t>CASH</a:t>
+            </a:r>
+          </a:p>
+        </p:txBody>
+      </p:sp>
+      <p:sp>
+        <p:nvSpPr>
+          <p:cNvPr id="13" name="Content Placeholder 12">
+            <a:extLst>
+              <a:ext uri="{FF2B5EF4-FFF2-40B4-BE49-F238E27FC236}">
+                <a16:creationId xmlns:a16="http://schemas.microsoft.com/office/drawing/2014/main" id="{69F9DEC9-77BC-482D-ACFB-0F2B6DC65F9F}"/>
+              </a:ext>
+            </a:extLst>
+          </p:cNvPr>
+          <p:cNvSpPr>
+            <a:spLocks noGrp="1"/>
+          </p:cNvSpPr>
+          <p:nvPr>
+            <p:ph sz="half" idx="16"/>
+          </p:nvPr>
+        </p:nvSpPr>
+        <p:spPr>
+          <a:xfrm>
+            <a:off x="9023074" y="5120366"/>
+            <a:ext cx="2330726" cy="853167"/>
+          </a:xfrm>
+        </p:spPr>
+        <p:txBody>
+          <a:bodyPr/>
+          <a:lstStyle/>
+          <a:p>
+            <a:r>
+              <a:rPr lang="en-US" noProof="1"/>
+              <a:t>Liquid cash we have on hand</a:t>
+            </a:r>
+          </a:p>
+          <a:p>
+            <a:endParaRPr lang="en-US" dirty="0"/>
+          </a:p>
+        </p:txBody>
+      </p:sp>
+      <p:sp>
+        <p:nvSpPr>
+          <p:cNvPr id="7" name="Date Placeholder 6">
+            <a:extLst>
+              <a:ext uri="{FF2B5EF4-FFF2-40B4-BE49-F238E27FC236}">
+                <a16:creationId xmlns:a16="http://schemas.microsoft.com/office/drawing/2014/main" id="{A563C171-5812-4E79-804A-ED04E1BD313F}"/>
               </a:ext>
             </a:extLst>
           </p:cNvPr>
@@ -33245,10 +33864,10 @@
       </p:sp>
       <p:sp>
         <p:nvSpPr>
-          <p:cNvPr id="5" name="Footer Placeholder 4">
-            <a:extLst>
-              <a:ext uri="{FF2B5EF4-FFF2-40B4-BE49-F238E27FC236}">
-                <a16:creationId xmlns:a16="http://schemas.microsoft.com/office/drawing/2014/main" id="{11AEA823-8519-4F9D-81FA-3673131076FC}"/>
+          <p:cNvPr id="8" name="Footer Placeholder 7">
+            <a:extLst>
+              <a:ext uri="{FF2B5EF4-FFF2-40B4-BE49-F238E27FC236}">
+                <a16:creationId xmlns:a16="http://schemas.microsoft.com/office/drawing/2014/main" id="{3AD8A4DC-ECAA-4D59-BE12-EBEDDE9E2A7D}"/>
               </a:ext>
             </a:extLst>
           </p:cNvPr>
@@ -33278,10 +33897,10 @@
       </p:sp>
       <p:sp>
         <p:nvSpPr>
-          <p:cNvPr id="6" name="Slide Number Placeholder 5">
-            <a:extLst>
-              <a:ext uri="{FF2B5EF4-FFF2-40B4-BE49-F238E27FC236}">
-                <a16:creationId xmlns:a16="http://schemas.microsoft.com/office/drawing/2014/main" id="{BAEFF51B-0E28-4171-AE7C-A31AAB42BC73}"/>
+          <p:cNvPr id="9" name="Slide Number Placeholder 8">
+            <a:extLst>
+              <a:ext uri="{FF2B5EF4-FFF2-40B4-BE49-F238E27FC236}">
+                <a16:creationId xmlns:a16="http://schemas.microsoft.com/office/drawing/2014/main" id="{9BFC0B64-8F13-426F-B6C5-9C9427ACAD7E}"/>
               </a:ext>
             </a:extLst>
           </p:cNvPr>
@@ -33314,7 +33933,7 @@
     </p:spTree>
     <p:extLst>
       <p:ext uri="{BB962C8B-B14F-4D97-AF65-F5344CB8AC3E}">
-        <p14:creationId xmlns:p14="http://schemas.microsoft.com/office/powerpoint/2010/main" val="920173932"/>
+        <p14:creationId xmlns:p14="http://schemas.microsoft.com/office/powerpoint/2010/main" val="1177824853"/>
       </p:ext>
     </p:extLst>
   </p:cSld>
@@ -33346,6 +33965,205 @@
           <p:cNvPr id="2" name="Title 1">
             <a:extLst>
               <a:ext uri="{FF2B5EF4-FFF2-40B4-BE49-F238E27FC236}">
+                <a16:creationId xmlns:a16="http://schemas.microsoft.com/office/drawing/2014/main" id="{38FFA191-5CCC-43CB-BD83-4F80ED362608}"/>
+              </a:ext>
+            </a:extLst>
+          </p:cNvPr>
+          <p:cNvSpPr>
+            <a:spLocks noGrp="1"/>
+          </p:cNvSpPr>
+          <p:nvPr>
+            <p:ph type="title"/>
+          </p:nvPr>
+        </p:nvSpPr>
+        <p:spPr>
+          <a:xfrm>
+            <a:off x="5476875" y="1671639"/>
+            <a:ext cx="5111750" cy="1204912"/>
+          </a:xfrm>
+        </p:spPr>
+        <p:txBody>
+          <a:bodyPr/>
+          <a:lstStyle/>
+          <a:p>
+            <a:r>
+              <a:rPr lang="en-US" dirty="0"/>
+              <a:t>SUMMARY</a:t>
+            </a:r>
+          </a:p>
+        </p:txBody>
+      </p:sp>
+      <p:sp>
+        <p:nvSpPr>
+          <p:cNvPr id="3" name="Content Placeholder 2">
+            <a:extLst>
+              <a:ext uri="{FF2B5EF4-FFF2-40B4-BE49-F238E27FC236}">
+                <a16:creationId xmlns:a16="http://schemas.microsoft.com/office/drawing/2014/main" id="{E14BBEAF-B516-45F4-9EF6-A9F65111580F}"/>
+              </a:ext>
+            </a:extLst>
+          </p:cNvPr>
+          <p:cNvSpPr>
+            <a:spLocks noGrp="1"/>
+          </p:cNvSpPr>
+          <p:nvPr>
+            <p:ph type="body" idx="1"/>
+          </p:nvPr>
+        </p:nvSpPr>
+        <p:spPr>
+          <a:xfrm>
+            <a:off x="5476875" y="3682546"/>
+            <a:ext cx="5111750" cy="1525588"/>
+          </a:xfrm>
+        </p:spPr>
+        <p:txBody>
+          <a:bodyPr vert="horz" lIns="91440" tIns="45720" rIns="91440" bIns="45720" rtlCol="0" anchor="b">
+            <a:normAutofit/>
+          </a:bodyPr>
+          <a:lstStyle/>
+          <a:p>
+            <a:r>
+              <a:rPr lang="en-US" dirty="0"/>
+              <a:t>At Contoso, we believe in giving 110%. By using our next-generation data architecture, we help organizations virtually manage agile workflows. We thrive because of our market knowledge and great team behind our product. As our CEO says, "Efficiencies will come from proactively transforming how we do business.”</a:t>
+            </a:r>
+          </a:p>
+        </p:txBody>
+      </p:sp>
+      <p:sp>
+        <p:nvSpPr>
+          <p:cNvPr id="4" name="Date Placeholder 3">
+            <a:extLst>
+              <a:ext uri="{FF2B5EF4-FFF2-40B4-BE49-F238E27FC236}">
+                <a16:creationId xmlns:a16="http://schemas.microsoft.com/office/drawing/2014/main" id="{13F8C8B5-F6EC-489B-BD0F-CD89A73CAB3A}"/>
+              </a:ext>
+            </a:extLst>
+          </p:cNvPr>
+          <p:cNvSpPr>
+            <a:spLocks noGrp="1"/>
+          </p:cNvSpPr>
+          <p:nvPr>
+            <p:ph type="dt" sz="half" idx="10"/>
+          </p:nvPr>
+        </p:nvSpPr>
+        <p:spPr>
+          <a:xfrm>
+            <a:off x="838200" y="6356350"/>
+            <a:ext cx="2743200" cy="365125"/>
+          </a:xfrm>
+        </p:spPr>
+        <p:txBody>
+          <a:bodyPr/>
+          <a:lstStyle/>
+          <a:p>
+            <a:r>
+              <a:rPr lang="en-US" dirty="0"/>
+              <a:t>20XX</a:t>
+            </a:r>
+          </a:p>
+        </p:txBody>
+      </p:sp>
+      <p:sp>
+        <p:nvSpPr>
+          <p:cNvPr id="5" name="Footer Placeholder 4">
+            <a:extLst>
+              <a:ext uri="{FF2B5EF4-FFF2-40B4-BE49-F238E27FC236}">
+                <a16:creationId xmlns:a16="http://schemas.microsoft.com/office/drawing/2014/main" id="{11AEA823-8519-4F9D-81FA-3673131076FC}"/>
+              </a:ext>
+            </a:extLst>
+          </p:cNvPr>
+          <p:cNvSpPr>
+            <a:spLocks noGrp="1"/>
+          </p:cNvSpPr>
+          <p:nvPr>
+            <p:ph type="ftr" sz="quarter" idx="11"/>
+          </p:nvPr>
+        </p:nvSpPr>
+        <p:spPr>
+          <a:xfrm>
+            <a:off x="4038600" y="6356350"/>
+            <a:ext cx="4114800" cy="365125"/>
+          </a:xfrm>
+        </p:spPr>
+        <p:txBody>
+          <a:bodyPr/>
+          <a:lstStyle/>
+          <a:p>
+            <a:r>
+              <a:rPr lang="en-US" dirty="0"/>
+              <a:t>Pitch Deck</a:t>
+            </a:r>
+          </a:p>
+        </p:txBody>
+      </p:sp>
+      <p:sp>
+        <p:nvSpPr>
+          <p:cNvPr id="6" name="Slide Number Placeholder 5">
+            <a:extLst>
+              <a:ext uri="{FF2B5EF4-FFF2-40B4-BE49-F238E27FC236}">
+                <a16:creationId xmlns:a16="http://schemas.microsoft.com/office/drawing/2014/main" id="{BAEFF51B-0E28-4171-AE7C-A31AAB42BC73}"/>
+              </a:ext>
+            </a:extLst>
+          </p:cNvPr>
+          <p:cNvSpPr>
+            <a:spLocks noGrp="1"/>
+          </p:cNvSpPr>
+          <p:nvPr>
+            <p:ph type="sldNum" sz="quarter" idx="12"/>
+          </p:nvPr>
+        </p:nvSpPr>
+        <p:spPr>
+          <a:xfrm>
+            <a:off x="8610600" y="6356350"/>
+            <a:ext cx="2743200" cy="365125"/>
+          </a:xfrm>
+        </p:spPr>
+        <p:txBody>
+          <a:bodyPr/>
+          <a:lstStyle/>
+          <a:p>
+            <a:fld id="{B5CEABB6-07DC-46E8-9B57-56EC44A396E5}" type="slidenum">
+              <a:rPr lang="en-US" smtClean="0"/>
+              <a:pPr/>
+              <a:t>21</a:t>
+            </a:fld>
+            <a:endParaRPr lang="en-US" dirty="0"/>
+          </a:p>
+        </p:txBody>
+      </p:sp>
+    </p:spTree>
+    <p:extLst>
+      <p:ext uri="{BB962C8B-B14F-4D97-AF65-F5344CB8AC3E}">
+        <p14:creationId xmlns:p14="http://schemas.microsoft.com/office/powerpoint/2010/main" val="920173932"/>
+      </p:ext>
+    </p:extLst>
+  </p:cSld>
+  <p:clrMapOvr>
+    <a:masterClrMapping/>
+  </p:clrMapOvr>
+</p:sld>
+</file>
+
+<file path=ppt/slides/slide22.xml><?xml version="1.0" encoding="utf-8"?>
+<p:sld xmlns:a="http://schemas.openxmlformats.org/drawingml/2006/main" xmlns:r="http://schemas.openxmlformats.org/officeDocument/2006/relationships" xmlns:p="http://schemas.openxmlformats.org/presentationml/2006/main">
+  <p:cSld>
+    <p:spTree>
+      <p:nvGrpSpPr>
+        <p:cNvPr id="1" name=""/>
+        <p:cNvGrpSpPr/>
+        <p:nvPr/>
+      </p:nvGrpSpPr>
+      <p:grpSpPr>
+        <a:xfrm>
+          <a:off x="0" y="0"/>
+          <a:ext cx="0" cy="0"/>
+          <a:chOff x="0" y="0"/>
+          <a:chExt cx="0" cy="0"/>
+        </a:xfrm>
+      </p:grpSpPr>
+      <p:sp>
+        <p:nvSpPr>
+          <p:cNvPr id="2" name="Title 1">
+            <a:extLst>
+              <a:ext uri="{FF2B5EF4-FFF2-40B4-BE49-F238E27FC236}">
                 <a16:creationId xmlns:a16="http://schemas.microsoft.com/office/drawing/2014/main" id="{BCCAEE93-8585-46D4-A7EC-F184E317CB2E}"/>
               </a:ext>
             </a:extLst>
@@ -33522,7 +34340,7 @@
             <a:fld id="{B5CEABB6-07DC-46E8-9B57-56EC44A396E5}" type="slidenum">
               <a:rPr lang="en-US" smtClean="0"/>
               <a:pPr/>
-              <a:t>21</a:t>
+              <a:t>22</a:t>
             </a:fld>
             <a:endParaRPr lang="en-US" dirty="0"/>
           </a:p>
@@ -33563,7 +34381,10 @@
           <p:cNvPr id="2" name="Title 1">
             <a:extLst>
               <a:ext uri="{FF2B5EF4-FFF2-40B4-BE49-F238E27FC236}">
-                <a16:creationId xmlns:a16="http://schemas.microsoft.com/office/drawing/2014/main" id="{67708C79-A4AC-4B5D-92DF-600737E4D11A}"/>
+                <a16:creationId xmlns:a16="http://schemas.microsoft.com/office/drawing/2014/main" id="{6719F29B-F233-48AF-8261-F33A4E079E3E}"/>
+              </a:ext>
+              <a:ext uri="{C183D7F6-B498-43B3-948B-1728B52AA6E4}">
+                <adec:decorative xmlns:adec="http://schemas.microsoft.com/office/drawing/2017/decorative" val="0"/>
               </a:ext>
             </a:extLst>
           </p:cNvPr>
@@ -33576,8 +34397,8 @@
         </p:nvSpPr>
         <p:spPr>
           <a:xfrm>
-            <a:off x="838200" y="5509419"/>
-            <a:ext cx="4082142" cy="585788"/>
+            <a:off x="2761606" y="0"/>
+            <a:ext cx="4108296" cy="716340"/>
           </a:xfrm>
         </p:spPr>
         <p:txBody>
@@ -33585,383 +34406,135 @@
           <a:lstStyle/>
           <a:p>
             <a:r>
-              <a:rPr lang="en-US" dirty="0"/>
-              <a:t>PROBLEM</a:t>
-            </a:r>
-          </a:p>
-        </p:txBody>
-      </p:sp>
-      <p:sp>
-        <p:nvSpPr>
-          <p:cNvPr id="3" name="Content Placeholder 2">
-            <a:extLst>
-              <a:ext uri="{FF2B5EF4-FFF2-40B4-BE49-F238E27FC236}">
-                <a16:creationId xmlns:a16="http://schemas.microsoft.com/office/drawing/2014/main" id="{7D779DE4-CAEA-4617-897E-FEC9A2AC2D6A}"/>
-              </a:ext>
-            </a:extLst>
-          </p:cNvPr>
-          <p:cNvSpPr>
-            <a:spLocks noGrp="1"/>
-          </p:cNvSpPr>
-          <p:nvPr>
-            <p:ph type="body" sz="quarter" idx="13"/>
-          </p:nvPr>
-        </p:nvSpPr>
-        <p:spPr>
-          <a:xfrm>
-            <a:off x="148318" y="1481138"/>
-            <a:ext cx="2141764" cy="514350"/>
-          </a:xfrm>
-        </p:spPr>
-        <p:txBody>
-          <a:bodyPr vert="horz" lIns="91440" tIns="45720" rIns="91440" bIns="45720" rtlCol="0" anchor="ctr">
-            <a:normAutofit/>
+              <a:rPr lang="en-US" b="1" dirty="0">
+                <a:solidFill>
+                  <a:srgbClr val="0070C0"/>
+                </a:solidFill>
+              </a:rPr>
+              <a:t>introduction</a:t>
+            </a:r>
+          </a:p>
+        </p:txBody>
+      </p:sp>
+      <p:sp>
+        <p:nvSpPr>
+          <p:cNvPr id="3" name="Subtitle 2">
+            <a:extLst>
+              <a:ext uri="{FF2B5EF4-FFF2-40B4-BE49-F238E27FC236}">
+                <a16:creationId xmlns:a16="http://schemas.microsoft.com/office/drawing/2014/main" id="{35E3EA69-4E0E-41BD-8095-A124225A2647}"/>
+              </a:ext>
+              <a:ext uri="{C183D7F6-B498-43B3-948B-1728B52AA6E4}">
+                <adec:decorative xmlns:adec="http://schemas.microsoft.com/office/drawing/2017/decorative" val="0"/>
+              </a:ext>
+            </a:extLst>
+          </p:cNvPr>
+          <p:cNvSpPr>
+            <a:spLocks noGrp="1"/>
+          </p:cNvSpPr>
+          <p:nvPr>
+            <p:ph idx="1"/>
+          </p:nvPr>
+        </p:nvSpPr>
+        <p:spPr>
+          <a:xfrm>
+            <a:off x="595901" y="811658"/>
+            <a:ext cx="7335748" cy="5702158"/>
+          </a:xfrm>
+        </p:spPr>
+        <p:txBody>
+          <a:bodyPr>
+            <a:normAutofit fontScale="85000" lnSpcReduction="10000"/>
           </a:bodyPr>
           <a:lstStyle/>
           <a:p>
-            <a:r>
-              <a:rPr lang="en-US" dirty="0"/>
-              <a:t>MARKET GAP</a:t>
-            </a:r>
-          </a:p>
-        </p:txBody>
-      </p:sp>
-      <p:sp>
-        <p:nvSpPr>
-          <p:cNvPr id="4" name="Text Placeholder 3">
-            <a:extLst>
-              <a:ext uri="{FF2B5EF4-FFF2-40B4-BE49-F238E27FC236}">
-                <a16:creationId xmlns:a16="http://schemas.microsoft.com/office/drawing/2014/main" id="{F5FF1291-56EB-4A7B-A198-1D91F9ECC5D3}"/>
-              </a:ext>
-            </a:extLst>
-          </p:cNvPr>
-          <p:cNvSpPr>
-            <a:spLocks noGrp="1"/>
-          </p:cNvSpPr>
-          <p:nvPr>
-            <p:ph type="body" sz="quarter" idx="14"/>
-          </p:nvPr>
-        </p:nvSpPr>
-        <p:spPr>
-          <a:xfrm>
-            <a:off x="714375" y="2557463"/>
-            <a:ext cx="2141764" cy="514350"/>
+            <a:pPr algn="just"/>
+            <a:r>
+              <a:rPr lang="fr-HT" sz="1900" dirty="0"/>
+              <a:t>	La sécurisation des accès distants constitue l'une des priorités fondamentales de l'administration système moderne. SSH (Secure Shell) est le protocole de référence pour la gestion à distance des serveurs Linux, mais sa configuration par défaut n'offre pas un niveau de sécurité optimal face aux menaces actuelles telles que les attaques par force brute, les tentatives d'intrusion automatisées ou l'exploitation de comptes privilégiés.</a:t>
+            </a:r>
+            <a:endParaRPr lang="en-US" sz="1900" dirty="0"/>
+          </a:p>
+          <a:p>
+            <a:pPr algn="just"/>
+            <a:r>
+              <a:rPr lang="fr-HT" sz="1900" dirty="0"/>
+              <a:t> </a:t>
+            </a:r>
+            <a:endParaRPr lang="en-US" sz="1900" dirty="0"/>
+          </a:p>
+          <a:p>
+            <a:pPr algn="just"/>
+            <a:r>
+              <a:rPr lang="fr-HT" sz="1900" dirty="0"/>
+              <a:t>Dans le cadre de ce projet, réalisé en équipe de trois personnes, nous avons mis en place un environnement de laboratoire sur VirtualBox afin d'expérimenter concrètement le durcissement (</a:t>
+            </a:r>
+            <a:r>
+              <a:rPr lang="fr-HT" sz="1900" dirty="0" err="1"/>
+              <a:t>hardening</a:t>
+            </a:r>
+            <a:r>
+              <a:rPr lang="fr-HT" sz="1900" dirty="0"/>
+              <a:t>) d'un serveur </a:t>
+            </a:r>
+            <a:r>
+              <a:rPr lang="fr-HT" sz="1900" dirty="0" err="1"/>
+              <a:t>OpenSSH</a:t>
+            </a:r>
+            <a:r>
+              <a:rPr lang="fr-HT" sz="1900" dirty="0"/>
+              <a:t>. </a:t>
+            </a:r>
+            <a:endParaRPr lang="en-US" sz="1900" dirty="0"/>
+          </a:p>
+          <a:p>
+            <a:pPr algn="just"/>
+            <a:r>
+              <a:rPr lang="fr-HT" sz="1900" dirty="0"/>
+              <a:t> </a:t>
+            </a:r>
+            <a:endParaRPr lang="en-US" sz="1900" dirty="0"/>
+          </a:p>
+          <a:p>
+            <a:pPr algn="just"/>
+            <a:r>
+              <a:rPr lang="fr-HT" sz="1900" dirty="0"/>
+              <a:t>Ce rapport documente l'ensemble des étapes réalisées : l'authentification par clé cryptographique, la désactivation du compte root, le changement du port SSH, l'installation de Fail2ban, et la limitation des utilisateurs autorisés. Pour chaque étape, nous présentons la configuration appliquée ainsi que les résultats des tests de connexion effectués.</a:t>
+            </a:r>
+            <a:endParaRPr lang="en-US" sz="1900" dirty="0"/>
+          </a:p>
+          <a:p>
+            <a:pPr algn="just"/>
+            <a:endParaRPr lang="en-US" dirty="0"/>
+          </a:p>
+        </p:txBody>
+      </p:sp>
+      <p:sp>
+        <p:nvSpPr>
+          <p:cNvPr id="4" name="Slide Number Placeholder 3">
+            <a:extLst>
+              <a:ext uri="{FF2B5EF4-FFF2-40B4-BE49-F238E27FC236}">
+                <a16:creationId xmlns:a16="http://schemas.microsoft.com/office/drawing/2014/main" id="{328F602C-7F98-4C02-99D4-ED65E00D66A4}"/>
+              </a:ext>
+            </a:extLst>
+          </p:cNvPr>
+          <p:cNvSpPr>
+            <a:spLocks noGrp="1"/>
+          </p:cNvSpPr>
+          <p:nvPr>
+            <p:ph type="sldNum" sz="quarter" idx="12"/>
+          </p:nvPr>
+        </p:nvSpPr>
+        <p:spPr>
+          <a:xfrm>
+            <a:off x="5536305" y="6356350"/>
+            <a:ext cx="987552" cy="365125"/>
           </a:xfrm>
         </p:spPr>
         <p:txBody>
           <a:bodyPr/>
           <a:lstStyle/>
           <a:p>
-            <a:r>
-              <a:rPr lang="en-US" dirty="0"/>
-              <a:t>CUSTOMERS</a:t>
-            </a:r>
-          </a:p>
-        </p:txBody>
-      </p:sp>
-      <p:sp>
-        <p:nvSpPr>
-          <p:cNvPr id="5" name="Text Placeholder 4">
-            <a:extLst>
-              <a:ext uri="{FF2B5EF4-FFF2-40B4-BE49-F238E27FC236}">
-                <a16:creationId xmlns:a16="http://schemas.microsoft.com/office/drawing/2014/main" id="{6184E21C-7534-4FB5-9709-F7D1A11034F3}"/>
-              </a:ext>
-            </a:extLst>
-          </p:cNvPr>
-          <p:cNvSpPr>
-            <a:spLocks noGrp="1"/>
-          </p:cNvSpPr>
-          <p:nvPr>
-            <p:ph type="body" sz="quarter" idx="15"/>
-          </p:nvPr>
-        </p:nvSpPr>
-        <p:spPr>
-          <a:xfrm>
-            <a:off x="1320800" y="3633788"/>
-            <a:ext cx="2141764" cy="514350"/>
-          </a:xfrm>
-        </p:spPr>
-        <p:txBody>
-          <a:bodyPr/>
-          <a:lstStyle/>
-          <a:p>
-            <a:r>
-              <a:rPr lang="en-US" dirty="0"/>
-              <a:t>FINANCIALS</a:t>
-            </a:r>
-          </a:p>
-        </p:txBody>
-      </p:sp>
-      <p:sp>
-        <p:nvSpPr>
-          <p:cNvPr id="6" name="Text Placeholder 5">
-            <a:extLst>
-              <a:ext uri="{FF2B5EF4-FFF2-40B4-BE49-F238E27FC236}">
-                <a16:creationId xmlns:a16="http://schemas.microsoft.com/office/drawing/2014/main" id="{5C594564-4FC6-401A-8586-44735EE819EC}"/>
-              </a:ext>
-            </a:extLst>
-          </p:cNvPr>
-          <p:cNvSpPr>
-            <a:spLocks noGrp="1"/>
-          </p:cNvSpPr>
-          <p:nvPr>
-            <p:ph type="body" sz="quarter" idx="16"/>
-          </p:nvPr>
-        </p:nvSpPr>
-        <p:spPr>
-          <a:xfrm>
-            <a:off x="1905000" y="4710114"/>
-            <a:ext cx="2141764" cy="514350"/>
-          </a:xfrm>
-        </p:spPr>
-        <p:txBody>
-          <a:bodyPr/>
-          <a:lstStyle/>
-          <a:p>
-            <a:r>
-              <a:rPr lang="en-US" dirty="0"/>
-              <a:t>COSTS</a:t>
-            </a:r>
-          </a:p>
-        </p:txBody>
-      </p:sp>
-      <p:sp>
-        <p:nvSpPr>
-          <p:cNvPr id="7" name="Text Placeholder 6">
-            <a:extLst>
-              <a:ext uri="{FF2B5EF4-FFF2-40B4-BE49-F238E27FC236}">
-                <a16:creationId xmlns:a16="http://schemas.microsoft.com/office/drawing/2014/main" id="{D7EB25CA-DA83-483D-AF83-0001BDF2DE2B}"/>
-              </a:ext>
-            </a:extLst>
-          </p:cNvPr>
-          <p:cNvSpPr>
-            <a:spLocks noGrp="1"/>
-          </p:cNvSpPr>
-          <p:nvPr>
-            <p:ph type="body" sz="quarter" idx="17"/>
-          </p:nvPr>
-        </p:nvSpPr>
-        <p:spPr>
-          <a:xfrm>
-            <a:off x="4401535" y="1594478"/>
-            <a:ext cx="5539095" cy="1010842"/>
-          </a:xfrm>
-        </p:spPr>
-        <p:txBody>
-          <a:bodyPr/>
-          <a:lstStyle/>
-          <a:p>
-            <a:r>
-              <a:rPr lang="en-US" dirty="0"/>
-              <a:t>Few, if any, products on the market help customers like we do</a:t>
-            </a:r>
-          </a:p>
-          <a:p>
-            <a:endParaRPr lang="en-US" dirty="0"/>
-          </a:p>
-        </p:txBody>
-      </p:sp>
-      <p:sp>
-        <p:nvSpPr>
-          <p:cNvPr id="8" name="Text Placeholder 7">
-            <a:extLst>
-              <a:ext uri="{FF2B5EF4-FFF2-40B4-BE49-F238E27FC236}">
-                <a16:creationId xmlns:a16="http://schemas.microsoft.com/office/drawing/2014/main" id="{B46CE8C6-E12D-4A0D-8553-7FFA31941D56}"/>
-              </a:ext>
-            </a:extLst>
-          </p:cNvPr>
-          <p:cNvSpPr>
-            <a:spLocks noGrp="1"/>
-          </p:cNvSpPr>
-          <p:nvPr>
-            <p:ph type="body" sz="quarter" idx="18"/>
-          </p:nvPr>
-        </p:nvSpPr>
-        <p:spPr>
-          <a:xfrm>
-            <a:off x="4986028" y="2682564"/>
-            <a:ext cx="5539095" cy="1010842"/>
-          </a:xfrm>
-        </p:spPr>
-        <p:txBody>
-          <a:bodyPr/>
-          <a:lstStyle/>
-          <a:p>
-            <a:r>
-              <a:rPr lang="en-US" dirty="0"/>
-              <a:t>66% of US consumers spend money on multiple products that only partially resolves their issue</a:t>
-            </a:r>
-          </a:p>
-          <a:p>
-            <a:endParaRPr lang="en-US" dirty="0"/>
-          </a:p>
-        </p:txBody>
-      </p:sp>
-      <p:sp>
-        <p:nvSpPr>
-          <p:cNvPr id="9" name="Text Placeholder 8">
-            <a:extLst>
-              <a:ext uri="{FF2B5EF4-FFF2-40B4-BE49-F238E27FC236}">
-                <a16:creationId xmlns:a16="http://schemas.microsoft.com/office/drawing/2014/main" id="{1C7D5285-85DF-4331-A6FA-1AE847CA47AE}"/>
-              </a:ext>
-            </a:extLst>
-          </p:cNvPr>
-          <p:cNvSpPr>
-            <a:spLocks noGrp="1"/>
-          </p:cNvSpPr>
-          <p:nvPr>
-            <p:ph type="body" sz="quarter" idx="19"/>
-          </p:nvPr>
-        </p:nvSpPr>
-        <p:spPr>
-          <a:xfrm>
-            <a:off x="5576937" y="3755394"/>
-            <a:ext cx="5539095" cy="1010842"/>
-          </a:xfrm>
-        </p:spPr>
-        <p:txBody>
-          <a:bodyPr/>
-          <a:lstStyle/>
-          <a:p>
-            <a:r>
-              <a:rPr lang="en-US" dirty="0"/>
-              <a:t>Millennials account for about a quarter of the $48 billion spent on other products in 2018</a:t>
-            </a:r>
-          </a:p>
-          <a:p>
-            <a:endParaRPr lang="en-US" dirty="0"/>
-          </a:p>
-        </p:txBody>
-      </p:sp>
-      <p:sp>
-        <p:nvSpPr>
-          <p:cNvPr id="10" name="Text Placeholder 9">
-            <a:extLst>
-              <a:ext uri="{FF2B5EF4-FFF2-40B4-BE49-F238E27FC236}">
-                <a16:creationId xmlns:a16="http://schemas.microsoft.com/office/drawing/2014/main" id="{02D305EF-9A88-496B-BFC1-D589A01EE381}"/>
-              </a:ext>
-            </a:extLst>
-          </p:cNvPr>
-          <p:cNvSpPr>
-            <a:spLocks noGrp="1"/>
-          </p:cNvSpPr>
-          <p:nvPr>
-            <p:ph type="body" sz="quarter" idx="20"/>
-          </p:nvPr>
-        </p:nvSpPr>
-        <p:spPr>
-          <a:xfrm>
-            <a:off x="6175279" y="4824430"/>
-            <a:ext cx="5539095" cy="1010842"/>
-          </a:xfrm>
-        </p:spPr>
-        <p:txBody>
-          <a:bodyPr/>
-          <a:lstStyle/>
-          <a:p>
-            <a:r>
-              <a:rPr lang="en-US" dirty="0"/>
-              <a:t>Loss of productivity costing consumers thousands of dollars </a:t>
-            </a:r>
-          </a:p>
-          <a:p>
-            <a:endParaRPr lang="en-US" dirty="0"/>
-          </a:p>
-        </p:txBody>
-      </p:sp>
-      <p:sp>
-        <p:nvSpPr>
-          <p:cNvPr id="11" name="Date Placeholder 10">
-            <a:extLst>
-              <a:ext uri="{FF2B5EF4-FFF2-40B4-BE49-F238E27FC236}">
-                <a16:creationId xmlns:a16="http://schemas.microsoft.com/office/drawing/2014/main" id="{40BF6865-7FAE-4B56-A995-ADF1582DCC64}"/>
-              </a:ext>
-            </a:extLst>
-          </p:cNvPr>
-          <p:cNvSpPr>
-            <a:spLocks noGrp="1"/>
-          </p:cNvSpPr>
-          <p:nvPr>
-            <p:ph type="dt" sz="half" idx="10"/>
-          </p:nvPr>
-        </p:nvSpPr>
-        <p:spPr>
-          <a:xfrm>
-            <a:off x="838200" y="6356350"/>
-            <a:ext cx="2743200" cy="365125"/>
-          </a:xfrm>
-        </p:spPr>
-        <p:txBody>
-          <a:bodyPr/>
-          <a:lstStyle/>
-          <a:p>
-            <a:r>
-              <a:rPr lang="en-US" dirty="0"/>
-              <a:t>20XX</a:t>
-            </a:r>
-          </a:p>
-        </p:txBody>
-      </p:sp>
-      <p:sp>
-        <p:nvSpPr>
-          <p:cNvPr id="12" name="Footer Placeholder 11">
-            <a:extLst>
-              <a:ext uri="{FF2B5EF4-FFF2-40B4-BE49-F238E27FC236}">
-                <a16:creationId xmlns:a16="http://schemas.microsoft.com/office/drawing/2014/main" id="{7312B71A-5E84-41DE-9754-5F6291F6DFB7}"/>
-              </a:ext>
-            </a:extLst>
-          </p:cNvPr>
-          <p:cNvSpPr>
-            <a:spLocks noGrp="1"/>
-          </p:cNvSpPr>
-          <p:nvPr>
-            <p:ph type="ftr" sz="quarter" idx="11"/>
-          </p:nvPr>
-        </p:nvSpPr>
-        <p:spPr>
-          <a:xfrm>
-            <a:off x="6155823" y="6356350"/>
-            <a:ext cx="1808712" cy="365125"/>
-          </a:xfrm>
-        </p:spPr>
-        <p:txBody>
-          <a:bodyPr/>
-          <a:lstStyle/>
-          <a:p>
-            <a:r>
-              <a:rPr lang="en-US" dirty="0"/>
-              <a:t>Pitch Deck</a:t>
-            </a:r>
-          </a:p>
-        </p:txBody>
-      </p:sp>
-      <p:sp>
-        <p:nvSpPr>
-          <p:cNvPr id="13" name="Slide Number Placeholder 12">
-            <a:extLst>
-              <a:ext uri="{FF2B5EF4-FFF2-40B4-BE49-F238E27FC236}">
-                <a16:creationId xmlns:a16="http://schemas.microsoft.com/office/drawing/2014/main" id="{E3984D70-BD95-4E1F-9725-902B5D74DED6}"/>
-              </a:ext>
-            </a:extLst>
-          </p:cNvPr>
-          <p:cNvSpPr>
-            <a:spLocks noGrp="1"/>
-          </p:cNvSpPr>
-          <p:nvPr>
-            <p:ph type="sldNum" sz="quarter" idx="12"/>
-          </p:nvPr>
-        </p:nvSpPr>
-        <p:spPr>
-          <a:xfrm>
-            <a:off x="10810874" y="6356350"/>
-            <a:ext cx="542925" cy="365125"/>
-          </a:xfrm>
-        </p:spPr>
-        <p:txBody>
-          <a:bodyPr/>
-          <a:lstStyle/>
-          <a:p>
-            <a:fld id="{B5CEABB6-07DC-46E8-9B57-56EC44A396E5}" type="slidenum">
+            <a:fld id="{19B51A1E-902D-48AF-9020-955120F399B6}" type="slidenum">
               <a:rPr lang="en-US" smtClean="0"/>
               <a:pPr/>
               <a:t>3</a:t>
@@ -33973,7 +34546,7 @@
     </p:spTree>
     <p:extLst>
       <p:ext uri="{BB962C8B-B14F-4D97-AF65-F5344CB8AC3E}">
-        <p14:creationId xmlns:p14="http://schemas.microsoft.com/office/powerpoint/2010/main" val="1738561688"/>
+        <p14:creationId xmlns:p14="http://schemas.microsoft.com/office/powerpoint/2010/main" val="2243494996"/>
       </p:ext>
     </p:extLst>
   </p:cSld>
@@ -34002,412 +34575,357 @@
       </p:grpSpPr>
       <p:sp>
         <p:nvSpPr>
-          <p:cNvPr id="2" name="Title 1">
-            <a:extLst>
-              <a:ext uri="{FF2B5EF4-FFF2-40B4-BE49-F238E27FC236}">
-                <a16:creationId xmlns:a16="http://schemas.microsoft.com/office/drawing/2014/main" id="{75031FE9-9059-4FE8-B4AC-9771F23A1B89}"/>
-              </a:ext>
-            </a:extLst>
-          </p:cNvPr>
-          <p:cNvSpPr>
-            <a:spLocks noGrp="1"/>
-          </p:cNvSpPr>
-          <p:nvPr>
-            <p:ph type="title"/>
-          </p:nvPr>
-        </p:nvSpPr>
-        <p:spPr>
-          <a:xfrm>
-            <a:off x="1885156" y="892177"/>
-            <a:ext cx="8421688" cy="1325563"/>
-          </a:xfrm>
-        </p:spPr>
-        <p:txBody>
-          <a:bodyPr/>
-          <a:lstStyle/>
-          <a:p>
-            <a:r>
-              <a:rPr lang="en-US" dirty="0"/>
-              <a:t>SOLUTION</a:t>
-            </a:r>
-          </a:p>
-        </p:txBody>
-      </p:sp>
-      <p:sp>
-        <p:nvSpPr>
-          <p:cNvPr id="3" name="Content Placeholder 2">
-            <a:extLst>
-              <a:ext uri="{FF2B5EF4-FFF2-40B4-BE49-F238E27FC236}">
-                <a16:creationId xmlns:a16="http://schemas.microsoft.com/office/drawing/2014/main" id="{D4A2EB3F-4D60-451F-8F45-7D6654D2FCD9}"/>
-              </a:ext>
-            </a:extLst>
-          </p:cNvPr>
-          <p:cNvSpPr>
-            <a:spLocks noGrp="1"/>
-          </p:cNvSpPr>
-          <p:nvPr>
-            <p:ph type="body" sz="quarter" idx="13"/>
-          </p:nvPr>
-        </p:nvSpPr>
-        <p:spPr>
-          <a:xfrm>
-            <a:off x="1485900" y="2563123"/>
-            <a:ext cx="4031945" cy="365125"/>
-          </a:xfrm>
-        </p:spPr>
-        <p:txBody>
-          <a:bodyPr vert="horz" lIns="91440" tIns="45720" rIns="91440" bIns="45720" rtlCol="0" anchor="t">
-            <a:normAutofit lnSpcReduction="10000"/>
+          <p:cNvPr id="30" name="ZoneTexte 29">
+            <a:extLst>
+              <a:ext uri="{FF2B5EF4-FFF2-40B4-BE49-F238E27FC236}">
+                <a16:creationId xmlns:a16="http://schemas.microsoft.com/office/drawing/2014/main" id="{C053E23A-AAF6-630D-D1C2-EA031E5F6439}"/>
+              </a:ext>
+            </a:extLst>
+          </p:cNvPr>
+          <p:cNvSpPr txBox="1"/>
+          <p:nvPr/>
+        </p:nvSpPr>
+        <p:spPr>
+          <a:xfrm>
+            <a:off x="1082213" y="1034839"/>
+            <a:ext cx="10291279" cy="4950073"/>
+          </a:xfrm>
+          <a:prstGeom prst="rect">
+            <a:avLst/>
+          </a:prstGeom>
+          <a:noFill/>
+        </p:spPr>
+        <p:txBody>
+          <a:bodyPr wrap="square">
+            <a:spAutoFit/>
           </a:bodyPr>
           <a:lstStyle/>
           <a:p>
-            <a:r>
-              <a:rPr lang="en-US" dirty="0"/>
-              <a:t>CLOSE THE GAP</a:t>
-            </a:r>
-          </a:p>
-        </p:txBody>
-      </p:sp>
-      <p:sp>
-        <p:nvSpPr>
-          <p:cNvPr id="4" name="Text Placeholder 3">
-            <a:extLst>
-              <a:ext uri="{FF2B5EF4-FFF2-40B4-BE49-F238E27FC236}">
-                <a16:creationId xmlns:a16="http://schemas.microsoft.com/office/drawing/2014/main" id="{AC1C80FB-53F9-42EE-B1E6-D0F998EC5DFA}"/>
-              </a:ext>
-            </a:extLst>
-          </p:cNvPr>
-          <p:cNvSpPr>
-            <a:spLocks noGrp="1"/>
-          </p:cNvSpPr>
-          <p:nvPr>
-            <p:ph type="body" sz="quarter" idx="15"/>
-          </p:nvPr>
-        </p:nvSpPr>
-        <p:spPr>
-          <a:xfrm>
-            <a:off x="1485664" y="3070348"/>
-            <a:ext cx="4031030" cy="1057308"/>
-          </a:xfrm>
-        </p:spPr>
-        <p:txBody>
-          <a:bodyPr/>
-          <a:lstStyle/>
-          <a:p>
-            <a:r>
-              <a:rPr lang="en-US" dirty="0"/>
-              <a:t>Our product makes consumer lives easier, and no other product on the market offers the same features</a:t>
-            </a:r>
-          </a:p>
-        </p:txBody>
-      </p:sp>
-      <p:sp>
-        <p:nvSpPr>
-          <p:cNvPr id="5" name="Text Placeholder 4">
-            <a:extLst>
-              <a:ext uri="{FF2B5EF4-FFF2-40B4-BE49-F238E27FC236}">
-                <a16:creationId xmlns:a16="http://schemas.microsoft.com/office/drawing/2014/main" id="{E81BA2B5-6A90-4204-ABDD-7183FBB03A02}"/>
-              </a:ext>
-            </a:extLst>
-          </p:cNvPr>
-          <p:cNvSpPr>
-            <a:spLocks noGrp="1"/>
-          </p:cNvSpPr>
-          <p:nvPr>
-            <p:ph type="body" sz="quarter" idx="16"/>
-          </p:nvPr>
-        </p:nvSpPr>
-        <p:spPr>
-          <a:xfrm>
-            <a:off x="6673004" y="2563123"/>
-            <a:ext cx="4031945" cy="365125"/>
+            <a:pPr marL="0" marR="0">
+              <a:spcBef>
+                <a:spcPts val="300"/>
+              </a:spcBef>
+              <a:spcAft>
+                <a:spcPts val="300"/>
+              </a:spcAft>
+              <a:buNone/>
+            </a:pPr>
+            <a:r>
+              <a:rPr lang="fr-HT" sz="1800" dirty="0">
+                <a:effectLst/>
+                <a:latin typeface="Arial" panose="020B0604020202020204" pitchFamily="34" charset="0"/>
+                <a:ea typeface="Arial" panose="020B0604020202020204" pitchFamily="34" charset="0"/>
+              </a:rPr>
+              <a:t> </a:t>
+            </a:r>
+            <a:r>
+              <a:rPr lang="fr-HT" sz="2400" b="1" dirty="0">
+                <a:solidFill>
+                  <a:srgbClr val="2E75B6"/>
+                </a:solidFill>
+                <a:effectLst/>
+                <a:latin typeface="Arial" panose="020B0604020202020204" pitchFamily="34" charset="0"/>
+              </a:rPr>
+              <a:t>Objectif général</a:t>
+            </a:r>
+            <a:endParaRPr lang="en-US" sz="2400" b="1" dirty="0">
+              <a:solidFill>
+                <a:srgbClr val="2E75B6"/>
+              </a:solidFill>
+              <a:effectLst/>
+              <a:latin typeface="Arial" panose="020B0604020202020204" pitchFamily="34" charset="0"/>
+            </a:endParaRPr>
+          </a:p>
+          <a:p>
+            <a:pPr marL="0" marR="0" algn="just">
+              <a:spcBef>
+                <a:spcPts val="500"/>
+              </a:spcBef>
+              <a:spcAft>
+                <a:spcPts val="500"/>
+              </a:spcAft>
+              <a:buNone/>
+            </a:pPr>
+            <a:r>
+              <a:rPr lang="fr-HT" sz="1800" dirty="0">
+                <a:effectLst/>
+                <a:latin typeface="Arial" panose="020B0604020202020204" pitchFamily="34" charset="0"/>
+                <a:ea typeface="Arial" panose="020B0604020202020204" pitchFamily="34" charset="0"/>
+              </a:rPr>
+              <a:t>L'objectif principal de ce projet est de renforcer la sécurité d'un serveur </a:t>
+            </a:r>
+            <a:r>
+              <a:rPr lang="fr-HT" sz="1800" dirty="0" err="1">
+                <a:effectLst/>
+                <a:latin typeface="Arial" panose="020B0604020202020204" pitchFamily="34" charset="0"/>
+                <a:ea typeface="Arial" panose="020B0604020202020204" pitchFamily="34" charset="0"/>
+              </a:rPr>
+              <a:t>OpenSSH</a:t>
+            </a:r>
+            <a:r>
+              <a:rPr lang="fr-HT" sz="1800" dirty="0">
+                <a:effectLst/>
+                <a:latin typeface="Arial" panose="020B0604020202020204" pitchFamily="34" charset="0"/>
+                <a:ea typeface="Arial" panose="020B0604020202020204" pitchFamily="34" charset="0"/>
+              </a:rPr>
+              <a:t> en appliquant les meilleures pratiques d'administration système, en simulant un environnement réel sur VirtualBox</a:t>
+            </a:r>
+            <a:r>
+              <a:rPr lang="fr-HT" dirty="0">
+                <a:latin typeface="Arial" panose="020B0604020202020204" pitchFamily="34" charset="0"/>
+                <a:ea typeface="Arial" panose="020B0604020202020204" pitchFamily="34" charset="0"/>
+              </a:rPr>
+              <a:t>.</a:t>
+            </a:r>
+            <a:endParaRPr lang="en-US" sz="1800" dirty="0">
+              <a:effectLst/>
+              <a:latin typeface="Arial" panose="020B0604020202020204" pitchFamily="34" charset="0"/>
+              <a:ea typeface="Arial" panose="020B0604020202020204" pitchFamily="34" charset="0"/>
+            </a:endParaRPr>
+          </a:p>
+          <a:p>
+            <a:pPr marL="0" marR="0">
+              <a:spcBef>
+                <a:spcPts val="100"/>
+              </a:spcBef>
+              <a:spcAft>
+                <a:spcPts val="100"/>
+              </a:spcAft>
+              <a:buNone/>
+            </a:pPr>
+            <a:r>
+              <a:rPr lang="fr-HT" sz="1800" dirty="0">
+                <a:effectLst/>
+                <a:latin typeface="Arial" panose="020B0604020202020204" pitchFamily="34" charset="0"/>
+                <a:ea typeface="Arial" panose="020B0604020202020204" pitchFamily="34" charset="0"/>
+              </a:rPr>
+              <a:t> </a:t>
+            </a:r>
+            <a:endParaRPr lang="en-US" sz="1800" dirty="0">
+              <a:effectLst/>
+              <a:latin typeface="Arial" panose="020B0604020202020204" pitchFamily="34" charset="0"/>
+              <a:ea typeface="Arial" panose="020B0604020202020204" pitchFamily="34" charset="0"/>
+            </a:endParaRPr>
+          </a:p>
+          <a:p>
+            <a:pPr marL="0" marR="0">
+              <a:spcBef>
+                <a:spcPts val="1200"/>
+              </a:spcBef>
+              <a:spcAft>
+                <a:spcPts val="800"/>
+              </a:spcAft>
+              <a:buNone/>
+            </a:pPr>
+            <a:r>
+              <a:rPr lang="fr-HT" sz="2400" b="1" dirty="0">
+                <a:solidFill>
+                  <a:srgbClr val="2E75B6"/>
+                </a:solidFill>
+                <a:effectLst/>
+                <a:latin typeface="Arial" panose="020B0604020202020204" pitchFamily="34" charset="0"/>
+              </a:rPr>
+              <a:t>Objectifs spécifiques</a:t>
+            </a:r>
+            <a:endParaRPr lang="en-US" sz="2400" b="1" dirty="0">
+              <a:solidFill>
+                <a:srgbClr val="2E75B6"/>
+              </a:solidFill>
+              <a:effectLst/>
+              <a:latin typeface="Arial" panose="020B0604020202020204" pitchFamily="34" charset="0"/>
+            </a:endParaRPr>
+          </a:p>
+          <a:p>
+            <a:pPr marL="342900" marR="0" lvl="0" indent="-342900">
+              <a:spcBef>
+                <a:spcPts val="300"/>
+              </a:spcBef>
+              <a:spcAft>
+                <a:spcPts val="300"/>
+              </a:spcAft>
+              <a:buFont typeface="Wingdings" panose="05000000000000000000" pitchFamily="2" charset="2"/>
+              <a:buChar char="ü"/>
+            </a:pPr>
+            <a:r>
+              <a:rPr lang="fr-HT" sz="1800" dirty="0">
+                <a:effectLst/>
+                <a:latin typeface="Arial" panose="020B0604020202020204" pitchFamily="34" charset="0"/>
+                <a:ea typeface="Arial" panose="020B0604020202020204" pitchFamily="34" charset="0"/>
+              </a:rPr>
+              <a:t>Mettre en place une authentification par paire de clés cryptographiques (clé publique/privée) en remplacement de l'authentification par mot de passe.</a:t>
+            </a:r>
+            <a:endParaRPr lang="en-US" sz="1800" dirty="0">
+              <a:effectLst/>
+              <a:latin typeface="Arial" panose="020B0604020202020204" pitchFamily="34" charset="0"/>
+              <a:ea typeface="Arial" panose="020B0604020202020204" pitchFamily="34" charset="0"/>
+            </a:endParaRPr>
+          </a:p>
+          <a:p>
+            <a:pPr marL="342900" marR="0" lvl="0" indent="-342900">
+              <a:spcBef>
+                <a:spcPts val="300"/>
+              </a:spcBef>
+              <a:spcAft>
+                <a:spcPts val="300"/>
+              </a:spcAft>
+              <a:buFont typeface="Wingdings" panose="05000000000000000000" pitchFamily="2" charset="2"/>
+              <a:buChar char="ü"/>
+            </a:pPr>
+            <a:r>
+              <a:rPr lang="fr-HT" sz="1800" dirty="0">
+                <a:effectLst/>
+                <a:latin typeface="Arial" panose="020B0604020202020204" pitchFamily="34" charset="0"/>
+                <a:ea typeface="Arial" panose="020B0604020202020204" pitchFamily="34" charset="0"/>
+              </a:rPr>
+              <a:t>Désactiver la connexion directe du compte root via SSH afin de réduire la surface d'attaque.</a:t>
+            </a:r>
+            <a:endParaRPr lang="en-US" sz="1800" dirty="0">
+              <a:effectLst/>
+              <a:latin typeface="Arial" panose="020B0604020202020204" pitchFamily="34" charset="0"/>
+              <a:ea typeface="Arial" panose="020B0604020202020204" pitchFamily="34" charset="0"/>
+            </a:endParaRPr>
+          </a:p>
+          <a:p>
+            <a:pPr marL="342900" marR="0" lvl="0" indent="-342900">
+              <a:spcBef>
+                <a:spcPts val="300"/>
+              </a:spcBef>
+              <a:spcAft>
+                <a:spcPts val="300"/>
+              </a:spcAft>
+              <a:buFont typeface="Wingdings" panose="05000000000000000000" pitchFamily="2" charset="2"/>
+              <a:buChar char="ü"/>
+            </a:pPr>
+            <a:r>
+              <a:rPr lang="fr-HT" sz="1800" dirty="0">
+                <a:effectLst/>
+                <a:latin typeface="Arial" panose="020B0604020202020204" pitchFamily="34" charset="0"/>
+                <a:ea typeface="Arial" panose="020B0604020202020204" pitchFamily="34" charset="0"/>
+              </a:rPr>
+              <a:t>Changer le port d'écoute SSH du port par défaut (22) vers un port personnalisé afin de limiter les attaques automatisées.</a:t>
+            </a:r>
+            <a:endParaRPr lang="en-US" sz="1800" dirty="0">
+              <a:effectLst/>
+              <a:latin typeface="Arial" panose="020B0604020202020204" pitchFamily="34" charset="0"/>
+              <a:ea typeface="Arial" panose="020B0604020202020204" pitchFamily="34" charset="0"/>
+            </a:endParaRPr>
+          </a:p>
+          <a:p>
+            <a:pPr marL="342900" marR="0" lvl="0" indent="-342900">
+              <a:spcBef>
+                <a:spcPts val="300"/>
+              </a:spcBef>
+              <a:spcAft>
+                <a:spcPts val="300"/>
+              </a:spcAft>
+              <a:buFont typeface="Wingdings" panose="05000000000000000000" pitchFamily="2" charset="2"/>
+              <a:buChar char="ü"/>
+            </a:pPr>
+            <a:r>
+              <a:rPr lang="fr-HT" sz="1800" dirty="0">
+                <a:effectLst/>
+                <a:latin typeface="Arial" panose="020B0604020202020204" pitchFamily="34" charset="0"/>
+                <a:ea typeface="Arial" panose="020B0604020202020204" pitchFamily="34" charset="0"/>
+              </a:rPr>
+              <a:t>Installer et configurer Fail2ban pour bannir automatiquement les adresses IP suspectes après plusieurs tentatives de connexion échouées.</a:t>
+            </a:r>
+            <a:endParaRPr lang="en-US" sz="1800" dirty="0">
+              <a:effectLst/>
+              <a:latin typeface="Arial" panose="020B0604020202020204" pitchFamily="34" charset="0"/>
+              <a:ea typeface="Arial" panose="020B0604020202020204" pitchFamily="34" charset="0"/>
+            </a:endParaRPr>
+          </a:p>
+          <a:p>
+            <a:pPr marL="342900" marR="0" lvl="0" indent="-342900">
+              <a:spcBef>
+                <a:spcPts val="300"/>
+              </a:spcBef>
+              <a:spcAft>
+                <a:spcPts val="300"/>
+              </a:spcAft>
+              <a:buFont typeface="Wingdings" panose="05000000000000000000" pitchFamily="2" charset="2"/>
+              <a:buChar char="ü"/>
+            </a:pPr>
+            <a:r>
+              <a:rPr lang="fr-HT" sz="1800" dirty="0">
+                <a:effectLst/>
+                <a:latin typeface="Arial" panose="020B0604020202020204" pitchFamily="34" charset="0"/>
+                <a:ea typeface="Arial" panose="020B0604020202020204" pitchFamily="34" charset="0"/>
+              </a:rPr>
+              <a:t>Restreindre la liste des utilisateurs autorisés à se connecter via SSH grâce à la directive </a:t>
+            </a:r>
+            <a:r>
+              <a:rPr lang="fr-HT" sz="1800" dirty="0" err="1">
+                <a:effectLst/>
+                <a:latin typeface="Arial" panose="020B0604020202020204" pitchFamily="34" charset="0"/>
+                <a:ea typeface="Arial" panose="020B0604020202020204" pitchFamily="34" charset="0"/>
+              </a:rPr>
+              <a:t>AllowUsers</a:t>
+            </a:r>
+            <a:r>
+              <a:rPr lang="fr-HT" sz="1800" dirty="0">
+                <a:effectLst/>
+                <a:latin typeface="Arial" panose="020B0604020202020204" pitchFamily="34" charset="0"/>
+                <a:ea typeface="Arial" panose="020B0604020202020204" pitchFamily="34" charset="0"/>
+              </a:rPr>
+              <a:t>.</a:t>
+            </a:r>
+            <a:endParaRPr lang="en-US" sz="1800" dirty="0">
+              <a:effectLst/>
+              <a:latin typeface="Arial" panose="020B0604020202020204" pitchFamily="34" charset="0"/>
+              <a:ea typeface="Arial" panose="020B0604020202020204" pitchFamily="34" charset="0"/>
+            </a:endParaRPr>
+          </a:p>
+        </p:txBody>
+      </p:sp>
+      <p:sp>
+        <p:nvSpPr>
+          <p:cNvPr id="31" name="Title 1">
+            <a:extLst>
+              <a:ext uri="{FF2B5EF4-FFF2-40B4-BE49-F238E27FC236}">
+                <a16:creationId xmlns:a16="http://schemas.microsoft.com/office/drawing/2014/main" id="{9736268C-859C-3939-6BEE-27D843840626}"/>
+              </a:ext>
+              <a:ext uri="{C183D7F6-B498-43B3-948B-1728B52AA6E4}">
+                <adec:decorative xmlns:adec="http://schemas.microsoft.com/office/drawing/2017/decorative" val="0"/>
+              </a:ext>
+            </a:extLst>
+          </p:cNvPr>
+          <p:cNvSpPr>
+            <a:spLocks noGrp="1"/>
+          </p:cNvSpPr>
+          <p:nvPr>
+            <p:ph type="title"/>
+          </p:nvPr>
+        </p:nvSpPr>
+        <p:spPr>
+          <a:xfrm>
+            <a:off x="3080105" y="421241"/>
+            <a:ext cx="5878960" cy="716340"/>
           </a:xfrm>
         </p:spPr>
         <p:txBody>
           <a:bodyPr>
-            <a:normAutofit lnSpcReduction="10000"/>
+            <a:normAutofit fontScale="90000"/>
           </a:bodyPr>
           <a:lstStyle/>
           <a:p>
             <a:r>
-              <a:rPr lang="en-US" dirty="0"/>
-              <a:t>TARGET AUDIENCE</a:t>
-            </a:r>
-          </a:p>
-        </p:txBody>
-      </p:sp>
-      <p:sp>
-        <p:nvSpPr>
-          <p:cNvPr id="6" name="Text Placeholder 5">
-            <a:extLst>
-              <a:ext uri="{FF2B5EF4-FFF2-40B4-BE49-F238E27FC236}">
-                <a16:creationId xmlns:a16="http://schemas.microsoft.com/office/drawing/2014/main" id="{7E7D4C34-22A0-4D54-A07D-E1E9A11463E5}"/>
-              </a:ext>
-            </a:extLst>
-          </p:cNvPr>
-          <p:cNvSpPr>
-            <a:spLocks noGrp="1"/>
-          </p:cNvSpPr>
-          <p:nvPr>
-            <p:ph type="body" sz="quarter" idx="17"/>
-          </p:nvPr>
-        </p:nvSpPr>
-        <p:spPr>
-          <a:xfrm>
-            <a:off x="6673143" y="3070348"/>
-            <a:ext cx="4031030" cy="1057308"/>
-          </a:xfrm>
-        </p:spPr>
-        <p:txBody>
-          <a:bodyPr/>
-          <a:lstStyle/>
-          <a:p>
-            <a:r>
-              <a:rPr lang="en-US" dirty="0"/>
-              <a:t>Our target audience is Gen Z (18-25 years old)</a:t>
-            </a:r>
-          </a:p>
-          <a:p>
-            <a:endParaRPr lang="en-US" dirty="0"/>
-          </a:p>
-        </p:txBody>
-      </p:sp>
-      <p:sp>
-        <p:nvSpPr>
-          <p:cNvPr id="7" name="Text Placeholder 6">
-            <a:extLst>
-              <a:ext uri="{FF2B5EF4-FFF2-40B4-BE49-F238E27FC236}">
-                <a16:creationId xmlns:a16="http://schemas.microsoft.com/office/drawing/2014/main" id="{301D392D-FB66-47A0-B628-5ADE822A2CFF}"/>
-              </a:ext>
-            </a:extLst>
-          </p:cNvPr>
-          <p:cNvSpPr>
-            <a:spLocks noGrp="1"/>
-          </p:cNvSpPr>
-          <p:nvPr>
-            <p:ph type="body" sz="quarter" idx="18"/>
-          </p:nvPr>
-        </p:nvSpPr>
-        <p:spPr>
-          <a:xfrm>
-            <a:off x="1485899" y="4319431"/>
-            <a:ext cx="4031945" cy="365125"/>
-          </a:xfrm>
-        </p:spPr>
-        <p:txBody>
-          <a:bodyPr>
-            <a:normAutofit lnSpcReduction="10000"/>
-          </a:bodyPr>
-          <a:lstStyle/>
-          <a:p>
-            <a:r>
-              <a:rPr lang="en-US" dirty="0"/>
-              <a:t>COST SAVINGS</a:t>
-            </a:r>
-          </a:p>
-        </p:txBody>
-      </p:sp>
-      <p:sp>
-        <p:nvSpPr>
-          <p:cNvPr id="8" name="Text Placeholder 7">
-            <a:extLst>
-              <a:ext uri="{FF2B5EF4-FFF2-40B4-BE49-F238E27FC236}">
-                <a16:creationId xmlns:a16="http://schemas.microsoft.com/office/drawing/2014/main" id="{51C26CE0-2506-4B44-A26F-C12BFA5B18B5}"/>
-              </a:ext>
-            </a:extLst>
-          </p:cNvPr>
-          <p:cNvSpPr>
-            <a:spLocks noGrp="1"/>
-          </p:cNvSpPr>
-          <p:nvPr>
-            <p:ph type="body" sz="quarter" idx="19"/>
-          </p:nvPr>
-        </p:nvSpPr>
-        <p:spPr>
-          <a:xfrm>
-            <a:off x="1486412" y="4826656"/>
-            <a:ext cx="4031030" cy="1057308"/>
-          </a:xfrm>
-        </p:spPr>
-        <p:txBody>
-          <a:bodyPr/>
-          <a:lstStyle/>
-          <a:p>
-            <a:r>
-              <a:rPr lang="en-US" dirty="0"/>
-              <a:t>Reduce expenses for replacement products </a:t>
-            </a:r>
-          </a:p>
-          <a:p>
-            <a:endParaRPr lang="en-US" dirty="0"/>
-          </a:p>
-        </p:txBody>
-      </p:sp>
-      <p:sp>
-        <p:nvSpPr>
-          <p:cNvPr id="9" name="Text Placeholder 8">
-            <a:extLst>
-              <a:ext uri="{FF2B5EF4-FFF2-40B4-BE49-F238E27FC236}">
-                <a16:creationId xmlns:a16="http://schemas.microsoft.com/office/drawing/2014/main" id="{868F40F8-BF35-45E9-B3DD-5436362D746E}"/>
-              </a:ext>
-            </a:extLst>
-          </p:cNvPr>
-          <p:cNvSpPr>
-            <a:spLocks noGrp="1"/>
-          </p:cNvSpPr>
-          <p:nvPr>
-            <p:ph type="body" sz="quarter" idx="23"/>
-          </p:nvPr>
-        </p:nvSpPr>
-        <p:spPr>
-          <a:xfrm>
-            <a:off x="6672630" y="4319431"/>
-            <a:ext cx="4031945" cy="365125"/>
-          </a:xfrm>
-        </p:spPr>
-        <p:txBody>
-          <a:bodyPr>
-            <a:normAutofit lnSpcReduction="10000"/>
-          </a:bodyPr>
-          <a:lstStyle/>
-          <a:p>
-            <a:r>
-              <a:rPr lang="en-US" dirty="0"/>
-              <a:t>EASY TO USE</a:t>
-            </a:r>
-          </a:p>
-        </p:txBody>
-      </p:sp>
-      <p:sp>
-        <p:nvSpPr>
-          <p:cNvPr id="10" name="Text Placeholder 9">
-            <a:extLst>
-              <a:ext uri="{FF2B5EF4-FFF2-40B4-BE49-F238E27FC236}">
-                <a16:creationId xmlns:a16="http://schemas.microsoft.com/office/drawing/2014/main" id="{7F39C97C-2DDC-4706-B96C-B02FAE53A426}"/>
-              </a:ext>
-            </a:extLst>
-          </p:cNvPr>
-          <p:cNvSpPr>
-            <a:spLocks noGrp="1"/>
-          </p:cNvSpPr>
-          <p:nvPr>
-            <p:ph type="body" sz="quarter" idx="24"/>
-          </p:nvPr>
-        </p:nvSpPr>
-        <p:spPr>
-          <a:xfrm>
-            <a:off x="6673143" y="4826656"/>
-            <a:ext cx="4031030" cy="1057308"/>
-          </a:xfrm>
-        </p:spPr>
-        <p:txBody>
-          <a:bodyPr/>
-          <a:lstStyle/>
-          <a:p>
-            <a:r>
-              <a:rPr lang="en-US" dirty="0"/>
-              <a:t>Simple design that gives customers the targeted information they need</a:t>
-            </a:r>
-          </a:p>
-        </p:txBody>
-      </p:sp>
-      <p:sp>
-        <p:nvSpPr>
-          <p:cNvPr id="80" name="Date Placeholder 79">
-            <a:extLst>
-              <a:ext uri="{FF2B5EF4-FFF2-40B4-BE49-F238E27FC236}">
-                <a16:creationId xmlns:a16="http://schemas.microsoft.com/office/drawing/2014/main" id="{BC1F9D86-85D8-4FD0-B0D3-47D778722782}"/>
-              </a:ext>
-            </a:extLst>
-          </p:cNvPr>
-          <p:cNvSpPr>
-            <a:spLocks noGrp="1"/>
-          </p:cNvSpPr>
-          <p:nvPr>
-            <p:ph type="dt" sz="half" idx="20"/>
-          </p:nvPr>
-        </p:nvSpPr>
-        <p:spPr>
-          <a:xfrm>
-            <a:off x="838200" y="6356350"/>
-            <a:ext cx="2743200" cy="365125"/>
-          </a:xfrm>
-        </p:spPr>
-        <p:txBody>
-          <a:bodyPr/>
-          <a:lstStyle/>
-          <a:p>
-            <a:r>
-              <a:rPr lang="en-US" dirty="0"/>
-              <a:t>20XX</a:t>
-            </a:r>
-          </a:p>
-        </p:txBody>
-      </p:sp>
-      <p:sp>
-        <p:nvSpPr>
-          <p:cNvPr id="81" name="Footer Placeholder 80">
-            <a:extLst>
-              <a:ext uri="{FF2B5EF4-FFF2-40B4-BE49-F238E27FC236}">
-                <a16:creationId xmlns:a16="http://schemas.microsoft.com/office/drawing/2014/main" id="{E94F1D24-E4A1-4B59-B57E-A28453963B88}"/>
-              </a:ext>
-            </a:extLst>
-          </p:cNvPr>
-          <p:cNvSpPr>
-            <a:spLocks noGrp="1"/>
-          </p:cNvSpPr>
-          <p:nvPr>
-            <p:ph type="ftr" sz="quarter" idx="21"/>
-          </p:nvPr>
-        </p:nvSpPr>
-        <p:spPr>
-          <a:xfrm>
-            <a:off x="4038600" y="6356350"/>
-            <a:ext cx="4114800" cy="365125"/>
-          </a:xfrm>
-        </p:spPr>
-        <p:txBody>
-          <a:bodyPr/>
-          <a:lstStyle/>
-          <a:p>
-            <a:r>
-              <a:rPr lang="en-US" dirty="0"/>
-              <a:t>Pitch Deck</a:t>
-            </a:r>
-          </a:p>
-        </p:txBody>
-      </p:sp>
-      <p:sp>
-        <p:nvSpPr>
-          <p:cNvPr id="82" name="Slide Number Placeholder 81">
-            <a:extLst>
-              <a:ext uri="{FF2B5EF4-FFF2-40B4-BE49-F238E27FC236}">
-                <a16:creationId xmlns:a16="http://schemas.microsoft.com/office/drawing/2014/main" id="{CE36A058-BEC2-4BC5-A467-F2EB2A365051}"/>
-              </a:ext>
-            </a:extLst>
-          </p:cNvPr>
-          <p:cNvSpPr>
-            <a:spLocks noGrp="1"/>
-          </p:cNvSpPr>
-          <p:nvPr>
-            <p:ph type="sldNum" sz="quarter" idx="22"/>
-          </p:nvPr>
-        </p:nvSpPr>
-        <p:spPr>
-          <a:xfrm>
-            <a:off x="8610600" y="6356350"/>
-            <a:ext cx="2743200" cy="365125"/>
-          </a:xfrm>
-        </p:spPr>
-        <p:txBody>
-          <a:bodyPr/>
-          <a:lstStyle/>
-          <a:p>
-            <a:fld id="{B5CEABB6-07DC-46E8-9B57-56EC44A396E5}" type="slidenum">
-              <a:rPr lang="en-US" smtClean="0"/>
-              <a:pPr/>
-              <a:t>4</a:t>
-            </a:fld>
+              <a:rPr lang="fr-HT" b="1" kern="0" dirty="0">
+                <a:solidFill>
+                  <a:srgbClr val="0070C0"/>
+                </a:solidFill>
+                <a:latin typeface="Arial" panose="020B0604020202020204" pitchFamily="34" charset="0"/>
+              </a:rPr>
+              <a:t>Objectifs du Projet</a:t>
+            </a:r>
+            <a:br>
+              <a:rPr lang="en-US" b="1" kern="0" dirty="0">
+                <a:solidFill>
+                  <a:srgbClr val="1F3864"/>
+                </a:solidFill>
+                <a:latin typeface="Arial" panose="020B0604020202020204" pitchFamily="34" charset="0"/>
+              </a:rPr>
+            </a:br>
             <a:endParaRPr lang="en-US" dirty="0"/>
           </a:p>
         </p:txBody>
@@ -34444,408 +34962,225 @@
       </p:grpSpPr>
       <p:sp>
         <p:nvSpPr>
-          <p:cNvPr id="2" name="Title 1">
-            <a:extLst>
-              <a:ext uri="{FF2B5EF4-FFF2-40B4-BE49-F238E27FC236}">
-                <a16:creationId xmlns:a16="http://schemas.microsoft.com/office/drawing/2014/main" id="{75031FE9-9059-4FE8-B4AC-9771F23A1B89}"/>
-              </a:ext>
-            </a:extLst>
-          </p:cNvPr>
-          <p:cNvSpPr>
-            <a:spLocks noGrp="1"/>
-          </p:cNvSpPr>
-          <p:nvPr>
-            <p:ph type="title"/>
-          </p:nvPr>
-        </p:nvSpPr>
-        <p:spPr>
-          <a:xfrm>
-            <a:off x="1508760" y="4156405"/>
-            <a:ext cx="3139440" cy="1325563"/>
-          </a:xfrm>
-        </p:spPr>
-        <p:txBody>
-          <a:bodyPr/>
-          <a:lstStyle/>
-          <a:p>
-            <a:r>
-              <a:rPr lang="en-US" dirty="0"/>
-              <a:t>PRODUCT OVERVIEW</a:t>
-            </a:r>
-          </a:p>
-        </p:txBody>
-      </p:sp>
-      <p:sp>
-        <p:nvSpPr>
-          <p:cNvPr id="3" name="Content Placeholder 2">
-            <a:extLst>
-              <a:ext uri="{FF2B5EF4-FFF2-40B4-BE49-F238E27FC236}">
-                <a16:creationId xmlns:a16="http://schemas.microsoft.com/office/drawing/2014/main" id="{D4A2EB3F-4D60-451F-8F45-7D6654D2FCD9}"/>
-              </a:ext>
-            </a:extLst>
-          </p:cNvPr>
-          <p:cNvSpPr>
-            <a:spLocks noGrp="1"/>
-          </p:cNvSpPr>
-          <p:nvPr>
-            <p:ph type="body" sz="quarter" idx="13"/>
-          </p:nvPr>
-        </p:nvSpPr>
-        <p:spPr>
-          <a:xfrm>
-            <a:off x="5922254" y="1530635"/>
-            <a:ext cx="5433204" cy="365125"/>
-          </a:xfrm>
-        </p:spPr>
-        <p:txBody>
-          <a:bodyPr vert="horz" lIns="91440" tIns="45720" rIns="91440" bIns="45720" rtlCol="0" anchor="t">
-            <a:normAutofit lnSpcReduction="10000"/>
+          <p:cNvPr id="31" name="ZoneTexte 30">
+            <a:extLst>
+              <a:ext uri="{FF2B5EF4-FFF2-40B4-BE49-F238E27FC236}">
+                <a16:creationId xmlns:a16="http://schemas.microsoft.com/office/drawing/2014/main" id="{80D9A9D5-5D7C-9D7F-CEE9-0B51F0EE04E2}"/>
+              </a:ext>
+            </a:extLst>
+          </p:cNvPr>
+          <p:cNvSpPr txBox="1"/>
+          <p:nvPr/>
+        </p:nvSpPr>
+        <p:spPr>
+          <a:xfrm>
+            <a:off x="2661007" y="1057130"/>
+            <a:ext cx="8887145" cy="3170099"/>
+          </a:xfrm>
+          <a:prstGeom prst="rect">
+            <a:avLst/>
+          </a:prstGeom>
+          <a:noFill/>
+        </p:spPr>
+        <p:txBody>
+          <a:bodyPr wrap="square">
+            <a:spAutoFit/>
           </a:bodyPr>
           <a:lstStyle/>
           <a:p>
-            <a:r>
-              <a:rPr lang="en-US" dirty="0"/>
-              <a:t>UNIQUE</a:t>
-            </a:r>
-          </a:p>
-        </p:txBody>
-      </p:sp>
-      <p:sp>
-        <p:nvSpPr>
-          <p:cNvPr id="4" name="Text Placeholder 3">
-            <a:extLst>
-              <a:ext uri="{FF2B5EF4-FFF2-40B4-BE49-F238E27FC236}">
-                <a16:creationId xmlns:a16="http://schemas.microsoft.com/office/drawing/2014/main" id="{AC1C80FB-53F9-42EE-B1E6-D0F998EC5DFA}"/>
-              </a:ext>
-            </a:extLst>
-          </p:cNvPr>
-          <p:cNvSpPr>
-            <a:spLocks noGrp="1"/>
-          </p:cNvSpPr>
-          <p:nvPr>
-            <p:ph type="body" sz="quarter" idx="15"/>
-          </p:nvPr>
-        </p:nvSpPr>
-        <p:spPr>
-          <a:xfrm>
-            <a:off x="5921828" y="1860060"/>
-            <a:ext cx="5431971" cy="557950"/>
+            <a:pPr marL="0" marR="0">
+              <a:spcBef>
+                <a:spcPts val="300"/>
+              </a:spcBef>
+              <a:spcAft>
+                <a:spcPts val="300"/>
+              </a:spcAft>
+              <a:buNone/>
+            </a:pPr>
+            <a:r>
+              <a:rPr lang="fr-HT" sz="1800" dirty="0">
+                <a:effectLst/>
+                <a:latin typeface="Arial" panose="020B0604020202020204" pitchFamily="34" charset="0"/>
+                <a:ea typeface="Arial" panose="020B0604020202020204" pitchFamily="34" charset="0"/>
+              </a:rPr>
+              <a:t> </a:t>
+            </a:r>
+            <a:endParaRPr lang="en-US" sz="1800" dirty="0">
+              <a:effectLst/>
+              <a:latin typeface="Arial" panose="020B0604020202020204" pitchFamily="34" charset="0"/>
+              <a:ea typeface="Arial" panose="020B0604020202020204" pitchFamily="34" charset="0"/>
+            </a:endParaRPr>
+          </a:p>
+          <a:p>
+            <a:pPr marL="0" marR="0" algn="just">
+              <a:spcBef>
+                <a:spcPts val="500"/>
+              </a:spcBef>
+              <a:spcAft>
+                <a:spcPts val="500"/>
+              </a:spcAft>
+              <a:buNone/>
+            </a:pPr>
+            <a:r>
+              <a:rPr lang="fr-HT" sz="1800" dirty="0">
+                <a:effectLst/>
+                <a:latin typeface="Arial" panose="020B0604020202020204" pitchFamily="34" charset="0"/>
+                <a:ea typeface="Arial" panose="020B0604020202020204" pitchFamily="34" charset="0"/>
+              </a:rPr>
+              <a:t>Les serveurs exposés sur Internet sont continuellement soumis à des tentatives d'intrusion automatisées. Les robots (bots) scannent en permanence le port 22, tentent de se connecter avec des identifiants par défaut ou lancent des attaques par dictionnaire sur des comptes actifs, notamment root. Une configuration SSH par défaut laisse donc la porte ouverte à de nombreuses vulnérabilités.</a:t>
+            </a:r>
+            <a:endParaRPr lang="en-US" sz="1800" dirty="0">
+              <a:effectLst/>
+              <a:latin typeface="Arial" panose="020B0604020202020204" pitchFamily="34" charset="0"/>
+              <a:ea typeface="Arial" panose="020B0604020202020204" pitchFamily="34" charset="0"/>
+            </a:endParaRPr>
+          </a:p>
+          <a:p>
+            <a:pPr marL="0" marR="0">
+              <a:spcBef>
+                <a:spcPts val="300"/>
+              </a:spcBef>
+              <a:spcAft>
+                <a:spcPts val="300"/>
+              </a:spcAft>
+              <a:buNone/>
+            </a:pPr>
+            <a:r>
+              <a:rPr lang="fr-HT" sz="1800" dirty="0">
+                <a:effectLst/>
+                <a:latin typeface="Arial" panose="020B0604020202020204" pitchFamily="34" charset="0"/>
+                <a:ea typeface="Arial" panose="020B0604020202020204" pitchFamily="34" charset="0"/>
+              </a:rPr>
+              <a:t>  </a:t>
+            </a:r>
+            <a:endParaRPr lang="en-US" sz="1800" dirty="0">
+              <a:effectLst/>
+              <a:latin typeface="Arial" panose="020B0604020202020204" pitchFamily="34" charset="0"/>
+              <a:ea typeface="Arial" panose="020B0604020202020204" pitchFamily="34" charset="0"/>
+            </a:endParaRPr>
+          </a:p>
+          <a:p>
+            <a:pPr marL="0" marR="0" algn="just">
+              <a:spcBef>
+                <a:spcPts val="500"/>
+              </a:spcBef>
+              <a:spcAft>
+                <a:spcPts val="500"/>
+              </a:spcAft>
+              <a:buNone/>
+            </a:pPr>
+            <a:r>
+              <a:rPr lang="fr-HT" sz="1800" dirty="0">
+                <a:effectLst/>
+                <a:latin typeface="Arial" panose="020B0604020202020204" pitchFamily="34" charset="0"/>
+                <a:ea typeface="Arial" panose="020B0604020202020204" pitchFamily="34" charset="0"/>
+              </a:rPr>
+              <a:t>La problématique de ce projet peut ainsi se formuler de la manière suivante : Comment sécuriser efficacement un serveur </a:t>
+            </a:r>
+            <a:r>
+              <a:rPr lang="fr-HT" sz="1800" dirty="0" err="1">
+                <a:effectLst/>
+                <a:latin typeface="Arial" panose="020B0604020202020204" pitchFamily="34" charset="0"/>
+                <a:ea typeface="Arial" panose="020B0604020202020204" pitchFamily="34" charset="0"/>
+              </a:rPr>
+              <a:t>OpenSSH</a:t>
+            </a:r>
+            <a:r>
+              <a:rPr lang="fr-HT" sz="1800" dirty="0">
+                <a:effectLst/>
+                <a:latin typeface="Arial" panose="020B0604020202020204" pitchFamily="34" charset="0"/>
+                <a:ea typeface="Arial" panose="020B0604020202020204" pitchFamily="34" charset="0"/>
+              </a:rPr>
+              <a:t> en appliquant plusieurs couches de protection complémentaires</a:t>
+            </a:r>
+            <a:r>
+              <a:rPr lang="fr-HT" dirty="0">
+                <a:latin typeface="Arial" panose="020B0604020202020204" pitchFamily="34" charset="0"/>
+                <a:ea typeface="Arial" panose="020B0604020202020204" pitchFamily="34" charset="0"/>
+              </a:rPr>
+              <a:t> </a:t>
+            </a:r>
+            <a:r>
+              <a:rPr lang="fr-HT" sz="1800" dirty="0">
+                <a:effectLst/>
+                <a:latin typeface="Arial" panose="020B0604020202020204" pitchFamily="34" charset="0"/>
+                <a:ea typeface="Arial" panose="020B0604020202020204" pitchFamily="34" charset="0"/>
+              </a:rPr>
+              <a:t>?</a:t>
+            </a:r>
+            <a:endParaRPr lang="en-US" sz="1800" dirty="0">
+              <a:effectLst/>
+              <a:latin typeface="Arial" panose="020B0604020202020204" pitchFamily="34" charset="0"/>
+              <a:ea typeface="Arial" panose="020B0604020202020204" pitchFamily="34" charset="0"/>
+            </a:endParaRPr>
+          </a:p>
+        </p:txBody>
+      </p:sp>
+      <p:sp>
+        <p:nvSpPr>
+          <p:cNvPr id="32" name="Title 1">
+            <a:extLst>
+              <a:ext uri="{FF2B5EF4-FFF2-40B4-BE49-F238E27FC236}">
+                <a16:creationId xmlns:a16="http://schemas.microsoft.com/office/drawing/2014/main" id="{D8B266D5-B513-BF8A-49A7-B49B874A4F2E}"/>
+              </a:ext>
+              <a:ext uri="{C183D7F6-B498-43B3-948B-1728B52AA6E4}">
+                <adec:decorative xmlns:adec="http://schemas.microsoft.com/office/drawing/2017/decorative" val="0"/>
+              </a:ext>
+            </a:extLst>
+          </p:cNvPr>
+          <p:cNvSpPr>
+            <a:spLocks noGrp="1"/>
+          </p:cNvSpPr>
+          <p:nvPr>
+            <p:ph type="title"/>
+          </p:nvPr>
+        </p:nvSpPr>
+        <p:spPr>
+          <a:xfrm>
+            <a:off x="4076699" y="667821"/>
+            <a:ext cx="5878960" cy="945222"/>
           </a:xfrm>
         </p:spPr>
         <p:txBody>
           <a:bodyPr>
-            <a:normAutofit/>
+            <a:normAutofit fontScale="90000"/>
           </a:bodyPr>
           <a:lstStyle/>
           <a:p>
-            <a:r>
-              <a:rPr lang="en-US" dirty="0"/>
-              <a:t>Only product specifically dedicated to this niche market</a:t>
-            </a:r>
-          </a:p>
-        </p:txBody>
-      </p:sp>
-      <p:sp>
-        <p:nvSpPr>
-          <p:cNvPr id="5" name="Text Placeholder 4">
-            <a:extLst>
-              <a:ext uri="{FF2B5EF4-FFF2-40B4-BE49-F238E27FC236}">
-                <a16:creationId xmlns:a16="http://schemas.microsoft.com/office/drawing/2014/main" id="{E81BA2B5-6A90-4204-ABDD-7183FBB03A02}"/>
-              </a:ext>
-            </a:extLst>
-          </p:cNvPr>
-          <p:cNvSpPr>
-            <a:spLocks noGrp="1"/>
-          </p:cNvSpPr>
-          <p:nvPr>
-            <p:ph type="body" sz="quarter" idx="23"/>
-          </p:nvPr>
-        </p:nvSpPr>
-        <p:spPr>
-          <a:xfrm>
-            <a:off x="5922254" y="2630431"/>
-            <a:ext cx="5433204" cy="365125"/>
-          </a:xfrm>
-        </p:spPr>
-        <p:txBody>
-          <a:bodyPr>
-            <a:normAutofit lnSpcReduction="10000"/>
-          </a:bodyPr>
-          <a:lstStyle/>
-          <a:p>
-            <a:r>
-              <a:rPr lang="en-US" dirty="0"/>
-              <a:t>FIRST TO MARKET</a:t>
-            </a:r>
-          </a:p>
-        </p:txBody>
-      </p:sp>
-      <p:sp>
-        <p:nvSpPr>
-          <p:cNvPr id="6" name="Text Placeholder 5">
-            <a:extLst>
-              <a:ext uri="{FF2B5EF4-FFF2-40B4-BE49-F238E27FC236}">
-                <a16:creationId xmlns:a16="http://schemas.microsoft.com/office/drawing/2014/main" id="{7E7D4C34-22A0-4D54-A07D-E1E9A11463E5}"/>
-              </a:ext>
-            </a:extLst>
-          </p:cNvPr>
-          <p:cNvSpPr>
-            <a:spLocks noGrp="1"/>
-          </p:cNvSpPr>
-          <p:nvPr>
-            <p:ph type="body" sz="quarter" idx="24"/>
-          </p:nvPr>
-        </p:nvSpPr>
-        <p:spPr>
-          <a:xfrm>
-            <a:off x="5921828" y="2959856"/>
-            <a:ext cx="5431971" cy="557950"/>
-          </a:xfrm>
-        </p:spPr>
-        <p:txBody>
-          <a:bodyPr/>
-          <a:lstStyle/>
-          <a:p>
-            <a:r>
-              <a:rPr lang="en-US" dirty="0"/>
-              <a:t>First beautifully designed product that's both stylish and functional</a:t>
-            </a:r>
-          </a:p>
-        </p:txBody>
-      </p:sp>
-      <p:sp>
-        <p:nvSpPr>
-          <p:cNvPr id="7" name="Text Placeholder 6">
-            <a:extLst>
-              <a:ext uri="{FF2B5EF4-FFF2-40B4-BE49-F238E27FC236}">
-                <a16:creationId xmlns:a16="http://schemas.microsoft.com/office/drawing/2014/main" id="{301D392D-FB66-47A0-B628-5ADE822A2CFF}"/>
-              </a:ext>
-            </a:extLst>
-          </p:cNvPr>
-          <p:cNvSpPr>
-            <a:spLocks noGrp="1"/>
-          </p:cNvSpPr>
-          <p:nvPr>
-            <p:ph type="body" sz="quarter" idx="25"/>
-          </p:nvPr>
-        </p:nvSpPr>
-        <p:spPr>
-          <a:xfrm>
-            <a:off x="5922254" y="3730227"/>
-            <a:ext cx="5433204" cy="365125"/>
-          </a:xfrm>
-        </p:spPr>
-        <p:txBody>
-          <a:bodyPr>
-            <a:normAutofit lnSpcReduction="10000"/>
-          </a:bodyPr>
-          <a:lstStyle/>
-          <a:p>
-            <a:r>
-              <a:rPr lang="en-US" dirty="0"/>
-              <a:t>TESTED </a:t>
-            </a:r>
-          </a:p>
-        </p:txBody>
-      </p:sp>
-      <p:sp>
-        <p:nvSpPr>
-          <p:cNvPr id="8" name="Text Placeholder 7">
-            <a:extLst>
-              <a:ext uri="{FF2B5EF4-FFF2-40B4-BE49-F238E27FC236}">
-                <a16:creationId xmlns:a16="http://schemas.microsoft.com/office/drawing/2014/main" id="{51C26CE0-2506-4B44-A26F-C12BFA5B18B5}"/>
-              </a:ext>
-            </a:extLst>
-          </p:cNvPr>
-          <p:cNvSpPr>
-            <a:spLocks noGrp="1"/>
-          </p:cNvSpPr>
-          <p:nvPr>
-            <p:ph type="body" sz="quarter" idx="26"/>
-          </p:nvPr>
-        </p:nvSpPr>
-        <p:spPr>
-          <a:xfrm>
-            <a:off x="5921828" y="4059652"/>
-            <a:ext cx="5431971" cy="557950"/>
-          </a:xfrm>
-        </p:spPr>
-        <p:txBody>
-          <a:bodyPr/>
-          <a:lstStyle/>
-          <a:p>
-            <a:r>
-              <a:rPr lang="en-US" dirty="0"/>
-              <a:t>Conducted testing with college students in the area</a:t>
-            </a:r>
-          </a:p>
-        </p:txBody>
-      </p:sp>
-      <p:sp>
-        <p:nvSpPr>
-          <p:cNvPr id="9" name="Text Placeholder 8">
-            <a:extLst>
-              <a:ext uri="{FF2B5EF4-FFF2-40B4-BE49-F238E27FC236}">
-                <a16:creationId xmlns:a16="http://schemas.microsoft.com/office/drawing/2014/main" id="{868F40F8-BF35-45E9-B3DD-5436362D746E}"/>
-              </a:ext>
-            </a:extLst>
-          </p:cNvPr>
-          <p:cNvSpPr>
-            <a:spLocks noGrp="1"/>
-          </p:cNvSpPr>
-          <p:nvPr>
-            <p:ph type="body" sz="quarter" idx="27"/>
-          </p:nvPr>
-        </p:nvSpPr>
-        <p:spPr>
-          <a:xfrm>
-            <a:off x="5920106" y="4830024"/>
-            <a:ext cx="5433204" cy="365125"/>
-          </a:xfrm>
-        </p:spPr>
-        <p:txBody>
-          <a:bodyPr>
-            <a:normAutofit lnSpcReduction="10000"/>
-          </a:bodyPr>
-          <a:lstStyle/>
-          <a:p>
-            <a:r>
-              <a:rPr lang="en-US" dirty="0"/>
-              <a:t>AUTHENTIC</a:t>
-            </a:r>
-          </a:p>
-        </p:txBody>
-      </p:sp>
-      <p:sp>
-        <p:nvSpPr>
-          <p:cNvPr id="10" name="Text Placeholder 9">
-            <a:extLst>
-              <a:ext uri="{FF2B5EF4-FFF2-40B4-BE49-F238E27FC236}">
-                <a16:creationId xmlns:a16="http://schemas.microsoft.com/office/drawing/2014/main" id="{7F39C97C-2DDC-4706-B96C-B02FAE53A426}"/>
-              </a:ext>
-            </a:extLst>
-          </p:cNvPr>
-          <p:cNvSpPr>
-            <a:spLocks noGrp="1"/>
-          </p:cNvSpPr>
-          <p:nvPr>
-            <p:ph type="body" sz="quarter" idx="28"/>
-          </p:nvPr>
-        </p:nvSpPr>
-        <p:spPr>
-          <a:xfrm>
-            <a:off x="5919680" y="5159449"/>
-            <a:ext cx="5431971" cy="557950"/>
-          </a:xfrm>
-        </p:spPr>
-        <p:txBody>
-          <a:bodyPr/>
-          <a:lstStyle/>
-          <a:p>
-            <a:r>
-              <a:rPr lang="en-US" dirty="0"/>
-              <a:t>Designed with the help and input of experts in the field </a:t>
-            </a:r>
-          </a:p>
-        </p:txBody>
-      </p:sp>
-      <p:sp>
-        <p:nvSpPr>
-          <p:cNvPr id="20" name="Date Placeholder 19">
-            <a:extLst>
-              <a:ext uri="{FF2B5EF4-FFF2-40B4-BE49-F238E27FC236}">
-                <a16:creationId xmlns:a16="http://schemas.microsoft.com/office/drawing/2014/main" id="{A74D661B-510C-4CF2-BF77-3EAFB649883D}"/>
-              </a:ext>
-            </a:extLst>
-          </p:cNvPr>
-          <p:cNvSpPr>
-            <a:spLocks noGrp="1"/>
-          </p:cNvSpPr>
-          <p:nvPr>
-            <p:ph type="dt" sz="half" idx="20"/>
-          </p:nvPr>
-        </p:nvSpPr>
-        <p:spPr>
-          <a:xfrm>
-            <a:off x="5919680" y="6356350"/>
-            <a:ext cx="947516" cy="365125"/>
-          </a:xfrm>
-        </p:spPr>
-        <p:txBody>
-          <a:bodyPr/>
-          <a:lstStyle/>
-          <a:p>
-            <a:r>
-              <a:rPr lang="en-US" dirty="0"/>
-              <a:t>20XX</a:t>
-            </a:r>
-          </a:p>
-        </p:txBody>
-      </p:sp>
-      <p:sp>
-        <p:nvSpPr>
-          <p:cNvPr id="21" name="Footer Placeholder 20">
-            <a:extLst>
-              <a:ext uri="{FF2B5EF4-FFF2-40B4-BE49-F238E27FC236}">
-                <a16:creationId xmlns:a16="http://schemas.microsoft.com/office/drawing/2014/main" id="{7E44CAC0-3B5A-49F6-A2CB-0BC80D111A87}"/>
-              </a:ext>
-            </a:extLst>
-          </p:cNvPr>
-          <p:cNvSpPr>
-            <a:spLocks noGrp="1"/>
-          </p:cNvSpPr>
-          <p:nvPr>
-            <p:ph type="ftr" sz="quarter" idx="21"/>
-          </p:nvPr>
-        </p:nvSpPr>
-        <p:spPr>
-          <a:xfrm>
-            <a:off x="7161955" y="6356350"/>
-            <a:ext cx="3243942" cy="365125"/>
-          </a:xfrm>
-        </p:spPr>
-        <p:txBody>
-          <a:bodyPr/>
-          <a:lstStyle/>
-          <a:p>
-            <a:r>
-              <a:rPr lang="en-US" dirty="0"/>
-              <a:t>Pitch Deck</a:t>
-            </a:r>
-          </a:p>
-        </p:txBody>
-      </p:sp>
-      <p:sp>
-        <p:nvSpPr>
-          <p:cNvPr id="22" name="Slide Number Placeholder 21">
-            <a:extLst>
-              <a:ext uri="{FF2B5EF4-FFF2-40B4-BE49-F238E27FC236}">
-                <a16:creationId xmlns:a16="http://schemas.microsoft.com/office/drawing/2014/main" id="{5D1BD041-3428-4D62-934F-F3FF6D36F90F}"/>
-              </a:ext>
-            </a:extLst>
-          </p:cNvPr>
-          <p:cNvSpPr>
-            <a:spLocks noGrp="1"/>
-          </p:cNvSpPr>
-          <p:nvPr>
-            <p:ph type="sldNum" sz="quarter" idx="22"/>
-          </p:nvPr>
-        </p:nvSpPr>
-        <p:spPr>
-          <a:xfrm>
-            <a:off x="10700656" y="6356350"/>
-            <a:ext cx="653143" cy="365125"/>
-          </a:xfrm>
-        </p:spPr>
-        <p:txBody>
-          <a:bodyPr/>
-          <a:lstStyle/>
-          <a:p>
-            <a:fld id="{B5CEABB6-07DC-46E8-9B57-56EC44A396E5}" type="slidenum">
-              <a:rPr lang="en-US" smtClean="0"/>
-              <a:pPr/>
-              <a:t>5</a:t>
-            </a:fld>
+            <a:pPr algn="ctr"/>
+            <a:br>
+              <a:rPr lang="en-US" b="1" kern="0" dirty="0">
+                <a:solidFill>
+                  <a:srgbClr val="1F3864"/>
+                </a:solidFill>
+                <a:latin typeface="Arial" panose="020B0604020202020204" pitchFamily="34" charset="0"/>
+              </a:rPr>
+            </a:br>
+            <a:br>
+              <a:rPr lang="en-US" b="1" kern="0" dirty="0">
+                <a:solidFill>
+                  <a:srgbClr val="1F3864"/>
+                </a:solidFill>
+                <a:latin typeface="Arial" panose="020B0604020202020204" pitchFamily="34" charset="0"/>
+              </a:rPr>
+            </a:br>
+            <a:r>
+              <a:rPr lang="fr-HT" b="1" kern="0" dirty="0">
+                <a:solidFill>
+                  <a:srgbClr val="0070C0"/>
+                </a:solidFill>
+                <a:latin typeface="Arial" panose="020B0604020202020204" pitchFamily="34" charset="0"/>
+              </a:rPr>
+              <a:t>Problématique</a:t>
+            </a:r>
+            <a:br>
+              <a:rPr lang="en-US" b="1" kern="0" dirty="0">
+                <a:solidFill>
+                  <a:srgbClr val="1F3864"/>
+                </a:solidFill>
+                <a:latin typeface="Arial" panose="020B0604020202020204" pitchFamily="34" charset="0"/>
+              </a:rPr>
+            </a:br>
             <a:endParaRPr lang="en-US" dirty="0"/>
           </a:p>
         </p:txBody>
@@ -35091,43 +35426,10 @@
           <a:chExt cx="0" cy="0"/>
         </a:xfrm>
       </p:grpSpPr>
-      <p:sp>
-        <p:nvSpPr>
-          <p:cNvPr id="2" name="Title 1">
-            <a:extLst>
-              <a:ext uri="{FF2B5EF4-FFF2-40B4-BE49-F238E27FC236}">
-                <a16:creationId xmlns:a16="http://schemas.microsoft.com/office/drawing/2014/main" id="{A29DE7F2-E890-4744-88DD-A75F5E300513}"/>
-              </a:ext>
-            </a:extLst>
-          </p:cNvPr>
-          <p:cNvSpPr>
-            <a:spLocks noGrp="1"/>
-          </p:cNvSpPr>
-          <p:nvPr>
-            <p:ph type="ctrTitle"/>
-          </p:nvPr>
-        </p:nvSpPr>
-        <p:spPr>
-          <a:xfrm>
-            <a:off x="6991350" y="2571235"/>
-            <a:ext cx="4179570" cy="1715531"/>
-          </a:xfrm>
-        </p:spPr>
-        <p:txBody>
-          <a:bodyPr/>
-          <a:lstStyle/>
-          <a:p>
-            <a:r>
-              <a:rPr lang="en-US" dirty="0"/>
-              <a:t>COMPANY OVERVIEW</a:t>
-            </a:r>
-          </a:p>
-        </p:txBody>
-      </p:sp>
     </p:spTree>
     <p:extLst>
       <p:ext uri="{BB962C8B-B14F-4D97-AF65-F5344CB8AC3E}">
-        <p14:creationId xmlns:p14="http://schemas.microsoft.com/office/powerpoint/2010/main" val="707789176"/>
+        <p14:creationId xmlns:p14="http://schemas.microsoft.com/office/powerpoint/2010/main" val="1738561688"/>
       </p:ext>
     </p:extLst>
   </p:cSld>
@@ -35159,21 +35461,21 @@
           <p:cNvPr id="2" name="Title 1">
             <a:extLst>
               <a:ext uri="{FF2B5EF4-FFF2-40B4-BE49-F238E27FC236}">
-                <a16:creationId xmlns:a16="http://schemas.microsoft.com/office/drawing/2014/main" id="{8A4E0A63-A388-49B1-A04E-27CE9BD622EF}"/>
-              </a:ext>
-            </a:extLst>
-          </p:cNvPr>
-          <p:cNvSpPr>
-            <a:spLocks noGrp="1"/>
-          </p:cNvSpPr>
-          <p:nvPr>
-            <p:ph type="title"/>
-          </p:nvPr>
-        </p:nvSpPr>
-        <p:spPr>
-          <a:xfrm>
-            <a:off x="5920169" y="1152771"/>
-            <a:ext cx="5431971" cy="846301"/>
+                <a16:creationId xmlns:a16="http://schemas.microsoft.com/office/drawing/2014/main" id="{A29DE7F2-E890-4744-88DD-A75F5E300513}"/>
+              </a:ext>
+            </a:extLst>
+          </p:cNvPr>
+          <p:cNvSpPr>
+            <a:spLocks noGrp="1"/>
+          </p:cNvSpPr>
+          <p:nvPr>
+            <p:ph type="ctrTitle"/>
+          </p:nvPr>
+        </p:nvSpPr>
+        <p:spPr>
+          <a:xfrm>
+            <a:off x="6991350" y="2571235"/>
+            <a:ext cx="4179570" cy="1715531"/>
           </a:xfrm>
         </p:spPr>
         <p:txBody>
@@ -35182,326 +35484,15 @@
           <a:p>
             <a:r>
               <a:rPr lang="en-US" dirty="0"/>
-              <a:t>BUSINESS MODEL</a:t>
-            </a:r>
-          </a:p>
-        </p:txBody>
-      </p:sp>
-      <p:sp>
-        <p:nvSpPr>
-          <p:cNvPr id="6" name="Text Placeholder 5">
-            <a:extLst>
-              <a:ext uri="{FF2B5EF4-FFF2-40B4-BE49-F238E27FC236}">
-                <a16:creationId xmlns:a16="http://schemas.microsoft.com/office/drawing/2014/main" id="{7640DF9D-0C9E-4C5D-9635-6B4DE10CCEE5}"/>
-              </a:ext>
-            </a:extLst>
-          </p:cNvPr>
-          <p:cNvSpPr>
-            <a:spLocks noGrp="1"/>
-          </p:cNvSpPr>
-          <p:nvPr>
-            <p:ph type="body" sz="quarter" idx="13"/>
-          </p:nvPr>
-        </p:nvSpPr>
-        <p:spPr>
-          <a:xfrm>
-            <a:off x="5922254" y="2469515"/>
-            <a:ext cx="5433204" cy="365125"/>
-          </a:xfrm>
-        </p:spPr>
-        <p:txBody>
-          <a:bodyPr vert="horz" lIns="91440" tIns="45720" rIns="91440" bIns="45720" rtlCol="0" anchor="t">
-            <a:noAutofit/>
-          </a:bodyPr>
-          <a:lstStyle/>
-          <a:p>
-            <a:r>
-              <a:rPr lang="en-US" noProof="1"/>
-              <a:t>ABSTRACT</a:t>
-            </a:r>
-          </a:p>
-        </p:txBody>
-      </p:sp>
-      <p:sp>
-        <p:nvSpPr>
-          <p:cNvPr id="7" name="Text Placeholder 6">
-            <a:extLst>
-              <a:ext uri="{FF2B5EF4-FFF2-40B4-BE49-F238E27FC236}">
-                <a16:creationId xmlns:a16="http://schemas.microsoft.com/office/drawing/2014/main" id="{40297407-CE4E-4284-879D-AEC395713625}"/>
-              </a:ext>
-            </a:extLst>
-          </p:cNvPr>
-          <p:cNvSpPr>
-            <a:spLocks noGrp="1"/>
-          </p:cNvSpPr>
-          <p:nvPr>
-            <p:ph type="body" sz="quarter" idx="15"/>
-          </p:nvPr>
-        </p:nvSpPr>
-        <p:spPr>
-          <a:xfrm>
-            <a:off x="5921828" y="2798940"/>
-            <a:ext cx="5431971" cy="557950"/>
-          </a:xfrm>
-        </p:spPr>
-        <p:txBody>
-          <a:bodyPr>
-            <a:normAutofit/>
-          </a:bodyPr>
-          <a:lstStyle/>
-          <a:p>
-            <a:r>
-              <a:rPr lang="en-US" noProof="1"/>
-              <a:t>We based our research on market trends and social media</a:t>
-            </a:r>
-          </a:p>
-        </p:txBody>
-      </p:sp>
-      <p:sp>
-        <p:nvSpPr>
-          <p:cNvPr id="8" name="Text Placeholder 7">
-            <a:extLst>
-              <a:ext uri="{FF2B5EF4-FFF2-40B4-BE49-F238E27FC236}">
-                <a16:creationId xmlns:a16="http://schemas.microsoft.com/office/drawing/2014/main" id="{F5C3A7BE-F7FC-4942-A31A-491A8A806103}"/>
-              </a:ext>
-            </a:extLst>
-          </p:cNvPr>
-          <p:cNvSpPr>
-            <a:spLocks noGrp="1"/>
-          </p:cNvSpPr>
-          <p:nvPr>
-            <p:ph type="body" sz="quarter" idx="23"/>
-          </p:nvPr>
-        </p:nvSpPr>
-        <p:spPr>
-          <a:xfrm>
-            <a:off x="5922254" y="3569311"/>
-            <a:ext cx="5433204" cy="365125"/>
-          </a:xfrm>
-        </p:spPr>
-        <p:txBody>
-          <a:bodyPr vert="horz" lIns="91440" tIns="45720" rIns="91440" bIns="45720" rtlCol="0" anchor="t">
-            <a:noAutofit/>
-          </a:bodyPr>
-          <a:lstStyle/>
-          <a:p>
-            <a:r>
-              <a:rPr lang="en-US" noProof="1"/>
-              <a:t>DESIGN</a:t>
-            </a:r>
-          </a:p>
-        </p:txBody>
-      </p:sp>
-      <p:sp>
-        <p:nvSpPr>
-          <p:cNvPr id="9" name="Text Placeholder 8">
-            <a:extLst>
-              <a:ext uri="{FF2B5EF4-FFF2-40B4-BE49-F238E27FC236}">
-                <a16:creationId xmlns:a16="http://schemas.microsoft.com/office/drawing/2014/main" id="{95CCE699-03D1-4642-B46A-B14EF17DA183}"/>
-              </a:ext>
-            </a:extLst>
-          </p:cNvPr>
-          <p:cNvSpPr>
-            <a:spLocks noGrp="1"/>
-          </p:cNvSpPr>
-          <p:nvPr>
-            <p:ph type="body" sz="quarter" idx="24"/>
-          </p:nvPr>
-        </p:nvSpPr>
-        <p:spPr>
-          <a:xfrm>
-            <a:off x="5921828" y="3898736"/>
-            <a:ext cx="5431971" cy="557950"/>
-          </a:xfrm>
-        </p:spPr>
-        <p:txBody>
-          <a:bodyPr>
-            <a:normAutofit/>
-          </a:bodyPr>
-          <a:lstStyle/>
-          <a:p>
-            <a:r>
-              <a:rPr lang="en-US" noProof="1"/>
-              <a:t>We believe people need more products specifically dedicated to this niche market</a:t>
-            </a:r>
-          </a:p>
-        </p:txBody>
-      </p:sp>
-      <p:sp>
-        <p:nvSpPr>
-          <p:cNvPr id="10" name="Text Placeholder 9">
-            <a:extLst>
-              <a:ext uri="{FF2B5EF4-FFF2-40B4-BE49-F238E27FC236}">
-                <a16:creationId xmlns:a16="http://schemas.microsoft.com/office/drawing/2014/main" id="{BC1DF189-6F2F-4C21-88CC-C82D3D0D147B}"/>
-              </a:ext>
-            </a:extLst>
-          </p:cNvPr>
-          <p:cNvSpPr>
-            <a:spLocks noGrp="1"/>
-          </p:cNvSpPr>
-          <p:nvPr>
-            <p:ph type="body" sz="quarter" idx="25"/>
-          </p:nvPr>
-        </p:nvSpPr>
-        <p:spPr>
-          <a:xfrm>
-            <a:off x="5922254" y="4669107"/>
-            <a:ext cx="5433204" cy="365125"/>
-          </a:xfrm>
-        </p:spPr>
-        <p:txBody>
-          <a:bodyPr vert="horz" lIns="91440" tIns="45720" rIns="91440" bIns="45720" rtlCol="0" anchor="t">
-            <a:normAutofit lnSpcReduction="10000"/>
-          </a:bodyPr>
-          <a:lstStyle/>
-          <a:p>
-            <a:r>
-              <a:rPr lang="en-US" noProof="1"/>
-              <a:t>RESEARCH</a:t>
-            </a:r>
-          </a:p>
-        </p:txBody>
-      </p:sp>
-      <p:sp>
-        <p:nvSpPr>
-          <p:cNvPr id="5" name="Text Placeholder 4">
-            <a:extLst>
-              <a:ext uri="{FF2B5EF4-FFF2-40B4-BE49-F238E27FC236}">
-                <a16:creationId xmlns:a16="http://schemas.microsoft.com/office/drawing/2014/main" id="{06E82690-B145-4D4F-B2D1-0B2A8C50FD71}"/>
-              </a:ext>
-            </a:extLst>
-          </p:cNvPr>
-          <p:cNvSpPr>
-            <a:spLocks noGrp="1"/>
-          </p:cNvSpPr>
-          <p:nvPr>
-            <p:ph type="body" sz="quarter" idx="26"/>
-          </p:nvPr>
-        </p:nvSpPr>
-        <p:spPr>
-          <a:xfrm>
-            <a:off x="5921828" y="4998532"/>
-            <a:ext cx="5431971" cy="557950"/>
-          </a:xfrm>
-        </p:spPr>
-        <p:txBody>
-          <a:bodyPr>
-            <a:normAutofit/>
-          </a:bodyPr>
-          <a:lstStyle/>
-          <a:p>
-            <a:r>
-              <a:rPr lang="en-US" noProof="1"/>
-              <a:t>Minimalist and easy to use </a:t>
-            </a:r>
-          </a:p>
-        </p:txBody>
-      </p:sp>
-      <p:sp>
-        <p:nvSpPr>
-          <p:cNvPr id="32" name="Date Placeholder 31">
-            <a:extLst>
-              <a:ext uri="{FF2B5EF4-FFF2-40B4-BE49-F238E27FC236}">
-                <a16:creationId xmlns:a16="http://schemas.microsoft.com/office/drawing/2014/main" id="{D5DB19F8-B538-4965-BA90-ED372B99F5DC}"/>
-              </a:ext>
-            </a:extLst>
-          </p:cNvPr>
-          <p:cNvSpPr>
-            <a:spLocks noGrp="1"/>
-          </p:cNvSpPr>
-          <p:nvPr>
-            <p:ph type="dt" sz="half" idx="20"/>
-          </p:nvPr>
-        </p:nvSpPr>
-        <p:spPr>
-          <a:xfrm>
-            <a:off x="5919680" y="6356350"/>
-            <a:ext cx="947516" cy="365125"/>
-          </a:xfrm>
-        </p:spPr>
-        <p:txBody>
-          <a:bodyPr/>
-          <a:lstStyle/>
-          <a:p>
-            <a:r>
-              <a:rPr lang="en-US" dirty="0"/>
-              <a:t>20XX</a:t>
-            </a:r>
-          </a:p>
-        </p:txBody>
-      </p:sp>
-      <p:sp>
-        <p:nvSpPr>
-          <p:cNvPr id="3" name="Footer Placeholder 2">
-            <a:extLst>
-              <a:ext uri="{FF2B5EF4-FFF2-40B4-BE49-F238E27FC236}">
-                <a16:creationId xmlns:a16="http://schemas.microsoft.com/office/drawing/2014/main" id="{005C44B1-BA82-483C-BD91-F89067442F9E}"/>
-              </a:ext>
-            </a:extLst>
-          </p:cNvPr>
-          <p:cNvSpPr>
-            <a:spLocks noGrp="1"/>
-          </p:cNvSpPr>
-          <p:nvPr>
-            <p:ph type="ftr" sz="quarter" idx="21"/>
-          </p:nvPr>
-        </p:nvSpPr>
-        <p:spPr>
-          <a:xfrm>
-            <a:off x="7161955" y="6356350"/>
-            <a:ext cx="3243942" cy="365125"/>
-          </a:xfrm>
-        </p:spPr>
-        <p:txBody>
-          <a:bodyPr/>
-          <a:lstStyle/>
-          <a:p>
-            <a:r>
-              <a:rPr lang="en-US" dirty="0"/>
-              <a:t>Pitch Deck</a:t>
-            </a:r>
-          </a:p>
-        </p:txBody>
-      </p:sp>
-      <p:sp>
-        <p:nvSpPr>
-          <p:cNvPr id="4" name="Slide Number Placeholder 3">
-            <a:extLst>
-              <a:ext uri="{FF2B5EF4-FFF2-40B4-BE49-F238E27FC236}">
-                <a16:creationId xmlns:a16="http://schemas.microsoft.com/office/drawing/2014/main" id="{79ED4A67-3A46-4F54-A12A-EAE1B53E6457}"/>
-              </a:ext>
-            </a:extLst>
-          </p:cNvPr>
-          <p:cNvSpPr>
-            <a:spLocks noGrp="1"/>
-          </p:cNvSpPr>
-          <p:nvPr>
-            <p:ph type="sldNum" sz="quarter" idx="22"/>
-          </p:nvPr>
-        </p:nvSpPr>
-        <p:spPr>
-          <a:xfrm>
-            <a:off x="10700656" y="6356350"/>
-            <a:ext cx="653143" cy="365125"/>
-          </a:xfrm>
-        </p:spPr>
-        <p:txBody>
-          <a:bodyPr/>
-          <a:lstStyle/>
-          <a:p>
-            <a:fld id="{19B51A1E-902D-48AF-9020-955120F399B6}" type="slidenum">
-              <a:rPr lang="en-US" smtClean="0"/>
-              <a:pPr/>
-              <a:t>8</a:t>
-            </a:fld>
-            <a:endParaRPr lang="en-US" dirty="0"/>
+              <a:t>COMPANY OVERVIEW</a:t>
+            </a:r>
           </a:p>
         </p:txBody>
       </p:sp>
     </p:spTree>
     <p:extLst>
       <p:ext uri="{BB962C8B-B14F-4D97-AF65-F5344CB8AC3E}">
-        <p14:creationId xmlns:p14="http://schemas.microsoft.com/office/powerpoint/2010/main" val="2069393026"/>
+        <p14:creationId xmlns:p14="http://schemas.microsoft.com/office/powerpoint/2010/main" val="707789176"/>
       </p:ext>
     </p:extLst>
   </p:cSld>
@@ -35533,7 +35524,7 @@
           <p:cNvPr id="2" name="Title 1">
             <a:extLst>
               <a:ext uri="{FF2B5EF4-FFF2-40B4-BE49-F238E27FC236}">
-                <a16:creationId xmlns:a16="http://schemas.microsoft.com/office/drawing/2014/main" id="{5CE54ABB-4929-4810-950B-2DAEA0A5BAB4}"/>
+                <a16:creationId xmlns:a16="http://schemas.microsoft.com/office/drawing/2014/main" id="{8A4E0A63-A388-49B1-A04E-27CE9BD622EF}"/>
               </a:ext>
             </a:extLst>
           </p:cNvPr>
@@ -35546,8 +35537,8 @@
         </p:nvSpPr>
         <p:spPr>
           <a:xfrm>
-            <a:off x="1885156" y="892177"/>
-            <a:ext cx="8421688" cy="1325563"/>
+            <a:off x="5920169" y="1152771"/>
+            <a:ext cx="5431971" cy="846301"/>
           </a:xfrm>
         </p:spPr>
         <p:txBody>
@@ -35556,228 +35547,241 @@
           <a:p>
             <a:r>
               <a:rPr lang="en-US" dirty="0"/>
-              <a:t>MARKET OVERVIEW</a:t>
-            </a:r>
-          </a:p>
-        </p:txBody>
-      </p:sp>
-      <p:sp>
-        <p:nvSpPr>
-          <p:cNvPr id="4" name="Text Placeholder 3">
-            <a:extLst>
-              <a:ext uri="{FF2B5EF4-FFF2-40B4-BE49-F238E27FC236}">
-                <a16:creationId xmlns:a16="http://schemas.microsoft.com/office/drawing/2014/main" id="{A112B089-A8F9-45B1-BE6E-EAC10163F082}"/>
-              </a:ext>
-            </a:extLst>
-          </p:cNvPr>
-          <p:cNvSpPr>
-            <a:spLocks noGrp="1"/>
-          </p:cNvSpPr>
-          <p:nvPr>
-            <p:ph type="body" idx="1"/>
-          </p:nvPr>
-        </p:nvSpPr>
-        <p:spPr>
-          <a:xfrm>
-            <a:off x="1243104" y="2776936"/>
-            <a:ext cx="2882475" cy="823912"/>
-          </a:xfrm>
-        </p:spPr>
-        <p:txBody>
-          <a:bodyPr/>
+              <a:t>BUSINESS MODEL</a:t>
+            </a:r>
+          </a:p>
+        </p:txBody>
+      </p:sp>
+      <p:sp>
+        <p:nvSpPr>
+          <p:cNvPr id="6" name="Text Placeholder 5">
+            <a:extLst>
+              <a:ext uri="{FF2B5EF4-FFF2-40B4-BE49-F238E27FC236}">
+                <a16:creationId xmlns:a16="http://schemas.microsoft.com/office/drawing/2014/main" id="{7640DF9D-0C9E-4C5D-9635-6B4DE10CCEE5}"/>
+              </a:ext>
+            </a:extLst>
+          </p:cNvPr>
+          <p:cNvSpPr>
+            <a:spLocks noGrp="1"/>
+          </p:cNvSpPr>
+          <p:nvPr>
+            <p:ph type="body" sz="quarter" idx="13"/>
+          </p:nvPr>
+        </p:nvSpPr>
+        <p:spPr>
+          <a:xfrm>
+            <a:off x="5922254" y="2469515"/>
+            <a:ext cx="5433204" cy="365125"/>
+          </a:xfrm>
+        </p:spPr>
+        <p:txBody>
+          <a:bodyPr vert="horz" lIns="91440" tIns="45720" rIns="91440" bIns="45720" rtlCol="0" anchor="t">
+            <a:noAutofit/>
+          </a:bodyPr>
           <a:lstStyle/>
           <a:p>
             <a:r>
-              <a:rPr lang="en-US" dirty="0"/>
-              <a:t>$3 Billion</a:t>
-            </a:r>
-          </a:p>
-        </p:txBody>
-      </p:sp>
-      <p:sp>
-        <p:nvSpPr>
-          <p:cNvPr id="7" name="Content Placeholder 6">
-            <a:extLst>
-              <a:ext uri="{FF2B5EF4-FFF2-40B4-BE49-F238E27FC236}">
-                <a16:creationId xmlns:a16="http://schemas.microsoft.com/office/drawing/2014/main" id="{6B35F89A-6CDF-41F7-BD87-18B45BD7330B}"/>
-              </a:ext>
-            </a:extLst>
-          </p:cNvPr>
-          <p:cNvSpPr>
-            <a:spLocks noGrp="1"/>
-          </p:cNvSpPr>
-          <p:nvPr>
-            <p:ph sz="half" idx="2"/>
-          </p:nvPr>
-        </p:nvSpPr>
-        <p:spPr>
-          <a:xfrm>
-            <a:off x="1243104" y="3834606"/>
-            <a:ext cx="2882475" cy="1997867"/>
-          </a:xfrm>
-        </p:spPr>
-        <p:txBody>
-          <a:bodyPr vert="horz" lIns="91440" tIns="45720" rIns="91440" bIns="45720" rtlCol="0" anchor="t">
+              <a:rPr lang="en-US" noProof="1"/>
+              <a:t>ABSTRACT</a:t>
+            </a:r>
+          </a:p>
+        </p:txBody>
+      </p:sp>
+      <p:sp>
+        <p:nvSpPr>
+          <p:cNvPr id="7" name="Text Placeholder 6">
+            <a:extLst>
+              <a:ext uri="{FF2B5EF4-FFF2-40B4-BE49-F238E27FC236}">
+                <a16:creationId xmlns:a16="http://schemas.microsoft.com/office/drawing/2014/main" id="{40297407-CE4E-4284-879D-AEC395713625}"/>
+              </a:ext>
+            </a:extLst>
+          </p:cNvPr>
+          <p:cNvSpPr>
+            <a:spLocks noGrp="1"/>
+          </p:cNvSpPr>
+          <p:nvPr>
+            <p:ph type="body" sz="quarter" idx="15"/>
+          </p:nvPr>
+        </p:nvSpPr>
+        <p:spPr>
+          <a:xfrm>
+            <a:off x="5921828" y="2798940"/>
+            <a:ext cx="5431971" cy="557950"/>
+          </a:xfrm>
+        </p:spPr>
+        <p:txBody>
+          <a:bodyPr>
             <a:normAutofit/>
           </a:bodyPr>
           <a:lstStyle/>
           <a:p>
             <a:r>
               <a:rPr lang="en-US" noProof="1"/>
-              <a:t>Freedom to invent</a:t>
-            </a:r>
-            <a:endParaRPr lang="en-US" dirty="0"/>
-          </a:p>
+              <a:t>We based our research on market trends and social media</a:t>
+            </a:r>
+          </a:p>
+        </p:txBody>
+      </p:sp>
+      <p:sp>
+        <p:nvSpPr>
+          <p:cNvPr id="8" name="Text Placeholder 7">
+            <a:extLst>
+              <a:ext uri="{FF2B5EF4-FFF2-40B4-BE49-F238E27FC236}">
+                <a16:creationId xmlns:a16="http://schemas.microsoft.com/office/drawing/2014/main" id="{F5C3A7BE-F7FC-4942-A31A-491A8A806103}"/>
+              </a:ext>
+            </a:extLst>
+          </p:cNvPr>
+          <p:cNvSpPr>
+            <a:spLocks noGrp="1"/>
+          </p:cNvSpPr>
+          <p:nvPr>
+            <p:ph type="body" sz="quarter" idx="23"/>
+          </p:nvPr>
+        </p:nvSpPr>
+        <p:spPr>
+          <a:xfrm>
+            <a:off x="5922254" y="3569311"/>
+            <a:ext cx="5433204" cy="365125"/>
+          </a:xfrm>
+        </p:spPr>
+        <p:txBody>
+          <a:bodyPr vert="horz" lIns="91440" tIns="45720" rIns="91440" bIns="45720" rtlCol="0" anchor="t">
+            <a:noAutofit/>
+          </a:bodyPr>
+          <a:lstStyle/>
           <a:p>
             <a:r>
               <a:rPr lang="en-US" noProof="1"/>
-              <a:t>Selectively inclusive market</a:t>
-            </a:r>
-          </a:p>
-          <a:p>
-            <a:r>
-              <a:rPr lang="en-US" noProof="1"/>
-              <a:t>Serviceable available market</a:t>
-            </a:r>
-          </a:p>
-          <a:p>
-            <a:endParaRPr lang="en-US" noProof="1"/>
-          </a:p>
-        </p:txBody>
-      </p:sp>
-      <p:sp>
-        <p:nvSpPr>
-          <p:cNvPr id="6" name="Text Placeholder 5">
-            <a:extLst>
-              <a:ext uri="{FF2B5EF4-FFF2-40B4-BE49-F238E27FC236}">
-                <a16:creationId xmlns:a16="http://schemas.microsoft.com/office/drawing/2014/main" id="{0FE22F9B-4BF8-41DC-8F1C-836B546E59AD}"/>
-              </a:ext>
-            </a:extLst>
-          </p:cNvPr>
-          <p:cNvSpPr>
-            <a:spLocks noGrp="1"/>
-          </p:cNvSpPr>
-          <p:nvPr>
-            <p:ph type="body" sz="quarter" idx="3"/>
-          </p:nvPr>
-        </p:nvSpPr>
-        <p:spPr>
-          <a:xfrm>
-            <a:off x="4647665" y="2776936"/>
-            <a:ext cx="2896671" cy="823912"/>
-          </a:xfrm>
-        </p:spPr>
-        <p:txBody>
-          <a:bodyPr/>
-          <a:lstStyle/>
-          <a:p>
-            <a:r>
-              <a:rPr lang="en-US" dirty="0"/>
-              <a:t>$1 Billion</a:t>
-            </a:r>
-          </a:p>
-        </p:txBody>
-      </p:sp>
-      <p:sp>
-        <p:nvSpPr>
-          <p:cNvPr id="3" name="Text Placeholder 2">
-            <a:extLst>
-              <a:ext uri="{FF2B5EF4-FFF2-40B4-BE49-F238E27FC236}">
-                <a16:creationId xmlns:a16="http://schemas.microsoft.com/office/drawing/2014/main" id="{D5E1C399-8F48-44F5-9461-3C89866D4CE1}"/>
-              </a:ext>
-            </a:extLst>
-          </p:cNvPr>
-          <p:cNvSpPr>
-            <a:spLocks noGrp="1"/>
-          </p:cNvSpPr>
-          <p:nvPr>
-            <p:ph sz="quarter" idx="4"/>
-          </p:nvPr>
-        </p:nvSpPr>
-        <p:spPr>
-          <a:xfrm>
-            <a:off x="4647665" y="3834606"/>
-            <a:ext cx="2896671" cy="1997867"/>
-          </a:xfrm>
-        </p:spPr>
-        <p:txBody>
-          <a:bodyPr/>
-          <a:lstStyle/>
-          <a:p>
-            <a:r>
-              <a:rPr lang="en-US" dirty="0"/>
-              <a:t>Opportunity to build</a:t>
-            </a:r>
-          </a:p>
-          <a:p>
-            <a:r>
-              <a:rPr lang="en-US" dirty="0"/>
-              <a:t>Fully inclusive market</a:t>
-            </a:r>
-          </a:p>
-          <a:p>
-            <a:r>
-              <a:rPr lang="en-US" dirty="0"/>
-              <a:t>Total addressable market</a:t>
-            </a:r>
-          </a:p>
-        </p:txBody>
-      </p:sp>
-      <p:sp>
-        <p:nvSpPr>
-          <p:cNvPr id="5" name="Content Placeholder 4">
-            <a:extLst>
-              <a:ext uri="{FF2B5EF4-FFF2-40B4-BE49-F238E27FC236}">
-                <a16:creationId xmlns:a16="http://schemas.microsoft.com/office/drawing/2014/main" id="{CF515C5D-2CDB-4E66-B2B8-1451BC44247F}"/>
-              </a:ext>
-            </a:extLst>
-          </p:cNvPr>
-          <p:cNvSpPr>
-            <a:spLocks noGrp="1"/>
-          </p:cNvSpPr>
-          <p:nvPr>
-            <p:ph type="body" idx="13"/>
-          </p:nvPr>
-        </p:nvSpPr>
-        <p:spPr>
-          <a:xfrm>
-            <a:off x="8066421" y="2776936"/>
-            <a:ext cx="2882475" cy="823912"/>
-          </a:xfrm>
-        </p:spPr>
-        <p:txBody>
-          <a:bodyPr vert="horz" lIns="91440" tIns="45720" rIns="91440" bIns="45720" rtlCol="0" anchor="b">
+              <a:t>DESIGN</a:t>
+            </a:r>
+          </a:p>
+        </p:txBody>
+      </p:sp>
+      <p:sp>
+        <p:nvSpPr>
+          <p:cNvPr id="9" name="Text Placeholder 8">
+            <a:extLst>
+              <a:ext uri="{FF2B5EF4-FFF2-40B4-BE49-F238E27FC236}">
+                <a16:creationId xmlns:a16="http://schemas.microsoft.com/office/drawing/2014/main" id="{95CCE699-03D1-4642-B46A-B14EF17DA183}"/>
+              </a:ext>
+            </a:extLst>
+          </p:cNvPr>
+          <p:cNvSpPr>
+            <a:spLocks noGrp="1"/>
+          </p:cNvSpPr>
+          <p:nvPr>
+            <p:ph type="body" sz="quarter" idx="24"/>
+          </p:nvPr>
+        </p:nvSpPr>
+        <p:spPr>
+          <a:xfrm>
+            <a:off x="5921828" y="3898736"/>
+            <a:ext cx="5431971" cy="557950"/>
+          </a:xfrm>
+        </p:spPr>
+        <p:txBody>
+          <a:bodyPr>
             <a:normAutofit/>
           </a:bodyPr>
           <a:lstStyle/>
           <a:p>
             <a:r>
-              <a:rPr lang="en-US" dirty="0"/>
-              <a:t>$2 Billion</a:t>
-            </a:r>
-          </a:p>
-        </p:txBody>
-      </p:sp>
-      <p:sp>
-        <p:nvSpPr>
-          <p:cNvPr id="8" name="Text Placeholder 7">
-            <a:extLst>
-              <a:ext uri="{FF2B5EF4-FFF2-40B4-BE49-F238E27FC236}">
-                <a16:creationId xmlns:a16="http://schemas.microsoft.com/office/drawing/2014/main" id="{E92B9716-8D44-4864-8986-720957B34362}"/>
-              </a:ext>
-            </a:extLst>
-          </p:cNvPr>
-          <p:cNvSpPr>
-            <a:spLocks noGrp="1"/>
-          </p:cNvSpPr>
-          <p:nvPr>
-            <p:ph sz="half" idx="14"/>
-          </p:nvPr>
-        </p:nvSpPr>
-        <p:spPr>
-          <a:xfrm>
-            <a:off x="8066421" y="3834606"/>
-            <a:ext cx="2882475" cy="1997867"/>
+              <a:rPr lang="en-US" noProof="1"/>
+              <a:t>We believe people need more products specifically dedicated to this niche market</a:t>
+            </a:r>
+          </a:p>
+        </p:txBody>
+      </p:sp>
+      <p:sp>
+        <p:nvSpPr>
+          <p:cNvPr id="10" name="Text Placeholder 9">
+            <a:extLst>
+              <a:ext uri="{FF2B5EF4-FFF2-40B4-BE49-F238E27FC236}">
+                <a16:creationId xmlns:a16="http://schemas.microsoft.com/office/drawing/2014/main" id="{BC1DF189-6F2F-4C21-88CC-C82D3D0D147B}"/>
+              </a:ext>
+            </a:extLst>
+          </p:cNvPr>
+          <p:cNvSpPr>
+            <a:spLocks noGrp="1"/>
+          </p:cNvSpPr>
+          <p:nvPr>
+            <p:ph type="body" sz="quarter" idx="25"/>
+          </p:nvPr>
+        </p:nvSpPr>
+        <p:spPr>
+          <a:xfrm>
+            <a:off x="5922254" y="4669107"/>
+            <a:ext cx="5433204" cy="365125"/>
+          </a:xfrm>
+        </p:spPr>
+        <p:txBody>
+          <a:bodyPr vert="horz" lIns="91440" tIns="45720" rIns="91440" bIns="45720" rtlCol="0" anchor="t">
+            <a:normAutofit lnSpcReduction="10000"/>
+          </a:bodyPr>
+          <a:lstStyle/>
+          <a:p>
+            <a:r>
+              <a:rPr lang="en-US" noProof="1"/>
+              <a:t>RESEARCH</a:t>
+            </a:r>
+          </a:p>
+        </p:txBody>
+      </p:sp>
+      <p:sp>
+        <p:nvSpPr>
+          <p:cNvPr id="5" name="Text Placeholder 4">
+            <a:extLst>
+              <a:ext uri="{FF2B5EF4-FFF2-40B4-BE49-F238E27FC236}">
+                <a16:creationId xmlns:a16="http://schemas.microsoft.com/office/drawing/2014/main" id="{06E82690-B145-4D4F-B2D1-0B2A8C50FD71}"/>
+              </a:ext>
+            </a:extLst>
+          </p:cNvPr>
+          <p:cNvSpPr>
+            <a:spLocks noGrp="1"/>
+          </p:cNvSpPr>
+          <p:nvPr>
+            <p:ph type="body" sz="quarter" idx="26"/>
+          </p:nvPr>
+        </p:nvSpPr>
+        <p:spPr>
+          <a:xfrm>
+            <a:off x="5921828" y="4998532"/>
+            <a:ext cx="5431971" cy="557950"/>
+          </a:xfrm>
+        </p:spPr>
+        <p:txBody>
+          <a:bodyPr>
+            <a:normAutofit/>
+          </a:bodyPr>
+          <a:lstStyle/>
+          <a:p>
+            <a:r>
+              <a:rPr lang="en-US" noProof="1"/>
+              <a:t>Minimalist and easy to use </a:t>
+            </a:r>
+          </a:p>
+        </p:txBody>
+      </p:sp>
+      <p:sp>
+        <p:nvSpPr>
+          <p:cNvPr id="32" name="Date Placeholder 31">
+            <a:extLst>
+              <a:ext uri="{FF2B5EF4-FFF2-40B4-BE49-F238E27FC236}">
+                <a16:creationId xmlns:a16="http://schemas.microsoft.com/office/drawing/2014/main" id="{D5DB19F8-B538-4965-BA90-ED372B99F5DC}"/>
+              </a:ext>
+            </a:extLst>
+          </p:cNvPr>
+          <p:cNvSpPr>
+            <a:spLocks noGrp="1"/>
+          </p:cNvSpPr>
+          <p:nvPr>
+            <p:ph type="dt" sz="half" idx="20"/>
+          </p:nvPr>
+        </p:nvSpPr>
+        <p:spPr>
+          <a:xfrm>
+            <a:off x="5919680" y="6356350"/>
+            <a:ext cx="947516" cy="365125"/>
           </a:xfrm>
         </p:spPr>
         <p:txBody>
@@ -35785,48 +35789,32 @@
           <a:lstStyle/>
           <a:p>
             <a:r>
-              <a:rPr lang="en-US" noProof="1"/>
-              <a:t>Few competitors</a:t>
-            </a:r>
-          </a:p>
-          <a:p>
-            <a:r>
-              <a:rPr lang="en-US" noProof="1"/>
-              <a:t>Specifically targeted market</a:t>
-            </a:r>
-          </a:p>
-          <a:p>
-            <a:r>
-              <a:rPr lang="en-US" noProof="1"/>
-              <a:t>Serviceable obtainable market</a:t>
-            </a:r>
-            <a:endParaRPr lang="en-US" dirty="0"/>
-          </a:p>
-          <a:p>
-            <a:endParaRPr lang="en-US" dirty="0"/>
-          </a:p>
-        </p:txBody>
-      </p:sp>
-      <p:sp>
-        <p:nvSpPr>
-          <p:cNvPr id="9" name="Date Placeholder 8">
-            <a:extLst>
-              <a:ext uri="{FF2B5EF4-FFF2-40B4-BE49-F238E27FC236}">
-                <a16:creationId xmlns:a16="http://schemas.microsoft.com/office/drawing/2014/main" id="{7B78F7A0-88C5-4940-B21C-099F472F39F9}"/>
-              </a:ext>
-            </a:extLst>
-          </p:cNvPr>
-          <p:cNvSpPr>
-            <a:spLocks noGrp="1"/>
-          </p:cNvSpPr>
-          <p:nvPr>
-            <p:ph type="dt" sz="half" idx="10"/>
-          </p:nvPr>
-        </p:nvSpPr>
-        <p:spPr>
-          <a:xfrm>
-            <a:off x="838200" y="6356350"/>
-            <a:ext cx="2743200" cy="365125"/>
+              <a:rPr lang="en-US" dirty="0"/>
+              <a:t>20XX</a:t>
+            </a:r>
+          </a:p>
+        </p:txBody>
+      </p:sp>
+      <p:sp>
+        <p:nvSpPr>
+          <p:cNvPr id="3" name="Footer Placeholder 2">
+            <a:extLst>
+              <a:ext uri="{FF2B5EF4-FFF2-40B4-BE49-F238E27FC236}">
+                <a16:creationId xmlns:a16="http://schemas.microsoft.com/office/drawing/2014/main" id="{005C44B1-BA82-483C-BD91-F89067442F9E}"/>
+              </a:ext>
+            </a:extLst>
+          </p:cNvPr>
+          <p:cNvSpPr>
+            <a:spLocks noGrp="1"/>
+          </p:cNvSpPr>
+          <p:nvPr>
+            <p:ph type="ftr" sz="quarter" idx="21"/>
+          </p:nvPr>
+        </p:nvSpPr>
+        <p:spPr>
+          <a:xfrm>
+            <a:off x="7161955" y="6356350"/>
+            <a:ext cx="3243942" cy="365125"/>
           </a:xfrm>
         </p:spPr>
         <p:txBody>
@@ -35835,71 +35823,38 @@
           <a:p>
             <a:r>
               <a:rPr lang="en-US" dirty="0"/>
-              <a:t>20XX</a:t>
-            </a:r>
-          </a:p>
-        </p:txBody>
-      </p:sp>
-      <p:sp>
-        <p:nvSpPr>
-          <p:cNvPr id="10" name="Footer Placeholder 9">
-            <a:extLst>
-              <a:ext uri="{FF2B5EF4-FFF2-40B4-BE49-F238E27FC236}">
-                <a16:creationId xmlns:a16="http://schemas.microsoft.com/office/drawing/2014/main" id="{D2186069-FC8E-433D-9BB4-942220CE8CFB}"/>
-              </a:ext>
-            </a:extLst>
-          </p:cNvPr>
-          <p:cNvSpPr>
-            <a:spLocks noGrp="1"/>
-          </p:cNvSpPr>
-          <p:nvPr>
-            <p:ph type="ftr" sz="quarter" idx="11"/>
-          </p:nvPr>
-        </p:nvSpPr>
-        <p:spPr>
-          <a:xfrm>
-            <a:off x="4038600" y="6356350"/>
-            <a:ext cx="4114800" cy="365125"/>
+              <a:t>Pitch Deck</a:t>
+            </a:r>
+          </a:p>
+        </p:txBody>
+      </p:sp>
+      <p:sp>
+        <p:nvSpPr>
+          <p:cNvPr id="4" name="Slide Number Placeholder 3">
+            <a:extLst>
+              <a:ext uri="{FF2B5EF4-FFF2-40B4-BE49-F238E27FC236}">
+                <a16:creationId xmlns:a16="http://schemas.microsoft.com/office/drawing/2014/main" id="{79ED4A67-3A46-4F54-A12A-EAE1B53E6457}"/>
+              </a:ext>
+            </a:extLst>
+          </p:cNvPr>
+          <p:cNvSpPr>
+            <a:spLocks noGrp="1"/>
+          </p:cNvSpPr>
+          <p:nvPr>
+            <p:ph type="sldNum" sz="quarter" idx="22"/>
+          </p:nvPr>
+        </p:nvSpPr>
+        <p:spPr>
+          <a:xfrm>
+            <a:off x="10700656" y="6356350"/>
+            <a:ext cx="653143" cy="365125"/>
           </a:xfrm>
         </p:spPr>
         <p:txBody>
           <a:bodyPr/>
           <a:lstStyle/>
           <a:p>
-            <a:r>
-              <a:rPr lang="en-US" dirty="0"/>
-              <a:t>Pitch Deck</a:t>
-            </a:r>
-          </a:p>
-        </p:txBody>
-      </p:sp>
-      <p:sp>
-        <p:nvSpPr>
-          <p:cNvPr id="11" name="Slide Number Placeholder 10">
-            <a:extLst>
-              <a:ext uri="{FF2B5EF4-FFF2-40B4-BE49-F238E27FC236}">
-                <a16:creationId xmlns:a16="http://schemas.microsoft.com/office/drawing/2014/main" id="{BAD5B6F4-0A90-447A-A1AE-D75C934B6B29}"/>
-              </a:ext>
-            </a:extLst>
-          </p:cNvPr>
-          <p:cNvSpPr>
-            <a:spLocks noGrp="1"/>
-          </p:cNvSpPr>
-          <p:nvPr>
-            <p:ph type="sldNum" sz="quarter" idx="12"/>
-          </p:nvPr>
-        </p:nvSpPr>
-        <p:spPr>
-          <a:xfrm>
-            <a:off x="8610600" y="6356350"/>
-            <a:ext cx="2743200" cy="365125"/>
-          </a:xfrm>
-        </p:spPr>
-        <p:txBody>
-          <a:bodyPr/>
-          <a:lstStyle/>
-          <a:p>
-            <a:fld id="{B5CEABB6-07DC-46E8-9B57-56EC44A396E5}" type="slidenum">
+            <a:fld id="{19B51A1E-902D-48AF-9020-955120F399B6}" type="slidenum">
               <a:rPr lang="en-US" smtClean="0"/>
               <a:pPr/>
               <a:t>9</a:t>
@@ -35911,7 +35866,7 @@
     </p:spTree>
     <p:extLst>
       <p:ext uri="{BB962C8B-B14F-4D97-AF65-F5344CB8AC3E}">
-        <p14:creationId xmlns:p14="http://schemas.microsoft.com/office/powerpoint/2010/main" val="2121178069"/>
+        <p14:creationId xmlns:p14="http://schemas.microsoft.com/office/powerpoint/2010/main" val="2069393026"/>
       </p:ext>
     </p:extLst>
   </p:cSld>
@@ -36713,6 +36668,15 @@
 </file>
 
 <file path=customXml/item1.xml><?xml version="1.0" encoding="utf-8"?>
+<?mso-contentType ?>
+<FormTemplates xmlns="http://schemas.microsoft.com/sharepoint/v3/contenttype/forms">
+  <Display>DocumentLibraryForm</Display>
+  <Edit>DocumentLibraryForm</Edit>
+  <New>DocumentLibraryForm</New>
+</FormTemplates>
+</file>
+
+<file path=customXml/item2.xml><?xml version="1.0" encoding="utf-8"?>
 <p:properties xmlns:p="http://schemas.microsoft.com/office/2006/metadata/properties" xmlns:xsi="http://www.w3.org/2001/XMLSchema-instance" xmlns:pc="http://schemas.microsoft.com/office/infopath/2007/PartnerControls">
   <documentManagement>
     <_ip_UnifiedCompliancePolicyUIAction xmlns="http://schemas.microsoft.com/sharepoint/v3" xsi:nil="true"/>
@@ -36730,15 +36694,6 @@
     <MediaServiceKeyPoints xmlns="71af3243-3dd4-4a8d-8c0d-dd76da1f02a5" xsi:nil="true"/>
   </documentManagement>
 </p:properties>
-</file>
-
-<file path=customXml/item2.xml><?xml version="1.0" encoding="utf-8"?>
-<?mso-contentType ?>
-<FormTemplates xmlns="http://schemas.microsoft.com/sharepoint/v3/contenttype/forms">
-  <Display>DocumentLibraryForm</Display>
-  <Edit>DocumentLibraryForm</Edit>
-  <New>DocumentLibraryForm</New>
-</FormTemplates>
 </file>
 
 <file path=customXml/item3.xml><?xml version="1.0" encoding="utf-8"?>
@@ -37048,6 +37003,14 @@
 </file>
 
 <file path=customXml/itemProps1.xml><?xml version="1.0" encoding="utf-8"?>
+<ds:datastoreItem xmlns:ds="http://schemas.openxmlformats.org/officeDocument/2006/customXml" ds:itemID="{6966C46A-DC57-4209-80CD-9FE6C93151FF}">
+  <ds:schemaRefs>
+    <ds:schemaRef ds:uri="http://schemas.microsoft.com/sharepoint/v3/contenttype/forms"/>
+  </ds:schemaRefs>
+</ds:datastoreItem>
+</file>
+
+<file path=customXml/itemProps2.xml><?xml version="1.0" encoding="utf-8"?>
 <ds:datastoreItem xmlns:ds="http://schemas.openxmlformats.org/officeDocument/2006/customXml" ds:itemID="{BEFFFA3F-0FB5-4ED3-8906-A15B16577F44}">
   <ds:schemaRefs>
     <ds:schemaRef ds:uri="http://schemas.microsoft.com/office/2006/metadata/properties"/>
@@ -37055,14 +37018,6 @@
     <ds:schemaRef ds:uri="http://schemas.microsoft.com/sharepoint/v3"/>
     <ds:schemaRef ds:uri="71af3243-3dd4-4a8d-8c0d-dd76da1f02a5"/>
     <ds:schemaRef ds:uri="230e9df3-be65-4c73-a93b-d1236ebd677e"/>
-  </ds:schemaRefs>
-</ds:datastoreItem>
-</file>
-
-<file path=customXml/itemProps2.xml><?xml version="1.0" encoding="utf-8"?>
-<ds:datastoreItem xmlns:ds="http://schemas.openxmlformats.org/officeDocument/2006/customXml" ds:itemID="{6966C46A-DC57-4209-80CD-9FE6C93151FF}">
-  <ds:schemaRefs>
-    <ds:schemaRef ds:uri="http://schemas.microsoft.com/sharepoint/v3/contenttype/forms"/>
   </ds:schemaRefs>
 </ds:datastoreItem>
 </file>

--- a/Présentation-ASI.pptx
+++ b/Présentation-ASI.pptx
@@ -5,10 +5,10 @@
     <p:sldMasterId id="2147483666" r:id="rId4"/>
   </p:sldMasterIdLst>
   <p:notesMasterIdLst>
-    <p:notesMasterId r:id="rId20"/>
+    <p:notesMasterId r:id="rId25"/>
   </p:notesMasterIdLst>
   <p:handoutMasterIdLst>
-    <p:handoutMasterId r:id="rId21"/>
+    <p:handoutMasterId r:id="rId26"/>
   </p:handoutMasterIdLst>
   <p:sldIdLst>
     <p:sldId id="256" r:id="rId5"/>
@@ -16,26 +16,31 @@
     <p:sldId id="277" r:id="rId7"/>
     <p:sldId id="262" r:id="rId8"/>
     <p:sldId id="289" r:id="rId9"/>
-    <p:sldId id="264" r:id="rId10"/>
-    <p:sldId id="261" r:id="rId11"/>
-    <p:sldId id="258" r:id="rId12"/>
-    <p:sldId id="278" r:id="rId13"/>
-    <p:sldId id="266" r:id="rId14"/>
-    <p:sldId id="292" r:id="rId15"/>
-    <p:sldId id="268" r:id="rId16"/>
-    <p:sldId id="270" r:id="rId17"/>
-    <p:sldId id="282" r:id="rId18"/>
-    <p:sldId id="276" r:id="rId19"/>
+    <p:sldId id="296" r:id="rId10"/>
+    <p:sldId id="297" r:id="rId11"/>
+    <p:sldId id="264" r:id="rId12"/>
+    <p:sldId id="261" r:id="rId13"/>
+    <p:sldId id="258" r:id="rId14"/>
+    <p:sldId id="278" r:id="rId15"/>
+    <p:sldId id="266" r:id="rId16"/>
+    <p:sldId id="292" r:id="rId17"/>
+    <p:sldId id="298" r:id="rId18"/>
+    <p:sldId id="268" r:id="rId19"/>
+    <p:sldId id="299" r:id="rId20"/>
+    <p:sldId id="270" r:id="rId21"/>
+    <p:sldId id="282" r:id="rId22"/>
+    <p:sldId id="300" r:id="rId23"/>
+    <p:sldId id="276" r:id="rId24"/>
   </p:sldIdLst>
   <p:sldSz cx="12192000" cy="6858000"/>
   <p:notesSz cx="6858000" cy="9144000"/>
   <p:embeddedFontLst>
     <p:embeddedFont>
       <p:font typeface="Tenorite" panose="00000500000000000000" pitchFamily="2" charset="0"/>
-      <p:regular r:id="rId22"/>
-      <p:bold r:id="rId23"/>
-      <p:italic r:id="rId24"/>
-      <p:boldItalic r:id="rId25"/>
+      <p:regular r:id="rId27"/>
+      <p:bold r:id="rId28"/>
+      <p:italic r:id="rId29"/>
+      <p:boldItalic r:id="rId30"/>
     </p:embeddedFont>
   </p:embeddedFontLst>
   <p:defaultTextStyle>
@@ -347,7 +352,7 @@
           <a:p>
             <a:fld id="{4BF9A36D-7FAC-478F-9944-F324014F6FD1}" type="slidenum">
               <a:rPr lang="en-US" smtClean="0"/>
-              <a:t>‹#›</a:t>
+              <a:t>‹N°›</a:t>
             </a:fld>
             <a:endParaRPr lang="en-US" dirty="0"/>
           </a:p>
@@ -604,7 +609,7 @@
           <a:p>
             <a:fld id="{D4B9A9E5-4F7F-4A7D-9DE1-899232329269}" type="slidenum">
               <a:rPr lang="en-US" smtClean="0"/>
-              <a:t>‹#›</a:t>
+              <a:t>‹N°›</a:t>
             </a:fld>
             <a:endParaRPr lang="en-US" dirty="0"/>
           </a:p>
@@ -2025,7 +2030,7 @@
           <a:p>
             <a:fld id="{B5CEABB6-07DC-46E8-9B57-56EC44A396E5}" type="slidenum">
               <a:rPr lang="en-US" smtClean="0"/>
-              <a:t>‹#›</a:t>
+              <a:t>‹N°›</a:t>
             </a:fld>
             <a:endParaRPr lang="en-US" dirty="0"/>
           </a:p>
@@ -2654,7 +2659,7 @@
           <a:p>
             <a:fld id="{B5CEABB6-07DC-46E8-9B57-56EC44A396E5}" type="slidenum">
               <a:rPr lang="en-US" smtClean="0"/>
-              <a:t>‹#›</a:t>
+              <a:t>‹N°›</a:t>
             </a:fld>
             <a:endParaRPr lang="en-US" dirty="0"/>
           </a:p>
@@ -3270,7 +3275,7 @@
           <a:p>
             <a:fld id="{B5CEABB6-07DC-46E8-9B57-56EC44A396E5}" type="slidenum">
               <a:rPr lang="en-US" smtClean="0"/>
-              <a:t>‹#›</a:t>
+              <a:t>‹N°›</a:t>
             </a:fld>
             <a:endParaRPr lang="en-US" dirty="0"/>
           </a:p>
@@ -3715,7 +3720,7 @@
           <a:p>
             <a:fld id="{B5CEABB6-07DC-46E8-9B57-56EC44A396E5}" type="slidenum">
               <a:rPr lang="en-US" smtClean="0"/>
-              <a:t>‹#›</a:t>
+              <a:t>‹N°›</a:t>
             </a:fld>
             <a:endParaRPr lang="en-US" dirty="0"/>
           </a:p>
@@ -5264,7 +5269,7 @@
           <a:p>
             <a:fld id="{B5CEABB6-07DC-46E8-9B57-56EC44A396E5}" type="slidenum">
               <a:rPr lang="en-US" noProof="0" smtClean="0"/>
-              <a:t>‹#›</a:t>
+              <a:t>‹N°›</a:t>
             </a:fld>
             <a:endParaRPr lang="en-US" noProof="0" dirty="0"/>
           </a:p>
@@ -5530,7 +5535,7 @@
           <a:p>
             <a:fld id="{B5CEABB6-07DC-46E8-9B57-56EC44A396E5}" type="slidenum">
               <a:rPr lang="en-US" smtClean="0"/>
-              <a:t>‹#›</a:t>
+              <a:t>‹N°›</a:t>
             </a:fld>
             <a:endParaRPr lang="en-US" dirty="0"/>
           </a:p>
@@ -6666,7 +6671,7 @@
           <a:p>
             <a:fld id="{B5CEABB6-07DC-46E8-9B57-56EC44A396E5}" type="slidenum">
               <a:rPr lang="en-US" smtClean="0"/>
-              <a:t>‹#›</a:t>
+              <a:t>‹N°›</a:t>
             </a:fld>
             <a:endParaRPr lang="en-US" dirty="0"/>
           </a:p>
@@ -8751,7 +8756,7 @@
           <a:p>
             <a:fld id="{B5CEABB6-07DC-46E8-9B57-56EC44A396E5}" type="slidenum">
               <a:rPr lang="en-US" smtClean="0"/>
-              <a:t>‹#›</a:t>
+              <a:t>‹N°›</a:t>
             </a:fld>
             <a:endParaRPr lang="en-US" dirty="0"/>
           </a:p>
@@ -10326,7 +10331,7 @@
           <a:p>
             <a:fld id="{B5CEABB6-07DC-46E8-9B57-56EC44A396E5}" type="slidenum">
               <a:rPr lang="en-US" smtClean="0"/>
-              <a:t>‹#›</a:t>
+              <a:t>‹N°›</a:t>
             </a:fld>
             <a:endParaRPr lang="en-US" dirty="0"/>
           </a:p>
@@ -10738,7 +10743,7 @@
           <a:p>
             <a:fld id="{B5CEABB6-07DC-46E8-9B57-56EC44A396E5}" type="slidenum">
               <a:rPr lang="en-US" smtClean="0"/>
-              <a:t>‹#›</a:t>
+              <a:t>‹N°›</a:t>
             </a:fld>
             <a:endParaRPr lang="en-US" dirty="0"/>
           </a:p>
@@ -11130,7 +11135,7 @@
           <a:p>
             <a:fld id="{B5CEABB6-07DC-46E8-9B57-56EC44A396E5}" type="slidenum">
               <a:rPr lang="en-US" smtClean="0"/>
-              <a:t>‹#›</a:t>
+              <a:t>‹N°›</a:t>
             </a:fld>
             <a:endParaRPr lang="en-US" dirty="0"/>
           </a:p>
@@ -11444,7 +11449,7 @@
           <a:p>
             <a:fld id="{B5CEABB6-07DC-46E8-9B57-56EC44A396E5}" type="slidenum">
               <a:rPr lang="en-US" smtClean="0"/>
-              <a:t>‹#›</a:t>
+              <a:t>‹N°›</a:t>
             </a:fld>
             <a:endParaRPr lang="en-US" dirty="0"/>
           </a:p>
@@ -12305,7 +12310,7 @@
           <a:p>
             <a:fld id="{B5CEABB6-07DC-46E8-9B57-56EC44A396E5}" type="slidenum">
               <a:rPr lang="en-US" smtClean="0"/>
-              <a:t>‹#›</a:t>
+              <a:t>‹N°›</a:t>
             </a:fld>
             <a:endParaRPr lang="en-US" dirty="0"/>
           </a:p>
@@ -12916,7 +12921,7 @@
           <a:p>
             <a:fld id="{B5CEABB6-07DC-46E8-9B57-56EC44A396E5}" type="slidenum">
               <a:rPr lang="en-US" smtClean="0"/>
-              <a:t>‹#›</a:t>
+              <a:t>‹N°›</a:t>
             </a:fld>
             <a:endParaRPr lang="en-US" dirty="0"/>
           </a:p>
@@ -13688,7 +13693,7 @@
             <a:fld id="{B5CEABB6-07DC-46E8-9B57-56EC44A396E5}" type="slidenum">
               <a:rPr lang="en-US" smtClean="0"/>
               <a:pPr/>
-              <a:t>‹#›</a:t>
+              <a:t>‹N°›</a:t>
             </a:fld>
             <a:endParaRPr lang="en-US" dirty="0"/>
           </a:p>
@@ -14142,7 +14147,7 @@
           <a:p>
             <a:fld id="{B5CEABB6-07DC-46E8-9B57-56EC44A396E5}" type="slidenum">
               <a:rPr lang="en-US" smtClean="0"/>
-              <a:t>‹#›</a:t>
+              <a:t>‹N°›</a:t>
             </a:fld>
             <a:endParaRPr lang="en-US" dirty="0"/>
           </a:p>
@@ -14842,7 +14847,7 @@
             <a:fld id="{B5CEABB6-07DC-46E8-9B57-56EC44A396E5}" type="slidenum">
               <a:rPr lang="en-US" smtClean="0"/>
               <a:pPr/>
-              <a:t>‹#›</a:t>
+              <a:t>‹N°›</a:t>
             </a:fld>
             <a:endParaRPr lang="en-US" dirty="0"/>
           </a:p>
@@ -15686,7 +15691,7 @@
           <a:p>
             <a:fld id="{B5CEABB6-07DC-46E8-9B57-56EC44A396E5}" type="slidenum">
               <a:rPr lang="en-US" smtClean="0"/>
-              <a:t>‹#›</a:t>
+              <a:t>‹N°›</a:t>
             </a:fld>
             <a:endParaRPr lang="en-US" dirty="0"/>
           </a:p>
@@ -16063,7 +16068,7 @@
             <a:fld id="{B5CEABB6-07DC-46E8-9B57-56EC44A396E5}" type="slidenum">
               <a:rPr lang="en-US" smtClean="0"/>
               <a:pPr/>
-              <a:t>‹#›</a:t>
+              <a:t>‹N°›</a:t>
             </a:fld>
             <a:endParaRPr lang="en-US" dirty="0"/>
           </a:p>
@@ -17310,77 +17315,69 @@
       </p:grpSpPr>
       <p:sp>
         <p:nvSpPr>
-          <p:cNvPr id="2" name="Title 1">
-            <a:extLst>
-              <a:ext uri="{FF2B5EF4-FFF2-40B4-BE49-F238E27FC236}">
-                <a16:creationId xmlns:a16="http://schemas.microsoft.com/office/drawing/2014/main" id="{5CE54ABB-4929-4810-950B-2DAEA0A5BAB4}"/>
-              </a:ext>
-            </a:extLst>
-          </p:cNvPr>
-          <p:cNvSpPr>
-            <a:spLocks noGrp="1"/>
-          </p:cNvSpPr>
-          <p:nvPr>
-            <p:ph type="title"/>
-          </p:nvPr>
-        </p:nvSpPr>
-        <p:spPr>
-          <a:xfrm>
-            <a:off x="838200" y="621571"/>
-            <a:ext cx="4241795" cy="666800"/>
-          </a:xfrm>
-        </p:spPr>
-        <p:txBody>
-          <a:bodyPr>
+          <p:cNvPr id="3" name="Title 1">
+            <a:extLst>
+              <a:ext uri="{FF2B5EF4-FFF2-40B4-BE49-F238E27FC236}">
+                <a16:creationId xmlns:a16="http://schemas.microsoft.com/office/drawing/2014/main" id="{340DCA2B-A510-0E0E-7E3A-C4E3361A929C}"/>
+              </a:ext>
+            </a:extLst>
+          </p:cNvPr>
+          <p:cNvSpPr txBox="1">
+            <a:spLocks/>
+          </p:cNvSpPr>
+          <p:nvPr/>
+        </p:nvSpPr>
+        <p:spPr>
+          <a:xfrm>
+            <a:off x="1582984" y="167306"/>
+            <a:ext cx="9580745" cy="597993"/>
+          </a:xfrm>
+          <a:prstGeom prst="rect">
+            <a:avLst/>
+          </a:prstGeom>
+        </p:spPr>
+        <p:txBody>
+          <a:bodyPr vert="horz" lIns="91440" tIns="45720" rIns="91440" bIns="45720" rtlCol="0" anchor="ctr">
             <a:normAutofit/>
           </a:bodyPr>
-          <a:lstStyle/>
-          <a:p>
-            <a:r>
-              <a:rPr lang="en-US" sz="1800" dirty="0">
+          <a:lstStyle>
+            <a:lvl1pPr algn="l" defTabSz="914400" rtl="0" eaLnBrk="1" latinLnBrk="0" hangingPunct="1">
+              <a:lnSpc>
+                <a:spcPct val="90000"/>
+              </a:lnSpc>
+              <a:spcBef>
+                <a:spcPct val="0"/>
+              </a:spcBef>
+              <a:buNone/>
+              <a:defRPr sz="3600" kern="1200" cap="all" spc="150" baseline="0">
+                <a:solidFill>
+                  <a:schemeClr val="tx1">
+                    <a:lumMod val="75000"/>
+                    <a:lumOff val="25000"/>
+                  </a:schemeClr>
+                </a:solidFill>
+                <a:latin typeface="+mj-lt"/>
+                <a:ea typeface="+mj-ea"/>
+                <a:cs typeface="+mj-cs"/>
+              </a:defRPr>
+            </a:lvl1pPr>
+          </a:lstStyle>
+          <a:p>
+            <a:pPr algn="ctr"/>
+            <a:r>
+              <a:rPr lang="fr-FR" sz="2200" b="1" dirty="0">
+                <a:solidFill>
+                  <a:srgbClr val="0070C0"/>
+                </a:solidFill>
                 <a:latin typeface="Arial" panose="020B0604020202020204" pitchFamily="34" charset="0"/>
                 <a:cs typeface="Arial" panose="020B0604020202020204" pitchFamily="34" charset="0"/>
               </a:rPr>
-              <a:t>TEST DEPUIS UN AUTRE TERMINAL</a:t>
-            </a:r>
-          </a:p>
-        </p:txBody>
-      </p:sp>
-      <p:sp>
-        <p:nvSpPr>
-          <p:cNvPr id="11" name="Slide Number Placeholder 10">
-            <a:extLst>
-              <a:ext uri="{FF2B5EF4-FFF2-40B4-BE49-F238E27FC236}">
-                <a16:creationId xmlns:a16="http://schemas.microsoft.com/office/drawing/2014/main" id="{BAD5B6F4-0A90-447A-A1AE-D75C934B6B29}"/>
-              </a:ext>
-            </a:extLst>
-          </p:cNvPr>
-          <p:cNvSpPr>
-            <a:spLocks noGrp="1"/>
-          </p:cNvSpPr>
-          <p:nvPr>
-            <p:ph type="sldNum" sz="quarter" idx="12"/>
-          </p:nvPr>
-        </p:nvSpPr>
-        <p:spPr>
-          <a:xfrm>
-            <a:off x="8610600" y="6356350"/>
-            <a:ext cx="2743200" cy="365125"/>
-          </a:xfrm>
-        </p:spPr>
-        <p:txBody>
-          <a:bodyPr/>
-          <a:lstStyle/>
-          <a:p>
-            <a:fld id="{B5CEABB6-07DC-46E8-9B57-56EC44A396E5}" type="slidenum">
-              <a:rPr lang="en-US" smtClean="0">
-                <a:latin typeface="Arial" panose="020B0604020202020204" pitchFamily="34" charset="0"/>
-                <a:cs typeface="Arial" panose="020B0604020202020204" pitchFamily="34" charset="0"/>
-              </a:rPr>
-              <a:pPr/>
-              <a:t>10</a:t>
-            </a:fld>
-            <a:endParaRPr lang="en-US" dirty="0">
+              <a:t>2. DESACTIVATION DU LOGIN ROOT</a:t>
+            </a:r>
+            <a:endParaRPr lang="en-US" sz="2200" b="1" dirty="0">
+              <a:solidFill>
+                <a:srgbClr val="0070C0"/>
+              </a:solidFill>
               <a:latin typeface="Arial" panose="020B0604020202020204" pitchFamily="34" charset="0"/>
               <a:cs typeface="Arial" panose="020B0604020202020204" pitchFamily="34" charset="0"/>
             </a:endParaRPr>
@@ -17389,10 +17386,10 @@
       </p:sp>
       <p:pic>
         <p:nvPicPr>
-          <p:cNvPr id="38" name="Picture 37">
-            <a:extLst>
-              <a:ext uri="{FF2B5EF4-FFF2-40B4-BE49-F238E27FC236}">
-                <a16:creationId xmlns:a16="http://schemas.microsoft.com/office/drawing/2014/main" id="{E2EEA252-B5B6-B0CD-F8A0-EF283DB89AD1}"/>
+          <p:cNvPr id="6" name="Picture 5">
+            <a:extLst>
+              <a:ext uri="{FF2B5EF4-FFF2-40B4-BE49-F238E27FC236}">
+                <a16:creationId xmlns:a16="http://schemas.microsoft.com/office/drawing/2014/main" id="{5A09F8CA-08FC-4BE7-38B2-3449DF5D84F2}"/>
               </a:ext>
             </a:extLst>
           </p:cNvPr>
@@ -17409,18 +17406,487 @@
         </p:blipFill>
         <p:spPr>
           <a:xfrm>
-            <a:off x="838200" y="1666719"/>
-            <a:ext cx="5731510" cy="3314700"/>
+            <a:off x="493923" y="1802875"/>
+            <a:ext cx="5731510" cy="390525"/>
           </a:xfrm>
           <a:prstGeom prst="rect">
             <a:avLst/>
           </a:prstGeom>
         </p:spPr>
       </p:pic>
+      <p:pic>
+        <p:nvPicPr>
+          <p:cNvPr id="7" name="Picture 6">
+            <a:extLst>
+              <a:ext uri="{FF2B5EF4-FFF2-40B4-BE49-F238E27FC236}">
+                <a16:creationId xmlns:a16="http://schemas.microsoft.com/office/drawing/2014/main" id="{0D061A74-C6A0-B6DB-83F3-7B7E52E4D57B}"/>
+              </a:ext>
+            </a:extLst>
+          </p:cNvPr>
+          <p:cNvPicPr>
+            <a:picLocks noChangeAspect="1"/>
+          </p:cNvPicPr>
+          <p:nvPr/>
+        </p:nvPicPr>
+        <p:blipFill>
+          <a:blip r:embed="rId3"/>
+          <a:stretch>
+            <a:fillRect/>
+          </a:stretch>
+        </p:blipFill>
+        <p:spPr>
+          <a:xfrm>
+            <a:off x="493923" y="2266462"/>
+            <a:ext cx="5731510" cy="4396105"/>
+          </a:xfrm>
+          <a:prstGeom prst="rect">
+            <a:avLst/>
+          </a:prstGeom>
+        </p:spPr>
+      </p:pic>
+      <p:sp>
+        <p:nvSpPr>
+          <p:cNvPr id="2" name="Content Placeholder 2">
+            <a:extLst>
+              <a:ext uri="{FF2B5EF4-FFF2-40B4-BE49-F238E27FC236}">
+                <a16:creationId xmlns:a16="http://schemas.microsoft.com/office/drawing/2014/main" id="{6903A00F-85D1-E995-35C2-8C7CD8724DF9}"/>
+              </a:ext>
+            </a:extLst>
+          </p:cNvPr>
+          <p:cNvSpPr txBox="1">
+            <a:spLocks/>
+          </p:cNvSpPr>
+          <p:nvPr/>
+        </p:nvSpPr>
+        <p:spPr>
+          <a:xfrm>
+            <a:off x="436327" y="765299"/>
+            <a:ext cx="11578212" cy="1037576"/>
+          </a:xfrm>
+          <a:prstGeom prst="rect">
+            <a:avLst/>
+          </a:prstGeom>
+        </p:spPr>
+        <p:txBody>
+          <a:bodyPr vert="horz" lIns="91440" tIns="45720" rIns="91440" bIns="45720" rtlCol="0" anchor="t">
+            <a:noAutofit/>
+          </a:bodyPr>
+          <a:lstStyle>
+            <a:lvl1pPr marL="228600" indent="-228600" algn="l" defTabSz="914400" rtl="0" eaLnBrk="1" latinLnBrk="0" hangingPunct="1">
+              <a:lnSpc>
+                <a:spcPct val="90000"/>
+              </a:lnSpc>
+              <a:spcBef>
+                <a:spcPts val="1000"/>
+              </a:spcBef>
+              <a:buFont typeface="Arial" panose="020B0604020202020204" pitchFamily="34" charset="0"/>
+              <a:buChar char="•"/>
+              <a:defRPr sz="2800" kern="1200">
+                <a:solidFill>
+                  <a:schemeClr val="tx1">
+                    <a:lumMod val="75000"/>
+                    <a:lumOff val="25000"/>
+                  </a:schemeClr>
+                </a:solidFill>
+                <a:latin typeface="+mn-lt"/>
+                <a:ea typeface="+mn-ea"/>
+                <a:cs typeface="+mn-cs"/>
+              </a:defRPr>
+            </a:lvl1pPr>
+            <a:lvl2pPr marL="685800" indent="-228600" algn="l" defTabSz="914400" rtl="0" eaLnBrk="1" latinLnBrk="0" hangingPunct="1">
+              <a:lnSpc>
+                <a:spcPct val="90000"/>
+              </a:lnSpc>
+              <a:spcBef>
+                <a:spcPts val="500"/>
+              </a:spcBef>
+              <a:buFont typeface="Arial" panose="020B0604020202020204" pitchFamily="34" charset="0"/>
+              <a:buChar char="•"/>
+              <a:defRPr sz="2400" kern="1200">
+                <a:solidFill>
+                  <a:schemeClr val="tx1">
+                    <a:lumMod val="75000"/>
+                    <a:lumOff val="25000"/>
+                  </a:schemeClr>
+                </a:solidFill>
+                <a:latin typeface="+mn-lt"/>
+                <a:ea typeface="+mn-ea"/>
+                <a:cs typeface="+mn-cs"/>
+              </a:defRPr>
+            </a:lvl2pPr>
+            <a:lvl3pPr marL="1143000" indent="-228600" algn="l" defTabSz="914400" rtl="0" eaLnBrk="1" latinLnBrk="0" hangingPunct="1">
+              <a:lnSpc>
+                <a:spcPct val="90000"/>
+              </a:lnSpc>
+              <a:spcBef>
+                <a:spcPts val="500"/>
+              </a:spcBef>
+              <a:buFont typeface="Arial" panose="020B0604020202020204" pitchFamily="34" charset="0"/>
+              <a:buChar char="•"/>
+              <a:defRPr sz="2000" kern="1200">
+                <a:solidFill>
+                  <a:schemeClr val="tx1">
+                    <a:lumMod val="75000"/>
+                    <a:lumOff val="25000"/>
+                  </a:schemeClr>
+                </a:solidFill>
+                <a:latin typeface="+mn-lt"/>
+                <a:ea typeface="+mn-ea"/>
+                <a:cs typeface="+mn-cs"/>
+              </a:defRPr>
+            </a:lvl3pPr>
+            <a:lvl4pPr marL="1600200" indent="-228600" algn="l" defTabSz="914400" rtl="0" eaLnBrk="1" latinLnBrk="0" hangingPunct="1">
+              <a:lnSpc>
+                <a:spcPct val="90000"/>
+              </a:lnSpc>
+              <a:spcBef>
+                <a:spcPts val="500"/>
+              </a:spcBef>
+              <a:buFont typeface="Arial" panose="020B0604020202020204" pitchFamily="34" charset="0"/>
+              <a:buChar char="•"/>
+              <a:defRPr sz="1800" kern="1200">
+                <a:solidFill>
+                  <a:schemeClr val="tx1">
+                    <a:lumMod val="75000"/>
+                    <a:lumOff val="25000"/>
+                  </a:schemeClr>
+                </a:solidFill>
+                <a:latin typeface="+mn-lt"/>
+                <a:ea typeface="+mn-ea"/>
+                <a:cs typeface="+mn-cs"/>
+              </a:defRPr>
+            </a:lvl4pPr>
+            <a:lvl5pPr marL="2057400" indent="-228600" algn="l" defTabSz="914400" rtl="0" eaLnBrk="1" latinLnBrk="0" hangingPunct="1">
+              <a:lnSpc>
+                <a:spcPct val="90000"/>
+              </a:lnSpc>
+              <a:spcBef>
+                <a:spcPts val="500"/>
+              </a:spcBef>
+              <a:buFont typeface="Arial" panose="020B0604020202020204" pitchFamily="34" charset="0"/>
+              <a:buChar char="•"/>
+              <a:defRPr sz="1800" kern="1200">
+                <a:solidFill>
+                  <a:schemeClr val="tx1">
+                    <a:lumMod val="75000"/>
+                    <a:lumOff val="25000"/>
+                  </a:schemeClr>
+                </a:solidFill>
+                <a:latin typeface="+mn-lt"/>
+                <a:ea typeface="+mn-ea"/>
+                <a:cs typeface="+mn-cs"/>
+              </a:defRPr>
+            </a:lvl5pPr>
+            <a:lvl6pPr marL="2514600" indent="-228600" algn="l" defTabSz="914400" rtl="0" eaLnBrk="1" latinLnBrk="0" hangingPunct="1">
+              <a:lnSpc>
+                <a:spcPct val="90000"/>
+              </a:lnSpc>
+              <a:spcBef>
+                <a:spcPts val="500"/>
+              </a:spcBef>
+              <a:buFont typeface="Arial" panose="020B0604020202020204" pitchFamily="34" charset="0"/>
+              <a:buChar char="•"/>
+              <a:defRPr sz="1800" kern="1200">
+                <a:solidFill>
+                  <a:schemeClr val="tx1"/>
+                </a:solidFill>
+                <a:latin typeface="+mn-lt"/>
+                <a:ea typeface="+mn-ea"/>
+                <a:cs typeface="+mn-cs"/>
+              </a:defRPr>
+            </a:lvl6pPr>
+            <a:lvl7pPr marL="2971800" indent="-228600" algn="l" defTabSz="914400" rtl="0" eaLnBrk="1" latinLnBrk="0" hangingPunct="1">
+              <a:lnSpc>
+                <a:spcPct val="90000"/>
+              </a:lnSpc>
+              <a:spcBef>
+                <a:spcPts val="500"/>
+              </a:spcBef>
+              <a:buFont typeface="Arial" panose="020B0604020202020204" pitchFamily="34" charset="0"/>
+              <a:buChar char="•"/>
+              <a:defRPr sz="1800" kern="1200">
+                <a:solidFill>
+                  <a:schemeClr val="tx1"/>
+                </a:solidFill>
+                <a:latin typeface="+mn-lt"/>
+                <a:ea typeface="+mn-ea"/>
+                <a:cs typeface="+mn-cs"/>
+              </a:defRPr>
+            </a:lvl7pPr>
+            <a:lvl8pPr marL="3429000" indent="-228600" algn="l" defTabSz="914400" rtl="0" eaLnBrk="1" latinLnBrk="0" hangingPunct="1">
+              <a:lnSpc>
+                <a:spcPct val="90000"/>
+              </a:lnSpc>
+              <a:spcBef>
+                <a:spcPts val="500"/>
+              </a:spcBef>
+              <a:buFont typeface="Arial" panose="020B0604020202020204" pitchFamily="34" charset="0"/>
+              <a:buChar char="•"/>
+              <a:defRPr sz="1800" kern="1200">
+                <a:solidFill>
+                  <a:schemeClr val="tx1"/>
+                </a:solidFill>
+                <a:latin typeface="+mn-lt"/>
+                <a:ea typeface="+mn-ea"/>
+                <a:cs typeface="+mn-cs"/>
+              </a:defRPr>
+            </a:lvl8pPr>
+            <a:lvl9pPr marL="3886200" indent="-228600" algn="l" defTabSz="914400" rtl="0" eaLnBrk="1" latinLnBrk="0" hangingPunct="1">
+              <a:lnSpc>
+                <a:spcPct val="90000"/>
+              </a:lnSpc>
+              <a:spcBef>
+                <a:spcPts val="500"/>
+              </a:spcBef>
+              <a:buFont typeface="Arial" panose="020B0604020202020204" pitchFamily="34" charset="0"/>
+              <a:buChar char="•"/>
+              <a:defRPr sz="1800" kern="1200">
+                <a:solidFill>
+                  <a:schemeClr val="tx1"/>
+                </a:solidFill>
+                <a:latin typeface="+mn-lt"/>
+                <a:ea typeface="+mn-ea"/>
+                <a:cs typeface="+mn-cs"/>
+              </a:defRPr>
+            </a:lvl9pPr>
+          </a:lstStyle>
+          <a:p>
+            <a:pPr>
+              <a:buFont typeface="Wingdings" panose="05000000000000000000" pitchFamily="2" charset="2"/>
+              <a:buChar char="v"/>
+            </a:pPr>
+            <a:r>
+              <a:rPr lang="fr-FR" sz="1800" b="1" dirty="0">
+                <a:solidFill>
+                  <a:srgbClr val="0070C0"/>
+                </a:solidFill>
+                <a:latin typeface="Arial" panose="020B0604020202020204" pitchFamily="34" charset="0"/>
+                <a:cs typeface="Arial" panose="020B0604020202020204" pitchFamily="34" charset="0"/>
+              </a:rPr>
+              <a:t>Objectif</a:t>
+            </a:r>
+          </a:p>
+          <a:p>
+            <a:pPr marL="0" indent="0">
+              <a:buNone/>
+            </a:pPr>
+            <a:r>
+              <a:rPr lang="fr-FR" sz="1600" b="1" dirty="0">
+                <a:latin typeface="Arial" panose="020B0604020202020204" pitchFamily="34" charset="0"/>
+                <a:cs typeface="Arial" panose="020B0604020202020204" pitchFamily="34" charset="0"/>
+              </a:rPr>
+              <a:t>Le compte « root» est la cible principale des attaques automatisées. Le désactiver force les attaquants à deviner en plus le nom d'utilisateur, réduisant ainsi considérablement la surface d'attaque.</a:t>
+            </a:r>
+            <a:br>
+              <a:rPr lang="fr-FR" dirty="0"/>
+            </a:br>
+            <a:endParaRPr lang="fr-FR" dirty="0"/>
+          </a:p>
+          <a:p>
+            <a:pPr marL="0" indent="0">
+              <a:buNone/>
+            </a:pPr>
+            <a:endParaRPr lang="en-US" sz="1600" b="1" noProof="1">
+              <a:latin typeface="Arial" panose="020B0604020202020204" pitchFamily="34" charset="0"/>
+              <a:cs typeface="Arial" panose="020B0604020202020204" pitchFamily="34" charset="0"/>
+            </a:endParaRPr>
+          </a:p>
+        </p:txBody>
+      </p:sp>
+      <p:sp>
+        <p:nvSpPr>
+          <p:cNvPr id="8" name="ZoneTexte 7">
+            <a:extLst>
+              <a:ext uri="{FF2B5EF4-FFF2-40B4-BE49-F238E27FC236}">
+                <a16:creationId xmlns:a16="http://schemas.microsoft.com/office/drawing/2014/main" id="{96BFFE17-AA88-2892-EF26-0B1E822E3AB4}"/>
+              </a:ext>
+            </a:extLst>
+          </p:cNvPr>
+          <p:cNvSpPr txBox="1"/>
+          <p:nvPr/>
+        </p:nvSpPr>
+        <p:spPr>
+          <a:xfrm>
+            <a:off x="6559966" y="2528753"/>
+            <a:ext cx="5362105" cy="1800493"/>
+          </a:xfrm>
+          <a:prstGeom prst="rect">
+            <a:avLst/>
+          </a:prstGeom>
+          <a:noFill/>
+        </p:spPr>
+        <p:txBody>
+          <a:bodyPr wrap="square">
+            <a:spAutoFit/>
+          </a:bodyPr>
+          <a:lstStyle/>
+          <a:p>
+            <a:pPr algn="ctr">
+              <a:spcBef>
+                <a:spcPts val="300"/>
+              </a:spcBef>
+              <a:spcAft>
+                <a:spcPts val="300"/>
+              </a:spcAft>
+            </a:pPr>
+            <a:r>
+              <a:rPr lang="en-US" b="1" dirty="0">
+                <a:latin typeface="Arial" panose="020B0604020202020204" pitchFamily="34" charset="0"/>
+                <a:cs typeface="Arial" panose="020B0604020202020204" pitchFamily="34" charset="0"/>
+              </a:rPr>
+              <a:t>Modification de </a:t>
+            </a:r>
+            <a:r>
+              <a:rPr lang="en-US" b="1" dirty="0" err="1">
+                <a:latin typeface="Arial" panose="020B0604020202020204" pitchFamily="34" charset="0"/>
+                <a:cs typeface="Arial" panose="020B0604020202020204" pitchFamily="34" charset="0"/>
+              </a:rPr>
+              <a:t>ces</a:t>
+            </a:r>
+            <a:r>
+              <a:rPr lang="en-US" b="1" dirty="0">
+                <a:latin typeface="Arial" panose="020B0604020202020204" pitchFamily="34" charset="0"/>
+                <a:cs typeface="Arial" panose="020B0604020202020204" pitchFamily="34" charset="0"/>
+              </a:rPr>
+              <a:t> </a:t>
+            </a:r>
+            <a:r>
+              <a:rPr lang="en-US" b="1" dirty="0" err="1">
+                <a:latin typeface="Arial" panose="020B0604020202020204" pitchFamily="34" charset="0"/>
+                <a:cs typeface="Arial" panose="020B0604020202020204" pitchFamily="34" charset="0"/>
+              </a:rPr>
+              <a:t>lignes</a:t>
+            </a:r>
+            <a:r>
+              <a:rPr lang="en-US" b="1" dirty="0">
+                <a:latin typeface="Arial" panose="020B0604020202020204" pitchFamily="34" charset="0"/>
+                <a:cs typeface="Arial" panose="020B0604020202020204" pitchFamily="34" charset="0"/>
+              </a:rPr>
+              <a:t> dans le </a:t>
+            </a:r>
+            <a:r>
+              <a:rPr lang="en-US" b="1" dirty="0" err="1">
+                <a:latin typeface="Arial" panose="020B0604020202020204" pitchFamily="34" charset="0"/>
+                <a:cs typeface="Arial" panose="020B0604020202020204" pitchFamily="34" charset="0"/>
+              </a:rPr>
+              <a:t>fichier</a:t>
+            </a:r>
+            <a:r>
+              <a:rPr lang="en-US" b="1" dirty="0">
+                <a:latin typeface="Arial" panose="020B0604020202020204" pitchFamily="34" charset="0"/>
+                <a:cs typeface="Arial" panose="020B0604020202020204" pitchFamily="34" charset="0"/>
+              </a:rPr>
+              <a:t> </a:t>
+            </a:r>
+            <a:r>
+              <a:rPr lang="en-US" b="1" dirty="0" err="1">
+                <a:latin typeface="Arial" panose="020B0604020202020204" pitchFamily="34" charset="0"/>
+                <a:cs typeface="Arial" panose="020B0604020202020204" pitchFamily="34" charset="0"/>
+              </a:rPr>
+              <a:t>sshd</a:t>
+            </a:r>
+            <a:r>
+              <a:rPr lang="en-US" b="1" dirty="0">
+                <a:latin typeface="Arial" panose="020B0604020202020204" pitchFamily="34" charset="0"/>
+                <a:cs typeface="Arial" panose="020B0604020202020204" pitchFamily="34" charset="0"/>
+              </a:rPr>
+              <a:t>:</a:t>
+            </a:r>
+          </a:p>
+          <a:p>
+            <a:pPr marL="285750" indent="-285750">
+              <a:spcBef>
+                <a:spcPts val="300"/>
+              </a:spcBef>
+              <a:spcAft>
+                <a:spcPts val="300"/>
+              </a:spcAft>
+              <a:buFont typeface="Wingdings" panose="05000000000000000000" pitchFamily="2" charset="2"/>
+              <a:buChar char="ü"/>
+            </a:pPr>
+            <a:r>
+              <a:rPr lang="en-US" sz="2000" dirty="0" err="1">
+                <a:latin typeface="Arial" panose="020B0604020202020204" pitchFamily="34" charset="0"/>
+                <a:cs typeface="Arial" panose="020B0604020202020204" pitchFamily="34" charset="0"/>
+              </a:rPr>
+              <a:t>PermitRootlogin</a:t>
+            </a:r>
+            <a:r>
+              <a:rPr lang="en-US" sz="2000" dirty="0">
+                <a:latin typeface="Arial" panose="020B0604020202020204" pitchFamily="34" charset="0"/>
+                <a:cs typeface="Arial" panose="020B0604020202020204" pitchFamily="34" charset="0"/>
+              </a:rPr>
+              <a:t> no</a:t>
+            </a:r>
+          </a:p>
+          <a:p>
+            <a:pPr marL="285750" indent="-285750">
+              <a:spcBef>
+                <a:spcPts val="300"/>
+              </a:spcBef>
+              <a:spcAft>
+                <a:spcPts val="300"/>
+              </a:spcAft>
+              <a:buFont typeface="Wingdings" panose="05000000000000000000" pitchFamily="2" charset="2"/>
+              <a:buChar char="ü"/>
+            </a:pPr>
+            <a:r>
+              <a:rPr lang="en-US" sz="2000" dirty="0" err="1">
+                <a:latin typeface="Arial" panose="020B0604020202020204" pitchFamily="34" charset="0"/>
+                <a:cs typeface="Arial" panose="020B0604020202020204" pitchFamily="34" charset="0"/>
+              </a:rPr>
+              <a:t>PasswordAuthentication</a:t>
+            </a:r>
+            <a:r>
+              <a:rPr lang="en-US" sz="2000" dirty="0">
+                <a:latin typeface="Arial" panose="020B0604020202020204" pitchFamily="34" charset="0"/>
+                <a:cs typeface="Arial" panose="020B0604020202020204" pitchFamily="34" charset="0"/>
+              </a:rPr>
+              <a:t> no</a:t>
+            </a:r>
+          </a:p>
+          <a:p>
+            <a:pPr marL="285750" indent="-285750">
+              <a:spcBef>
+                <a:spcPts val="300"/>
+              </a:spcBef>
+              <a:spcAft>
+                <a:spcPts val="300"/>
+              </a:spcAft>
+              <a:buFont typeface="Wingdings" panose="05000000000000000000" pitchFamily="2" charset="2"/>
+              <a:buChar char="ü"/>
+            </a:pPr>
+            <a:r>
+              <a:rPr lang="en-US" sz="2000" dirty="0" err="1">
+                <a:latin typeface="Arial" panose="020B0604020202020204" pitchFamily="34" charset="0"/>
+                <a:cs typeface="Arial" panose="020B0604020202020204" pitchFamily="34" charset="0"/>
+              </a:rPr>
+              <a:t>PubkeyAuthentication</a:t>
+            </a:r>
+            <a:r>
+              <a:rPr lang="en-US" sz="2000" dirty="0">
+                <a:latin typeface="Arial" panose="020B0604020202020204" pitchFamily="34" charset="0"/>
+                <a:cs typeface="Arial" panose="020B0604020202020204" pitchFamily="34" charset="0"/>
+              </a:rPr>
+              <a:t> yes</a:t>
+            </a:r>
+            <a:br>
+              <a:rPr lang="en-US" dirty="0">
+                <a:latin typeface="Arial" panose="020B0604020202020204" pitchFamily="34" charset="0"/>
+                <a:cs typeface="Arial" panose="020B0604020202020204" pitchFamily="34" charset="0"/>
+              </a:rPr>
+            </a:br>
+            <a:endParaRPr lang="en-US" b="1" dirty="0">
+              <a:latin typeface="Arial" panose="020B0604020202020204" pitchFamily="34" charset="0"/>
+              <a:cs typeface="Arial" panose="020B0604020202020204" pitchFamily="34" charset="0"/>
+            </a:endParaRPr>
+          </a:p>
+        </p:txBody>
+      </p:sp>
     </p:spTree>
     <p:extLst>
       <p:ext uri="{BB962C8B-B14F-4D97-AF65-F5344CB8AC3E}">
-        <p14:creationId xmlns:p14="http://schemas.microsoft.com/office/powerpoint/2010/main" val="2121178069"/>
+        <p14:creationId xmlns:p14="http://schemas.microsoft.com/office/powerpoint/2010/main" val="707789176"/>
       </p:ext>
     </p:extLst>
   </p:cSld>
@@ -17449,152 +17915,109 @@
       </p:grpSpPr>
       <p:sp>
         <p:nvSpPr>
-          <p:cNvPr id="42" name="Title 41">
-            <a:extLst>
-              <a:ext uri="{FF2B5EF4-FFF2-40B4-BE49-F238E27FC236}">
-                <a16:creationId xmlns:a16="http://schemas.microsoft.com/office/drawing/2014/main" id="{D3D00670-C18D-06AA-433E-C6FFBC868317}"/>
-              </a:ext>
-            </a:extLst>
-          </p:cNvPr>
-          <p:cNvSpPr>
-            <a:spLocks noGrp="1"/>
-          </p:cNvSpPr>
-          <p:nvPr>
-            <p:ph type="ctrTitle"/>
-          </p:nvPr>
-        </p:nvSpPr>
-        <p:spPr>
-          <a:xfrm>
-            <a:off x="6303228" y="3869918"/>
-            <a:ext cx="5561246" cy="2653016"/>
-          </a:xfrm>
-        </p:spPr>
-        <p:txBody>
-          <a:bodyPr/>
+          <p:cNvPr id="10" name="Text Placeholder 9">
+            <a:extLst>
+              <a:ext uri="{FF2B5EF4-FFF2-40B4-BE49-F238E27FC236}">
+                <a16:creationId xmlns:a16="http://schemas.microsoft.com/office/drawing/2014/main" id="{BC1DF189-6F2F-4C21-88CC-C82D3D0D147B}"/>
+              </a:ext>
+            </a:extLst>
+          </p:cNvPr>
+          <p:cNvSpPr>
+            <a:spLocks noGrp="1"/>
+          </p:cNvSpPr>
+          <p:nvPr>
+            <p:ph type="body" sz="quarter" idx="25"/>
+          </p:nvPr>
+        </p:nvSpPr>
+        <p:spPr>
+          <a:xfrm>
+            <a:off x="6214009" y="2556888"/>
+            <a:ext cx="5667119" cy="1039495"/>
+          </a:xfrm>
+        </p:spPr>
+        <p:txBody>
+          <a:bodyPr vert="horz" lIns="91440" tIns="45720" rIns="91440" bIns="45720" rtlCol="0" anchor="t">
+            <a:normAutofit lnSpcReduction="10000"/>
+          </a:bodyPr>
           <a:lstStyle/>
           <a:p>
-            <a:r>
-              <a:rPr lang="en-US" sz="1800" dirty="0">
+            <a:pPr marL="285750" indent="-285750" algn="ctr">
+              <a:buFont typeface="Wingdings" panose="05000000000000000000" pitchFamily="2" charset="2"/>
+              <a:buChar char="v"/>
+            </a:pPr>
+            <a:r>
+              <a:rPr lang="fr-FR" sz="1400" b="1" cap="none" dirty="0">
+                <a:solidFill>
+                  <a:schemeClr val="tx1"/>
+                </a:solidFill>
                 <a:latin typeface="Arial" panose="020B0604020202020204" pitchFamily="34" charset="0"/>
                 <a:cs typeface="Arial" panose="020B0604020202020204" pitchFamily="34" charset="0"/>
               </a:rPr>
-              <a:t>Update du </a:t>
-            </a:r>
-            <a:r>
-              <a:rPr lang="en-US" sz="1800" dirty="0" err="1">
+              <a:t>Sur les versions récentes </a:t>
+            </a:r>
+            <a:r>
+              <a:rPr lang="fr-FR" sz="1400" b="1" cap="none" dirty="0" err="1">
+                <a:solidFill>
+                  <a:schemeClr val="tx1"/>
+                </a:solidFill>
                 <a:latin typeface="Arial" panose="020B0604020202020204" pitchFamily="34" charset="0"/>
                 <a:cs typeface="Arial" panose="020B0604020202020204" pitchFamily="34" charset="0"/>
               </a:rPr>
-              <a:t>serveur</a:t>
-            </a:r>
-            <a:br>
-              <a:rPr lang="en-US" sz="1800" dirty="0">
+              <a:t>d'ubuntu</a:t>
+            </a:r>
+            <a:r>
+              <a:rPr lang="fr-FR" sz="1400" b="1" cap="none" dirty="0">
+                <a:solidFill>
+                  <a:schemeClr val="tx1"/>
+                </a:solidFill>
                 <a:latin typeface="Arial" panose="020B0604020202020204" pitchFamily="34" charset="0"/>
                 <a:cs typeface="Arial" panose="020B0604020202020204" pitchFamily="34" charset="0"/>
               </a:rPr>
-            </a:br>
-            <a:r>
-              <a:rPr lang="en-US" sz="1800" dirty="0">
+              <a:t>, SSH est géré par un «  socket </a:t>
+            </a:r>
+            <a:r>
+              <a:rPr lang="fr-FR" sz="1400" b="1" cap="none" dirty="0" err="1">
+                <a:solidFill>
+                  <a:schemeClr val="tx1"/>
+                </a:solidFill>
                 <a:latin typeface="Arial" panose="020B0604020202020204" pitchFamily="34" charset="0"/>
                 <a:cs typeface="Arial" panose="020B0604020202020204" pitchFamily="34" charset="0"/>
               </a:rPr>
-              <a:t>Installation de fail2ban</a:t>
-            </a:r>
-            <a:br>
-              <a:rPr lang="en-US" sz="1800" dirty="0">
+              <a:t>systemd</a:t>
+            </a:r>
+            <a:r>
+              <a:rPr lang="fr-FR" sz="1400" b="1" cap="none" dirty="0">
+                <a:solidFill>
+                  <a:schemeClr val="tx1"/>
+                </a:solidFill>
                 <a:latin typeface="Arial" panose="020B0604020202020204" pitchFamily="34" charset="0"/>
                 <a:cs typeface="Arial" panose="020B0604020202020204" pitchFamily="34" charset="0"/>
               </a:rPr>
-            </a:br>
-            <a:r>
-              <a:rPr lang="en-US" sz="1800" dirty="0">
+              <a:t>  » qui contrôle le port, et non uniquement par `</a:t>
+            </a:r>
+            <a:r>
+              <a:rPr lang="fr-FR" sz="1400" b="1" cap="none" dirty="0" err="1">
+                <a:solidFill>
+                  <a:schemeClr val="tx1"/>
+                </a:solidFill>
                 <a:latin typeface="Arial" panose="020B0604020202020204" pitchFamily="34" charset="0"/>
                 <a:cs typeface="Arial" panose="020B0604020202020204" pitchFamily="34" charset="0"/>
               </a:rPr>
-              <a:t>creation du </a:t>
-            </a:r>
-            <a:r>
-              <a:rPr lang="en-US" sz="1800" dirty="0" err="1">
+              <a:t>sshd_config</a:t>
+            </a:r>
+            <a:r>
+              <a:rPr lang="fr-FR" sz="1400" b="1" cap="none" dirty="0">
+                <a:solidFill>
+                  <a:schemeClr val="tx1"/>
+                </a:solidFill>
                 <a:latin typeface="Arial" panose="020B0604020202020204" pitchFamily="34" charset="0"/>
                 <a:cs typeface="Arial" panose="020B0604020202020204" pitchFamily="34" charset="0"/>
               </a:rPr>
-              <a:t>fichier</a:t>
-            </a:r>
-            <a:r>
-              <a:rPr lang="en-US" sz="1800" dirty="0">
-                <a:latin typeface="Arial" panose="020B0604020202020204" pitchFamily="34" charset="0"/>
-                <a:cs typeface="Arial" panose="020B0604020202020204" pitchFamily="34" charset="0"/>
-              </a:rPr>
-              <a:t> de configuration local</a:t>
-            </a:r>
-            <a:br>
-              <a:rPr lang="en-US" sz="1800" dirty="0">
-                <a:latin typeface="Arial" panose="020B0604020202020204" pitchFamily="34" charset="0"/>
-                <a:cs typeface="Arial" panose="020B0604020202020204" pitchFamily="34" charset="0"/>
-              </a:rPr>
-            </a:br>
-            <a:r>
-              <a:rPr lang="fr-FR" sz="1800" dirty="0">
-                <a:latin typeface="Arial" panose="020B0604020202020204" pitchFamily="34" charset="0"/>
-                <a:cs typeface="Arial" panose="020B0604020202020204" pitchFamily="34" charset="0"/>
-              </a:rPr>
-              <a:t>Modification de la section [</a:t>
-            </a:r>
-            <a:r>
-              <a:rPr lang="fr-FR" sz="1800" dirty="0" err="1">
-                <a:latin typeface="Arial" panose="020B0604020202020204" pitchFamily="34" charset="0"/>
-                <a:cs typeface="Arial" panose="020B0604020202020204" pitchFamily="34" charset="0"/>
-              </a:rPr>
-              <a:t>sshd</a:t>
-            </a:r>
-            <a:r>
-              <a:rPr lang="fr-FR" sz="1800" dirty="0">
-                <a:latin typeface="Arial" panose="020B0604020202020204" pitchFamily="34" charset="0"/>
-                <a:cs typeface="Arial" panose="020B0604020202020204" pitchFamily="34" charset="0"/>
-              </a:rPr>
-              <a:t>] :</a:t>
-            </a:r>
-            <a:br>
-              <a:rPr lang="en-US" sz="1800" dirty="0">
-                <a:latin typeface="Arial" panose="020B0604020202020204" pitchFamily="34" charset="0"/>
-                <a:cs typeface="Arial" panose="020B0604020202020204" pitchFamily="34" charset="0"/>
-              </a:rPr>
-            </a:br>
-            <a:r>
-              <a:rPr lang="en-US" sz="1800" dirty="0">
-                <a:latin typeface="Arial" panose="020B0604020202020204" pitchFamily="34" charset="0"/>
-                <a:cs typeface="Arial" panose="020B0604020202020204" pitchFamily="34" charset="0"/>
-              </a:rPr>
-              <a:t>Activation et </a:t>
-            </a:r>
-            <a:r>
-              <a:rPr lang="en-US" sz="1800" dirty="0" err="1">
-                <a:latin typeface="Arial" panose="020B0604020202020204" pitchFamily="34" charset="0"/>
-                <a:cs typeface="Arial" panose="020B0604020202020204" pitchFamily="34" charset="0"/>
-              </a:rPr>
-              <a:t>demarrage</a:t>
-            </a:r>
-            <a:r>
-              <a:rPr lang="en-US" sz="1800" dirty="0">
-                <a:latin typeface="Arial" panose="020B0604020202020204" pitchFamily="34" charset="0"/>
-                <a:cs typeface="Arial" panose="020B0604020202020204" pitchFamily="34" charset="0"/>
-              </a:rPr>
-              <a:t> de fail2ban</a:t>
-            </a:r>
-            <a:br>
-              <a:rPr lang="en-US" sz="1800" dirty="0">
-                <a:latin typeface="Arial" panose="020B0604020202020204" pitchFamily="34" charset="0"/>
-                <a:cs typeface="Arial" panose="020B0604020202020204" pitchFamily="34" charset="0"/>
-              </a:rPr>
-            </a:br>
-            <a:r>
-              <a:rPr lang="en-US" sz="1800" dirty="0">
-                <a:latin typeface="Arial" panose="020B0604020202020204" pitchFamily="34" charset="0"/>
-                <a:cs typeface="Arial" panose="020B0604020202020204" pitchFamily="34" charset="0"/>
-              </a:rPr>
-              <a:t>status de fail2ban</a:t>
-            </a:r>
-            <a:endParaRPr lang="fr-FR" sz="1800" dirty="0">
+              <a:t>`. Si le changement de port n'a pas d'effet, il faut modifier le socket SSH :</a:t>
+            </a:r>
+          </a:p>
+          <a:p>
+            <a:endParaRPr lang="en-US" noProof="1">
               <a:latin typeface="Arial" panose="020B0604020202020204" pitchFamily="34" charset="0"/>
               <a:cs typeface="Arial" panose="020B0604020202020204" pitchFamily="34" charset="0"/>
             </a:endParaRPr>
@@ -17603,103 +18026,31 @@
       </p:sp>
       <p:sp>
         <p:nvSpPr>
-          <p:cNvPr id="5" name="Date Placeholder 4">
-            <a:extLst>
-              <a:ext uri="{FF2B5EF4-FFF2-40B4-BE49-F238E27FC236}">
-                <a16:creationId xmlns:a16="http://schemas.microsoft.com/office/drawing/2014/main" id="{79C22D8C-87A6-47AD-8D29-FBBA539EDBE2}"/>
-              </a:ext>
-            </a:extLst>
-          </p:cNvPr>
-          <p:cNvSpPr>
-            <a:spLocks noGrp="1"/>
-          </p:cNvSpPr>
-          <p:nvPr>
-            <p:ph type="dt" sz="half" idx="4294967295"/>
-          </p:nvPr>
-        </p:nvSpPr>
-        <p:spPr>
-          <a:xfrm>
-            <a:off x="0" y="6356350"/>
-            <a:ext cx="2743200" cy="365125"/>
+          <p:cNvPr id="4" name="Slide Number Placeholder 3">
+            <a:extLst>
+              <a:ext uri="{FF2B5EF4-FFF2-40B4-BE49-F238E27FC236}">
+                <a16:creationId xmlns:a16="http://schemas.microsoft.com/office/drawing/2014/main" id="{79ED4A67-3A46-4F54-A12A-EAE1B53E6457}"/>
+              </a:ext>
+            </a:extLst>
+          </p:cNvPr>
+          <p:cNvSpPr>
+            <a:spLocks noGrp="1"/>
+          </p:cNvSpPr>
+          <p:nvPr>
+            <p:ph type="sldNum" sz="quarter" idx="22"/>
+          </p:nvPr>
+        </p:nvSpPr>
+        <p:spPr>
+          <a:xfrm>
+            <a:off x="10700656" y="6356350"/>
+            <a:ext cx="653143" cy="365125"/>
           </a:xfrm>
         </p:spPr>
         <p:txBody>
           <a:bodyPr/>
           <a:lstStyle/>
           <a:p>
-            <a:r>
-              <a:rPr lang="en-US" dirty="0">
-                <a:latin typeface="Arial" panose="020B0604020202020204" pitchFamily="34" charset="0"/>
-                <a:cs typeface="Arial" panose="020B0604020202020204" pitchFamily="34" charset="0"/>
-              </a:rPr>
-              <a:t>20XX</a:t>
-            </a:r>
-          </a:p>
-        </p:txBody>
-      </p:sp>
-      <p:sp>
-        <p:nvSpPr>
-          <p:cNvPr id="6" name="Footer Placeholder 5">
-            <a:extLst>
-              <a:ext uri="{FF2B5EF4-FFF2-40B4-BE49-F238E27FC236}">
-                <a16:creationId xmlns:a16="http://schemas.microsoft.com/office/drawing/2014/main" id="{4D346909-C2E0-4F1D-90FC-F5E1D8DFB515}"/>
-              </a:ext>
-            </a:extLst>
-          </p:cNvPr>
-          <p:cNvSpPr>
-            <a:spLocks noGrp="1"/>
-          </p:cNvSpPr>
-          <p:nvPr>
-            <p:ph type="ftr" sz="quarter" idx="4294967295"/>
-          </p:nvPr>
-        </p:nvSpPr>
-        <p:spPr>
-          <a:xfrm>
-            <a:off x="0" y="6356350"/>
-            <a:ext cx="4114800" cy="365125"/>
-          </a:xfrm>
-        </p:spPr>
-        <p:txBody>
-          <a:bodyPr/>
-          <a:lstStyle/>
-          <a:p>
-            <a:r>
-              <a:rPr lang="en-US" dirty="0">
-                <a:latin typeface="Arial" panose="020B0604020202020204" pitchFamily="34" charset="0"/>
-                <a:cs typeface="Arial" panose="020B0604020202020204" pitchFamily="34" charset="0"/>
-              </a:rPr>
-              <a:t>Pitch Deck</a:t>
-            </a:r>
-          </a:p>
-        </p:txBody>
-      </p:sp>
-      <p:sp>
-        <p:nvSpPr>
-          <p:cNvPr id="7" name="Slide Number Placeholder 6">
-            <a:extLst>
-              <a:ext uri="{FF2B5EF4-FFF2-40B4-BE49-F238E27FC236}">
-                <a16:creationId xmlns:a16="http://schemas.microsoft.com/office/drawing/2014/main" id="{EBC02F21-4E3C-469E-B11C-9214231082D3}"/>
-              </a:ext>
-            </a:extLst>
-          </p:cNvPr>
-          <p:cNvSpPr>
-            <a:spLocks noGrp="1"/>
-          </p:cNvSpPr>
-          <p:nvPr>
-            <p:ph type="sldNum" sz="quarter" idx="4294967295"/>
-          </p:nvPr>
-        </p:nvSpPr>
-        <p:spPr>
-          <a:xfrm>
-            <a:off x="9448800" y="6356350"/>
-            <a:ext cx="2743200" cy="365125"/>
-          </a:xfrm>
-        </p:spPr>
-        <p:txBody>
-          <a:bodyPr/>
-          <a:lstStyle/>
-          <a:p>
-            <a:fld id="{B5CEABB6-07DC-46E8-9B57-56EC44A396E5}" type="slidenum">
+            <a:fld id="{19B51A1E-902D-48AF-9020-955120F399B6}" type="slidenum">
               <a:rPr lang="en-US" smtClean="0">
                 <a:latin typeface="Arial" panose="020B0604020202020204" pitchFamily="34" charset="0"/>
                 <a:cs typeface="Arial" panose="020B0604020202020204" pitchFamily="34" charset="0"/>
@@ -17716,54 +18067,33 @@
       </p:sp>
       <p:sp>
         <p:nvSpPr>
-          <p:cNvPr id="3" name="Title 1">
-            <a:extLst>
-              <a:ext uri="{FF2B5EF4-FFF2-40B4-BE49-F238E27FC236}">
-                <a16:creationId xmlns:a16="http://schemas.microsoft.com/office/drawing/2014/main" id="{30117BEA-B382-6D95-1A61-3EAEEF91332A}"/>
-              </a:ext>
-            </a:extLst>
-          </p:cNvPr>
-          <p:cNvSpPr txBox="1">
-            <a:spLocks/>
-          </p:cNvSpPr>
-          <p:nvPr/>
-        </p:nvSpPr>
-        <p:spPr>
-          <a:xfrm>
-            <a:off x="401455" y="136525"/>
-            <a:ext cx="9580745" cy="597993"/>
-          </a:xfrm>
-          <a:prstGeom prst="rect">
-            <a:avLst/>
-          </a:prstGeom>
-        </p:spPr>
-        <p:txBody>
-          <a:bodyPr vert="horz" lIns="91440" tIns="45720" rIns="91440" bIns="45720" rtlCol="0" anchor="ctr">
+          <p:cNvPr id="21" name="Title 1">
+            <a:extLst>
+              <a:ext uri="{FF2B5EF4-FFF2-40B4-BE49-F238E27FC236}">
+                <a16:creationId xmlns:a16="http://schemas.microsoft.com/office/drawing/2014/main" id="{147C519B-EF99-C94B-F102-BB94B3BB1302}"/>
+              </a:ext>
+            </a:extLst>
+          </p:cNvPr>
+          <p:cNvSpPr>
+            <a:spLocks noGrp="1"/>
+          </p:cNvSpPr>
+          <p:nvPr>
+            <p:ph type="title"/>
+          </p:nvPr>
+        </p:nvSpPr>
+        <p:spPr>
+          <a:xfrm>
+            <a:off x="2147298" y="121028"/>
+            <a:ext cx="7732160" cy="597993"/>
+          </a:xfrm>
+        </p:spPr>
+        <p:txBody>
+          <a:bodyPr>
             <a:normAutofit/>
           </a:bodyPr>
-          <a:lstStyle>
-            <a:lvl1pPr algn="l" defTabSz="914400" rtl="0" eaLnBrk="1" latinLnBrk="0" hangingPunct="1">
-              <a:lnSpc>
-                <a:spcPct val="90000"/>
-              </a:lnSpc>
-              <a:spcBef>
-                <a:spcPct val="0"/>
-              </a:spcBef>
-              <a:buNone/>
-              <a:defRPr sz="3600" kern="1200" cap="all" spc="150" baseline="0">
-                <a:solidFill>
-                  <a:schemeClr val="tx1">
-                    <a:lumMod val="75000"/>
-                    <a:lumOff val="25000"/>
-                  </a:schemeClr>
-                </a:solidFill>
-                <a:latin typeface="+mj-lt"/>
-                <a:ea typeface="+mj-ea"/>
-                <a:cs typeface="+mj-cs"/>
-              </a:defRPr>
-            </a:lvl1pPr>
-          </a:lstStyle>
-          <a:p>
+          <a:lstStyle/>
+          <a:p>
+            <a:pPr algn="ctr"/>
             <a:r>
               <a:rPr lang="fr-FR" sz="2200" b="1" dirty="0">
                 <a:solidFill>
@@ -17772,7 +18102,17 @@
                 <a:latin typeface="Arial" panose="020B0604020202020204" pitchFamily="34" charset="0"/>
                 <a:cs typeface="Arial" panose="020B0604020202020204" pitchFamily="34" charset="0"/>
               </a:rPr>
-              <a:t>4. MISE EN PLACE DE FAIL2BAN</a:t>
+              <a:t>3. Changement du port </a:t>
+            </a:r>
+            <a:r>
+              <a:rPr lang="fr-FR" sz="2200" b="1" dirty="0" err="1">
+                <a:solidFill>
+                  <a:srgbClr val="0070C0"/>
+                </a:solidFill>
+                <a:latin typeface="Arial" panose="020B0604020202020204" pitchFamily="34" charset="0"/>
+                <a:cs typeface="Arial" panose="020B0604020202020204" pitchFamily="34" charset="0"/>
+              </a:rPr>
+              <a:t>ssh</a:t>
             </a:r>
             <a:endParaRPr lang="en-US" sz="2200" b="1" dirty="0">
               <a:solidFill>
@@ -17786,10 +18126,10 @@
       </p:sp>
       <p:pic>
         <p:nvPicPr>
-          <p:cNvPr id="12" name="Picture 11">
-            <a:extLst>
-              <a:ext uri="{FF2B5EF4-FFF2-40B4-BE49-F238E27FC236}">
-                <a16:creationId xmlns:a16="http://schemas.microsoft.com/office/drawing/2014/main" id="{DDDAA25C-CE2B-B1F7-CDA8-021812C270F2}"/>
+          <p:cNvPr id="22" name="Picture 21">
+            <a:extLst>
+              <a:ext uri="{FF2B5EF4-FFF2-40B4-BE49-F238E27FC236}">
+                <a16:creationId xmlns:a16="http://schemas.microsoft.com/office/drawing/2014/main" id="{6314EDBE-B9D1-B244-51FA-9DC33C72A2AE}"/>
               </a:ext>
             </a:extLst>
           </p:cNvPr>
@@ -17806,8 +18146,8 @@
         </p:blipFill>
         <p:spPr>
           <a:xfrm>
-            <a:off x="401455" y="709985"/>
-            <a:ext cx="5731510" cy="1980565"/>
+            <a:off x="260280" y="1882328"/>
+            <a:ext cx="5835720" cy="1039495"/>
           </a:xfrm>
           <a:prstGeom prst="rect">
             <a:avLst/>
@@ -17816,10 +18156,10 @@
       </p:pic>
       <p:pic>
         <p:nvPicPr>
-          <p:cNvPr id="37" name="Picture 36">
-            <a:extLst>
-              <a:ext uri="{FF2B5EF4-FFF2-40B4-BE49-F238E27FC236}">
-                <a16:creationId xmlns:a16="http://schemas.microsoft.com/office/drawing/2014/main" id="{BB99C3A3-DBE2-AB21-8B89-CA8315F9664D}"/>
+          <p:cNvPr id="23" name="Picture 22">
+            <a:extLst>
+              <a:ext uri="{FF2B5EF4-FFF2-40B4-BE49-F238E27FC236}">
+                <a16:creationId xmlns:a16="http://schemas.microsoft.com/office/drawing/2014/main" id="{E88C1C16-2550-BDA7-DFC7-634B3969F783}"/>
               </a:ext>
             </a:extLst>
           </p:cNvPr>
@@ -17836,8 +18176,8 @@
         </p:blipFill>
         <p:spPr>
           <a:xfrm>
-            <a:off x="401455" y="2741681"/>
-            <a:ext cx="5731510" cy="1289685"/>
+            <a:off x="260281" y="3503159"/>
+            <a:ext cx="5835720" cy="3218316"/>
           </a:xfrm>
           <a:prstGeom prst="rect">
             <a:avLst/>
@@ -17846,10 +18186,10 @@
       </p:pic>
       <p:pic>
         <p:nvPicPr>
-          <p:cNvPr id="38" name="Picture 37">
-            <a:extLst>
-              <a:ext uri="{FF2B5EF4-FFF2-40B4-BE49-F238E27FC236}">
-                <a16:creationId xmlns:a16="http://schemas.microsoft.com/office/drawing/2014/main" id="{BD6931E3-73DB-0A77-112F-12F3EBD19436}"/>
+          <p:cNvPr id="26" name="Picture 25">
+            <a:extLst>
+              <a:ext uri="{FF2B5EF4-FFF2-40B4-BE49-F238E27FC236}">
+                <a16:creationId xmlns:a16="http://schemas.microsoft.com/office/drawing/2014/main" id="{479F9466-7CE1-3B66-F8C2-392F51B56D4E}"/>
               </a:ext>
             </a:extLst>
           </p:cNvPr>
@@ -17866,20 +18206,655 @@
         </p:blipFill>
         <p:spPr>
           <a:xfrm>
-            <a:off x="401455" y="4143711"/>
-            <a:ext cx="5731510" cy="201295"/>
+            <a:off x="6778446" y="1927046"/>
+            <a:ext cx="4778655" cy="341484"/>
           </a:xfrm>
           <a:prstGeom prst="rect">
             <a:avLst/>
           </a:prstGeom>
         </p:spPr>
       </p:pic>
+      <p:sp>
+        <p:nvSpPr>
+          <p:cNvPr id="2" name="Content Placeholder 2">
+            <a:extLst>
+              <a:ext uri="{FF2B5EF4-FFF2-40B4-BE49-F238E27FC236}">
+                <a16:creationId xmlns:a16="http://schemas.microsoft.com/office/drawing/2014/main" id="{4491B0B1-975C-4378-0DC9-CDC469E06FA2}"/>
+              </a:ext>
+            </a:extLst>
+          </p:cNvPr>
+          <p:cNvSpPr txBox="1">
+            <a:spLocks/>
+          </p:cNvSpPr>
+          <p:nvPr/>
+        </p:nvSpPr>
+        <p:spPr>
+          <a:xfrm>
+            <a:off x="0" y="610485"/>
+            <a:ext cx="11578212" cy="951188"/>
+          </a:xfrm>
+          <a:prstGeom prst="rect">
+            <a:avLst/>
+          </a:prstGeom>
+        </p:spPr>
+        <p:txBody>
+          <a:bodyPr vert="horz" lIns="91440" tIns="45720" rIns="91440" bIns="45720" rtlCol="0" anchor="t">
+            <a:noAutofit/>
+          </a:bodyPr>
+          <a:lstStyle>
+            <a:lvl1pPr marL="228600" indent="-228600" algn="l" defTabSz="914400" rtl="0" eaLnBrk="1" latinLnBrk="0" hangingPunct="1">
+              <a:lnSpc>
+                <a:spcPct val="90000"/>
+              </a:lnSpc>
+              <a:spcBef>
+                <a:spcPts val="1000"/>
+              </a:spcBef>
+              <a:buFont typeface="Arial" panose="020B0604020202020204" pitchFamily="34" charset="0"/>
+              <a:buChar char="•"/>
+              <a:defRPr sz="2800" kern="1200">
+                <a:solidFill>
+                  <a:schemeClr val="tx1">
+                    <a:lumMod val="75000"/>
+                    <a:lumOff val="25000"/>
+                  </a:schemeClr>
+                </a:solidFill>
+                <a:latin typeface="+mn-lt"/>
+                <a:ea typeface="+mn-ea"/>
+                <a:cs typeface="+mn-cs"/>
+              </a:defRPr>
+            </a:lvl1pPr>
+            <a:lvl2pPr marL="685800" indent="-228600" algn="l" defTabSz="914400" rtl="0" eaLnBrk="1" latinLnBrk="0" hangingPunct="1">
+              <a:lnSpc>
+                <a:spcPct val="90000"/>
+              </a:lnSpc>
+              <a:spcBef>
+                <a:spcPts val="500"/>
+              </a:spcBef>
+              <a:buFont typeface="Arial" panose="020B0604020202020204" pitchFamily="34" charset="0"/>
+              <a:buChar char="•"/>
+              <a:defRPr sz="2400" kern="1200">
+                <a:solidFill>
+                  <a:schemeClr val="tx1">
+                    <a:lumMod val="75000"/>
+                    <a:lumOff val="25000"/>
+                  </a:schemeClr>
+                </a:solidFill>
+                <a:latin typeface="+mn-lt"/>
+                <a:ea typeface="+mn-ea"/>
+                <a:cs typeface="+mn-cs"/>
+              </a:defRPr>
+            </a:lvl2pPr>
+            <a:lvl3pPr marL="1143000" indent="-228600" algn="l" defTabSz="914400" rtl="0" eaLnBrk="1" latinLnBrk="0" hangingPunct="1">
+              <a:lnSpc>
+                <a:spcPct val="90000"/>
+              </a:lnSpc>
+              <a:spcBef>
+                <a:spcPts val="500"/>
+              </a:spcBef>
+              <a:buFont typeface="Arial" panose="020B0604020202020204" pitchFamily="34" charset="0"/>
+              <a:buChar char="•"/>
+              <a:defRPr sz="2000" kern="1200">
+                <a:solidFill>
+                  <a:schemeClr val="tx1">
+                    <a:lumMod val="75000"/>
+                    <a:lumOff val="25000"/>
+                  </a:schemeClr>
+                </a:solidFill>
+                <a:latin typeface="+mn-lt"/>
+                <a:ea typeface="+mn-ea"/>
+                <a:cs typeface="+mn-cs"/>
+              </a:defRPr>
+            </a:lvl3pPr>
+            <a:lvl4pPr marL="1600200" indent="-228600" algn="l" defTabSz="914400" rtl="0" eaLnBrk="1" latinLnBrk="0" hangingPunct="1">
+              <a:lnSpc>
+                <a:spcPct val="90000"/>
+              </a:lnSpc>
+              <a:spcBef>
+                <a:spcPts val="500"/>
+              </a:spcBef>
+              <a:buFont typeface="Arial" panose="020B0604020202020204" pitchFamily="34" charset="0"/>
+              <a:buChar char="•"/>
+              <a:defRPr sz="1800" kern="1200">
+                <a:solidFill>
+                  <a:schemeClr val="tx1">
+                    <a:lumMod val="75000"/>
+                    <a:lumOff val="25000"/>
+                  </a:schemeClr>
+                </a:solidFill>
+                <a:latin typeface="+mn-lt"/>
+                <a:ea typeface="+mn-ea"/>
+                <a:cs typeface="+mn-cs"/>
+              </a:defRPr>
+            </a:lvl4pPr>
+            <a:lvl5pPr marL="2057400" indent="-228600" algn="l" defTabSz="914400" rtl="0" eaLnBrk="1" latinLnBrk="0" hangingPunct="1">
+              <a:lnSpc>
+                <a:spcPct val="90000"/>
+              </a:lnSpc>
+              <a:spcBef>
+                <a:spcPts val="500"/>
+              </a:spcBef>
+              <a:buFont typeface="Arial" panose="020B0604020202020204" pitchFamily="34" charset="0"/>
+              <a:buChar char="•"/>
+              <a:defRPr sz="1800" kern="1200">
+                <a:solidFill>
+                  <a:schemeClr val="tx1">
+                    <a:lumMod val="75000"/>
+                    <a:lumOff val="25000"/>
+                  </a:schemeClr>
+                </a:solidFill>
+                <a:latin typeface="+mn-lt"/>
+                <a:ea typeface="+mn-ea"/>
+                <a:cs typeface="+mn-cs"/>
+              </a:defRPr>
+            </a:lvl5pPr>
+            <a:lvl6pPr marL="2514600" indent="-228600" algn="l" defTabSz="914400" rtl="0" eaLnBrk="1" latinLnBrk="0" hangingPunct="1">
+              <a:lnSpc>
+                <a:spcPct val="90000"/>
+              </a:lnSpc>
+              <a:spcBef>
+                <a:spcPts val="500"/>
+              </a:spcBef>
+              <a:buFont typeface="Arial" panose="020B0604020202020204" pitchFamily="34" charset="0"/>
+              <a:buChar char="•"/>
+              <a:defRPr sz="1800" kern="1200">
+                <a:solidFill>
+                  <a:schemeClr val="tx1"/>
+                </a:solidFill>
+                <a:latin typeface="+mn-lt"/>
+                <a:ea typeface="+mn-ea"/>
+                <a:cs typeface="+mn-cs"/>
+              </a:defRPr>
+            </a:lvl6pPr>
+            <a:lvl7pPr marL="2971800" indent="-228600" algn="l" defTabSz="914400" rtl="0" eaLnBrk="1" latinLnBrk="0" hangingPunct="1">
+              <a:lnSpc>
+                <a:spcPct val="90000"/>
+              </a:lnSpc>
+              <a:spcBef>
+                <a:spcPts val="500"/>
+              </a:spcBef>
+              <a:buFont typeface="Arial" panose="020B0604020202020204" pitchFamily="34" charset="0"/>
+              <a:buChar char="•"/>
+              <a:defRPr sz="1800" kern="1200">
+                <a:solidFill>
+                  <a:schemeClr val="tx1"/>
+                </a:solidFill>
+                <a:latin typeface="+mn-lt"/>
+                <a:ea typeface="+mn-ea"/>
+                <a:cs typeface="+mn-cs"/>
+              </a:defRPr>
+            </a:lvl7pPr>
+            <a:lvl8pPr marL="3429000" indent="-228600" algn="l" defTabSz="914400" rtl="0" eaLnBrk="1" latinLnBrk="0" hangingPunct="1">
+              <a:lnSpc>
+                <a:spcPct val="90000"/>
+              </a:lnSpc>
+              <a:spcBef>
+                <a:spcPts val="500"/>
+              </a:spcBef>
+              <a:buFont typeface="Arial" panose="020B0604020202020204" pitchFamily="34" charset="0"/>
+              <a:buChar char="•"/>
+              <a:defRPr sz="1800" kern="1200">
+                <a:solidFill>
+                  <a:schemeClr val="tx1"/>
+                </a:solidFill>
+                <a:latin typeface="+mn-lt"/>
+                <a:ea typeface="+mn-ea"/>
+                <a:cs typeface="+mn-cs"/>
+              </a:defRPr>
+            </a:lvl8pPr>
+            <a:lvl9pPr marL="3886200" indent="-228600" algn="l" defTabSz="914400" rtl="0" eaLnBrk="1" latinLnBrk="0" hangingPunct="1">
+              <a:lnSpc>
+                <a:spcPct val="90000"/>
+              </a:lnSpc>
+              <a:spcBef>
+                <a:spcPts val="500"/>
+              </a:spcBef>
+              <a:buFont typeface="Arial" panose="020B0604020202020204" pitchFamily="34" charset="0"/>
+              <a:buChar char="•"/>
+              <a:defRPr sz="1800" kern="1200">
+                <a:solidFill>
+                  <a:schemeClr val="tx1"/>
+                </a:solidFill>
+                <a:latin typeface="+mn-lt"/>
+                <a:ea typeface="+mn-ea"/>
+                <a:cs typeface="+mn-cs"/>
+              </a:defRPr>
+            </a:lvl9pPr>
+          </a:lstStyle>
+          <a:p>
+            <a:pPr marL="0" indent="0">
+              <a:buNone/>
+            </a:pPr>
+            <a:endParaRPr lang="fr-FR" sz="1800" b="1" noProof="1">
+              <a:latin typeface="Arial" panose="020B0604020202020204" pitchFamily="34" charset="0"/>
+              <a:cs typeface="Arial" panose="020B0604020202020204" pitchFamily="34" charset="0"/>
+            </a:endParaRPr>
+          </a:p>
+        </p:txBody>
+      </p:sp>
+      <p:sp>
+        <p:nvSpPr>
+          <p:cNvPr id="3" name="Content Placeholder 2">
+            <a:extLst>
+              <a:ext uri="{FF2B5EF4-FFF2-40B4-BE49-F238E27FC236}">
+                <a16:creationId xmlns:a16="http://schemas.microsoft.com/office/drawing/2014/main" id="{D1282C9D-02FC-561A-A85B-D77980723397}"/>
+              </a:ext>
+            </a:extLst>
+          </p:cNvPr>
+          <p:cNvSpPr txBox="1">
+            <a:spLocks/>
+          </p:cNvSpPr>
+          <p:nvPr/>
+        </p:nvSpPr>
+        <p:spPr>
+          <a:xfrm>
+            <a:off x="306894" y="492134"/>
+            <a:ext cx="11578212" cy="916361"/>
+          </a:xfrm>
+          <a:prstGeom prst="rect">
+            <a:avLst/>
+          </a:prstGeom>
+        </p:spPr>
+        <p:txBody>
+          <a:bodyPr vert="horz" lIns="91440" tIns="45720" rIns="91440" bIns="45720" rtlCol="0" anchor="t">
+            <a:noAutofit/>
+          </a:bodyPr>
+          <a:lstStyle>
+            <a:lvl1pPr marL="228600" indent="-228600" algn="l" defTabSz="914400" rtl="0" eaLnBrk="1" latinLnBrk="0" hangingPunct="1">
+              <a:lnSpc>
+                <a:spcPct val="90000"/>
+              </a:lnSpc>
+              <a:spcBef>
+                <a:spcPts val="1000"/>
+              </a:spcBef>
+              <a:buFont typeface="Arial" panose="020B0604020202020204" pitchFamily="34" charset="0"/>
+              <a:buChar char="•"/>
+              <a:defRPr sz="2800" kern="1200">
+                <a:solidFill>
+                  <a:schemeClr val="tx1">
+                    <a:lumMod val="75000"/>
+                    <a:lumOff val="25000"/>
+                  </a:schemeClr>
+                </a:solidFill>
+                <a:latin typeface="+mn-lt"/>
+                <a:ea typeface="+mn-ea"/>
+                <a:cs typeface="+mn-cs"/>
+              </a:defRPr>
+            </a:lvl1pPr>
+            <a:lvl2pPr marL="685800" indent="-228600" algn="l" defTabSz="914400" rtl="0" eaLnBrk="1" latinLnBrk="0" hangingPunct="1">
+              <a:lnSpc>
+                <a:spcPct val="90000"/>
+              </a:lnSpc>
+              <a:spcBef>
+                <a:spcPts val="500"/>
+              </a:spcBef>
+              <a:buFont typeface="Arial" panose="020B0604020202020204" pitchFamily="34" charset="0"/>
+              <a:buChar char="•"/>
+              <a:defRPr sz="2400" kern="1200">
+                <a:solidFill>
+                  <a:schemeClr val="tx1">
+                    <a:lumMod val="75000"/>
+                    <a:lumOff val="25000"/>
+                  </a:schemeClr>
+                </a:solidFill>
+                <a:latin typeface="+mn-lt"/>
+                <a:ea typeface="+mn-ea"/>
+                <a:cs typeface="+mn-cs"/>
+              </a:defRPr>
+            </a:lvl2pPr>
+            <a:lvl3pPr marL="1143000" indent="-228600" algn="l" defTabSz="914400" rtl="0" eaLnBrk="1" latinLnBrk="0" hangingPunct="1">
+              <a:lnSpc>
+                <a:spcPct val="90000"/>
+              </a:lnSpc>
+              <a:spcBef>
+                <a:spcPts val="500"/>
+              </a:spcBef>
+              <a:buFont typeface="Arial" panose="020B0604020202020204" pitchFamily="34" charset="0"/>
+              <a:buChar char="•"/>
+              <a:defRPr sz="2000" kern="1200">
+                <a:solidFill>
+                  <a:schemeClr val="tx1">
+                    <a:lumMod val="75000"/>
+                    <a:lumOff val="25000"/>
+                  </a:schemeClr>
+                </a:solidFill>
+                <a:latin typeface="+mn-lt"/>
+                <a:ea typeface="+mn-ea"/>
+                <a:cs typeface="+mn-cs"/>
+              </a:defRPr>
+            </a:lvl3pPr>
+            <a:lvl4pPr marL="1600200" indent="-228600" algn="l" defTabSz="914400" rtl="0" eaLnBrk="1" latinLnBrk="0" hangingPunct="1">
+              <a:lnSpc>
+                <a:spcPct val="90000"/>
+              </a:lnSpc>
+              <a:spcBef>
+                <a:spcPts val="500"/>
+              </a:spcBef>
+              <a:buFont typeface="Arial" panose="020B0604020202020204" pitchFamily="34" charset="0"/>
+              <a:buChar char="•"/>
+              <a:defRPr sz="1800" kern="1200">
+                <a:solidFill>
+                  <a:schemeClr val="tx1">
+                    <a:lumMod val="75000"/>
+                    <a:lumOff val="25000"/>
+                  </a:schemeClr>
+                </a:solidFill>
+                <a:latin typeface="+mn-lt"/>
+                <a:ea typeface="+mn-ea"/>
+                <a:cs typeface="+mn-cs"/>
+              </a:defRPr>
+            </a:lvl4pPr>
+            <a:lvl5pPr marL="2057400" indent="-228600" algn="l" defTabSz="914400" rtl="0" eaLnBrk="1" latinLnBrk="0" hangingPunct="1">
+              <a:lnSpc>
+                <a:spcPct val="90000"/>
+              </a:lnSpc>
+              <a:spcBef>
+                <a:spcPts val="500"/>
+              </a:spcBef>
+              <a:buFont typeface="Arial" panose="020B0604020202020204" pitchFamily="34" charset="0"/>
+              <a:buChar char="•"/>
+              <a:defRPr sz="1800" kern="1200">
+                <a:solidFill>
+                  <a:schemeClr val="tx1">
+                    <a:lumMod val="75000"/>
+                    <a:lumOff val="25000"/>
+                  </a:schemeClr>
+                </a:solidFill>
+                <a:latin typeface="+mn-lt"/>
+                <a:ea typeface="+mn-ea"/>
+                <a:cs typeface="+mn-cs"/>
+              </a:defRPr>
+            </a:lvl5pPr>
+            <a:lvl6pPr marL="2514600" indent="-228600" algn="l" defTabSz="914400" rtl="0" eaLnBrk="1" latinLnBrk="0" hangingPunct="1">
+              <a:lnSpc>
+                <a:spcPct val="90000"/>
+              </a:lnSpc>
+              <a:spcBef>
+                <a:spcPts val="500"/>
+              </a:spcBef>
+              <a:buFont typeface="Arial" panose="020B0604020202020204" pitchFamily="34" charset="0"/>
+              <a:buChar char="•"/>
+              <a:defRPr sz="1800" kern="1200">
+                <a:solidFill>
+                  <a:schemeClr val="tx1"/>
+                </a:solidFill>
+                <a:latin typeface="+mn-lt"/>
+                <a:ea typeface="+mn-ea"/>
+                <a:cs typeface="+mn-cs"/>
+              </a:defRPr>
+            </a:lvl6pPr>
+            <a:lvl7pPr marL="2971800" indent="-228600" algn="l" defTabSz="914400" rtl="0" eaLnBrk="1" latinLnBrk="0" hangingPunct="1">
+              <a:lnSpc>
+                <a:spcPct val="90000"/>
+              </a:lnSpc>
+              <a:spcBef>
+                <a:spcPts val="500"/>
+              </a:spcBef>
+              <a:buFont typeface="Arial" panose="020B0604020202020204" pitchFamily="34" charset="0"/>
+              <a:buChar char="•"/>
+              <a:defRPr sz="1800" kern="1200">
+                <a:solidFill>
+                  <a:schemeClr val="tx1"/>
+                </a:solidFill>
+                <a:latin typeface="+mn-lt"/>
+                <a:ea typeface="+mn-ea"/>
+                <a:cs typeface="+mn-cs"/>
+              </a:defRPr>
+            </a:lvl7pPr>
+            <a:lvl8pPr marL="3429000" indent="-228600" algn="l" defTabSz="914400" rtl="0" eaLnBrk="1" latinLnBrk="0" hangingPunct="1">
+              <a:lnSpc>
+                <a:spcPct val="90000"/>
+              </a:lnSpc>
+              <a:spcBef>
+                <a:spcPts val="500"/>
+              </a:spcBef>
+              <a:buFont typeface="Arial" panose="020B0604020202020204" pitchFamily="34" charset="0"/>
+              <a:buChar char="•"/>
+              <a:defRPr sz="1800" kern="1200">
+                <a:solidFill>
+                  <a:schemeClr val="tx1"/>
+                </a:solidFill>
+                <a:latin typeface="+mn-lt"/>
+                <a:ea typeface="+mn-ea"/>
+                <a:cs typeface="+mn-cs"/>
+              </a:defRPr>
+            </a:lvl8pPr>
+            <a:lvl9pPr marL="3886200" indent="-228600" algn="l" defTabSz="914400" rtl="0" eaLnBrk="1" latinLnBrk="0" hangingPunct="1">
+              <a:lnSpc>
+                <a:spcPct val="90000"/>
+              </a:lnSpc>
+              <a:spcBef>
+                <a:spcPts val="500"/>
+              </a:spcBef>
+              <a:buFont typeface="Arial" panose="020B0604020202020204" pitchFamily="34" charset="0"/>
+              <a:buChar char="•"/>
+              <a:defRPr sz="1800" kern="1200">
+                <a:solidFill>
+                  <a:schemeClr val="tx1"/>
+                </a:solidFill>
+                <a:latin typeface="+mn-lt"/>
+                <a:ea typeface="+mn-ea"/>
+                <a:cs typeface="+mn-cs"/>
+              </a:defRPr>
+            </a:lvl9pPr>
+          </a:lstStyle>
+          <a:p>
+            <a:pPr>
+              <a:buFont typeface="Wingdings" panose="05000000000000000000" pitchFamily="2" charset="2"/>
+              <a:buChar char="v"/>
+            </a:pPr>
+            <a:r>
+              <a:rPr lang="fr-FR" sz="1800" b="1" dirty="0">
+                <a:solidFill>
+                  <a:srgbClr val="0070C0"/>
+                </a:solidFill>
+                <a:latin typeface="Arial" panose="020B0604020202020204" pitchFamily="34" charset="0"/>
+                <a:cs typeface="Arial" panose="020B0604020202020204" pitchFamily="34" charset="0"/>
+              </a:rPr>
+              <a:t>Objectif</a:t>
+            </a:r>
+          </a:p>
+          <a:p>
+            <a:pPr marL="0" indent="0">
+              <a:buNone/>
+            </a:pPr>
+            <a:r>
+              <a:rPr lang="fr-FR" sz="1600" b="1" dirty="0">
+                <a:latin typeface="Arial" panose="020B0604020202020204" pitchFamily="34" charset="0"/>
+                <a:cs typeface="Arial" panose="020B0604020202020204" pitchFamily="34" charset="0"/>
+              </a:rPr>
+              <a:t>Le port 22 est scanné en permanence par des robots automatisés. Changer le port d'écoute réduit considérablement le nombre de tentatives d'intrusion visibles dans les journaux système.</a:t>
+            </a:r>
+          </a:p>
+        </p:txBody>
+      </p:sp>
+      <p:sp>
+        <p:nvSpPr>
+          <p:cNvPr id="6" name="ZoneTexte 5">
+            <a:extLst>
+              <a:ext uri="{FF2B5EF4-FFF2-40B4-BE49-F238E27FC236}">
+                <a16:creationId xmlns:a16="http://schemas.microsoft.com/office/drawing/2014/main" id="{2EEA4E53-C27A-8D7B-B816-A2FFBF548FEB}"/>
+              </a:ext>
+            </a:extLst>
+          </p:cNvPr>
+          <p:cNvSpPr txBox="1"/>
+          <p:nvPr/>
+        </p:nvSpPr>
+        <p:spPr>
+          <a:xfrm>
+            <a:off x="482499" y="2982023"/>
+            <a:ext cx="5731510" cy="638636"/>
+          </a:xfrm>
+          <a:prstGeom prst="rect">
+            <a:avLst/>
+          </a:prstGeom>
+          <a:noFill/>
+        </p:spPr>
+        <p:txBody>
+          <a:bodyPr wrap="square">
+            <a:spAutoFit/>
+          </a:bodyPr>
+          <a:lstStyle/>
+          <a:p>
+            <a:pPr marL="342900" indent="-342900">
+              <a:lnSpc>
+                <a:spcPts val="1425"/>
+              </a:lnSpc>
+              <a:buFont typeface="+mj-lt"/>
+              <a:buAutoNum type="arabicPeriod" startAt="2"/>
+            </a:pPr>
+            <a:r>
+              <a:rPr lang="fr-FR" dirty="0">
+                <a:latin typeface="Arial" panose="020B0604020202020204" pitchFamily="34" charset="0"/>
+                <a:cs typeface="Arial" panose="020B0604020202020204" pitchFamily="34" charset="0"/>
+              </a:rPr>
+              <a:t>Ouverture du nouveau port dans le pare-feu avant de redémarrer SSH</a:t>
+            </a:r>
+          </a:p>
+          <a:p>
+            <a:pPr marL="342900" indent="-342900">
+              <a:lnSpc>
+                <a:spcPts val="1425"/>
+              </a:lnSpc>
+              <a:buFont typeface="+mj-lt"/>
+              <a:buAutoNum type="arabicPeriod" startAt="2"/>
+            </a:pPr>
+            <a:endParaRPr lang="fr-FR" dirty="0">
+              <a:effectLst/>
+              <a:latin typeface="Arial" panose="020B0604020202020204" pitchFamily="34" charset="0"/>
+              <a:cs typeface="Arial" panose="020B0604020202020204" pitchFamily="34" charset="0"/>
+            </a:endParaRPr>
+          </a:p>
+        </p:txBody>
+      </p:sp>
+      <p:sp>
+        <p:nvSpPr>
+          <p:cNvPr id="7" name="ZoneTexte 6">
+            <a:extLst>
+              <a:ext uri="{FF2B5EF4-FFF2-40B4-BE49-F238E27FC236}">
+                <a16:creationId xmlns:a16="http://schemas.microsoft.com/office/drawing/2014/main" id="{D84812BE-B5B9-C332-3826-D22AA2128B26}"/>
+              </a:ext>
+            </a:extLst>
+          </p:cNvPr>
+          <p:cNvSpPr txBox="1"/>
+          <p:nvPr/>
+        </p:nvSpPr>
+        <p:spPr>
+          <a:xfrm>
+            <a:off x="562582" y="1535768"/>
+            <a:ext cx="6215864" cy="286360"/>
+          </a:xfrm>
+          <a:prstGeom prst="rect">
+            <a:avLst/>
+          </a:prstGeom>
+          <a:noFill/>
+        </p:spPr>
+        <p:txBody>
+          <a:bodyPr wrap="square">
+            <a:spAutoFit/>
+          </a:bodyPr>
+          <a:lstStyle/>
+          <a:p>
+            <a:pPr marL="342900" indent="-342900">
+              <a:lnSpc>
+                <a:spcPts val="1425"/>
+              </a:lnSpc>
+              <a:buFont typeface="+mj-lt"/>
+              <a:buAutoNum type="arabicPeriod"/>
+            </a:pPr>
+            <a:r>
+              <a:rPr lang="fr-FR" dirty="0">
+                <a:effectLst/>
+                <a:latin typeface="Arial" panose="020B0604020202020204" pitchFamily="34" charset="0"/>
+                <a:cs typeface="Arial" panose="020B0604020202020204" pitchFamily="34" charset="0"/>
+              </a:rPr>
+              <a:t>Modification du fichier </a:t>
+            </a:r>
+            <a:r>
+              <a:rPr lang="fr-FR" dirty="0" err="1">
+                <a:effectLst/>
+                <a:latin typeface="Arial" panose="020B0604020202020204" pitchFamily="34" charset="0"/>
+                <a:cs typeface="Arial" panose="020B0604020202020204" pitchFamily="34" charset="0"/>
+              </a:rPr>
+              <a:t>sshd_config</a:t>
+            </a:r>
+            <a:endParaRPr lang="fr-FR" dirty="0">
+              <a:effectLst/>
+              <a:latin typeface="Arial" panose="020B0604020202020204" pitchFamily="34" charset="0"/>
+              <a:cs typeface="Arial" panose="020B0604020202020204" pitchFamily="34" charset="0"/>
+            </a:endParaRPr>
+          </a:p>
+        </p:txBody>
+      </p:sp>
+      <p:sp>
+        <p:nvSpPr>
+          <p:cNvPr id="8" name="ZoneTexte 7">
+            <a:extLst>
+              <a:ext uri="{FF2B5EF4-FFF2-40B4-BE49-F238E27FC236}">
+                <a16:creationId xmlns:a16="http://schemas.microsoft.com/office/drawing/2014/main" id="{5838E2A9-14A4-5258-CE37-D7D4A6853F3F}"/>
+              </a:ext>
+            </a:extLst>
+          </p:cNvPr>
+          <p:cNvSpPr txBox="1"/>
+          <p:nvPr/>
+        </p:nvSpPr>
+        <p:spPr>
+          <a:xfrm>
+            <a:off x="6859192" y="1638688"/>
+            <a:ext cx="5426710" cy="459100"/>
+          </a:xfrm>
+          <a:prstGeom prst="rect">
+            <a:avLst/>
+          </a:prstGeom>
+          <a:noFill/>
+        </p:spPr>
+        <p:txBody>
+          <a:bodyPr wrap="square">
+            <a:spAutoFit/>
+          </a:bodyPr>
+          <a:lstStyle/>
+          <a:p>
+            <a:pPr marL="342900" indent="-342900">
+              <a:lnSpc>
+                <a:spcPts val="1425"/>
+              </a:lnSpc>
+              <a:buFont typeface="+mj-lt"/>
+              <a:buAutoNum type="arabicPeriod" startAt="3"/>
+            </a:pPr>
+            <a:r>
+              <a:rPr lang="en-US" dirty="0" err="1">
+                <a:latin typeface="Arial" panose="020B0604020202020204" pitchFamily="34" charset="0"/>
+                <a:cs typeface="Arial" panose="020B0604020202020204" pitchFamily="34" charset="0"/>
+              </a:rPr>
+              <a:t>Redémarrage</a:t>
+            </a:r>
+            <a:r>
+              <a:rPr lang="en-US" dirty="0">
+                <a:latin typeface="Arial" panose="020B0604020202020204" pitchFamily="34" charset="0"/>
+                <a:cs typeface="Arial" panose="020B0604020202020204" pitchFamily="34" charset="0"/>
+              </a:rPr>
+              <a:t> du service SSH</a:t>
+            </a:r>
+          </a:p>
+          <a:p>
+            <a:pPr>
+              <a:lnSpc>
+                <a:spcPts val="1425"/>
+              </a:lnSpc>
+            </a:pPr>
+            <a:endParaRPr lang="fr-FR" dirty="0">
+              <a:effectLst/>
+              <a:latin typeface="Arial" panose="020B0604020202020204" pitchFamily="34" charset="0"/>
+              <a:cs typeface="Arial" panose="020B0604020202020204" pitchFamily="34" charset="0"/>
+            </a:endParaRPr>
+          </a:p>
+        </p:txBody>
+      </p:sp>
       <p:pic>
         <p:nvPicPr>
-          <p:cNvPr id="39" name="Picture 38">
-            <a:extLst>
-              <a:ext uri="{FF2B5EF4-FFF2-40B4-BE49-F238E27FC236}">
-                <a16:creationId xmlns:a16="http://schemas.microsoft.com/office/drawing/2014/main" id="{68E0596F-EC01-3F17-4EE8-423EF69D9B80}"/>
+          <p:cNvPr id="9" name="Picture 26">
+            <a:extLst>
+              <a:ext uri="{FF2B5EF4-FFF2-40B4-BE49-F238E27FC236}">
+                <a16:creationId xmlns:a16="http://schemas.microsoft.com/office/drawing/2014/main" id="{A0979621-8625-8860-81C6-3B6F4B2F8E32}"/>
               </a:ext>
             </a:extLst>
           </p:cNvPr>
@@ -17896,8 +18871,8 @@
         </p:blipFill>
         <p:spPr>
           <a:xfrm>
-            <a:off x="401455" y="4392032"/>
-            <a:ext cx="5731510" cy="2292350"/>
+            <a:off x="6778446" y="3583244"/>
+            <a:ext cx="4799766" cy="638635"/>
           </a:xfrm>
           <a:prstGeom prst="rect">
             <a:avLst/>
@@ -17906,10 +18881,10 @@
       </p:pic>
       <p:pic>
         <p:nvPicPr>
-          <p:cNvPr id="40" name="Picture 39">
-            <a:extLst>
-              <a:ext uri="{FF2B5EF4-FFF2-40B4-BE49-F238E27FC236}">
-                <a16:creationId xmlns:a16="http://schemas.microsoft.com/office/drawing/2014/main" id="{6DF1ABBB-5598-C891-5747-4B9B6E1AA99D}"/>
+          <p:cNvPr id="11" name="Picture 27">
+            <a:extLst>
+              <a:ext uri="{FF2B5EF4-FFF2-40B4-BE49-F238E27FC236}">
+                <a16:creationId xmlns:a16="http://schemas.microsoft.com/office/drawing/2014/main" id="{06099A7A-36AC-4FEF-4BFE-7F4F34407C5C}"/>
               </a:ext>
             </a:extLst>
           </p:cNvPr>
@@ -17926,38 +18901,8 @@
         </p:blipFill>
         <p:spPr>
           <a:xfrm>
-            <a:off x="6303228" y="709985"/>
-            <a:ext cx="5731510" cy="942340"/>
-          </a:xfrm>
-          <a:prstGeom prst="rect">
-            <a:avLst/>
-          </a:prstGeom>
-        </p:spPr>
-      </p:pic>
-      <p:pic>
-        <p:nvPicPr>
-          <p:cNvPr id="41" name="Picture 40">
-            <a:extLst>
-              <a:ext uri="{FF2B5EF4-FFF2-40B4-BE49-F238E27FC236}">
-                <a16:creationId xmlns:a16="http://schemas.microsoft.com/office/drawing/2014/main" id="{3494A7D3-D368-D9E6-43AA-3D2C46516606}"/>
-              </a:ext>
-            </a:extLst>
-          </p:cNvPr>
-          <p:cNvPicPr>
-            <a:picLocks noChangeAspect="1"/>
-          </p:cNvPicPr>
-          <p:nvPr/>
-        </p:nvPicPr>
-        <p:blipFill>
-          <a:blip r:embed="rId7"/>
-          <a:stretch>
-            <a:fillRect/>
-          </a:stretch>
-        </p:blipFill>
-        <p:spPr>
-          <a:xfrm>
-            <a:off x="6303228" y="1882494"/>
-            <a:ext cx="5731510" cy="1781175"/>
+            <a:off x="6778445" y="4331143"/>
+            <a:ext cx="4799765" cy="2352675"/>
           </a:xfrm>
           <a:prstGeom prst="rect">
             <a:avLst/>
@@ -17967,7 +18912,7 @@
     </p:spTree>
     <p:extLst>
       <p:ext uri="{BB962C8B-B14F-4D97-AF65-F5344CB8AC3E}">
-        <p14:creationId xmlns:p14="http://schemas.microsoft.com/office/powerpoint/2010/main" val="404854312"/>
+        <p14:creationId xmlns:p14="http://schemas.microsoft.com/office/powerpoint/2010/main" val="2069393026"/>
       </p:ext>
     </p:extLst>
   </p:cSld>
@@ -17996,10 +18941,66 @@
       </p:grpSpPr>
       <p:sp>
         <p:nvSpPr>
-          <p:cNvPr id="14" name="Slide Number Placeholder 13">
-            <a:extLst>
-              <a:ext uri="{FF2B5EF4-FFF2-40B4-BE49-F238E27FC236}">
-                <a16:creationId xmlns:a16="http://schemas.microsoft.com/office/drawing/2014/main" id="{42152A75-1CD2-44EC-9374-C83D4604A5DD}"/>
+          <p:cNvPr id="2" name="Title 1">
+            <a:extLst>
+              <a:ext uri="{FF2B5EF4-FFF2-40B4-BE49-F238E27FC236}">
+                <a16:creationId xmlns:a16="http://schemas.microsoft.com/office/drawing/2014/main" id="{5CE54ABB-4929-4810-950B-2DAEA0A5BAB4}"/>
+              </a:ext>
+            </a:extLst>
+          </p:cNvPr>
+          <p:cNvSpPr>
+            <a:spLocks noGrp="1"/>
+          </p:cNvSpPr>
+          <p:nvPr>
+            <p:ph type="title"/>
+          </p:nvPr>
+        </p:nvSpPr>
+        <p:spPr>
+          <a:xfrm>
+            <a:off x="1370131" y="646332"/>
+            <a:ext cx="10316110" cy="666800"/>
+          </a:xfrm>
+        </p:spPr>
+        <p:txBody>
+          <a:bodyPr>
+            <a:normAutofit/>
+          </a:bodyPr>
+          <a:lstStyle/>
+          <a:p>
+            <a:pPr marL="285750" indent="-285750">
+              <a:buFont typeface="Wingdings" panose="05000000000000000000" pitchFamily="2" charset="2"/>
+              <a:buChar char="ü"/>
+            </a:pPr>
+            <a:r>
+              <a:rPr lang="en-US" sz="2000" b="1" dirty="0">
+                <a:latin typeface="Arial" panose="020B0604020202020204" pitchFamily="34" charset="0"/>
+                <a:cs typeface="Arial" panose="020B0604020202020204" pitchFamily="34" charset="0"/>
+              </a:rPr>
+              <a:t>TEST DEPUIS UN AUTRE TERMINAL(Mon </a:t>
+            </a:r>
+            <a:r>
+              <a:rPr lang="en-US" sz="2000" b="1" dirty="0" err="1">
+                <a:latin typeface="Arial" panose="020B0604020202020204" pitchFamily="34" charset="0"/>
+                <a:cs typeface="Arial" panose="020B0604020202020204" pitchFamily="34" charset="0"/>
+              </a:rPr>
+              <a:t>ordinateur</a:t>
+            </a:r>
+            <a:r>
+              <a:rPr lang="en-US" sz="2000" b="1" dirty="0">
+                <a:latin typeface="Arial" panose="020B0604020202020204" pitchFamily="34" charset="0"/>
+                <a:cs typeface="Arial" panose="020B0604020202020204" pitchFamily="34" charset="0"/>
+              </a:rPr>
+              <a:t> personnel</a:t>
+            </a:r>
+          </a:p>
+        </p:txBody>
+      </p:sp>
+      <p:sp>
+        <p:nvSpPr>
+          <p:cNvPr id="11" name="Slide Number Placeholder 10">
+            <a:extLst>
+              <a:ext uri="{FF2B5EF4-FFF2-40B4-BE49-F238E27FC236}">
+                <a16:creationId xmlns:a16="http://schemas.microsoft.com/office/drawing/2014/main" id="{BAD5B6F4-0A90-447A-A1AE-D75C934B6B29}"/>
               </a:ext>
             </a:extLst>
           </p:cNvPr>
@@ -18035,82 +19036,12 @@
           </a:p>
         </p:txBody>
       </p:sp>
-      <p:sp>
-        <p:nvSpPr>
-          <p:cNvPr id="2" name="Title 1">
-            <a:extLst>
-              <a:ext uri="{FF2B5EF4-FFF2-40B4-BE49-F238E27FC236}">
-                <a16:creationId xmlns:a16="http://schemas.microsoft.com/office/drawing/2014/main" id="{27F0B4EE-0C84-A8C9-8591-16611BA0BBB3}"/>
-              </a:ext>
-            </a:extLst>
-          </p:cNvPr>
-          <p:cNvSpPr txBox="1">
-            <a:spLocks/>
-          </p:cNvSpPr>
-          <p:nvPr/>
-        </p:nvSpPr>
-        <p:spPr>
-          <a:xfrm>
-            <a:off x="401455" y="136525"/>
-            <a:ext cx="9580745" cy="597993"/>
-          </a:xfrm>
-          <a:prstGeom prst="rect">
-            <a:avLst/>
-          </a:prstGeom>
-        </p:spPr>
-        <p:txBody>
-          <a:bodyPr vert="horz" lIns="91440" tIns="45720" rIns="91440" bIns="45720" rtlCol="0" anchor="ctr">
-            <a:normAutofit/>
-          </a:bodyPr>
-          <a:lstStyle>
-            <a:lvl1pPr algn="l" defTabSz="914400" rtl="0" eaLnBrk="1" latinLnBrk="0" hangingPunct="1">
-              <a:lnSpc>
-                <a:spcPct val="90000"/>
-              </a:lnSpc>
-              <a:spcBef>
-                <a:spcPct val="0"/>
-              </a:spcBef>
-              <a:buNone/>
-              <a:defRPr sz="3600" kern="1200" cap="all" spc="150" baseline="0">
-                <a:solidFill>
-                  <a:schemeClr val="tx1">
-                    <a:lumMod val="75000"/>
-                    <a:lumOff val="25000"/>
-                  </a:schemeClr>
-                </a:solidFill>
-                <a:latin typeface="+mj-lt"/>
-                <a:ea typeface="+mj-ea"/>
-                <a:cs typeface="+mj-cs"/>
-              </a:defRPr>
-            </a:lvl1pPr>
-          </a:lstStyle>
-          <a:p>
-            <a:r>
-              <a:rPr lang="fr-FR" sz="2200" b="1" dirty="0">
-                <a:solidFill>
-                  <a:srgbClr val="0070C0"/>
-                </a:solidFill>
-                <a:latin typeface="Arial" panose="020B0604020202020204" pitchFamily="34" charset="0"/>
-                <a:cs typeface="Arial" panose="020B0604020202020204" pitchFamily="34" charset="0"/>
-              </a:rPr>
-              <a:t>5. Limitations des utilisateurs autorises</a:t>
-            </a:r>
-            <a:endParaRPr lang="en-US" sz="2200" b="1" dirty="0">
-              <a:solidFill>
-                <a:srgbClr val="0070C0"/>
-              </a:solidFill>
-              <a:latin typeface="Arial" panose="020B0604020202020204" pitchFamily="34" charset="0"/>
-              <a:cs typeface="Arial" panose="020B0604020202020204" pitchFamily="34" charset="0"/>
-            </a:endParaRPr>
-          </a:p>
-        </p:txBody>
-      </p:sp>
       <p:pic>
         <p:nvPicPr>
-          <p:cNvPr id="21" name="Picture 20">
-            <a:extLst>
-              <a:ext uri="{FF2B5EF4-FFF2-40B4-BE49-F238E27FC236}">
-                <a16:creationId xmlns:a16="http://schemas.microsoft.com/office/drawing/2014/main" id="{37320E05-F4C5-E563-6866-B0C80E6CBBD4}"/>
+          <p:cNvPr id="38" name="Picture 37">
+            <a:extLst>
+              <a:ext uri="{FF2B5EF4-FFF2-40B4-BE49-F238E27FC236}">
+                <a16:creationId xmlns:a16="http://schemas.microsoft.com/office/drawing/2014/main" id="{E2EEA252-B5B6-B0CD-F8A0-EF283DB89AD1}"/>
               </a:ext>
             </a:extLst>
           </p:cNvPr>
@@ -18127,228 +19058,8 @@
         </p:blipFill>
         <p:spPr>
           <a:xfrm>
-            <a:off x="401455" y="734518"/>
-            <a:ext cx="5731510" cy="598170"/>
-          </a:xfrm>
-          <a:prstGeom prst="rect">
-            <a:avLst/>
-          </a:prstGeom>
-        </p:spPr>
-      </p:pic>
-      <p:pic>
-        <p:nvPicPr>
-          <p:cNvPr id="22" name="Picture 21">
-            <a:extLst>
-              <a:ext uri="{FF2B5EF4-FFF2-40B4-BE49-F238E27FC236}">
-                <a16:creationId xmlns:a16="http://schemas.microsoft.com/office/drawing/2014/main" id="{535C1141-E6AA-F9AD-F4BF-6C8FFE1A6F0E}"/>
-              </a:ext>
-            </a:extLst>
-          </p:cNvPr>
-          <p:cNvPicPr>
-            <a:picLocks noChangeAspect="1"/>
-          </p:cNvPicPr>
-          <p:nvPr/>
-        </p:nvPicPr>
-        <p:blipFill>
-          <a:blip r:embed="rId3"/>
-          <a:stretch>
-            <a:fillRect/>
-          </a:stretch>
-        </p:blipFill>
-        <p:spPr>
-          <a:xfrm>
-            <a:off x="401455" y="1480925"/>
-            <a:ext cx="5731510" cy="585470"/>
-          </a:xfrm>
-          <a:prstGeom prst="rect">
-            <a:avLst/>
-          </a:prstGeom>
-        </p:spPr>
-      </p:pic>
-      <p:sp>
-        <p:nvSpPr>
-          <p:cNvPr id="23" name="Title 1">
-            <a:extLst>
-              <a:ext uri="{FF2B5EF4-FFF2-40B4-BE49-F238E27FC236}">
-                <a16:creationId xmlns:a16="http://schemas.microsoft.com/office/drawing/2014/main" id="{DF167CE2-C985-B175-1543-0AF62E5EC81B}"/>
-              </a:ext>
-            </a:extLst>
-          </p:cNvPr>
-          <p:cNvSpPr txBox="1">
-            <a:spLocks/>
-          </p:cNvSpPr>
-          <p:nvPr/>
-        </p:nvSpPr>
-        <p:spPr>
-          <a:xfrm>
-            <a:off x="401454" y="2214632"/>
-            <a:ext cx="9580745" cy="597993"/>
-          </a:xfrm>
-          <a:prstGeom prst="rect">
-            <a:avLst/>
-          </a:prstGeom>
-        </p:spPr>
-        <p:txBody>
-          <a:bodyPr vert="horz" lIns="91440" tIns="45720" rIns="91440" bIns="45720" rtlCol="0" anchor="ctr">
-            <a:normAutofit/>
-          </a:bodyPr>
-          <a:lstStyle>
-            <a:lvl1pPr algn="l" defTabSz="914400" rtl="0" eaLnBrk="1" latinLnBrk="0" hangingPunct="1">
-              <a:lnSpc>
-                <a:spcPct val="90000"/>
-              </a:lnSpc>
-              <a:spcBef>
-                <a:spcPct val="0"/>
-              </a:spcBef>
-              <a:buNone/>
-              <a:defRPr sz="3600" kern="1200" cap="all" spc="150" baseline="0">
-                <a:solidFill>
-                  <a:schemeClr val="tx1">
-                    <a:lumMod val="75000"/>
-                    <a:lumOff val="25000"/>
-                  </a:schemeClr>
-                </a:solidFill>
-                <a:latin typeface="+mj-lt"/>
-                <a:ea typeface="+mj-ea"/>
-                <a:cs typeface="+mj-cs"/>
-              </a:defRPr>
-            </a:lvl1pPr>
-          </a:lstStyle>
-          <a:p>
-            <a:r>
-              <a:rPr lang="fr-FR" sz="2200" b="1" dirty="0">
-                <a:solidFill>
-                  <a:srgbClr val="0070C0"/>
-                </a:solidFill>
-                <a:latin typeface="Arial" panose="020B0604020202020204" pitchFamily="34" charset="0"/>
-                <a:cs typeface="Arial" panose="020B0604020202020204" pitchFamily="34" charset="0"/>
-              </a:rPr>
-              <a:t>6. Limitations des utilisateurs autorises</a:t>
-            </a:r>
-            <a:endParaRPr lang="en-US" sz="2200" b="1" dirty="0">
-              <a:solidFill>
-                <a:srgbClr val="0070C0"/>
-              </a:solidFill>
-              <a:latin typeface="Arial" panose="020B0604020202020204" pitchFamily="34" charset="0"/>
-              <a:cs typeface="Arial" panose="020B0604020202020204" pitchFamily="34" charset="0"/>
-            </a:endParaRPr>
-          </a:p>
-        </p:txBody>
-      </p:sp>
-      <p:pic>
-        <p:nvPicPr>
-          <p:cNvPr id="24" name="Picture 23">
-            <a:extLst>
-              <a:ext uri="{FF2B5EF4-FFF2-40B4-BE49-F238E27FC236}">
-                <a16:creationId xmlns:a16="http://schemas.microsoft.com/office/drawing/2014/main" id="{33DCE563-F321-3640-A47F-098356D795A3}"/>
-              </a:ext>
-            </a:extLst>
-          </p:cNvPr>
-          <p:cNvPicPr>
-            <a:picLocks noChangeAspect="1"/>
-          </p:cNvPicPr>
-          <p:nvPr/>
-        </p:nvPicPr>
-        <p:blipFill>
-          <a:blip r:embed="rId4"/>
-          <a:stretch>
-            <a:fillRect/>
-          </a:stretch>
-        </p:blipFill>
-        <p:spPr>
-          <a:xfrm>
-            <a:off x="364490" y="2805856"/>
-            <a:ext cx="5731510" cy="2479040"/>
-          </a:xfrm>
-          <a:prstGeom prst="rect">
-            <a:avLst/>
-          </a:prstGeom>
-        </p:spPr>
-      </p:pic>
-      <p:pic>
-        <p:nvPicPr>
-          <p:cNvPr id="25" name="Picture 24">
-            <a:extLst>
-              <a:ext uri="{FF2B5EF4-FFF2-40B4-BE49-F238E27FC236}">
-                <a16:creationId xmlns:a16="http://schemas.microsoft.com/office/drawing/2014/main" id="{CB554ACA-64EF-8B10-DF82-B15A8A520747}"/>
-              </a:ext>
-            </a:extLst>
-          </p:cNvPr>
-          <p:cNvPicPr>
-            <a:picLocks noChangeAspect="1"/>
-          </p:cNvPicPr>
-          <p:nvPr/>
-        </p:nvPicPr>
-        <p:blipFill>
-          <a:blip r:embed="rId5"/>
-          <a:stretch>
-            <a:fillRect/>
-          </a:stretch>
-        </p:blipFill>
-        <p:spPr>
-          <a:xfrm>
-            <a:off x="364490" y="5536042"/>
-            <a:ext cx="5731510" cy="488315"/>
-          </a:xfrm>
-          <a:prstGeom prst="rect">
-            <a:avLst/>
-          </a:prstGeom>
-        </p:spPr>
-      </p:pic>
-      <p:pic>
-        <p:nvPicPr>
-          <p:cNvPr id="26" name="Picture 25">
-            <a:extLst>
-              <a:ext uri="{FF2B5EF4-FFF2-40B4-BE49-F238E27FC236}">
-                <a16:creationId xmlns:a16="http://schemas.microsoft.com/office/drawing/2014/main" id="{604516E3-F48E-D382-CE9D-65E4470D245A}"/>
-              </a:ext>
-            </a:extLst>
-          </p:cNvPr>
-          <p:cNvPicPr>
-            <a:picLocks noChangeAspect="1"/>
-          </p:cNvPicPr>
-          <p:nvPr/>
-        </p:nvPicPr>
-        <p:blipFill>
-          <a:blip r:embed="rId6"/>
-          <a:stretch>
-            <a:fillRect/>
-          </a:stretch>
-        </p:blipFill>
-        <p:spPr>
-          <a:xfrm>
-            <a:off x="6243268" y="2805856"/>
-            <a:ext cx="5731510" cy="772795"/>
-          </a:xfrm>
-          <a:prstGeom prst="rect">
-            <a:avLst/>
-          </a:prstGeom>
-        </p:spPr>
-      </p:pic>
-      <p:pic>
-        <p:nvPicPr>
-          <p:cNvPr id="27" name="Picture 26">
-            <a:extLst>
-              <a:ext uri="{FF2B5EF4-FFF2-40B4-BE49-F238E27FC236}">
-                <a16:creationId xmlns:a16="http://schemas.microsoft.com/office/drawing/2014/main" id="{5399513D-2DE3-0440-AE75-24964F6F9881}"/>
-              </a:ext>
-            </a:extLst>
-          </p:cNvPr>
-          <p:cNvPicPr>
-            <a:picLocks noChangeAspect="1"/>
-          </p:cNvPicPr>
-          <p:nvPr/>
-        </p:nvPicPr>
-        <p:blipFill>
-          <a:blip r:embed="rId7"/>
-          <a:stretch>
-            <a:fillRect/>
-          </a:stretch>
-        </p:blipFill>
-        <p:spPr>
-          <a:xfrm>
-            <a:off x="6243268" y="3740045"/>
-            <a:ext cx="5731510" cy="2454910"/>
+            <a:off x="1265555" y="1453596"/>
+            <a:ext cx="10525261" cy="4529356"/>
           </a:xfrm>
           <a:prstGeom prst="rect">
             <a:avLst/>
@@ -18358,7 +19069,7 @@
     </p:spTree>
     <p:extLst>
       <p:ext uri="{BB962C8B-B14F-4D97-AF65-F5344CB8AC3E}">
-        <p14:creationId xmlns:p14="http://schemas.microsoft.com/office/powerpoint/2010/main" val="4151694508"/>
+        <p14:creationId xmlns:p14="http://schemas.microsoft.com/office/powerpoint/2010/main" val="2121178069"/>
       </p:ext>
     </p:extLst>
   </p:cSld>
@@ -18387,23 +19098,23 @@
       </p:grpSpPr>
       <p:sp>
         <p:nvSpPr>
-          <p:cNvPr id="6" name="Slide Number Placeholder 5">
-            <a:extLst>
-              <a:ext uri="{FF2B5EF4-FFF2-40B4-BE49-F238E27FC236}">
-                <a16:creationId xmlns:a16="http://schemas.microsoft.com/office/drawing/2014/main" id="{BA32F697-D1D4-4B0A-B960-D1869BF8607A}"/>
-              </a:ext>
-            </a:extLst>
-          </p:cNvPr>
-          <p:cNvSpPr>
-            <a:spLocks noGrp="1"/>
-          </p:cNvSpPr>
-          <p:nvPr>
-            <p:ph type="sldNum" sz="quarter" idx="12"/>
-          </p:nvPr>
-        </p:nvSpPr>
-        <p:spPr>
-          <a:xfrm>
-            <a:off x="8610600" y="6356350"/>
+          <p:cNvPr id="7" name="Slide Number Placeholder 6">
+            <a:extLst>
+              <a:ext uri="{FF2B5EF4-FFF2-40B4-BE49-F238E27FC236}">
+                <a16:creationId xmlns:a16="http://schemas.microsoft.com/office/drawing/2014/main" id="{EBC02F21-4E3C-469E-B11C-9214231082D3}"/>
+              </a:ext>
+            </a:extLst>
+          </p:cNvPr>
+          <p:cNvSpPr>
+            <a:spLocks noGrp="1"/>
+          </p:cNvSpPr>
+          <p:nvPr>
+            <p:ph type="sldNum" sz="quarter" idx="4294967295"/>
+          </p:nvPr>
+        </p:nvSpPr>
+        <p:spPr>
+          <a:xfrm>
+            <a:off x="9448800" y="6356350"/>
             <a:ext cx="2743200" cy="365125"/>
           </a:xfrm>
         </p:spPr>
@@ -18412,20 +19123,97 @@
           <a:lstStyle/>
           <a:p>
             <a:fld id="{B5CEABB6-07DC-46E8-9B57-56EC44A396E5}" type="slidenum">
-              <a:rPr lang="en-US" smtClean="0"/>
+              <a:rPr lang="en-US" smtClean="0">
+                <a:latin typeface="Arial" panose="020B0604020202020204" pitchFamily="34" charset="0"/>
+                <a:cs typeface="Arial" panose="020B0604020202020204" pitchFamily="34" charset="0"/>
+              </a:rPr>
               <a:pPr/>
               <a:t>13</a:t>
             </a:fld>
-            <a:endParaRPr lang="en-US" dirty="0"/>
+            <a:endParaRPr lang="en-US" dirty="0">
+              <a:latin typeface="Arial" panose="020B0604020202020204" pitchFamily="34" charset="0"/>
+              <a:cs typeface="Arial" panose="020B0604020202020204" pitchFamily="34" charset="0"/>
+            </a:endParaRPr>
+          </a:p>
+        </p:txBody>
+      </p:sp>
+      <p:sp>
+        <p:nvSpPr>
+          <p:cNvPr id="3" name="Title 1">
+            <a:extLst>
+              <a:ext uri="{FF2B5EF4-FFF2-40B4-BE49-F238E27FC236}">
+                <a16:creationId xmlns:a16="http://schemas.microsoft.com/office/drawing/2014/main" id="{30117BEA-B382-6D95-1A61-3EAEEF91332A}"/>
+              </a:ext>
+            </a:extLst>
+          </p:cNvPr>
+          <p:cNvSpPr txBox="1">
+            <a:spLocks/>
+          </p:cNvSpPr>
+          <p:nvPr/>
+        </p:nvSpPr>
+        <p:spPr>
+          <a:xfrm>
+            <a:off x="1305627" y="176598"/>
+            <a:ext cx="9580745" cy="597993"/>
+          </a:xfrm>
+          <a:prstGeom prst="rect">
+            <a:avLst/>
+          </a:prstGeom>
+        </p:spPr>
+        <p:txBody>
+          <a:bodyPr vert="horz" lIns="91440" tIns="45720" rIns="91440" bIns="45720" rtlCol="0" anchor="ctr">
+            <a:normAutofit/>
+          </a:bodyPr>
+          <a:lstStyle>
+            <a:lvl1pPr algn="l" defTabSz="914400" rtl="0" eaLnBrk="1" latinLnBrk="0" hangingPunct="1">
+              <a:lnSpc>
+                <a:spcPct val="90000"/>
+              </a:lnSpc>
+              <a:spcBef>
+                <a:spcPct val="0"/>
+              </a:spcBef>
+              <a:buNone/>
+              <a:defRPr sz="3600" kern="1200" cap="all" spc="150" baseline="0">
+                <a:solidFill>
+                  <a:schemeClr val="tx1">
+                    <a:lumMod val="75000"/>
+                    <a:lumOff val="25000"/>
+                  </a:schemeClr>
+                </a:solidFill>
+                <a:latin typeface="+mj-lt"/>
+                <a:ea typeface="+mj-ea"/>
+                <a:cs typeface="+mj-cs"/>
+              </a:defRPr>
+            </a:lvl1pPr>
+          </a:lstStyle>
+          <a:p>
+            <a:pPr algn="ctr"/>
+            <a:r>
+              <a:rPr lang="fr-FR" sz="2200" b="1" dirty="0">
+                <a:solidFill>
+                  <a:srgbClr val="0070C0"/>
+                </a:solidFill>
+                <a:latin typeface="Arial" panose="020B0604020202020204" pitchFamily="34" charset="0"/>
+                <a:cs typeface="Arial" panose="020B0604020202020204" pitchFamily="34" charset="0"/>
+              </a:rPr>
+              <a:t>4. MISE EN PLACE DE FAIL2BAN</a:t>
+            </a:r>
+            <a:endParaRPr lang="en-US" sz="2200" b="1" dirty="0">
+              <a:solidFill>
+                <a:srgbClr val="0070C0"/>
+              </a:solidFill>
+              <a:latin typeface="Arial" panose="020B0604020202020204" pitchFamily="34" charset="0"/>
+              <a:cs typeface="Arial" panose="020B0604020202020204" pitchFamily="34" charset="0"/>
+            </a:endParaRPr>
           </a:p>
         </p:txBody>
       </p:sp>
       <p:pic>
         <p:nvPicPr>
-          <p:cNvPr id="7" name="Picture 6">
-            <a:extLst>
-              <a:ext uri="{FF2B5EF4-FFF2-40B4-BE49-F238E27FC236}">
-                <a16:creationId xmlns:a16="http://schemas.microsoft.com/office/drawing/2014/main" id="{90C935A7-35B5-52CD-BCE4-76F86B06A1DF}"/>
+          <p:cNvPr id="12" name="Picture 11">
+            <a:extLst>
+              <a:ext uri="{FF2B5EF4-FFF2-40B4-BE49-F238E27FC236}">
+                <a16:creationId xmlns:a16="http://schemas.microsoft.com/office/drawing/2014/main" id="{DDDAA25C-CE2B-B1F7-CDA8-021812C270F2}"/>
               </a:ext>
             </a:extLst>
           </p:cNvPr>
@@ -18442,18 +19230,529 @@
         </p:blipFill>
         <p:spPr>
           <a:xfrm>
-            <a:off x="364490" y="553894"/>
-            <a:ext cx="5731510" cy="2562860"/>
+            <a:off x="363129" y="2369324"/>
+            <a:ext cx="5731510" cy="1980565"/>
           </a:xfrm>
           <a:prstGeom prst="rect">
             <a:avLst/>
           </a:prstGeom>
         </p:spPr>
       </p:pic>
+      <p:pic>
+        <p:nvPicPr>
+          <p:cNvPr id="37" name="Picture 36">
+            <a:extLst>
+              <a:ext uri="{FF2B5EF4-FFF2-40B4-BE49-F238E27FC236}">
+                <a16:creationId xmlns:a16="http://schemas.microsoft.com/office/drawing/2014/main" id="{BB99C3A3-DBE2-AB21-8B89-CA8315F9664D}"/>
+              </a:ext>
+            </a:extLst>
+          </p:cNvPr>
+          <p:cNvPicPr>
+            <a:picLocks noChangeAspect="1"/>
+          </p:cNvPicPr>
+          <p:nvPr/>
+        </p:nvPicPr>
+        <p:blipFill>
+          <a:blip r:embed="rId3"/>
+          <a:stretch>
+            <a:fillRect/>
+          </a:stretch>
+        </p:blipFill>
+        <p:spPr>
+          <a:xfrm>
+            <a:off x="363129" y="4508987"/>
+            <a:ext cx="5731510" cy="1289685"/>
+          </a:xfrm>
+          <a:prstGeom prst="rect">
+            <a:avLst/>
+          </a:prstGeom>
+        </p:spPr>
+      </p:pic>
+      <p:pic>
+        <p:nvPicPr>
+          <p:cNvPr id="38" name="Picture 37">
+            <a:extLst>
+              <a:ext uri="{FF2B5EF4-FFF2-40B4-BE49-F238E27FC236}">
+                <a16:creationId xmlns:a16="http://schemas.microsoft.com/office/drawing/2014/main" id="{BD6931E3-73DB-0A77-112F-12F3EBD19436}"/>
+              </a:ext>
+            </a:extLst>
+          </p:cNvPr>
+          <p:cNvPicPr>
+            <a:picLocks noChangeAspect="1"/>
+          </p:cNvPicPr>
+          <p:nvPr/>
+        </p:nvPicPr>
+        <p:blipFill>
+          <a:blip r:embed="rId4"/>
+          <a:stretch>
+            <a:fillRect/>
+          </a:stretch>
+        </p:blipFill>
+        <p:spPr>
+          <a:xfrm>
+            <a:off x="6508952" y="2453785"/>
+            <a:ext cx="5319919" cy="352778"/>
+          </a:xfrm>
+          <a:prstGeom prst="rect">
+            <a:avLst/>
+          </a:prstGeom>
+        </p:spPr>
+      </p:pic>
+      <p:pic>
+        <p:nvPicPr>
+          <p:cNvPr id="39" name="Picture 38">
+            <a:extLst>
+              <a:ext uri="{FF2B5EF4-FFF2-40B4-BE49-F238E27FC236}">
+                <a16:creationId xmlns:a16="http://schemas.microsoft.com/office/drawing/2014/main" id="{68E0596F-EC01-3F17-4EE8-423EF69D9B80}"/>
+              </a:ext>
+            </a:extLst>
+          </p:cNvPr>
+          <p:cNvPicPr>
+            <a:picLocks noChangeAspect="1"/>
+          </p:cNvPicPr>
+          <p:nvPr/>
+        </p:nvPicPr>
+        <p:blipFill>
+          <a:blip r:embed="rId5"/>
+          <a:stretch>
+            <a:fillRect/>
+          </a:stretch>
+        </p:blipFill>
+        <p:spPr>
+          <a:xfrm>
+            <a:off x="6478183" y="3506322"/>
+            <a:ext cx="5319919" cy="2292350"/>
+          </a:xfrm>
+          <a:prstGeom prst="rect">
+            <a:avLst/>
+          </a:prstGeom>
+        </p:spPr>
+      </p:pic>
+      <p:sp>
+        <p:nvSpPr>
+          <p:cNvPr id="8" name="Content Placeholder 2">
+            <a:extLst>
+              <a:ext uri="{FF2B5EF4-FFF2-40B4-BE49-F238E27FC236}">
+                <a16:creationId xmlns:a16="http://schemas.microsoft.com/office/drawing/2014/main" id="{F19A18AC-E281-1A64-700C-2EBEB64CC634}"/>
+              </a:ext>
+            </a:extLst>
+          </p:cNvPr>
+          <p:cNvSpPr txBox="1">
+            <a:spLocks/>
+          </p:cNvSpPr>
+          <p:nvPr/>
+        </p:nvSpPr>
+        <p:spPr>
+          <a:xfrm>
+            <a:off x="399361" y="730986"/>
+            <a:ext cx="11578212" cy="916361"/>
+          </a:xfrm>
+          <a:prstGeom prst="rect">
+            <a:avLst/>
+          </a:prstGeom>
+        </p:spPr>
+        <p:txBody>
+          <a:bodyPr vert="horz" lIns="91440" tIns="45720" rIns="91440" bIns="45720" rtlCol="0" anchor="t">
+            <a:noAutofit/>
+          </a:bodyPr>
+          <a:lstStyle>
+            <a:lvl1pPr marL="228600" indent="-228600" algn="l" defTabSz="914400" rtl="0" eaLnBrk="1" latinLnBrk="0" hangingPunct="1">
+              <a:lnSpc>
+                <a:spcPct val="90000"/>
+              </a:lnSpc>
+              <a:spcBef>
+                <a:spcPts val="1000"/>
+              </a:spcBef>
+              <a:buFont typeface="Arial" panose="020B0604020202020204" pitchFamily="34" charset="0"/>
+              <a:buChar char="•"/>
+              <a:defRPr sz="2800" kern="1200">
+                <a:solidFill>
+                  <a:schemeClr val="tx1">
+                    <a:lumMod val="75000"/>
+                    <a:lumOff val="25000"/>
+                  </a:schemeClr>
+                </a:solidFill>
+                <a:latin typeface="+mn-lt"/>
+                <a:ea typeface="+mn-ea"/>
+                <a:cs typeface="+mn-cs"/>
+              </a:defRPr>
+            </a:lvl1pPr>
+            <a:lvl2pPr marL="685800" indent="-228600" algn="l" defTabSz="914400" rtl="0" eaLnBrk="1" latinLnBrk="0" hangingPunct="1">
+              <a:lnSpc>
+                <a:spcPct val="90000"/>
+              </a:lnSpc>
+              <a:spcBef>
+                <a:spcPts val="500"/>
+              </a:spcBef>
+              <a:buFont typeface="Arial" panose="020B0604020202020204" pitchFamily="34" charset="0"/>
+              <a:buChar char="•"/>
+              <a:defRPr sz="2400" kern="1200">
+                <a:solidFill>
+                  <a:schemeClr val="tx1">
+                    <a:lumMod val="75000"/>
+                    <a:lumOff val="25000"/>
+                  </a:schemeClr>
+                </a:solidFill>
+                <a:latin typeface="+mn-lt"/>
+                <a:ea typeface="+mn-ea"/>
+                <a:cs typeface="+mn-cs"/>
+              </a:defRPr>
+            </a:lvl2pPr>
+            <a:lvl3pPr marL="1143000" indent="-228600" algn="l" defTabSz="914400" rtl="0" eaLnBrk="1" latinLnBrk="0" hangingPunct="1">
+              <a:lnSpc>
+                <a:spcPct val="90000"/>
+              </a:lnSpc>
+              <a:spcBef>
+                <a:spcPts val="500"/>
+              </a:spcBef>
+              <a:buFont typeface="Arial" panose="020B0604020202020204" pitchFamily="34" charset="0"/>
+              <a:buChar char="•"/>
+              <a:defRPr sz="2000" kern="1200">
+                <a:solidFill>
+                  <a:schemeClr val="tx1">
+                    <a:lumMod val="75000"/>
+                    <a:lumOff val="25000"/>
+                  </a:schemeClr>
+                </a:solidFill>
+                <a:latin typeface="+mn-lt"/>
+                <a:ea typeface="+mn-ea"/>
+                <a:cs typeface="+mn-cs"/>
+              </a:defRPr>
+            </a:lvl3pPr>
+            <a:lvl4pPr marL="1600200" indent="-228600" algn="l" defTabSz="914400" rtl="0" eaLnBrk="1" latinLnBrk="0" hangingPunct="1">
+              <a:lnSpc>
+                <a:spcPct val="90000"/>
+              </a:lnSpc>
+              <a:spcBef>
+                <a:spcPts val="500"/>
+              </a:spcBef>
+              <a:buFont typeface="Arial" panose="020B0604020202020204" pitchFamily="34" charset="0"/>
+              <a:buChar char="•"/>
+              <a:defRPr sz="1800" kern="1200">
+                <a:solidFill>
+                  <a:schemeClr val="tx1">
+                    <a:lumMod val="75000"/>
+                    <a:lumOff val="25000"/>
+                  </a:schemeClr>
+                </a:solidFill>
+                <a:latin typeface="+mn-lt"/>
+                <a:ea typeface="+mn-ea"/>
+                <a:cs typeface="+mn-cs"/>
+              </a:defRPr>
+            </a:lvl4pPr>
+            <a:lvl5pPr marL="2057400" indent="-228600" algn="l" defTabSz="914400" rtl="0" eaLnBrk="1" latinLnBrk="0" hangingPunct="1">
+              <a:lnSpc>
+                <a:spcPct val="90000"/>
+              </a:lnSpc>
+              <a:spcBef>
+                <a:spcPts val="500"/>
+              </a:spcBef>
+              <a:buFont typeface="Arial" panose="020B0604020202020204" pitchFamily="34" charset="0"/>
+              <a:buChar char="•"/>
+              <a:defRPr sz="1800" kern="1200">
+                <a:solidFill>
+                  <a:schemeClr val="tx1">
+                    <a:lumMod val="75000"/>
+                    <a:lumOff val="25000"/>
+                  </a:schemeClr>
+                </a:solidFill>
+                <a:latin typeface="+mn-lt"/>
+                <a:ea typeface="+mn-ea"/>
+                <a:cs typeface="+mn-cs"/>
+              </a:defRPr>
+            </a:lvl5pPr>
+            <a:lvl6pPr marL="2514600" indent="-228600" algn="l" defTabSz="914400" rtl="0" eaLnBrk="1" latinLnBrk="0" hangingPunct="1">
+              <a:lnSpc>
+                <a:spcPct val="90000"/>
+              </a:lnSpc>
+              <a:spcBef>
+                <a:spcPts val="500"/>
+              </a:spcBef>
+              <a:buFont typeface="Arial" panose="020B0604020202020204" pitchFamily="34" charset="0"/>
+              <a:buChar char="•"/>
+              <a:defRPr sz="1800" kern="1200">
+                <a:solidFill>
+                  <a:schemeClr val="tx1"/>
+                </a:solidFill>
+                <a:latin typeface="+mn-lt"/>
+                <a:ea typeface="+mn-ea"/>
+                <a:cs typeface="+mn-cs"/>
+              </a:defRPr>
+            </a:lvl6pPr>
+            <a:lvl7pPr marL="2971800" indent="-228600" algn="l" defTabSz="914400" rtl="0" eaLnBrk="1" latinLnBrk="0" hangingPunct="1">
+              <a:lnSpc>
+                <a:spcPct val="90000"/>
+              </a:lnSpc>
+              <a:spcBef>
+                <a:spcPts val="500"/>
+              </a:spcBef>
+              <a:buFont typeface="Arial" panose="020B0604020202020204" pitchFamily="34" charset="0"/>
+              <a:buChar char="•"/>
+              <a:defRPr sz="1800" kern="1200">
+                <a:solidFill>
+                  <a:schemeClr val="tx1"/>
+                </a:solidFill>
+                <a:latin typeface="+mn-lt"/>
+                <a:ea typeface="+mn-ea"/>
+                <a:cs typeface="+mn-cs"/>
+              </a:defRPr>
+            </a:lvl7pPr>
+            <a:lvl8pPr marL="3429000" indent="-228600" algn="l" defTabSz="914400" rtl="0" eaLnBrk="1" latinLnBrk="0" hangingPunct="1">
+              <a:lnSpc>
+                <a:spcPct val="90000"/>
+              </a:lnSpc>
+              <a:spcBef>
+                <a:spcPts val="500"/>
+              </a:spcBef>
+              <a:buFont typeface="Arial" panose="020B0604020202020204" pitchFamily="34" charset="0"/>
+              <a:buChar char="•"/>
+              <a:defRPr sz="1800" kern="1200">
+                <a:solidFill>
+                  <a:schemeClr val="tx1"/>
+                </a:solidFill>
+                <a:latin typeface="+mn-lt"/>
+                <a:ea typeface="+mn-ea"/>
+                <a:cs typeface="+mn-cs"/>
+              </a:defRPr>
+            </a:lvl8pPr>
+            <a:lvl9pPr marL="3886200" indent="-228600" algn="l" defTabSz="914400" rtl="0" eaLnBrk="1" latinLnBrk="0" hangingPunct="1">
+              <a:lnSpc>
+                <a:spcPct val="90000"/>
+              </a:lnSpc>
+              <a:spcBef>
+                <a:spcPts val="500"/>
+              </a:spcBef>
+              <a:buFont typeface="Arial" panose="020B0604020202020204" pitchFamily="34" charset="0"/>
+              <a:buChar char="•"/>
+              <a:defRPr sz="1800" kern="1200">
+                <a:solidFill>
+                  <a:schemeClr val="tx1"/>
+                </a:solidFill>
+                <a:latin typeface="+mn-lt"/>
+                <a:ea typeface="+mn-ea"/>
+                <a:cs typeface="+mn-cs"/>
+              </a:defRPr>
+            </a:lvl9pPr>
+          </a:lstStyle>
+          <a:p>
+            <a:pPr>
+              <a:buFont typeface="Wingdings" panose="05000000000000000000" pitchFamily="2" charset="2"/>
+              <a:buChar char="v"/>
+            </a:pPr>
+            <a:r>
+              <a:rPr lang="fr-FR" sz="2000" b="1" dirty="0">
+                <a:solidFill>
+                  <a:srgbClr val="0070C0"/>
+                </a:solidFill>
+                <a:latin typeface="Arial" panose="020B0604020202020204" pitchFamily="34" charset="0"/>
+                <a:cs typeface="Arial" panose="020B0604020202020204" pitchFamily="34" charset="0"/>
+              </a:rPr>
+              <a:t>Objectif</a:t>
+            </a:r>
+          </a:p>
+          <a:p>
+            <a:pPr marL="0" indent="0">
+              <a:buNone/>
+            </a:pPr>
+            <a:r>
+              <a:rPr lang="fr-FR" sz="1800" b="1" dirty="0">
+                <a:latin typeface="Arial" panose="020B0604020202020204" pitchFamily="34" charset="0"/>
+                <a:cs typeface="Arial" panose="020B0604020202020204" pitchFamily="34" charset="0"/>
+              </a:rPr>
+              <a:t>Fail2ban surveille les journaux SSH et bloque automatiquement les adresses IP qui échouent trop souvent à s'authentifier, protégeant ainsi le serveur contre les attaques par force brute.</a:t>
+            </a:r>
+          </a:p>
+        </p:txBody>
+      </p:sp>
+      <p:sp>
+        <p:nvSpPr>
+          <p:cNvPr id="9" name="ZoneTexte 8">
+            <a:extLst>
+              <a:ext uri="{FF2B5EF4-FFF2-40B4-BE49-F238E27FC236}">
+                <a16:creationId xmlns:a16="http://schemas.microsoft.com/office/drawing/2014/main" id="{E1603449-BBC8-6A60-A37C-7F93E044C9AC}"/>
+              </a:ext>
+            </a:extLst>
+          </p:cNvPr>
+          <p:cNvSpPr txBox="1"/>
+          <p:nvPr/>
+        </p:nvSpPr>
+        <p:spPr>
+          <a:xfrm>
+            <a:off x="617213" y="2005786"/>
+            <a:ext cx="6215864" cy="279564"/>
+          </a:xfrm>
+          <a:prstGeom prst="rect">
+            <a:avLst/>
+          </a:prstGeom>
+          <a:noFill/>
+        </p:spPr>
+        <p:txBody>
+          <a:bodyPr wrap="square">
+            <a:spAutoFit/>
+          </a:bodyPr>
+          <a:lstStyle/>
+          <a:p>
+            <a:pPr marL="342900" indent="-342900">
+              <a:lnSpc>
+                <a:spcPts val="1425"/>
+              </a:lnSpc>
+              <a:buFont typeface="+mj-lt"/>
+              <a:buAutoNum type="arabicPeriod"/>
+            </a:pPr>
+            <a:r>
+              <a:rPr lang="en-US" dirty="0">
+                <a:latin typeface="Arial" panose="020B0604020202020204" pitchFamily="34" charset="0"/>
+                <a:cs typeface="Arial" panose="020B0604020202020204" pitchFamily="34" charset="0"/>
+              </a:rPr>
+              <a:t>Update du </a:t>
+            </a:r>
+            <a:r>
+              <a:rPr lang="en-US" dirty="0" err="1">
+                <a:latin typeface="Arial" panose="020B0604020202020204" pitchFamily="34" charset="0"/>
+                <a:cs typeface="Arial" panose="020B0604020202020204" pitchFamily="34" charset="0"/>
+              </a:rPr>
+              <a:t>Serveur</a:t>
+            </a:r>
+            <a:r>
+              <a:rPr lang="en-US" dirty="0">
+                <a:latin typeface="Arial" panose="020B0604020202020204" pitchFamily="34" charset="0"/>
+                <a:cs typeface="Arial" panose="020B0604020202020204" pitchFamily="34" charset="0"/>
+              </a:rPr>
+              <a:t> &amp; Installation de fail2ban</a:t>
+            </a:r>
+          </a:p>
+        </p:txBody>
+      </p:sp>
+      <p:sp>
+        <p:nvSpPr>
+          <p:cNvPr id="13" name="ZoneTexte 12">
+            <a:extLst>
+              <a:ext uri="{FF2B5EF4-FFF2-40B4-BE49-F238E27FC236}">
+                <a16:creationId xmlns:a16="http://schemas.microsoft.com/office/drawing/2014/main" id="{01D3A131-675D-84C7-E3C2-AB93A2C49659}"/>
+              </a:ext>
+            </a:extLst>
+          </p:cNvPr>
+          <p:cNvSpPr txBox="1"/>
+          <p:nvPr/>
+        </p:nvSpPr>
+        <p:spPr>
+          <a:xfrm>
+            <a:off x="6597940" y="2054535"/>
+            <a:ext cx="5141942" cy="459100"/>
+          </a:xfrm>
+          <a:prstGeom prst="rect">
+            <a:avLst/>
+          </a:prstGeom>
+          <a:noFill/>
+        </p:spPr>
+        <p:txBody>
+          <a:bodyPr wrap="square">
+            <a:spAutoFit/>
+          </a:bodyPr>
+          <a:lstStyle/>
+          <a:p>
+            <a:pPr marL="342900" indent="-342900">
+              <a:lnSpc>
+                <a:spcPts val="1425"/>
+              </a:lnSpc>
+              <a:buFont typeface="+mj-lt"/>
+              <a:buAutoNum type="arabicPeriod" startAt="2"/>
+            </a:pPr>
+            <a:r>
+              <a:rPr lang="fr-FR" dirty="0">
+                <a:latin typeface="Arial" panose="020B0604020202020204" pitchFamily="34" charset="0"/>
+                <a:cs typeface="Arial" panose="020B0604020202020204" pitchFamily="34" charset="0"/>
+              </a:rPr>
+              <a:t>Création du fichier de configuration local</a:t>
+            </a:r>
+          </a:p>
+          <a:p>
+            <a:pPr>
+              <a:lnSpc>
+                <a:spcPts val="1425"/>
+              </a:lnSpc>
+            </a:pPr>
+            <a:endParaRPr lang="en-US" dirty="0">
+              <a:latin typeface="Arial" panose="020B0604020202020204" pitchFamily="34" charset="0"/>
+              <a:cs typeface="Arial" panose="020B0604020202020204" pitchFamily="34" charset="0"/>
+            </a:endParaRPr>
+          </a:p>
+        </p:txBody>
+      </p:sp>
+      <p:sp>
+        <p:nvSpPr>
+          <p:cNvPr id="14" name="ZoneTexte 13">
+            <a:extLst>
+              <a:ext uri="{FF2B5EF4-FFF2-40B4-BE49-F238E27FC236}">
+                <a16:creationId xmlns:a16="http://schemas.microsoft.com/office/drawing/2014/main" id="{14A33E76-F56E-955E-BEC8-894F92D1FDBC}"/>
+              </a:ext>
+            </a:extLst>
+          </p:cNvPr>
+          <p:cNvSpPr txBox="1"/>
+          <p:nvPr/>
+        </p:nvSpPr>
+        <p:spPr>
+          <a:xfrm>
+            <a:off x="6597940" y="3131526"/>
+            <a:ext cx="5141942" cy="459100"/>
+          </a:xfrm>
+          <a:prstGeom prst="rect">
+            <a:avLst/>
+          </a:prstGeom>
+          <a:noFill/>
+        </p:spPr>
+        <p:txBody>
+          <a:bodyPr wrap="square">
+            <a:spAutoFit/>
+          </a:bodyPr>
+          <a:lstStyle/>
+          <a:p>
+            <a:pPr marL="342900" indent="-342900">
+              <a:lnSpc>
+                <a:spcPts val="1425"/>
+              </a:lnSpc>
+              <a:buFont typeface="+mj-lt"/>
+              <a:buAutoNum type="arabicPeriod" startAt="3"/>
+            </a:pPr>
+            <a:r>
+              <a:rPr lang="fr-FR" dirty="0">
+                <a:latin typeface="Arial" panose="020B0604020202020204" pitchFamily="34" charset="0"/>
+                <a:cs typeface="Arial" panose="020B0604020202020204" pitchFamily="34" charset="0"/>
+              </a:rPr>
+              <a:t>Modification de la section [</a:t>
+            </a:r>
+            <a:r>
+              <a:rPr lang="fr-FR" dirty="0" err="1">
+                <a:latin typeface="Arial" panose="020B0604020202020204" pitchFamily="34" charset="0"/>
+                <a:cs typeface="Arial" panose="020B0604020202020204" pitchFamily="34" charset="0"/>
+              </a:rPr>
+              <a:t>sshd</a:t>
+            </a:r>
+            <a:r>
+              <a:rPr lang="fr-FR" dirty="0">
+                <a:latin typeface="Arial" panose="020B0604020202020204" pitchFamily="34" charset="0"/>
+                <a:cs typeface="Arial" panose="020B0604020202020204" pitchFamily="34" charset="0"/>
+              </a:rPr>
+              <a:t>]</a:t>
+            </a:r>
+          </a:p>
+          <a:p>
+            <a:pPr>
+              <a:lnSpc>
+                <a:spcPts val="1425"/>
+              </a:lnSpc>
+            </a:pPr>
+            <a:endParaRPr lang="en-US" dirty="0">
+              <a:latin typeface="Arial" panose="020B0604020202020204" pitchFamily="34" charset="0"/>
+              <a:cs typeface="Arial" panose="020B0604020202020204" pitchFamily="34" charset="0"/>
+            </a:endParaRPr>
+          </a:p>
+        </p:txBody>
+      </p:sp>
     </p:spTree>
     <p:extLst>
       <p:ext uri="{BB962C8B-B14F-4D97-AF65-F5344CB8AC3E}">
-        <p14:creationId xmlns:p14="http://schemas.microsoft.com/office/powerpoint/2010/main" val="1472106130"/>
+        <p14:creationId xmlns:p14="http://schemas.microsoft.com/office/powerpoint/2010/main" val="404854312"/>
       </p:ext>
     </p:extLst>
   </p:cSld>
@@ -18468,7 +19767,13 @@
   <p:cSld>
     <p:spTree>
       <p:nvGrpSpPr>
-        <p:cNvPr id="1" name=""/>
+        <p:cNvPr id="1" name="">
+          <a:extLst>
+            <a:ext uri="{FF2B5EF4-FFF2-40B4-BE49-F238E27FC236}">
+              <a16:creationId xmlns:a16="http://schemas.microsoft.com/office/drawing/2014/main" id="{AC5D461D-6E0F-CAD6-CD4D-0A78157DECE2}"/>
+            </a:ext>
+          </a:extLst>
+        </p:cNvPr>
         <p:cNvGrpSpPr/>
         <p:nvPr/>
       </p:nvGrpSpPr>
@@ -18482,567 +19787,23 @@
       </p:grpSpPr>
       <p:sp>
         <p:nvSpPr>
-          <p:cNvPr id="2" name="Title 1">
-            <a:extLst>
-              <a:ext uri="{FF2B5EF4-FFF2-40B4-BE49-F238E27FC236}">
-                <a16:creationId xmlns:a16="http://schemas.microsoft.com/office/drawing/2014/main" id="{27A6F7BB-30A8-4980-AD4A-2FB0B53FA6C9}"/>
-              </a:ext>
-            </a:extLst>
-          </p:cNvPr>
-          <p:cNvSpPr>
-            <a:spLocks noGrp="1"/>
-          </p:cNvSpPr>
-          <p:nvPr>
-            <p:ph type="title"/>
-          </p:nvPr>
-        </p:nvSpPr>
-        <p:spPr>
-          <a:xfrm>
-            <a:off x="1885156" y="892177"/>
-            <a:ext cx="8421688" cy="1325563"/>
-          </a:xfrm>
-        </p:spPr>
-        <p:txBody>
-          <a:bodyPr/>
-          <a:lstStyle/>
-          <a:p>
-            <a:r>
-              <a:rPr lang="en-US" dirty="0">
-                <a:latin typeface="Arial" panose="020B0604020202020204" pitchFamily="34" charset="0"/>
-                <a:cs typeface="Arial" panose="020B0604020202020204" pitchFamily="34" charset="0"/>
-              </a:rPr>
-              <a:t>MEET THE TEAM</a:t>
-            </a:r>
-          </a:p>
-        </p:txBody>
-      </p:sp>
-      <p:pic>
-        <p:nvPicPr>
-          <p:cNvPr id="26" name="Picture Placeholder 25" descr="Team member headshot">
-            <a:extLst>
-              <a:ext uri="{FF2B5EF4-FFF2-40B4-BE49-F238E27FC236}">
-                <a16:creationId xmlns:a16="http://schemas.microsoft.com/office/drawing/2014/main" id="{E287A61C-B7FB-4B69-97E7-7B7AFC8A5D33}"/>
-              </a:ext>
-            </a:extLst>
-          </p:cNvPr>
-          <p:cNvPicPr>
-            <a:picLocks noGrp="1" noChangeAspect="1"/>
-          </p:cNvPicPr>
-          <p:nvPr>
-            <p:ph type="pic" sz="quarter" idx="14"/>
-          </p:nvPr>
-        </p:nvPicPr>
-        <p:blipFill rotWithShape="1">
-          <a:blip r:embed="rId2">
-            <a:extLst>
-              <a:ext uri="{28A0092B-C50C-407E-A947-70E740481C1C}">
-                <a14:useLocalDpi xmlns:a14="http://schemas.microsoft.com/office/drawing/2010/main" val="0"/>
-              </a:ext>
-            </a:extLst>
-          </a:blip>
-          <a:srcRect/>
-          <a:stretch/>
-        </p:blipFill>
-        <p:spPr>
-          <a:xfrm>
-            <a:off x="1487181" y="2886074"/>
-            <a:ext cx="1845511" cy="1845511"/>
-          </a:xfrm>
-        </p:spPr>
-      </p:pic>
-      <p:pic>
-        <p:nvPicPr>
-          <p:cNvPr id="47" name="Picture Placeholder 46" descr="Team member headshot">
-            <a:extLst>
-              <a:ext uri="{FF2B5EF4-FFF2-40B4-BE49-F238E27FC236}">
-                <a16:creationId xmlns:a16="http://schemas.microsoft.com/office/drawing/2014/main" id="{8AF5260A-2860-4F88-BA4D-70530D3E14AA}"/>
-              </a:ext>
-            </a:extLst>
-          </p:cNvPr>
-          <p:cNvPicPr>
-            <a:picLocks noGrp="1" noChangeAspect="1"/>
-          </p:cNvPicPr>
-          <p:nvPr>
-            <p:ph type="pic" sz="quarter" idx="15"/>
-          </p:nvPr>
-        </p:nvPicPr>
-        <p:blipFill rotWithShape="1">
-          <a:blip r:embed="rId3">
-            <a:extLst>
-              <a:ext uri="{28A0092B-C50C-407E-A947-70E740481C1C}">
-                <a14:useLocalDpi xmlns:a14="http://schemas.microsoft.com/office/drawing/2010/main" val="0"/>
-              </a:ext>
-            </a:extLst>
-          </a:blip>
-          <a:srcRect/>
-          <a:stretch/>
-        </p:blipFill>
-        <p:spPr>
-          <a:xfrm>
-            <a:off x="3836914" y="2886074"/>
-            <a:ext cx="1845511" cy="1845511"/>
-          </a:xfrm>
-        </p:spPr>
-      </p:pic>
-      <p:pic>
-        <p:nvPicPr>
-          <p:cNvPr id="45" name="Picture Placeholder 44" descr="Team member headshot">
-            <a:extLst>
-              <a:ext uri="{FF2B5EF4-FFF2-40B4-BE49-F238E27FC236}">
-                <a16:creationId xmlns:a16="http://schemas.microsoft.com/office/drawing/2014/main" id="{4442FA67-BF04-4E45-BFD9-78BF43789E09}"/>
-              </a:ext>
-            </a:extLst>
-          </p:cNvPr>
-          <p:cNvPicPr>
-            <a:picLocks noGrp="1" noChangeAspect="1"/>
-          </p:cNvPicPr>
-          <p:nvPr>
-            <p:ph type="pic" sz="quarter" idx="16"/>
-          </p:nvPr>
-        </p:nvPicPr>
-        <p:blipFill rotWithShape="1">
-          <a:blip r:embed="rId4">
-            <a:extLst>
-              <a:ext uri="{28A0092B-C50C-407E-A947-70E740481C1C}">
-                <a14:useLocalDpi xmlns:a14="http://schemas.microsoft.com/office/drawing/2010/main" val="0"/>
-              </a:ext>
-            </a:extLst>
-          </a:blip>
-          <a:srcRect/>
-          <a:stretch/>
-        </p:blipFill>
-        <p:spPr>
-          <a:xfrm>
-            <a:off x="6327578" y="2886074"/>
-            <a:ext cx="1845511" cy="1845511"/>
-          </a:xfrm>
-        </p:spPr>
-      </p:pic>
-      <p:pic>
-        <p:nvPicPr>
-          <p:cNvPr id="43" name="Picture Placeholder 42" descr="Team member headshot">
-            <a:extLst>
-              <a:ext uri="{FF2B5EF4-FFF2-40B4-BE49-F238E27FC236}">
-                <a16:creationId xmlns:a16="http://schemas.microsoft.com/office/drawing/2014/main" id="{F328CD15-EA0E-49AD-A3C6-5798A372AA53}"/>
-              </a:ext>
-            </a:extLst>
-          </p:cNvPr>
-          <p:cNvPicPr>
-            <a:picLocks noGrp="1" noChangeAspect="1"/>
-          </p:cNvPicPr>
-          <p:nvPr>
-            <p:ph type="pic" sz="quarter" idx="17"/>
-          </p:nvPr>
-        </p:nvPicPr>
-        <p:blipFill rotWithShape="1">
-          <a:blip r:embed="rId5">
-            <a:extLst>
-              <a:ext uri="{28A0092B-C50C-407E-A947-70E740481C1C}">
-                <a14:useLocalDpi xmlns:a14="http://schemas.microsoft.com/office/drawing/2010/main" val="0"/>
-              </a:ext>
-            </a:extLst>
-          </a:blip>
-          <a:srcRect/>
-          <a:stretch/>
-        </p:blipFill>
-        <p:spPr>
-          <a:xfrm>
-            <a:off x="8747458" y="2886074"/>
-            <a:ext cx="1845511" cy="1845511"/>
-          </a:xfrm>
-        </p:spPr>
-      </p:pic>
-      <p:sp>
-        <p:nvSpPr>
-          <p:cNvPr id="24" name="Text Placeholder 23">
-            <a:extLst>
-              <a:ext uri="{FF2B5EF4-FFF2-40B4-BE49-F238E27FC236}">
-                <a16:creationId xmlns:a16="http://schemas.microsoft.com/office/drawing/2014/main" id="{7BAD1FFF-8B97-4CD1-85E7-B7738EAD28CD}"/>
-              </a:ext>
-            </a:extLst>
-          </p:cNvPr>
-          <p:cNvSpPr>
-            <a:spLocks noGrp="1"/>
-          </p:cNvSpPr>
-          <p:nvPr>
-            <p:ph type="body" idx="1"/>
-          </p:nvPr>
-        </p:nvSpPr>
-        <p:spPr>
-          <a:xfrm>
-            <a:off x="1343248" y="5084524"/>
-            <a:ext cx="2123743" cy="343061"/>
-          </a:xfrm>
-        </p:spPr>
-        <p:txBody>
-          <a:bodyPr/>
-          <a:lstStyle/>
-          <a:p>
-            <a:r>
-              <a:rPr lang="en-US" dirty="0">
-                <a:latin typeface="Arial" panose="020B0604020202020204" pitchFamily="34" charset="0"/>
-                <a:cs typeface="Arial" panose="020B0604020202020204" pitchFamily="34" charset="0"/>
-              </a:rPr>
-              <a:t>TAKUMA HAYASHI​</a:t>
-            </a:r>
-          </a:p>
-        </p:txBody>
-      </p:sp>
-      <p:sp>
-        <p:nvSpPr>
-          <p:cNvPr id="33" name="Text Placeholder 32">
-            <a:extLst>
-              <a:ext uri="{FF2B5EF4-FFF2-40B4-BE49-F238E27FC236}">
-                <a16:creationId xmlns:a16="http://schemas.microsoft.com/office/drawing/2014/main" id="{10C8C8C1-99D8-4034-A628-DECEB703BA1D}"/>
-              </a:ext>
-            </a:extLst>
-          </p:cNvPr>
-          <p:cNvSpPr>
-            <a:spLocks noGrp="1"/>
-          </p:cNvSpPr>
-          <p:nvPr>
-            <p:ph type="body" idx="18"/>
-          </p:nvPr>
-        </p:nvSpPr>
-        <p:spPr>
-          <a:xfrm>
-            <a:off x="3692980" y="5099206"/>
-            <a:ext cx="2135755" cy="343061"/>
-          </a:xfrm>
-        </p:spPr>
-        <p:txBody>
-          <a:bodyPr/>
-          <a:lstStyle/>
-          <a:p>
-            <a:r>
-              <a:rPr lang="en-US" dirty="0">
-                <a:latin typeface="Arial" panose="020B0604020202020204" pitchFamily="34" charset="0"/>
-                <a:cs typeface="Arial" panose="020B0604020202020204" pitchFamily="34" charset="0"/>
-              </a:rPr>
-              <a:t>MIRJAM NILSSON​</a:t>
-            </a:r>
-          </a:p>
-        </p:txBody>
-      </p:sp>
-      <p:sp>
-        <p:nvSpPr>
-          <p:cNvPr id="34" name="Text Placeholder 33">
-            <a:extLst>
-              <a:ext uri="{FF2B5EF4-FFF2-40B4-BE49-F238E27FC236}">
-                <a16:creationId xmlns:a16="http://schemas.microsoft.com/office/drawing/2014/main" id="{08CA58D6-00FD-4D81-A0F6-215C4D558912}"/>
-              </a:ext>
-            </a:extLst>
-          </p:cNvPr>
-          <p:cNvSpPr>
-            <a:spLocks noGrp="1"/>
-          </p:cNvSpPr>
-          <p:nvPr>
-            <p:ph type="body" idx="19"/>
-          </p:nvPr>
-        </p:nvSpPr>
-        <p:spPr>
-          <a:xfrm>
-            <a:off x="6183644" y="5099206"/>
-            <a:ext cx="2123743" cy="343061"/>
-          </a:xfrm>
-        </p:spPr>
-        <p:txBody>
-          <a:bodyPr/>
-          <a:lstStyle/>
-          <a:p>
-            <a:r>
-              <a:rPr lang="en-US" dirty="0">
-                <a:latin typeface="Arial" panose="020B0604020202020204" pitchFamily="34" charset="0"/>
-                <a:cs typeface="Arial" panose="020B0604020202020204" pitchFamily="34" charset="0"/>
-              </a:rPr>
-              <a:t>FLORA BERGGREN​</a:t>
-            </a:r>
-          </a:p>
-        </p:txBody>
-      </p:sp>
-      <p:sp>
-        <p:nvSpPr>
-          <p:cNvPr id="35" name="Text Placeholder 34">
-            <a:extLst>
-              <a:ext uri="{FF2B5EF4-FFF2-40B4-BE49-F238E27FC236}">
-                <a16:creationId xmlns:a16="http://schemas.microsoft.com/office/drawing/2014/main" id="{60D37431-6A3A-47F6-A367-B5ADCF66AE37}"/>
-              </a:ext>
-            </a:extLst>
-          </p:cNvPr>
-          <p:cNvSpPr>
-            <a:spLocks noGrp="1"/>
-          </p:cNvSpPr>
-          <p:nvPr>
-            <p:ph type="body" idx="20"/>
-          </p:nvPr>
-        </p:nvSpPr>
-        <p:spPr>
-          <a:xfrm>
-            <a:off x="8603525" y="5084524"/>
-            <a:ext cx="2123742" cy="343061"/>
-          </a:xfrm>
-        </p:spPr>
-        <p:txBody>
-          <a:bodyPr/>
-          <a:lstStyle/>
-          <a:p>
-            <a:r>
-              <a:rPr lang="en-US" dirty="0">
-                <a:latin typeface="Arial" panose="020B0604020202020204" pitchFamily="34" charset="0"/>
-                <a:cs typeface="Arial" panose="020B0604020202020204" pitchFamily="34" charset="0"/>
-              </a:rPr>
-              <a:t>RAJESH SANTOSHI​</a:t>
-            </a:r>
-          </a:p>
-        </p:txBody>
-      </p:sp>
-      <p:sp>
-        <p:nvSpPr>
-          <p:cNvPr id="36" name="Text Placeholder 35">
-            <a:extLst>
-              <a:ext uri="{FF2B5EF4-FFF2-40B4-BE49-F238E27FC236}">
-                <a16:creationId xmlns:a16="http://schemas.microsoft.com/office/drawing/2014/main" id="{B76FA389-A54D-4E4B-81DA-DBA175D78FEC}"/>
-              </a:ext>
-            </a:extLst>
-          </p:cNvPr>
-          <p:cNvSpPr>
-            <a:spLocks noGrp="1"/>
-          </p:cNvSpPr>
-          <p:nvPr>
-            <p:ph type="body" idx="21"/>
-          </p:nvPr>
-        </p:nvSpPr>
-        <p:spPr>
-          <a:xfrm>
-            <a:off x="1487181" y="5464114"/>
-            <a:ext cx="1845511" cy="343061"/>
-          </a:xfrm>
-        </p:spPr>
-        <p:txBody>
-          <a:bodyPr/>
-          <a:lstStyle/>
-          <a:p>
-            <a:r>
-              <a:rPr lang="en-US" dirty="0">
-                <a:latin typeface="Arial" panose="020B0604020202020204" pitchFamily="34" charset="0"/>
-                <a:cs typeface="Arial" panose="020B0604020202020204" pitchFamily="34" charset="0"/>
-              </a:rPr>
-              <a:t>President</a:t>
-            </a:r>
-          </a:p>
-        </p:txBody>
-      </p:sp>
-      <p:sp>
-        <p:nvSpPr>
-          <p:cNvPr id="37" name="Text Placeholder 36">
-            <a:extLst>
-              <a:ext uri="{FF2B5EF4-FFF2-40B4-BE49-F238E27FC236}">
-                <a16:creationId xmlns:a16="http://schemas.microsoft.com/office/drawing/2014/main" id="{65786675-BFC6-4743-BFD3-D64691F771D8}"/>
-              </a:ext>
-            </a:extLst>
-          </p:cNvPr>
-          <p:cNvSpPr>
-            <a:spLocks noGrp="1"/>
-          </p:cNvSpPr>
-          <p:nvPr>
-            <p:ph type="body" idx="22"/>
-          </p:nvPr>
-        </p:nvSpPr>
-        <p:spPr>
-          <a:xfrm>
-            <a:off x="3836913" y="5478796"/>
-            <a:ext cx="1855949" cy="343061"/>
-          </a:xfrm>
-        </p:spPr>
-        <p:txBody>
-          <a:bodyPr/>
-          <a:lstStyle/>
-          <a:p>
-            <a:r>
-              <a:rPr lang="en-US" dirty="0">
-                <a:latin typeface="Arial" panose="020B0604020202020204" pitchFamily="34" charset="0"/>
-                <a:cs typeface="Arial" panose="020B0604020202020204" pitchFamily="34" charset="0"/>
-              </a:rPr>
-              <a:t>Chief Executive Officer</a:t>
-            </a:r>
-          </a:p>
-        </p:txBody>
-      </p:sp>
-      <p:sp>
-        <p:nvSpPr>
-          <p:cNvPr id="38" name="Text Placeholder 37">
-            <a:extLst>
-              <a:ext uri="{FF2B5EF4-FFF2-40B4-BE49-F238E27FC236}">
-                <a16:creationId xmlns:a16="http://schemas.microsoft.com/office/drawing/2014/main" id="{97062F49-F468-4EA6-B6BF-94BFF89FDCB7}"/>
-              </a:ext>
-            </a:extLst>
-          </p:cNvPr>
-          <p:cNvSpPr>
-            <a:spLocks noGrp="1"/>
-          </p:cNvSpPr>
-          <p:nvPr>
-            <p:ph type="body" idx="23"/>
-          </p:nvPr>
-        </p:nvSpPr>
-        <p:spPr>
-          <a:xfrm>
-            <a:off x="6327577" y="5478796"/>
-            <a:ext cx="1845511" cy="343061"/>
-          </a:xfrm>
-        </p:spPr>
-        <p:txBody>
-          <a:bodyPr/>
-          <a:lstStyle/>
-          <a:p>
-            <a:r>
-              <a:rPr lang="en-US" dirty="0">
-                <a:latin typeface="Arial" panose="020B0604020202020204" pitchFamily="34" charset="0"/>
-                <a:cs typeface="Arial" panose="020B0604020202020204" pitchFamily="34" charset="0"/>
-              </a:rPr>
-              <a:t>Chief Operations Officer</a:t>
-            </a:r>
-          </a:p>
-          <a:p>
-            <a:endParaRPr lang="en-US" dirty="0">
-              <a:latin typeface="Arial" panose="020B0604020202020204" pitchFamily="34" charset="0"/>
-              <a:cs typeface="Arial" panose="020B0604020202020204" pitchFamily="34" charset="0"/>
-            </a:endParaRPr>
-          </a:p>
-        </p:txBody>
-      </p:sp>
-      <p:sp>
-        <p:nvSpPr>
-          <p:cNvPr id="39" name="Text Placeholder 38">
-            <a:extLst>
-              <a:ext uri="{FF2B5EF4-FFF2-40B4-BE49-F238E27FC236}">
-                <a16:creationId xmlns:a16="http://schemas.microsoft.com/office/drawing/2014/main" id="{59D9F00A-8CF0-41E8-9BB6-3B8ECDA55D49}"/>
-              </a:ext>
-            </a:extLst>
-          </p:cNvPr>
-          <p:cNvSpPr>
-            <a:spLocks noGrp="1"/>
-          </p:cNvSpPr>
-          <p:nvPr>
-            <p:ph type="body" idx="24"/>
-          </p:nvPr>
-        </p:nvSpPr>
-        <p:spPr>
-          <a:xfrm>
-            <a:off x="8747458" y="5464114"/>
-            <a:ext cx="1845510" cy="343061"/>
-          </a:xfrm>
-        </p:spPr>
-        <p:txBody>
-          <a:bodyPr/>
-          <a:lstStyle/>
-          <a:p>
-            <a:r>
-              <a:rPr lang="en-US" dirty="0">
-                <a:latin typeface="Arial" panose="020B0604020202020204" pitchFamily="34" charset="0"/>
-                <a:cs typeface="Arial" panose="020B0604020202020204" pitchFamily="34" charset="0"/>
-              </a:rPr>
-              <a:t>VP Marketing</a:t>
-            </a:r>
-          </a:p>
-          <a:p>
-            <a:endParaRPr lang="en-US" dirty="0">
-              <a:latin typeface="Arial" panose="020B0604020202020204" pitchFamily="34" charset="0"/>
-              <a:cs typeface="Arial" panose="020B0604020202020204" pitchFamily="34" charset="0"/>
-            </a:endParaRPr>
-          </a:p>
-        </p:txBody>
-      </p:sp>
-      <p:sp>
-        <p:nvSpPr>
-          <p:cNvPr id="3" name="Date Placeholder 2">
-            <a:extLst>
-              <a:ext uri="{FF2B5EF4-FFF2-40B4-BE49-F238E27FC236}">
-                <a16:creationId xmlns:a16="http://schemas.microsoft.com/office/drawing/2014/main" id="{02F9CC1F-102C-49CC-B646-8E6826368A81}"/>
-              </a:ext>
-            </a:extLst>
-          </p:cNvPr>
-          <p:cNvSpPr>
-            <a:spLocks noGrp="1"/>
-          </p:cNvSpPr>
-          <p:nvPr>
-            <p:ph type="dt" sz="half" idx="10"/>
-          </p:nvPr>
-        </p:nvSpPr>
-        <p:spPr>
-          <a:xfrm>
-            <a:off x="838200" y="6356350"/>
-            <a:ext cx="2743200" cy="365125"/>
-          </a:xfrm>
-        </p:spPr>
-        <p:txBody>
-          <a:bodyPr/>
-          <a:lstStyle/>
-          <a:p>
-            <a:r>
-              <a:rPr lang="en-US" dirty="0">
-                <a:latin typeface="Arial" panose="020B0604020202020204" pitchFamily="34" charset="0"/>
-                <a:cs typeface="Arial" panose="020B0604020202020204" pitchFamily="34" charset="0"/>
-              </a:rPr>
-              <a:t>20XX</a:t>
-            </a:r>
-          </a:p>
-        </p:txBody>
-      </p:sp>
-      <p:sp>
-        <p:nvSpPr>
-          <p:cNvPr id="4" name="Footer Placeholder 3">
-            <a:extLst>
-              <a:ext uri="{FF2B5EF4-FFF2-40B4-BE49-F238E27FC236}">
-                <a16:creationId xmlns:a16="http://schemas.microsoft.com/office/drawing/2014/main" id="{33808A03-6EC3-48BE-9D18-5A746D09243E}"/>
-              </a:ext>
-            </a:extLst>
-          </p:cNvPr>
-          <p:cNvSpPr>
-            <a:spLocks noGrp="1"/>
-          </p:cNvSpPr>
-          <p:nvPr>
-            <p:ph type="ftr" sz="quarter" idx="11"/>
-          </p:nvPr>
-        </p:nvSpPr>
-        <p:spPr>
-          <a:xfrm>
-            <a:off x="4038600" y="6356350"/>
-            <a:ext cx="4114800" cy="365125"/>
-          </a:xfrm>
-        </p:spPr>
-        <p:txBody>
-          <a:bodyPr/>
-          <a:lstStyle/>
-          <a:p>
-            <a:r>
-              <a:rPr lang="en-US" dirty="0">
-                <a:latin typeface="Arial" panose="020B0604020202020204" pitchFamily="34" charset="0"/>
-                <a:cs typeface="Arial" panose="020B0604020202020204" pitchFamily="34" charset="0"/>
-              </a:rPr>
-              <a:t>Pitch Deck</a:t>
-            </a:r>
-          </a:p>
-        </p:txBody>
-      </p:sp>
-      <p:sp>
-        <p:nvSpPr>
-          <p:cNvPr id="5" name="Slide Number Placeholder 4">
-            <a:extLst>
-              <a:ext uri="{FF2B5EF4-FFF2-40B4-BE49-F238E27FC236}">
-                <a16:creationId xmlns:a16="http://schemas.microsoft.com/office/drawing/2014/main" id="{46868410-BE8A-4C98-9C72-20D0A2A6A8B9}"/>
-              </a:ext>
-            </a:extLst>
-          </p:cNvPr>
-          <p:cNvSpPr>
-            <a:spLocks noGrp="1"/>
-          </p:cNvSpPr>
-          <p:nvPr>
-            <p:ph type="sldNum" sz="quarter" idx="12"/>
-          </p:nvPr>
-        </p:nvSpPr>
-        <p:spPr>
-          <a:xfrm>
-            <a:off x="8610600" y="6356350"/>
+          <p:cNvPr id="7" name="Slide Number Placeholder 6">
+            <a:extLst>
+              <a:ext uri="{FF2B5EF4-FFF2-40B4-BE49-F238E27FC236}">
+                <a16:creationId xmlns:a16="http://schemas.microsoft.com/office/drawing/2014/main" id="{A0200163-413B-4852-8433-6B1CC61A7737}"/>
+              </a:ext>
+            </a:extLst>
+          </p:cNvPr>
+          <p:cNvSpPr>
+            <a:spLocks noGrp="1"/>
+          </p:cNvSpPr>
+          <p:nvPr>
+            <p:ph type="sldNum" sz="quarter" idx="4294967295"/>
+          </p:nvPr>
+        </p:nvSpPr>
+        <p:spPr>
+          <a:xfrm>
+            <a:off x="9448800" y="6356350"/>
             <a:ext cx="2743200" cy="365125"/>
           </a:xfrm>
         </p:spPr>
@@ -19065,10 +19826,164 @@
           </a:p>
         </p:txBody>
       </p:sp>
+      <p:pic>
+        <p:nvPicPr>
+          <p:cNvPr id="40" name="Picture 39">
+            <a:extLst>
+              <a:ext uri="{FF2B5EF4-FFF2-40B4-BE49-F238E27FC236}">
+                <a16:creationId xmlns:a16="http://schemas.microsoft.com/office/drawing/2014/main" id="{445F3C1C-CA7D-3954-F86E-3A835B0A07A0}"/>
+              </a:ext>
+            </a:extLst>
+          </p:cNvPr>
+          <p:cNvPicPr>
+            <a:picLocks noChangeAspect="1"/>
+          </p:cNvPicPr>
+          <p:nvPr/>
+        </p:nvPicPr>
+        <p:blipFill>
+          <a:blip r:embed="rId2"/>
+          <a:stretch>
+            <a:fillRect/>
+          </a:stretch>
+        </p:blipFill>
+        <p:spPr>
+          <a:xfrm>
+            <a:off x="6096000" y="1520340"/>
+            <a:ext cx="5731510" cy="942340"/>
+          </a:xfrm>
+          <a:prstGeom prst="rect">
+            <a:avLst/>
+          </a:prstGeom>
+        </p:spPr>
+      </p:pic>
+      <p:pic>
+        <p:nvPicPr>
+          <p:cNvPr id="41" name="Picture 40">
+            <a:extLst>
+              <a:ext uri="{FF2B5EF4-FFF2-40B4-BE49-F238E27FC236}">
+                <a16:creationId xmlns:a16="http://schemas.microsoft.com/office/drawing/2014/main" id="{B505C442-2AFE-D62A-1E96-ECC6B093C456}"/>
+              </a:ext>
+            </a:extLst>
+          </p:cNvPr>
+          <p:cNvPicPr>
+            <a:picLocks noChangeAspect="1"/>
+          </p:cNvPicPr>
+          <p:nvPr/>
+        </p:nvPicPr>
+        <p:blipFill>
+          <a:blip r:embed="rId3"/>
+          <a:stretch>
+            <a:fillRect/>
+          </a:stretch>
+        </p:blipFill>
+        <p:spPr>
+          <a:xfrm>
+            <a:off x="6096000" y="3425535"/>
+            <a:ext cx="5731510" cy="1781175"/>
+          </a:xfrm>
+          <a:prstGeom prst="rect">
+            <a:avLst/>
+          </a:prstGeom>
+        </p:spPr>
+      </p:pic>
+      <p:sp>
+        <p:nvSpPr>
+          <p:cNvPr id="9" name="ZoneTexte 8">
+            <a:extLst>
+              <a:ext uri="{FF2B5EF4-FFF2-40B4-BE49-F238E27FC236}">
+                <a16:creationId xmlns:a16="http://schemas.microsoft.com/office/drawing/2014/main" id="{9CEED2BE-D5EF-2C94-3A59-F2A2F7DA38D5}"/>
+              </a:ext>
+            </a:extLst>
+          </p:cNvPr>
+          <p:cNvSpPr txBox="1"/>
+          <p:nvPr/>
+        </p:nvSpPr>
+        <p:spPr>
+          <a:xfrm>
+            <a:off x="6219290" y="1089750"/>
+            <a:ext cx="5141942" cy="286360"/>
+          </a:xfrm>
+          <a:prstGeom prst="rect">
+            <a:avLst/>
+          </a:prstGeom>
+          <a:noFill/>
+        </p:spPr>
+        <p:txBody>
+          <a:bodyPr wrap="square">
+            <a:spAutoFit/>
+          </a:bodyPr>
+          <a:lstStyle/>
+          <a:p>
+            <a:pPr marL="342900" indent="-342900">
+              <a:lnSpc>
+                <a:spcPts val="1425"/>
+              </a:lnSpc>
+              <a:buFont typeface="+mj-lt"/>
+              <a:buAutoNum type="arabicPeriod" startAt="4"/>
+            </a:pPr>
+            <a:r>
+              <a:rPr lang="fr-FR" dirty="0">
+                <a:latin typeface="Arial" panose="020B0604020202020204" pitchFamily="34" charset="0"/>
+                <a:cs typeface="Arial" panose="020B0604020202020204" pitchFamily="34" charset="0"/>
+              </a:rPr>
+              <a:t>Activation et démarrage de Fail2ban</a:t>
+            </a:r>
+          </a:p>
+        </p:txBody>
+      </p:sp>
+      <p:sp>
+        <p:nvSpPr>
+          <p:cNvPr id="10" name="ZoneTexte 9">
+            <a:extLst>
+              <a:ext uri="{FF2B5EF4-FFF2-40B4-BE49-F238E27FC236}">
+                <a16:creationId xmlns:a16="http://schemas.microsoft.com/office/drawing/2014/main" id="{280E0077-87B3-E550-82C3-03E2BB3C5015}"/>
+              </a:ext>
+            </a:extLst>
+          </p:cNvPr>
+          <p:cNvSpPr txBox="1"/>
+          <p:nvPr/>
+        </p:nvSpPr>
+        <p:spPr>
+          <a:xfrm>
+            <a:off x="6303156" y="3037500"/>
+            <a:ext cx="5141942" cy="286360"/>
+          </a:xfrm>
+          <a:prstGeom prst="rect">
+            <a:avLst/>
+          </a:prstGeom>
+          <a:noFill/>
+        </p:spPr>
+        <p:txBody>
+          <a:bodyPr wrap="square">
+            <a:spAutoFit/>
+          </a:bodyPr>
+          <a:lstStyle/>
+          <a:p>
+            <a:pPr marL="342900" indent="-342900">
+              <a:lnSpc>
+                <a:spcPts val="1425"/>
+              </a:lnSpc>
+              <a:buFont typeface="+mj-lt"/>
+              <a:buAutoNum type="arabicPeriod" startAt="5"/>
+            </a:pPr>
+            <a:r>
+              <a:rPr lang="en-US" dirty="0">
+                <a:latin typeface="Arial" panose="020B0604020202020204" pitchFamily="34" charset="0"/>
+                <a:cs typeface="Arial" panose="020B0604020202020204" pitchFamily="34" charset="0"/>
+              </a:rPr>
+              <a:t>status de fail2ban</a:t>
+            </a:r>
+            <a:endParaRPr lang="fr-FR" dirty="0">
+              <a:latin typeface="Arial" panose="020B0604020202020204" pitchFamily="34" charset="0"/>
+              <a:cs typeface="Arial" panose="020B0604020202020204" pitchFamily="34" charset="0"/>
+            </a:endParaRPr>
+          </a:p>
+        </p:txBody>
+      </p:sp>
     </p:spTree>
     <p:extLst>
       <p:ext uri="{BB962C8B-B14F-4D97-AF65-F5344CB8AC3E}">
-        <p14:creationId xmlns:p14="http://schemas.microsoft.com/office/powerpoint/2010/main" val="3477453048"/>
+        <p14:creationId xmlns:p14="http://schemas.microsoft.com/office/powerpoint/2010/main" val="1007462183"/>
       </p:ext>
     </p:extLst>
   </p:cSld>
@@ -19097,63 +20012,919 @@
       </p:grpSpPr>
       <p:sp>
         <p:nvSpPr>
-          <p:cNvPr id="2" name="Title 1">
-            <a:extLst>
-              <a:ext uri="{FF2B5EF4-FFF2-40B4-BE49-F238E27FC236}">
-                <a16:creationId xmlns:a16="http://schemas.microsoft.com/office/drawing/2014/main" id="{BCCAEE93-8585-46D4-A7EC-F184E317CB2E}"/>
-              </a:ext>
-            </a:extLst>
-          </p:cNvPr>
-          <p:cNvSpPr>
-            <a:spLocks noGrp="1"/>
-          </p:cNvSpPr>
-          <p:nvPr>
-            <p:ph type="ctrTitle"/>
-          </p:nvPr>
-        </p:nvSpPr>
-        <p:spPr>
-          <a:xfrm>
-            <a:off x="4267200" y="1615736"/>
-            <a:ext cx="4179570" cy="1524735"/>
+          <p:cNvPr id="14" name="Slide Number Placeholder 13">
+            <a:extLst>
+              <a:ext uri="{FF2B5EF4-FFF2-40B4-BE49-F238E27FC236}">
+                <a16:creationId xmlns:a16="http://schemas.microsoft.com/office/drawing/2014/main" id="{42152A75-1CD2-44EC-9374-C83D4604A5DD}"/>
+              </a:ext>
+            </a:extLst>
+          </p:cNvPr>
+          <p:cNvSpPr>
+            <a:spLocks noGrp="1"/>
+          </p:cNvSpPr>
+          <p:nvPr>
+            <p:ph type="sldNum" sz="quarter" idx="12"/>
+          </p:nvPr>
+        </p:nvSpPr>
+        <p:spPr>
+          <a:xfrm>
+            <a:off x="8610600" y="6356350"/>
+            <a:ext cx="2743200" cy="365125"/>
           </a:xfrm>
         </p:spPr>
         <p:txBody>
           <a:bodyPr/>
           <a:lstStyle/>
           <a:p>
-            <a:r>
-              <a:rPr lang="en-US" dirty="0"/>
-              <a:t>THANK YOU</a:t>
-            </a:r>
-          </a:p>
-        </p:txBody>
-      </p:sp>
-      <p:sp>
-        <p:nvSpPr>
-          <p:cNvPr id="3" name="Content Placeholder 2">
-            <a:extLst>
-              <a:ext uri="{FF2B5EF4-FFF2-40B4-BE49-F238E27FC236}">
-                <a16:creationId xmlns:a16="http://schemas.microsoft.com/office/drawing/2014/main" id="{24AFFC60-19C3-4901-93F7-7AAF4C09F8C6}"/>
-              </a:ext>
-            </a:extLst>
-          </p:cNvPr>
-          <p:cNvSpPr>
-            <a:spLocks noGrp="1"/>
-          </p:cNvSpPr>
-          <p:nvPr>
-            <p:ph type="subTitle" idx="1"/>
-          </p:nvPr>
-        </p:nvSpPr>
-        <p:spPr>
-          <a:xfrm>
-            <a:off x="4267200" y="3238103"/>
-            <a:ext cx="4179570" cy="2004161"/>
-          </a:xfrm>
-        </p:spPr>
-        <p:txBody>
-          <a:bodyPr>
+            <a:fld id="{B5CEABB6-07DC-46E8-9B57-56EC44A396E5}" type="slidenum">
+              <a:rPr lang="en-US" smtClean="0">
+                <a:latin typeface="Arial" panose="020B0604020202020204" pitchFamily="34" charset="0"/>
+                <a:cs typeface="Arial" panose="020B0604020202020204" pitchFamily="34" charset="0"/>
+              </a:rPr>
+              <a:pPr/>
+              <a:t>15</a:t>
+            </a:fld>
+            <a:endParaRPr lang="en-US" dirty="0">
+              <a:latin typeface="Arial" panose="020B0604020202020204" pitchFamily="34" charset="0"/>
+              <a:cs typeface="Arial" panose="020B0604020202020204" pitchFamily="34" charset="0"/>
+            </a:endParaRPr>
+          </a:p>
+        </p:txBody>
+      </p:sp>
+      <p:sp>
+        <p:nvSpPr>
+          <p:cNvPr id="2" name="Title 1">
+            <a:extLst>
+              <a:ext uri="{FF2B5EF4-FFF2-40B4-BE49-F238E27FC236}">
+                <a16:creationId xmlns:a16="http://schemas.microsoft.com/office/drawing/2014/main" id="{27F0B4EE-0C84-A8C9-8591-16611BA0BBB3}"/>
+              </a:ext>
+            </a:extLst>
+          </p:cNvPr>
+          <p:cNvSpPr txBox="1">
+            <a:spLocks/>
+          </p:cNvSpPr>
+          <p:nvPr/>
+        </p:nvSpPr>
+        <p:spPr>
+          <a:xfrm>
+            <a:off x="1695999" y="280363"/>
+            <a:ext cx="9580745" cy="597993"/>
+          </a:xfrm>
+          <a:prstGeom prst="rect">
+            <a:avLst/>
+          </a:prstGeom>
+        </p:spPr>
+        <p:txBody>
+          <a:bodyPr vert="horz" lIns="91440" tIns="45720" rIns="91440" bIns="45720" rtlCol="0" anchor="ctr">
             <a:normAutofit/>
           </a:bodyPr>
+          <a:lstStyle>
+            <a:lvl1pPr algn="l" defTabSz="914400" rtl="0" eaLnBrk="1" latinLnBrk="0" hangingPunct="1">
+              <a:lnSpc>
+                <a:spcPct val="90000"/>
+              </a:lnSpc>
+              <a:spcBef>
+                <a:spcPct val="0"/>
+              </a:spcBef>
+              <a:buNone/>
+              <a:defRPr sz="3600" kern="1200" cap="all" spc="150" baseline="0">
+                <a:solidFill>
+                  <a:schemeClr val="tx1">
+                    <a:lumMod val="75000"/>
+                    <a:lumOff val="25000"/>
+                  </a:schemeClr>
+                </a:solidFill>
+                <a:latin typeface="+mj-lt"/>
+                <a:ea typeface="+mj-ea"/>
+                <a:cs typeface="+mj-cs"/>
+              </a:defRPr>
+            </a:lvl1pPr>
+          </a:lstStyle>
+          <a:p>
+            <a:pPr algn="ctr"/>
+            <a:r>
+              <a:rPr lang="fr-FR" sz="2200" b="1" dirty="0">
+                <a:solidFill>
+                  <a:srgbClr val="0070C0"/>
+                </a:solidFill>
+                <a:latin typeface="Arial" panose="020B0604020202020204" pitchFamily="34" charset="0"/>
+                <a:cs typeface="Arial" panose="020B0604020202020204" pitchFamily="34" charset="0"/>
+              </a:rPr>
+              <a:t>5. Limitations des utilisateurs autorises</a:t>
+            </a:r>
+            <a:endParaRPr lang="en-US" sz="2200" b="1" dirty="0">
+              <a:solidFill>
+                <a:srgbClr val="0070C0"/>
+              </a:solidFill>
+              <a:latin typeface="Arial" panose="020B0604020202020204" pitchFamily="34" charset="0"/>
+              <a:cs typeface="Arial" panose="020B0604020202020204" pitchFamily="34" charset="0"/>
+            </a:endParaRPr>
+          </a:p>
+        </p:txBody>
+      </p:sp>
+      <p:pic>
+        <p:nvPicPr>
+          <p:cNvPr id="21" name="Picture 20">
+            <a:extLst>
+              <a:ext uri="{FF2B5EF4-FFF2-40B4-BE49-F238E27FC236}">
+                <a16:creationId xmlns:a16="http://schemas.microsoft.com/office/drawing/2014/main" id="{37320E05-F4C5-E563-6866-B0C80E6CBBD4}"/>
+              </a:ext>
+            </a:extLst>
+          </p:cNvPr>
+          <p:cNvPicPr>
+            <a:picLocks noChangeAspect="1"/>
+          </p:cNvPicPr>
+          <p:nvPr/>
+        </p:nvPicPr>
+        <p:blipFill>
+          <a:blip r:embed="rId2"/>
+          <a:stretch>
+            <a:fillRect/>
+          </a:stretch>
+        </p:blipFill>
+        <p:spPr>
+          <a:xfrm>
+            <a:off x="1797978" y="3019542"/>
+            <a:ext cx="8856322" cy="808841"/>
+          </a:xfrm>
+          <a:prstGeom prst="rect">
+            <a:avLst/>
+          </a:prstGeom>
+        </p:spPr>
+      </p:pic>
+      <p:sp>
+        <p:nvSpPr>
+          <p:cNvPr id="3" name="Content Placeholder 2">
+            <a:extLst>
+              <a:ext uri="{FF2B5EF4-FFF2-40B4-BE49-F238E27FC236}">
+                <a16:creationId xmlns:a16="http://schemas.microsoft.com/office/drawing/2014/main" id="{E6709B0B-33DE-7B58-C0E4-7AAD16187D63}"/>
+              </a:ext>
+            </a:extLst>
+          </p:cNvPr>
+          <p:cNvSpPr txBox="1">
+            <a:spLocks/>
+          </p:cNvSpPr>
+          <p:nvPr/>
+        </p:nvSpPr>
+        <p:spPr>
+          <a:xfrm>
+            <a:off x="440458" y="878356"/>
+            <a:ext cx="11578212" cy="916361"/>
+          </a:xfrm>
+          <a:prstGeom prst="rect">
+            <a:avLst/>
+          </a:prstGeom>
+        </p:spPr>
+        <p:txBody>
+          <a:bodyPr vert="horz" lIns="91440" tIns="45720" rIns="91440" bIns="45720" rtlCol="0" anchor="t">
+            <a:noAutofit/>
+          </a:bodyPr>
+          <a:lstStyle>
+            <a:lvl1pPr marL="228600" indent="-228600" algn="l" defTabSz="914400" rtl="0" eaLnBrk="1" latinLnBrk="0" hangingPunct="1">
+              <a:lnSpc>
+                <a:spcPct val="90000"/>
+              </a:lnSpc>
+              <a:spcBef>
+                <a:spcPts val="1000"/>
+              </a:spcBef>
+              <a:buFont typeface="Arial" panose="020B0604020202020204" pitchFamily="34" charset="0"/>
+              <a:buChar char="•"/>
+              <a:defRPr sz="2800" kern="1200">
+                <a:solidFill>
+                  <a:schemeClr val="tx1">
+                    <a:lumMod val="75000"/>
+                    <a:lumOff val="25000"/>
+                  </a:schemeClr>
+                </a:solidFill>
+                <a:latin typeface="+mn-lt"/>
+                <a:ea typeface="+mn-ea"/>
+                <a:cs typeface="+mn-cs"/>
+              </a:defRPr>
+            </a:lvl1pPr>
+            <a:lvl2pPr marL="685800" indent="-228600" algn="l" defTabSz="914400" rtl="0" eaLnBrk="1" latinLnBrk="0" hangingPunct="1">
+              <a:lnSpc>
+                <a:spcPct val="90000"/>
+              </a:lnSpc>
+              <a:spcBef>
+                <a:spcPts val="500"/>
+              </a:spcBef>
+              <a:buFont typeface="Arial" panose="020B0604020202020204" pitchFamily="34" charset="0"/>
+              <a:buChar char="•"/>
+              <a:defRPr sz="2400" kern="1200">
+                <a:solidFill>
+                  <a:schemeClr val="tx1">
+                    <a:lumMod val="75000"/>
+                    <a:lumOff val="25000"/>
+                  </a:schemeClr>
+                </a:solidFill>
+                <a:latin typeface="+mn-lt"/>
+                <a:ea typeface="+mn-ea"/>
+                <a:cs typeface="+mn-cs"/>
+              </a:defRPr>
+            </a:lvl2pPr>
+            <a:lvl3pPr marL="1143000" indent="-228600" algn="l" defTabSz="914400" rtl="0" eaLnBrk="1" latinLnBrk="0" hangingPunct="1">
+              <a:lnSpc>
+                <a:spcPct val="90000"/>
+              </a:lnSpc>
+              <a:spcBef>
+                <a:spcPts val="500"/>
+              </a:spcBef>
+              <a:buFont typeface="Arial" panose="020B0604020202020204" pitchFamily="34" charset="0"/>
+              <a:buChar char="•"/>
+              <a:defRPr sz="2000" kern="1200">
+                <a:solidFill>
+                  <a:schemeClr val="tx1">
+                    <a:lumMod val="75000"/>
+                    <a:lumOff val="25000"/>
+                  </a:schemeClr>
+                </a:solidFill>
+                <a:latin typeface="+mn-lt"/>
+                <a:ea typeface="+mn-ea"/>
+                <a:cs typeface="+mn-cs"/>
+              </a:defRPr>
+            </a:lvl3pPr>
+            <a:lvl4pPr marL="1600200" indent="-228600" algn="l" defTabSz="914400" rtl="0" eaLnBrk="1" latinLnBrk="0" hangingPunct="1">
+              <a:lnSpc>
+                <a:spcPct val="90000"/>
+              </a:lnSpc>
+              <a:spcBef>
+                <a:spcPts val="500"/>
+              </a:spcBef>
+              <a:buFont typeface="Arial" panose="020B0604020202020204" pitchFamily="34" charset="0"/>
+              <a:buChar char="•"/>
+              <a:defRPr sz="1800" kern="1200">
+                <a:solidFill>
+                  <a:schemeClr val="tx1">
+                    <a:lumMod val="75000"/>
+                    <a:lumOff val="25000"/>
+                  </a:schemeClr>
+                </a:solidFill>
+                <a:latin typeface="+mn-lt"/>
+                <a:ea typeface="+mn-ea"/>
+                <a:cs typeface="+mn-cs"/>
+              </a:defRPr>
+            </a:lvl4pPr>
+            <a:lvl5pPr marL="2057400" indent="-228600" algn="l" defTabSz="914400" rtl="0" eaLnBrk="1" latinLnBrk="0" hangingPunct="1">
+              <a:lnSpc>
+                <a:spcPct val="90000"/>
+              </a:lnSpc>
+              <a:spcBef>
+                <a:spcPts val="500"/>
+              </a:spcBef>
+              <a:buFont typeface="Arial" panose="020B0604020202020204" pitchFamily="34" charset="0"/>
+              <a:buChar char="•"/>
+              <a:defRPr sz="1800" kern="1200">
+                <a:solidFill>
+                  <a:schemeClr val="tx1">
+                    <a:lumMod val="75000"/>
+                    <a:lumOff val="25000"/>
+                  </a:schemeClr>
+                </a:solidFill>
+                <a:latin typeface="+mn-lt"/>
+                <a:ea typeface="+mn-ea"/>
+                <a:cs typeface="+mn-cs"/>
+              </a:defRPr>
+            </a:lvl5pPr>
+            <a:lvl6pPr marL="2514600" indent="-228600" algn="l" defTabSz="914400" rtl="0" eaLnBrk="1" latinLnBrk="0" hangingPunct="1">
+              <a:lnSpc>
+                <a:spcPct val="90000"/>
+              </a:lnSpc>
+              <a:spcBef>
+                <a:spcPts val="500"/>
+              </a:spcBef>
+              <a:buFont typeface="Arial" panose="020B0604020202020204" pitchFamily="34" charset="0"/>
+              <a:buChar char="•"/>
+              <a:defRPr sz="1800" kern="1200">
+                <a:solidFill>
+                  <a:schemeClr val="tx1"/>
+                </a:solidFill>
+                <a:latin typeface="+mn-lt"/>
+                <a:ea typeface="+mn-ea"/>
+                <a:cs typeface="+mn-cs"/>
+              </a:defRPr>
+            </a:lvl6pPr>
+            <a:lvl7pPr marL="2971800" indent="-228600" algn="l" defTabSz="914400" rtl="0" eaLnBrk="1" latinLnBrk="0" hangingPunct="1">
+              <a:lnSpc>
+                <a:spcPct val="90000"/>
+              </a:lnSpc>
+              <a:spcBef>
+                <a:spcPts val="500"/>
+              </a:spcBef>
+              <a:buFont typeface="Arial" panose="020B0604020202020204" pitchFamily="34" charset="0"/>
+              <a:buChar char="•"/>
+              <a:defRPr sz="1800" kern="1200">
+                <a:solidFill>
+                  <a:schemeClr val="tx1"/>
+                </a:solidFill>
+                <a:latin typeface="+mn-lt"/>
+                <a:ea typeface="+mn-ea"/>
+                <a:cs typeface="+mn-cs"/>
+              </a:defRPr>
+            </a:lvl7pPr>
+            <a:lvl8pPr marL="3429000" indent="-228600" algn="l" defTabSz="914400" rtl="0" eaLnBrk="1" latinLnBrk="0" hangingPunct="1">
+              <a:lnSpc>
+                <a:spcPct val="90000"/>
+              </a:lnSpc>
+              <a:spcBef>
+                <a:spcPts val="500"/>
+              </a:spcBef>
+              <a:buFont typeface="Arial" panose="020B0604020202020204" pitchFamily="34" charset="0"/>
+              <a:buChar char="•"/>
+              <a:defRPr sz="1800" kern="1200">
+                <a:solidFill>
+                  <a:schemeClr val="tx1"/>
+                </a:solidFill>
+                <a:latin typeface="+mn-lt"/>
+                <a:ea typeface="+mn-ea"/>
+                <a:cs typeface="+mn-cs"/>
+              </a:defRPr>
+            </a:lvl8pPr>
+            <a:lvl9pPr marL="3886200" indent="-228600" algn="l" defTabSz="914400" rtl="0" eaLnBrk="1" latinLnBrk="0" hangingPunct="1">
+              <a:lnSpc>
+                <a:spcPct val="90000"/>
+              </a:lnSpc>
+              <a:spcBef>
+                <a:spcPts val="500"/>
+              </a:spcBef>
+              <a:buFont typeface="Arial" panose="020B0604020202020204" pitchFamily="34" charset="0"/>
+              <a:buChar char="•"/>
+              <a:defRPr sz="1800" kern="1200">
+                <a:solidFill>
+                  <a:schemeClr val="tx1"/>
+                </a:solidFill>
+                <a:latin typeface="+mn-lt"/>
+                <a:ea typeface="+mn-ea"/>
+                <a:cs typeface="+mn-cs"/>
+              </a:defRPr>
+            </a:lvl9pPr>
+          </a:lstStyle>
+          <a:p>
+            <a:pPr>
+              <a:buFont typeface="Wingdings" panose="05000000000000000000" pitchFamily="2" charset="2"/>
+              <a:buChar char="v"/>
+            </a:pPr>
+            <a:r>
+              <a:rPr lang="fr-FR" sz="2000" b="1" dirty="0">
+                <a:solidFill>
+                  <a:srgbClr val="0070C0"/>
+                </a:solidFill>
+                <a:latin typeface="Arial" panose="020B0604020202020204" pitchFamily="34" charset="0"/>
+                <a:cs typeface="Arial" panose="020B0604020202020204" pitchFamily="34" charset="0"/>
+              </a:rPr>
+              <a:t>Objectif</a:t>
+            </a:r>
+          </a:p>
+          <a:p>
+            <a:pPr marL="0" indent="0">
+              <a:buNone/>
+            </a:pPr>
+            <a:r>
+              <a:rPr lang="fr-FR" sz="1800" b="1" dirty="0">
+                <a:latin typeface="Arial" panose="020B0604020202020204" pitchFamily="34" charset="0"/>
+                <a:cs typeface="Arial" panose="020B0604020202020204" pitchFamily="34" charset="0"/>
+              </a:rPr>
+              <a:t>Restreindre les connexions SSH uniquement aux utilisateurs explicitement listés, même si d'autres comptes existent sur le serveur.</a:t>
+            </a:r>
+          </a:p>
+          <a:p>
+            <a:pPr marL="0" indent="0">
+              <a:buNone/>
+            </a:pPr>
+            <a:endParaRPr lang="fr-FR" sz="2000" b="1" dirty="0">
+              <a:solidFill>
+                <a:srgbClr val="0070C0"/>
+              </a:solidFill>
+              <a:latin typeface="Arial" panose="020B0604020202020204" pitchFamily="34" charset="0"/>
+              <a:cs typeface="Arial" panose="020B0604020202020204" pitchFamily="34" charset="0"/>
+            </a:endParaRPr>
+          </a:p>
+        </p:txBody>
+      </p:sp>
+      <p:sp>
+        <p:nvSpPr>
+          <p:cNvPr id="6" name="ZoneTexte 5">
+            <a:extLst>
+              <a:ext uri="{FF2B5EF4-FFF2-40B4-BE49-F238E27FC236}">
+                <a16:creationId xmlns:a16="http://schemas.microsoft.com/office/drawing/2014/main" id="{559341EF-C783-CB6A-4B4A-E781677316AC}"/>
+              </a:ext>
+            </a:extLst>
+          </p:cNvPr>
+          <p:cNvSpPr txBox="1"/>
+          <p:nvPr/>
+        </p:nvSpPr>
+        <p:spPr>
+          <a:xfrm>
+            <a:off x="3525029" y="2636595"/>
+            <a:ext cx="5141942" cy="286360"/>
+          </a:xfrm>
+          <a:prstGeom prst="rect">
+            <a:avLst/>
+          </a:prstGeom>
+          <a:noFill/>
+        </p:spPr>
+        <p:txBody>
+          <a:bodyPr wrap="square">
+            <a:spAutoFit/>
+          </a:bodyPr>
+          <a:lstStyle/>
+          <a:p>
+            <a:pPr marL="342900" indent="-342900">
+              <a:lnSpc>
+                <a:spcPts val="1425"/>
+              </a:lnSpc>
+              <a:buFont typeface="+mj-lt"/>
+              <a:buAutoNum type="arabicPeriod"/>
+            </a:pPr>
+            <a:r>
+              <a:rPr lang="fr-FR" dirty="0">
+                <a:latin typeface="Arial" panose="020B0604020202020204" pitchFamily="34" charset="0"/>
+                <a:cs typeface="Arial" panose="020B0604020202020204" pitchFamily="34" charset="0"/>
+              </a:rPr>
+              <a:t>Modification du fichier </a:t>
+            </a:r>
+            <a:r>
+              <a:rPr lang="fr-FR" dirty="0" err="1">
+                <a:latin typeface="Arial" panose="020B0604020202020204" pitchFamily="34" charset="0"/>
+                <a:cs typeface="Arial" panose="020B0604020202020204" pitchFamily="34" charset="0"/>
+              </a:rPr>
+              <a:t>sshd_config</a:t>
+            </a:r>
+            <a:endParaRPr lang="fr-FR" dirty="0">
+              <a:latin typeface="Arial" panose="020B0604020202020204" pitchFamily="34" charset="0"/>
+              <a:cs typeface="Arial" panose="020B0604020202020204" pitchFamily="34" charset="0"/>
+            </a:endParaRPr>
+          </a:p>
+        </p:txBody>
+      </p:sp>
+      <p:pic>
+        <p:nvPicPr>
+          <p:cNvPr id="8" name="Picture 23">
+            <a:extLst>
+              <a:ext uri="{FF2B5EF4-FFF2-40B4-BE49-F238E27FC236}">
+                <a16:creationId xmlns:a16="http://schemas.microsoft.com/office/drawing/2014/main" id="{695C51B7-9E2A-E151-41C4-BE3281F938E2}"/>
+              </a:ext>
+            </a:extLst>
+          </p:cNvPr>
+          <p:cNvPicPr>
+            <a:picLocks noChangeAspect="1"/>
+          </p:cNvPicPr>
+          <p:nvPr/>
+        </p:nvPicPr>
+        <p:blipFill>
+          <a:blip r:embed="rId3"/>
+          <a:stretch>
+            <a:fillRect/>
+          </a:stretch>
+        </p:blipFill>
+        <p:spPr>
+          <a:xfrm>
+            <a:off x="1797978" y="4059872"/>
+            <a:ext cx="8856322" cy="2479040"/>
+          </a:xfrm>
+          <a:prstGeom prst="rect">
+            <a:avLst/>
+          </a:prstGeom>
+        </p:spPr>
+      </p:pic>
+    </p:spTree>
+    <p:extLst>
+      <p:ext uri="{BB962C8B-B14F-4D97-AF65-F5344CB8AC3E}">
+        <p14:creationId xmlns:p14="http://schemas.microsoft.com/office/powerpoint/2010/main" val="4151694508"/>
+      </p:ext>
+    </p:extLst>
+  </p:cSld>
+  <p:clrMapOvr>
+    <a:masterClrMapping/>
+  </p:clrMapOvr>
+</p:sld>
+</file>
+
+<file path=ppt/slides/slide16.xml><?xml version="1.0" encoding="utf-8"?>
+<p:sld xmlns:a="http://schemas.openxmlformats.org/drawingml/2006/main" xmlns:r="http://schemas.openxmlformats.org/officeDocument/2006/relationships" xmlns:p="http://schemas.openxmlformats.org/presentationml/2006/main">
+  <p:cSld>
+    <p:spTree>
+      <p:nvGrpSpPr>
+        <p:cNvPr id="1" name="">
+          <a:extLst>
+            <a:ext uri="{FF2B5EF4-FFF2-40B4-BE49-F238E27FC236}">
+              <a16:creationId xmlns:a16="http://schemas.microsoft.com/office/drawing/2014/main" id="{D8EF6422-E94E-74D2-60CF-84147CC50090}"/>
+            </a:ext>
+          </a:extLst>
+        </p:cNvPr>
+        <p:cNvGrpSpPr/>
+        <p:nvPr/>
+      </p:nvGrpSpPr>
+      <p:grpSpPr>
+        <a:xfrm>
+          <a:off x="0" y="0"/>
+          <a:ext cx="0" cy="0"/>
+          <a:chOff x="0" y="0"/>
+          <a:chExt cx="0" cy="0"/>
+        </a:xfrm>
+      </p:grpSpPr>
+      <p:sp>
+        <p:nvSpPr>
+          <p:cNvPr id="14" name="Slide Number Placeholder 13">
+            <a:extLst>
+              <a:ext uri="{FF2B5EF4-FFF2-40B4-BE49-F238E27FC236}">
+                <a16:creationId xmlns:a16="http://schemas.microsoft.com/office/drawing/2014/main" id="{F6AB9669-92FD-A06C-38FF-4FD502A5070F}"/>
+              </a:ext>
+            </a:extLst>
+          </p:cNvPr>
+          <p:cNvSpPr>
+            <a:spLocks noGrp="1"/>
+          </p:cNvSpPr>
+          <p:nvPr>
+            <p:ph type="sldNum" sz="quarter" idx="12"/>
+          </p:nvPr>
+        </p:nvSpPr>
+        <p:spPr>
+          <a:xfrm>
+            <a:off x="8610600" y="6356350"/>
+            <a:ext cx="2743200" cy="365125"/>
+          </a:xfrm>
+        </p:spPr>
+        <p:txBody>
+          <a:bodyPr/>
+          <a:lstStyle/>
+          <a:p>
+            <a:fld id="{B5CEABB6-07DC-46E8-9B57-56EC44A396E5}" type="slidenum">
+              <a:rPr lang="en-US" smtClean="0">
+                <a:latin typeface="Arial" panose="020B0604020202020204" pitchFamily="34" charset="0"/>
+                <a:cs typeface="Arial" panose="020B0604020202020204" pitchFamily="34" charset="0"/>
+              </a:rPr>
+              <a:pPr/>
+              <a:t>16</a:t>
+            </a:fld>
+            <a:endParaRPr lang="en-US" dirty="0">
+              <a:latin typeface="Arial" panose="020B0604020202020204" pitchFamily="34" charset="0"/>
+              <a:cs typeface="Arial" panose="020B0604020202020204" pitchFamily="34" charset="0"/>
+            </a:endParaRPr>
+          </a:p>
+        </p:txBody>
+      </p:sp>
+      <p:pic>
+        <p:nvPicPr>
+          <p:cNvPr id="25" name="Picture 24">
+            <a:extLst>
+              <a:ext uri="{FF2B5EF4-FFF2-40B4-BE49-F238E27FC236}">
+                <a16:creationId xmlns:a16="http://schemas.microsoft.com/office/drawing/2014/main" id="{BA5390B8-2BF0-F1F0-A8C9-1EBCE4052A42}"/>
+              </a:ext>
+            </a:extLst>
+          </p:cNvPr>
+          <p:cNvPicPr>
+            <a:picLocks noChangeAspect="1"/>
+          </p:cNvPicPr>
+          <p:nvPr/>
+        </p:nvPicPr>
+        <p:blipFill>
+          <a:blip r:embed="rId2"/>
+          <a:stretch>
+            <a:fillRect/>
+          </a:stretch>
+        </p:blipFill>
+        <p:spPr>
+          <a:xfrm>
+            <a:off x="2438169" y="807841"/>
+            <a:ext cx="8915631" cy="599446"/>
+          </a:xfrm>
+          <a:prstGeom prst="rect">
+            <a:avLst/>
+          </a:prstGeom>
+        </p:spPr>
+      </p:pic>
+      <p:pic>
+        <p:nvPicPr>
+          <p:cNvPr id="26" name="Picture 25">
+            <a:extLst>
+              <a:ext uri="{FF2B5EF4-FFF2-40B4-BE49-F238E27FC236}">
+                <a16:creationId xmlns:a16="http://schemas.microsoft.com/office/drawing/2014/main" id="{854CA392-405E-8FD6-9C07-5730F3980BD9}"/>
+              </a:ext>
+            </a:extLst>
+          </p:cNvPr>
+          <p:cNvPicPr>
+            <a:picLocks noChangeAspect="1"/>
+          </p:cNvPicPr>
+          <p:nvPr/>
+        </p:nvPicPr>
+        <p:blipFill>
+          <a:blip r:embed="rId3"/>
+          <a:stretch>
+            <a:fillRect/>
+          </a:stretch>
+        </p:blipFill>
+        <p:spPr>
+          <a:xfrm>
+            <a:off x="2438166" y="1493227"/>
+            <a:ext cx="8915630" cy="641871"/>
+          </a:xfrm>
+          <a:prstGeom prst="rect">
+            <a:avLst/>
+          </a:prstGeom>
+        </p:spPr>
+      </p:pic>
+      <p:pic>
+        <p:nvPicPr>
+          <p:cNvPr id="27" name="Picture 26">
+            <a:extLst>
+              <a:ext uri="{FF2B5EF4-FFF2-40B4-BE49-F238E27FC236}">
+                <a16:creationId xmlns:a16="http://schemas.microsoft.com/office/drawing/2014/main" id="{083CB344-BAA5-569E-8EF4-42F438953D8E}"/>
+              </a:ext>
+            </a:extLst>
+          </p:cNvPr>
+          <p:cNvPicPr>
+            <a:picLocks noChangeAspect="1"/>
+          </p:cNvPicPr>
+          <p:nvPr/>
+        </p:nvPicPr>
+        <p:blipFill>
+          <a:blip r:embed="rId4"/>
+          <a:stretch>
+            <a:fillRect/>
+          </a:stretch>
+        </p:blipFill>
+        <p:spPr>
+          <a:xfrm>
+            <a:off x="2438166" y="2284649"/>
+            <a:ext cx="8915631" cy="1880377"/>
+          </a:xfrm>
+          <a:prstGeom prst="rect">
+            <a:avLst/>
+          </a:prstGeom>
+        </p:spPr>
+      </p:pic>
+      <p:sp>
+        <p:nvSpPr>
+          <p:cNvPr id="3" name="ZoneTexte 2">
+            <a:extLst>
+              <a:ext uri="{FF2B5EF4-FFF2-40B4-BE49-F238E27FC236}">
+                <a16:creationId xmlns:a16="http://schemas.microsoft.com/office/drawing/2014/main" id="{028D23D9-DD8A-B8AD-04CF-5C35791D7E72}"/>
+              </a:ext>
+            </a:extLst>
+          </p:cNvPr>
+          <p:cNvSpPr txBox="1"/>
+          <p:nvPr/>
+        </p:nvSpPr>
+        <p:spPr>
+          <a:xfrm>
+            <a:off x="4031892" y="487432"/>
+            <a:ext cx="5512800" cy="320409"/>
+          </a:xfrm>
+          <a:prstGeom prst="rect">
+            <a:avLst/>
+          </a:prstGeom>
+          <a:noFill/>
+        </p:spPr>
+        <p:txBody>
+          <a:bodyPr wrap="square">
+            <a:spAutoFit/>
+          </a:bodyPr>
+          <a:lstStyle/>
+          <a:p>
+            <a:pPr marL="342900" indent="-342900" algn="ctr">
+              <a:lnSpc>
+                <a:spcPts val="1425"/>
+              </a:lnSpc>
+              <a:buFont typeface="Wingdings" panose="05000000000000000000" pitchFamily="2" charset="2"/>
+              <a:buChar char="ü"/>
+            </a:pPr>
+            <a:r>
+              <a:rPr lang="en-US" sz="3200" b="1" dirty="0">
+                <a:latin typeface="Arial" panose="020B0604020202020204" pitchFamily="34" charset="0"/>
+                <a:cs typeface="Arial" panose="020B0604020202020204" pitchFamily="34" charset="0"/>
+              </a:rPr>
+              <a:t> Tests de verification</a:t>
+            </a:r>
+          </a:p>
+        </p:txBody>
+      </p:sp>
+      <p:pic>
+        <p:nvPicPr>
+          <p:cNvPr id="4" name="Picture 6">
+            <a:extLst>
+              <a:ext uri="{FF2B5EF4-FFF2-40B4-BE49-F238E27FC236}">
+                <a16:creationId xmlns:a16="http://schemas.microsoft.com/office/drawing/2014/main" id="{38C14997-78C5-982A-84ED-A6F5C82A045A}"/>
+              </a:ext>
+            </a:extLst>
+          </p:cNvPr>
+          <p:cNvPicPr>
+            <a:picLocks noChangeAspect="1"/>
+          </p:cNvPicPr>
+          <p:nvPr/>
+        </p:nvPicPr>
+        <p:blipFill>
+          <a:blip r:embed="rId5"/>
+          <a:stretch>
+            <a:fillRect/>
+          </a:stretch>
+        </p:blipFill>
+        <p:spPr>
+          <a:xfrm>
+            <a:off x="2438165" y="4314577"/>
+            <a:ext cx="8915631" cy="2332803"/>
+          </a:xfrm>
+          <a:prstGeom prst="rect">
+            <a:avLst/>
+          </a:prstGeom>
+        </p:spPr>
+      </p:pic>
+    </p:spTree>
+    <p:extLst>
+      <p:ext uri="{BB962C8B-B14F-4D97-AF65-F5344CB8AC3E}">
+        <p14:creationId xmlns:p14="http://schemas.microsoft.com/office/powerpoint/2010/main" val="744617351"/>
+      </p:ext>
+    </p:extLst>
+  </p:cSld>
+  <p:clrMapOvr>
+    <a:masterClrMapping/>
+  </p:clrMapOvr>
+</p:sld>
+</file>
+
+<file path=ppt/slides/slide17.xml><?xml version="1.0" encoding="utf-8"?>
+<p:sld xmlns:a="http://schemas.openxmlformats.org/drawingml/2006/main" xmlns:r="http://schemas.openxmlformats.org/officeDocument/2006/relationships" xmlns:p="http://schemas.openxmlformats.org/presentationml/2006/main">
+  <p:cSld>
+    <p:spTree>
+      <p:nvGrpSpPr>
+        <p:cNvPr id="1" name=""/>
+        <p:cNvGrpSpPr/>
+        <p:nvPr/>
+      </p:nvGrpSpPr>
+      <p:grpSpPr>
+        <a:xfrm>
+          <a:off x="0" y="0"/>
+          <a:ext cx="0" cy="0"/>
+          <a:chOff x="0" y="0"/>
+          <a:chExt cx="0" cy="0"/>
+        </a:xfrm>
+      </p:grpSpPr>
+      <p:sp>
+        <p:nvSpPr>
+          <p:cNvPr id="6" name="Slide Number Placeholder 5">
+            <a:extLst>
+              <a:ext uri="{FF2B5EF4-FFF2-40B4-BE49-F238E27FC236}">
+                <a16:creationId xmlns:a16="http://schemas.microsoft.com/office/drawing/2014/main" id="{BA32F697-D1D4-4B0A-B960-D1869BF8607A}"/>
+              </a:ext>
+            </a:extLst>
+          </p:cNvPr>
+          <p:cNvSpPr>
+            <a:spLocks noGrp="1"/>
+          </p:cNvSpPr>
+          <p:nvPr>
+            <p:ph type="sldNum" sz="quarter" idx="12"/>
+          </p:nvPr>
+        </p:nvSpPr>
+        <p:spPr>
+          <a:xfrm>
+            <a:off x="8610600" y="6356350"/>
+            <a:ext cx="2743200" cy="365125"/>
+          </a:xfrm>
+        </p:spPr>
+        <p:txBody>
+          <a:bodyPr/>
+          <a:lstStyle/>
+          <a:p>
+            <a:fld id="{B5CEABB6-07DC-46E8-9B57-56EC44A396E5}" type="slidenum">
+              <a:rPr lang="en-US" smtClean="0"/>
+              <a:pPr/>
+              <a:t>17</a:t>
+            </a:fld>
+            <a:endParaRPr lang="en-US" dirty="0"/>
+          </a:p>
+        </p:txBody>
+      </p:sp>
+    </p:spTree>
+    <p:extLst>
+      <p:ext uri="{BB962C8B-B14F-4D97-AF65-F5344CB8AC3E}">
+        <p14:creationId xmlns:p14="http://schemas.microsoft.com/office/powerpoint/2010/main" val="1472106130"/>
+      </p:ext>
+    </p:extLst>
+  </p:cSld>
+  <p:clrMapOvr>
+    <a:masterClrMapping/>
+  </p:clrMapOvr>
+</p:sld>
+</file>
+
+<file path=ppt/slides/slide18.xml><?xml version="1.0" encoding="utf-8"?>
+<p:sld xmlns:a="http://schemas.openxmlformats.org/drawingml/2006/main" xmlns:r="http://schemas.openxmlformats.org/officeDocument/2006/relationships" xmlns:p="http://schemas.openxmlformats.org/presentationml/2006/main">
+  <p:cSld>
+    <p:spTree>
+      <p:nvGrpSpPr>
+        <p:cNvPr id="1" name=""/>
+        <p:cNvGrpSpPr/>
+        <p:nvPr/>
+      </p:nvGrpSpPr>
+      <p:grpSpPr>
+        <a:xfrm>
+          <a:off x="0" y="0"/>
+          <a:ext cx="0" cy="0"/>
+          <a:chOff x="0" y="0"/>
+          <a:chExt cx="0" cy="0"/>
+        </a:xfrm>
+      </p:grpSpPr>
+      <p:sp>
+        <p:nvSpPr>
+          <p:cNvPr id="41" name="Title 1">
+            <a:extLst>
+              <a:ext uri="{FF2B5EF4-FFF2-40B4-BE49-F238E27FC236}">
+                <a16:creationId xmlns:a16="http://schemas.microsoft.com/office/drawing/2014/main" id="{66E47D63-84D7-8395-2E78-AA4524E83239}"/>
+              </a:ext>
+              <a:ext uri="{C183D7F6-B498-43B3-948B-1728B52AA6E4}">
+                <adec:decorative xmlns:adec="http://schemas.microsoft.com/office/drawing/2017/decorative" val="0"/>
+              </a:ext>
+            </a:extLst>
+          </p:cNvPr>
+          <p:cNvSpPr>
+            <a:spLocks noGrp="1"/>
+          </p:cNvSpPr>
+          <p:nvPr>
+            <p:ph type="title"/>
+          </p:nvPr>
+        </p:nvSpPr>
+        <p:spPr>
+          <a:xfrm>
+            <a:off x="2556123" y="565078"/>
+            <a:ext cx="4108296" cy="716340"/>
+          </a:xfrm>
+        </p:spPr>
+        <p:txBody>
+          <a:bodyPr/>
+          <a:lstStyle/>
+          <a:p>
+            <a:r>
+              <a:rPr lang="en-US" b="1" dirty="0">
+                <a:solidFill>
+                  <a:srgbClr val="0070C0"/>
+                </a:solidFill>
+                <a:latin typeface="Arial" panose="020B0604020202020204" pitchFamily="34" charset="0"/>
+                <a:cs typeface="Arial" panose="020B0604020202020204" pitchFamily="34" charset="0"/>
+              </a:rPr>
+              <a:t>conclusion</a:t>
+            </a:r>
+          </a:p>
+        </p:txBody>
+      </p:sp>
+    </p:spTree>
+    <p:extLst>
+      <p:ext uri="{BB962C8B-B14F-4D97-AF65-F5344CB8AC3E}">
+        <p14:creationId xmlns:p14="http://schemas.microsoft.com/office/powerpoint/2010/main" val="3477453048"/>
+      </p:ext>
+    </p:extLst>
+  </p:cSld>
+  <p:clrMapOvr>
+    <a:masterClrMapping/>
+  </p:clrMapOvr>
+</p:sld>
+</file>
+
+<file path=ppt/slides/slide19.xml><?xml version="1.0" encoding="utf-8"?>
+<p:sld xmlns:a="http://schemas.openxmlformats.org/drawingml/2006/main" xmlns:r="http://schemas.openxmlformats.org/officeDocument/2006/relationships" xmlns:p="http://schemas.openxmlformats.org/presentationml/2006/main">
+  <p:cSld>
+    <p:spTree>
+      <p:nvGrpSpPr>
+        <p:cNvPr id="1" name="">
+          <a:extLst>
+            <a:ext uri="{FF2B5EF4-FFF2-40B4-BE49-F238E27FC236}">
+              <a16:creationId xmlns:a16="http://schemas.microsoft.com/office/drawing/2014/main" id="{8BFFB349-3207-552C-B33E-B8EC9BDF4F87}"/>
+            </a:ext>
+          </a:extLst>
+        </p:cNvPr>
+        <p:cNvGrpSpPr/>
+        <p:nvPr/>
+      </p:nvGrpSpPr>
+      <p:grpSpPr>
+        <a:xfrm>
+          <a:off x="0" y="0"/>
+          <a:ext cx="0" cy="0"/>
+          <a:chOff x="0" y="0"/>
+          <a:chExt cx="0" cy="0"/>
+        </a:xfrm>
+      </p:grpSpPr>
+      <p:sp>
+        <p:nvSpPr>
+          <p:cNvPr id="2" name="Title 1">
+            <a:extLst>
+              <a:ext uri="{FF2B5EF4-FFF2-40B4-BE49-F238E27FC236}">
+                <a16:creationId xmlns:a16="http://schemas.microsoft.com/office/drawing/2014/main" id="{057D4622-A7C2-1A80-7904-D7F524A61648}"/>
+              </a:ext>
+            </a:extLst>
+          </p:cNvPr>
+          <p:cNvSpPr>
+            <a:spLocks noGrp="1"/>
+          </p:cNvSpPr>
+          <p:nvPr>
+            <p:ph type="title"/>
+          </p:nvPr>
+        </p:nvSpPr>
+        <p:spPr>
+          <a:xfrm>
+            <a:off x="1885156" y="892177"/>
+            <a:ext cx="8421688" cy="1325563"/>
+          </a:xfrm>
+        </p:spPr>
+        <p:txBody>
+          <a:bodyPr/>
           <a:lstStyle/>
           <a:p>
             <a:r>
@@ -19161,58 +20932,248 @@
                 <a:latin typeface="Arial" panose="020B0604020202020204" pitchFamily="34" charset="0"/>
                 <a:cs typeface="Arial" panose="020B0604020202020204" pitchFamily="34" charset="0"/>
               </a:rPr>
-              <a:t>Mirjam Nilsson​</a:t>
-            </a:r>
-          </a:p>
-          <a:p>
+              <a:t>MEET THE TEAM</a:t>
+            </a:r>
+          </a:p>
+        </p:txBody>
+      </p:sp>
+      <p:pic>
+        <p:nvPicPr>
+          <p:cNvPr id="47" name="Picture Placeholder 46" descr="Team member headshot">
+            <a:extLst>
+              <a:ext uri="{FF2B5EF4-FFF2-40B4-BE49-F238E27FC236}">
+                <a16:creationId xmlns:a16="http://schemas.microsoft.com/office/drawing/2014/main" id="{A0762C25-BF79-2122-CE5B-442E592FC2D6}"/>
+              </a:ext>
+            </a:extLst>
+          </p:cNvPr>
+          <p:cNvPicPr>
+            <a:picLocks noGrp="1" noChangeAspect="1"/>
+          </p:cNvPicPr>
+          <p:nvPr>
+            <p:ph type="pic" sz="quarter" idx="15"/>
+          </p:nvPr>
+        </p:nvPicPr>
+        <p:blipFill rotWithShape="1">
+          <a:blip r:embed="rId2">
+            <a:extLst>
+              <a:ext uri="{28A0092B-C50C-407E-A947-70E740481C1C}">
+                <a14:useLocalDpi xmlns:a14="http://schemas.microsoft.com/office/drawing/2010/main" val="0"/>
+              </a:ext>
+            </a:extLst>
+          </a:blip>
+          <a:srcRect/>
+          <a:stretch/>
+        </p:blipFill>
+        <p:spPr>
+          <a:xfrm>
+            <a:off x="3836914" y="2886074"/>
+            <a:ext cx="1845511" cy="1845511"/>
+          </a:xfrm>
+        </p:spPr>
+      </p:pic>
+      <p:pic>
+        <p:nvPicPr>
+          <p:cNvPr id="45" name="Picture Placeholder 44" descr="Team member headshot">
+            <a:extLst>
+              <a:ext uri="{FF2B5EF4-FFF2-40B4-BE49-F238E27FC236}">
+                <a16:creationId xmlns:a16="http://schemas.microsoft.com/office/drawing/2014/main" id="{787D0F63-6DF4-F133-FEFE-1E6C83C248EA}"/>
+              </a:ext>
+            </a:extLst>
+          </p:cNvPr>
+          <p:cNvPicPr>
+            <a:picLocks noGrp="1" noChangeAspect="1"/>
+          </p:cNvPicPr>
+          <p:nvPr>
+            <p:ph type="pic" sz="quarter" idx="16"/>
+          </p:nvPr>
+        </p:nvPicPr>
+        <p:blipFill rotWithShape="1">
+          <a:blip r:embed="rId3">
+            <a:extLst>
+              <a:ext uri="{28A0092B-C50C-407E-A947-70E740481C1C}">
+                <a14:useLocalDpi xmlns:a14="http://schemas.microsoft.com/office/drawing/2010/main" val="0"/>
+              </a:ext>
+            </a:extLst>
+          </a:blip>
+          <a:srcRect/>
+          <a:stretch/>
+        </p:blipFill>
+        <p:spPr>
+          <a:xfrm>
+            <a:off x="6327578" y="2886074"/>
+            <a:ext cx="1845511" cy="1845511"/>
+          </a:xfrm>
+        </p:spPr>
+      </p:pic>
+      <p:pic>
+        <p:nvPicPr>
+          <p:cNvPr id="43" name="Picture Placeholder 42" descr="Team member headshot">
+            <a:extLst>
+              <a:ext uri="{FF2B5EF4-FFF2-40B4-BE49-F238E27FC236}">
+                <a16:creationId xmlns:a16="http://schemas.microsoft.com/office/drawing/2014/main" id="{744BEB21-D18E-BDC8-D982-470C289FFFC7}"/>
+              </a:ext>
+            </a:extLst>
+          </p:cNvPr>
+          <p:cNvPicPr>
+            <a:picLocks noGrp="1" noChangeAspect="1"/>
+          </p:cNvPicPr>
+          <p:nvPr>
+            <p:ph type="pic" sz="quarter" idx="17"/>
+          </p:nvPr>
+        </p:nvPicPr>
+        <p:blipFill rotWithShape="1">
+          <a:blip r:embed="rId4">
+            <a:extLst>
+              <a:ext uri="{28A0092B-C50C-407E-A947-70E740481C1C}">
+                <a14:useLocalDpi xmlns:a14="http://schemas.microsoft.com/office/drawing/2010/main" val="0"/>
+              </a:ext>
+            </a:extLst>
+          </a:blip>
+          <a:srcRect/>
+          <a:stretch/>
+        </p:blipFill>
+        <p:spPr>
+          <a:xfrm>
+            <a:off x="8747458" y="2886074"/>
+            <a:ext cx="1845511" cy="1845511"/>
+          </a:xfrm>
+        </p:spPr>
+      </p:pic>
+      <p:sp>
+        <p:nvSpPr>
+          <p:cNvPr id="24" name="Text Placeholder 23">
+            <a:extLst>
+              <a:ext uri="{FF2B5EF4-FFF2-40B4-BE49-F238E27FC236}">
+                <a16:creationId xmlns:a16="http://schemas.microsoft.com/office/drawing/2014/main" id="{770E754B-2AAD-8739-A088-B5E5A2B7F7C9}"/>
+              </a:ext>
+            </a:extLst>
+          </p:cNvPr>
+          <p:cNvSpPr>
+            <a:spLocks noGrp="1"/>
+          </p:cNvSpPr>
+          <p:nvPr>
+            <p:ph type="body" idx="1"/>
+          </p:nvPr>
+        </p:nvSpPr>
+        <p:spPr>
+          <a:xfrm>
+            <a:off x="1343248" y="5084524"/>
+            <a:ext cx="2123743" cy="343061"/>
+          </a:xfrm>
+        </p:spPr>
+        <p:txBody>
+          <a:bodyPr/>
+          <a:lstStyle/>
+          <a:p>
+            <a:r>
+              <a:rPr lang="en-US" dirty="0" err="1">
+                <a:latin typeface="Arial" panose="020B0604020202020204" pitchFamily="34" charset="0"/>
+                <a:cs typeface="Arial" panose="020B0604020202020204" pitchFamily="34" charset="0"/>
+              </a:rPr>
+              <a:t>Donsam</a:t>
+            </a:r>
             <a:r>
               <a:rPr lang="en-US" dirty="0">
                 <a:latin typeface="Arial" panose="020B0604020202020204" pitchFamily="34" charset="0"/>
                 <a:cs typeface="Arial" panose="020B0604020202020204" pitchFamily="34" charset="0"/>
               </a:rPr>
-              <a:t>206-555-0146</a:t>
-            </a:r>
-          </a:p>
+              <a:t> Jean Gabard NOEL</a:t>
+            </a:r>
+          </a:p>
+        </p:txBody>
+      </p:sp>
+      <p:sp>
+        <p:nvSpPr>
+          <p:cNvPr id="33" name="Text Placeholder 32">
+            <a:extLst>
+              <a:ext uri="{FF2B5EF4-FFF2-40B4-BE49-F238E27FC236}">
+                <a16:creationId xmlns:a16="http://schemas.microsoft.com/office/drawing/2014/main" id="{E078C7C3-3B4C-E3B6-ADA1-6E4C415120C8}"/>
+              </a:ext>
+            </a:extLst>
+          </p:cNvPr>
+          <p:cNvSpPr>
+            <a:spLocks noGrp="1"/>
+          </p:cNvSpPr>
+          <p:nvPr>
+            <p:ph type="body" idx="18"/>
+          </p:nvPr>
+        </p:nvSpPr>
+        <p:spPr>
+          <a:xfrm>
+            <a:off x="3692980" y="5099206"/>
+            <a:ext cx="2135755" cy="343061"/>
+          </a:xfrm>
+        </p:spPr>
+        <p:txBody>
+          <a:bodyPr/>
+          <a:lstStyle/>
           <a:p>
             <a:r>
               <a:rPr lang="en-US" dirty="0">
                 <a:latin typeface="Arial" panose="020B0604020202020204" pitchFamily="34" charset="0"/>
                 <a:cs typeface="Arial" panose="020B0604020202020204" pitchFamily="34" charset="0"/>
               </a:rPr>
-              <a:t>mirjam@contoso.com</a:t>
-            </a:r>
-          </a:p>
+              <a:t>MIRJAM NILSSON​</a:t>
+            </a:r>
+          </a:p>
+        </p:txBody>
+      </p:sp>
+      <p:sp>
+        <p:nvSpPr>
+          <p:cNvPr id="34" name="Text Placeholder 33">
+            <a:extLst>
+              <a:ext uri="{FF2B5EF4-FFF2-40B4-BE49-F238E27FC236}">
+                <a16:creationId xmlns:a16="http://schemas.microsoft.com/office/drawing/2014/main" id="{8553090E-D3CE-191B-F7A5-6C8FA99F9924}"/>
+              </a:ext>
+            </a:extLst>
+          </p:cNvPr>
+          <p:cNvSpPr>
+            <a:spLocks noGrp="1"/>
+          </p:cNvSpPr>
+          <p:nvPr>
+            <p:ph type="body" idx="19"/>
+          </p:nvPr>
+        </p:nvSpPr>
+        <p:spPr>
+          <a:xfrm>
+            <a:off x="6183644" y="5099206"/>
+            <a:ext cx="2123743" cy="343061"/>
+          </a:xfrm>
+        </p:spPr>
+        <p:txBody>
+          <a:bodyPr/>
+          <a:lstStyle/>
           <a:p>
             <a:r>
               <a:rPr lang="en-US" dirty="0">
                 <a:latin typeface="Arial" panose="020B0604020202020204" pitchFamily="34" charset="0"/>
                 <a:cs typeface="Arial" panose="020B0604020202020204" pitchFamily="34" charset="0"/>
               </a:rPr>
-              <a:t>www.contoso.com</a:t>
-            </a:r>
-          </a:p>
-        </p:txBody>
-      </p:sp>
-      <p:sp>
-        <p:nvSpPr>
-          <p:cNvPr id="4" name="Date Placeholder 3">
-            <a:extLst>
-              <a:ext uri="{FF2B5EF4-FFF2-40B4-BE49-F238E27FC236}">
-                <a16:creationId xmlns:a16="http://schemas.microsoft.com/office/drawing/2014/main" id="{72DA7980-C870-4C9A-84FA-4120D8AF5DE8}"/>
-              </a:ext>
-            </a:extLst>
-          </p:cNvPr>
-          <p:cNvSpPr>
-            <a:spLocks noGrp="1"/>
-          </p:cNvSpPr>
-          <p:nvPr>
-            <p:ph type="dt" sz="half" idx="10"/>
-          </p:nvPr>
-        </p:nvSpPr>
-        <p:spPr>
-          <a:xfrm>
-            <a:off x="4267200" y="6356350"/>
-            <a:ext cx="1774371" cy="365125"/>
+              <a:t>FLORA BERGGREN​</a:t>
+            </a:r>
+          </a:p>
+        </p:txBody>
+      </p:sp>
+      <p:sp>
+        <p:nvSpPr>
+          <p:cNvPr id="35" name="Text Placeholder 34">
+            <a:extLst>
+              <a:ext uri="{FF2B5EF4-FFF2-40B4-BE49-F238E27FC236}">
+                <a16:creationId xmlns:a16="http://schemas.microsoft.com/office/drawing/2014/main" id="{77D54B5D-0BE0-86F8-2746-77BD3D7FE978}"/>
+              </a:ext>
+            </a:extLst>
+          </p:cNvPr>
+          <p:cNvSpPr>
+            <a:spLocks noGrp="1"/>
+          </p:cNvSpPr>
+          <p:nvPr>
+            <p:ph type="body" idx="20"/>
+          </p:nvPr>
+        </p:nvSpPr>
+        <p:spPr>
+          <a:xfrm>
+            <a:off x="8603525" y="5084524"/>
+            <a:ext cx="2123742" cy="343061"/>
           </a:xfrm>
         </p:spPr>
         <p:txBody>
@@ -19220,32 +21181,35 @@
           <a:lstStyle/>
           <a:p>
             <a:r>
-              <a:rPr lang="en-US" dirty="0"/>
-              <a:t>20XX</a:t>
-            </a:r>
-          </a:p>
-        </p:txBody>
-      </p:sp>
-      <p:sp>
-        <p:nvSpPr>
-          <p:cNvPr id="5" name="Footer Placeholder 4">
-            <a:extLst>
-              <a:ext uri="{FF2B5EF4-FFF2-40B4-BE49-F238E27FC236}">
-                <a16:creationId xmlns:a16="http://schemas.microsoft.com/office/drawing/2014/main" id="{0DFADE42-1A3F-40C8-A071-E57644F3D843}"/>
-              </a:ext>
-            </a:extLst>
-          </p:cNvPr>
-          <p:cNvSpPr>
-            <a:spLocks noGrp="1"/>
-          </p:cNvSpPr>
-          <p:nvPr>
-            <p:ph type="ftr" sz="quarter" idx="11"/>
-          </p:nvPr>
-        </p:nvSpPr>
-        <p:spPr>
-          <a:xfrm>
-            <a:off x="6479721" y="6356350"/>
-            <a:ext cx="2661557" cy="365125"/>
+              <a:rPr lang="en-US" dirty="0">
+                <a:latin typeface="Arial" panose="020B0604020202020204" pitchFamily="34" charset="0"/>
+                <a:cs typeface="Arial" panose="020B0604020202020204" pitchFamily="34" charset="0"/>
+              </a:rPr>
+              <a:t>RAJESH SANTOSHI​</a:t>
+            </a:r>
+          </a:p>
+        </p:txBody>
+      </p:sp>
+      <p:sp>
+        <p:nvSpPr>
+          <p:cNvPr id="36" name="Text Placeholder 35">
+            <a:extLst>
+              <a:ext uri="{FF2B5EF4-FFF2-40B4-BE49-F238E27FC236}">
+                <a16:creationId xmlns:a16="http://schemas.microsoft.com/office/drawing/2014/main" id="{EC372EEF-6490-3F6B-1DA2-E665E048DD20}"/>
+              </a:ext>
+            </a:extLst>
+          </p:cNvPr>
+          <p:cNvSpPr>
+            <a:spLocks noGrp="1"/>
+          </p:cNvSpPr>
+          <p:nvPr>
+            <p:ph type="body" idx="21"/>
+          </p:nvPr>
+        </p:nvSpPr>
+        <p:spPr>
+          <a:xfrm>
+            <a:off x="1487181" y="5464114"/>
+            <a:ext cx="1845511" cy="343061"/>
           </a:xfrm>
         </p:spPr>
         <p:txBody>
@@ -19253,51 +21217,225 @@
           <a:lstStyle/>
           <a:p>
             <a:r>
-              <a:rPr lang="en-US" dirty="0"/>
-              <a:t>Pitch Deck</a:t>
-            </a:r>
-          </a:p>
-        </p:txBody>
-      </p:sp>
-      <p:sp>
-        <p:nvSpPr>
-          <p:cNvPr id="6" name="Slide Number Placeholder 5">
-            <a:extLst>
-              <a:ext uri="{FF2B5EF4-FFF2-40B4-BE49-F238E27FC236}">
-                <a16:creationId xmlns:a16="http://schemas.microsoft.com/office/drawing/2014/main" id="{5EDCFF82-B70F-4971-9182-7C3AEA3CFD26}"/>
-              </a:ext>
-            </a:extLst>
-          </p:cNvPr>
-          <p:cNvSpPr>
-            <a:spLocks noGrp="1"/>
-          </p:cNvSpPr>
-          <p:nvPr>
-            <p:ph type="sldNum" sz="quarter" idx="12"/>
-          </p:nvPr>
-        </p:nvSpPr>
-        <p:spPr>
-          <a:xfrm>
-            <a:off x="9579428" y="6356350"/>
-            <a:ext cx="1774371" cy="365125"/>
+              <a:rPr lang="en-US" dirty="0" err="1">
+                <a:latin typeface="Arial" panose="020B0604020202020204" pitchFamily="34" charset="0"/>
+                <a:cs typeface="Arial" panose="020B0604020202020204" pitchFamily="34" charset="0"/>
+              </a:rPr>
+              <a:t>Etudiant</a:t>
+            </a:r>
+            <a:r>
+              <a:rPr lang="en-US" dirty="0">
+                <a:latin typeface="Arial" panose="020B0604020202020204" pitchFamily="34" charset="0"/>
+                <a:cs typeface="Arial" panose="020B0604020202020204" pitchFamily="34" charset="0"/>
+              </a:rPr>
+              <a:t> L3</a:t>
+            </a:r>
+          </a:p>
+        </p:txBody>
+      </p:sp>
+      <p:sp>
+        <p:nvSpPr>
+          <p:cNvPr id="37" name="Text Placeholder 36">
+            <a:extLst>
+              <a:ext uri="{FF2B5EF4-FFF2-40B4-BE49-F238E27FC236}">
+                <a16:creationId xmlns:a16="http://schemas.microsoft.com/office/drawing/2014/main" id="{86288FF7-DFE9-7DB7-7EA0-6435D180998A}"/>
+              </a:ext>
+            </a:extLst>
+          </p:cNvPr>
+          <p:cNvSpPr>
+            <a:spLocks noGrp="1"/>
+          </p:cNvSpPr>
+          <p:nvPr>
+            <p:ph type="body" idx="22"/>
+          </p:nvPr>
+        </p:nvSpPr>
+        <p:spPr>
+          <a:xfrm>
+            <a:off x="3836913" y="5478796"/>
+            <a:ext cx="1855949" cy="343061"/>
           </a:xfrm>
         </p:spPr>
         <p:txBody>
           <a:bodyPr/>
           <a:lstStyle/>
           <a:p>
+            <a:r>
+              <a:rPr lang="en-US" dirty="0">
+                <a:latin typeface="Arial" panose="020B0604020202020204" pitchFamily="34" charset="0"/>
+                <a:cs typeface="Arial" panose="020B0604020202020204" pitchFamily="34" charset="0"/>
+              </a:rPr>
+              <a:t>Chief Executive Officer</a:t>
+            </a:r>
+          </a:p>
+        </p:txBody>
+      </p:sp>
+      <p:sp>
+        <p:nvSpPr>
+          <p:cNvPr id="38" name="Text Placeholder 37">
+            <a:extLst>
+              <a:ext uri="{FF2B5EF4-FFF2-40B4-BE49-F238E27FC236}">
+                <a16:creationId xmlns:a16="http://schemas.microsoft.com/office/drawing/2014/main" id="{D7D418C7-B549-AD36-B29C-DBB301DBA957}"/>
+              </a:ext>
+            </a:extLst>
+          </p:cNvPr>
+          <p:cNvSpPr>
+            <a:spLocks noGrp="1"/>
+          </p:cNvSpPr>
+          <p:nvPr>
+            <p:ph type="body" idx="23"/>
+          </p:nvPr>
+        </p:nvSpPr>
+        <p:spPr>
+          <a:xfrm>
+            <a:off x="6327577" y="5478796"/>
+            <a:ext cx="1845511" cy="343061"/>
+          </a:xfrm>
+        </p:spPr>
+        <p:txBody>
+          <a:bodyPr/>
+          <a:lstStyle/>
+          <a:p>
+            <a:r>
+              <a:rPr lang="en-US" dirty="0">
+                <a:latin typeface="Arial" panose="020B0604020202020204" pitchFamily="34" charset="0"/>
+                <a:cs typeface="Arial" panose="020B0604020202020204" pitchFamily="34" charset="0"/>
+              </a:rPr>
+              <a:t>Chief Operations Officer</a:t>
+            </a:r>
+          </a:p>
+          <a:p>
+            <a:endParaRPr lang="en-US" dirty="0">
+              <a:latin typeface="Arial" panose="020B0604020202020204" pitchFamily="34" charset="0"/>
+              <a:cs typeface="Arial" panose="020B0604020202020204" pitchFamily="34" charset="0"/>
+            </a:endParaRPr>
+          </a:p>
+        </p:txBody>
+      </p:sp>
+      <p:sp>
+        <p:nvSpPr>
+          <p:cNvPr id="39" name="Text Placeholder 38">
+            <a:extLst>
+              <a:ext uri="{FF2B5EF4-FFF2-40B4-BE49-F238E27FC236}">
+                <a16:creationId xmlns:a16="http://schemas.microsoft.com/office/drawing/2014/main" id="{23797BDC-F6A0-C1D1-59F4-CD0C40575F9C}"/>
+              </a:ext>
+            </a:extLst>
+          </p:cNvPr>
+          <p:cNvSpPr>
+            <a:spLocks noGrp="1"/>
+          </p:cNvSpPr>
+          <p:nvPr>
+            <p:ph type="body" idx="24"/>
+          </p:nvPr>
+        </p:nvSpPr>
+        <p:spPr>
+          <a:xfrm>
+            <a:off x="8747458" y="5464114"/>
+            <a:ext cx="1845510" cy="343061"/>
+          </a:xfrm>
+        </p:spPr>
+        <p:txBody>
+          <a:bodyPr/>
+          <a:lstStyle/>
+          <a:p>
+            <a:r>
+              <a:rPr lang="en-US" dirty="0">
+                <a:latin typeface="Arial" panose="020B0604020202020204" pitchFamily="34" charset="0"/>
+                <a:cs typeface="Arial" panose="020B0604020202020204" pitchFamily="34" charset="0"/>
+              </a:rPr>
+              <a:t>VP Marketing</a:t>
+            </a:r>
+          </a:p>
+          <a:p>
+            <a:endParaRPr lang="en-US" dirty="0">
+              <a:latin typeface="Arial" panose="020B0604020202020204" pitchFamily="34" charset="0"/>
+              <a:cs typeface="Arial" panose="020B0604020202020204" pitchFamily="34" charset="0"/>
+            </a:endParaRPr>
+          </a:p>
+        </p:txBody>
+      </p:sp>
+      <p:sp>
+        <p:nvSpPr>
+          <p:cNvPr id="5" name="Slide Number Placeholder 4">
+            <a:extLst>
+              <a:ext uri="{FF2B5EF4-FFF2-40B4-BE49-F238E27FC236}">
+                <a16:creationId xmlns:a16="http://schemas.microsoft.com/office/drawing/2014/main" id="{E2ECE122-687C-9408-0650-B13CB7938BCF}"/>
+              </a:ext>
+            </a:extLst>
+          </p:cNvPr>
+          <p:cNvSpPr>
+            <a:spLocks noGrp="1"/>
+          </p:cNvSpPr>
+          <p:nvPr>
+            <p:ph type="sldNum" sz="quarter" idx="12"/>
+          </p:nvPr>
+        </p:nvSpPr>
+        <p:spPr>
+          <a:xfrm>
+            <a:off x="8610600" y="6356350"/>
+            <a:ext cx="2743200" cy="365125"/>
+          </a:xfrm>
+        </p:spPr>
+        <p:txBody>
+          <a:bodyPr/>
+          <a:lstStyle/>
+          <a:p>
             <a:fld id="{B5CEABB6-07DC-46E8-9B57-56EC44A396E5}" type="slidenum">
-              <a:rPr lang="en-US" smtClean="0"/>
+              <a:rPr lang="en-US" smtClean="0">
+                <a:latin typeface="Arial" panose="020B0604020202020204" pitchFamily="34" charset="0"/>
+                <a:cs typeface="Arial" panose="020B0604020202020204" pitchFamily="34" charset="0"/>
+              </a:rPr>
               <a:pPr/>
-              <a:t>15</a:t>
+              <a:t>19</a:t>
             </a:fld>
-            <a:endParaRPr lang="en-US" dirty="0"/>
-          </a:p>
-        </p:txBody>
-      </p:sp>
+            <a:endParaRPr lang="en-US" dirty="0">
+              <a:latin typeface="Arial" panose="020B0604020202020204" pitchFamily="34" charset="0"/>
+              <a:cs typeface="Arial" panose="020B0604020202020204" pitchFamily="34" charset="0"/>
+            </a:endParaRPr>
+          </a:p>
+        </p:txBody>
+      </p:sp>
+      <p:pic>
+        <p:nvPicPr>
+          <p:cNvPr id="9" name="Espace réservé pour une image  8">
+            <a:extLst>
+              <a:ext uri="{FF2B5EF4-FFF2-40B4-BE49-F238E27FC236}">
+                <a16:creationId xmlns:a16="http://schemas.microsoft.com/office/drawing/2014/main" id="{97807665-ECFB-E9DC-3B31-A783FDEAE227}"/>
+              </a:ext>
+            </a:extLst>
+          </p:cNvPr>
+          <p:cNvPicPr>
+            <a:picLocks noGrp="1" noChangeAspect="1"/>
+          </p:cNvPicPr>
+          <p:nvPr>
+            <p:ph type="pic" sz="quarter" idx="14"/>
+          </p:nvPr>
+        </p:nvPicPr>
+        <p:blipFill>
+          <a:blip r:embed="rId5"/>
+          <a:srcRect b="24936"/>
+          <a:stretch>
+            <a:fillRect/>
+          </a:stretch>
+        </p:blipFill>
+        <p:spPr>
+          <a:xfrm>
+            <a:off x="1487181" y="2886074"/>
+            <a:ext cx="1845511" cy="1845511"/>
+          </a:xfrm>
+          <a:prstGeom prst="rect">
+            <a:avLst/>
+          </a:prstGeom>
+          <a:solidFill>
+            <a:prstClr val="white">
+              <a:lumMod val="95000"/>
+            </a:prstClr>
+          </a:solidFill>
+        </p:spPr>
+      </p:pic>
     </p:spTree>
     <p:extLst>
       <p:ext uri="{BB962C8B-B14F-4D97-AF65-F5344CB8AC3E}">
-        <p14:creationId xmlns:p14="http://schemas.microsoft.com/office/powerpoint/2010/main" val="2436493926"/>
+        <p14:creationId xmlns:p14="http://schemas.microsoft.com/office/powerpoint/2010/main" val="1358989745"/>
       </p:ext>
     </p:extLst>
   </p:cSld>
@@ -19344,8 +21482,8 @@
         </p:nvSpPr>
         <p:spPr>
           <a:xfrm>
-            <a:off x="5807126" y="152613"/>
-            <a:ext cx="3588250" cy="369332"/>
+            <a:off x="5904389" y="164721"/>
+            <a:ext cx="4893750" cy="461665"/>
           </a:xfrm>
           <a:prstGeom prst="rect">
             <a:avLst/>
@@ -19358,7 +21496,7 @@
           </a:bodyPr>
           <a:lstStyle/>
           <a:p>
-            <a:pPr marL="0" marR="0">
+            <a:pPr marL="0" marR="0" algn="ctr">
               <a:spcBef>
                 <a:spcPts val="1800"/>
               </a:spcBef>
@@ -19368,9 +21506,9 @@
               <a:buNone/>
             </a:pPr>
             <a:r>
-              <a:rPr lang="fr-HT" sz="1800" b="1" kern="0" dirty="0">
-                <a:solidFill>
-                  <a:srgbClr val="1F3864"/>
+              <a:rPr lang="fr-HT" sz="2400" b="1" kern="0" dirty="0">
+                <a:solidFill>
+                  <a:srgbClr val="0070C0"/>
                 </a:solidFill>
                 <a:effectLst/>
                 <a:latin typeface="Arial" panose="020B0604020202020204" pitchFamily="34" charset="0"/>
@@ -19378,9 +21516,9 @@
               </a:rPr>
               <a:t>LISTE DES ABRÉVIATIONS</a:t>
             </a:r>
-            <a:endParaRPr lang="en-US" sz="1800" b="1" kern="0" dirty="0">
+            <a:endParaRPr lang="en-US" sz="2400" b="1" kern="0" dirty="0">
               <a:solidFill>
-                <a:srgbClr val="1F3864"/>
+                <a:srgbClr val="0070C0"/>
               </a:solidFill>
               <a:effectLst/>
               <a:latin typeface="Arial" panose="020B0604020202020204" pitchFamily="34" charset="0"/>
@@ -19391,280 +21529,548 @@
       </p:sp>
       <p:sp>
         <p:nvSpPr>
-          <p:cNvPr id="2" name="Title 1">
-            <a:extLst>
-              <a:ext uri="{FF2B5EF4-FFF2-40B4-BE49-F238E27FC236}">
-                <a16:creationId xmlns:a16="http://schemas.microsoft.com/office/drawing/2014/main" id="{46DB8E25-D480-4868-6311-13FDEDFD5E32}"/>
-              </a:ext>
-            </a:extLst>
-          </p:cNvPr>
-          <p:cNvSpPr>
-            <a:spLocks noGrp="1"/>
-          </p:cNvSpPr>
-          <p:nvPr>
-            <p:ph type="ctrTitle"/>
-          </p:nvPr>
-        </p:nvSpPr>
-        <p:spPr>
-          <a:xfrm>
-            <a:off x="5807126" y="521946"/>
-            <a:ext cx="6274945" cy="5998776"/>
-          </a:xfrm>
-        </p:spPr>
-        <p:txBody>
-          <a:bodyPr/>
-          <a:lstStyle/>
-          <a:p>
-            <a:pPr>
+          <p:cNvPr id="11" name="Subtitle 2">
+            <a:extLst>
+              <a:ext uri="{FF2B5EF4-FFF2-40B4-BE49-F238E27FC236}">
+                <a16:creationId xmlns:a16="http://schemas.microsoft.com/office/drawing/2014/main" id="{DC4310DE-C977-FE21-D874-9515F492425C}"/>
+              </a:ext>
+              <a:ext uri="{C183D7F6-B498-43B3-948B-1728B52AA6E4}">
+                <adec:decorative xmlns:adec="http://schemas.microsoft.com/office/drawing/2017/decorative" val="0"/>
+              </a:ext>
+            </a:extLst>
+          </p:cNvPr>
+          <p:cNvSpPr txBox="1">
+            <a:spLocks/>
+          </p:cNvSpPr>
+          <p:nvPr/>
+        </p:nvSpPr>
+        <p:spPr>
+          <a:xfrm>
+            <a:off x="5750277" y="760288"/>
+            <a:ext cx="6524090" cy="5702158"/>
+          </a:xfrm>
+          <a:prstGeom prst="rect">
+            <a:avLst/>
+          </a:prstGeom>
+        </p:spPr>
+        <p:txBody>
+          <a:bodyPr>
+            <a:normAutofit/>
+          </a:bodyPr>
+          <a:lstStyle>
+            <a:lvl1pPr marL="228600" indent="-228600" algn="l" defTabSz="914400" rtl="0" eaLnBrk="1" latinLnBrk="0" hangingPunct="1">
               <a:lnSpc>
-                <a:spcPct val="100000"/>
+                <a:spcPct val="90000"/>
               </a:lnSpc>
-            </a:pPr>
-            <a:r>
-              <a:rPr lang="fr-FR" sz="1700" dirty="0">
+              <a:spcBef>
+                <a:spcPts val="1000"/>
+              </a:spcBef>
+              <a:buFont typeface="Arial" panose="020B0604020202020204" pitchFamily="34" charset="0"/>
+              <a:buChar char="•"/>
+              <a:defRPr sz="2800" kern="1200">
+                <a:solidFill>
+                  <a:schemeClr val="tx1">
+                    <a:lumMod val="75000"/>
+                    <a:lumOff val="25000"/>
+                  </a:schemeClr>
+                </a:solidFill>
+                <a:latin typeface="+mn-lt"/>
+                <a:ea typeface="+mn-ea"/>
+                <a:cs typeface="+mn-cs"/>
+              </a:defRPr>
+            </a:lvl1pPr>
+            <a:lvl2pPr marL="685800" indent="-228600" algn="l" defTabSz="914400" rtl="0" eaLnBrk="1" latinLnBrk="0" hangingPunct="1">
+              <a:lnSpc>
+                <a:spcPct val="90000"/>
+              </a:lnSpc>
+              <a:spcBef>
+                <a:spcPts val="500"/>
+              </a:spcBef>
+              <a:buFont typeface="Arial" panose="020B0604020202020204" pitchFamily="34" charset="0"/>
+              <a:buChar char="•"/>
+              <a:defRPr sz="2400" kern="1200">
+                <a:solidFill>
+                  <a:schemeClr val="tx1">
+                    <a:lumMod val="75000"/>
+                    <a:lumOff val="25000"/>
+                  </a:schemeClr>
+                </a:solidFill>
+                <a:latin typeface="+mn-lt"/>
+                <a:ea typeface="+mn-ea"/>
+                <a:cs typeface="+mn-cs"/>
+              </a:defRPr>
+            </a:lvl2pPr>
+            <a:lvl3pPr marL="1143000" indent="-228600" algn="l" defTabSz="914400" rtl="0" eaLnBrk="1" latinLnBrk="0" hangingPunct="1">
+              <a:lnSpc>
+                <a:spcPct val="90000"/>
+              </a:lnSpc>
+              <a:spcBef>
+                <a:spcPts val="500"/>
+              </a:spcBef>
+              <a:buFont typeface="Arial" panose="020B0604020202020204" pitchFamily="34" charset="0"/>
+              <a:buChar char="•"/>
+              <a:defRPr sz="2000" kern="1200">
+                <a:solidFill>
+                  <a:schemeClr val="tx1">
+                    <a:lumMod val="75000"/>
+                    <a:lumOff val="25000"/>
+                  </a:schemeClr>
+                </a:solidFill>
+                <a:latin typeface="+mn-lt"/>
+                <a:ea typeface="+mn-ea"/>
+                <a:cs typeface="+mn-cs"/>
+              </a:defRPr>
+            </a:lvl3pPr>
+            <a:lvl4pPr marL="1600200" indent="-228600" algn="l" defTabSz="914400" rtl="0" eaLnBrk="1" latinLnBrk="0" hangingPunct="1">
+              <a:lnSpc>
+                <a:spcPct val="90000"/>
+              </a:lnSpc>
+              <a:spcBef>
+                <a:spcPts val="500"/>
+              </a:spcBef>
+              <a:buFont typeface="Arial" panose="020B0604020202020204" pitchFamily="34" charset="0"/>
+              <a:buChar char="•"/>
+              <a:defRPr sz="1800" kern="1200">
+                <a:solidFill>
+                  <a:schemeClr val="tx1">
+                    <a:lumMod val="75000"/>
+                    <a:lumOff val="25000"/>
+                  </a:schemeClr>
+                </a:solidFill>
+                <a:latin typeface="+mn-lt"/>
+                <a:ea typeface="+mn-ea"/>
+                <a:cs typeface="+mn-cs"/>
+              </a:defRPr>
+            </a:lvl4pPr>
+            <a:lvl5pPr marL="2057400" indent="-228600" algn="l" defTabSz="914400" rtl="0" eaLnBrk="1" latinLnBrk="0" hangingPunct="1">
+              <a:lnSpc>
+                <a:spcPct val="90000"/>
+              </a:lnSpc>
+              <a:spcBef>
+                <a:spcPts val="500"/>
+              </a:spcBef>
+              <a:buFont typeface="Arial" panose="020B0604020202020204" pitchFamily="34" charset="0"/>
+              <a:buChar char="•"/>
+              <a:defRPr sz="1800" kern="1200">
+                <a:solidFill>
+                  <a:schemeClr val="tx1">
+                    <a:lumMod val="75000"/>
+                    <a:lumOff val="25000"/>
+                  </a:schemeClr>
+                </a:solidFill>
+                <a:latin typeface="+mn-lt"/>
+                <a:ea typeface="+mn-ea"/>
+                <a:cs typeface="+mn-cs"/>
+              </a:defRPr>
+            </a:lvl5pPr>
+            <a:lvl6pPr marL="2514600" indent="-228600" algn="l" defTabSz="914400" rtl="0" eaLnBrk="1" latinLnBrk="0" hangingPunct="1">
+              <a:lnSpc>
+                <a:spcPct val="90000"/>
+              </a:lnSpc>
+              <a:spcBef>
+                <a:spcPts val="500"/>
+              </a:spcBef>
+              <a:buFont typeface="Arial" panose="020B0604020202020204" pitchFamily="34" charset="0"/>
+              <a:buChar char="•"/>
+              <a:defRPr sz="1800" kern="1200">
+                <a:solidFill>
+                  <a:schemeClr val="tx1"/>
+                </a:solidFill>
+                <a:latin typeface="+mn-lt"/>
+                <a:ea typeface="+mn-ea"/>
+                <a:cs typeface="+mn-cs"/>
+              </a:defRPr>
+            </a:lvl6pPr>
+            <a:lvl7pPr marL="2971800" indent="-228600" algn="l" defTabSz="914400" rtl="0" eaLnBrk="1" latinLnBrk="0" hangingPunct="1">
+              <a:lnSpc>
+                <a:spcPct val="90000"/>
+              </a:lnSpc>
+              <a:spcBef>
+                <a:spcPts val="500"/>
+              </a:spcBef>
+              <a:buFont typeface="Arial" panose="020B0604020202020204" pitchFamily="34" charset="0"/>
+              <a:buChar char="•"/>
+              <a:defRPr sz="1800" kern="1200">
+                <a:solidFill>
+                  <a:schemeClr val="tx1"/>
+                </a:solidFill>
+                <a:latin typeface="+mn-lt"/>
+                <a:ea typeface="+mn-ea"/>
+                <a:cs typeface="+mn-cs"/>
+              </a:defRPr>
+            </a:lvl7pPr>
+            <a:lvl8pPr marL="3429000" indent="-228600" algn="l" defTabSz="914400" rtl="0" eaLnBrk="1" latinLnBrk="0" hangingPunct="1">
+              <a:lnSpc>
+                <a:spcPct val="90000"/>
+              </a:lnSpc>
+              <a:spcBef>
+                <a:spcPts val="500"/>
+              </a:spcBef>
+              <a:buFont typeface="Arial" panose="020B0604020202020204" pitchFamily="34" charset="0"/>
+              <a:buChar char="•"/>
+              <a:defRPr sz="1800" kern="1200">
+                <a:solidFill>
+                  <a:schemeClr val="tx1"/>
+                </a:solidFill>
+                <a:latin typeface="+mn-lt"/>
+                <a:ea typeface="+mn-ea"/>
+                <a:cs typeface="+mn-cs"/>
+              </a:defRPr>
+            </a:lvl8pPr>
+            <a:lvl9pPr marL="3886200" indent="-228600" algn="l" defTabSz="914400" rtl="0" eaLnBrk="1" latinLnBrk="0" hangingPunct="1">
+              <a:lnSpc>
+                <a:spcPct val="90000"/>
+              </a:lnSpc>
+              <a:spcBef>
+                <a:spcPts val="500"/>
+              </a:spcBef>
+              <a:buFont typeface="Arial" panose="020B0604020202020204" pitchFamily="34" charset="0"/>
+              <a:buChar char="•"/>
+              <a:defRPr sz="1800" kern="1200">
+                <a:solidFill>
+                  <a:schemeClr val="tx1"/>
+                </a:solidFill>
+                <a:latin typeface="+mn-lt"/>
+                <a:ea typeface="+mn-ea"/>
+                <a:cs typeface="+mn-cs"/>
+              </a:defRPr>
+            </a:lvl9pPr>
+          </a:lstStyle>
+          <a:p>
+            <a:pPr algn="just"/>
+            <a:r>
+              <a:rPr lang="fr-HT" sz="1600" b="1" dirty="0">
                 <a:latin typeface="Arial" panose="020B0604020202020204" pitchFamily="34" charset="0"/>
                 <a:cs typeface="Arial" panose="020B0604020202020204" pitchFamily="34" charset="0"/>
               </a:rPr>
-              <a:t>SSH Secure Shell</a:t>
-            </a:r>
-            <a:br>
-              <a:rPr lang="fr-FR" sz="1700" dirty="0">
+              <a:t>SSH : </a:t>
+            </a:r>
+            <a:r>
+              <a:rPr lang="fr-HT" sz="1600" dirty="0">
                 <a:latin typeface="Arial" panose="020B0604020202020204" pitchFamily="34" charset="0"/>
                 <a:cs typeface="Arial" panose="020B0604020202020204" pitchFamily="34" charset="0"/>
               </a:rPr>
-            </a:br>
-            <a:r>
-              <a:rPr lang="fr-FR" sz="1700" dirty="0" err="1">
+              <a:t>Secure Shell</a:t>
+            </a:r>
+          </a:p>
+          <a:p>
+            <a:pPr algn="just"/>
+            <a:r>
+              <a:rPr lang="fr-HT" sz="1600" b="1" dirty="0" err="1">
                 <a:latin typeface="Arial" panose="020B0604020202020204" pitchFamily="34" charset="0"/>
                 <a:cs typeface="Arial" panose="020B0604020202020204" pitchFamily="34" charset="0"/>
               </a:rPr>
               <a:t>OpenSSH</a:t>
             </a:r>
             <a:r>
-              <a:rPr lang="fr-FR" sz="1700" dirty="0">
+              <a:rPr lang="fr-HT" sz="1600" b="1" dirty="0">
                 <a:latin typeface="Arial" panose="020B0604020202020204" pitchFamily="34" charset="0"/>
                 <a:cs typeface="Arial" panose="020B0604020202020204" pitchFamily="34" charset="0"/>
               </a:rPr>
-              <a:t> Open Secure Shell</a:t>
-            </a:r>
-            <a:br>
-              <a:rPr lang="fr-FR" sz="1700" dirty="0">
+              <a:t> : </a:t>
+            </a:r>
+            <a:r>
+              <a:rPr lang="fr-HT" sz="1600" dirty="0">
                 <a:latin typeface="Arial" panose="020B0604020202020204" pitchFamily="34" charset="0"/>
                 <a:cs typeface="Arial" panose="020B0604020202020204" pitchFamily="34" charset="0"/>
               </a:rPr>
-            </a:br>
-            <a:r>
-              <a:rPr lang="fr-FR" sz="1700" dirty="0" err="1">
+              <a:t>Open Secure Shell</a:t>
+            </a:r>
+          </a:p>
+          <a:p>
+            <a:pPr algn="just"/>
+            <a:r>
+              <a:rPr lang="fr-HT" sz="1600" b="1" dirty="0" err="1">
                 <a:latin typeface="Arial" panose="020B0604020202020204" pitchFamily="34" charset="0"/>
                 <a:cs typeface="Arial" panose="020B0604020202020204" pitchFamily="34" charset="0"/>
               </a:rPr>
-              <a:t>sshd</a:t>
-            </a:r>
-            <a:r>
-              <a:rPr lang="fr-FR" sz="1700" dirty="0">
+              <a:t>Sshd</a:t>
+            </a:r>
+            <a:r>
+              <a:rPr lang="fr-HT" sz="1600" b="1" dirty="0">
                 <a:latin typeface="Arial" panose="020B0604020202020204" pitchFamily="34" charset="0"/>
                 <a:cs typeface="Arial" panose="020B0604020202020204" pitchFamily="34" charset="0"/>
               </a:rPr>
-              <a:t> SSH Daemon (service SSH)</a:t>
-            </a:r>
-            <a:br>
-              <a:rPr lang="fr-FR" sz="1700" dirty="0">
+              <a:t> : </a:t>
+            </a:r>
+            <a:r>
+              <a:rPr lang="fr-HT" sz="1600" dirty="0">
                 <a:latin typeface="Arial" panose="020B0604020202020204" pitchFamily="34" charset="0"/>
                 <a:cs typeface="Arial" panose="020B0604020202020204" pitchFamily="34" charset="0"/>
               </a:rPr>
-            </a:br>
-            <a:r>
-              <a:rPr lang="fr-FR" sz="1700" dirty="0">
+              <a:t>SSH Daemon (service SSH)</a:t>
+            </a:r>
+          </a:p>
+          <a:p>
+            <a:pPr algn="just"/>
+            <a:r>
+              <a:rPr lang="fr-HT" sz="1600" b="1" dirty="0">
                 <a:latin typeface="Arial" panose="020B0604020202020204" pitchFamily="34" charset="0"/>
                 <a:cs typeface="Arial" panose="020B0604020202020204" pitchFamily="34" charset="0"/>
               </a:rPr>
-              <a:t>RSA Rivest-Shamir-Adleman (algorithme de chiffrement)</a:t>
-            </a:r>
-            <a:br>
-              <a:rPr lang="fr-FR" sz="1700" dirty="0">
+              <a:t>RSA : </a:t>
+            </a:r>
+            <a:r>
+              <a:rPr lang="fr-HT" sz="1600" dirty="0">
                 <a:latin typeface="Arial" panose="020B0604020202020204" pitchFamily="34" charset="0"/>
                 <a:cs typeface="Arial" panose="020B0604020202020204" pitchFamily="34" charset="0"/>
               </a:rPr>
-            </a:br>
-            <a:r>
-              <a:rPr lang="fr-FR" sz="1700" dirty="0">
+              <a:t>Rivest-Shamir-Adleman (algorithme de chiffrement)</a:t>
+            </a:r>
+          </a:p>
+          <a:p>
+            <a:pPr algn="just"/>
+            <a:r>
+              <a:rPr lang="fr-HT" sz="1600" b="1" dirty="0">
                 <a:latin typeface="Arial" panose="020B0604020202020204" pitchFamily="34" charset="0"/>
                 <a:cs typeface="Arial" panose="020B0604020202020204" pitchFamily="34" charset="0"/>
               </a:rPr>
-              <a:t>ED25519 Edwards-</a:t>
-            </a:r>
-            <a:r>
-              <a:rPr lang="fr-FR" sz="1700" dirty="0" err="1">
+              <a:t>ED25519 : </a:t>
+            </a:r>
+            <a:r>
+              <a:rPr lang="fr-HT" sz="1600" dirty="0">
+                <a:latin typeface="Arial" panose="020B0604020202020204" pitchFamily="34" charset="0"/>
+                <a:cs typeface="Arial" panose="020B0604020202020204" pitchFamily="34" charset="0"/>
+              </a:rPr>
+              <a:t>Edwards-</a:t>
+            </a:r>
+            <a:r>
+              <a:rPr lang="fr-HT" sz="1600" dirty="0" err="1">
                 <a:latin typeface="Arial" panose="020B0604020202020204" pitchFamily="34" charset="0"/>
                 <a:cs typeface="Arial" panose="020B0604020202020204" pitchFamily="34" charset="0"/>
               </a:rPr>
               <a:t>curve</a:t>
             </a:r>
             <a:r>
-              <a:rPr lang="fr-FR" sz="1700" dirty="0">
+              <a:rPr lang="fr-HT" sz="1600" dirty="0">
                 <a:latin typeface="Arial" panose="020B0604020202020204" pitchFamily="34" charset="0"/>
                 <a:cs typeface="Arial" panose="020B0604020202020204" pitchFamily="34" charset="0"/>
               </a:rPr>
               <a:t> Digital Signature </a:t>
             </a:r>
             <a:r>
-              <a:rPr lang="fr-FR" sz="1700" dirty="0" err="1">
+              <a:rPr lang="fr-HT" sz="1600" dirty="0" err="1">
                 <a:latin typeface="Arial" panose="020B0604020202020204" pitchFamily="34" charset="0"/>
                 <a:cs typeface="Arial" panose="020B0604020202020204" pitchFamily="34" charset="0"/>
               </a:rPr>
               <a:t>Algorithm</a:t>
             </a:r>
             <a:r>
-              <a:rPr lang="fr-FR" sz="1700" dirty="0">
+              <a:rPr lang="fr-HT" sz="1600" dirty="0">
                 <a:latin typeface="Arial" panose="020B0604020202020204" pitchFamily="34" charset="0"/>
                 <a:cs typeface="Arial" panose="020B0604020202020204" pitchFamily="34" charset="0"/>
               </a:rPr>
               <a:t> (25519 bits)</a:t>
             </a:r>
-            <a:br>
-              <a:rPr lang="fr-FR" sz="1700" dirty="0">
+          </a:p>
+          <a:p>
+            <a:pPr algn="just"/>
+            <a:r>
+              <a:rPr lang="fr-HT" sz="1600" b="1" dirty="0">
                 <a:latin typeface="Arial" panose="020B0604020202020204" pitchFamily="34" charset="0"/>
                 <a:cs typeface="Arial" panose="020B0604020202020204" pitchFamily="34" charset="0"/>
               </a:rPr>
-            </a:br>
-            <a:r>
-              <a:rPr lang="fr-FR" sz="1700" dirty="0">
+              <a:t>VirtualBox : </a:t>
+            </a:r>
+            <a:r>
+              <a:rPr lang="fr-HT" sz="1600" dirty="0">
                 <a:latin typeface="Arial" panose="020B0604020202020204" pitchFamily="34" charset="0"/>
                 <a:cs typeface="Arial" panose="020B0604020202020204" pitchFamily="34" charset="0"/>
               </a:rPr>
-              <a:t>VirtualBox Logiciel de virtualisation Oracle</a:t>
-            </a:r>
-            <a:br>
-              <a:rPr lang="fr-FR" sz="1700" dirty="0">
+              <a:t>Logiciel de virtualisation d'Oracle</a:t>
+            </a:r>
+          </a:p>
+          <a:p>
+            <a:pPr algn="just"/>
+            <a:r>
+              <a:rPr lang="fr-HT" sz="1600" b="1" dirty="0">
                 <a:latin typeface="Arial" panose="020B0604020202020204" pitchFamily="34" charset="0"/>
                 <a:cs typeface="Arial" panose="020B0604020202020204" pitchFamily="34" charset="0"/>
               </a:rPr>
-            </a:br>
-            <a:r>
-              <a:rPr lang="fr-FR" sz="1700" dirty="0">
+              <a:t>VM : </a:t>
+            </a:r>
+            <a:r>
+              <a:rPr lang="fr-HT" sz="1600" dirty="0">
                 <a:latin typeface="Arial" panose="020B0604020202020204" pitchFamily="34" charset="0"/>
                 <a:cs typeface="Arial" panose="020B0604020202020204" pitchFamily="34" charset="0"/>
               </a:rPr>
-              <a:t>VM Virtual Machine (Machine Virtuelle)</a:t>
-            </a:r>
-            <a:br>
-              <a:rPr lang="fr-FR" sz="1700" dirty="0">
+              <a:t>Virtual Machine (Machine Virtuelle)</a:t>
+            </a:r>
+          </a:p>
+          <a:p>
+            <a:pPr algn="just"/>
+            <a:r>
+              <a:rPr lang="fr-HT" sz="1600" b="1" dirty="0">
                 <a:latin typeface="Arial" panose="020B0604020202020204" pitchFamily="34" charset="0"/>
                 <a:cs typeface="Arial" panose="020B0604020202020204" pitchFamily="34" charset="0"/>
               </a:rPr>
-            </a:br>
-            <a:r>
-              <a:rPr lang="fr-FR" sz="1700" dirty="0">
+              <a:t>IP : </a:t>
+            </a:r>
+            <a:r>
+              <a:rPr lang="fr-HT" sz="1600" dirty="0">
                 <a:latin typeface="Arial" panose="020B0604020202020204" pitchFamily="34" charset="0"/>
                 <a:cs typeface="Arial" panose="020B0604020202020204" pitchFamily="34" charset="0"/>
               </a:rPr>
-              <a:t>IP Internet Protocol</a:t>
-            </a:r>
-            <a:br>
-              <a:rPr lang="fr-FR" sz="1700" dirty="0">
+              <a:t>Internet Protocol</a:t>
+            </a:r>
+          </a:p>
+          <a:p>
+            <a:pPr algn="just"/>
+            <a:r>
+              <a:rPr lang="fr-HT" sz="1600" b="1" dirty="0">
                 <a:latin typeface="Arial" panose="020B0604020202020204" pitchFamily="34" charset="0"/>
                 <a:cs typeface="Arial" panose="020B0604020202020204" pitchFamily="34" charset="0"/>
               </a:rPr>
-            </a:br>
-            <a:r>
-              <a:rPr lang="fr-FR" sz="1700" dirty="0">
+              <a:t>TCP : </a:t>
+            </a:r>
+            <a:r>
+              <a:rPr lang="fr-HT" sz="1600" dirty="0">
                 <a:latin typeface="Arial" panose="020B0604020202020204" pitchFamily="34" charset="0"/>
                 <a:cs typeface="Arial" panose="020B0604020202020204" pitchFamily="34" charset="0"/>
               </a:rPr>
-              <a:t>TCP Transmission Control Protocol</a:t>
-            </a:r>
-            <a:br>
-              <a:rPr lang="fr-FR" sz="1700" dirty="0">
+              <a:t>Transmission Control Protocol</a:t>
+            </a:r>
+          </a:p>
+          <a:p>
+            <a:pPr algn="just"/>
+            <a:r>
+              <a:rPr lang="fr-HT" sz="1600" b="1" dirty="0">
                 <a:latin typeface="Arial" panose="020B0604020202020204" pitchFamily="34" charset="0"/>
                 <a:cs typeface="Arial" panose="020B0604020202020204" pitchFamily="34" charset="0"/>
               </a:rPr>
-            </a:br>
-            <a:r>
-              <a:rPr lang="fr-FR" sz="1700" dirty="0">
+              <a:t>Fail2ban : </a:t>
+            </a:r>
+            <a:r>
+              <a:rPr lang="fr-HT" sz="1600" dirty="0">
                 <a:latin typeface="Arial" panose="020B0604020202020204" pitchFamily="34" charset="0"/>
                 <a:cs typeface="Arial" panose="020B0604020202020204" pitchFamily="34" charset="0"/>
               </a:rPr>
-              <a:t>Fail2ban Outil de prévention des intrusions par bannissement IP</a:t>
-            </a:r>
-            <a:br>
-              <a:rPr lang="fr-FR" sz="1700" dirty="0">
+              <a:t>Outil de prévention des intrusions par bannissement IP</a:t>
+            </a:r>
+          </a:p>
+          <a:p>
+            <a:pPr algn="just"/>
+            <a:r>
+              <a:rPr lang="fr-HT" sz="1600" b="1" dirty="0">
                 <a:latin typeface="Arial" panose="020B0604020202020204" pitchFamily="34" charset="0"/>
                 <a:cs typeface="Arial" panose="020B0604020202020204" pitchFamily="34" charset="0"/>
               </a:rPr>
-            </a:br>
-            <a:r>
-              <a:rPr lang="fr-FR" sz="1700" dirty="0">
-                <a:latin typeface="Arial" panose="020B0604020202020204" pitchFamily="34" charset="0"/>
-                <a:cs typeface="Arial" panose="020B0604020202020204" pitchFamily="34" charset="0"/>
-              </a:rPr>
-              <a:t>UFW </a:t>
-            </a:r>
-            <a:r>
-              <a:rPr lang="fr-FR" sz="1700" dirty="0" err="1">
+              <a:t>UFW : </a:t>
+            </a:r>
+            <a:r>
+              <a:rPr lang="fr-HT" sz="1600" dirty="0" err="1">
                 <a:latin typeface="Arial" panose="020B0604020202020204" pitchFamily="34" charset="0"/>
                 <a:cs typeface="Arial" panose="020B0604020202020204" pitchFamily="34" charset="0"/>
               </a:rPr>
               <a:t>Uncomplicated</a:t>
             </a:r>
             <a:r>
-              <a:rPr lang="fr-FR" sz="1700" dirty="0">
+              <a:rPr lang="fr-HT" sz="1600" dirty="0">
                 <a:latin typeface="Arial" panose="020B0604020202020204" pitchFamily="34" charset="0"/>
                 <a:cs typeface="Arial" panose="020B0604020202020204" pitchFamily="34" charset="0"/>
               </a:rPr>
               <a:t> Firewall</a:t>
             </a:r>
-            <a:br>
-              <a:rPr lang="fr-FR" sz="1700" dirty="0">
+          </a:p>
+          <a:p>
+            <a:pPr algn="just"/>
+            <a:r>
+              <a:rPr lang="fr-HT" sz="1600" b="1" dirty="0">
                 <a:latin typeface="Arial" panose="020B0604020202020204" pitchFamily="34" charset="0"/>
                 <a:cs typeface="Arial" panose="020B0604020202020204" pitchFamily="34" charset="0"/>
               </a:rPr>
-            </a:br>
-            <a:r>
-              <a:rPr lang="fr-FR" sz="1700" dirty="0">
+              <a:t>Git : </a:t>
+            </a:r>
+            <a:r>
+              <a:rPr lang="fr-HT" sz="1600" dirty="0">
                 <a:latin typeface="Arial" panose="020B0604020202020204" pitchFamily="34" charset="0"/>
                 <a:cs typeface="Arial" panose="020B0604020202020204" pitchFamily="34" charset="0"/>
               </a:rPr>
-              <a:t>Git Système de gestion de versions distribué</a:t>
-            </a:r>
-            <a:br>
-              <a:rPr lang="fr-FR" sz="1700" dirty="0">
+              <a:t>Système de gestion de versions distribué</a:t>
+            </a:r>
+          </a:p>
+          <a:p>
+            <a:pPr algn="just"/>
+            <a:r>
+              <a:rPr lang="fr-HT" sz="1600" b="1" dirty="0">
                 <a:latin typeface="Arial" panose="020B0604020202020204" pitchFamily="34" charset="0"/>
                 <a:cs typeface="Arial" panose="020B0604020202020204" pitchFamily="34" charset="0"/>
               </a:rPr>
-            </a:br>
-            <a:r>
-              <a:rPr lang="fr-FR" sz="1700" dirty="0">
+              <a:t>GitHub : </a:t>
+            </a:r>
+            <a:r>
+              <a:rPr lang="fr-HT" sz="1600" dirty="0">
                 <a:latin typeface="Arial" panose="020B0604020202020204" pitchFamily="34" charset="0"/>
                 <a:cs typeface="Arial" panose="020B0604020202020204" pitchFamily="34" charset="0"/>
               </a:rPr>
-              <a:t>GitHub Plateforme D’hébergement de dépôts Git</a:t>
-            </a:r>
-            <a:br>
-              <a:rPr lang="fr-FR" sz="1700" dirty="0">
+              <a:t>Plateforme d'hébergement de dépôts Git</a:t>
+            </a:r>
+          </a:p>
+          <a:p>
+            <a:pPr algn="just"/>
+            <a:r>
+              <a:rPr lang="fr-HT" sz="1600" b="1" dirty="0">
                 <a:latin typeface="Arial" panose="020B0604020202020204" pitchFamily="34" charset="0"/>
                 <a:cs typeface="Arial" panose="020B0604020202020204" pitchFamily="34" charset="0"/>
               </a:rPr>
-            </a:br>
-            <a:r>
-              <a:rPr lang="fr-FR" sz="1700" dirty="0">
+              <a:t>PR : </a:t>
+            </a:r>
+            <a:r>
+              <a:rPr lang="fr-HT" sz="1600" dirty="0">
                 <a:latin typeface="Arial" panose="020B0604020202020204" pitchFamily="34" charset="0"/>
                 <a:cs typeface="Arial" panose="020B0604020202020204" pitchFamily="34" charset="0"/>
               </a:rPr>
-              <a:t>CLI Command Line Interface (Interface en Ligne de Commande)</a:t>
-            </a:r>
-            <a:br>
-              <a:rPr lang="fr-FR" sz="1700" dirty="0">
+              <a:t>Pull </a:t>
+            </a:r>
+            <a:r>
+              <a:rPr lang="fr-HT" sz="1600" dirty="0" err="1">
                 <a:latin typeface="Arial" panose="020B0604020202020204" pitchFamily="34" charset="0"/>
                 <a:cs typeface="Arial" panose="020B0604020202020204" pitchFamily="34" charset="0"/>
               </a:rPr>
-            </a:br>
-            <a:r>
-              <a:rPr lang="fr-FR" sz="1700" dirty="0">
+              <a:t>Request</a:t>
+            </a:r>
+            <a:endParaRPr lang="fr-HT" sz="1600" dirty="0">
+              <a:latin typeface="Arial" panose="020B0604020202020204" pitchFamily="34" charset="0"/>
+              <a:cs typeface="Arial" panose="020B0604020202020204" pitchFamily="34" charset="0"/>
+            </a:endParaRPr>
+          </a:p>
+          <a:p>
+            <a:pPr algn="just"/>
+            <a:r>
+              <a:rPr lang="fr-HT" sz="1600" b="1" dirty="0">
                 <a:latin typeface="Arial" panose="020B0604020202020204" pitchFamily="34" charset="0"/>
                 <a:cs typeface="Arial" panose="020B0604020202020204" pitchFamily="34" charset="0"/>
               </a:rPr>
-              <a:t>OS Operating System (Système d&amp;#39;Exploitation)</a:t>
-            </a:r>
+              <a:t>CLI : </a:t>
+            </a:r>
+            <a:r>
+              <a:rPr lang="fr-HT" sz="1600" dirty="0">
+                <a:latin typeface="Arial" panose="020B0604020202020204" pitchFamily="34" charset="0"/>
+                <a:cs typeface="Arial" panose="020B0604020202020204" pitchFamily="34" charset="0"/>
+              </a:rPr>
+              <a:t>Command Line Interface (Interface en Ligne de Commande)</a:t>
+            </a:r>
+          </a:p>
+          <a:p>
+            <a:pPr algn="just"/>
+            <a:r>
+              <a:rPr lang="fr-HT" sz="1600" b="1" dirty="0">
+                <a:latin typeface="Arial" panose="020B0604020202020204" pitchFamily="34" charset="0"/>
+                <a:cs typeface="Arial" panose="020B0604020202020204" pitchFamily="34" charset="0"/>
+              </a:rPr>
+              <a:t>OS : </a:t>
+            </a:r>
+            <a:r>
+              <a:rPr lang="fr-HT" sz="1600" dirty="0">
+                <a:latin typeface="Arial" panose="020B0604020202020204" pitchFamily="34" charset="0"/>
+                <a:cs typeface="Arial" panose="020B0604020202020204" pitchFamily="34" charset="0"/>
+              </a:rPr>
+              <a:t>Operating System (Système d'Exploitation)</a:t>
+            </a:r>
+            <a:endParaRPr lang="en-US" sz="1600" dirty="0">
+              <a:latin typeface="Arial" panose="020B0604020202020204" pitchFamily="34" charset="0"/>
+              <a:cs typeface="Arial" panose="020B0604020202020204" pitchFamily="34" charset="0"/>
+            </a:endParaRPr>
           </a:p>
         </p:txBody>
       </p:sp>
@@ -19672,6 +22078,235 @@
     <p:extLst>
       <p:ext uri="{BB962C8B-B14F-4D97-AF65-F5344CB8AC3E}">
         <p14:creationId xmlns:p14="http://schemas.microsoft.com/office/powerpoint/2010/main" val="1411565937"/>
+      </p:ext>
+    </p:extLst>
+  </p:cSld>
+  <p:clrMapOvr>
+    <a:masterClrMapping/>
+  </p:clrMapOvr>
+</p:sld>
+</file>
+
+<file path=ppt/slides/slide20.xml><?xml version="1.0" encoding="utf-8"?>
+<p:sld xmlns:a="http://schemas.openxmlformats.org/drawingml/2006/main" xmlns:r="http://schemas.openxmlformats.org/officeDocument/2006/relationships" xmlns:p="http://schemas.openxmlformats.org/presentationml/2006/main">
+  <p:cSld>
+    <p:spTree>
+      <p:nvGrpSpPr>
+        <p:cNvPr id="1" name=""/>
+        <p:cNvGrpSpPr/>
+        <p:nvPr/>
+      </p:nvGrpSpPr>
+      <p:grpSpPr>
+        <a:xfrm>
+          <a:off x="0" y="0"/>
+          <a:ext cx="0" cy="0"/>
+          <a:chOff x="0" y="0"/>
+          <a:chExt cx="0" cy="0"/>
+        </a:xfrm>
+      </p:grpSpPr>
+      <p:sp>
+        <p:nvSpPr>
+          <p:cNvPr id="2" name="Title 1">
+            <a:extLst>
+              <a:ext uri="{FF2B5EF4-FFF2-40B4-BE49-F238E27FC236}">
+                <a16:creationId xmlns:a16="http://schemas.microsoft.com/office/drawing/2014/main" id="{BCCAEE93-8585-46D4-A7EC-F184E317CB2E}"/>
+              </a:ext>
+            </a:extLst>
+          </p:cNvPr>
+          <p:cNvSpPr>
+            <a:spLocks noGrp="1"/>
+          </p:cNvSpPr>
+          <p:nvPr>
+            <p:ph type="ctrTitle"/>
+          </p:nvPr>
+        </p:nvSpPr>
+        <p:spPr>
+          <a:xfrm>
+            <a:off x="4267200" y="1615736"/>
+            <a:ext cx="4179570" cy="1524735"/>
+          </a:xfrm>
+        </p:spPr>
+        <p:txBody>
+          <a:bodyPr/>
+          <a:lstStyle/>
+          <a:p>
+            <a:r>
+              <a:rPr lang="en-US" dirty="0"/>
+              <a:t>THANK YOU</a:t>
+            </a:r>
+          </a:p>
+        </p:txBody>
+      </p:sp>
+      <p:sp>
+        <p:nvSpPr>
+          <p:cNvPr id="3" name="Content Placeholder 2">
+            <a:extLst>
+              <a:ext uri="{FF2B5EF4-FFF2-40B4-BE49-F238E27FC236}">
+                <a16:creationId xmlns:a16="http://schemas.microsoft.com/office/drawing/2014/main" id="{24AFFC60-19C3-4901-93F7-7AAF4C09F8C6}"/>
+              </a:ext>
+            </a:extLst>
+          </p:cNvPr>
+          <p:cNvSpPr>
+            <a:spLocks noGrp="1"/>
+          </p:cNvSpPr>
+          <p:nvPr>
+            <p:ph type="subTitle" idx="1"/>
+          </p:nvPr>
+        </p:nvSpPr>
+        <p:spPr>
+          <a:xfrm>
+            <a:off x="4267200" y="3238103"/>
+            <a:ext cx="4179570" cy="2004161"/>
+          </a:xfrm>
+        </p:spPr>
+        <p:txBody>
+          <a:bodyPr>
+            <a:normAutofit/>
+          </a:bodyPr>
+          <a:lstStyle/>
+          <a:p>
+            <a:r>
+              <a:rPr lang="en-US" dirty="0">
+                <a:latin typeface="Arial" panose="020B0604020202020204" pitchFamily="34" charset="0"/>
+                <a:cs typeface="Arial" panose="020B0604020202020204" pitchFamily="34" charset="0"/>
+              </a:rPr>
+              <a:t>Mirjam Nilsson​</a:t>
+            </a:r>
+          </a:p>
+          <a:p>
+            <a:r>
+              <a:rPr lang="en-US" dirty="0">
+                <a:latin typeface="Arial" panose="020B0604020202020204" pitchFamily="34" charset="0"/>
+                <a:cs typeface="Arial" panose="020B0604020202020204" pitchFamily="34" charset="0"/>
+              </a:rPr>
+              <a:t>206-555-0146</a:t>
+            </a:r>
+          </a:p>
+          <a:p>
+            <a:r>
+              <a:rPr lang="en-US" dirty="0">
+                <a:latin typeface="Arial" panose="020B0604020202020204" pitchFamily="34" charset="0"/>
+                <a:cs typeface="Arial" panose="020B0604020202020204" pitchFamily="34" charset="0"/>
+              </a:rPr>
+              <a:t>mirjam@contoso.com</a:t>
+            </a:r>
+          </a:p>
+          <a:p>
+            <a:r>
+              <a:rPr lang="en-US" dirty="0">
+                <a:latin typeface="Arial" panose="020B0604020202020204" pitchFamily="34" charset="0"/>
+                <a:cs typeface="Arial" panose="020B0604020202020204" pitchFamily="34" charset="0"/>
+              </a:rPr>
+              <a:t>www.contoso.com</a:t>
+            </a:r>
+          </a:p>
+        </p:txBody>
+      </p:sp>
+      <p:sp>
+        <p:nvSpPr>
+          <p:cNvPr id="4" name="Date Placeholder 3">
+            <a:extLst>
+              <a:ext uri="{FF2B5EF4-FFF2-40B4-BE49-F238E27FC236}">
+                <a16:creationId xmlns:a16="http://schemas.microsoft.com/office/drawing/2014/main" id="{72DA7980-C870-4C9A-84FA-4120D8AF5DE8}"/>
+              </a:ext>
+            </a:extLst>
+          </p:cNvPr>
+          <p:cNvSpPr>
+            <a:spLocks noGrp="1"/>
+          </p:cNvSpPr>
+          <p:nvPr>
+            <p:ph type="dt" sz="half" idx="10"/>
+          </p:nvPr>
+        </p:nvSpPr>
+        <p:spPr>
+          <a:xfrm>
+            <a:off x="4267200" y="6356350"/>
+            <a:ext cx="1774371" cy="365125"/>
+          </a:xfrm>
+        </p:spPr>
+        <p:txBody>
+          <a:bodyPr/>
+          <a:lstStyle/>
+          <a:p>
+            <a:r>
+              <a:rPr lang="en-US" dirty="0"/>
+              <a:t>20XX</a:t>
+            </a:r>
+          </a:p>
+        </p:txBody>
+      </p:sp>
+      <p:sp>
+        <p:nvSpPr>
+          <p:cNvPr id="5" name="Footer Placeholder 4">
+            <a:extLst>
+              <a:ext uri="{FF2B5EF4-FFF2-40B4-BE49-F238E27FC236}">
+                <a16:creationId xmlns:a16="http://schemas.microsoft.com/office/drawing/2014/main" id="{0DFADE42-1A3F-40C8-A071-E57644F3D843}"/>
+              </a:ext>
+            </a:extLst>
+          </p:cNvPr>
+          <p:cNvSpPr>
+            <a:spLocks noGrp="1"/>
+          </p:cNvSpPr>
+          <p:nvPr>
+            <p:ph type="ftr" sz="quarter" idx="11"/>
+          </p:nvPr>
+        </p:nvSpPr>
+        <p:spPr>
+          <a:xfrm>
+            <a:off x="6479721" y="6356350"/>
+            <a:ext cx="2661557" cy="365125"/>
+          </a:xfrm>
+        </p:spPr>
+        <p:txBody>
+          <a:bodyPr/>
+          <a:lstStyle/>
+          <a:p>
+            <a:r>
+              <a:rPr lang="en-US" dirty="0"/>
+              <a:t>Pitch Deck</a:t>
+            </a:r>
+          </a:p>
+        </p:txBody>
+      </p:sp>
+      <p:sp>
+        <p:nvSpPr>
+          <p:cNvPr id="6" name="Slide Number Placeholder 5">
+            <a:extLst>
+              <a:ext uri="{FF2B5EF4-FFF2-40B4-BE49-F238E27FC236}">
+                <a16:creationId xmlns:a16="http://schemas.microsoft.com/office/drawing/2014/main" id="{5EDCFF82-B70F-4971-9182-7C3AEA3CFD26}"/>
+              </a:ext>
+            </a:extLst>
+          </p:cNvPr>
+          <p:cNvSpPr>
+            <a:spLocks noGrp="1"/>
+          </p:cNvSpPr>
+          <p:nvPr>
+            <p:ph type="sldNum" sz="quarter" idx="12"/>
+          </p:nvPr>
+        </p:nvSpPr>
+        <p:spPr>
+          <a:xfrm>
+            <a:off x="9579428" y="6356350"/>
+            <a:ext cx="1774371" cy="365125"/>
+          </a:xfrm>
+        </p:spPr>
+        <p:txBody>
+          <a:bodyPr/>
+          <a:lstStyle/>
+          <a:p>
+            <a:fld id="{B5CEABB6-07DC-46E8-9B57-56EC44A396E5}" type="slidenum">
+              <a:rPr lang="en-US" smtClean="0"/>
+              <a:pPr/>
+              <a:t>20</a:t>
+            </a:fld>
+            <a:endParaRPr lang="en-US" dirty="0"/>
+          </a:p>
+        </p:txBody>
+      </p:sp>
+    </p:spTree>
+    <p:extLst>
+      <p:ext uri="{BB962C8B-B14F-4D97-AF65-F5344CB8AC3E}">
+        <p14:creationId xmlns:p14="http://schemas.microsoft.com/office/powerpoint/2010/main" val="2436493926"/>
       </p:ext>
     </p:extLst>
   </p:cSld>
@@ -20598,7 +23233,13 @@
   <p:cSld>
     <p:spTree>
       <p:nvGrpSpPr>
-        <p:cNvPr id="1" name=""/>
+        <p:cNvPr id="1" name="">
+          <a:extLst>
+            <a:ext uri="{FF2B5EF4-FFF2-40B4-BE49-F238E27FC236}">
+              <a16:creationId xmlns:a16="http://schemas.microsoft.com/office/drawing/2014/main" id="{F483143A-185B-21C6-2E9B-648FA606A5E7}"/>
+            </a:ext>
+          </a:extLst>
+        </p:cNvPr>
         <p:cNvGrpSpPr/>
         <p:nvPr/>
       </p:nvGrpSpPr>
@@ -20612,43 +23253,167 @@
       </p:grpSpPr>
       <p:sp>
         <p:nvSpPr>
-          <p:cNvPr id="2" name="Title 1">
-            <a:extLst>
-              <a:ext uri="{FF2B5EF4-FFF2-40B4-BE49-F238E27FC236}">
-                <a16:creationId xmlns:a16="http://schemas.microsoft.com/office/drawing/2014/main" id="{537E1C88-627C-4655-A4FB-0BB02EDB078A}"/>
-              </a:ext>
-            </a:extLst>
-          </p:cNvPr>
-          <p:cNvSpPr>
-            <a:spLocks noGrp="1"/>
-          </p:cNvSpPr>
-          <p:nvPr>
-            <p:ph type="title"/>
-          </p:nvPr>
-        </p:nvSpPr>
-        <p:spPr>
-          <a:xfrm>
-            <a:off x="401455" y="136525"/>
-            <a:ext cx="9580745" cy="597993"/>
-          </a:xfrm>
-        </p:spPr>
-        <p:txBody>
-          <a:bodyPr>
-            <a:normAutofit/>
+          <p:cNvPr id="31" name="ZoneTexte 30">
+            <a:extLst>
+              <a:ext uri="{FF2B5EF4-FFF2-40B4-BE49-F238E27FC236}">
+                <a16:creationId xmlns:a16="http://schemas.microsoft.com/office/drawing/2014/main" id="{C905988B-A96F-CB8B-3A5D-5EA9009A99B9}"/>
+              </a:ext>
+            </a:extLst>
+          </p:cNvPr>
+          <p:cNvSpPr txBox="1"/>
+          <p:nvPr/>
+        </p:nvSpPr>
+        <p:spPr>
+          <a:xfrm>
+            <a:off x="1821558" y="1192041"/>
+            <a:ext cx="8887145" cy="3177793"/>
+          </a:xfrm>
+          <a:prstGeom prst="rect">
+            <a:avLst/>
+          </a:prstGeom>
+          <a:noFill/>
+        </p:spPr>
+        <p:txBody>
+          <a:bodyPr wrap="square">
+            <a:spAutoFit/>
           </a:bodyPr>
           <a:lstStyle/>
           <a:p>
             <a:r>
-              <a:rPr lang="fr-FR" sz="2200" b="1" dirty="0">
+              <a:rPr lang="fr-HT" sz="2000" b="1" dirty="0">
+                <a:solidFill>
+                  <a:srgbClr val="0070C0"/>
+                </a:solidFill>
+              </a:rPr>
+              <a:t>Mise en place de l'environnement</a:t>
+            </a:r>
+            <a:endParaRPr lang="en-US" sz="2000" b="1" dirty="0">
+              <a:solidFill>
+                <a:srgbClr val="0070C0"/>
+              </a:solidFill>
+            </a:endParaRPr>
+          </a:p>
+          <a:p>
+            <a:r>
+              <a:rPr lang="fr-FR" dirty="0"/>
+              <a:t>Chaque membre du groupe a installé VirtualBox sur sa machine personnelle et créé une machine virtuelle :</a:t>
+            </a:r>
+            <a:endParaRPr lang="en-US" dirty="0"/>
+          </a:p>
+          <a:p>
+            <a:pPr marL="285750" lvl="0" indent="-285750">
+              <a:buFont typeface="Wingdings" panose="05000000000000000000" pitchFamily="2" charset="2"/>
+              <a:buChar char="Ø"/>
+            </a:pPr>
+            <a:r>
+              <a:rPr lang="fr-FR" dirty="0"/>
+              <a:t>Une VM Serveur sous Ubuntu Server 22.04 LTS, qui joue le rôle du serveur SSH à durcir.</a:t>
+            </a:r>
+            <a:endParaRPr lang="en-US" dirty="0"/>
+          </a:p>
+          <a:p>
+            <a:pPr marL="285750" lvl="0" indent="-285750">
+              <a:buFont typeface="Wingdings" panose="05000000000000000000" pitchFamily="2" charset="2"/>
+              <a:buChar char="Ø"/>
+            </a:pPr>
+            <a:r>
+              <a:rPr lang="fr-FR" dirty="0"/>
+              <a:t>Les tests de connexion SSH ont été effectués directement depuis la machine personnelle de chaque membre, sans VM cliente supplémentaire.</a:t>
+            </a:r>
+            <a:endParaRPr lang="en-US" dirty="0"/>
+          </a:p>
+          <a:p>
+            <a:r>
+              <a:rPr lang="fr-FR" dirty="0"/>
+              <a:t>La machine personnelle de chaque membre communique avec la VM Serveur via le réseau Host-Only de VirtualBox, ce qui permet de simuler un environnement isolé et sécurisé.</a:t>
+            </a:r>
+            <a:endParaRPr lang="en-US" dirty="0"/>
+          </a:p>
+          <a:p>
+            <a:pPr marL="0" marR="0">
+              <a:spcBef>
+                <a:spcPts val="300"/>
+              </a:spcBef>
+              <a:spcAft>
+                <a:spcPts val="300"/>
+              </a:spcAft>
+              <a:buNone/>
+            </a:pPr>
+            <a:endParaRPr lang="en-US" sz="1800" dirty="0">
+              <a:effectLst/>
+              <a:latin typeface="Arial" panose="020B0604020202020204" pitchFamily="34" charset="0"/>
+              <a:ea typeface="Arial" panose="020B0604020202020204" pitchFamily="34" charset="0"/>
+              <a:cs typeface="Arial" panose="020B0604020202020204" pitchFamily="34" charset="0"/>
+            </a:endParaRPr>
+          </a:p>
+        </p:txBody>
+      </p:sp>
+      <p:sp>
+        <p:nvSpPr>
+          <p:cNvPr id="32" name="Title 1">
+            <a:extLst>
+              <a:ext uri="{FF2B5EF4-FFF2-40B4-BE49-F238E27FC236}">
+                <a16:creationId xmlns:a16="http://schemas.microsoft.com/office/drawing/2014/main" id="{1DE7F31F-5084-1315-5F26-DB42368D584D}"/>
+              </a:ext>
+              <a:ext uri="{C183D7F6-B498-43B3-948B-1728B52AA6E4}">
+                <adec:decorative xmlns:adec="http://schemas.microsoft.com/office/drawing/2017/decorative" val="0"/>
+              </a:ext>
+            </a:extLst>
+          </p:cNvPr>
+          <p:cNvSpPr>
+            <a:spLocks noGrp="1"/>
+          </p:cNvSpPr>
+          <p:nvPr>
+            <p:ph type="title"/>
+          </p:nvPr>
+        </p:nvSpPr>
+        <p:spPr>
+          <a:xfrm>
+            <a:off x="3325650" y="339047"/>
+            <a:ext cx="5878960" cy="1027415"/>
+          </a:xfrm>
+        </p:spPr>
+        <p:txBody>
+          <a:bodyPr>
+            <a:noAutofit/>
+          </a:bodyPr>
+          <a:lstStyle/>
+          <a:p>
+            <a:pPr algn="ctr"/>
+            <a:br>
+              <a:rPr lang="en-US" b="1" kern="0" dirty="0">
                 <a:solidFill>
                   <a:srgbClr val="0070C0"/>
                 </a:solidFill>
                 <a:latin typeface="Arial" panose="020B0604020202020204" pitchFamily="34" charset="0"/>
                 <a:cs typeface="Arial" panose="020B0604020202020204" pitchFamily="34" charset="0"/>
               </a:rPr>
-              <a:t>1. Authentification par clé cryptographique</a:t>
-            </a:r>
-            <a:endParaRPr lang="en-US" sz="2200" b="1" dirty="0">
+            </a:br>
+            <a:br>
+              <a:rPr lang="en-US" b="1" kern="0" dirty="0">
+                <a:solidFill>
+                  <a:srgbClr val="0070C0"/>
+                </a:solidFill>
+                <a:latin typeface="Arial" panose="020B0604020202020204" pitchFamily="34" charset="0"/>
+                <a:cs typeface="Arial" panose="020B0604020202020204" pitchFamily="34" charset="0"/>
+              </a:rPr>
+            </a:br>
+            <a:r>
+              <a:rPr lang="fr-HT" b="1" dirty="0">
+                <a:solidFill>
+                  <a:srgbClr val="0070C0"/>
+                </a:solidFill>
+              </a:rPr>
+              <a:t>Méthodologie</a:t>
+            </a:r>
+            <a:br>
+              <a:rPr lang="en-US" b="1" dirty="0">
+                <a:solidFill>
+                  <a:srgbClr val="0070C0"/>
+                </a:solidFill>
+              </a:rPr>
+            </a:br>
+            <a:endParaRPr lang="en-US" dirty="0">
               <a:solidFill>
                 <a:srgbClr val="0070C0"/>
               </a:solidFill>
@@ -20658,392 +23423,10 @@
           </a:p>
         </p:txBody>
       </p:sp>
-      <p:sp>
-        <p:nvSpPr>
-          <p:cNvPr id="3" name="Content Placeholder 2">
-            <a:extLst>
-              <a:ext uri="{FF2B5EF4-FFF2-40B4-BE49-F238E27FC236}">
-                <a16:creationId xmlns:a16="http://schemas.microsoft.com/office/drawing/2014/main" id="{033634FE-ADF0-4BC3-A0A9-447EA9DD096B}"/>
-              </a:ext>
-            </a:extLst>
-          </p:cNvPr>
-          <p:cNvSpPr>
-            <a:spLocks noGrp="1"/>
-          </p:cNvSpPr>
-          <p:nvPr>
-            <p:ph type="body" idx="1"/>
-          </p:nvPr>
-        </p:nvSpPr>
-        <p:spPr>
-          <a:xfrm>
-            <a:off x="401455" y="962545"/>
-            <a:ext cx="11365824" cy="597993"/>
-          </a:xfrm>
-        </p:spPr>
-        <p:txBody>
-          <a:bodyPr vert="horz" lIns="91440" tIns="45720" rIns="91440" bIns="45720" rtlCol="0" anchor="t">
-            <a:noAutofit/>
-          </a:bodyPr>
-          <a:lstStyle/>
-          <a:p>
-            <a:r>
-              <a:rPr lang="fr-FR" sz="1800" b="1" noProof="1">
-                <a:latin typeface="Arial" panose="020B0604020202020204" pitchFamily="34" charset="0"/>
-                <a:cs typeface="Arial" panose="020B0604020202020204" pitchFamily="34" charset="0"/>
-              </a:rPr>
-              <a:t>L’authentification par clé publique/privée est la méthode la plus sécurisée pour se connecter à un serveur SSH. Elle remplace l’authentification par mot de passe, vulnérable aux attaques par force brute.</a:t>
-            </a:r>
-          </a:p>
-          <a:p>
-            <a:endParaRPr lang="en-US" sz="1800" b="1" noProof="1">
-              <a:latin typeface="Arial" panose="020B0604020202020204" pitchFamily="34" charset="0"/>
-              <a:cs typeface="Arial" panose="020B0604020202020204" pitchFamily="34" charset="0"/>
-            </a:endParaRPr>
-          </a:p>
-        </p:txBody>
-      </p:sp>
-      <p:sp>
-        <p:nvSpPr>
-          <p:cNvPr id="4" name="Date Placeholder 3">
-            <a:extLst>
-              <a:ext uri="{FF2B5EF4-FFF2-40B4-BE49-F238E27FC236}">
-                <a16:creationId xmlns:a16="http://schemas.microsoft.com/office/drawing/2014/main" id="{5C2ACA2A-6BBE-47CF-B76F-F56C9DBF77E6}"/>
-              </a:ext>
-            </a:extLst>
-          </p:cNvPr>
-          <p:cNvSpPr>
-            <a:spLocks noGrp="1"/>
-          </p:cNvSpPr>
-          <p:nvPr>
-            <p:ph type="dt" sz="half" idx="10"/>
-          </p:nvPr>
-        </p:nvSpPr>
-        <p:spPr>
-          <a:xfrm>
-            <a:off x="401455" y="5174906"/>
-            <a:ext cx="7633273" cy="1546570"/>
-          </a:xfrm>
-        </p:spPr>
-        <p:txBody>
-          <a:bodyPr/>
-          <a:lstStyle/>
-          <a:p>
-            <a:pPr marL="285750" indent="-285750">
-              <a:lnSpc>
-                <a:spcPct val="150000"/>
-              </a:lnSpc>
-              <a:buFont typeface="Arial" panose="020B0604020202020204" pitchFamily="34" charset="0"/>
-              <a:buChar char="•"/>
-            </a:pPr>
-            <a:r>
-              <a:rPr lang="en-US" sz="1700" dirty="0" err="1">
-                <a:solidFill>
-                  <a:schemeClr val="tx1"/>
-                </a:solidFill>
-                <a:latin typeface="Arial" panose="020B0604020202020204" pitchFamily="34" charset="0"/>
-                <a:cs typeface="Arial" panose="020B0604020202020204" pitchFamily="34" charset="0"/>
-              </a:rPr>
-              <a:t>Génération</a:t>
-            </a:r>
-            <a:r>
-              <a:rPr lang="en-US" sz="1700" dirty="0">
-                <a:solidFill>
-                  <a:schemeClr val="tx1"/>
-                </a:solidFill>
-                <a:latin typeface="Arial" panose="020B0604020202020204" pitchFamily="34" charset="0"/>
-                <a:cs typeface="Arial" panose="020B0604020202020204" pitchFamily="34" charset="0"/>
-              </a:rPr>
-              <a:t> </a:t>
-            </a:r>
-            <a:r>
-              <a:rPr lang="en-US" sz="1700" dirty="0" err="1">
-                <a:solidFill>
-                  <a:schemeClr val="tx1"/>
-                </a:solidFill>
-                <a:latin typeface="Arial" panose="020B0604020202020204" pitchFamily="34" charset="0"/>
-                <a:cs typeface="Arial" panose="020B0604020202020204" pitchFamily="34" charset="0"/>
-              </a:rPr>
-              <a:t>d’une</a:t>
-            </a:r>
-            <a:r>
-              <a:rPr lang="en-US" sz="1700" dirty="0">
-                <a:solidFill>
-                  <a:schemeClr val="tx1"/>
-                </a:solidFill>
-                <a:latin typeface="Arial" panose="020B0604020202020204" pitchFamily="34" charset="0"/>
-                <a:cs typeface="Arial" panose="020B0604020202020204" pitchFamily="34" charset="0"/>
-              </a:rPr>
-              <a:t> </a:t>
-            </a:r>
-            <a:r>
-              <a:rPr lang="en-US" sz="1700" dirty="0" err="1">
-                <a:solidFill>
-                  <a:schemeClr val="tx1"/>
-                </a:solidFill>
-                <a:latin typeface="Arial" panose="020B0604020202020204" pitchFamily="34" charset="0"/>
-                <a:cs typeface="Arial" panose="020B0604020202020204" pitchFamily="34" charset="0"/>
-              </a:rPr>
-              <a:t>paire</a:t>
-            </a:r>
-            <a:r>
-              <a:rPr lang="en-US" sz="1700" dirty="0">
-                <a:solidFill>
-                  <a:schemeClr val="tx1"/>
-                </a:solidFill>
-                <a:latin typeface="Arial" panose="020B0604020202020204" pitchFamily="34" charset="0"/>
-                <a:cs typeface="Arial" panose="020B0604020202020204" pitchFamily="34" charset="0"/>
-              </a:rPr>
-              <a:t> de </a:t>
-            </a:r>
-            <a:r>
-              <a:rPr lang="en-US" sz="1700" dirty="0" err="1">
-                <a:solidFill>
-                  <a:schemeClr val="tx1"/>
-                </a:solidFill>
-                <a:latin typeface="Arial" panose="020B0604020202020204" pitchFamily="34" charset="0"/>
-                <a:cs typeface="Arial" panose="020B0604020202020204" pitchFamily="34" charset="0"/>
-              </a:rPr>
-              <a:t>clé</a:t>
-            </a:r>
-            <a:r>
-              <a:rPr lang="en-US" sz="1700" dirty="0">
-                <a:solidFill>
-                  <a:schemeClr val="tx1"/>
-                </a:solidFill>
-                <a:latin typeface="Arial" panose="020B0604020202020204" pitchFamily="34" charset="0"/>
-                <a:cs typeface="Arial" panose="020B0604020202020204" pitchFamily="34" charset="0"/>
-              </a:rPr>
-              <a:t> (</a:t>
-            </a:r>
-            <a:r>
-              <a:rPr lang="en-US" sz="1700" dirty="0" err="1">
-                <a:solidFill>
-                  <a:schemeClr val="tx1"/>
-                </a:solidFill>
-                <a:latin typeface="Arial" panose="020B0604020202020204" pitchFamily="34" charset="0"/>
-                <a:cs typeface="Arial" panose="020B0604020202020204" pitchFamily="34" charset="0"/>
-              </a:rPr>
-              <a:t>publique</a:t>
-            </a:r>
-            <a:r>
-              <a:rPr lang="en-US" sz="1700" dirty="0">
-                <a:solidFill>
-                  <a:schemeClr val="tx1"/>
-                </a:solidFill>
-                <a:latin typeface="Arial" panose="020B0604020202020204" pitchFamily="34" charset="0"/>
-                <a:cs typeface="Arial" panose="020B0604020202020204" pitchFamily="34" charset="0"/>
-              </a:rPr>
-              <a:t> et </a:t>
-            </a:r>
-            <a:r>
-              <a:rPr lang="en-US" sz="1700" dirty="0" err="1">
-                <a:solidFill>
-                  <a:schemeClr val="tx1"/>
-                </a:solidFill>
-                <a:latin typeface="Arial" panose="020B0604020202020204" pitchFamily="34" charset="0"/>
-                <a:cs typeface="Arial" panose="020B0604020202020204" pitchFamily="34" charset="0"/>
-              </a:rPr>
-              <a:t>privé</a:t>
-            </a:r>
-            <a:r>
-              <a:rPr lang="en-US" sz="1700" dirty="0">
-                <a:solidFill>
-                  <a:schemeClr val="tx1"/>
-                </a:solidFill>
-                <a:latin typeface="Arial" panose="020B0604020202020204" pitchFamily="34" charset="0"/>
-                <a:cs typeface="Arial" panose="020B0604020202020204" pitchFamily="34" charset="0"/>
-              </a:rPr>
-              <a:t>)</a:t>
-            </a:r>
-          </a:p>
-          <a:p>
-            <a:pPr marL="285750" indent="-285750">
-              <a:lnSpc>
-                <a:spcPct val="150000"/>
-              </a:lnSpc>
-              <a:buFont typeface="Arial" panose="020B0604020202020204" pitchFamily="34" charset="0"/>
-              <a:buChar char="•"/>
-            </a:pPr>
-            <a:r>
-              <a:rPr lang="en-US" sz="1700" dirty="0">
-                <a:solidFill>
-                  <a:schemeClr val="tx1"/>
-                </a:solidFill>
-                <a:latin typeface="Arial" panose="020B0604020202020204" pitchFamily="34" charset="0"/>
-                <a:cs typeface="Arial" panose="020B0604020202020204" pitchFamily="34" charset="0"/>
-              </a:rPr>
-              <a:t>2. </a:t>
-            </a:r>
-            <a:r>
-              <a:rPr lang="fr-FR" sz="1700" dirty="0">
-                <a:solidFill>
-                  <a:schemeClr val="tx1"/>
-                </a:solidFill>
-                <a:latin typeface="Arial" panose="020B0604020202020204" pitchFamily="34" charset="0"/>
-                <a:cs typeface="Arial" panose="020B0604020202020204" pitchFamily="34" charset="0"/>
-              </a:rPr>
-              <a:t>Copie la clé publique sur le serveur</a:t>
-            </a:r>
-            <a:endParaRPr lang="en-US" sz="1700" dirty="0">
-              <a:solidFill>
-                <a:schemeClr val="tx1"/>
-              </a:solidFill>
-              <a:latin typeface="Arial" panose="020B0604020202020204" pitchFamily="34" charset="0"/>
-              <a:cs typeface="Arial" panose="020B0604020202020204" pitchFamily="34" charset="0"/>
-            </a:endParaRPr>
-          </a:p>
-          <a:p>
-            <a:pPr marL="285750" indent="-285750">
-              <a:lnSpc>
-                <a:spcPct val="150000"/>
-              </a:lnSpc>
-              <a:buFont typeface="Arial" panose="020B0604020202020204" pitchFamily="34" charset="0"/>
-              <a:buChar char="•"/>
-            </a:pPr>
-            <a:r>
-              <a:rPr lang="en-US" sz="1700" dirty="0">
-                <a:solidFill>
-                  <a:schemeClr val="tx1"/>
-                </a:solidFill>
-                <a:latin typeface="Arial" panose="020B0604020202020204" pitchFamily="34" charset="0"/>
-                <a:cs typeface="Arial" panose="020B0604020202020204" pitchFamily="34" charset="0"/>
-              </a:rPr>
-              <a:t>3. </a:t>
-            </a:r>
-            <a:r>
-              <a:rPr lang="fr-FR" sz="1700" dirty="0">
-                <a:solidFill>
-                  <a:schemeClr val="tx1"/>
-                </a:solidFill>
-                <a:latin typeface="Arial" panose="020B0604020202020204" pitchFamily="34" charset="0"/>
-                <a:cs typeface="Arial" panose="020B0604020202020204" pitchFamily="34" charset="0"/>
-              </a:rPr>
-              <a:t>Teste la connexion par clé AVANT de continuer</a:t>
-            </a:r>
-            <a:endParaRPr lang="en-US" sz="1700" dirty="0">
-              <a:solidFill>
-                <a:schemeClr val="tx1"/>
-              </a:solidFill>
-              <a:latin typeface="Arial" panose="020B0604020202020204" pitchFamily="34" charset="0"/>
-              <a:cs typeface="Arial" panose="020B0604020202020204" pitchFamily="34" charset="0"/>
-            </a:endParaRPr>
-          </a:p>
-          <a:p>
-            <a:endParaRPr lang="en-US" sz="1200" dirty="0">
-              <a:solidFill>
-                <a:schemeClr val="tx1"/>
-              </a:solidFill>
-              <a:latin typeface="Arial" panose="020B0604020202020204" pitchFamily="34" charset="0"/>
-              <a:cs typeface="Arial" panose="020B0604020202020204" pitchFamily="34" charset="0"/>
-            </a:endParaRPr>
-          </a:p>
-        </p:txBody>
-      </p:sp>
-      <p:sp>
-        <p:nvSpPr>
-          <p:cNvPr id="6" name="Slide Number Placeholder 5">
-            <a:extLst>
-              <a:ext uri="{FF2B5EF4-FFF2-40B4-BE49-F238E27FC236}">
-                <a16:creationId xmlns:a16="http://schemas.microsoft.com/office/drawing/2014/main" id="{C23C3221-5F04-4CA7-A86A-EEA8566A1735}"/>
-              </a:ext>
-            </a:extLst>
-          </p:cNvPr>
-          <p:cNvSpPr>
-            <a:spLocks noGrp="1"/>
-          </p:cNvSpPr>
-          <p:nvPr>
-            <p:ph type="sldNum" sz="quarter" idx="12"/>
-          </p:nvPr>
-        </p:nvSpPr>
-        <p:spPr>
-          <a:xfrm>
-            <a:off x="8610600" y="6356350"/>
-            <a:ext cx="2743200" cy="365125"/>
-          </a:xfrm>
-        </p:spPr>
-        <p:txBody>
-          <a:bodyPr/>
-          <a:lstStyle/>
-          <a:p>
-            <a:fld id="{B5CEABB6-07DC-46E8-9B57-56EC44A396E5}" type="slidenum">
-              <a:rPr lang="en-US" smtClean="0">
-                <a:latin typeface="Arial" panose="020B0604020202020204" pitchFamily="34" charset="0"/>
-                <a:cs typeface="Arial" panose="020B0604020202020204" pitchFamily="34" charset="0"/>
-              </a:rPr>
-              <a:pPr/>
-              <a:t>6</a:t>
-            </a:fld>
-            <a:endParaRPr lang="en-US" dirty="0">
-              <a:latin typeface="Arial" panose="020B0604020202020204" pitchFamily="34" charset="0"/>
-              <a:cs typeface="Arial" panose="020B0604020202020204" pitchFamily="34" charset="0"/>
-            </a:endParaRPr>
-          </a:p>
-        </p:txBody>
-      </p:sp>
-      <p:pic>
-        <p:nvPicPr>
-          <p:cNvPr id="7" name="Picture 6">
-            <a:extLst>
-              <a:ext uri="{FF2B5EF4-FFF2-40B4-BE49-F238E27FC236}">
-                <a16:creationId xmlns:a16="http://schemas.microsoft.com/office/drawing/2014/main" id="{83837C9B-EE1E-2996-F075-D5F5C9755E86}"/>
-              </a:ext>
-            </a:extLst>
-          </p:cNvPr>
-          <p:cNvPicPr>
-            <a:picLocks noChangeAspect="1"/>
-          </p:cNvPicPr>
-          <p:nvPr/>
-        </p:nvPicPr>
-        <p:blipFill>
-          <a:blip r:embed="rId2"/>
-          <a:stretch>
-            <a:fillRect/>
-          </a:stretch>
-        </p:blipFill>
-        <p:spPr>
-          <a:xfrm>
-            <a:off x="401455" y="1738312"/>
-            <a:ext cx="5731510" cy="3381375"/>
-          </a:xfrm>
-          <a:prstGeom prst="rect">
-            <a:avLst/>
-          </a:prstGeom>
-        </p:spPr>
-      </p:pic>
-      <p:pic>
-        <p:nvPicPr>
-          <p:cNvPr id="8" name="Picture 7">
-            <a:extLst>
-              <a:ext uri="{FF2B5EF4-FFF2-40B4-BE49-F238E27FC236}">
-                <a16:creationId xmlns:a16="http://schemas.microsoft.com/office/drawing/2014/main" id="{AB1EE4B9-A26C-D5DA-A249-E6EBB4AA552E}"/>
-              </a:ext>
-            </a:extLst>
-          </p:cNvPr>
-          <p:cNvPicPr>
-            <a:picLocks noChangeAspect="1"/>
-          </p:cNvPicPr>
-          <p:nvPr/>
-        </p:nvPicPr>
-        <p:blipFill>
-          <a:blip r:embed="rId3"/>
-          <a:stretch>
-            <a:fillRect/>
-          </a:stretch>
-        </p:blipFill>
-        <p:spPr>
-          <a:xfrm>
-            <a:off x="6460490" y="1738312"/>
-            <a:ext cx="5731510" cy="3258820"/>
-          </a:xfrm>
-          <a:prstGeom prst="rect">
-            <a:avLst/>
-          </a:prstGeom>
-        </p:spPr>
-      </p:pic>
     </p:spTree>
     <p:extLst>
       <p:ext uri="{BB962C8B-B14F-4D97-AF65-F5344CB8AC3E}">
-        <p14:creationId xmlns:p14="http://schemas.microsoft.com/office/powerpoint/2010/main" val="1346372204"/>
+        <p14:creationId xmlns:p14="http://schemas.microsoft.com/office/powerpoint/2010/main" val="3255462259"/>
       </p:ext>
     </p:extLst>
   </p:cSld>
@@ -21058,7 +23441,13 @@
   <p:cSld>
     <p:spTree>
       <p:nvGrpSpPr>
-        <p:cNvPr id="1" name=""/>
+        <p:cNvPr id="1" name="">
+          <a:extLst>
+            <a:ext uri="{FF2B5EF4-FFF2-40B4-BE49-F238E27FC236}">
+              <a16:creationId xmlns:a16="http://schemas.microsoft.com/office/drawing/2014/main" id="{C2918E37-0FC0-B71C-278F-53B322762DBD}"/>
+            </a:ext>
+          </a:extLst>
+        </p:cNvPr>
         <p:cNvGrpSpPr/>
         <p:nvPr/>
       </p:nvGrpSpPr>
@@ -21070,40 +23459,229 @@
           <a:chExt cx="0" cy="0"/>
         </a:xfrm>
       </p:grpSpPr>
-      <p:pic>
-        <p:nvPicPr>
-          <p:cNvPr id="2" name="Picture 1">
-            <a:extLst>
-              <a:ext uri="{FF2B5EF4-FFF2-40B4-BE49-F238E27FC236}">
-                <a16:creationId xmlns:a16="http://schemas.microsoft.com/office/drawing/2014/main" id="{C81E9A7D-C718-B2DE-605A-7FC01562B011}"/>
-              </a:ext>
-            </a:extLst>
-          </p:cNvPr>
-          <p:cNvPicPr>
-            <a:picLocks noChangeAspect="1"/>
-          </p:cNvPicPr>
+      <p:sp>
+        <p:nvSpPr>
+          <p:cNvPr id="6" name="Slide Number Placeholder 5">
+            <a:extLst>
+              <a:ext uri="{FF2B5EF4-FFF2-40B4-BE49-F238E27FC236}">
+                <a16:creationId xmlns:a16="http://schemas.microsoft.com/office/drawing/2014/main" id="{C9D4067F-9CDE-E9DD-CD5B-809E487B8BC2}"/>
+              </a:ext>
+            </a:extLst>
+          </p:cNvPr>
+          <p:cNvSpPr>
+            <a:spLocks noGrp="1"/>
+          </p:cNvSpPr>
+          <p:nvPr>
+            <p:ph type="sldNum" sz="quarter" idx="12"/>
+          </p:nvPr>
+        </p:nvSpPr>
+        <p:spPr>
+          <a:xfrm>
+            <a:off x="9579428" y="6356350"/>
+            <a:ext cx="1774371" cy="365125"/>
+          </a:xfrm>
+        </p:spPr>
+        <p:txBody>
+          <a:bodyPr/>
+          <a:lstStyle/>
+          <a:p>
+            <a:fld id="{B5CEABB6-07DC-46E8-9B57-56EC44A396E5}" type="slidenum">
+              <a:rPr lang="en-US" smtClean="0"/>
+              <a:pPr/>
+              <a:t>7</a:t>
+            </a:fld>
+            <a:endParaRPr lang="en-US" dirty="0"/>
+          </a:p>
+        </p:txBody>
+      </p:sp>
+      <p:sp>
+        <p:nvSpPr>
+          <p:cNvPr id="10" name="ZoneTexte 9">
+            <a:extLst>
+              <a:ext uri="{FF2B5EF4-FFF2-40B4-BE49-F238E27FC236}">
+                <a16:creationId xmlns:a16="http://schemas.microsoft.com/office/drawing/2014/main" id="{49A0600A-4AFC-DCC6-5323-A1A1D39503E9}"/>
+              </a:ext>
+            </a:extLst>
+          </p:cNvPr>
+          <p:cNvSpPr txBox="1"/>
           <p:nvPr/>
-        </p:nvPicPr>
-        <p:blipFill>
-          <a:blip r:embed="rId2"/>
-          <a:stretch>
-            <a:fillRect/>
-          </a:stretch>
-        </p:blipFill>
-        <p:spPr>
-          <a:xfrm>
-            <a:off x="1146612" y="1081754"/>
-            <a:ext cx="5731510" cy="4004945"/>
+        </p:nvSpPr>
+        <p:spPr>
+          <a:xfrm>
+            <a:off x="4542156" y="2477374"/>
+            <a:ext cx="6097712" cy="1364476"/>
           </a:xfrm>
           <a:prstGeom prst="rect">
             <a:avLst/>
           </a:prstGeom>
-        </p:spPr>
-      </p:pic>
+          <a:noFill/>
+        </p:spPr>
+        <p:txBody>
+          <a:bodyPr wrap="square">
+            <a:spAutoFit/>
+          </a:bodyPr>
+          <a:lstStyle/>
+          <a:p>
+            <a:pPr marL="0" marR="0">
+              <a:spcBef>
+                <a:spcPts val="300"/>
+              </a:spcBef>
+              <a:spcAft>
+                <a:spcPts val="300"/>
+              </a:spcAft>
+              <a:buNone/>
+            </a:pPr>
+            <a:r>
+              <a:rPr lang="fr-HT" sz="1600" dirty="0">
+                <a:effectLst/>
+                <a:latin typeface="Arial" panose="020B0604020202020204" pitchFamily="34" charset="0"/>
+                <a:ea typeface="Arial" panose="020B0604020202020204" pitchFamily="34" charset="0"/>
+              </a:rPr>
+              <a:t> </a:t>
+            </a:r>
+            <a:endParaRPr lang="en-US" sz="1600" dirty="0">
+              <a:effectLst/>
+              <a:latin typeface="Arial" panose="020B0604020202020204" pitchFamily="34" charset="0"/>
+              <a:ea typeface="Arial" panose="020B0604020202020204" pitchFamily="34" charset="0"/>
+            </a:endParaRPr>
+          </a:p>
+          <a:p>
+            <a:pPr marL="0" marR="0" algn="ctr">
+              <a:spcBef>
+                <a:spcPts val="500"/>
+              </a:spcBef>
+              <a:spcAft>
+                <a:spcPts val="1000"/>
+              </a:spcAft>
+              <a:buNone/>
+            </a:pPr>
+            <a:r>
+              <a:rPr lang="fr-HT" sz="2000" b="1" i="1" dirty="0">
+                <a:effectLst/>
+                <a:latin typeface="Arial" panose="020B0604020202020204" pitchFamily="34" charset="0"/>
+                <a:ea typeface="Arial" panose="020B0604020202020204" pitchFamily="34" charset="0"/>
+              </a:rPr>
+              <a:t>Durcissement d'un Serveur </a:t>
+            </a:r>
+            <a:r>
+              <a:rPr lang="fr-HT" sz="2000" b="1" i="1" dirty="0" err="1">
+                <a:effectLst/>
+                <a:latin typeface="Arial" panose="020B0604020202020204" pitchFamily="34" charset="0"/>
+                <a:ea typeface="Arial" panose="020B0604020202020204" pitchFamily="34" charset="0"/>
+              </a:rPr>
+              <a:t>OpenSSH</a:t>
+            </a:r>
+            <a:r>
+              <a:rPr lang="fr-HT" sz="2000" b="1" i="1" dirty="0">
+                <a:effectLst/>
+                <a:latin typeface="Arial" panose="020B0604020202020204" pitchFamily="34" charset="0"/>
+                <a:ea typeface="Arial" panose="020B0604020202020204" pitchFamily="34" charset="0"/>
+              </a:rPr>
+              <a:t> : Authentification, Contrôle d'accès et Protection contre les intrusions</a:t>
+            </a:r>
+            <a:endParaRPr lang="en-US" dirty="0">
+              <a:effectLst/>
+              <a:latin typeface="Arial" panose="020B0604020202020204" pitchFamily="34" charset="0"/>
+              <a:ea typeface="Arial" panose="020B0604020202020204" pitchFamily="34" charset="0"/>
+            </a:endParaRPr>
+          </a:p>
+        </p:txBody>
+      </p:sp>
+      <p:sp>
+        <p:nvSpPr>
+          <p:cNvPr id="11" name="Title 1">
+            <a:extLst>
+              <a:ext uri="{FF2B5EF4-FFF2-40B4-BE49-F238E27FC236}">
+                <a16:creationId xmlns:a16="http://schemas.microsoft.com/office/drawing/2014/main" id="{62750D0F-B844-DEAA-F1FD-4642C0A33D45}"/>
+              </a:ext>
+              <a:ext uri="{C183D7F6-B498-43B3-948B-1728B52AA6E4}">
+                <adec:decorative xmlns:adec="http://schemas.microsoft.com/office/drawing/2017/decorative" val="0"/>
+              </a:ext>
+            </a:extLst>
+          </p:cNvPr>
+          <p:cNvSpPr txBox="1">
+            <a:spLocks/>
+          </p:cNvSpPr>
+          <p:nvPr/>
+        </p:nvSpPr>
+        <p:spPr>
+          <a:xfrm>
+            <a:off x="3685243" y="1690408"/>
+            <a:ext cx="7811537" cy="1027415"/>
+          </a:xfrm>
+          <a:prstGeom prst="rect">
+            <a:avLst/>
+          </a:prstGeom>
+        </p:spPr>
+        <p:txBody>
+          <a:bodyPr vert="horz" lIns="91440" tIns="45720" rIns="91440" bIns="45720" rtlCol="0" anchor="b">
+            <a:noAutofit/>
+          </a:bodyPr>
+          <a:lstStyle>
+            <a:lvl1pPr algn="l" defTabSz="914400" rtl="0" eaLnBrk="1" latinLnBrk="0" hangingPunct="1">
+              <a:lnSpc>
+                <a:spcPct val="90000"/>
+              </a:lnSpc>
+              <a:spcBef>
+                <a:spcPct val="0"/>
+              </a:spcBef>
+              <a:buNone/>
+              <a:defRPr sz="3200" kern="1200" cap="all" spc="150" baseline="0">
+                <a:solidFill>
+                  <a:schemeClr val="tx1">
+                    <a:lumMod val="75000"/>
+                    <a:lumOff val="25000"/>
+                  </a:schemeClr>
+                </a:solidFill>
+                <a:latin typeface="+mj-lt"/>
+                <a:ea typeface="+mj-ea"/>
+                <a:cs typeface="+mj-cs"/>
+              </a:defRPr>
+            </a:lvl1pPr>
+          </a:lstStyle>
+          <a:p>
+            <a:pPr algn="ctr"/>
+            <a:br>
+              <a:rPr lang="en-US" b="1" kern="0" dirty="0">
+                <a:solidFill>
+                  <a:srgbClr val="0070C0"/>
+                </a:solidFill>
+                <a:latin typeface="Arial" panose="020B0604020202020204" pitchFamily="34" charset="0"/>
+                <a:cs typeface="Arial" panose="020B0604020202020204" pitchFamily="34" charset="0"/>
+              </a:rPr>
+            </a:br>
+            <a:br>
+              <a:rPr lang="en-US" b="1" kern="0" dirty="0">
+                <a:solidFill>
+                  <a:srgbClr val="0070C0"/>
+                </a:solidFill>
+                <a:latin typeface="Arial" panose="020B0604020202020204" pitchFamily="34" charset="0"/>
+                <a:cs typeface="Arial" panose="020B0604020202020204" pitchFamily="34" charset="0"/>
+              </a:rPr>
+            </a:br>
+            <a:r>
+              <a:rPr lang="fr-HT" sz="4400" b="1" kern="0" dirty="0">
+                <a:solidFill>
+                  <a:srgbClr val="0070C0"/>
+                </a:solidFill>
+                <a:latin typeface="Arial" panose="020B0604020202020204" pitchFamily="34" charset="0"/>
+              </a:rPr>
+              <a:t>Description du Projet</a:t>
+            </a:r>
+            <a:endParaRPr lang="en-US" dirty="0">
+              <a:solidFill>
+                <a:srgbClr val="0070C0"/>
+              </a:solidFill>
+              <a:latin typeface="Arial" panose="020B0604020202020204" pitchFamily="34" charset="0"/>
+              <a:cs typeface="Arial" panose="020B0604020202020204" pitchFamily="34" charset="0"/>
+            </a:endParaRPr>
+          </a:p>
+        </p:txBody>
+      </p:sp>
     </p:spTree>
     <p:extLst>
       <p:ext uri="{BB962C8B-B14F-4D97-AF65-F5344CB8AC3E}">
-        <p14:creationId xmlns:p14="http://schemas.microsoft.com/office/powerpoint/2010/main" val="1738561688"/>
+        <p14:creationId xmlns:p14="http://schemas.microsoft.com/office/powerpoint/2010/main" val="867420258"/>
       </p:ext>
     </p:extLst>
   </p:cSld>
@@ -21132,54 +23710,33 @@
       </p:grpSpPr>
       <p:sp>
         <p:nvSpPr>
-          <p:cNvPr id="3" name="Title 1">
-            <a:extLst>
-              <a:ext uri="{FF2B5EF4-FFF2-40B4-BE49-F238E27FC236}">
-                <a16:creationId xmlns:a16="http://schemas.microsoft.com/office/drawing/2014/main" id="{340DCA2B-A510-0E0E-7E3A-C4E3361A929C}"/>
-              </a:ext>
-            </a:extLst>
-          </p:cNvPr>
-          <p:cNvSpPr txBox="1">
-            <a:spLocks/>
-          </p:cNvSpPr>
-          <p:nvPr/>
-        </p:nvSpPr>
-        <p:spPr>
-          <a:xfrm>
-            <a:off x="401455" y="136525"/>
+          <p:cNvPr id="2" name="Title 1">
+            <a:extLst>
+              <a:ext uri="{FF2B5EF4-FFF2-40B4-BE49-F238E27FC236}">
+                <a16:creationId xmlns:a16="http://schemas.microsoft.com/office/drawing/2014/main" id="{537E1C88-627C-4655-A4FB-0BB02EDB078A}"/>
+              </a:ext>
+            </a:extLst>
+          </p:cNvPr>
+          <p:cNvSpPr>
+            <a:spLocks noGrp="1"/>
+          </p:cNvSpPr>
+          <p:nvPr>
+            <p:ph type="title"/>
+          </p:nvPr>
+        </p:nvSpPr>
+        <p:spPr>
+          <a:xfrm>
+            <a:off x="1342592" y="80097"/>
             <a:ext cx="9580745" cy="597993"/>
           </a:xfrm>
-          <a:prstGeom prst="rect">
-            <a:avLst/>
-          </a:prstGeom>
-        </p:spPr>
-        <p:txBody>
-          <a:bodyPr vert="horz" lIns="91440" tIns="45720" rIns="91440" bIns="45720" rtlCol="0" anchor="ctr">
+        </p:spPr>
+        <p:txBody>
+          <a:bodyPr>
             <a:normAutofit/>
           </a:bodyPr>
-          <a:lstStyle>
-            <a:lvl1pPr algn="l" defTabSz="914400" rtl="0" eaLnBrk="1" latinLnBrk="0" hangingPunct="1">
-              <a:lnSpc>
-                <a:spcPct val="90000"/>
-              </a:lnSpc>
-              <a:spcBef>
-                <a:spcPct val="0"/>
-              </a:spcBef>
-              <a:buNone/>
-              <a:defRPr sz="3600" kern="1200" cap="all" spc="150" baseline="0">
-                <a:solidFill>
-                  <a:schemeClr val="tx1">
-                    <a:lumMod val="75000"/>
-                    <a:lumOff val="25000"/>
-                  </a:schemeClr>
-                </a:solidFill>
-                <a:latin typeface="+mj-lt"/>
-                <a:ea typeface="+mj-ea"/>
-                <a:cs typeface="+mj-cs"/>
-              </a:defRPr>
-            </a:lvl1pPr>
-          </a:lstStyle>
-          <a:p>
+          <a:lstStyle/>
+          <a:p>
+            <a:pPr algn="ctr"/>
             <a:r>
               <a:rPr lang="fr-FR" sz="2200" b="1" dirty="0">
                 <a:solidFill>
@@ -21188,7 +23745,17 @@
                 <a:latin typeface="Arial" panose="020B0604020202020204" pitchFamily="34" charset="0"/>
                 <a:cs typeface="Arial" panose="020B0604020202020204" pitchFamily="34" charset="0"/>
               </a:rPr>
-              <a:t>2. DESACTIVATION DU LOGIN ROOT</a:t>
+              <a:t>1. </a:t>
+            </a:r>
+            <a:r>
+              <a:rPr lang="fr-FR" sz="2000" b="1" dirty="0">
+                <a:solidFill>
+                  <a:srgbClr val="0070C0"/>
+                </a:solidFill>
+                <a:latin typeface="Arial" panose="020B0604020202020204" pitchFamily="34" charset="0"/>
+                <a:cs typeface="Arial" panose="020B0604020202020204" pitchFamily="34" charset="0"/>
+              </a:rPr>
+              <a:t>Authentification par clé cryptographique</a:t>
             </a:r>
             <a:endParaRPr lang="en-US" sz="2200" b="1" dirty="0">
               <a:solidFill>
@@ -21202,148 +23769,117 @@
       </p:sp>
       <p:sp>
         <p:nvSpPr>
-          <p:cNvPr id="5" name="Title 4">
-            <a:extLst>
-              <a:ext uri="{FF2B5EF4-FFF2-40B4-BE49-F238E27FC236}">
-                <a16:creationId xmlns:a16="http://schemas.microsoft.com/office/drawing/2014/main" id="{9D1A4C36-5F70-FA87-B399-3C0E7235DA6C}"/>
-              </a:ext>
-            </a:extLst>
-          </p:cNvPr>
-          <p:cNvSpPr>
-            <a:spLocks noGrp="1"/>
-          </p:cNvSpPr>
-          <p:nvPr>
-            <p:ph type="ctrTitle"/>
-          </p:nvPr>
-        </p:nvSpPr>
-        <p:spPr>
-          <a:xfrm>
-            <a:off x="6991350" y="2571235"/>
-            <a:ext cx="5045752" cy="2525421"/>
-          </a:xfrm>
-        </p:spPr>
-        <p:txBody>
-          <a:bodyPr/>
+          <p:cNvPr id="3" name="Content Placeholder 2">
+            <a:extLst>
+              <a:ext uri="{FF2B5EF4-FFF2-40B4-BE49-F238E27FC236}">
+                <a16:creationId xmlns:a16="http://schemas.microsoft.com/office/drawing/2014/main" id="{033634FE-ADF0-4BC3-A0A9-447EA9DD096B}"/>
+              </a:ext>
+            </a:extLst>
+          </p:cNvPr>
+          <p:cNvSpPr>
+            <a:spLocks noGrp="1"/>
+          </p:cNvSpPr>
+          <p:nvPr>
+            <p:ph type="body" idx="1"/>
+          </p:nvPr>
+        </p:nvSpPr>
+        <p:spPr>
+          <a:xfrm>
+            <a:off x="401455" y="733309"/>
+            <a:ext cx="11578212" cy="1126313"/>
+          </a:xfrm>
+        </p:spPr>
+        <p:txBody>
+          <a:bodyPr vert="horz" lIns="91440" tIns="45720" rIns="91440" bIns="45720" rtlCol="0" anchor="t">
+            <a:noAutofit/>
+          </a:bodyPr>
           <a:lstStyle/>
           <a:p>
-            <a:r>
-              <a:rPr lang="en-US" sz="2000" dirty="0">
+            <a:pPr marL="285750" indent="-285750">
+              <a:buFont typeface="Wingdings" panose="05000000000000000000" pitchFamily="2" charset="2"/>
+              <a:buChar char="v"/>
+            </a:pPr>
+            <a:r>
+              <a:rPr lang="fr-FR" sz="1800" b="1" dirty="0">
+                <a:solidFill>
+                  <a:srgbClr val="0070C0"/>
+                </a:solidFill>
                 <a:latin typeface="Arial" panose="020B0604020202020204" pitchFamily="34" charset="0"/>
                 <a:cs typeface="Arial" panose="020B0604020202020204" pitchFamily="34" charset="0"/>
               </a:rPr>
-              <a:t>Modification de </a:t>
-            </a:r>
-            <a:r>
-              <a:rPr lang="en-US" sz="2000" dirty="0" err="1">
+              <a:t>Objectif</a:t>
+            </a:r>
+          </a:p>
+          <a:p>
+            <a:r>
+              <a:rPr lang="fr-FR" sz="1800" b="1" dirty="0">
                 <a:latin typeface="Arial" panose="020B0604020202020204" pitchFamily="34" charset="0"/>
                 <a:cs typeface="Arial" panose="020B0604020202020204" pitchFamily="34" charset="0"/>
               </a:rPr>
-              <a:t>ces</a:t>
-            </a:r>
-            <a:r>
-              <a:rPr lang="en-US" sz="2000" dirty="0">
+              <a:t>Remplacer l'authentification par mot de passe (vulnérable aux attaques par force brute) par une paire de clés cryptographiques (clé privée sur le client, clé publique sur le serveur).</a:t>
+            </a:r>
+          </a:p>
+          <a:p>
+            <a:endParaRPr lang="fr-FR" sz="1800" b="1" noProof="1">
+              <a:latin typeface="Arial" panose="020B0604020202020204" pitchFamily="34" charset="0"/>
+              <a:cs typeface="Arial" panose="020B0604020202020204" pitchFamily="34" charset="0"/>
+            </a:endParaRPr>
+          </a:p>
+          <a:p>
+            <a:endParaRPr lang="fr-FR" sz="1800" b="1" noProof="1">
+              <a:latin typeface="Arial" panose="020B0604020202020204" pitchFamily="34" charset="0"/>
+              <a:cs typeface="Arial" panose="020B0604020202020204" pitchFamily="34" charset="0"/>
+            </a:endParaRPr>
+          </a:p>
+          <a:p>
+            <a:endParaRPr lang="fr-FR" sz="1800" b="1" noProof="1">
+              <a:latin typeface="Arial" panose="020B0604020202020204" pitchFamily="34" charset="0"/>
+              <a:cs typeface="Arial" panose="020B0604020202020204" pitchFamily="34" charset="0"/>
+            </a:endParaRPr>
+          </a:p>
+          <a:p>
+            <a:endParaRPr lang="en-US" sz="1800" b="1" noProof="1">
+              <a:latin typeface="Arial" panose="020B0604020202020204" pitchFamily="34" charset="0"/>
+              <a:cs typeface="Arial" panose="020B0604020202020204" pitchFamily="34" charset="0"/>
+            </a:endParaRPr>
+          </a:p>
+        </p:txBody>
+      </p:sp>
+      <p:sp>
+        <p:nvSpPr>
+          <p:cNvPr id="6" name="Slide Number Placeholder 5">
+            <a:extLst>
+              <a:ext uri="{FF2B5EF4-FFF2-40B4-BE49-F238E27FC236}">
+                <a16:creationId xmlns:a16="http://schemas.microsoft.com/office/drawing/2014/main" id="{C23C3221-5F04-4CA7-A86A-EEA8566A1735}"/>
+              </a:ext>
+            </a:extLst>
+          </p:cNvPr>
+          <p:cNvSpPr>
+            <a:spLocks noGrp="1"/>
+          </p:cNvSpPr>
+          <p:nvPr>
+            <p:ph type="sldNum" sz="quarter" idx="12"/>
+          </p:nvPr>
+        </p:nvSpPr>
+        <p:spPr>
+          <a:xfrm>
+            <a:off x="8610600" y="6356350"/>
+            <a:ext cx="2743200" cy="365125"/>
+          </a:xfrm>
+        </p:spPr>
+        <p:txBody>
+          <a:bodyPr/>
+          <a:lstStyle/>
+          <a:p>
+            <a:fld id="{B5CEABB6-07DC-46E8-9B57-56EC44A396E5}" type="slidenum">
+              <a:rPr lang="en-US" smtClean="0">
                 <a:latin typeface="Arial" panose="020B0604020202020204" pitchFamily="34" charset="0"/>
                 <a:cs typeface="Arial" panose="020B0604020202020204" pitchFamily="34" charset="0"/>
               </a:rPr>
-              <a:t> </a:t>
-            </a:r>
-            <a:r>
-              <a:rPr lang="en-US" sz="2000" dirty="0" err="1">
-                <a:latin typeface="Arial" panose="020B0604020202020204" pitchFamily="34" charset="0"/>
-                <a:cs typeface="Arial" panose="020B0604020202020204" pitchFamily="34" charset="0"/>
-              </a:rPr>
-              <a:t>lignes</a:t>
-            </a:r>
-            <a:r>
-              <a:rPr lang="en-US" sz="2000" dirty="0">
-                <a:latin typeface="Arial" panose="020B0604020202020204" pitchFamily="34" charset="0"/>
-                <a:cs typeface="Arial" panose="020B0604020202020204" pitchFamily="34" charset="0"/>
-              </a:rPr>
-              <a:t> dans le </a:t>
-            </a:r>
-            <a:r>
-              <a:rPr lang="en-US" sz="2000" dirty="0" err="1">
-                <a:latin typeface="Arial" panose="020B0604020202020204" pitchFamily="34" charset="0"/>
-                <a:cs typeface="Arial" panose="020B0604020202020204" pitchFamily="34" charset="0"/>
-              </a:rPr>
-              <a:t>fichier</a:t>
-            </a:r>
-            <a:r>
-              <a:rPr lang="en-US" sz="2000" dirty="0">
-                <a:latin typeface="Arial" panose="020B0604020202020204" pitchFamily="34" charset="0"/>
-                <a:cs typeface="Arial" panose="020B0604020202020204" pitchFamily="34" charset="0"/>
-              </a:rPr>
-              <a:t> </a:t>
-            </a:r>
-            <a:r>
-              <a:rPr lang="en-US" sz="2000" dirty="0" err="1">
-                <a:latin typeface="Arial" panose="020B0604020202020204" pitchFamily="34" charset="0"/>
-                <a:cs typeface="Arial" panose="020B0604020202020204" pitchFamily="34" charset="0"/>
-              </a:rPr>
-              <a:t>sshd</a:t>
-            </a:r>
-            <a:r>
-              <a:rPr lang="en-US" sz="2000" dirty="0">
-                <a:latin typeface="Arial" panose="020B0604020202020204" pitchFamily="34" charset="0"/>
-                <a:cs typeface="Arial" panose="020B0604020202020204" pitchFamily="34" charset="0"/>
-              </a:rPr>
-              <a:t>:</a:t>
-            </a:r>
-            <a:br>
-              <a:rPr lang="en-US" sz="2000" dirty="0">
-                <a:latin typeface="Arial" panose="020B0604020202020204" pitchFamily="34" charset="0"/>
-                <a:cs typeface="Arial" panose="020B0604020202020204" pitchFamily="34" charset="0"/>
-              </a:rPr>
-            </a:br>
-            <a:br>
-              <a:rPr lang="en-US" sz="2000" dirty="0">
-                <a:latin typeface="Arial" panose="020B0604020202020204" pitchFamily="34" charset="0"/>
-                <a:cs typeface="Arial" panose="020B0604020202020204" pitchFamily="34" charset="0"/>
-              </a:rPr>
-            </a:br>
-            <a:r>
-              <a:rPr lang="en-US" sz="2000" dirty="0" err="1">
-                <a:latin typeface="Arial" panose="020B0604020202020204" pitchFamily="34" charset="0"/>
-                <a:cs typeface="Arial" panose="020B0604020202020204" pitchFamily="34" charset="0"/>
-              </a:rPr>
-              <a:t>PermitRootLogin</a:t>
-            </a:r>
-            <a:r>
-              <a:rPr lang="en-US" sz="2000" dirty="0">
-                <a:latin typeface="Arial" panose="020B0604020202020204" pitchFamily="34" charset="0"/>
-                <a:cs typeface="Arial" panose="020B0604020202020204" pitchFamily="34" charset="0"/>
-              </a:rPr>
-              <a:t> no </a:t>
-            </a:r>
-            <a:r>
-              <a:rPr lang="en-US" sz="2000" dirty="0" err="1">
-                <a:latin typeface="Arial" panose="020B0604020202020204" pitchFamily="34" charset="0"/>
-                <a:cs typeface="Arial" panose="020B0604020202020204" pitchFamily="34" charset="0"/>
-              </a:rPr>
-              <a:t>PasswordAuthentication</a:t>
-            </a:r>
-            <a:r>
-              <a:rPr lang="en-US" sz="2000" dirty="0">
-                <a:latin typeface="Arial" panose="020B0604020202020204" pitchFamily="34" charset="0"/>
-                <a:cs typeface="Arial" panose="020B0604020202020204" pitchFamily="34" charset="0"/>
-              </a:rPr>
-              <a:t> no </a:t>
-            </a:r>
-            <a:r>
-              <a:rPr lang="en-US" sz="2000" dirty="0" err="1">
-                <a:latin typeface="Arial" panose="020B0604020202020204" pitchFamily="34" charset="0"/>
-                <a:cs typeface="Arial" panose="020B0604020202020204" pitchFamily="34" charset="0"/>
-              </a:rPr>
-              <a:t>PubkeyAuthentication</a:t>
-            </a:r>
-            <a:r>
-              <a:rPr lang="en-US" sz="2000" dirty="0">
-                <a:latin typeface="Arial" panose="020B0604020202020204" pitchFamily="34" charset="0"/>
-                <a:cs typeface="Arial" panose="020B0604020202020204" pitchFamily="34" charset="0"/>
-              </a:rPr>
-              <a:t> yes</a:t>
-            </a:r>
-            <a:endParaRPr lang="fr-FR" sz="2000" dirty="0">
+              <a:pPr/>
+              <a:t>8</a:t>
+            </a:fld>
+            <a:endParaRPr lang="en-US" dirty="0">
               <a:latin typeface="Arial" panose="020B0604020202020204" pitchFamily="34" charset="0"/>
               <a:cs typeface="Arial" panose="020B0604020202020204" pitchFamily="34" charset="0"/>
             </a:endParaRPr>
@@ -21352,10 +23888,10 @@
       </p:sp>
       <p:pic>
         <p:nvPicPr>
-          <p:cNvPr id="6" name="Picture 5">
-            <a:extLst>
-              <a:ext uri="{FF2B5EF4-FFF2-40B4-BE49-F238E27FC236}">
-                <a16:creationId xmlns:a16="http://schemas.microsoft.com/office/drawing/2014/main" id="{5A09F8CA-08FC-4BE7-38B2-3449DF5D84F2}"/>
+          <p:cNvPr id="7" name="Picture 6">
+            <a:extLst>
+              <a:ext uri="{FF2B5EF4-FFF2-40B4-BE49-F238E27FC236}">
+                <a16:creationId xmlns:a16="http://schemas.microsoft.com/office/drawing/2014/main" id="{83837C9B-EE1E-2996-F075-D5F5C9755E86}"/>
               </a:ext>
             </a:extLst>
           </p:cNvPr>
@@ -21372,48 +23908,163 @@
         </p:blipFill>
         <p:spPr>
           <a:xfrm>
-            <a:off x="401455" y="955232"/>
-            <a:ext cx="5731510" cy="390525"/>
+            <a:off x="1870278" y="2636142"/>
+            <a:ext cx="8640566" cy="3381375"/>
           </a:xfrm>
           <a:prstGeom prst="rect">
             <a:avLst/>
           </a:prstGeom>
         </p:spPr>
       </p:pic>
-      <p:pic>
-        <p:nvPicPr>
-          <p:cNvPr id="7" name="Picture 6">
-            <a:extLst>
-              <a:ext uri="{FF2B5EF4-FFF2-40B4-BE49-F238E27FC236}">
-                <a16:creationId xmlns:a16="http://schemas.microsoft.com/office/drawing/2014/main" id="{0D061A74-C6A0-B6DB-83F3-7B7E52E4D57B}"/>
-              </a:ext>
-            </a:extLst>
-          </p:cNvPr>
-          <p:cNvPicPr>
-            <a:picLocks noChangeAspect="1"/>
-          </p:cNvPicPr>
+      <p:sp>
+        <p:nvSpPr>
+          <p:cNvPr id="9" name="ZoneTexte 8">
+            <a:extLst>
+              <a:ext uri="{FF2B5EF4-FFF2-40B4-BE49-F238E27FC236}">
+                <a16:creationId xmlns:a16="http://schemas.microsoft.com/office/drawing/2014/main" id="{57C63847-400A-99BE-B1E4-0FCCB95C384C}"/>
+              </a:ext>
+            </a:extLst>
+          </p:cNvPr>
+          <p:cNvSpPr txBox="1"/>
           <p:nvPr/>
-        </p:nvPicPr>
-        <p:blipFill>
-          <a:blip r:embed="rId3"/>
-          <a:stretch>
-            <a:fillRect/>
-          </a:stretch>
-        </p:blipFill>
-        <p:spPr>
-          <a:xfrm>
-            <a:off x="401455" y="1725622"/>
-            <a:ext cx="5731510" cy="4396105"/>
+        </p:nvSpPr>
+        <p:spPr>
+          <a:xfrm>
+            <a:off x="3084108" y="2047827"/>
+            <a:ext cx="6097712" cy="400110"/>
           </a:xfrm>
           <a:prstGeom prst="rect">
             <a:avLst/>
           </a:prstGeom>
-        </p:spPr>
-      </p:pic>
+          <a:noFill/>
+        </p:spPr>
+        <p:txBody>
+          <a:bodyPr wrap="square">
+            <a:spAutoFit/>
+          </a:bodyPr>
+          <a:lstStyle/>
+          <a:p>
+            <a:pPr marL="342900" indent="-342900" algn="ctr">
+              <a:spcBef>
+                <a:spcPts val="300"/>
+              </a:spcBef>
+              <a:spcAft>
+                <a:spcPts val="300"/>
+              </a:spcAft>
+              <a:buFont typeface="+mj-lt"/>
+              <a:buAutoNum type="arabicPeriod"/>
+            </a:pPr>
+            <a:r>
+              <a:rPr lang="fr-HT" sz="1600" dirty="0">
+                <a:effectLst/>
+                <a:latin typeface="Arial" panose="020B0604020202020204" pitchFamily="34" charset="0"/>
+                <a:ea typeface="Arial" panose="020B0604020202020204" pitchFamily="34" charset="0"/>
+              </a:rPr>
+              <a:t> </a:t>
+            </a:r>
+            <a:r>
+              <a:rPr lang="en-US" sz="1600" dirty="0">
+                <a:latin typeface="Arial" panose="020B0604020202020204" pitchFamily="34" charset="0"/>
+                <a:cs typeface="Arial" panose="020B0604020202020204" pitchFamily="34" charset="0"/>
+              </a:rPr>
+              <a:t> </a:t>
+            </a:r>
+            <a:r>
+              <a:rPr lang="en-US" sz="2000" dirty="0" err="1">
+                <a:latin typeface="Arial" panose="020B0604020202020204" pitchFamily="34" charset="0"/>
+                <a:cs typeface="Arial" panose="020B0604020202020204" pitchFamily="34" charset="0"/>
+              </a:rPr>
+              <a:t>Génération</a:t>
+            </a:r>
+            <a:r>
+              <a:rPr lang="en-US" sz="2000" dirty="0">
+                <a:latin typeface="Arial" panose="020B0604020202020204" pitchFamily="34" charset="0"/>
+                <a:cs typeface="Arial" panose="020B0604020202020204" pitchFamily="34" charset="0"/>
+              </a:rPr>
+              <a:t> </a:t>
+            </a:r>
+            <a:r>
+              <a:rPr lang="en-US" sz="2000" dirty="0" err="1">
+                <a:latin typeface="Arial" panose="020B0604020202020204" pitchFamily="34" charset="0"/>
+                <a:cs typeface="Arial" panose="020B0604020202020204" pitchFamily="34" charset="0"/>
+              </a:rPr>
+              <a:t>d’une</a:t>
+            </a:r>
+            <a:r>
+              <a:rPr lang="en-US" sz="2000" dirty="0">
+                <a:latin typeface="Arial" panose="020B0604020202020204" pitchFamily="34" charset="0"/>
+                <a:cs typeface="Arial" panose="020B0604020202020204" pitchFamily="34" charset="0"/>
+              </a:rPr>
+              <a:t> </a:t>
+            </a:r>
+            <a:r>
+              <a:rPr lang="en-US" sz="2000" dirty="0" err="1">
+                <a:latin typeface="Arial" panose="020B0604020202020204" pitchFamily="34" charset="0"/>
+                <a:cs typeface="Arial" panose="020B0604020202020204" pitchFamily="34" charset="0"/>
+              </a:rPr>
+              <a:t>paire</a:t>
+            </a:r>
+            <a:r>
+              <a:rPr lang="en-US" sz="2000" dirty="0">
+                <a:latin typeface="Arial" panose="020B0604020202020204" pitchFamily="34" charset="0"/>
+                <a:cs typeface="Arial" panose="020B0604020202020204" pitchFamily="34" charset="0"/>
+              </a:rPr>
+              <a:t> de </a:t>
+            </a:r>
+            <a:r>
+              <a:rPr lang="en-US" sz="2000" dirty="0" err="1">
+                <a:latin typeface="Arial" panose="020B0604020202020204" pitchFamily="34" charset="0"/>
+                <a:cs typeface="Arial" panose="020B0604020202020204" pitchFamily="34" charset="0"/>
+              </a:rPr>
+              <a:t>clé</a:t>
+            </a:r>
+            <a:r>
+              <a:rPr lang="en-US" sz="2000" dirty="0">
+                <a:latin typeface="Arial" panose="020B0604020202020204" pitchFamily="34" charset="0"/>
+                <a:cs typeface="Arial" panose="020B0604020202020204" pitchFamily="34" charset="0"/>
+              </a:rPr>
+              <a:t> (</a:t>
+            </a:r>
+            <a:r>
+              <a:rPr lang="en-US" sz="2000" dirty="0" err="1">
+                <a:latin typeface="Arial" panose="020B0604020202020204" pitchFamily="34" charset="0"/>
+                <a:cs typeface="Arial" panose="020B0604020202020204" pitchFamily="34" charset="0"/>
+              </a:rPr>
+              <a:t>publique</a:t>
+            </a:r>
+            <a:r>
+              <a:rPr lang="en-US" sz="2000" dirty="0">
+                <a:latin typeface="Arial" panose="020B0604020202020204" pitchFamily="34" charset="0"/>
+                <a:cs typeface="Arial" panose="020B0604020202020204" pitchFamily="34" charset="0"/>
+              </a:rPr>
+              <a:t> et </a:t>
+            </a:r>
+            <a:r>
+              <a:rPr lang="en-US" sz="2000" dirty="0" err="1">
+                <a:latin typeface="Arial" panose="020B0604020202020204" pitchFamily="34" charset="0"/>
+                <a:cs typeface="Arial" panose="020B0604020202020204" pitchFamily="34" charset="0"/>
+              </a:rPr>
+              <a:t>privé</a:t>
+            </a:r>
+            <a:r>
+              <a:rPr lang="en-US" sz="2000" dirty="0">
+                <a:latin typeface="Arial" panose="020B0604020202020204" pitchFamily="34" charset="0"/>
+                <a:cs typeface="Arial" panose="020B0604020202020204" pitchFamily="34" charset="0"/>
+              </a:rPr>
+              <a:t>)</a:t>
+            </a:r>
+            <a:endParaRPr lang="en-US" sz="1600" dirty="0">
+              <a:effectLst/>
+              <a:latin typeface="Arial" panose="020B0604020202020204" pitchFamily="34" charset="0"/>
+              <a:ea typeface="Arial" panose="020B0604020202020204" pitchFamily="34" charset="0"/>
+            </a:endParaRPr>
+          </a:p>
+        </p:txBody>
+      </p:sp>
     </p:spTree>
     <p:extLst>
       <p:ext uri="{BB962C8B-B14F-4D97-AF65-F5344CB8AC3E}">
-        <p14:creationId xmlns:p14="http://schemas.microsoft.com/office/powerpoint/2010/main" val="707789176"/>
+        <p14:creationId xmlns:p14="http://schemas.microsoft.com/office/powerpoint/2010/main" val="1346372204"/>
       </p:ext>
     </p:extLst>
   </p:cSld>
@@ -21440,167 +24091,12 @@
           <a:chExt cx="0" cy="0"/>
         </a:xfrm>
       </p:grpSpPr>
-      <p:sp>
-        <p:nvSpPr>
-          <p:cNvPr id="10" name="Text Placeholder 9">
-            <a:extLst>
-              <a:ext uri="{FF2B5EF4-FFF2-40B4-BE49-F238E27FC236}">
-                <a16:creationId xmlns:a16="http://schemas.microsoft.com/office/drawing/2014/main" id="{BC1DF189-6F2F-4C21-88CC-C82D3D0D147B}"/>
-              </a:ext>
-            </a:extLst>
-          </p:cNvPr>
-          <p:cNvSpPr>
-            <a:spLocks noGrp="1"/>
-          </p:cNvSpPr>
-          <p:nvPr>
-            <p:ph type="body" sz="quarter" idx="25"/>
-          </p:nvPr>
-        </p:nvSpPr>
-        <p:spPr>
-          <a:xfrm>
-            <a:off x="6318219" y="4831325"/>
-            <a:ext cx="5873781" cy="1307654"/>
-          </a:xfrm>
-        </p:spPr>
-        <p:txBody>
-          <a:bodyPr vert="horz" lIns="91440" tIns="45720" rIns="91440" bIns="45720" rtlCol="0" anchor="t">
-            <a:normAutofit fontScale="92500" lnSpcReduction="10000"/>
-          </a:bodyPr>
-          <a:lstStyle/>
-          <a:p>
-            <a:r>
-              <a:rPr lang="fr-FR" b="1" dirty="0">
-                <a:latin typeface="Arial" panose="020B0604020202020204" pitchFamily="34" charset="0"/>
-                <a:cs typeface="Arial" panose="020B0604020202020204" pitchFamily="34" charset="0"/>
-              </a:rPr>
-              <a:t>Sur Ubuntu récent, SSH est géré par un socket systemd qui contrôle le port, pas </a:t>
-            </a:r>
-            <a:r>
-              <a:rPr lang="fr-FR" b="1" dirty="0" err="1">
-                <a:latin typeface="Arial" panose="020B0604020202020204" pitchFamily="34" charset="0"/>
-                <a:cs typeface="Arial" panose="020B0604020202020204" pitchFamily="34" charset="0"/>
-              </a:rPr>
-              <a:t>sshd_config.Il</a:t>
-            </a:r>
-            <a:r>
-              <a:rPr lang="fr-FR" b="1" dirty="0">
-                <a:latin typeface="Arial" panose="020B0604020202020204" pitchFamily="34" charset="0"/>
-                <a:cs typeface="Arial" panose="020B0604020202020204" pitchFamily="34" charset="0"/>
-              </a:rPr>
-              <a:t> faut Modifier le socket SSH</a:t>
-            </a:r>
-            <a:endParaRPr lang="en-US" noProof="1">
-              <a:latin typeface="Arial" panose="020B0604020202020204" pitchFamily="34" charset="0"/>
-              <a:cs typeface="Arial" panose="020B0604020202020204" pitchFamily="34" charset="0"/>
-            </a:endParaRPr>
-          </a:p>
-        </p:txBody>
-      </p:sp>
-      <p:sp>
-        <p:nvSpPr>
-          <p:cNvPr id="4" name="Slide Number Placeholder 3">
-            <a:extLst>
-              <a:ext uri="{FF2B5EF4-FFF2-40B4-BE49-F238E27FC236}">
-                <a16:creationId xmlns:a16="http://schemas.microsoft.com/office/drawing/2014/main" id="{79ED4A67-3A46-4F54-A12A-EAE1B53E6457}"/>
-              </a:ext>
-            </a:extLst>
-          </p:cNvPr>
-          <p:cNvSpPr>
-            <a:spLocks noGrp="1"/>
-          </p:cNvSpPr>
-          <p:nvPr>
-            <p:ph type="sldNum" sz="quarter" idx="22"/>
-          </p:nvPr>
-        </p:nvSpPr>
-        <p:spPr>
-          <a:xfrm>
-            <a:off x="10700656" y="6356350"/>
-            <a:ext cx="653143" cy="365125"/>
-          </a:xfrm>
-        </p:spPr>
-        <p:txBody>
-          <a:bodyPr/>
-          <a:lstStyle/>
-          <a:p>
-            <a:fld id="{19B51A1E-902D-48AF-9020-955120F399B6}" type="slidenum">
-              <a:rPr lang="en-US" smtClean="0">
-                <a:latin typeface="Arial" panose="020B0604020202020204" pitchFamily="34" charset="0"/>
-                <a:cs typeface="Arial" panose="020B0604020202020204" pitchFamily="34" charset="0"/>
-              </a:rPr>
-              <a:pPr/>
-              <a:t>9</a:t>
-            </a:fld>
-            <a:endParaRPr lang="en-US" dirty="0">
-              <a:latin typeface="Arial" panose="020B0604020202020204" pitchFamily="34" charset="0"/>
-              <a:cs typeface="Arial" panose="020B0604020202020204" pitchFamily="34" charset="0"/>
-            </a:endParaRPr>
-          </a:p>
-        </p:txBody>
-      </p:sp>
-      <p:sp>
-        <p:nvSpPr>
-          <p:cNvPr id="21" name="Title 1">
-            <a:extLst>
-              <a:ext uri="{FF2B5EF4-FFF2-40B4-BE49-F238E27FC236}">
-                <a16:creationId xmlns:a16="http://schemas.microsoft.com/office/drawing/2014/main" id="{147C519B-EF99-C94B-F102-BB94B3BB1302}"/>
-              </a:ext>
-            </a:extLst>
-          </p:cNvPr>
-          <p:cNvSpPr>
-            <a:spLocks noGrp="1"/>
-          </p:cNvSpPr>
-          <p:nvPr>
-            <p:ph type="title"/>
-          </p:nvPr>
-        </p:nvSpPr>
-        <p:spPr>
-          <a:xfrm>
-            <a:off x="401455" y="136525"/>
-            <a:ext cx="9580745" cy="597993"/>
-          </a:xfrm>
-        </p:spPr>
-        <p:txBody>
-          <a:bodyPr>
-            <a:normAutofit/>
-          </a:bodyPr>
-          <a:lstStyle/>
-          <a:p>
-            <a:r>
-              <a:rPr lang="fr-FR" sz="2200" b="1" dirty="0">
-                <a:solidFill>
-                  <a:srgbClr val="0070C0"/>
-                </a:solidFill>
-                <a:latin typeface="Arial" panose="020B0604020202020204" pitchFamily="34" charset="0"/>
-                <a:cs typeface="Arial" panose="020B0604020202020204" pitchFamily="34" charset="0"/>
-              </a:rPr>
-              <a:t>3. Changement du port </a:t>
-            </a:r>
-            <a:r>
-              <a:rPr lang="fr-FR" sz="2200" b="1" dirty="0" err="1">
-                <a:solidFill>
-                  <a:srgbClr val="0070C0"/>
-                </a:solidFill>
-                <a:latin typeface="Arial" panose="020B0604020202020204" pitchFamily="34" charset="0"/>
-                <a:cs typeface="Arial" panose="020B0604020202020204" pitchFamily="34" charset="0"/>
-              </a:rPr>
-              <a:t>ssh</a:t>
-            </a:r>
-            <a:endParaRPr lang="en-US" sz="2200" b="1" dirty="0">
-              <a:solidFill>
-                <a:srgbClr val="0070C0"/>
-              </a:solidFill>
-              <a:latin typeface="Arial" panose="020B0604020202020204" pitchFamily="34" charset="0"/>
-              <a:cs typeface="Arial" panose="020B0604020202020204" pitchFamily="34" charset="0"/>
-            </a:endParaRPr>
-          </a:p>
-        </p:txBody>
-      </p:sp>
       <p:pic>
         <p:nvPicPr>
-          <p:cNvPr id="22" name="Picture 21">
-            <a:extLst>
-              <a:ext uri="{FF2B5EF4-FFF2-40B4-BE49-F238E27FC236}">
-                <a16:creationId xmlns:a16="http://schemas.microsoft.com/office/drawing/2014/main" id="{6314EDBE-B9D1-B244-51FA-9DC33C72A2AE}"/>
+          <p:cNvPr id="2" name="Picture 1">
+            <a:extLst>
+              <a:ext uri="{FF2B5EF4-FFF2-40B4-BE49-F238E27FC236}">
+                <a16:creationId xmlns:a16="http://schemas.microsoft.com/office/drawing/2014/main" id="{C81E9A7D-C718-B2DE-605A-7FC01562B011}"/>
               </a:ext>
             </a:extLst>
           </p:cNvPr>
@@ -21617,8 +24113,8 @@
         </p:blipFill>
         <p:spPr>
           <a:xfrm>
-            <a:off x="401455" y="819973"/>
-            <a:ext cx="5731510" cy="1039495"/>
+            <a:off x="6096000" y="1202075"/>
+            <a:ext cx="5731510" cy="4756935"/>
           </a:xfrm>
           <a:prstGeom prst="rect">
             <a:avLst/>
@@ -21627,10 +24123,10 @@
       </p:pic>
       <p:pic>
         <p:nvPicPr>
-          <p:cNvPr id="23" name="Picture 22">
-            <a:extLst>
-              <a:ext uri="{FF2B5EF4-FFF2-40B4-BE49-F238E27FC236}">
-                <a16:creationId xmlns:a16="http://schemas.microsoft.com/office/drawing/2014/main" id="{E88C1C16-2550-BDA7-DFC7-634B3969F783}"/>
+          <p:cNvPr id="3" name="Picture 7">
+            <a:extLst>
+              <a:ext uri="{FF2B5EF4-FFF2-40B4-BE49-F238E27FC236}">
+                <a16:creationId xmlns:a16="http://schemas.microsoft.com/office/drawing/2014/main" id="{E1AFE9E2-F0F7-BB1E-93F9-F5155A7A9585}"/>
               </a:ext>
             </a:extLst>
           </p:cNvPr>
@@ -21647,108 +24143,138 @@
         </p:blipFill>
         <p:spPr>
           <a:xfrm>
-            <a:off x="401455" y="2247900"/>
-            <a:ext cx="5731510" cy="4108450"/>
+            <a:off x="225323" y="1202075"/>
+            <a:ext cx="5731510" cy="4756935"/>
           </a:xfrm>
           <a:prstGeom prst="rect">
             <a:avLst/>
           </a:prstGeom>
         </p:spPr>
       </p:pic>
-      <p:pic>
-        <p:nvPicPr>
-          <p:cNvPr id="26" name="Picture 25">
-            <a:extLst>
-              <a:ext uri="{FF2B5EF4-FFF2-40B4-BE49-F238E27FC236}">
-                <a16:creationId xmlns:a16="http://schemas.microsoft.com/office/drawing/2014/main" id="{479F9466-7CE1-3B66-F8C2-392F51B56D4E}"/>
-              </a:ext>
-            </a:extLst>
-          </p:cNvPr>
-          <p:cNvPicPr>
-            <a:picLocks noChangeAspect="1"/>
-          </p:cNvPicPr>
+      <p:sp>
+        <p:nvSpPr>
+          <p:cNvPr id="6" name="ZoneTexte 5">
+            <a:extLst>
+              <a:ext uri="{FF2B5EF4-FFF2-40B4-BE49-F238E27FC236}">
+                <a16:creationId xmlns:a16="http://schemas.microsoft.com/office/drawing/2014/main" id="{92341CA7-8345-D566-9EF1-CD19319FE8A1}"/>
+              </a:ext>
+            </a:extLst>
+          </p:cNvPr>
+          <p:cNvSpPr txBox="1"/>
           <p:nvPr/>
-        </p:nvPicPr>
-        <p:blipFill>
-          <a:blip r:embed="rId4"/>
-          <a:stretch>
-            <a:fillRect/>
-          </a:stretch>
-        </p:blipFill>
-        <p:spPr>
-          <a:xfrm>
-            <a:off x="6318219" y="819973"/>
-            <a:ext cx="5731510" cy="409575"/>
+        </p:nvSpPr>
+        <p:spPr>
+          <a:xfrm>
+            <a:off x="388901" y="714119"/>
+            <a:ext cx="4950284" cy="369332"/>
           </a:xfrm>
           <a:prstGeom prst="rect">
             <a:avLst/>
           </a:prstGeom>
-        </p:spPr>
-      </p:pic>
-      <p:pic>
-        <p:nvPicPr>
-          <p:cNvPr id="27" name="Picture 26">
-            <a:extLst>
-              <a:ext uri="{FF2B5EF4-FFF2-40B4-BE49-F238E27FC236}">
-                <a16:creationId xmlns:a16="http://schemas.microsoft.com/office/drawing/2014/main" id="{A17448CD-594B-E66D-B875-A51C481255C2}"/>
-              </a:ext>
-            </a:extLst>
-          </p:cNvPr>
-          <p:cNvPicPr>
-            <a:picLocks noChangeAspect="1"/>
-          </p:cNvPicPr>
+          <a:noFill/>
+        </p:spPr>
+        <p:txBody>
+          <a:bodyPr wrap="square">
+            <a:spAutoFit/>
+          </a:bodyPr>
+          <a:lstStyle/>
+          <a:p>
+            <a:pPr marL="342900" indent="-342900" algn="ctr">
+              <a:spcBef>
+                <a:spcPts val="300"/>
+              </a:spcBef>
+              <a:spcAft>
+                <a:spcPts val="300"/>
+              </a:spcAft>
+              <a:buFont typeface="+mj-lt"/>
+              <a:buAutoNum type="arabicPeriod" startAt="2"/>
+            </a:pPr>
+            <a:r>
+              <a:rPr lang="fr-HT" b="1" dirty="0">
+                <a:effectLst/>
+                <a:latin typeface="Arial" panose="020B0604020202020204" pitchFamily="34" charset="0"/>
+                <a:ea typeface="Arial" panose="020B0604020202020204" pitchFamily="34" charset="0"/>
+              </a:rPr>
+              <a:t> </a:t>
+            </a:r>
+            <a:r>
+              <a:rPr lang="fr-FR" sz="1600" dirty="0">
+                <a:latin typeface="Arial" panose="020B0604020202020204" pitchFamily="34" charset="0"/>
+                <a:cs typeface="Arial" panose="020B0604020202020204" pitchFamily="34" charset="0"/>
+              </a:rPr>
+              <a:t>Copie la clé publique sur le serveur</a:t>
+            </a:r>
+            <a:endParaRPr lang="en-US" dirty="0">
+              <a:latin typeface="Arial" panose="020B0604020202020204" pitchFamily="34" charset="0"/>
+              <a:cs typeface="Arial" panose="020B0604020202020204" pitchFamily="34" charset="0"/>
+            </a:endParaRPr>
+          </a:p>
+        </p:txBody>
+      </p:sp>
+      <p:sp>
+        <p:nvSpPr>
+          <p:cNvPr id="7" name="ZoneTexte 6">
+            <a:extLst>
+              <a:ext uri="{FF2B5EF4-FFF2-40B4-BE49-F238E27FC236}">
+                <a16:creationId xmlns:a16="http://schemas.microsoft.com/office/drawing/2014/main" id="{F442079D-75A3-0F12-C25C-3A11088CBE6B}"/>
+              </a:ext>
+            </a:extLst>
+          </p:cNvPr>
+          <p:cNvSpPr txBox="1"/>
           <p:nvPr/>
-        </p:nvPicPr>
-        <p:blipFill>
-          <a:blip r:embed="rId5"/>
-          <a:stretch>
-            <a:fillRect/>
-          </a:stretch>
-        </p:blipFill>
-        <p:spPr>
-          <a:xfrm>
-            <a:off x="6318219" y="1446920"/>
-            <a:ext cx="5731510" cy="579755"/>
+        </p:nvSpPr>
+        <p:spPr>
+          <a:xfrm>
+            <a:off x="6363128" y="744897"/>
+            <a:ext cx="4950284" cy="338554"/>
           </a:xfrm>
           <a:prstGeom prst="rect">
             <a:avLst/>
           </a:prstGeom>
-        </p:spPr>
-      </p:pic>
-      <p:pic>
-        <p:nvPicPr>
-          <p:cNvPr id="28" name="Picture 27">
-            <a:extLst>
-              <a:ext uri="{FF2B5EF4-FFF2-40B4-BE49-F238E27FC236}">
-                <a16:creationId xmlns:a16="http://schemas.microsoft.com/office/drawing/2014/main" id="{6E8F3B2F-6D34-ADF7-3467-F708AEBC8CBE}"/>
-              </a:ext>
-            </a:extLst>
-          </p:cNvPr>
-          <p:cNvPicPr>
-            <a:picLocks noChangeAspect="1"/>
-          </p:cNvPicPr>
-          <p:nvPr/>
-        </p:nvPicPr>
-        <p:blipFill>
-          <a:blip r:embed="rId6"/>
-          <a:stretch>
-            <a:fillRect/>
-          </a:stretch>
-        </p:blipFill>
-        <p:spPr>
-          <a:xfrm>
-            <a:off x="6318219" y="2252662"/>
-            <a:ext cx="5731510" cy="2352675"/>
-          </a:xfrm>
-          <a:prstGeom prst="rect">
-            <a:avLst/>
-          </a:prstGeom>
-        </p:spPr>
-      </p:pic>
+          <a:noFill/>
+        </p:spPr>
+        <p:txBody>
+          <a:bodyPr wrap="square">
+            <a:spAutoFit/>
+          </a:bodyPr>
+          <a:lstStyle/>
+          <a:p>
+            <a:pPr marL="342900" indent="-342900" algn="ctr">
+              <a:spcBef>
+                <a:spcPts val="300"/>
+              </a:spcBef>
+              <a:spcAft>
+                <a:spcPts val="300"/>
+              </a:spcAft>
+              <a:buFont typeface="+mj-lt"/>
+              <a:buAutoNum type="arabicPeriod" startAt="3"/>
+            </a:pPr>
+            <a:r>
+              <a:rPr lang="fr-FR" sz="1600" dirty="0">
+                <a:latin typeface="Arial" panose="020B0604020202020204" pitchFamily="34" charset="0"/>
+                <a:cs typeface="Arial" panose="020B0604020202020204" pitchFamily="34" charset="0"/>
+              </a:rPr>
+              <a:t>Teste la connexion par clé avant de continuer</a:t>
+            </a:r>
+            <a:r>
+              <a:rPr lang="fr-HT" sz="1600" dirty="0">
+                <a:effectLst/>
+                <a:latin typeface="Arial" panose="020B0604020202020204" pitchFamily="34" charset="0"/>
+                <a:ea typeface="Arial" panose="020B0604020202020204" pitchFamily="34" charset="0"/>
+              </a:rPr>
+              <a:t> </a:t>
+            </a:r>
+            <a:endParaRPr lang="en-US" sz="1600" dirty="0">
+              <a:latin typeface="Arial" panose="020B0604020202020204" pitchFamily="34" charset="0"/>
+              <a:cs typeface="Arial" panose="020B0604020202020204" pitchFamily="34" charset="0"/>
+            </a:endParaRPr>
+          </a:p>
+        </p:txBody>
+      </p:sp>
     </p:spTree>
     <p:extLst>
       <p:ext uri="{BB962C8B-B14F-4D97-AF65-F5344CB8AC3E}">
-        <p14:creationId xmlns:p14="http://schemas.microsoft.com/office/powerpoint/2010/main" val="2069393026"/>
+        <p14:creationId xmlns:p14="http://schemas.microsoft.com/office/powerpoint/2010/main" val="1738561688"/>
       </p:ext>
     </p:extLst>
   </p:cSld>
@@ -22550,6 +25076,15 @@
 </file>
 
 <file path=customXml/item1.xml><?xml version="1.0" encoding="utf-8"?>
+<?mso-contentType ?>
+<FormTemplates xmlns="http://schemas.microsoft.com/sharepoint/v3/contenttype/forms">
+  <Display>DocumentLibraryForm</Display>
+  <Edit>DocumentLibraryForm</Edit>
+  <New>DocumentLibraryForm</New>
+</FormTemplates>
+</file>
+
+<file path=customXml/item2.xml><?xml version="1.0" encoding="utf-8"?>
 <p:properties xmlns:p="http://schemas.microsoft.com/office/2006/metadata/properties" xmlns:xsi="http://www.w3.org/2001/XMLSchema-instance" xmlns:pc="http://schemas.microsoft.com/office/infopath/2007/PartnerControls">
   <documentManagement>
     <_ip_UnifiedCompliancePolicyUIAction xmlns="http://schemas.microsoft.com/sharepoint/v3" xsi:nil="true"/>
@@ -22567,15 +25102,6 @@
     <MediaServiceKeyPoints xmlns="71af3243-3dd4-4a8d-8c0d-dd76da1f02a5" xsi:nil="true"/>
   </documentManagement>
 </p:properties>
-</file>
-
-<file path=customXml/item2.xml><?xml version="1.0" encoding="utf-8"?>
-<?mso-contentType ?>
-<FormTemplates xmlns="http://schemas.microsoft.com/sharepoint/v3/contenttype/forms">
-  <Display>DocumentLibraryForm</Display>
-  <Edit>DocumentLibraryForm</Edit>
-  <New>DocumentLibraryForm</New>
-</FormTemplates>
 </file>
 
 <file path=customXml/item3.xml><?xml version="1.0" encoding="utf-8"?>
@@ -22885,6 +25411,14 @@
 </file>
 
 <file path=customXml/itemProps1.xml><?xml version="1.0" encoding="utf-8"?>
+<ds:datastoreItem xmlns:ds="http://schemas.openxmlformats.org/officeDocument/2006/customXml" ds:itemID="{6966C46A-DC57-4209-80CD-9FE6C93151FF}">
+  <ds:schemaRefs>
+    <ds:schemaRef ds:uri="http://schemas.microsoft.com/sharepoint/v3/contenttype/forms"/>
+  </ds:schemaRefs>
+</ds:datastoreItem>
+</file>
+
+<file path=customXml/itemProps2.xml><?xml version="1.0" encoding="utf-8"?>
 <ds:datastoreItem xmlns:ds="http://schemas.openxmlformats.org/officeDocument/2006/customXml" ds:itemID="{BEFFFA3F-0FB5-4ED3-8906-A15B16577F44}">
   <ds:schemaRefs>
     <ds:schemaRef ds:uri="http://schemas.microsoft.com/office/2006/metadata/properties"/>
@@ -22892,14 +25426,6 @@
     <ds:schemaRef ds:uri="http://schemas.microsoft.com/sharepoint/v3"/>
     <ds:schemaRef ds:uri="71af3243-3dd4-4a8d-8c0d-dd76da1f02a5"/>
     <ds:schemaRef ds:uri="230e9df3-be65-4c73-a93b-d1236ebd677e"/>
-  </ds:schemaRefs>
-</ds:datastoreItem>
-</file>
-
-<file path=customXml/itemProps2.xml><?xml version="1.0" encoding="utf-8"?>
-<ds:datastoreItem xmlns:ds="http://schemas.openxmlformats.org/officeDocument/2006/customXml" ds:itemID="{6966C46A-DC57-4209-80CD-9FE6C93151FF}">
-  <ds:schemaRefs>
-    <ds:schemaRef ds:uri="http://schemas.microsoft.com/sharepoint/v3/contenttype/forms"/>
   </ds:schemaRefs>
 </ds:datastoreItem>
 </file>

--- a/Présentation-ASI.pptx
+++ b/Présentation-ASI.pptx
@@ -5,10 +5,10 @@
     <p:sldMasterId id="2147483666" r:id="rId4"/>
   </p:sldMasterIdLst>
   <p:notesMasterIdLst>
-    <p:notesMasterId r:id="rId25"/>
+    <p:notesMasterId r:id="rId24"/>
   </p:notesMasterIdLst>
   <p:handoutMasterIdLst>
-    <p:handoutMasterId r:id="rId26"/>
+    <p:handoutMasterId r:id="rId25"/>
   </p:handoutMasterIdLst>
   <p:sldIdLst>
     <p:sldId id="256" r:id="rId5"/>
@@ -27,20 +27,19 @@
     <p:sldId id="298" r:id="rId18"/>
     <p:sldId id="268" r:id="rId19"/>
     <p:sldId id="299" r:id="rId20"/>
-    <p:sldId id="270" r:id="rId21"/>
-    <p:sldId id="282" r:id="rId22"/>
-    <p:sldId id="300" r:id="rId23"/>
-    <p:sldId id="276" r:id="rId24"/>
+    <p:sldId id="282" r:id="rId21"/>
+    <p:sldId id="300" r:id="rId22"/>
+    <p:sldId id="276" r:id="rId23"/>
   </p:sldIdLst>
   <p:sldSz cx="12192000" cy="6858000"/>
   <p:notesSz cx="6858000" cy="9144000"/>
   <p:embeddedFontLst>
     <p:embeddedFont>
       <p:font typeface="Tenorite" panose="00000500000000000000" pitchFamily="2" charset="0"/>
-      <p:regular r:id="rId27"/>
-      <p:bold r:id="rId28"/>
-      <p:italic r:id="rId29"/>
-      <p:boldItalic r:id="rId30"/>
+      <p:regular r:id="rId26"/>
+      <p:bold r:id="rId27"/>
+      <p:italic r:id="rId28"/>
+      <p:boldItalic r:id="rId29"/>
     </p:embeddedFont>
   </p:embeddedFontLst>
   <p:defaultTextStyle>
@@ -352,7 +351,7 @@
           <a:p>
             <a:fld id="{4BF9A36D-7FAC-478F-9944-F324014F6FD1}" type="slidenum">
               <a:rPr lang="en-US" smtClean="0"/>
-              <a:t>‹N°›</a:t>
+              <a:t>‹#›</a:t>
             </a:fld>
             <a:endParaRPr lang="en-US" dirty="0"/>
           </a:p>
@@ -609,7 +608,7 @@
           <a:p>
             <a:fld id="{D4B9A9E5-4F7F-4A7D-9DE1-899232329269}" type="slidenum">
               <a:rPr lang="en-US" smtClean="0"/>
-              <a:t>‹N°›</a:t>
+              <a:t>‹#›</a:t>
             </a:fld>
             <a:endParaRPr lang="en-US" dirty="0"/>
           </a:p>
@@ -718,6 +717,90 @@
 </p:notesMaster>
 </file>
 
+<file path=ppt/notesSlides/notesSlide1.xml><?xml version="1.0" encoding="utf-8"?>
+<p:notes xmlns:a="http://schemas.openxmlformats.org/drawingml/2006/main" xmlns:r="http://schemas.openxmlformats.org/officeDocument/2006/relationships" xmlns:p="http://schemas.openxmlformats.org/presentationml/2006/main">
+  <p:cSld>
+    <p:spTree>
+      <p:nvGrpSpPr>
+        <p:cNvPr id="1" name=""/>
+        <p:cNvGrpSpPr/>
+        <p:nvPr/>
+      </p:nvGrpSpPr>
+      <p:grpSpPr>
+        <a:xfrm>
+          <a:off x="0" y="0"/>
+          <a:ext cx="0" cy="0"/>
+          <a:chOff x="0" y="0"/>
+          <a:chExt cx="0" cy="0"/>
+        </a:xfrm>
+      </p:grpSpPr>
+      <p:sp>
+        <p:nvSpPr>
+          <p:cNvPr id="2" name="Slide Image Placeholder 1"/>
+          <p:cNvSpPr>
+            <a:spLocks noGrp="1" noRot="1" noChangeAspect="1"/>
+          </p:cNvSpPr>
+          <p:nvPr>
+            <p:ph type="sldImg"/>
+          </p:nvPr>
+        </p:nvSpPr>
+        <p:spPr/>
+      </p:sp>
+      <p:sp>
+        <p:nvSpPr>
+          <p:cNvPr id="3" name="Notes Placeholder 2"/>
+          <p:cNvSpPr>
+            <a:spLocks noGrp="1"/>
+          </p:cNvSpPr>
+          <p:nvPr>
+            <p:ph type="body" idx="1"/>
+          </p:nvPr>
+        </p:nvSpPr>
+        <p:spPr/>
+        <p:txBody>
+          <a:bodyPr/>
+          <a:lstStyle/>
+          <a:p>
+            <a:endParaRPr lang="fr-FR" dirty="0"/>
+          </a:p>
+        </p:txBody>
+      </p:sp>
+      <p:sp>
+        <p:nvSpPr>
+          <p:cNvPr id="4" name="Slide Number Placeholder 3"/>
+          <p:cNvSpPr>
+            <a:spLocks noGrp="1"/>
+          </p:cNvSpPr>
+          <p:nvPr>
+            <p:ph type="sldNum" sz="quarter" idx="5"/>
+          </p:nvPr>
+        </p:nvSpPr>
+        <p:spPr/>
+        <p:txBody>
+          <a:bodyPr/>
+          <a:lstStyle/>
+          <a:p>
+            <a:fld id="{D4B9A9E5-4F7F-4A7D-9DE1-899232329269}" type="slidenum">
+              <a:rPr lang="en-US" smtClean="0"/>
+              <a:t>18</a:t>
+            </a:fld>
+            <a:endParaRPr lang="en-US" dirty="0"/>
+          </a:p>
+        </p:txBody>
+      </p:sp>
+    </p:spTree>
+    <p:extLst>
+      <p:ext uri="{BB962C8B-B14F-4D97-AF65-F5344CB8AC3E}">
+        <p14:creationId xmlns:p14="http://schemas.microsoft.com/office/powerpoint/2010/main" val="954325913"/>
+      </p:ext>
+    </p:extLst>
+  </p:cSld>
+  <p:clrMapOvr>
+    <a:masterClrMapping/>
+  </p:clrMapOvr>
+</p:notes>
+</file>
+
 <file path=ppt/slideLayouts/slideLayout1.xml><?xml version="1.0" encoding="utf-8"?>
 <p:sldLayout xmlns:a="http://schemas.openxmlformats.org/drawingml/2006/main" xmlns:r="http://schemas.openxmlformats.org/officeDocument/2006/relationships" xmlns:p="http://schemas.openxmlformats.org/presentationml/2006/main" type="title" preserve="1">
   <p:cSld name="Title Slide">
@@ -2030,7 +2113,7 @@
           <a:p>
             <a:fld id="{B5CEABB6-07DC-46E8-9B57-56EC44A396E5}" type="slidenum">
               <a:rPr lang="en-US" smtClean="0"/>
-              <a:t>‹N°›</a:t>
+              <a:t>‹#›</a:t>
             </a:fld>
             <a:endParaRPr lang="en-US" dirty="0"/>
           </a:p>
@@ -2659,7 +2742,7 @@
           <a:p>
             <a:fld id="{B5CEABB6-07DC-46E8-9B57-56EC44A396E5}" type="slidenum">
               <a:rPr lang="en-US" smtClean="0"/>
-              <a:t>‹N°›</a:t>
+              <a:t>‹#›</a:t>
             </a:fld>
             <a:endParaRPr lang="en-US" dirty="0"/>
           </a:p>
@@ -3275,7 +3358,7 @@
           <a:p>
             <a:fld id="{B5CEABB6-07DC-46E8-9B57-56EC44A396E5}" type="slidenum">
               <a:rPr lang="en-US" smtClean="0"/>
-              <a:t>‹N°›</a:t>
+              <a:t>‹#›</a:t>
             </a:fld>
             <a:endParaRPr lang="en-US" dirty="0"/>
           </a:p>
@@ -3720,7 +3803,7 @@
           <a:p>
             <a:fld id="{B5CEABB6-07DC-46E8-9B57-56EC44A396E5}" type="slidenum">
               <a:rPr lang="en-US" smtClean="0"/>
-              <a:t>‹N°›</a:t>
+              <a:t>‹#›</a:t>
             </a:fld>
             <a:endParaRPr lang="en-US" dirty="0"/>
           </a:p>
@@ -5269,7 +5352,7 @@
           <a:p>
             <a:fld id="{B5CEABB6-07DC-46E8-9B57-56EC44A396E5}" type="slidenum">
               <a:rPr lang="en-US" noProof="0" smtClean="0"/>
-              <a:t>‹N°›</a:t>
+              <a:t>‹#›</a:t>
             </a:fld>
             <a:endParaRPr lang="en-US" noProof="0" dirty="0"/>
           </a:p>
@@ -5535,7 +5618,7 @@
           <a:p>
             <a:fld id="{B5CEABB6-07DC-46E8-9B57-56EC44A396E5}" type="slidenum">
               <a:rPr lang="en-US" smtClean="0"/>
-              <a:t>‹N°›</a:t>
+              <a:t>‹#›</a:t>
             </a:fld>
             <a:endParaRPr lang="en-US" dirty="0"/>
           </a:p>
@@ -6671,7 +6754,7 @@
           <a:p>
             <a:fld id="{B5CEABB6-07DC-46E8-9B57-56EC44A396E5}" type="slidenum">
               <a:rPr lang="en-US" smtClean="0"/>
-              <a:t>‹N°›</a:t>
+              <a:t>‹#›</a:t>
             </a:fld>
             <a:endParaRPr lang="en-US" dirty="0"/>
           </a:p>
@@ -8756,7 +8839,7 @@
           <a:p>
             <a:fld id="{B5CEABB6-07DC-46E8-9B57-56EC44A396E5}" type="slidenum">
               <a:rPr lang="en-US" smtClean="0"/>
-              <a:t>‹N°›</a:t>
+              <a:t>‹#›</a:t>
             </a:fld>
             <a:endParaRPr lang="en-US" dirty="0"/>
           </a:p>
@@ -10331,7 +10414,7 @@
           <a:p>
             <a:fld id="{B5CEABB6-07DC-46E8-9B57-56EC44A396E5}" type="slidenum">
               <a:rPr lang="en-US" smtClean="0"/>
-              <a:t>‹N°›</a:t>
+              <a:t>‹#›</a:t>
             </a:fld>
             <a:endParaRPr lang="en-US" dirty="0"/>
           </a:p>
@@ -10743,7 +10826,7 @@
           <a:p>
             <a:fld id="{B5CEABB6-07DC-46E8-9B57-56EC44A396E5}" type="slidenum">
               <a:rPr lang="en-US" smtClean="0"/>
-              <a:t>‹N°›</a:t>
+              <a:t>‹#›</a:t>
             </a:fld>
             <a:endParaRPr lang="en-US" dirty="0"/>
           </a:p>
@@ -11135,7 +11218,7 @@
           <a:p>
             <a:fld id="{B5CEABB6-07DC-46E8-9B57-56EC44A396E5}" type="slidenum">
               <a:rPr lang="en-US" smtClean="0"/>
-              <a:t>‹N°›</a:t>
+              <a:t>‹#›</a:t>
             </a:fld>
             <a:endParaRPr lang="en-US" dirty="0"/>
           </a:p>
@@ -11449,7 +11532,7 @@
           <a:p>
             <a:fld id="{B5CEABB6-07DC-46E8-9B57-56EC44A396E5}" type="slidenum">
               <a:rPr lang="en-US" smtClean="0"/>
-              <a:t>‹N°›</a:t>
+              <a:t>‹#›</a:t>
             </a:fld>
             <a:endParaRPr lang="en-US" dirty="0"/>
           </a:p>
@@ -12310,7 +12393,7 @@
           <a:p>
             <a:fld id="{B5CEABB6-07DC-46E8-9B57-56EC44A396E5}" type="slidenum">
               <a:rPr lang="en-US" smtClean="0"/>
-              <a:t>‹N°›</a:t>
+              <a:t>‹#›</a:t>
             </a:fld>
             <a:endParaRPr lang="en-US" dirty="0"/>
           </a:p>
@@ -12921,7 +13004,7 @@
           <a:p>
             <a:fld id="{B5CEABB6-07DC-46E8-9B57-56EC44A396E5}" type="slidenum">
               <a:rPr lang="en-US" smtClean="0"/>
-              <a:t>‹N°›</a:t>
+              <a:t>‹#›</a:t>
             </a:fld>
             <a:endParaRPr lang="en-US" dirty="0"/>
           </a:p>
@@ -13693,7 +13776,7 @@
             <a:fld id="{B5CEABB6-07DC-46E8-9B57-56EC44A396E5}" type="slidenum">
               <a:rPr lang="en-US" smtClean="0"/>
               <a:pPr/>
-              <a:t>‹N°›</a:t>
+              <a:t>‹#›</a:t>
             </a:fld>
             <a:endParaRPr lang="en-US" dirty="0"/>
           </a:p>
@@ -14147,7 +14230,7 @@
           <a:p>
             <a:fld id="{B5CEABB6-07DC-46E8-9B57-56EC44A396E5}" type="slidenum">
               <a:rPr lang="en-US" smtClean="0"/>
-              <a:t>‹N°›</a:t>
+              <a:t>‹#›</a:t>
             </a:fld>
             <a:endParaRPr lang="en-US" dirty="0"/>
           </a:p>
@@ -14847,7 +14930,7 @@
             <a:fld id="{B5CEABB6-07DC-46E8-9B57-56EC44A396E5}" type="slidenum">
               <a:rPr lang="en-US" smtClean="0"/>
               <a:pPr/>
-              <a:t>‹N°›</a:t>
+              <a:t>‹#›</a:t>
             </a:fld>
             <a:endParaRPr lang="en-US" dirty="0"/>
           </a:p>
@@ -15691,7 +15774,7 @@
           <a:p>
             <a:fld id="{B5CEABB6-07DC-46E8-9B57-56EC44A396E5}" type="slidenum">
               <a:rPr lang="en-US" smtClean="0"/>
-              <a:t>‹N°›</a:t>
+              <a:t>‹#›</a:t>
             </a:fld>
             <a:endParaRPr lang="en-US" dirty="0"/>
           </a:p>
@@ -16068,7 +16151,7 @@
             <a:fld id="{B5CEABB6-07DC-46E8-9B57-56EC44A396E5}" type="slidenum">
               <a:rPr lang="en-US" smtClean="0"/>
               <a:pPr/>
-              <a:t>‹N°›</a:t>
+              <a:t>‹#›</a:t>
             </a:fld>
             <a:endParaRPr lang="en-US" dirty="0"/>
           </a:p>
@@ -20760,71 +20843,6 @@
       </p:grpSpPr>
       <p:sp>
         <p:nvSpPr>
-          <p:cNvPr id="6" name="Slide Number Placeholder 5">
-            <a:extLst>
-              <a:ext uri="{FF2B5EF4-FFF2-40B4-BE49-F238E27FC236}">
-                <a16:creationId xmlns:a16="http://schemas.microsoft.com/office/drawing/2014/main" id="{BA32F697-D1D4-4B0A-B960-D1869BF8607A}"/>
-              </a:ext>
-            </a:extLst>
-          </p:cNvPr>
-          <p:cNvSpPr>
-            <a:spLocks noGrp="1"/>
-          </p:cNvSpPr>
-          <p:nvPr>
-            <p:ph type="sldNum" sz="quarter" idx="12"/>
-          </p:nvPr>
-        </p:nvSpPr>
-        <p:spPr>
-          <a:xfrm>
-            <a:off x="8610600" y="6356350"/>
-            <a:ext cx="2743200" cy="365125"/>
-          </a:xfrm>
-        </p:spPr>
-        <p:txBody>
-          <a:bodyPr/>
-          <a:lstStyle/>
-          <a:p>
-            <a:fld id="{B5CEABB6-07DC-46E8-9B57-56EC44A396E5}" type="slidenum">
-              <a:rPr lang="en-US" smtClean="0"/>
-              <a:pPr/>
-              <a:t>17</a:t>
-            </a:fld>
-            <a:endParaRPr lang="en-US" dirty="0"/>
-          </a:p>
-        </p:txBody>
-      </p:sp>
-    </p:spTree>
-    <p:extLst>
-      <p:ext uri="{BB962C8B-B14F-4D97-AF65-F5344CB8AC3E}">
-        <p14:creationId xmlns:p14="http://schemas.microsoft.com/office/powerpoint/2010/main" val="1472106130"/>
-      </p:ext>
-    </p:extLst>
-  </p:cSld>
-  <p:clrMapOvr>
-    <a:masterClrMapping/>
-  </p:clrMapOvr>
-</p:sld>
-</file>
-
-<file path=ppt/slides/slide18.xml><?xml version="1.0" encoding="utf-8"?>
-<p:sld xmlns:a="http://schemas.openxmlformats.org/drawingml/2006/main" xmlns:r="http://schemas.openxmlformats.org/officeDocument/2006/relationships" xmlns:p="http://schemas.openxmlformats.org/presentationml/2006/main">
-  <p:cSld>
-    <p:spTree>
-      <p:nvGrpSpPr>
-        <p:cNvPr id="1" name=""/>
-        <p:cNvGrpSpPr/>
-        <p:nvPr/>
-      </p:nvGrpSpPr>
-      <p:grpSpPr>
-        <a:xfrm>
-          <a:off x="0" y="0"/>
-          <a:ext cx="0" cy="0"/>
-          <a:chOff x="0" y="0"/>
-          <a:chExt cx="0" cy="0"/>
-        </a:xfrm>
-      </p:grpSpPr>
-      <p:sp>
-        <p:nvSpPr>
           <p:cNvPr id="41" name="Title 1">
             <a:extLst>
               <a:ext uri="{FF2B5EF4-FFF2-40B4-BE49-F238E27FC236}">
@@ -20878,7 +20896,7 @@
 </p:sld>
 </file>
 
-<file path=ppt/slides/slide19.xml><?xml version="1.0" encoding="utf-8"?>
+<file path=ppt/slides/slide18.xml><?xml version="1.0" encoding="utf-8"?>
 <p:sld xmlns:a="http://schemas.openxmlformats.org/drawingml/2006/main" xmlns:r="http://schemas.openxmlformats.org/officeDocument/2006/relationships" xmlns:p="http://schemas.openxmlformats.org/presentationml/2006/main">
   <p:cSld>
     <p:spTree>
@@ -20928,117 +20946,33 @@
           <a:lstStyle/>
           <a:p>
             <a:r>
+              <a:rPr lang="en-US" dirty="0" err="1">
+                <a:latin typeface="Arial" panose="020B0604020202020204" pitchFamily="34" charset="0"/>
+                <a:cs typeface="Arial" panose="020B0604020202020204" pitchFamily="34" charset="0"/>
+              </a:rPr>
+              <a:t>Rencontrez</a:t>
+            </a:r>
+            <a:r>
               <a:rPr lang="en-US" dirty="0">
                 <a:latin typeface="Arial" panose="020B0604020202020204" pitchFamily="34" charset="0"/>
                 <a:cs typeface="Arial" panose="020B0604020202020204" pitchFamily="34" charset="0"/>
               </a:rPr>
-              <a:t>MEET THE TEAM</a:t>
-            </a:r>
-          </a:p>
-        </p:txBody>
-      </p:sp>
-      <p:pic>
-        <p:nvPicPr>
-          <p:cNvPr id="47" name="Picture Placeholder 46" descr="Team member headshot">
-            <a:extLst>
-              <a:ext uri="{FF2B5EF4-FFF2-40B4-BE49-F238E27FC236}">
-                <a16:creationId xmlns:a16="http://schemas.microsoft.com/office/drawing/2014/main" id="{A0762C25-BF79-2122-CE5B-442E592FC2D6}"/>
-              </a:ext>
-            </a:extLst>
-          </p:cNvPr>
-          <p:cNvPicPr>
-            <a:picLocks noGrp="1" noChangeAspect="1"/>
-          </p:cNvPicPr>
-          <p:nvPr>
-            <p:ph type="pic" sz="quarter" idx="15"/>
-          </p:nvPr>
-        </p:nvPicPr>
-        <p:blipFill rotWithShape="1">
-          <a:blip r:embed="rId2">
-            <a:extLst>
-              <a:ext uri="{28A0092B-C50C-407E-A947-70E740481C1C}">
-                <a14:useLocalDpi xmlns:a14="http://schemas.microsoft.com/office/drawing/2010/main" val="0"/>
-              </a:ext>
-            </a:extLst>
-          </a:blip>
-          <a:srcRect/>
-          <a:stretch/>
-        </p:blipFill>
-        <p:spPr>
-          <a:xfrm>
-            <a:off x="3836914" y="2886074"/>
-            <a:ext cx="1845511" cy="1845511"/>
-          </a:xfrm>
-        </p:spPr>
-      </p:pic>
-      <p:pic>
-        <p:nvPicPr>
-          <p:cNvPr id="45" name="Picture Placeholder 44" descr="Team member headshot">
-            <a:extLst>
-              <a:ext uri="{FF2B5EF4-FFF2-40B4-BE49-F238E27FC236}">
-                <a16:creationId xmlns:a16="http://schemas.microsoft.com/office/drawing/2014/main" id="{787D0F63-6DF4-F133-FEFE-1E6C83C248EA}"/>
-              </a:ext>
-            </a:extLst>
-          </p:cNvPr>
-          <p:cNvPicPr>
-            <a:picLocks noGrp="1" noChangeAspect="1"/>
-          </p:cNvPicPr>
-          <p:nvPr>
-            <p:ph type="pic" sz="quarter" idx="16"/>
-          </p:nvPr>
-        </p:nvPicPr>
-        <p:blipFill rotWithShape="1">
-          <a:blip r:embed="rId3">
-            <a:extLst>
-              <a:ext uri="{28A0092B-C50C-407E-A947-70E740481C1C}">
-                <a14:useLocalDpi xmlns:a14="http://schemas.microsoft.com/office/drawing/2010/main" val="0"/>
-              </a:ext>
-            </a:extLst>
-          </a:blip>
-          <a:srcRect/>
-          <a:stretch/>
-        </p:blipFill>
-        <p:spPr>
-          <a:xfrm>
-            <a:off x="6327578" y="2886074"/>
-            <a:ext cx="1845511" cy="1845511"/>
-          </a:xfrm>
-        </p:spPr>
-      </p:pic>
-      <p:pic>
-        <p:nvPicPr>
-          <p:cNvPr id="43" name="Picture Placeholder 42" descr="Team member headshot">
-            <a:extLst>
-              <a:ext uri="{FF2B5EF4-FFF2-40B4-BE49-F238E27FC236}">
-                <a16:creationId xmlns:a16="http://schemas.microsoft.com/office/drawing/2014/main" id="{744BEB21-D18E-BDC8-D982-470C289FFFC7}"/>
-              </a:ext>
-            </a:extLst>
-          </p:cNvPr>
-          <p:cNvPicPr>
-            <a:picLocks noGrp="1" noChangeAspect="1"/>
-          </p:cNvPicPr>
-          <p:nvPr>
-            <p:ph type="pic" sz="quarter" idx="17"/>
-          </p:nvPr>
-        </p:nvPicPr>
-        <p:blipFill rotWithShape="1">
-          <a:blip r:embed="rId4">
-            <a:extLst>
-              <a:ext uri="{28A0092B-C50C-407E-A947-70E740481C1C}">
-                <a14:useLocalDpi xmlns:a14="http://schemas.microsoft.com/office/drawing/2010/main" val="0"/>
-              </a:ext>
-            </a:extLst>
-          </a:blip>
-          <a:srcRect/>
-          <a:stretch/>
-        </p:blipFill>
-        <p:spPr>
-          <a:xfrm>
-            <a:off x="8747458" y="2886074"/>
-            <a:ext cx="1845511" cy="1845511"/>
-          </a:xfrm>
-        </p:spPr>
-      </p:pic>
+              <a:t> </a:t>
+            </a:r>
+            <a:r>
+              <a:rPr lang="en-US" dirty="0" err="1">
+                <a:latin typeface="Arial" panose="020B0604020202020204" pitchFamily="34" charset="0"/>
+                <a:cs typeface="Arial" panose="020B0604020202020204" pitchFamily="34" charset="0"/>
+              </a:rPr>
+              <a:t>l’equipe</a:t>
+            </a:r>
+            <a:endParaRPr lang="en-US" dirty="0">
+              <a:latin typeface="Arial" panose="020B0604020202020204" pitchFamily="34" charset="0"/>
+              <a:cs typeface="Arial" panose="020B0604020202020204" pitchFamily="34" charset="0"/>
+            </a:endParaRPr>
+          </a:p>
+        </p:txBody>
+      </p:sp>
       <p:sp>
         <p:nvSpPr>
           <p:cNvPr id="24" name="Text Placeholder 23">
@@ -21100,7 +21034,7 @@
         </p:nvSpPr>
         <p:spPr>
           <a:xfrm>
-            <a:off x="3692980" y="5099206"/>
+            <a:off x="4903769" y="5052112"/>
             <a:ext cx="2135755" cy="343061"/>
           </a:xfrm>
         </p:spPr>
@@ -21113,67 +21047,45 @@
                 <a:latin typeface="Arial" panose="020B0604020202020204" pitchFamily="34" charset="0"/>
                 <a:cs typeface="Arial" panose="020B0604020202020204" pitchFamily="34" charset="0"/>
               </a:rPr>
-              <a:t>MIRJAM NILSSON​</a:t>
-            </a:r>
-          </a:p>
-        </p:txBody>
-      </p:sp>
-      <p:sp>
-        <p:nvSpPr>
-          <p:cNvPr id="34" name="Text Placeholder 33">
-            <a:extLst>
-              <a:ext uri="{FF2B5EF4-FFF2-40B4-BE49-F238E27FC236}">
-                <a16:creationId xmlns:a16="http://schemas.microsoft.com/office/drawing/2014/main" id="{8553090E-D3CE-191B-F7A5-6C8FA99F9924}"/>
-              </a:ext>
-            </a:extLst>
-          </p:cNvPr>
-          <p:cNvSpPr>
-            <a:spLocks noGrp="1"/>
-          </p:cNvSpPr>
-          <p:nvPr>
-            <p:ph type="body" idx="19"/>
-          </p:nvPr>
-        </p:nvSpPr>
-        <p:spPr>
-          <a:xfrm>
-            <a:off x="6183644" y="5099206"/>
-            <a:ext cx="2123743" cy="343061"/>
-          </a:xfrm>
-        </p:spPr>
-        <p:txBody>
-          <a:bodyPr/>
-          <a:lstStyle/>
-          <a:p>
+              <a:t>Christy </a:t>
+            </a:r>
+            <a:r>
+              <a:rPr lang="en-US" dirty="0" err="1">
+                <a:latin typeface="Arial" panose="020B0604020202020204" pitchFamily="34" charset="0"/>
+                <a:cs typeface="Arial" panose="020B0604020202020204" pitchFamily="34" charset="0"/>
+              </a:rPr>
+              <a:t>Gérys</a:t>
+            </a:r>
             <a:r>
               <a:rPr lang="en-US" dirty="0">
                 <a:latin typeface="Arial" panose="020B0604020202020204" pitchFamily="34" charset="0"/>
                 <a:cs typeface="Arial" panose="020B0604020202020204" pitchFamily="34" charset="0"/>
               </a:rPr>
-              <a:t>FLORA BERGGREN​</a:t>
-            </a:r>
-          </a:p>
-        </p:txBody>
-      </p:sp>
-      <p:sp>
-        <p:nvSpPr>
-          <p:cNvPr id="35" name="Text Placeholder 34">
-            <a:extLst>
-              <a:ext uri="{FF2B5EF4-FFF2-40B4-BE49-F238E27FC236}">
-                <a16:creationId xmlns:a16="http://schemas.microsoft.com/office/drawing/2014/main" id="{77D54B5D-0BE0-86F8-2746-77BD3D7FE978}"/>
-              </a:ext>
-            </a:extLst>
-          </p:cNvPr>
-          <p:cNvSpPr>
-            <a:spLocks noGrp="1"/>
-          </p:cNvSpPr>
-          <p:nvPr>
-            <p:ph type="body" idx="20"/>
-          </p:nvPr>
-        </p:nvSpPr>
-        <p:spPr>
-          <a:xfrm>
-            <a:off x="8603525" y="5084524"/>
-            <a:ext cx="2123742" cy="343061"/>
+              <a:t> LAMBERT</a:t>
+            </a:r>
+          </a:p>
+        </p:txBody>
+      </p:sp>
+      <p:sp>
+        <p:nvSpPr>
+          <p:cNvPr id="34" name="Text Placeholder 33">
+            <a:extLst>
+              <a:ext uri="{FF2B5EF4-FFF2-40B4-BE49-F238E27FC236}">
+                <a16:creationId xmlns:a16="http://schemas.microsoft.com/office/drawing/2014/main" id="{8553090E-D3CE-191B-F7A5-6C8FA99F9924}"/>
+              </a:ext>
+            </a:extLst>
+          </p:cNvPr>
+          <p:cNvSpPr>
+            <a:spLocks noGrp="1"/>
+          </p:cNvSpPr>
+          <p:nvPr>
+            <p:ph type="body" idx="19"/>
+          </p:nvPr>
+        </p:nvSpPr>
+        <p:spPr>
+          <a:xfrm>
+            <a:off x="8461333" y="4912993"/>
+            <a:ext cx="2123743" cy="343061"/>
           </a:xfrm>
         </p:spPr>
         <p:txBody>
@@ -21185,7 +21097,7 @@
                 <a:latin typeface="Arial" panose="020B0604020202020204" pitchFamily="34" charset="0"/>
                 <a:cs typeface="Arial" panose="020B0604020202020204" pitchFamily="34" charset="0"/>
               </a:rPr>
-              <a:t>RAJESH SANTOSHI​</a:t>
+              <a:t>Lens Sandro PETIOTE​</a:t>
             </a:r>
           </a:p>
         </p:txBody>
@@ -21251,7 +21163,7 @@
         </p:nvSpPr>
         <p:spPr>
           <a:xfrm>
-            <a:off x="3836913" y="5478796"/>
+            <a:off x="5041139" y="5464114"/>
             <a:ext cx="1855949" cy="343061"/>
           </a:xfrm>
         </p:spPr>
@@ -21259,90 +21171,90 @@
           <a:bodyPr/>
           <a:lstStyle/>
           <a:p>
+            <a:r>
+              <a:rPr lang="en-US" dirty="0" err="1">
+                <a:latin typeface="Arial" panose="020B0604020202020204" pitchFamily="34" charset="0"/>
+                <a:cs typeface="Arial" panose="020B0604020202020204" pitchFamily="34" charset="0"/>
+              </a:rPr>
+              <a:t>Etudiant</a:t>
+            </a:r>
             <a:r>
               <a:rPr lang="en-US" dirty="0">
                 <a:latin typeface="Arial" panose="020B0604020202020204" pitchFamily="34" charset="0"/>
                 <a:cs typeface="Arial" panose="020B0604020202020204" pitchFamily="34" charset="0"/>
               </a:rPr>
-              <a:t>Chief Executive Officer</a:t>
-            </a:r>
-          </a:p>
-        </p:txBody>
-      </p:sp>
-      <p:sp>
-        <p:nvSpPr>
-          <p:cNvPr id="38" name="Text Placeholder 37">
-            <a:extLst>
-              <a:ext uri="{FF2B5EF4-FFF2-40B4-BE49-F238E27FC236}">
-                <a16:creationId xmlns:a16="http://schemas.microsoft.com/office/drawing/2014/main" id="{D7D418C7-B549-AD36-B29C-DBB301DBA957}"/>
-              </a:ext>
-            </a:extLst>
-          </p:cNvPr>
-          <p:cNvSpPr>
-            <a:spLocks noGrp="1"/>
-          </p:cNvSpPr>
-          <p:nvPr>
-            <p:ph type="body" idx="23"/>
-          </p:nvPr>
-        </p:nvSpPr>
-        <p:spPr>
-          <a:xfrm>
-            <a:off x="6327577" y="5478796"/>
-            <a:ext cx="1845511" cy="343061"/>
-          </a:xfrm>
-        </p:spPr>
-        <p:txBody>
-          <a:bodyPr/>
-          <a:lstStyle/>
-          <a:p>
+              <a:t> </a:t>
+            </a:r>
+            <a:r>
+              <a:rPr lang="en-US" dirty="0" err="1">
+                <a:latin typeface="Arial" panose="020B0604020202020204" pitchFamily="34" charset="0"/>
+                <a:cs typeface="Arial" panose="020B0604020202020204" pitchFamily="34" charset="0"/>
+              </a:rPr>
+              <a:t>en</a:t>
+            </a:r>
             <a:r>
               <a:rPr lang="en-US" dirty="0">
                 <a:latin typeface="Arial" panose="020B0604020202020204" pitchFamily="34" charset="0"/>
                 <a:cs typeface="Arial" panose="020B0604020202020204" pitchFamily="34" charset="0"/>
               </a:rPr>
-              <a:t>Chief Operations Officer</a:t>
-            </a:r>
-          </a:p>
-          <a:p>
-            <a:endParaRPr lang="en-US" dirty="0">
-              <a:latin typeface="Arial" panose="020B0604020202020204" pitchFamily="34" charset="0"/>
-              <a:cs typeface="Arial" panose="020B0604020202020204" pitchFamily="34" charset="0"/>
-            </a:endParaRPr>
-          </a:p>
-        </p:txBody>
-      </p:sp>
-      <p:sp>
-        <p:nvSpPr>
-          <p:cNvPr id="39" name="Text Placeholder 38">
-            <a:extLst>
-              <a:ext uri="{FF2B5EF4-FFF2-40B4-BE49-F238E27FC236}">
-                <a16:creationId xmlns:a16="http://schemas.microsoft.com/office/drawing/2014/main" id="{23797BDC-F6A0-C1D1-59F4-CD0C40575F9C}"/>
-              </a:ext>
-            </a:extLst>
-          </p:cNvPr>
-          <p:cNvSpPr>
-            <a:spLocks noGrp="1"/>
-          </p:cNvSpPr>
-          <p:nvPr>
-            <p:ph type="body" idx="24"/>
-          </p:nvPr>
-        </p:nvSpPr>
-        <p:spPr>
-          <a:xfrm>
-            <a:off x="8747458" y="5464114"/>
-            <a:ext cx="1845510" cy="343061"/>
+              <a:t> L3</a:t>
+            </a:r>
+          </a:p>
+        </p:txBody>
+      </p:sp>
+      <p:sp>
+        <p:nvSpPr>
+          <p:cNvPr id="38" name="Text Placeholder 37">
+            <a:extLst>
+              <a:ext uri="{FF2B5EF4-FFF2-40B4-BE49-F238E27FC236}">
+                <a16:creationId xmlns:a16="http://schemas.microsoft.com/office/drawing/2014/main" id="{D7D418C7-B549-AD36-B29C-DBB301DBA957}"/>
+              </a:ext>
+            </a:extLst>
+          </p:cNvPr>
+          <p:cNvSpPr>
+            <a:spLocks noGrp="1"/>
+          </p:cNvSpPr>
+          <p:nvPr>
+            <p:ph type="body" idx="23"/>
+          </p:nvPr>
+        </p:nvSpPr>
+        <p:spPr>
+          <a:xfrm>
+            <a:off x="8610600" y="5377325"/>
+            <a:ext cx="1845511" cy="343061"/>
           </a:xfrm>
         </p:spPr>
         <p:txBody>
           <a:bodyPr/>
           <a:lstStyle/>
           <a:p>
+            <a:r>
+              <a:rPr lang="en-US" dirty="0" err="1">
+                <a:latin typeface="Arial" panose="020B0604020202020204" pitchFamily="34" charset="0"/>
+                <a:cs typeface="Arial" panose="020B0604020202020204" pitchFamily="34" charset="0"/>
+              </a:rPr>
+              <a:t>Etudiant</a:t>
+            </a:r>
             <a:r>
               <a:rPr lang="en-US" dirty="0">
                 <a:latin typeface="Arial" panose="020B0604020202020204" pitchFamily="34" charset="0"/>
                 <a:cs typeface="Arial" panose="020B0604020202020204" pitchFamily="34" charset="0"/>
               </a:rPr>
-              <a:t>VP Marketing</a:t>
+              <a:t> </a:t>
+            </a:r>
+            <a:r>
+              <a:rPr lang="en-US" dirty="0" err="1">
+                <a:latin typeface="Arial" panose="020B0604020202020204" pitchFamily="34" charset="0"/>
+                <a:cs typeface="Arial" panose="020B0604020202020204" pitchFamily="34" charset="0"/>
+              </a:rPr>
+              <a:t>en</a:t>
+            </a:r>
+            <a:r>
+              <a:rPr lang="en-US" dirty="0">
+                <a:latin typeface="Arial" panose="020B0604020202020204" pitchFamily="34" charset="0"/>
+                <a:cs typeface="Arial" panose="020B0604020202020204" pitchFamily="34" charset="0"/>
+              </a:rPr>
+              <a:t> L3</a:t>
             </a:r>
           </a:p>
           <a:p>
@@ -21385,7 +21297,7 @@
                 <a:cs typeface="Arial" panose="020B0604020202020204" pitchFamily="34" charset="0"/>
               </a:rPr>
               <a:pPr/>
-              <a:t>19</a:t>
+              <a:t>18</a:t>
             </a:fld>
             <a:endParaRPr lang="en-US" dirty="0">
               <a:latin typeface="Arial" panose="020B0604020202020204" pitchFamily="34" charset="0"/>
@@ -21396,10 +21308,10 @@
       </p:sp>
       <p:pic>
         <p:nvPicPr>
-          <p:cNvPr id="9" name="Espace réservé pour une image  8">
-            <a:extLst>
-              <a:ext uri="{FF2B5EF4-FFF2-40B4-BE49-F238E27FC236}">
-                <a16:creationId xmlns:a16="http://schemas.microsoft.com/office/drawing/2014/main" id="{97807665-ECFB-E9DC-3B31-A783FDEAE227}"/>
+          <p:cNvPr id="10" name="Picture Placeholder 9">
+            <a:extLst>
+              <a:ext uri="{FF2B5EF4-FFF2-40B4-BE49-F238E27FC236}">
+                <a16:creationId xmlns:a16="http://schemas.microsoft.com/office/drawing/2014/main" id="{1DC1008F-7666-3E23-C6B1-4AC99B955C50}"/>
               </a:ext>
             </a:extLst>
           </p:cNvPr>
@@ -21411,17 +21323,13 @@
           </p:nvPr>
         </p:nvPicPr>
         <p:blipFill>
-          <a:blip r:embed="rId5"/>
-          <a:srcRect b="24936"/>
+          <a:blip r:embed="rId3"/>
+          <a:srcRect t="12143" b="12143"/>
           <a:stretch>
             <a:fillRect/>
           </a:stretch>
         </p:blipFill>
         <p:spPr>
-          <a:xfrm>
-            <a:off x="1487181" y="2886074"/>
-            <a:ext cx="1845511" cy="1845511"/>
-          </a:xfrm>
           <a:prstGeom prst="rect">
             <a:avLst/>
           </a:prstGeom>
@@ -21432,10 +21340,315 @@
           </a:solidFill>
         </p:spPr>
       </p:pic>
+      <p:pic>
+        <p:nvPicPr>
+          <p:cNvPr id="14" name="Picture Placeholder 13">
+            <a:extLst>
+              <a:ext uri="{FF2B5EF4-FFF2-40B4-BE49-F238E27FC236}">
+                <a16:creationId xmlns:a16="http://schemas.microsoft.com/office/drawing/2014/main" id="{810152E0-4F6F-3D05-0BA6-969751797679}"/>
+              </a:ext>
+            </a:extLst>
+          </p:cNvPr>
+          <p:cNvPicPr>
+            <a:picLocks noGrp="1" noChangeAspect="1"/>
+          </p:cNvPicPr>
+          <p:nvPr>
+            <p:ph type="pic" sz="quarter" idx="15"/>
+          </p:nvPr>
+        </p:nvPicPr>
+        <p:blipFill>
+          <a:blip r:embed="rId4"/>
+          <a:srcRect t="16651" b="16651"/>
+          <a:stretch>
+            <a:fillRect/>
+          </a:stretch>
+        </p:blipFill>
+        <p:spPr>
+          <a:xfrm>
+            <a:off x="4974257" y="2886073"/>
+            <a:ext cx="1845511" cy="1845511"/>
+          </a:xfrm>
+          <a:prstGeom prst="rect">
+            <a:avLst/>
+          </a:prstGeom>
+          <a:solidFill>
+            <a:prstClr val="white">
+              <a:lumMod val="95000"/>
+            </a:prstClr>
+          </a:solidFill>
+        </p:spPr>
+      </p:pic>
+      <p:pic>
+        <p:nvPicPr>
+          <p:cNvPr id="18" name="Picture Placeholder 17">
+            <a:extLst>
+              <a:ext uri="{FF2B5EF4-FFF2-40B4-BE49-F238E27FC236}">
+                <a16:creationId xmlns:a16="http://schemas.microsoft.com/office/drawing/2014/main" id="{46FEEC9A-0AE8-F1DB-9C50-EF3860B6A0B0}"/>
+              </a:ext>
+            </a:extLst>
+          </p:cNvPr>
+          <p:cNvPicPr>
+            <a:picLocks noGrp="1" noChangeAspect="1"/>
+          </p:cNvPicPr>
+          <p:nvPr>
+            <p:ph type="pic" sz="quarter" idx="16"/>
+          </p:nvPr>
+        </p:nvPicPr>
+        <p:blipFill>
+          <a:blip r:embed="rId5"/>
+          <a:srcRect t="6914" b="6914"/>
+          <a:stretch>
+            <a:fillRect/>
+          </a:stretch>
+        </p:blipFill>
+        <p:spPr>
+          <a:xfrm>
+            <a:off x="8461333" y="2886074"/>
+            <a:ext cx="1845511" cy="1845511"/>
+          </a:xfrm>
+          <a:prstGeom prst="rect">
+            <a:avLst/>
+          </a:prstGeom>
+          <a:solidFill>
+            <a:prstClr val="white">
+              <a:lumMod val="95000"/>
+            </a:prstClr>
+          </a:solidFill>
+        </p:spPr>
+      </p:pic>
     </p:spTree>
     <p:extLst>
       <p:ext uri="{BB962C8B-B14F-4D97-AF65-F5344CB8AC3E}">
         <p14:creationId xmlns:p14="http://schemas.microsoft.com/office/powerpoint/2010/main" val="1358989745"/>
+      </p:ext>
+    </p:extLst>
+  </p:cSld>
+  <p:clrMapOvr>
+    <a:masterClrMapping/>
+  </p:clrMapOvr>
+</p:sld>
+</file>
+
+<file path=ppt/slides/slide19.xml><?xml version="1.0" encoding="utf-8"?>
+<p:sld xmlns:a="http://schemas.openxmlformats.org/drawingml/2006/main" xmlns:r="http://schemas.openxmlformats.org/officeDocument/2006/relationships" xmlns:p="http://schemas.openxmlformats.org/presentationml/2006/main">
+  <p:cSld>
+    <p:spTree>
+      <p:nvGrpSpPr>
+        <p:cNvPr id="1" name=""/>
+        <p:cNvGrpSpPr/>
+        <p:nvPr/>
+      </p:nvGrpSpPr>
+      <p:grpSpPr>
+        <a:xfrm>
+          <a:off x="0" y="0"/>
+          <a:ext cx="0" cy="0"/>
+          <a:chOff x="0" y="0"/>
+          <a:chExt cx="0" cy="0"/>
+        </a:xfrm>
+      </p:grpSpPr>
+      <p:sp>
+        <p:nvSpPr>
+          <p:cNvPr id="2" name="Title 1">
+            <a:extLst>
+              <a:ext uri="{FF2B5EF4-FFF2-40B4-BE49-F238E27FC236}">
+                <a16:creationId xmlns:a16="http://schemas.microsoft.com/office/drawing/2014/main" id="{BCCAEE93-8585-46D4-A7EC-F184E317CB2E}"/>
+              </a:ext>
+            </a:extLst>
+          </p:cNvPr>
+          <p:cNvSpPr>
+            <a:spLocks noGrp="1"/>
+          </p:cNvSpPr>
+          <p:nvPr>
+            <p:ph type="ctrTitle"/>
+          </p:nvPr>
+        </p:nvSpPr>
+        <p:spPr>
+          <a:xfrm>
+            <a:off x="4267200" y="1615736"/>
+            <a:ext cx="4179570" cy="1524735"/>
+          </a:xfrm>
+        </p:spPr>
+        <p:txBody>
+          <a:bodyPr/>
+          <a:lstStyle/>
+          <a:p>
+            <a:r>
+              <a:rPr lang="en-US" dirty="0"/>
+              <a:t>THANK YOU</a:t>
+            </a:r>
+          </a:p>
+        </p:txBody>
+      </p:sp>
+      <p:sp>
+        <p:nvSpPr>
+          <p:cNvPr id="3" name="Content Placeholder 2">
+            <a:extLst>
+              <a:ext uri="{FF2B5EF4-FFF2-40B4-BE49-F238E27FC236}">
+                <a16:creationId xmlns:a16="http://schemas.microsoft.com/office/drawing/2014/main" id="{24AFFC60-19C3-4901-93F7-7AAF4C09F8C6}"/>
+              </a:ext>
+            </a:extLst>
+          </p:cNvPr>
+          <p:cNvSpPr>
+            <a:spLocks noGrp="1"/>
+          </p:cNvSpPr>
+          <p:nvPr>
+            <p:ph type="subTitle" idx="1"/>
+          </p:nvPr>
+        </p:nvSpPr>
+        <p:spPr>
+          <a:xfrm>
+            <a:off x="4267200" y="3238103"/>
+            <a:ext cx="4179570" cy="2004161"/>
+          </a:xfrm>
+        </p:spPr>
+        <p:txBody>
+          <a:bodyPr>
+            <a:normAutofit/>
+          </a:bodyPr>
+          <a:lstStyle/>
+          <a:p>
+            <a:r>
+              <a:rPr lang="en-US" dirty="0">
+                <a:latin typeface="Arial" panose="020B0604020202020204" pitchFamily="34" charset="0"/>
+                <a:cs typeface="Arial" panose="020B0604020202020204" pitchFamily="34" charset="0"/>
+              </a:rPr>
+              <a:t>Mirjam Nilsson​</a:t>
+            </a:r>
+          </a:p>
+          <a:p>
+            <a:r>
+              <a:rPr lang="en-US" dirty="0">
+                <a:latin typeface="Arial" panose="020B0604020202020204" pitchFamily="34" charset="0"/>
+                <a:cs typeface="Arial" panose="020B0604020202020204" pitchFamily="34" charset="0"/>
+              </a:rPr>
+              <a:t>206-555-0146</a:t>
+            </a:r>
+          </a:p>
+          <a:p>
+            <a:r>
+              <a:rPr lang="en-US" dirty="0">
+                <a:latin typeface="Arial" panose="020B0604020202020204" pitchFamily="34" charset="0"/>
+                <a:cs typeface="Arial" panose="020B0604020202020204" pitchFamily="34" charset="0"/>
+              </a:rPr>
+              <a:t>mirjam@contoso.com</a:t>
+            </a:r>
+          </a:p>
+          <a:p>
+            <a:r>
+              <a:rPr lang="en-US" dirty="0">
+                <a:latin typeface="Arial" panose="020B0604020202020204" pitchFamily="34" charset="0"/>
+                <a:cs typeface="Arial" panose="020B0604020202020204" pitchFamily="34" charset="0"/>
+              </a:rPr>
+              <a:t>www.contoso.com</a:t>
+            </a:r>
+          </a:p>
+        </p:txBody>
+      </p:sp>
+      <p:sp>
+        <p:nvSpPr>
+          <p:cNvPr id="4" name="Date Placeholder 3">
+            <a:extLst>
+              <a:ext uri="{FF2B5EF4-FFF2-40B4-BE49-F238E27FC236}">
+                <a16:creationId xmlns:a16="http://schemas.microsoft.com/office/drawing/2014/main" id="{72DA7980-C870-4C9A-84FA-4120D8AF5DE8}"/>
+              </a:ext>
+            </a:extLst>
+          </p:cNvPr>
+          <p:cNvSpPr>
+            <a:spLocks noGrp="1"/>
+          </p:cNvSpPr>
+          <p:nvPr>
+            <p:ph type="dt" sz="half" idx="10"/>
+          </p:nvPr>
+        </p:nvSpPr>
+        <p:spPr>
+          <a:xfrm>
+            <a:off x="4267200" y="6356350"/>
+            <a:ext cx="1774371" cy="365125"/>
+          </a:xfrm>
+        </p:spPr>
+        <p:txBody>
+          <a:bodyPr/>
+          <a:lstStyle/>
+          <a:p>
+            <a:r>
+              <a:rPr lang="en-US" dirty="0"/>
+              <a:t>20XX</a:t>
+            </a:r>
+          </a:p>
+        </p:txBody>
+      </p:sp>
+      <p:sp>
+        <p:nvSpPr>
+          <p:cNvPr id="5" name="Footer Placeholder 4">
+            <a:extLst>
+              <a:ext uri="{FF2B5EF4-FFF2-40B4-BE49-F238E27FC236}">
+                <a16:creationId xmlns:a16="http://schemas.microsoft.com/office/drawing/2014/main" id="{0DFADE42-1A3F-40C8-A071-E57644F3D843}"/>
+              </a:ext>
+            </a:extLst>
+          </p:cNvPr>
+          <p:cNvSpPr>
+            <a:spLocks noGrp="1"/>
+          </p:cNvSpPr>
+          <p:nvPr>
+            <p:ph type="ftr" sz="quarter" idx="11"/>
+          </p:nvPr>
+        </p:nvSpPr>
+        <p:spPr>
+          <a:xfrm>
+            <a:off x="6479721" y="6356350"/>
+            <a:ext cx="2661557" cy="365125"/>
+          </a:xfrm>
+        </p:spPr>
+        <p:txBody>
+          <a:bodyPr/>
+          <a:lstStyle/>
+          <a:p>
+            <a:r>
+              <a:rPr lang="en-US" dirty="0"/>
+              <a:t>Pitch Deck</a:t>
+            </a:r>
+          </a:p>
+        </p:txBody>
+      </p:sp>
+      <p:sp>
+        <p:nvSpPr>
+          <p:cNvPr id="6" name="Slide Number Placeholder 5">
+            <a:extLst>
+              <a:ext uri="{FF2B5EF4-FFF2-40B4-BE49-F238E27FC236}">
+                <a16:creationId xmlns:a16="http://schemas.microsoft.com/office/drawing/2014/main" id="{5EDCFF82-B70F-4971-9182-7C3AEA3CFD26}"/>
+              </a:ext>
+            </a:extLst>
+          </p:cNvPr>
+          <p:cNvSpPr>
+            <a:spLocks noGrp="1"/>
+          </p:cNvSpPr>
+          <p:nvPr>
+            <p:ph type="sldNum" sz="quarter" idx="12"/>
+          </p:nvPr>
+        </p:nvSpPr>
+        <p:spPr>
+          <a:xfrm>
+            <a:off x="9579428" y="6356350"/>
+            <a:ext cx="1774371" cy="365125"/>
+          </a:xfrm>
+        </p:spPr>
+        <p:txBody>
+          <a:bodyPr/>
+          <a:lstStyle/>
+          <a:p>
+            <a:fld id="{B5CEABB6-07DC-46E8-9B57-56EC44A396E5}" type="slidenum">
+              <a:rPr lang="en-US" smtClean="0"/>
+              <a:pPr/>
+              <a:t>19</a:t>
+            </a:fld>
+            <a:endParaRPr lang="en-US" dirty="0"/>
+          </a:p>
+        </p:txBody>
+      </p:sp>
+    </p:spTree>
+    <p:extLst>
+      <p:ext uri="{BB962C8B-B14F-4D97-AF65-F5344CB8AC3E}">
+        <p14:creationId xmlns:p14="http://schemas.microsoft.com/office/powerpoint/2010/main" val="2436493926"/>
       </p:ext>
     </p:extLst>
   </p:cSld>
@@ -22078,235 +22291,6 @@
     <p:extLst>
       <p:ext uri="{BB962C8B-B14F-4D97-AF65-F5344CB8AC3E}">
         <p14:creationId xmlns:p14="http://schemas.microsoft.com/office/powerpoint/2010/main" val="1411565937"/>
-      </p:ext>
-    </p:extLst>
-  </p:cSld>
-  <p:clrMapOvr>
-    <a:masterClrMapping/>
-  </p:clrMapOvr>
-</p:sld>
-</file>
-
-<file path=ppt/slides/slide20.xml><?xml version="1.0" encoding="utf-8"?>
-<p:sld xmlns:a="http://schemas.openxmlformats.org/drawingml/2006/main" xmlns:r="http://schemas.openxmlformats.org/officeDocument/2006/relationships" xmlns:p="http://schemas.openxmlformats.org/presentationml/2006/main">
-  <p:cSld>
-    <p:spTree>
-      <p:nvGrpSpPr>
-        <p:cNvPr id="1" name=""/>
-        <p:cNvGrpSpPr/>
-        <p:nvPr/>
-      </p:nvGrpSpPr>
-      <p:grpSpPr>
-        <a:xfrm>
-          <a:off x="0" y="0"/>
-          <a:ext cx="0" cy="0"/>
-          <a:chOff x="0" y="0"/>
-          <a:chExt cx="0" cy="0"/>
-        </a:xfrm>
-      </p:grpSpPr>
-      <p:sp>
-        <p:nvSpPr>
-          <p:cNvPr id="2" name="Title 1">
-            <a:extLst>
-              <a:ext uri="{FF2B5EF4-FFF2-40B4-BE49-F238E27FC236}">
-                <a16:creationId xmlns:a16="http://schemas.microsoft.com/office/drawing/2014/main" id="{BCCAEE93-8585-46D4-A7EC-F184E317CB2E}"/>
-              </a:ext>
-            </a:extLst>
-          </p:cNvPr>
-          <p:cNvSpPr>
-            <a:spLocks noGrp="1"/>
-          </p:cNvSpPr>
-          <p:nvPr>
-            <p:ph type="ctrTitle"/>
-          </p:nvPr>
-        </p:nvSpPr>
-        <p:spPr>
-          <a:xfrm>
-            <a:off x="4267200" y="1615736"/>
-            <a:ext cx="4179570" cy="1524735"/>
-          </a:xfrm>
-        </p:spPr>
-        <p:txBody>
-          <a:bodyPr/>
-          <a:lstStyle/>
-          <a:p>
-            <a:r>
-              <a:rPr lang="en-US" dirty="0"/>
-              <a:t>THANK YOU</a:t>
-            </a:r>
-          </a:p>
-        </p:txBody>
-      </p:sp>
-      <p:sp>
-        <p:nvSpPr>
-          <p:cNvPr id="3" name="Content Placeholder 2">
-            <a:extLst>
-              <a:ext uri="{FF2B5EF4-FFF2-40B4-BE49-F238E27FC236}">
-                <a16:creationId xmlns:a16="http://schemas.microsoft.com/office/drawing/2014/main" id="{24AFFC60-19C3-4901-93F7-7AAF4C09F8C6}"/>
-              </a:ext>
-            </a:extLst>
-          </p:cNvPr>
-          <p:cNvSpPr>
-            <a:spLocks noGrp="1"/>
-          </p:cNvSpPr>
-          <p:nvPr>
-            <p:ph type="subTitle" idx="1"/>
-          </p:nvPr>
-        </p:nvSpPr>
-        <p:spPr>
-          <a:xfrm>
-            <a:off x="4267200" y="3238103"/>
-            <a:ext cx="4179570" cy="2004161"/>
-          </a:xfrm>
-        </p:spPr>
-        <p:txBody>
-          <a:bodyPr>
-            <a:normAutofit/>
-          </a:bodyPr>
-          <a:lstStyle/>
-          <a:p>
-            <a:r>
-              <a:rPr lang="en-US" dirty="0">
-                <a:latin typeface="Arial" panose="020B0604020202020204" pitchFamily="34" charset="0"/>
-                <a:cs typeface="Arial" panose="020B0604020202020204" pitchFamily="34" charset="0"/>
-              </a:rPr>
-              <a:t>Mirjam Nilsson​</a:t>
-            </a:r>
-          </a:p>
-          <a:p>
-            <a:r>
-              <a:rPr lang="en-US" dirty="0">
-                <a:latin typeface="Arial" panose="020B0604020202020204" pitchFamily="34" charset="0"/>
-                <a:cs typeface="Arial" panose="020B0604020202020204" pitchFamily="34" charset="0"/>
-              </a:rPr>
-              <a:t>206-555-0146</a:t>
-            </a:r>
-          </a:p>
-          <a:p>
-            <a:r>
-              <a:rPr lang="en-US" dirty="0">
-                <a:latin typeface="Arial" panose="020B0604020202020204" pitchFamily="34" charset="0"/>
-                <a:cs typeface="Arial" panose="020B0604020202020204" pitchFamily="34" charset="0"/>
-              </a:rPr>
-              <a:t>mirjam@contoso.com</a:t>
-            </a:r>
-          </a:p>
-          <a:p>
-            <a:r>
-              <a:rPr lang="en-US" dirty="0">
-                <a:latin typeface="Arial" panose="020B0604020202020204" pitchFamily="34" charset="0"/>
-                <a:cs typeface="Arial" panose="020B0604020202020204" pitchFamily="34" charset="0"/>
-              </a:rPr>
-              <a:t>www.contoso.com</a:t>
-            </a:r>
-          </a:p>
-        </p:txBody>
-      </p:sp>
-      <p:sp>
-        <p:nvSpPr>
-          <p:cNvPr id="4" name="Date Placeholder 3">
-            <a:extLst>
-              <a:ext uri="{FF2B5EF4-FFF2-40B4-BE49-F238E27FC236}">
-                <a16:creationId xmlns:a16="http://schemas.microsoft.com/office/drawing/2014/main" id="{72DA7980-C870-4C9A-84FA-4120D8AF5DE8}"/>
-              </a:ext>
-            </a:extLst>
-          </p:cNvPr>
-          <p:cNvSpPr>
-            <a:spLocks noGrp="1"/>
-          </p:cNvSpPr>
-          <p:nvPr>
-            <p:ph type="dt" sz="half" idx="10"/>
-          </p:nvPr>
-        </p:nvSpPr>
-        <p:spPr>
-          <a:xfrm>
-            <a:off x="4267200" y="6356350"/>
-            <a:ext cx="1774371" cy="365125"/>
-          </a:xfrm>
-        </p:spPr>
-        <p:txBody>
-          <a:bodyPr/>
-          <a:lstStyle/>
-          <a:p>
-            <a:r>
-              <a:rPr lang="en-US" dirty="0"/>
-              <a:t>20XX</a:t>
-            </a:r>
-          </a:p>
-        </p:txBody>
-      </p:sp>
-      <p:sp>
-        <p:nvSpPr>
-          <p:cNvPr id="5" name="Footer Placeholder 4">
-            <a:extLst>
-              <a:ext uri="{FF2B5EF4-FFF2-40B4-BE49-F238E27FC236}">
-                <a16:creationId xmlns:a16="http://schemas.microsoft.com/office/drawing/2014/main" id="{0DFADE42-1A3F-40C8-A071-E57644F3D843}"/>
-              </a:ext>
-            </a:extLst>
-          </p:cNvPr>
-          <p:cNvSpPr>
-            <a:spLocks noGrp="1"/>
-          </p:cNvSpPr>
-          <p:nvPr>
-            <p:ph type="ftr" sz="quarter" idx="11"/>
-          </p:nvPr>
-        </p:nvSpPr>
-        <p:spPr>
-          <a:xfrm>
-            <a:off x="6479721" y="6356350"/>
-            <a:ext cx="2661557" cy="365125"/>
-          </a:xfrm>
-        </p:spPr>
-        <p:txBody>
-          <a:bodyPr/>
-          <a:lstStyle/>
-          <a:p>
-            <a:r>
-              <a:rPr lang="en-US" dirty="0"/>
-              <a:t>Pitch Deck</a:t>
-            </a:r>
-          </a:p>
-        </p:txBody>
-      </p:sp>
-      <p:sp>
-        <p:nvSpPr>
-          <p:cNvPr id="6" name="Slide Number Placeholder 5">
-            <a:extLst>
-              <a:ext uri="{FF2B5EF4-FFF2-40B4-BE49-F238E27FC236}">
-                <a16:creationId xmlns:a16="http://schemas.microsoft.com/office/drawing/2014/main" id="{5EDCFF82-B70F-4971-9182-7C3AEA3CFD26}"/>
-              </a:ext>
-            </a:extLst>
-          </p:cNvPr>
-          <p:cNvSpPr>
-            <a:spLocks noGrp="1"/>
-          </p:cNvSpPr>
-          <p:nvPr>
-            <p:ph type="sldNum" sz="quarter" idx="12"/>
-          </p:nvPr>
-        </p:nvSpPr>
-        <p:spPr>
-          <a:xfrm>
-            <a:off x="9579428" y="6356350"/>
-            <a:ext cx="1774371" cy="365125"/>
-          </a:xfrm>
-        </p:spPr>
-        <p:txBody>
-          <a:bodyPr/>
-          <a:lstStyle/>
-          <a:p>
-            <a:fld id="{B5CEABB6-07DC-46E8-9B57-56EC44A396E5}" type="slidenum">
-              <a:rPr lang="en-US" smtClean="0"/>
-              <a:pPr/>
-              <a:t>20</a:t>
-            </a:fld>
-            <a:endParaRPr lang="en-US" dirty="0"/>
-          </a:p>
-        </p:txBody>
-      </p:sp>
-    </p:spTree>
-    <p:extLst>
-      <p:ext uri="{BB962C8B-B14F-4D97-AF65-F5344CB8AC3E}">
-        <p14:creationId xmlns:p14="http://schemas.microsoft.com/office/powerpoint/2010/main" val="2436493926"/>
       </p:ext>
     </p:extLst>
   </p:cSld>
@@ -25076,15 +25060,6 @@
 </file>
 
 <file path=customXml/item1.xml><?xml version="1.0" encoding="utf-8"?>
-<?mso-contentType ?>
-<FormTemplates xmlns="http://schemas.microsoft.com/sharepoint/v3/contenttype/forms">
-  <Display>DocumentLibraryForm</Display>
-  <Edit>DocumentLibraryForm</Edit>
-  <New>DocumentLibraryForm</New>
-</FormTemplates>
-</file>
-
-<file path=customXml/item2.xml><?xml version="1.0" encoding="utf-8"?>
 <p:properties xmlns:p="http://schemas.microsoft.com/office/2006/metadata/properties" xmlns:xsi="http://www.w3.org/2001/XMLSchema-instance" xmlns:pc="http://schemas.microsoft.com/office/infopath/2007/PartnerControls">
   <documentManagement>
     <_ip_UnifiedCompliancePolicyUIAction xmlns="http://schemas.microsoft.com/sharepoint/v3" xsi:nil="true"/>
@@ -25102,6 +25077,15 @@
     <MediaServiceKeyPoints xmlns="71af3243-3dd4-4a8d-8c0d-dd76da1f02a5" xsi:nil="true"/>
   </documentManagement>
 </p:properties>
+</file>
+
+<file path=customXml/item2.xml><?xml version="1.0" encoding="utf-8"?>
+<?mso-contentType ?>
+<FormTemplates xmlns="http://schemas.microsoft.com/sharepoint/v3/contenttype/forms">
+  <Display>DocumentLibraryForm</Display>
+  <Edit>DocumentLibraryForm</Edit>
+  <New>DocumentLibraryForm</New>
+</FormTemplates>
 </file>
 
 <file path=customXml/item3.xml><?xml version="1.0" encoding="utf-8"?>
@@ -25411,14 +25395,6 @@
 </file>
 
 <file path=customXml/itemProps1.xml><?xml version="1.0" encoding="utf-8"?>
-<ds:datastoreItem xmlns:ds="http://schemas.openxmlformats.org/officeDocument/2006/customXml" ds:itemID="{6966C46A-DC57-4209-80CD-9FE6C93151FF}">
-  <ds:schemaRefs>
-    <ds:schemaRef ds:uri="http://schemas.microsoft.com/sharepoint/v3/contenttype/forms"/>
-  </ds:schemaRefs>
-</ds:datastoreItem>
-</file>
-
-<file path=customXml/itemProps2.xml><?xml version="1.0" encoding="utf-8"?>
 <ds:datastoreItem xmlns:ds="http://schemas.openxmlformats.org/officeDocument/2006/customXml" ds:itemID="{BEFFFA3F-0FB5-4ED3-8906-A15B16577F44}">
   <ds:schemaRefs>
     <ds:schemaRef ds:uri="http://schemas.microsoft.com/office/2006/metadata/properties"/>
@@ -25426,6 +25402,14 @@
     <ds:schemaRef ds:uri="http://schemas.microsoft.com/sharepoint/v3"/>
     <ds:schemaRef ds:uri="71af3243-3dd4-4a8d-8c0d-dd76da1f02a5"/>
     <ds:schemaRef ds:uri="230e9df3-be65-4c73-a93b-d1236ebd677e"/>
+  </ds:schemaRefs>
+</ds:datastoreItem>
+</file>
+
+<file path=customXml/itemProps2.xml><?xml version="1.0" encoding="utf-8"?>
+<ds:datastoreItem xmlns:ds="http://schemas.openxmlformats.org/officeDocument/2006/customXml" ds:itemID="{6966C46A-DC57-4209-80CD-9FE6C93151FF}">
+  <ds:schemaRefs>
+    <ds:schemaRef ds:uri="http://schemas.microsoft.com/sharepoint/v3/contenttype/forms"/>
   </ds:schemaRefs>
 </ds:datastoreItem>
 </file>
